--- a/HER05/01 - Mathematical Modeling/Sketch/Forces and Moments Sketch.pptx
+++ b/HER05/01 - Mathematical Modeling/Sketch/Forces and Moments Sketch.pptx
@@ -5,13 +5,14 @@
     <p:sldMasterId id="2147483672" r:id="rId1"/>
   </p:sldMasterIdLst>
   <p:notesMasterIdLst>
-    <p:notesMasterId r:id="rId6"/>
+    <p:notesMasterId r:id="rId7"/>
   </p:notesMasterIdLst>
   <p:sldIdLst>
     <p:sldId id="258" r:id="rId2"/>
     <p:sldId id="259" r:id="rId3"/>
     <p:sldId id="256" r:id="rId4"/>
     <p:sldId id="257" r:id="rId5"/>
+    <p:sldId id="260" r:id="rId6"/>
   </p:sldIdLst>
   <p:sldSz cx="12192000" cy="6858000"/>
   <p:notesSz cx="7104063" cy="10234613"/>
@@ -110,13 +111,18 @@
       </a:defRPr>
     </a:lvl9pPr>
   </p:defaultTextStyle>
+  <p:extLst>
+    <p:ext uri="{EFAFB233-063F-42B5-8137-9DF3F51BA10A}">
+      <p15:sldGuideLst xmlns:p15="http://schemas.microsoft.com/office/powerpoint/2012/main"/>
+    </p:ext>
+  </p:extLst>
 </p:presentation>
 </file>
 
 <file path=ppt/revisionInfo.xml><?xml version="1.0" encoding="utf-8"?>
 <p1510:revInfo xmlns:a="http://schemas.openxmlformats.org/drawingml/2006/main" xmlns:r="http://schemas.openxmlformats.org/officeDocument/2006/relationships" xmlns:p1510="http://schemas.microsoft.com/office/powerpoint/2015/10/main">
   <p1510:revLst>
-    <p1510:client id="{CDC5B0EF-6BEB-4658-A9FF-CB66F6FA6C1E}" v="306" dt="2025-05-23T00:31:53.073"/>
+    <p1510:client id="{CDC5B0EF-6BEB-4658-A9FF-CB66F6FA6C1E}" v="383" dt="2025-05-23T20:13:16.841"/>
   </p1510:revLst>
 </p1510:revInfo>
 </file>
@@ -126,12 +132,12 @@
   <pc:docChgLst>
     <pc:chgData name="Li, Hanchen F" userId="3aee791e-6a2d-4da7-a77b-fbdf7bf15886" providerId="ADAL" clId="{CDC5B0EF-6BEB-4658-A9FF-CB66F6FA6C1E}"/>
     <pc:docChg chg="undo redo custSel addSld delSld modSld modMainMaster modNotesMaster">
-      <pc:chgData name="Li, Hanchen F" userId="3aee791e-6a2d-4da7-a77b-fbdf7bf15886" providerId="ADAL" clId="{CDC5B0EF-6BEB-4658-A9FF-CB66F6FA6C1E}" dt="2025-05-23T00:32:18.153" v="6669" actId="1076"/>
+      <pc:chgData name="Li, Hanchen F" userId="3aee791e-6a2d-4da7-a77b-fbdf7bf15886" providerId="ADAL" clId="{CDC5B0EF-6BEB-4658-A9FF-CB66F6FA6C1E}" dt="2025-05-23T20:13:53.563" v="8153" actId="1076"/>
       <pc:docMkLst>
         <pc:docMk/>
       </pc:docMkLst>
       <pc:sldChg chg="addSp delSp modSp new mod">
-        <pc:chgData name="Li, Hanchen F" userId="3aee791e-6a2d-4da7-a77b-fbdf7bf15886" providerId="ADAL" clId="{CDC5B0EF-6BEB-4658-A9FF-CB66F6FA6C1E}" dt="2025-05-23T00:18:34.806" v="6238" actId="1076"/>
+        <pc:chgData name="Li, Hanchen F" userId="3aee791e-6a2d-4da7-a77b-fbdf7bf15886" providerId="ADAL" clId="{CDC5B0EF-6BEB-4658-A9FF-CB66F6FA6C1E}" dt="2025-05-23T16:55:18.405" v="7846" actId="207"/>
         <pc:sldMkLst>
           <pc:docMk/>
           <pc:sldMk cId="2152317508" sldId="256"/>
@@ -144,6 +150,14 @@
             <ac:spMk id="2" creationId="{5E1BDCFA-D225-49BA-B506-002C6E8C0841}"/>
           </ac:spMkLst>
         </pc:spChg>
+        <pc:spChg chg="add mod">
+          <ac:chgData name="Li, Hanchen F" userId="3aee791e-6a2d-4da7-a77b-fbdf7bf15886" providerId="ADAL" clId="{CDC5B0EF-6BEB-4658-A9FF-CB66F6FA6C1E}" dt="2025-05-23T14:36:15.654" v="6688" actId="1076"/>
+          <ac:spMkLst>
+            <pc:docMk/>
+            <pc:sldMk cId="2152317508" sldId="256"/>
+            <ac:spMk id="2" creationId="{B59E7ED7-701A-8C03-5826-48621390B84B}"/>
+          </ac:spMkLst>
+        </pc:spChg>
         <pc:spChg chg="del">
           <ac:chgData name="Li, Hanchen F" userId="3aee791e-6a2d-4da7-a77b-fbdf7bf15886" providerId="ADAL" clId="{CDC5B0EF-6BEB-4658-A9FF-CB66F6FA6C1E}" dt="2025-05-22T21:35:52.793" v="2" actId="478"/>
           <ac:spMkLst>
@@ -152,6 +166,30 @@
             <ac:spMk id="3" creationId="{162F48E0-E4FB-0EB9-A006-E867A159080D}"/>
           </ac:spMkLst>
         </pc:spChg>
+        <pc:spChg chg="add mod">
+          <ac:chgData name="Li, Hanchen F" userId="3aee791e-6a2d-4da7-a77b-fbdf7bf15886" providerId="ADAL" clId="{CDC5B0EF-6BEB-4658-A9FF-CB66F6FA6C1E}" dt="2025-05-23T14:36:10.232" v="6686" actId="1076"/>
+          <ac:spMkLst>
+            <pc:docMk/>
+            <pc:sldMk cId="2152317508" sldId="256"/>
+            <ac:spMk id="3" creationId="{D865C23B-9E31-C867-3FF2-4112EEB099C5}"/>
+          </ac:spMkLst>
+        </pc:spChg>
+        <pc:spChg chg="add mod">
+          <ac:chgData name="Li, Hanchen F" userId="3aee791e-6a2d-4da7-a77b-fbdf7bf15886" providerId="ADAL" clId="{CDC5B0EF-6BEB-4658-A9FF-CB66F6FA6C1E}" dt="2025-05-23T14:36:13.833" v="6687" actId="1076"/>
+          <ac:spMkLst>
+            <pc:docMk/>
+            <pc:sldMk cId="2152317508" sldId="256"/>
+            <ac:spMk id="4" creationId="{A394A4D0-6823-8424-0281-F8AC5F6CB0BD}"/>
+          </ac:spMkLst>
+        </pc:spChg>
+        <pc:spChg chg="add mod">
+          <ac:chgData name="Li, Hanchen F" userId="3aee791e-6a2d-4da7-a77b-fbdf7bf15886" providerId="ADAL" clId="{CDC5B0EF-6BEB-4658-A9FF-CB66F6FA6C1E}" dt="2025-05-23T14:36:17.401" v="6689" actId="1076"/>
+          <ac:spMkLst>
+            <pc:docMk/>
+            <pc:sldMk cId="2152317508" sldId="256"/>
+            <ac:spMk id="5" creationId="{5DBDA668-D12D-B5BA-A487-BD758F21D7F0}"/>
+          </ac:spMkLst>
+        </pc:spChg>
         <pc:spChg chg="add mod topLvl">
           <ac:chgData name="Li, Hanchen F" userId="3aee791e-6a2d-4da7-a77b-fbdf7bf15886" providerId="ADAL" clId="{CDC5B0EF-6BEB-4658-A9FF-CB66F6FA6C1E}" dt="2025-05-22T23:17:33.494" v="3248" actId="14826"/>
           <ac:spMkLst>
@@ -353,7 +391,7 @@
           </ac:spMkLst>
         </pc:spChg>
         <pc:spChg chg="add mod ord">
-          <ac:chgData name="Li, Hanchen F" userId="3aee791e-6a2d-4da7-a77b-fbdf7bf15886" providerId="ADAL" clId="{CDC5B0EF-6BEB-4658-A9FF-CB66F6FA6C1E}" dt="2025-05-22T23:26:55.410" v="3424" actId="1076"/>
+          <ac:chgData name="Li, Hanchen F" userId="3aee791e-6a2d-4da7-a77b-fbdf7bf15886" providerId="ADAL" clId="{CDC5B0EF-6BEB-4658-A9FF-CB66F6FA6C1E}" dt="2025-05-23T16:54:39.979" v="7719" actId="1076"/>
           <ac:spMkLst>
             <pc:docMk/>
             <pc:sldMk cId="2152317508" sldId="256"/>
@@ -361,7 +399,7 @@
           </ac:spMkLst>
         </pc:spChg>
         <pc:spChg chg="add del mod ord">
-          <ac:chgData name="Li, Hanchen F" userId="3aee791e-6a2d-4da7-a77b-fbdf7bf15886" providerId="ADAL" clId="{CDC5B0EF-6BEB-4658-A9FF-CB66F6FA6C1E}" dt="2025-05-22T23:49:05.864" v="5004" actId="1076"/>
+          <ac:chgData name="Li, Hanchen F" userId="3aee791e-6a2d-4da7-a77b-fbdf7bf15886" providerId="ADAL" clId="{CDC5B0EF-6BEB-4658-A9FF-CB66F6FA6C1E}" dt="2025-05-23T16:54:20.998" v="7715" actId="1076"/>
           <ac:spMkLst>
             <pc:docMk/>
             <pc:sldMk cId="2152317508" sldId="256"/>
@@ -1153,7 +1191,7 @@
           </ac:spMkLst>
         </pc:spChg>
         <pc:spChg chg="add mod">
-          <ac:chgData name="Li, Hanchen F" userId="3aee791e-6a2d-4da7-a77b-fbdf7bf15886" providerId="ADAL" clId="{CDC5B0EF-6BEB-4658-A9FF-CB66F6FA6C1E}" dt="2025-05-23T00:18:31.963" v="6237" actId="1076"/>
+          <ac:chgData name="Li, Hanchen F" userId="3aee791e-6a2d-4da7-a77b-fbdf7bf15886" providerId="ADAL" clId="{CDC5B0EF-6BEB-4658-A9FF-CB66F6FA6C1E}" dt="2025-05-23T16:54:39.979" v="7719" actId="1076"/>
           <ac:spMkLst>
             <pc:docMk/>
             <pc:sldMk cId="2152317508" sldId="256"/>
@@ -1169,7 +1207,7 @@
           </ac:spMkLst>
         </pc:spChg>
         <pc:spChg chg="add mod">
-          <ac:chgData name="Li, Hanchen F" userId="3aee791e-6a2d-4da7-a77b-fbdf7bf15886" providerId="ADAL" clId="{CDC5B0EF-6BEB-4658-A9FF-CB66F6FA6C1E}" dt="2025-05-23T00:18:30.412" v="6236" actId="1076"/>
+          <ac:chgData name="Li, Hanchen F" userId="3aee791e-6a2d-4da7-a77b-fbdf7bf15886" providerId="ADAL" clId="{CDC5B0EF-6BEB-4658-A9FF-CB66F6FA6C1E}" dt="2025-05-23T16:54:39.979" v="7719" actId="1076"/>
           <ac:spMkLst>
             <pc:docMk/>
             <pc:sldMk cId="2152317508" sldId="256"/>
@@ -1185,7 +1223,7 @@
           </ac:spMkLst>
         </pc:spChg>
         <pc:spChg chg="add mod">
-          <ac:chgData name="Li, Hanchen F" userId="3aee791e-6a2d-4da7-a77b-fbdf7bf15886" providerId="ADAL" clId="{CDC5B0EF-6BEB-4658-A9FF-CB66F6FA6C1E}" dt="2025-05-23T00:18:23.692" v="6233" actId="1076"/>
+          <ac:chgData name="Li, Hanchen F" userId="3aee791e-6a2d-4da7-a77b-fbdf7bf15886" providerId="ADAL" clId="{CDC5B0EF-6BEB-4658-A9FF-CB66F6FA6C1E}" dt="2025-05-23T16:54:39.979" v="7719" actId="1076"/>
           <ac:spMkLst>
             <pc:docMk/>
             <pc:sldMk cId="2152317508" sldId="256"/>
@@ -1193,7 +1231,7 @@
           </ac:spMkLst>
         </pc:spChg>
         <pc:spChg chg="add mod">
-          <ac:chgData name="Li, Hanchen F" userId="3aee791e-6a2d-4da7-a77b-fbdf7bf15886" providerId="ADAL" clId="{CDC5B0EF-6BEB-4658-A9FF-CB66F6FA6C1E}" dt="2025-05-23T00:18:26.708" v="6234" actId="1076"/>
+          <ac:chgData name="Li, Hanchen F" userId="3aee791e-6a2d-4da7-a77b-fbdf7bf15886" providerId="ADAL" clId="{CDC5B0EF-6BEB-4658-A9FF-CB66F6FA6C1E}" dt="2025-05-23T16:54:39.979" v="7719" actId="1076"/>
           <ac:spMkLst>
             <pc:docMk/>
             <pc:sldMk cId="2152317508" sldId="256"/>
@@ -1201,7 +1239,7 @@
           </ac:spMkLst>
         </pc:spChg>
         <pc:spChg chg="add mod">
-          <ac:chgData name="Li, Hanchen F" userId="3aee791e-6a2d-4da7-a77b-fbdf7bf15886" providerId="ADAL" clId="{CDC5B0EF-6BEB-4658-A9FF-CB66F6FA6C1E}" dt="2025-05-23T00:18:29.007" v="6235" actId="1076"/>
+          <ac:chgData name="Li, Hanchen F" userId="3aee791e-6a2d-4da7-a77b-fbdf7bf15886" providerId="ADAL" clId="{CDC5B0EF-6BEB-4658-A9FF-CB66F6FA6C1E}" dt="2025-05-23T16:54:39.979" v="7719" actId="1076"/>
           <ac:spMkLst>
             <pc:docMk/>
             <pc:sldMk cId="2152317508" sldId="256"/>
@@ -1217,7 +1255,7 @@
           </ac:spMkLst>
         </pc:spChg>
         <pc:spChg chg="add mod">
-          <ac:chgData name="Li, Hanchen F" userId="3aee791e-6a2d-4da7-a77b-fbdf7bf15886" providerId="ADAL" clId="{CDC5B0EF-6BEB-4658-A9FF-CB66F6FA6C1E}" dt="2025-05-23T00:18:34.806" v="6238" actId="1076"/>
+          <ac:chgData name="Li, Hanchen F" userId="3aee791e-6a2d-4da7-a77b-fbdf7bf15886" providerId="ADAL" clId="{CDC5B0EF-6BEB-4658-A9FF-CB66F6FA6C1E}" dt="2025-05-23T16:54:39.979" v="7719" actId="1076"/>
           <ac:spMkLst>
             <pc:docMk/>
             <pc:sldMk cId="2152317508" sldId="256"/>
@@ -1225,7 +1263,7 @@
           </ac:spMkLst>
         </pc:spChg>
         <pc:spChg chg="add mod">
-          <ac:chgData name="Li, Hanchen F" userId="3aee791e-6a2d-4da7-a77b-fbdf7bf15886" providerId="ADAL" clId="{CDC5B0EF-6BEB-4658-A9FF-CB66F6FA6C1E}" dt="2025-05-23T00:18:04.918" v="6226" actId="1076"/>
+          <ac:chgData name="Li, Hanchen F" userId="3aee791e-6a2d-4da7-a77b-fbdf7bf15886" providerId="ADAL" clId="{CDC5B0EF-6BEB-4658-A9FF-CB66F6FA6C1E}" dt="2025-05-23T16:54:20.998" v="7715" actId="1076"/>
           <ac:spMkLst>
             <pc:docMk/>
             <pc:sldMk cId="2152317508" sldId="256"/>
@@ -1233,7 +1271,7 @@
           </ac:spMkLst>
         </pc:spChg>
         <pc:spChg chg="add mod">
-          <ac:chgData name="Li, Hanchen F" userId="3aee791e-6a2d-4da7-a77b-fbdf7bf15886" providerId="ADAL" clId="{CDC5B0EF-6BEB-4658-A9FF-CB66F6FA6C1E}" dt="2025-05-23T00:18:16.740" v="6231" actId="1076"/>
+          <ac:chgData name="Li, Hanchen F" userId="3aee791e-6a2d-4da7-a77b-fbdf7bf15886" providerId="ADAL" clId="{CDC5B0EF-6BEB-4658-A9FF-CB66F6FA6C1E}" dt="2025-05-23T16:54:20.998" v="7715" actId="1076"/>
           <ac:spMkLst>
             <pc:docMk/>
             <pc:sldMk cId="2152317508" sldId="256"/>
@@ -1241,7 +1279,7 @@
           </ac:spMkLst>
         </pc:spChg>
         <pc:spChg chg="add mod">
-          <ac:chgData name="Li, Hanchen F" userId="3aee791e-6a2d-4da7-a77b-fbdf7bf15886" providerId="ADAL" clId="{CDC5B0EF-6BEB-4658-A9FF-CB66F6FA6C1E}" dt="2025-05-23T00:18:11.732" v="6229" actId="1076"/>
+          <ac:chgData name="Li, Hanchen F" userId="3aee791e-6a2d-4da7-a77b-fbdf7bf15886" providerId="ADAL" clId="{CDC5B0EF-6BEB-4658-A9FF-CB66F6FA6C1E}" dt="2025-05-23T16:54:20.998" v="7715" actId="1076"/>
           <ac:spMkLst>
             <pc:docMk/>
             <pc:sldMk cId="2152317508" sldId="256"/>
@@ -1249,7 +1287,7 @@
           </ac:spMkLst>
         </pc:spChg>
         <pc:spChg chg="add mod">
-          <ac:chgData name="Li, Hanchen F" userId="3aee791e-6a2d-4da7-a77b-fbdf7bf15886" providerId="ADAL" clId="{CDC5B0EF-6BEB-4658-A9FF-CB66F6FA6C1E}" dt="2025-05-23T00:18:13.541" v="6230" actId="1076"/>
+          <ac:chgData name="Li, Hanchen F" userId="3aee791e-6a2d-4da7-a77b-fbdf7bf15886" providerId="ADAL" clId="{CDC5B0EF-6BEB-4658-A9FF-CB66F6FA6C1E}" dt="2025-05-23T16:54:20.998" v="7715" actId="1076"/>
           <ac:spMkLst>
             <pc:docMk/>
             <pc:sldMk cId="2152317508" sldId="256"/>
@@ -1257,7 +1295,7 @@
           </ac:spMkLst>
         </pc:spChg>
         <pc:spChg chg="add mod">
-          <ac:chgData name="Li, Hanchen F" userId="3aee791e-6a2d-4da7-a77b-fbdf7bf15886" providerId="ADAL" clId="{CDC5B0EF-6BEB-4658-A9FF-CB66F6FA6C1E}" dt="2025-05-23T00:18:20.262" v="6232" actId="1076"/>
+          <ac:chgData name="Li, Hanchen F" userId="3aee791e-6a2d-4da7-a77b-fbdf7bf15886" providerId="ADAL" clId="{CDC5B0EF-6BEB-4658-A9FF-CB66F6FA6C1E}" dt="2025-05-23T16:54:20.998" v="7715" actId="1076"/>
           <ac:spMkLst>
             <pc:docMk/>
             <pc:sldMk cId="2152317508" sldId="256"/>
@@ -1265,7 +1303,7 @@
           </ac:spMkLst>
         </pc:spChg>
         <pc:spChg chg="add mod">
-          <ac:chgData name="Li, Hanchen F" userId="3aee791e-6a2d-4da7-a77b-fbdf7bf15886" providerId="ADAL" clId="{CDC5B0EF-6BEB-4658-A9FF-CB66F6FA6C1E}" dt="2025-05-23T00:18:03.070" v="6225" actId="1076"/>
+          <ac:chgData name="Li, Hanchen F" userId="3aee791e-6a2d-4da7-a77b-fbdf7bf15886" providerId="ADAL" clId="{CDC5B0EF-6BEB-4658-A9FF-CB66F6FA6C1E}" dt="2025-05-23T16:54:20.998" v="7715" actId="1076"/>
           <ac:spMkLst>
             <pc:docMk/>
             <pc:sldMk cId="2152317508" sldId="256"/>
@@ -1753,7 +1791,7 @@
           </ac:spMkLst>
         </pc:spChg>
         <pc:spChg chg="add mod">
-          <ac:chgData name="Li, Hanchen F" userId="3aee791e-6a2d-4da7-a77b-fbdf7bf15886" providerId="ADAL" clId="{CDC5B0EF-6BEB-4658-A9FF-CB66F6FA6C1E}" dt="2025-05-22T23:50:15.654" v="5197" actId="207"/>
+          <ac:chgData name="Li, Hanchen F" userId="3aee791e-6a2d-4da7-a77b-fbdf7bf15886" providerId="ADAL" clId="{CDC5B0EF-6BEB-4658-A9FF-CB66F6FA6C1E}" dt="2025-05-23T16:55:18.405" v="7846" actId="207"/>
           <ac:spMkLst>
             <pc:docMk/>
             <pc:sldMk cId="2152317508" sldId="256"/>
@@ -1905,7 +1943,7 @@
           </ac:grpSpMkLst>
         </pc:grpChg>
         <pc:grpChg chg="add mod">
-          <ac:chgData name="Li, Hanchen F" userId="3aee791e-6a2d-4da7-a77b-fbdf7bf15886" providerId="ADAL" clId="{CDC5B0EF-6BEB-4658-A9FF-CB66F6FA6C1E}" dt="2025-05-22T23:49:05.864" v="5004" actId="1076"/>
+          <ac:chgData name="Li, Hanchen F" userId="3aee791e-6a2d-4da7-a77b-fbdf7bf15886" providerId="ADAL" clId="{CDC5B0EF-6BEB-4658-A9FF-CB66F6FA6C1E}" dt="2025-05-23T16:54:20.998" v="7715" actId="1076"/>
           <ac:grpSpMkLst>
             <pc:docMk/>
             <pc:sldMk cId="2152317508" sldId="256"/>
@@ -1969,7 +2007,7 @@
           </ac:grpSpMkLst>
         </pc:grpChg>
         <pc:grpChg chg="add del mod ord">
-          <ac:chgData name="Li, Hanchen F" userId="3aee791e-6a2d-4da7-a77b-fbdf7bf15886" providerId="ADAL" clId="{CDC5B0EF-6BEB-4658-A9FF-CB66F6FA6C1E}" dt="2025-05-22T23:47:29.379" v="4884" actId="1076"/>
+          <ac:chgData name="Li, Hanchen F" userId="3aee791e-6a2d-4da7-a77b-fbdf7bf15886" providerId="ADAL" clId="{CDC5B0EF-6BEB-4658-A9FF-CB66F6FA6C1E}" dt="2025-05-23T16:54:24.837" v="7717" actId="1076"/>
           <ac:grpSpMkLst>
             <pc:docMk/>
             <pc:sldMk cId="2152317508" sldId="256"/>
@@ -1977,7 +2015,7 @@
           </ac:grpSpMkLst>
         </pc:grpChg>
         <pc:grpChg chg="add del mod">
-          <ac:chgData name="Li, Hanchen F" userId="3aee791e-6a2d-4da7-a77b-fbdf7bf15886" providerId="ADAL" clId="{CDC5B0EF-6BEB-4658-A9FF-CB66F6FA6C1E}" dt="2025-05-22T23:26:55.410" v="3424" actId="1076"/>
+          <ac:chgData name="Li, Hanchen F" userId="3aee791e-6a2d-4da7-a77b-fbdf7bf15886" providerId="ADAL" clId="{CDC5B0EF-6BEB-4658-A9FF-CB66F6FA6C1E}" dt="2025-05-23T16:54:39.979" v="7719" actId="1076"/>
           <ac:grpSpMkLst>
             <pc:docMk/>
             <pc:sldMk cId="2152317508" sldId="256"/>
@@ -2721,7 +2759,7 @@
           </ac:cxnSpMkLst>
         </pc:cxnChg>
         <pc:cxnChg chg="add del mod">
-          <ac:chgData name="Li, Hanchen F" userId="3aee791e-6a2d-4da7-a77b-fbdf7bf15886" providerId="ADAL" clId="{CDC5B0EF-6BEB-4658-A9FF-CB66F6FA6C1E}" dt="2025-05-22T23:36:40.480" v="3684" actId="478"/>
+          <ac:chgData name="Li, Hanchen F" userId="3aee791e-6a2d-4da7-a77b-fbdf7bf15886" providerId="ADAL" clId="{CDC5B0EF-6BEB-4658-A9FF-CB66F6FA6C1E}" dt="2025-05-23T14:35:38.708" v="6677" actId="1076"/>
           <ac:cxnSpMkLst>
             <pc:docMk/>
             <pc:sldMk cId="2152317508" sldId="256"/>
@@ -2729,7 +2767,7 @@
           </ac:cxnSpMkLst>
         </pc:cxnChg>
         <pc:cxnChg chg="add del mod">
-          <ac:chgData name="Li, Hanchen F" userId="3aee791e-6a2d-4da7-a77b-fbdf7bf15886" providerId="ADAL" clId="{CDC5B0EF-6BEB-4658-A9FF-CB66F6FA6C1E}" dt="2025-05-22T23:36:40.747" v="3685" actId="478"/>
+          <ac:chgData name="Li, Hanchen F" userId="3aee791e-6a2d-4da7-a77b-fbdf7bf15886" providerId="ADAL" clId="{CDC5B0EF-6BEB-4658-A9FF-CB66F6FA6C1E}" dt="2025-05-23T14:35:33.985" v="6676" actId="1076"/>
           <ac:cxnSpMkLst>
             <pc:docMk/>
             <pc:sldMk cId="2152317508" sldId="256"/>
@@ -3057,7 +3095,7 @@
           </ac:cxnSpMkLst>
         </pc:cxnChg>
         <pc:cxnChg chg="add mod ord">
-          <ac:chgData name="Li, Hanchen F" userId="3aee791e-6a2d-4da7-a77b-fbdf7bf15886" providerId="ADAL" clId="{CDC5B0EF-6BEB-4658-A9FF-CB66F6FA6C1E}" dt="2025-05-22T23:26:55.410" v="3424" actId="1076"/>
+          <ac:chgData name="Li, Hanchen F" userId="3aee791e-6a2d-4da7-a77b-fbdf7bf15886" providerId="ADAL" clId="{CDC5B0EF-6BEB-4658-A9FF-CB66F6FA6C1E}" dt="2025-05-23T16:54:39.979" v="7719" actId="1076"/>
           <ac:cxnSpMkLst>
             <pc:docMk/>
             <pc:sldMk cId="2152317508" sldId="256"/>
@@ -3065,7 +3103,7 @@
           </ac:cxnSpMkLst>
         </pc:cxnChg>
         <pc:cxnChg chg="add mod ord">
-          <ac:chgData name="Li, Hanchen F" userId="3aee791e-6a2d-4da7-a77b-fbdf7bf15886" providerId="ADAL" clId="{CDC5B0EF-6BEB-4658-A9FF-CB66F6FA6C1E}" dt="2025-05-22T23:26:55.410" v="3424" actId="1076"/>
+          <ac:chgData name="Li, Hanchen F" userId="3aee791e-6a2d-4da7-a77b-fbdf7bf15886" providerId="ADAL" clId="{CDC5B0EF-6BEB-4658-A9FF-CB66F6FA6C1E}" dt="2025-05-23T16:54:39.979" v="7719" actId="1076"/>
           <ac:cxnSpMkLst>
             <pc:docMk/>
             <pc:sldMk cId="2152317508" sldId="256"/>
@@ -3073,7 +3111,7 @@
           </ac:cxnSpMkLst>
         </pc:cxnChg>
         <pc:cxnChg chg="add mod ord">
-          <ac:chgData name="Li, Hanchen F" userId="3aee791e-6a2d-4da7-a77b-fbdf7bf15886" providerId="ADAL" clId="{CDC5B0EF-6BEB-4658-A9FF-CB66F6FA6C1E}" dt="2025-05-22T23:49:05.864" v="5004" actId="1076"/>
+          <ac:chgData name="Li, Hanchen F" userId="3aee791e-6a2d-4da7-a77b-fbdf7bf15886" providerId="ADAL" clId="{CDC5B0EF-6BEB-4658-A9FF-CB66F6FA6C1E}" dt="2025-05-23T16:54:20.998" v="7715" actId="1076"/>
           <ac:cxnSpMkLst>
             <pc:docMk/>
             <pc:sldMk cId="2152317508" sldId="256"/>
@@ -3081,7 +3119,7 @@
           </ac:cxnSpMkLst>
         </pc:cxnChg>
         <pc:cxnChg chg="add mod ord">
-          <ac:chgData name="Li, Hanchen F" userId="3aee791e-6a2d-4da7-a77b-fbdf7bf15886" providerId="ADAL" clId="{CDC5B0EF-6BEB-4658-A9FF-CB66F6FA6C1E}" dt="2025-05-22T23:49:05.864" v="5004" actId="1076"/>
+          <ac:chgData name="Li, Hanchen F" userId="3aee791e-6a2d-4da7-a77b-fbdf7bf15886" providerId="ADAL" clId="{CDC5B0EF-6BEB-4658-A9FF-CB66F6FA6C1E}" dt="2025-05-23T16:54:20.998" v="7715" actId="1076"/>
           <ac:cxnSpMkLst>
             <pc:docMk/>
             <pc:sldMk cId="2152317508" sldId="256"/>
@@ -3202,7 +3240,7 @@
         </pc:cxnChg>
       </pc:sldChg>
       <pc:sldChg chg="addSp delSp modSp add mod">
-        <pc:chgData name="Li, Hanchen F" userId="3aee791e-6a2d-4da7-a77b-fbdf7bf15886" providerId="ADAL" clId="{CDC5B0EF-6BEB-4658-A9FF-CB66F6FA6C1E}" dt="2025-05-23T00:04:53.432" v="6004" actId="1076"/>
+        <pc:chgData name="Li, Hanchen F" userId="3aee791e-6a2d-4da7-a77b-fbdf7bf15886" providerId="ADAL" clId="{CDC5B0EF-6BEB-4658-A9FF-CB66F6FA6C1E}" dt="2025-05-23T16:58:46.410" v="7922" actId="14100"/>
         <pc:sldMkLst>
           <pc:docMk/>
           <pc:sldMk cId="3137520481" sldId="257"/>
@@ -3472,6 +3510,14 @@
           </ac:picMkLst>
         </pc:picChg>
         <pc:cxnChg chg="add mod">
+          <ac:chgData name="Li, Hanchen F" userId="3aee791e-6a2d-4da7-a77b-fbdf7bf15886" providerId="ADAL" clId="{CDC5B0EF-6BEB-4658-A9FF-CB66F6FA6C1E}" dt="2025-05-23T16:58:02.232" v="7857" actId="1076"/>
+          <ac:cxnSpMkLst>
+            <pc:docMk/>
+            <pc:sldMk cId="3137520481" sldId="257"/>
+            <ac:cxnSpMk id="2" creationId="{D6C73526-2A7F-9DD3-3F80-406DA998A835}"/>
+          </ac:cxnSpMkLst>
+        </pc:cxnChg>
+        <pc:cxnChg chg="add mod">
           <ac:chgData name="Li, Hanchen F" userId="3aee791e-6a2d-4da7-a77b-fbdf7bf15886" providerId="ADAL" clId="{CDC5B0EF-6BEB-4658-A9FF-CB66F6FA6C1E}" dt="2025-05-22T23:56:07.134" v="5833" actId="1076"/>
           <ac:cxnSpMkLst>
             <pc:docMk/>
@@ -3520,7 +3566,7 @@
           </ac:cxnSpMkLst>
         </pc:cxnChg>
         <pc:cxnChg chg="add mod">
-          <ac:chgData name="Li, Hanchen F" userId="3aee791e-6a2d-4da7-a77b-fbdf7bf15886" providerId="ADAL" clId="{CDC5B0EF-6BEB-4658-A9FF-CB66F6FA6C1E}" dt="2025-05-23T00:01:51.032" v="5947" actId="1076"/>
+          <ac:chgData name="Li, Hanchen F" userId="3aee791e-6a2d-4da7-a77b-fbdf7bf15886" providerId="ADAL" clId="{CDC5B0EF-6BEB-4658-A9FF-CB66F6FA6C1E}" dt="2025-05-23T16:58:46.410" v="7922" actId="14100"/>
           <ac:cxnSpMkLst>
             <pc:docMk/>
             <pc:sldMk cId="3137520481" sldId="257"/>
@@ -3536,7 +3582,7 @@
           </ac:cxnSpMkLst>
         </pc:cxnChg>
         <pc:cxnChg chg="add mod">
-          <ac:chgData name="Li, Hanchen F" userId="3aee791e-6a2d-4da7-a77b-fbdf7bf15886" providerId="ADAL" clId="{CDC5B0EF-6BEB-4658-A9FF-CB66F6FA6C1E}" dt="2025-05-23T00:02:33.936" v="5960" actId="14100"/>
+          <ac:chgData name="Li, Hanchen F" userId="3aee791e-6a2d-4da7-a77b-fbdf7bf15886" providerId="ADAL" clId="{CDC5B0EF-6BEB-4658-A9FF-CB66F6FA6C1E}" dt="2025-05-23T16:58:45.916" v="7921" actId="1076"/>
           <ac:cxnSpMkLst>
             <pc:docMk/>
             <pc:sldMk cId="3137520481" sldId="257"/>
@@ -4319,7 +4365,7 @@
         </pc:cxnChg>
       </pc:sldChg>
       <pc:sldChg chg="addSp delSp modSp add mod">
-        <pc:chgData name="Li, Hanchen F" userId="3aee791e-6a2d-4da7-a77b-fbdf7bf15886" providerId="ADAL" clId="{CDC5B0EF-6BEB-4658-A9FF-CB66F6FA6C1E}" dt="2025-05-23T00:32:18.153" v="6669" actId="1076"/>
+        <pc:chgData name="Li, Hanchen F" userId="3aee791e-6a2d-4da7-a77b-fbdf7bf15886" providerId="ADAL" clId="{CDC5B0EF-6BEB-4658-A9FF-CB66F6FA6C1E}" dt="2025-05-23T17:26:02.660" v="7954" actId="1076"/>
         <pc:sldMkLst>
           <pc:docMk/>
           <pc:sldMk cId="3652000193" sldId="259"/>
@@ -4332,6 +4378,14 @@
             <ac:spMk id="2" creationId="{5931810A-A752-2166-6575-2D400152D170}"/>
           </ac:spMkLst>
         </pc:spChg>
+        <pc:spChg chg="add mod">
+          <ac:chgData name="Li, Hanchen F" userId="3aee791e-6a2d-4da7-a77b-fbdf7bf15886" providerId="ADAL" clId="{CDC5B0EF-6BEB-4658-A9FF-CB66F6FA6C1E}" dt="2025-05-23T17:25:10.928" v="7951" actId="1076"/>
+          <ac:spMkLst>
+            <pc:docMk/>
+            <pc:sldMk cId="3652000193" sldId="259"/>
+            <ac:spMk id="9" creationId="{BF25BBE2-6F1D-5975-8FEB-752EC76148E4}"/>
+          </ac:spMkLst>
+        </pc:spChg>
         <pc:spChg chg="del">
           <ac:chgData name="Li, Hanchen F" userId="3aee791e-6a2d-4da7-a77b-fbdf7bf15886" providerId="ADAL" clId="{CDC5B0EF-6BEB-4658-A9FF-CB66F6FA6C1E}" dt="2025-05-23T00:20:08.880" v="6264" actId="478"/>
           <ac:spMkLst>
@@ -4365,7 +4419,7 @@
           </ac:spMkLst>
         </pc:spChg>
         <pc:spChg chg="add mod">
-          <ac:chgData name="Li, Hanchen F" userId="3aee791e-6a2d-4da7-a77b-fbdf7bf15886" providerId="ADAL" clId="{CDC5B0EF-6BEB-4658-A9FF-CB66F6FA6C1E}" dt="2025-05-23T00:29:21.175" v="6615" actId="1076"/>
+          <ac:chgData name="Li, Hanchen F" userId="3aee791e-6a2d-4da7-a77b-fbdf7bf15886" providerId="ADAL" clId="{CDC5B0EF-6BEB-4658-A9FF-CB66F6FA6C1E}" dt="2025-05-23T17:26:02.660" v="7954" actId="1076"/>
           <ac:spMkLst>
             <pc:docMk/>
             <pc:sldMk cId="3652000193" sldId="259"/>
@@ -4429,7 +4483,7 @@
           </ac:spMkLst>
         </pc:spChg>
         <pc:spChg chg="add mod">
-          <ac:chgData name="Li, Hanchen F" userId="3aee791e-6a2d-4da7-a77b-fbdf7bf15886" providerId="ADAL" clId="{CDC5B0EF-6BEB-4658-A9FF-CB66F6FA6C1E}" dt="2025-05-23T00:26:20.077" v="6376" actId="1076"/>
+          <ac:chgData name="Li, Hanchen F" userId="3aee791e-6a2d-4da7-a77b-fbdf7bf15886" providerId="ADAL" clId="{CDC5B0EF-6BEB-4658-A9FF-CB66F6FA6C1E}" dt="2025-05-23T17:26:02.660" v="7954" actId="1076"/>
           <ac:spMkLst>
             <pc:docMk/>
             <pc:sldMk cId="3652000193" sldId="259"/>
@@ -4437,7 +4491,7 @@
           </ac:spMkLst>
         </pc:spChg>
         <pc:spChg chg="add mod">
-          <ac:chgData name="Li, Hanchen F" userId="3aee791e-6a2d-4da7-a77b-fbdf7bf15886" providerId="ADAL" clId="{CDC5B0EF-6BEB-4658-A9FF-CB66F6FA6C1E}" dt="2025-05-23T00:28:35.446" v="6438" actId="1076"/>
+          <ac:chgData name="Li, Hanchen F" userId="3aee791e-6a2d-4da7-a77b-fbdf7bf15886" providerId="ADAL" clId="{CDC5B0EF-6BEB-4658-A9FF-CB66F6FA6C1E}" dt="2025-05-23T17:26:02.660" v="7954" actId="1076"/>
           <ac:spMkLst>
             <pc:docMk/>
             <pc:sldMk cId="3652000193" sldId="259"/>
@@ -4445,7 +4499,7 @@
           </ac:spMkLst>
         </pc:spChg>
         <pc:spChg chg="add mod">
-          <ac:chgData name="Li, Hanchen F" userId="3aee791e-6a2d-4da7-a77b-fbdf7bf15886" providerId="ADAL" clId="{CDC5B0EF-6BEB-4658-A9FF-CB66F6FA6C1E}" dt="2025-05-23T00:28:40.123" v="6439" actId="1076"/>
+          <ac:chgData name="Li, Hanchen F" userId="3aee791e-6a2d-4da7-a77b-fbdf7bf15886" providerId="ADAL" clId="{CDC5B0EF-6BEB-4658-A9FF-CB66F6FA6C1E}" dt="2025-05-23T17:26:02.660" v="7954" actId="1076"/>
           <ac:spMkLst>
             <pc:docMk/>
             <pc:sldMk cId="3652000193" sldId="259"/>
@@ -4453,7 +4507,7 @@
           </ac:spMkLst>
         </pc:spChg>
         <pc:spChg chg="add mod">
-          <ac:chgData name="Li, Hanchen F" userId="3aee791e-6a2d-4da7-a77b-fbdf7bf15886" providerId="ADAL" clId="{CDC5B0EF-6BEB-4658-A9FF-CB66F6FA6C1E}" dt="2025-05-23T00:27:27.709" v="6407" actId="1076"/>
+          <ac:chgData name="Li, Hanchen F" userId="3aee791e-6a2d-4da7-a77b-fbdf7bf15886" providerId="ADAL" clId="{CDC5B0EF-6BEB-4658-A9FF-CB66F6FA6C1E}" dt="2025-05-23T17:26:02.660" v="7954" actId="1076"/>
           <ac:spMkLst>
             <pc:docMk/>
             <pc:sldMk cId="3652000193" sldId="259"/>
@@ -4461,7 +4515,7 @@
           </ac:spMkLst>
         </pc:spChg>
         <pc:spChg chg="add mod">
-          <ac:chgData name="Li, Hanchen F" userId="3aee791e-6a2d-4da7-a77b-fbdf7bf15886" providerId="ADAL" clId="{CDC5B0EF-6BEB-4658-A9FF-CB66F6FA6C1E}" dt="2025-05-23T00:28:17.528" v="6426" actId="114"/>
+          <ac:chgData name="Li, Hanchen F" userId="3aee791e-6a2d-4da7-a77b-fbdf7bf15886" providerId="ADAL" clId="{CDC5B0EF-6BEB-4658-A9FF-CB66F6FA6C1E}" dt="2025-05-23T17:26:02.660" v="7954" actId="1076"/>
           <ac:spMkLst>
             <pc:docMk/>
             <pc:sldMk cId="3652000193" sldId="259"/>
@@ -4469,7 +4523,7 @@
           </ac:spMkLst>
         </pc:spChg>
         <pc:spChg chg="add mod">
-          <ac:chgData name="Li, Hanchen F" userId="3aee791e-6a2d-4da7-a77b-fbdf7bf15886" providerId="ADAL" clId="{CDC5B0EF-6BEB-4658-A9FF-CB66F6FA6C1E}" dt="2025-05-23T00:28:28.921" v="6435" actId="1076"/>
+          <ac:chgData name="Li, Hanchen F" userId="3aee791e-6a2d-4da7-a77b-fbdf7bf15886" providerId="ADAL" clId="{CDC5B0EF-6BEB-4658-A9FF-CB66F6FA6C1E}" dt="2025-05-23T17:26:02.660" v="7954" actId="1076"/>
           <ac:spMkLst>
             <pc:docMk/>
             <pc:sldMk cId="3652000193" sldId="259"/>
@@ -4477,7 +4531,7 @@
           </ac:spMkLst>
         </pc:spChg>
         <pc:spChg chg="add mod">
-          <ac:chgData name="Li, Hanchen F" userId="3aee791e-6a2d-4da7-a77b-fbdf7bf15886" providerId="ADAL" clId="{CDC5B0EF-6BEB-4658-A9FF-CB66F6FA6C1E}" dt="2025-05-23T00:28:51.019" v="6448" actId="1076"/>
+          <ac:chgData name="Li, Hanchen F" userId="3aee791e-6a2d-4da7-a77b-fbdf7bf15886" providerId="ADAL" clId="{CDC5B0EF-6BEB-4658-A9FF-CB66F6FA6C1E}" dt="2025-05-23T17:26:02.660" v="7954" actId="1076"/>
           <ac:spMkLst>
             <pc:docMk/>
             <pc:sldMk cId="3652000193" sldId="259"/>
@@ -4485,7 +4539,7 @@
           </ac:spMkLst>
         </pc:spChg>
         <pc:spChg chg="add mod">
-          <ac:chgData name="Li, Hanchen F" userId="3aee791e-6a2d-4da7-a77b-fbdf7bf15886" providerId="ADAL" clId="{CDC5B0EF-6BEB-4658-A9FF-CB66F6FA6C1E}" dt="2025-05-23T00:29:11.439" v="6614" actId="1076"/>
+          <ac:chgData name="Li, Hanchen F" userId="3aee791e-6a2d-4da7-a77b-fbdf7bf15886" providerId="ADAL" clId="{CDC5B0EF-6BEB-4658-A9FF-CB66F6FA6C1E}" dt="2025-05-23T17:26:02.660" v="7954" actId="1076"/>
           <ac:spMkLst>
             <pc:docMk/>
             <pc:sldMk cId="3652000193" sldId="259"/>
@@ -4501,7 +4555,7 @@
           </ac:spMkLst>
         </pc:spChg>
         <pc:spChg chg="add mod">
-          <ac:chgData name="Li, Hanchen F" userId="3aee791e-6a2d-4da7-a77b-fbdf7bf15886" providerId="ADAL" clId="{CDC5B0EF-6BEB-4658-A9FF-CB66F6FA6C1E}" dt="2025-05-23T00:32:15.515" v="6668" actId="1076"/>
+          <ac:chgData name="Li, Hanchen F" userId="3aee791e-6a2d-4da7-a77b-fbdf7bf15886" providerId="ADAL" clId="{CDC5B0EF-6BEB-4658-A9FF-CB66F6FA6C1E}" dt="2025-05-23T17:26:02.660" v="7954" actId="1076"/>
           <ac:spMkLst>
             <pc:docMk/>
             <pc:sldMk cId="3652000193" sldId="259"/>
@@ -4532,6 +4586,14 @@
             <ac:grpSpMk id="55" creationId="{DC25AF74-D6F2-7FDE-7DF4-13A7D00EE4A6}"/>
           </ac:grpSpMkLst>
         </pc:grpChg>
+        <pc:cxnChg chg="add mod">
+          <ac:chgData name="Li, Hanchen F" userId="3aee791e-6a2d-4da7-a77b-fbdf7bf15886" providerId="ADAL" clId="{CDC5B0EF-6BEB-4658-A9FF-CB66F6FA6C1E}" dt="2025-05-23T17:24:49.200" v="7930" actId="1076"/>
+          <ac:cxnSpMkLst>
+            <pc:docMk/>
+            <pc:sldMk cId="3652000193" sldId="259"/>
+            <ac:cxnSpMk id="3" creationId="{851B6599-330B-91FC-3997-981CFF75F9BB}"/>
+          </ac:cxnSpMkLst>
+        </pc:cxnChg>
         <pc:cxnChg chg="add del mod">
           <ac:chgData name="Li, Hanchen F" userId="3aee791e-6a2d-4da7-a77b-fbdf7bf15886" providerId="ADAL" clId="{CDC5B0EF-6BEB-4658-A9FF-CB66F6FA6C1E}" dt="2025-05-23T00:26:24.346" v="6378" actId="14100"/>
           <ac:cxnSpMkLst>
@@ -4586,6 +4648,725 @@
             <pc:docMk/>
             <pc:sldMk cId="3652000193" sldId="259"/>
             <ac:cxnSpMk id="57" creationId="{BAADE07F-A418-89FD-3554-81EFD08E7C6A}"/>
+          </ac:cxnSpMkLst>
+        </pc:cxnChg>
+      </pc:sldChg>
+      <pc:sldChg chg="addSp delSp modSp add mod">
+        <pc:chgData name="Li, Hanchen F" userId="3aee791e-6a2d-4da7-a77b-fbdf7bf15886" providerId="ADAL" clId="{CDC5B0EF-6BEB-4658-A9FF-CB66F6FA6C1E}" dt="2025-05-23T20:13:53.563" v="8153" actId="1076"/>
+        <pc:sldMkLst>
+          <pc:docMk/>
+          <pc:sldMk cId="1584463432" sldId="260"/>
+        </pc:sldMkLst>
+        <pc:spChg chg="add mod">
+          <ac:chgData name="Li, Hanchen F" userId="3aee791e-6a2d-4da7-a77b-fbdf7bf15886" providerId="ADAL" clId="{CDC5B0EF-6BEB-4658-A9FF-CB66F6FA6C1E}" dt="2025-05-23T16:42:20.319" v="7684" actId="1038"/>
+          <ac:spMkLst>
+            <pc:docMk/>
+            <pc:sldMk cId="1584463432" sldId="260"/>
+            <ac:spMk id="2" creationId="{AAF2876B-BAD6-F898-5EFF-FA8340A43036}"/>
+          </ac:spMkLst>
+        </pc:spChg>
+        <pc:spChg chg="add del mod">
+          <ac:chgData name="Li, Hanchen F" userId="3aee791e-6a2d-4da7-a77b-fbdf7bf15886" providerId="ADAL" clId="{CDC5B0EF-6BEB-4658-A9FF-CB66F6FA6C1E}" dt="2025-05-23T15:58:10.780" v="6755" actId="478"/>
+          <ac:spMkLst>
+            <pc:docMk/>
+            <pc:sldMk cId="1584463432" sldId="260"/>
+            <ac:spMk id="5" creationId="{684702EF-55A4-CFA5-1D2F-F9C0D12209B4}"/>
+          </ac:spMkLst>
+        </pc:spChg>
+        <pc:spChg chg="add del mod">
+          <ac:chgData name="Li, Hanchen F" userId="3aee791e-6a2d-4da7-a77b-fbdf7bf15886" providerId="ADAL" clId="{CDC5B0EF-6BEB-4658-A9FF-CB66F6FA6C1E}" dt="2025-05-23T16:04:54.590" v="6876" actId="478"/>
+          <ac:spMkLst>
+            <pc:docMk/>
+            <pc:sldMk cId="1584463432" sldId="260"/>
+            <ac:spMk id="6" creationId="{F72265FE-24DA-C3E9-1D3C-A9E6F121B3C1}"/>
+          </ac:spMkLst>
+        </pc:spChg>
+        <pc:spChg chg="del">
+          <ac:chgData name="Li, Hanchen F" userId="3aee791e-6a2d-4da7-a77b-fbdf7bf15886" providerId="ADAL" clId="{CDC5B0EF-6BEB-4658-A9FF-CB66F6FA6C1E}" dt="2025-05-23T15:56:22.779" v="6697" actId="478"/>
+          <ac:spMkLst>
+            <pc:docMk/>
+            <pc:sldMk cId="1584463432" sldId="260"/>
+            <ac:spMk id="7" creationId="{C15C0B3F-411B-B948-9420-66BBB07A0DF6}"/>
+          </ac:spMkLst>
+        </pc:spChg>
+        <pc:spChg chg="add del mod">
+          <ac:chgData name="Li, Hanchen F" userId="3aee791e-6a2d-4da7-a77b-fbdf7bf15886" providerId="ADAL" clId="{CDC5B0EF-6BEB-4658-A9FF-CB66F6FA6C1E}" dt="2025-05-23T16:04:50.980" v="6874" actId="478"/>
+          <ac:spMkLst>
+            <pc:docMk/>
+            <pc:sldMk cId="1584463432" sldId="260"/>
+            <ac:spMk id="8" creationId="{0CFE3C6A-5B60-AC72-7E58-9CBF415DB81F}"/>
+          </ac:spMkLst>
+        </pc:spChg>
+        <pc:spChg chg="add mod">
+          <ac:chgData name="Li, Hanchen F" userId="3aee791e-6a2d-4da7-a77b-fbdf7bf15886" providerId="ADAL" clId="{CDC5B0EF-6BEB-4658-A9FF-CB66F6FA6C1E}" dt="2025-05-23T16:42:20.319" v="7684" actId="1038"/>
+          <ac:spMkLst>
+            <pc:docMk/>
+            <pc:sldMk cId="1584463432" sldId="260"/>
+            <ac:spMk id="9" creationId="{A7EDD98C-1707-313A-02B8-85917AD97E8C}"/>
+          </ac:spMkLst>
+        </pc:spChg>
+        <pc:spChg chg="add mod">
+          <ac:chgData name="Li, Hanchen F" userId="3aee791e-6a2d-4da7-a77b-fbdf7bf15886" providerId="ADAL" clId="{CDC5B0EF-6BEB-4658-A9FF-CB66F6FA6C1E}" dt="2025-05-23T16:39:54.002" v="7644" actId="2711"/>
+          <ac:spMkLst>
+            <pc:docMk/>
+            <pc:sldMk cId="1584463432" sldId="260"/>
+            <ac:spMk id="10" creationId="{E8F739D8-1BFC-A166-BB93-C7724506B868}"/>
+          </ac:spMkLst>
+        </pc:spChg>
+        <pc:spChg chg="del">
+          <ac:chgData name="Li, Hanchen F" userId="3aee791e-6a2d-4da7-a77b-fbdf7bf15886" providerId="ADAL" clId="{CDC5B0EF-6BEB-4658-A9FF-CB66F6FA6C1E}" dt="2025-05-23T15:56:18.875" v="6691" actId="478"/>
+          <ac:spMkLst>
+            <pc:docMk/>
+            <pc:sldMk cId="1584463432" sldId="260"/>
+            <ac:spMk id="11" creationId="{035FC631-1391-0EE5-EC5E-0C9DE95B3DF1}"/>
+          </ac:spMkLst>
+        </pc:spChg>
+        <pc:spChg chg="del">
+          <ac:chgData name="Li, Hanchen F" userId="3aee791e-6a2d-4da7-a77b-fbdf7bf15886" providerId="ADAL" clId="{CDC5B0EF-6BEB-4658-A9FF-CB66F6FA6C1E}" dt="2025-05-23T15:56:18.875" v="6691" actId="478"/>
+          <ac:spMkLst>
+            <pc:docMk/>
+            <pc:sldMk cId="1584463432" sldId="260"/>
+            <ac:spMk id="12" creationId="{E578D8A9-D597-04FB-E328-EBCE6610A399}"/>
+          </ac:spMkLst>
+        </pc:spChg>
+        <pc:spChg chg="add mod">
+          <ac:chgData name="Li, Hanchen F" userId="3aee791e-6a2d-4da7-a77b-fbdf7bf15886" providerId="ADAL" clId="{CDC5B0EF-6BEB-4658-A9FF-CB66F6FA6C1E}" dt="2025-05-23T20:12:59.891" v="8141" actId="1038"/>
+          <ac:spMkLst>
+            <pc:docMk/>
+            <pc:sldMk cId="1584463432" sldId="260"/>
+            <ac:spMk id="15" creationId="{A660F99D-A667-1157-0E3E-7E9D3C7C9C11}"/>
+          </ac:spMkLst>
+        </pc:spChg>
+        <pc:spChg chg="add del mod">
+          <ac:chgData name="Li, Hanchen F" userId="3aee791e-6a2d-4da7-a77b-fbdf7bf15886" providerId="ADAL" clId="{CDC5B0EF-6BEB-4658-A9FF-CB66F6FA6C1E}" dt="2025-05-23T16:16:54.715" v="7198" actId="478"/>
+          <ac:spMkLst>
+            <pc:docMk/>
+            <pc:sldMk cId="1584463432" sldId="260"/>
+            <ac:spMk id="16" creationId="{C6A9C31E-1E61-3564-1F1D-B364FFEBFC7B}"/>
+          </ac:spMkLst>
+        </pc:spChg>
+        <pc:spChg chg="add del mod">
+          <ac:chgData name="Li, Hanchen F" userId="3aee791e-6a2d-4da7-a77b-fbdf7bf15886" providerId="ADAL" clId="{CDC5B0EF-6BEB-4658-A9FF-CB66F6FA6C1E}" dt="2025-05-23T16:15:21.930" v="7137" actId="478"/>
+          <ac:spMkLst>
+            <pc:docMk/>
+            <pc:sldMk cId="1584463432" sldId="260"/>
+            <ac:spMk id="17" creationId="{ABE786CB-45BA-0E21-94AF-FF4D010A8014}"/>
+          </ac:spMkLst>
+        </pc:spChg>
+        <pc:spChg chg="del">
+          <ac:chgData name="Li, Hanchen F" userId="3aee791e-6a2d-4da7-a77b-fbdf7bf15886" providerId="ADAL" clId="{CDC5B0EF-6BEB-4658-A9FF-CB66F6FA6C1E}" dt="2025-05-23T15:56:24.274" v="6698" actId="478"/>
+          <ac:spMkLst>
+            <pc:docMk/>
+            <pc:sldMk cId="1584463432" sldId="260"/>
+            <ac:spMk id="20" creationId="{AA78E5CA-4621-2CD7-60D2-B6C137825661}"/>
+          </ac:spMkLst>
+        </pc:spChg>
+        <pc:spChg chg="del">
+          <ac:chgData name="Li, Hanchen F" userId="3aee791e-6a2d-4da7-a77b-fbdf7bf15886" providerId="ADAL" clId="{CDC5B0EF-6BEB-4658-A9FF-CB66F6FA6C1E}" dt="2025-05-23T15:56:18.875" v="6691" actId="478"/>
+          <ac:spMkLst>
+            <pc:docMk/>
+            <pc:sldMk cId="1584463432" sldId="260"/>
+            <ac:spMk id="23" creationId="{322CA0B6-E7C6-23FA-4D66-9142D0F1F71D}"/>
+          </ac:spMkLst>
+        </pc:spChg>
+        <pc:spChg chg="del">
+          <ac:chgData name="Li, Hanchen F" userId="3aee791e-6a2d-4da7-a77b-fbdf7bf15886" providerId="ADAL" clId="{CDC5B0EF-6BEB-4658-A9FF-CB66F6FA6C1E}" dt="2025-05-23T15:56:18.875" v="6691" actId="478"/>
+          <ac:spMkLst>
+            <pc:docMk/>
+            <pc:sldMk cId="1584463432" sldId="260"/>
+            <ac:spMk id="24" creationId="{3E31D628-65D2-1FD3-7C69-BD506ED2CF4F}"/>
+          </ac:spMkLst>
+        </pc:spChg>
+        <pc:spChg chg="del">
+          <ac:chgData name="Li, Hanchen F" userId="3aee791e-6a2d-4da7-a77b-fbdf7bf15886" providerId="ADAL" clId="{CDC5B0EF-6BEB-4658-A9FF-CB66F6FA6C1E}" dt="2025-05-23T15:56:18.875" v="6691" actId="478"/>
+          <ac:spMkLst>
+            <pc:docMk/>
+            <pc:sldMk cId="1584463432" sldId="260"/>
+            <ac:spMk id="28" creationId="{6FFB6D6B-B600-5A0A-5D46-71C224A459C8}"/>
+          </ac:spMkLst>
+        </pc:spChg>
+        <pc:spChg chg="del">
+          <ac:chgData name="Li, Hanchen F" userId="3aee791e-6a2d-4da7-a77b-fbdf7bf15886" providerId="ADAL" clId="{CDC5B0EF-6BEB-4658-A9FF-CB66F6FA6C1E}" dt="2025-05-23T15:56:18.875" v="6691" actId="478"/>
+          <ac:spMkLst>
+            <pc:docMk/>
+            <pc:sldMk cId="1584463432" sldId="260"/>
+            <ac:spMk id="29" creationId="{767EC806-F7FA-A94A-B79A-EBAD1DADEC91}"/>
+          </ac:spMkLst>
+        </pc:spChg>
+        <pc:spChg chg="add mod">
+          <ac:chgData name="Li, Hanchen F" userId="3aee791e-6a2d-4da7-a77b-fbdf7bf15886" providerId="ADAL" clId="{CDC5B0EF-6BEB-4658-A9FF-CB66F6FA6C1E}" dt="2025-05-23T16:10:22.949" v="7014" actId="1076"/>
+          <ac:spMkLst>
+            <pc:docMk/>
+            <pc:sldMk cId="1584463432" sldId="260"/>
+            <ac:spMk id="30" creationId="{CBB96978-A4AE-E899-C48F-8A0806E69DC4}"/>
+          </ac:spMkLst>
+        </pc:spChg>
+        <pc:spChg chg="del">
+          <ac:chgData name="Li, Hanchen F" userId="3aee791e-6a2d-4da7-a77b-fbdf7bf15886" providerId="ADAL" clId="{CDC5B0EF-6BEB-4658-A9FF-CB66F6FA6C1E}" dt="2025-05-23T15:56:18.875" v="6691" actId="478"/>
+          <ac:spMkLst>
+            <pc:docMk/>
+            <pc:sldMk cId="1584463432" sldId="260"/>
+            <ac:spMk id="31" creationId="{C3AEB81C-BD3B-A92E-62F0-B30F5BE3675B}"/>
+          </ac:spMkLst>
+        </pc:spChg>
+        <pc:spChg chg="del mod">
+          <ac:chgData name="Li, Hanchen F" userId="3aee791e-6a2d-4da7-a77b-fbdf7bf15886" providerId="ADAL" clId="{CDC5B0EF-6BEB-4658-A9FF-CB66F6FA6C1E}" dt="2025-05-23T15:57:18.857" v="6738" actId="478"/>
+          <ac:spMkLst>
+            <pc:docMk/>
+            <pc:sldMk cId="1584463432" sldId="260"/>
+            <ac:spMk id="32" creationId="{7B9D6849-61E2-17B3-3A21-CB30DD4C677E}"/>
+          </ac:spMkLst>
+        </pc:spChg>
+        <pc:spChg chg="add mod">
+          <ac:chgData name="Li, Hanchen F" userId="3aee791e-6a2d-4da7-a77b-fbdf7bf15886" providerId="ADAL" clId="{CDC5B0EF-6BEB-4658-A9FF-CB66F6FA6C1E}" dt="2025-05-23T16:39:54.002" v="7644" actId="2711"/>
+          <ac:spMkLst>
+            <pc:docMk/>
+            <pc:sldMk cId="1584463432" sldId="260"/>
+            <ac:spMk id="37" creationId="{C3489DDE-D33C-001E-F789-ADB65077FD86}"/>
+          </ac:spMkLst>
+        </pc:spChg>
+        <pc:spChg chg="add mod">
+          <ac:chgData name="Li, Hanchen F" userId="3aee791e-6a2d-4da7-a77b-fbdf7bf15886" providerId="ADAL" clId="{CDC5B0EF-6BEB-4658-A9FF-CB66F6FA6C1E}" dt="2025-05-23T16:39:54.002" v="7644" actId="2711"/>
+          <ac:spMkLst>
+            <pc:docMk/>
+            <pc:sldMk cId="1584463432" sldId="260"/>
+            <ac:spMk id="38" creationId="{C6C900F5-1B05-902A-8158-E0F9814CC211}"/>
+          </ac:spMkLst>
+        </pc:spChg>
+        <pc:spChg chg="add mod">
+          <ac:chgData name="Li, Hanchen F" userId="3aee791e-6a2d-4da7-a77b-fbdf7bf15886" providerId="ADAL" clId="{CDC5B0EF-6BEB-4658-A9FF-CB66F6FA6C1E}" dt="2025-05-23T16:40:00.587" v="7645" actId="2085"/>
+          <ac:spMkLst>
+            <pc:docMk/>
+            <pc:sldMk cId="1584463432" sldId="260"/>
+            <ac:spMk id="49" creationId="{A1060CE9-02C1-80AC-E6ED-E7A0742ED67A}"/>
+          </ac:spMkLst>
+        </pc:spChg>
+        <pc:spChg chg="del">
+          <ac:chgData name="Li, Hanchen F" userId="3aee791e-6a2d-4da7-a77b-fbdf7bf15886" providerId="ADAL" clId="{CDC5B0EF-6BEB-4658-A9FF-CB66F6FA6C1E}" dt="2025-05-23T15:56:18.875" v="6691" actId="478"/>
+          <ac:spMkLst>
+            <pc:docMk/>
+            <pc:sldMk cId="1584463432" sldId="260"/>
+            <ac:spMk id="50" creationId="{833FADE0-6619-25FD-F73C-AE61E894D557}"/>
+          </ac:spMkLst>
+        </pc:spChg>
+        <pc:spChg chg="del">
+          <ac:chgData name="Li, Hanchen F" userId="3aee791e-6a2d-4da7-a77b-fbdf7bf15886" providerId="ADAL" clId="{CDC5B0EF-6BEB-4658-A9FF-CB66F6FA6C1E}" dt="2025-05-23T15:56:18.875" v="6691" actId="478"/>
+          <ac:spMkLst>
+            <pc:docMk/>
+            <pc:sldMk cId="1584463432" sldId="260"/>
+            <ac:spMk id="52" creationId="{83436275-9370-E18B-5B54-AE80873119E4}"/>
+          </ac:spMkLst>
+        </pc:spChg>
+        <pc:spChg chg="del">
+          <ac:chgData name="Li, Hanchen F" userId="3aee791e-6a2d-4da7-a77b-fbdf7bf15886" providerId="ADAL" clId="{CDC5B0EF-6BEB-4658-A9FF-CB66F6FA6C1E}" dt="2025-05-23T15:56:18.875" v="6691" actId="478"/>
+          <ac:spMkLst>
+            <pc:docMk/>
+            <pc:sldMk cId="1584463432" sldId="260"/>
+            <ac:spMk id="53" creationId="{CEEA90DB-D653-2675-6995-7B97CAFD3689}"/>
+          </ac:spMkLst>
+        </pc:spChg>
+        <pc:spChg chg="add mod">
+          <ac:chgData name="Li, Hanchen F" userId="3aee791e-6a2d-4da7-a77b-fbdf7bf15886" providerId="ADAL" clId="{CDC5B0EF-6BEB-4658-A9FF-CB66F6FA6C1E}" dt="2025-05-23T16:42:20.319" v="7684" actId="1038"/>
+          <ac:spMkLst>
+            <pc:docMk/>
+            <pc:sldMk cId="1584463432" sldId="260"/>
+            <ac:spMk id="54" creationId="{0D03CEB0-4241-1D72-2F28-3ABD32BE2175}"/>
+          </ac:spMkLst>
+        </pc:spChg>
+        <pc:spChg chg="add del mod">
+          <ac:chgData name="Li, Hanchen F" userId="3aee791e-6a2d-4da7-a77b-fbdf7bf15886" providerId="ADAL" clId="{CDC5B0EF-6BEB-4658-A9FF-CB66F6FA6C1E}" dt="2025-05-23T16:32:32.314" v="7564" actId="478"/>
+          <ac:spMkLst>
+            <pc:docMk/>
+            <pc:sldMk cId="1584463432" sldId="260"/>
+            <ac:spMk id="58" creationId="{1FFEA000-03C3-CADF-0956-E2C7532FE86B}"/>
+          </ac:spMkLst>
+        </pc:spChg>
+        <pc:spChg chg="add mod">
+          <ac:chgData name="Li, Hanchen F" userId="3aee791e-6a2d-4da7-a77b-fbdf7bf15886" providerId="ADAL" clId="{CDC5B0EF-6BEB-4658-A9FF-CB66F6FA6C1E}" dt="2025-05-23T20:12:59.891" v="8141" actId="1038"/>
+          <ac:spMkLst>
+            <pc:docMk/>
+            <pc:sldMk cId="1584463432" sldId="260"/>
+            <ac:spMk id="59" creationId="{303E864D-EC00-ED67-FDB5-0D98FFAEC9AF}"/>
+          </ac:spMkLst>
+        </pc:spChg>
+        <pc:spChg chg="add mod">
+          <ac:chgData name="Li, Hanchen F" userId="3aee791e-6a2d-4da7-a77b-fbdf7bf15886" providerId="ADAL" clId="{CDC5B0EF-6BEB-4658-A9FF-CB66F6FA6C1E}" dt="2025-05-23T16:25:39.865" v="7340"/>
+          <ac:spMkLst>
+            <pc:docMk/>
+            <pc:sldMk cId="1584463432" sldId="260"/>
+            <ac:spMk id="126" creationId="{A502B73A-A1A0-76C5-1BFD-62CB32CD3FC7}"/>
+          </ac:spMkLst>
+        </pc:spChg>
+        <pc:spChg chg="add del mod">
+          <ac:chgData name="Li, Hanchen F" userId="3aee791e-6a2d-4da7-a77b-fbdf7bf15886" providerId="ADAL" clId="{CDC5B0EF-6BEB-4658-A9FF-CB66F6FA6C1E}" dt="2025-05-23T16:26:50.601" v="7377" actId="478"/>
+          <ac:spMkLst>
+            <pc:docMk/>
+            <pc:sldMk cId="1584463432" sldId="260"/>
+            <ac:spMk id="127" creationId="{E3670639-E5DA-4752-087D-EF0E0630D2B7}"/>
+          </ac:spMkLst>
+        </pc:spChg>
+        <pc:spChg chg="add mod">
+          <ac:chgData name="Li, Hanchen F" userId="3aee791e-6a2d-4da7-a77b-fbdf7bf15886" providerId="ADAL" clId="{CDC5B0EF-6BEB-4658-A9FF-CB66F6FA6C1E}" dt="2025-05-23T16:42:25.130" v="7707" actId="1038"/>
+          <ac:spMkLst>
+            <pc:docMk/>
+            <pc:sldMk cId="1584463432" sldId="260"/>
+            <ac:spMk id="129" creationId="{3A7AE86E-05E7-CA0A-2CF4-FBBCD4F8F02F}"/>
+          </ac:spMkLst>
+        </pc:spChg>
+        <pc:spChg chg="add del mod">
+          <ac:chgData name="Li, Hanchen F" userId="3aee791e-6a2d-4da7-a77b-fbdf7bf15886" providerId="ADAL" clId="{CDC5B0EF-6BEB-4658-A9FF-CB66F6FA6C1E}" dt="2025-05-23T16:27:26.257" v="7408" actId="478"/>
+          <ac:spMkLst>
+            <pc:docMk/>
+            <pc:sldMk cId="1584463432" sldId="260"/>
+            <ac:spMk id="130" creationId="{05C7F9BF-DA57-2AFC-E6E0-EDFD4433072D}"/>
+          </ac:spMkLst>
+        </pc:spChg>
+        <pc:spChg chg="add mod">
+          <ac:chgData name="Li, Hanchen F" userId="3aee791e-6a2d-4da7-a77b-fbdf7bf15886" providerId="ADAL" clId="{CDC5B0EF-6BEB-4658-A9FF-CB66F6FA6C1E}" dt="2025-05-23T20:03:23.581" v="7961" actId="20577"/>
+          <ac:spMkLst>
+            <pc:docMk/>
+            <pc:sldMk cId="1584463432" sldId="260"/>
+            <ac:spMk id="131" creationId="{B93E6DD7-FA5D-EFAA-144D-F09D1C33DD7E}"/>
+          </ac:spMkLst>
+        </pc:spChg>
+        <pc:spChg chg="add mod">
+          <ac:chgData name="Li, Hanchen F" userId="3aee791e-6a2d-4da7-a77b-fbdf7bf15886" providerId="ADAL" clId="{CDC5B0EF-6BEB-4658-A9FF-CB66F6FA6C1E}" dt="2025-05-23T16:42:25.130" v="7707" actId="1038"/>
+          <ac:spMkLst>
+            <pc:docMk/>
+            <pc:sldMk cId="1584463432" sldId="260"/>
+            <ac:spMk id="171" creationId="{4878A91F-8CFB-C1A2-7B8C-0053637F23EE}"/>
+          </ac:spMkLst>
+        </pc:spChg>
+        <pc:spChg chg="add mod">
+          <ac:chgData name="Li, Hanchen F" userId="3aee791e-6a2d-4da7-a77b-fbdf7bf15886" providerId="ADAL" clId="{CDC5B0EF-6BEB-4658-A9FF-CB66F6FA6C1E}" dt="2025-05-23T20:12:59.891" v="8141" actId="1038"/>
+          <ac:spMkLst>
+            <pc:docMk/>
+            <pc:sldMk cId="1584463432" sldId="260"/>
+            <ac:spMk id="184" creationId="{CA7EA20D-D9B4-C7C6-B2BE-2CEB6674261A}"/>
+          </ac:spMkLst>
+        </pc:spChg>
+        <pc:spChg chg="add mod">
+          <ac:chgData name="Li, Hanchen F" userId="3aee791e-6a2d-4da7-a77b-fbdf7bf15886" providerId="ADAL" clId="{CDC5B0EF-6BEB-4658-A9FF-CB66F6FA6C1E}" dt="2025-05-23T20:09:33.148" v="7965" actId="571"/>
+          <ac:spMkLst>
+            <pc:docMk/>
+            <pc:sldMk cId="1584463432" sldId="260"/>
+            <ac:spMk id="235" creationId="{215CE413-DCA8-2C63-1850-71C30A64683E}"/>
+          </ac:spMkLst>
+        </pc:spChg>
+        <pc:spChg chg="mod">
+          <ac:chgData name="Li, Hanchen F" userId="3aee791e-6a2d-4da7-a77b-fbdf7bf15886" providerId="ADAL" clId="{CDC5B0EF-6BEB-4658-A9FF-CB66F6FA6C1E}" dt="2025-05-23T20:09:33.148" v="7965" actId="571"/>
+          <ac:spMkLst>
+            <pc:docMk/>
+            <pc:sldMk cId="1584463432" sldId="260"/>
+            <ac:spMk id="237" creationId="{908E95F4-2561-DEE5-6705-87724A3A98C7}"/>
+          </ac:spMkLst>
+        </pc:spChg>
+        <pc:spChg chg="mod">
+          <ac:chgData name="Li, Hanchen F" userId="3aee791e-6a2d-4da7-a77b-fbdf7bf15886" providerId="ADAL" clId="{CDC5B0EF-6BEB-4658-A9FF-CB66F6FA6C1E}" dt="2025-05-23T20:09:33.148" v="7965" actId="571"/>
+          <ac:spMkLst>
+            <pc:docMk/>
+            <pc:sldMk cId="1584463432" sldId="260"/>
+            <ac:spMk id="238" creationId="{A099CE58-70D0-95FC-140C-A64743ADFFB5}"/>
+          </ac:spMkLst>
+        </pc:spChg>
+        <pc:spChg chg="mod">
+          <ac:chgData name="Li, Hanchen F" userId="3aee791e-6a2d-4da7-a77b-fbdf7bf15886" providerId="ADAL" clId="{CDC5B0EF-6BEB-4658-A9FF-CB66F6FA6C1E}" dt="2025-05-23T20:09:33.148" v="7965" actId="571"/>
+          <ac:spMkLst>
+            <pc:docMk/>
+            <pc:sldMk cId="1584463432" sldId="260"/>
+            <ac:spMk id="239" creationId="{B92FE556-8DBD-C7FB-08C2-004F3D469868}"/>
+          </ac:spMkLst>
+        </pc:spChg>
+        <pc:spChg chg="mod">
+          <ac:chgData name="Li, Hanchen F" userId="3aee791e-6a2d-4da7-a77b-fbdf7bf15886" providerId="ADAL" clId="{CDC5B0EF-6BEB-4658-A9FF-CB66F6FA6C1E}" dt="2025-05-23T20:09:33.148" v="7965" actId="571"/>
+          <ac:spMkLst>
+            <pc:docMk/>
+            <pc:sldMk cId="1584463432" sldId="260"/>
+            <ac:spMk id="240" creationId="{9BC2613A-863A-87C1-517C-1AC74CF95450}"/>
+          </ac:spMkLst>
+        </pc:spChg>
+        <pc:spChg chg="add mod">
+          <ac:chgData name="Li, Hanchen F" userId="3aee791e-6a2d-4da7-a77b-fbdf7bf15886" providerId="ADAL" clId="{CDC5B0EF-6BEB-4658-A9FF-CB66F6FA6C1E}" dt="2025-05-23T20:09:33.148" v="7965" actId="571"/>
+          <ac:spMkLst>
+            <pc:docMk/>
+            <pc:sldMk cId="1584463432" sldId="260"/>
+            <ac:spMk id="241" creationId="{34EEFF6D-A9C9-BE98-DEBD-E8B99626AED6}"/>
+          </ac:spMkLst>
+        </pc:spChg>
+        <pc:spChg chg="add mod">
+          <ac:chgData name="Li, Hanchen F" userId="3aee791e-6a2d-4da7-a77b-fbdf7bf15886" providerId="ADAL" clId="{CDC5B0EF-6BEB-4658-A9FF-CB66F6FA6C1E}" dt="2025-05-23T20:09:33.148" v="7965" actId="571"/>
+          <ac:spMkLst>
+            <pc:docMk/>
+            <pc:sldMk cId="1584463432" sldId="260"/>
+            <ac:spMk id="242" creationId="{A5864EC1-76B1-AF11-9FFE-B23E54D1A649}"/>
+          </ac:spMkLst>
+        </pc:spChg>
+        <pc:spChg chg="add mod">
+          <ac:chgData name="Li, Hanchen F" userId="3aee791e-6a2d-4da7-a77b-fbdf7bf15886" providerId="ADAL" clId="{CDC5B0EF-6BEB-4658-A9FF-CB66F6FA6C1E}" dt="2025-05-23T20:13:53.563" v="8153" actId="1076"/>
+          <ac:spMkLst>
+            <pc:docMk/>
+            <pc:sldMk cId="1584463432" sldId="260"/>
+            <ac:spMk id="254" creationId="{0BE889AF-CB60-07E1-BFDE-185108361F98}"/>
+          </ac:spMkLst>
+        </pc:spChg>
+        <pc:spChg chg="add del mod">
+          <ac:chgData name="Li, Hanchen F" userId="3aee791e-6a2d-4da7-a77b-fbdf7bf15886" providerId="ADAL" clId="{CDC5B0EF-6BEB-4658-A9FF-CB66F6FA6C1E}" dt="2025-05-23T20:12:20.063" v="8076" actId="478"/>
+          <ac:spMkLst>
+            <pc:docMk/>
+            <pc:sldMk cId="1584463432" sldId="260"/>
+            <ac:spMk id="255" creationId="{4582AD9A-2DC3-92CE-5F4B-EE2D5A8AE8E2}"/>
+          </ac:spMkLst>
+        </pc:spChg>
+        <pc:spChg chg="add mod">
+          <ac:chgData name="Li, Hanchen F" userId="3aee791e-6a2d-4da7-a77b-fbdf7bf15886" providerId="ADAL" clId="{CDC5B0EF-6BEB-4658-A9FF-CB66F6FA6C1E}" dt="2025-05-23T20:13:05.475" v="8142" actId="1076"/>
+          <ac:spMkLst>
+            <pc:docMk/>
+            <pc:sldMk cId="1584463432" sldId="260"/>
+            <ac:spMk id="256" creationId="{F46990E2-D83E-C36D-FF9E-CED38A98AD8A}"/>
+          </ac:spMkLst>
+        </pc:spChg>
+        <pc:spChg chg="add mod">
+          <ac:chgData name="Li, Hanchen F" userId="3aee791e-6a2d-4da7-a77b-fbdf7bf15886" providerId="ADAL" clId="{CDC5B0EF-6BEB-4658-A9FF-CB66F6FA6C1E}" dt="2025-05-23T20:13:41.151" v="8149" actId="1076"/>
+          <ac:spMkLst>
+            <pc:docMk/>
+            <pc:sldMk cId="1584463432" sldId="260"/>
+            <ac:spMk id="257" creationId="{52D3922B-FF82-FDC9-2F23-129EEF3CDACB}"/>
+          </ac:spMkLst>
+        </pc:spChg>
+        <pc:spChg chg="add mod">
+          <ac:chgData name="Li, Hanchen F" userId="3aee791e-6a2d-4da7-a77b-fbdf7bf15886" providerId="ADAL" clId="{CDC5B0EF-6BEB-4658-A9FF-CB66F6FA6C1E}" dt="2025-05-23T20:12:06.865" v="8069" actId="571"/>
+          <ac:spMkLst>
+            <pc:docMk/>
+            <pc:sldMk cId="1584463432" sldId="260"/>
+            <ac:spMk id="258" creationId="{D92A412E-04F7-7441-47FB-4B8C4EB0AF63}"/>
+          </ac:spMkLst>
+        </pc:spChg>
+        <pc:spChg chg="add mod">
+          <ac:chgData name="Li, Hanchen F" userId="3aee791e-6a2d-4da7-a77b-fbdf7bf15886" providerId="ADAL" clId="{CDC5B0EF-6BEB-4658-A9FF-CB66F6FA6C1E}" dt="2025-05-23T20:12:50.330" v="8097" actId="571"/>
+          <ac:spMkLst>
+            <pc:docMk/>
+            <pc:sldMk cId="1584463432" sldId="260"/>
+            <ac:spMk id="267" creationId="{C32A2DC8-B411-7789-04C8-0E8ACE19077D}"/>
+          </ac:spMkLst>
+        </pc:spChg>
+        <pc:spChg chg="mod">
+          <ac:chgData name="Li, Hanchen F" userId="3aee791e-6a2d-4da7-a77b-fbdf7bf15886" providerId="ADAL" clId="{CDC5B0EF-6BEB-4658-A9FF-CB66F6FA6C1E}" dt="2025-05-23T20:12:50.330" v="8097" actId="571"/>
+          <ac:spMkLst>
+            <pc:docMk/>
+            <pc:sldMk cId="1584463432" sldId="260"/>
+            <ac:spMk id="269" creationId="{09B0830C-F740-8EB8-B08D-E49488E7B6F5}"/>
+          </ac:spMkLst>
+        </pc:spChg>
+        <pc:spChg chg="mod">
+          <ac:chgData name="Li, Hanchen F" userId="3aee791e-6a2d-4da7-a77b-fbdf7bf15886" providerId="ADAL" clId="{CDC5B0EF-6BEB-4658-A9FF-CB66F6FA6C1E}" dt="2025-05-23T20:12:50.330" v="8097" actId="571"/>
+          <ac:spMkLst>
+            <pc:docMk/>
+            <pc:sldMk cId="1584463432" sldId="260"/>
+            <ac:spMk id="270" creationId="{B8CA79DB-2539-1398-01C6-71A97421BAE1}"/>
+          </ac:spMkLst>
+        </pc:spChg>
+        <pc:spChg chg="mod">
+          <ac:chgData name="Li, Hanchen F" userId="3aee791e-6a2d-4da7-a77b-fbdf7bf15886" providerId="ADAL" clId="{CDC5B0EF-6BEB-4658-A9FF-CB66F6FA6C1E}" dt="2025-05-23T20:12:50.330" v="8097" actId="571"/>
+          <ac:spMkLst>
+            <pc:docMk/>
+            <pc:sldMk cId="1584463432" sldId="260"/>
+            <ac:spMk id="271" creationId="{79F5345C-234A-8AB1-9AB1-B24FABB59622}"/>
+          </ac:spMkLst>
+        </pc:spChg>
+        <pc:spChg chg="mod">
+          <ac:chgData name="Li, Hanchen F" userId="3aee791e-6a2d-4da7-a77b-fbdf7bf15886" providerId="ADAL" clId="{CDC5B0EF-6BEB-4658-A9FF-CB66F6FA6C1E}" dt="2025-05-23T20:12:50.330" v="8097" actId="571"/>
+          <ac:spMkLst>
+            <pc:docMk/>
+            <pc:sldMk cId="1584463432" sldId="260"/>
+            <ac:spMk id="272" creationId="{7D111463-DA7E-1348-435B-CC365742CBDA}"/>
+          </ac:spMkLst>
+        </pc:spChg>
+        <pc:spChg chg="add mod">
+          <ac:chgData name="Li, Hanchen F" userId="3aee791e-6a2d-4da7-a77b-fbdf7bf15886" providerId="ADAL" clId="{CDC5B0EF-6BEB-4658-A9FF-CB66F6FA6C1E}" dt="2025-05-23T20:12:50.330" v="8097" actId="571"/>
+          <ac:spMkLst>
+            <pc:docMk/>
+            <pc:sldMk cId="1584463432" sldId="260"/>
+            <ac:spMk id="273" creationId="{BE47B69D-DC72-636D-2C81-997DF609E204}"/>
+          </ac:spMkLst>
+        </pc:spChg>
+        <pc:spChg chg="add mod">
+          <ac:chgData name="Li, Hanchen F" userId="3aee791e-6a2d-4da7-a77b-fbdf7bf15886" providerId="ADAL" clId="{CDC5B0EF-6BEB-4658-A9FF-CB66F6FA6C1E}" dt="2025-05-23T20:12:50.330" v="8097" actId="571"/>
+          <ac:spMkLst>
+            <pc:docMk/>
+            <pc:sldMk cId="1584463432" sldId="260"/>
+            <ac:spMk id="274" creationId="{FA7EB1DC-9258-6227-1589-0C232B1A18A3}"/>
+          </ac:spMkLst>
+        </pc:spChg>
+        <pc:spChg chg="add mod">
+          <ac:chgData name="Li, Hanchen F" userId="3aee791e-6a2d-4da7-a77b-fbdf7bf15886" providerId="ADAL" clId="{CDC5B0EF-6BEB-4658-A9FF-CB66F6FA6C1E}" dt="2025-05-23T20:13:32.969" v="8148" actId="1076"/>
+          <ac:spMkLst>
+            <pc:docMk/>
+            <pc:sldMk cId="1584463432" sldId="260"/>
+            <ac:spMk id="291" creationId="{EAF074FE-C5F3-EB74-F878-83EB2375ACA5}"/>
+          </ac:spMkLst>
+        </pc:spChg>
+        <pc:grpChg chg="add mod">
+          <ac:chgData name="Li, Hanchen F" userId="3aee791e-6a2d-4da7-a77b-fbdf7bf15886" providerId="ADAL" clId="{CDC5B0EF-6BEB-4658-A9FF-CB66F6FA6C1E}" dt="2025-05-23T20:12:59.891" v="8141" actId="1038"/>
+          <ac:grpSpMkLst>
+            <pc:docMk/>
+            <pc:sldMk cId="1584463432" sldId="260"/>
+            <ac:grpSpMk id="57" creationId="{142D3A66-A215-3779-9C4C-56FA7DEE18C6}"/>
+          </ac:grpSpMkLst>
+        </pc:grpChg>
+        <pc:grpChg chg="add mod">
+          <ac:chgData name="Li, Hanchen F" userId="3aee791e-6a2d-4da7-a77b-fbdf7bf15886" providerId="ADAL" clId="{CDC5B0EF-6BEB-4658-A9FF-CB66F6FA6C1E}" dt="2025-05-23T20:09:33.148" v="7965" actId="571"/>
+          <ac:grpSpMkLst>
+            <pc:docMk/>
+            <pc:sldMk cId="1584463432" sldId="260"/>
+            <ac:grpSpMk id="236" creationId="{82C087EC-1479-9297-78E1-5B8E0E11E377}"/>
+          </ac:grpSpMkLst>
+        </pc:grpChg>
+        <pc:grpChg chg="add mod">
+          <ac:chgData name="Li, Hanchen F" userId="3aee791e-6a2d-4da7-a77b-fbdf7bf15886" providerId="ADAL" clId="{CDC5B0EF-6BEB-4658-A9FF-CB66F6FA6C1E}" dt="2025-05-23T20:12:50.330" v="8097" actId="571"/>
+          <ac:grpSpMkLst>
+            <pc:docMk/>
+            <pc:sldMk cId="1584463432" sldId="260"/>
+            <ac:grpSpMk id="268" creationId="{7F2646B9-B3AE-E60F-E1F3-82151C3ECD53}"/>
+          </ac:grpSpMkLst>
+        </pc:grpChg>
+        <pc:picChg chg="del mod">
+          <ac:chgData name="Li, Hanchen F" userId="3aee791e-6a2d-4da7-a77b-fbdf7bf15886" providerId="ADAL" clId="{CDC5B0EF-6BEB-4658-A9FF-CB66F6FA6C1E}" dt="2025-05-23T15:56:19.789" v="6693" actId="478"/>
+          <ac:picMkLst>
+            <pc:docMk/>
+            <pc:sldMk cId="1584463432" sldId="260"/>
+            <ac:picMk id="3" creationId="{8503FABF-0327-8A44-5784-0CC1EE4367B6}"/>
+          </ac:picMkLst>
+        </pc:picChg>
+        <pc:cxnChg chg="del">
+          <ac:chgData name="Li, Hanchen F" userId="3aee791e-6a2d-4da7-a77b-fbdf7bf15886" providerId="ADAL" clId="{CDC5B0EF-6BEB-4658-A9FF-CB66F6FA6C1E}" dt="2025-05-23T15:56:21.796" v="6696" actId="478"/>
+          <ac:cxnSpMkLst>
+            <pc:docMk/>
+            <pc:sldMk cId="1584463432" sldId="260"/>
+            <ac:cxnSpMk id="4" creationId="{6E2CBDF1-A672-A701-60DD-94637F5B404D}"/>
+          </ac:cxnSpMkLst>
+        </pc:cxnChg>
+        <pc:cxnChg chg="add del mod">
+          <ac:chgData name="Li, Hanchen F" userId="3aee791e-6a2d-4da7-a77b-fbdf7bf15886" providerId="ADAL" clId="{CDC5B0EF-6BEB-4658-A9FF-CB66F6FA6C1E}" dt="2025-05-23T16:09:59.579" v="7004" actId="11529"/>
+          <ac:cxnSpMkLst>
+            <pc:docMk/>
+            <pc:sldMk cId="1584463432" sldId="260"/>
+            <ac:cxnSpMk id="19" creationId="{7FE74403-402A-6BEB-A25E-26D34C90EE1F}"/>
+          </ac:cxnSpMkLst>
+        </pc:cxnChg>
+        <pc:cxnChg chg="add del mod">
+          <ac:chgData name="Li, Hanchen F" userId="3aee791e-6a2d-4da7-a77b-fbdf7bf15886" providerId="ADAL" clId="{CDC5B0EF-6BEB-4658-A9FF-CB66F6FA6C1E}" dt="2025-05-23T16:28:36.026" v="7446" actId="478"/>
+          <ac:cxnSpMkLst>
+            <pc:docMk/>
+            <pc:sldMk cId="1584463432" sldId="260"/>
+            <ac:cxnSpMk id="22" creationId="{396D9843-5F6D-2E31-C099-E962B39D142E}"/>
+          </ac:cxnSpMkLst>
+        </pc:cxnChg>
+        <pc:cxnChg chg="del">
+          <ac:chgData name="Li, Hanchen F" userId="3aee791e-6a2d-4da7-a77b-fbdf7bf15886" providerId="ADAL" clId="{CDC5B0EF-6BEB-4658-A9FF-CB66F6FA6C1E}" dt="2025-05-23T15:56:20.561" v="6694" actId="478"/>
+          <ac:cxnSpMkLst>
+            <pc:docMk/>
+            <pc:sldMk cId="1584463432" sldId="260"/>
+            <ac:cxnSpMk id="40" creationId="{8CBD5324-2207-162F-1DE4-E6CE617831FA}"/>
+          </ac:cxnSpMkLst>
+        </pc:cxnChg>
+        <pc:cxnChg chg="del">
+          <ac:chgData name="Li, Hanchen F" userId="3aee791e-6a2d-4da7-a77b-fbdf7bf15886" providerId="ADAL" clId="{CDC5B0EF-6BEB-4658-A9FF-CB66F6FA6C1E}" dt="2025-05-23T15:56:21.294" v="6695" actId="478"/>
+          <ac:cxnSpMkLst>
+            <pc:docMk/>
+            <pc:sldMk cId="1584463432" sldId="260"/>
+            <ac:cxnSpMk id="42" creationId="{87126867-632B-3F03-6E84-EE77D48D5F48}"/>
+          </ac:cxnSpMkLst>
+        </pc:cxnChg>
+        <pc:cxnChg chg="add mod">
+          <ac:chgData name="Li, Hanchen F" userId="3aee791e-6a2d-4da7-a77b-fbdf7bf15886" providerId="ADAL" clId="{CDC5B0EF-6BEB-4658-A9FF-CB66F6FA6C1E}" dt="2025-05-23T20:12:59.891" v="8141" actId="1038"/>
+          <ac:cxnSpMkLst>
+            <pc:docMk/>
+            <pc:sldMk cId="1584463432" sldId="260"/>
+            <ac:cxnSpMk id="60" creationId="{914EB22B-EAF8-FED9-1D2B-DD117060A13A}"/>
+          </ac:cxnSpMkLst>
+        </pc:cxnChg>
+        <pc:cxnChg chg="add del mod">
+          <ac:chgData name="Li, Hanchen F" userId="3aee791e-6a2d-4da7-a77b-fbdf7bf15886" providerId="ADAL" clId="{CDC5B0EF-6BEB-4658-A9FF-CB66F6FA6C1E}" dt="2025-05-23T16:28:43.841" v="7450" actId="478"/>
+          <ac:cxnSpMkLst>
+            <pc:docMk/>
+            <pc:sldMk cId="1584463432" sldId="260"/>
+            <ac:cxnSpMk id="66" creationId="{D5FF7EFE-BDB9-4F48-E346-A4F81692CA48}"/>
+          </ac:cxnSpMkLst>
+        </pc:cxnChg>
+        <pc:cxnChg chg="add del mod">
+          <ac:chgData name="Li, Hanchen F" userId="3aee791e-6a2d-4da7-a77b-fbdf7bf15886" providerId="ADAL" clId="{CDC5B0EF-6BEB-4658-A9FF-CB66F6FA6C1E}" dt="2025-05-23T16:28:35.238" v="7445" actId="478"/>
+          <ac:cxnSpMkLst>
+            <pc:docMk/>
+            <pc:sldMk cId="1584463432" sldId="260"/>
+            <ac:cxnSpMk id="69" creationId="{4AD77737-FA3E-5AE3-E268-208D72BB1730}"/>
+          </ac:cxnSpMkLst>
+        </pc:cxnChg>
+        <pc:cxnChg chg="add del mod">
+          <ac:chgData name="Li, Hanchen F" userId="3aee791e-6a2d-4da7-a77b-fbdf7bf15886" providerId="ADAL" clId="{CDC5B0EF-6BEB-4658-A9FF-CB66F6FA6C1E}" dt="2025-05-23T16:28:34.074" v="7443" actId="478"/>
+          <ac:cxnSpMkLst>
+            <pc:docMk/>
+            <pc:sldMk cId="1584463432" sldId="260"/>
+            <ac:cxnSpMk id="73" creationId="{6C615112-F7FC-952D-4652-2CD95276ACA5}"/>
+          </ac:cxnSpMkLst>
+        </pc:cxnChg>
+        <pc:cxnChg chg="add del mod">
+          <ac:chgData name="Li, Hanchen F" userId="3aee791e-6a2d-4da7-a77b-fbdf7bf15886" providerId="ADAL" clId="{CDC5B0EF-6BEB-4658-A9FF-CB66F6FA6C1E}" dt="2025-05-23T16:28:34.721" v="7444" actId="478"/>
+          <ac:cxnSpMkLst>
+            <pc:docMk/>
+            <pc:sldMk cId="1584463432" sldId="260"/>
+            <ac:cxnSpMk id="90" creationId="{690C707A-5770-3DF6-8248-B93B1A3E9E7B}"/>
+          </ac:cxnSpMkLst>
+        </pc:cxnChg>
+        <pc:cxnChg chg="add del mod">
+          <ac:chgData name="Li, Hanchen F" userId="3aee791e-6a2d-4da7-a77b-fbdf7bf15886" providerId="ADAL" clId="{CDC5B0EF-6BEB-4658-A9FF-CB66F6FA6C1E}" dt="2025-05-23T16:31:24.157" v="7545" actId="478"/>
+          <ac:cxnSpMkLst>
+            <pc:docMk/>
+            <pc:sldMk cId="1584463432" sldId="260"/>
+            <ac:cxnSpMk id="132" creationId="{45FD4F0C-D9BB-85E2-A25D-8ECFF673E762}"/>
+          </ac:cxnSpMkLst>
+        </pc:cxnChg>
+        <pc:cxnChg chg="add del mod">
+          <ac:chgData name="Li, Hanchen F" userId="3aee791e-6a2d-4da7-a77b-fbdf7bf15886" providerId="ADAL" clId="{CDC5B0EF-6BEB-4658-A9FF-CB66F6FA6C1E}" dt="2025-05-23T16:31:23.631" v="7544" actId="478"/>
+          <ac:cxnSpMkLst>
+            <pc:docMk/>
+            <pc:sldMk cId="1584463432" sldId="260"/>
+            <ac:cxnSpMk id="135" creationId="{1EEFF99F-6C11-F2C4-38DD-CC0550A14213}"/>
+          </ac:cxnSpMkLst>
+        </pc:cxnChg>
+        <pc:cxnChg chg="add del mod">
+          <ac:chgData name="Li, Hanchen F" userId="3aee791e-6a2d-4da7-a77b-fbdf7bf15886" providerId="ADAL" clId="{CDC5B0EF-6BEB-4658-A9FF-CB66F6FA6C1E}" dt="2025-05-23T16:28:23.562" v="7438" actId="478"/>
+          <ac:cxnSpMkLst>
+            <pc:docMk/>
+            <pc:sldMk cId="1584463432" sldId="260"/>
+            <ac:cxnSpMk id="138" creationId="{C7F3ED52-0D5E-B2A6-7101-F12F1AFEDEB1}"/>
+          </ac:cxnSpMkLst>
+        </pc:cxnChg>
+        <pc:cxnChg chg="add del mod">
+          <ac:chgData name="Li, Hanchen F" userId="3aee791e-6a2d-4da7-a77b-fbdf7bf15886" providerId="ADAL" clId="{CDC5B0EF-6BEB-4658-A9FF-CB66F6FA6C1E}" dt="2025-05-23T16:31:22.964" v="7543" actId="478"/>
+          <ac:cxnSpMkLst>
+            <pc:docMk/>
+            <pc:sldMk cId="1584463432" sldId="260"/>
+            <ac:cxnSpMk id="139" creationId="{5B3EFE0D-9564-AEE1-B9DC-243B2DBF7EDE}"/>
+          </ac:cxnSpMkLst>
+        </pc:cxnChg>
+        <pc:cxnChg chg="add mod">
+          <ac:chgData name="Li, Hanchen F" userId="3aee791e-6a2d-4da7-a77b-fbdf7bf15886" providerId="ADAL" clId="{CDC5B0EF-6BEB-4658-A9FF-CB66F6FA6C1E}" dt="2025-05-23T20:12:59.891" v="8141" actId="1038"/>
+          <ac:cxnSpMkLst>
+            <pc:docMk/>
+            <pc:sldMk cId="1584463432" sldId="260"/>
+            <ac:cxnSpMk id="142" creationId="{76E9733B-A75B-8D92-96A6-A56F783735F3}"/>
+          </ac:cxnSpMkLst>
+        </pc:cxnChg>
+        <pc:cxnChg chg="add mod">
+          <ac:chgData name="Li, Hanchen F" userId="3aee791e-6a2d-4da7-a77b-fbdf7bf15886" providerId="ADAL" clId="{CDC5B0EF-6BEB-4658-A9FF-CB66F6FA6C1E}" dt="2025-05-23T20:12:59.891" v="8141" actId="1038"/>
+          <ac:cxnSpMkLst>
+            <pc:docMk/>
+            <pc:sldMk cId="1584463432" sldId="260"/>
+            <ac:cxnSpMk id="144" creationId="{A4194336-7F17-DCFE-DE10-BEFF0BD03C58}"/>
+          </ac:cxnSpMkLst>
+        </pc:cxnChg>
+        <pc:cxnChg chg="add mod">
+          <ac:chgData name="Li, Hanchen F" userId="3aee791e-6a2d-4da7-a77b-fbdf7bf15886" providerId="ADAL" clId="{CDC5B0EF-6BEB-4658-A9FF-CB66F6FA6C1E}" dt="2025-05-23T20:12:59.891" v="8141" actId="1038"/>
+          <ac:cxnSpMkLst>
+            <pc:docMk/>
+            <pc:sldMk cId="1584463432" sldId="260"/>
+            <ac:cxnSpMk id="147" creationId="{124EAECC-8E9F-1C7D-F59C-2E2F6E590F39}"/>
+          </ac:cxnSpMkLst>
+        </pc:cxnChg>
+        <pc:cxnChg chg="add mod">
+          <ac:chgData name="Li, Hanchen F" userId="3aee791e-6a2d-4da7-a77b-fbdf7bf15886" providerId="ADAL" clId="{CDC5B0EF-6BEB-4658-A9FF-CB66F6FA6C1E}" dt="2025-05-23T20:12:59.891" v="8141" actId="1038"/>
+          <ac:cxnSpMkLst>
+            <pc:docMk/>
+            <pc:sldMk cId="1584463432" sldId="260"/>
+            <ac:cxnSpMk id="151" creationId="{EBF54475-C7DA-D965-070D-71237E66FB90}"/>
+          </ac:cxnSpMkLst>
+        </pc:cxnChg>
+        <pc:cxnChg chg="add del mod">
+          <ac:chgData name="Li, Hanchen F" userId="3aee791e-6a2d-4da7-a77b-fbdf7bf15886" providerId="ADAL" clId="{CDC5B0EF-6BEB-4658-A9FF-CB66F6FA6C1E}" dt="2025-05-23T16:31:22.455" v="7542" actId="478"/>
+          <ac:cxnSpMkLst>
+            <pc:docMk/>
+            <pc:sldMk cId="1584463432" sldId="260"/>
+            <ac:cxnSpMk id="162" creationId="{CC231C5D-4C28-0638-50E1-28E448471AFF}"/>
+          </ac:cxnSpMkLst>
+        </pc:cxnChg>
+        <pc:cxnChg chg="add del mod">
+          <ac:chgData name="Li, Hanchen F" userId="3aee791e-6a2d-4da7-a77b-fbdf7bf15886" providerId="ADAL" clId="{CDC5B0EF-6BEB-4658-A9FF-CB66F6FA6C1E}" dt="2025-05-23T16:31:21.828" v="7541" actId="478"/>
+          <ac:cxnSpMkLst>
+            <pc:docMk/>
+            <pc:sldMk cId="1584463432" sldId="260"/>
+            <ac:cxnSpMk id="172" creationId="{2F27C024-0664-3ACF-5888-835C35001354}"/>
+          </ac:cxnSpMkLst>
+        </pc:cxnChg>
+        <pc:cxnChg chg="add del mod">
+          <ac:chgData name="Li, Hanchen F" userId="3aee791e-6a2d-4da7-a77b-fbdf7bf15886" providerId="ADAL" clId="{CDC5B0EF-6BEB-4658-A9FF-CB66F6FA6C1E}" dt="2025-05-23T16:31:21.376" v="7540" actId="478"/>
+          <ac:cxnSpMkLst>
+            <pc:docMk/>
+            <pc:sldMk cId="1584463432" sldId="260"/>
+            <ac:cxnSpMk id="174" creationId="{734AFDFC-A414-9D92-2527-6AF427594022}"/>
+          </ac:cxnSpMkLst>
+        </pc:cxnChg>
+        <pc:cxnChg chg="add mod">
+          <ac:chgData name="Li, Hanchen F" userId="3aee791e-6a2d-4da7-a77b-fbdf7bf15886" providerId="ADAL" clId="{CDC5B0EF-6BEB-4658-A9FF-CB66F6FA6C1E}" dt="2025-05-23T16:42:25.130" v="7707" actId="1038"/>
+          <ac:cxnSpMkLst>
+            <pc:docMk/>
+            <pc:sldMk cId="1584463432" sldId="260"/>
+            <ac:cxnSpMk id="190" creationId="{1B7B88A0-671E-9D42-B970-6B461B6CE12E}"/>
+          </ac:cxnSpMkLst>
+        </pc:cxnChg>
+        <pc:cxnChg chg="add mod">
+          <ac:chgData name="Li, Hanchen F" userId="3aee791e-6a2d-4da7-a77b-fbdf7bf15886" providerId="ADAL" clId="{CDC5B0EF-6BEB-4658-A9FF-CB66F6FA6C1E}" dt="2025-05-23T16:42:25.130" v="7707" actId="1038"/>
+          <ac:cxnSpMkLst>
+            <pc:docMk/>
+            <pc:sldMk cId="1584463432" sldId="260"/>
+            <ac:cxnSpMk id="196" creationId="{71347DC5-8F58-968E-18B1-732D1DC8584B}"/>
+          </ac:cxnSpMkLst>
+        </pc:cxnChg>
+        <pc:cxnChg chg="add mod">
+          <ac:chgData name="Li, Hanchen F" userId="3aee791e-6a2d-4da7-a77b-fbdf7bf15886" providerId="ADAL" clId="{CDC5B0EF-6BEB-4658-A9FF-CB66F6FA6C1E}" dt="2025-05-23T20:12:59.891" v="8141" actId="1038"/>
+          <ac:cxnSpMkLst>
+            <pc:docMk/>
+            <pc:sldMk cId="1584463432" sldId="260"/>
+            <ac:cxnSpMk id="199" creationId="{55DD9FD9-34D7-0A9D-EF1A-D5FE103BDA2A}"/>
+          </ac:cxnSpMkLst>
+        </pc:cxnChg>
+        <pc:cxnChg chg="add del mod">
+          <ac:chgData name="Li, Hanchen F" userId="3aee791e-6a2d-4da7-a77b-fbdf7bf15886" providerId="ADAL" clId="{CDC5B0EF-6BEB-4658-A9FF-CB66F6FA6C1E}" dt="2025-05-23T16:41:46.026" v="7657" actId="478"/>
+          <ac:cxnSpMkLst>
+            <pc:docMk/>
+            <pc:sldMk cId="1584463432" sldId="260"/>
+            <ac:cxnSpMk id="202" creationId="{4F073178-BF1D-51C5-9DC7-9D3C97769ADF}"/>
+          </ac:cxnSpMkLst>
+        </pc:cxnChg>
+        <pc:cxnChg chg="add mod">
+          <ac:chgData name="Li, Hanchen F" userId="3aee791e-6a2d-4da7-a77b-fbdf7bf15886" providerId="ADAL" clId="{CDC5B0EF-6BEB-4658-A9FF-CB66F6FA6C1E}" dt="2025-05-23T20:09:51.216" v="7970" actId="14100"/>
+          <ac:cxnSpMkLst>
+            <pc:docMk/>
+            <pc:sldMk cId="1584463432" sldId="260"/>
+            <ac:cxnSpMk id="205" creationId="{E96A241A-BE67-DBC2-F1E9-2BB697B4BCDC}"/>
+          </ac:cxnSpMkLst>
+        </pc:cxnChg>
+        <pc:cxnChg chg="add del mod">
+          <ac:chgData name="Li, Hanchen F" userId="3aee791e-6a2d-4da7-a77b-fbdf7bf15886" providerId="ADAL" clId="{CDC5B0EF-6BEB-4658-A9FF-CB66F6FA6C1E}" dt="2025-05-23T16:41:48.139" v="7658" actId="478"/>
+          <ac:cxnSpMkLst>
+            <pc:docMk/>
+            <pc:sldMk cId="1584463432" sldId="260"/>
+            <ac:cxnSpMk id="208" creationId="{9CD24189-018C-0180-4F2D-7D4083421338}"/>
+          </ac:cxnSpMkLst>
+        </pc:cxnChg>
+        <pc:cxnChg chg="add mod">
+          <ac:chgData name="Li, Hanchen F" userId="3aee791e-6a2d-4da7-a77b-fbdf7bf15886" providerId="ADAL" clId="{CDC5B0EF-6BEB-4658-A9FF-CB66F6FA6C1E}" dt="2025-05-23T20:09:31.343" v="7963" actId="1076"/>
+          <ac:cxnSpMkLst>
+            <pc:docMk/>
+            <pc:sldMk cId="1584463432" sldId="260"/>
+            <ac:cxnSpMk id="216" creationId="{CDB0FB27-BDB6-94FE-506B-DB690120D061}"/>
+          </ac:cxnSpMkLst>
+        </pc:cxnChg>
+        <pc:cxnChg chg="add mod">
+          <ac:chgData name="Li, Hanchen F" userId="3aee791e-6a2d-4da7-a77b-fbdf7bf15886" providerId="ADAL" clId="{CDC5B0EF-6BEB-4658-A9FF-CB66F6FA6C1E}" dt="2025-05-23T20:09:47.641" v="7969" actId="14100"/>
+          <ac:cxnSpMkLst>
+            <pc:docMk/>
+            <pc:sldMk cId="1584463432" sldId="260"/>
+            <ac:cxnSpMk id="219" creationId="{62207009-67C6-312A-989C-60DE4A34AE8E}"/>
           </ac:cxnSpMkLst>
         </pc:cxnChg>
       </pc:sldChg>
@@ -5224,7 +6005,7 @@
           <a:p>
             <a:fld id="{DF1088C5-931A-42D2-8AA4-FA289862AAD0}" type="datetimeFigureOut">
               <a:rPr lang="zh-CN" altLang="en-US" smtClean="0"/>
-              <a:t>2025/5/22</a:t>
+              <a:t>2025/5/23</a:t>
             </a:fld>
             <a:endParaRPr lang="zh-CN" altLang="en-US"/>
           </a:p>
@@ -5875,6 +6656,114 @@
 </p:notes>
 </file>
 
+<file path=ppt/notesSlides/notesSlide5.xml><?xml version="1.0" encoding="utf-8"?>
+<p:notes xmlns:a="http://schemas.openxmlformats.org/drawingml/2006/main" xmlns:r="http://schemas.openxmlformats.org/officeDocument/2006/relationships" xmlns:p="http://schemas.openxmlformats.org/presentationml/2006/main">
+  <p:cSld>
+    <p:spTree>
+      <p:nvGrpSpPr>
+        <p:cNvPr id="1" name="">
+          <a:extLst>
+            <a:ext uri="{FF2B5EF4-FFF2-40B4-BE49-F238E27FC236}">
+              <a16:creationId xmlns:a16="http://schemas.microsoft.com/office/drawing/2014/main" id="{B4F93236-857D-F6AD-A55A-A01F2D4C85C9}"/>
+            </a:ext>
+          </a:extLst>
+        </p:cNvPr>
+        <p:cNvGrpSpPr/>
+        <p:nvPr/>
+      </p:nvGrpSpPr>
+      <p:grpSpPr>
+        <a:xfrm>
+          <a:off x="0" y="0"/>
+          <a:ext cx="0" cy="0"/>
+          <a:chOff x="0" y="0"/>
+          <a:chExt cx="0" cy="0"/>
+        </a:xfrm>
+      </p:grpSpPr>
+      <p:sp>
+        <p:nvSpPr>
+          <p:cNvPr id="2" name="幻灯片图像占位符 1">
+            <a:extLst>
+              <a:ext uri="{FF2B5EF4-FFF2-40B4-BE49-F238E27FC236}">
+                <a16:creationId xmlns:a16="http://schemas.microsoft.com/office/drawing/2014/main" id="{4002755F-8185-B0A1-542F-C403BC5F6607}"/>
+              </a:ext>
+            </a:extLst>
+          </p:cNvPr>
+          <p:cNvSpPr>
+            <a:spLocks noGrp="1" noRot="1" noChangeAspect="1"/>
+          </p:cNvSpPr>
+          <p:nvPr>
+            <p:ph type="sldImg"/>
+          </p:nvPr>
+        </p:nvSpPr>
+        <p:spPr/>
+      </p:sp>
+      <p:sp>
+        <p:nvSpPr>
+          <p:cNvPr id="3" name="备注占位符 2">
+            <a:extLst>
+              <a:ext uri="{FF2B5EF4-FFF2-40B4-BE49-F238E27FC236}">
+                <a16:creationId xmlns:a16="http://schemas.microsoft.com/office/drawing/2014/main" id="{1482D918-37CA-C0DA-F54F-3D9282C4B2D5}"/>
+              </a:ext>
+            </a:extLst>
+          </p:cNvPr>
+          <p:cNvSpPr>
+            <a:spLocks noGrp="1"/>
+          </p:cNvSpPr>
+          <p:nvPr>
+            <p:ph type="body" idx="1"/>
+          </p:nvPr>
+        </p:nvSpPr>
+        <p:spPr/>
+        <p:txBody>
+          <a:bodyPr/>
+          <a:lstStyle/>
+          <a:p>
+            <a:endParaRPr lang="zh-CN" altLang="en-US" dirty="0"/>
+          </a:p>
+        </p:txBody>
+      </p:sp>
+      <p:sp>
+        <p:nvSpPr>
+          <p:cNvPr id="4" name="灯片编号占位符 3">
+            <a:extLst>
+              <a:ext uri="{FF2B5EF4-FFF2-40B4-BE49-F238E27FC236}">
+                <a16:creationId xmlns:a16="http://schemas.microsoft.com/office/drawing/2014/main" id="{08CA0B6C-5542-3DAF-8A41-4607608DE77D}"/>
+              </a:ext>
+            </a:extLst>
+          </p:cNvPr>
+          <p:cNvSpPr>
+            <a:spLocks noGrp="1"/>
+          </p:cNvSpPr>
+          <p:nvPr>
+            <p:ph type="sldNum" sz="quarter" idx="5"/>
+          </p:nvPr>
+        </p:nvSpPr>
+        <p:spPr/>
+        <p:txBody>
+          <a:bodyPr/>
+          <a:lstStyle/>
+          <a:p>
+            <a:fld id="{AF077E88-3244-4C0E-BEFE-A6A75CD3D1BB}" type="slidenum">
+              <a:rPr lang="zh-CN" altLang="en-US" smtClean="0"/>
+              <a:t>5</a:t>
+            </a:fld>
+            <a:endParaRPr lang="zh-CN" altLang="en-US"/>
+          </a:p>
+        </p:txBody>
+      </p:sp>
+    </p:spTree>
+    <p:extLst>
+      <p:ext uri="{BB962C8B-B14F-4D97-AF65-F5344CB8AC3E}">
+        <p14:creationId xmlns:p14="http://schemas.microsoft.com/office/powerpoint/2010/main" val="1505853374"/>
+      </p:ext>
+    </p:extLst>
+  </p:cSld>
+  <p:clrMapOvr>
+    <a:masterClrMapping/>
+  </p:clrMapOvr>
+</p:notes>
+</file>
+
 <file path=ppt/slideLayouts/slideLayout1.xml><?xml version="1.0" encoding="utf-8"?>
 <p:sldLayout xmlns:a="http://schemas.openxmlformats.org/drawingml/2006/main" xmlns:r="http://schemas.openxmlformats.org/officeDocument/2006/relationships" xmlns:p="http://schemas.openxmlformats.org/presentationml/2006/main" type="title" preserve="1">
   <p:cSld name="标题幻灯片">
@@ -6006,7 +6895,7 @@
           <a:p>
             <a:fld id="{3CAF1464-0EA4-453D-A90B-03B04D244405}" type="datetimeFigureOut">
               <a:rPr lang="zh-CN" altLang="en-US" smtClean="0"/>
-              <a:t>2025/5/22</a:t>
+              <a:t>2025/5/23</a:t>
             </a:fld>
             <a:endParaRPr lang="zh-CN" altLang="en-US"/>
           </a:p>
@@ -6176,7 +7065,7 @@
           <a:p>
             <a:fld id="{3CAF1464-0EA4-453D-A90B-03B04D244405}" type="datetimeFigureOut">
               <a:rPr lang="zh-CN" altLang="en-US" smtClean="0"/>
-              <a:t>2025/5/22</a:t>
+              <a:t>2025/5/23</a:t>
             </a:fld>
             <a:endParaRPr lang="zh-CN" altLang="en-US"/>
           </a:p>
@@ -6356,7 +7245,7 @@
           <a:p>
             <a:fld id="{3CAF1464-0EA4-453D-A90B-03B04D244405}" type="datetimeFigureOut">
               <a:rPr lang="zh-CN" altLang="en-US" smtClean="0"/>
-              <a:t>2025/5/22</a:t>
+              <a:t>2025/5/23</a:t>
             </a:fld>
             <a:endParaRPr lang="zh-CN" altLang="en-US"/>
           </a:p>
@@ -6526,7 +7415,7 @@
           <a:p>
             <a:fld id="{3CAF1464-0EA4-453D-A90B-03B04D244405}" type="datetimeFigureOut">
               <a:rPr lang="zh-CN" altLang="en-US" smtClean="0"/>
-              <a:t>2025/5/22</a:t>
+              <a:t>2025/5/23</a:t>
             </a:fld>
             <a:endParaRPr lang="zh-CN" altLang="en-US"/>
           </a:p>
@@ -6772,7 +7661,7 @@
           <a:p>
             <a:fld id="{3CAF1464-0EA4-453D-A90B-03B04D244405}" type="datetimeFigureOut">
               <a:rPr lang="zh-CN" altLang="en-US" smtClean="0"/>
-              <a:t>2025/5/22</a:t>
+              <a:t>2025/5/23</a:t>
             </a:fld>
             <a:endParaRPr lang="zh-CN" altLang="en-US"/>
           </a:p>
@@ -7004,7 +7893,7 @@
           <a:p>
             <a:fld id="{3CAF1464-0EA4-453D-A90B-03B04D244405}" type="datetimeFigureOut">
               <a:rPr lang="zh-CN" altLang="en-US" smtClean="0"/>
-              <a:t>2025/5/22</a:t>
+              <a:t>2025/5/23</a:t>
             </a:fld>
             <a:endParaRPr lang="zh-CN" altLang="en-US"/>
           </a:p>
@@ -7371,7 +8260,7 @@
           <a:p>
             <a:fld id="{3CAF1464-0EA4-453D-A90B-03B04D244405}" type="datetimeFigureOut">
               <a:rPr lang="zh-CN" altLang="en-US" smtClean="0"/>
-              <a:t>2025/5/22</a:t>
+              <a:t>2025/5/23</a:t>
             </a:fld>
             <a:endParaRPr lang="zh-CN" altLang="en-US"/>
           </a:p>
@@ -7489,7 +8378,7 @@
           <a:p>
             <a:fld id="{3CAF1464-0EA4-453D-A90B-03B04D244405}" type="datetimeFigureOut">
               <a:rPr lang="zh-CN" altLang="en-US" smtClean="0"/>
-              <a:t>2025/5/22</a:t>
+              <a:t>2025/5/23</a:t>
             </a:fld>
             <a:endParaRPr lang="zh-CN" altLang="en-US"/>
           </a:p>
@@ -7584,7 +8473,7 @@
           <a:p>
             <a:fld id="{3CAF1464-0EA4-453D-A90B-03B04D244405}" type="datetimeFigureOut">
               <a:rPr lang="zh-CN" altLang="en-US" smtClean="0"/>
-              <a:t>2025/5/22</a:t>
+              <a:t>2025/5/23</a:t>
             </a:fld>
             <a:endParaRPr lang="zh-CN" altLang="en-US"/>
           </a:p>
@@ -7861,7 +8750,7 @@
           <a:p>
             <a:fld id="{3CAF1464-0EA4-453D-A90B-03B04D244405}" type="datetimeFigureOut">
               <a:rPr lang="zh-CN" altLang="en-US" smtClean="0"/>
-              <a:t>2025/5/22</a:t>
+              <a:t>2025/5/23</a:t>
             </a:fld>
             <a:endParaRPr lang="zh-CN" altLang="en-US"/>
           </a:p>
@@ -8118,7 +9007,7 @@
           <a:p>
             <a:fld id="{3CAF1464-0EA4-453D-A90B-03B04D244405}" type="datetimeFigureOut">
               <a:rPr lang="zh-CN" altLang="en-US" smtClean="0"/>
-              <a:t>2025/5/22</a:t>
+              <a:t>2025/5/23</a:t>
             </a:fld>
             <a:endParaRPr lang="zh-CN" altLang="en-US"/>
           </a:p>
@@ -8331,7 +9220,7 @@
           <a:p>
             <a:fld id="{3CAF1464-0EA4-453D-A90B-03B04D244405}" type="datetimeFigureOut">
               <a:rPr lang="zh-CN" altLang="en-US" smtClean="0"/>
-              <a:t>2025/5/22</a:t>
+              <a:t>2025/5/23</a:t>
             </a:fld>
             <a:endParaRPr lang="zh-CN" altLang="en-US"/>
           </a:p>
@@ -11405,7 +12294,7 @@
         </p:nvGrpSpPr>
         <p:grpSpPr>
           <a:xfrm>
-            <a:off x="3871942" y="2286559"/>
+            <a:off x="5046936" y="2321584"/>
             <a:ext cx="3787542" cy="1923993"/>
             <a:chOff x="3171589" y="1751612"/>
             <a:chExt cx="5718386" cy="2904822"/>
@@ -11821,7 +12710,7 @@
         </p:nvSpPr>
         <p:spPr>
           <a:xfrm>
-            <a:off x="7726410" y="2932918"/>
+            <a:off x="8901404" y="2967943"/>
             <a:ext cx="811441" cy="338554"/>
           </a:xfrm>
           <a:prstGeom prst="rect">
@@ -11930,7 +12819,7 @@
         </p:nvCxnSpPr>
         <p:spPr>
           <a:xfrm flipH="1" flipV="1">
-            <a:off x="6784975" y="2368550"/>
+            <a:off x="7959969" y="2403575"/>
             <a:ext cx="115888" cy="28575"/>
           </a:xfrm>
           <a:prstGeom prst="straightConnector1">
@@ -11972,7 +12861,7 @@
         </p:nvSpPr>
         <p:spPr>
           <a:xfrm>
-            <a:off x="6993433" y="2084667"/>
+            <a:off x="8168427" y="2119692"/>
             <a:ext cx="333746" cy="338554"/>
           </a:xfrm>
           <a:prstGeom prst="rect">
@@ -12035,7 +12924,7 @@
         </p:nvSpPr>
         <p:spPr>
           <a:xfrm>
-            <a:off x="3026598" y="2719212"/>
+            <a:off x="4201592" y="2754237"/>
             <a:ext cx="776175" cy="338554"/>
           </a:xfrm>
           <a:prstGeom prst="rect">
@@ -12151,7 +13040,7 @@
         </p:nvSpPr>
         <p:spPr>
           <a:xfrm>
-            <a:off x="5427045" y="1858905"/>
+            <a:off x="6602039" y="1893930"/>
             <a:ext cx="811441" cy="338554"/>
           </a:xfrm>
           <a:prstGeom prst="rect">
@@ -12244,7 +13133,7 @@
         </p:nvSpPr>
         <p:spPr>
           <a:xfrm>
-            <a:off x="5760631" y="3724927"/>
+            <a:off x="6935625" y="3759952"/>
             <a:ext cx="734496" cy="338554"/>
           </a:xfrm>
           <a:prstGeom prst="rect">
@@ -12351,7 +13240,7 @@
         </p:nvSpPr>
         <p:spPr>
           <a:xfrm>
-            <a:off x="7663968" y="3321029"/>
+            <a:off x="8838962" y="3356054"/>
             <a:ext cx="750526" cy="338554"/>
           </a:xfrm>
           <a:prstGeom prst="rect">
@@ -12413,7 +13302,7 @@
         </p:nvSpPr>
         <p:spPr>
           <a:xfrm>
-            <a:off x="5282775" y="4269124"/>
+            <a:off x="6457769" y="4304149"/>
             <a:ext cx="955711" cy="338554"/>
           </a:xfrm>
           <a:prstGeom prst="rect">
@@ -12475,7 +13364,7 @@
         </p:nvSpPr>
         <p:spPr>
           <a:xfrm>
-            <a:off x="2861550" y="3156774"/>
+            <a:off x="4036544" y="3191799"/>
             <a:ext cx="955711" cy="338554"/>
           </a:xfrm>
           <a:prstGeom prst="rect">
@@ -12537,7 +13426,7 @@
         </p:nvSpPr>
         <p:spPr>
           <a:xfrm>
-            <a:off x="5406205" y="2684609"/>
+            <a:off x="6581199" y="2719634"/>
             <a:ext cx="853119" cy="338554"/>
           </a:xfrm>
           <a:prstGeom prst="rect">
@@ -12613,7 +13502,7 @@
         </p:nvSpPr>
         <p:spPr>
           <a:xfrm>
-            <a:off x="5043126" y="4617276"/>
+            <a:off x="6218120" y="4652301"/>
             <a:ext cx="1358064" cy="338554"/>
           </a:xfrm>
           <a:prstGeom prst="rect">
@@ -12659,7 +13548,7 @@
         </p:nvSpPr>
         <p:spPr>
           <a:xfrm>
-            <a:off x="5126481" y="1531860"/>
+            <a:off x="6301475" y="1566885"/>
             <a:ext cx="1412566" cy="338554"/>
           </a:xfrm>
           <a:prstGeom prst="rect">
@@ -12683,6 +13572,96 @@
                 <a:cs typeface="Times New Roman" panose="02020603050405020304" pitchFamily="18" charset="0"/>
               </a:rPr>
               <a:t>advancing side</a:t>
+            </a:r>
+            <a:endParaRPr lang="zh-CN" altLang="en-US" sz="1600" baseline="-25000" dirty="0">
+              <a:latin typeface="Times New Roman" panose="02020603050405020304" pitchFamily="18" charset="0"/>
+              <a:cs typeface="Times New Roman" panose="02020603050405020304" pitchFamily="18" charset="0"/>
+            </a:endParaRPr>
+          </a:p>
+        </p:txBody>
+      </p:sp>
+      <p:cxnSp>
+        <p:nvCxnSpPr>
+          <p:cNvPr id="3" name="直接箭头连接符 2">
+            <a:extLst>
+              <a:ext uri="{FF2B5EF4-FFF2-40B4-BE49-F238E27FC236}">
+                <a16:creationId xmlns:a16="http://schemas.microsoft.com/office/drawing/2014/main" id="{851B6599-330B-91FC-3997-981CFF75F9BB}"/>
+              </a:ext>
+            </a:extLst>
+          </p:cNvPr>
+          <p:cNvCxnSpPr>
+            <a:cxnSpLocks/>
+          </p:cNvCxnSpPr>
+          <p:nvPr/>
+        </p:nvCxnSpPr>
+        <p:spPr>
+          <a:xfrm>
+            <a:off x="2146137" y="3217517"/>
+            <a:ext cx="1544173" cy="75109"/>
+          </a:xfrm>
+          <a:prstGeom prst="straightConnector1">
+            <a:avLst/>
+          </a:prstGeom>
+          <a:ln w="12700">
+            <a:solidFill>
+              <a:schemeClr val="tx1"/>
+            </a:solidFill>
+            <a:tailEnd type="triangle"/>
+          </a:ln>
+        </p:spPr>
+        <p:style>
+          <a:lnRef idx="2">
+            <a:schemeClr val="accent1"/>
+          </a:lnRef>
+          <a:fillRef idx="0">
+            <a:schemeClr val="accent1"/>
+          </a:fillRef>
+          <a:effectRef idx="1">
+            <a:schemeClr val="accent1"/>
+          </a:effectRef>
+          <a:fontRef idx="minor">
+            <a:schemeClr val="tx1"/>
+          </a:fontRef>
+        </p:style>
+      </p:cxnSp>
+      <p:sp>
+        <p:nvSpPr>
+          <p:cNvPr id="9" name="文本框 8">
+            <a:extLst>
+              <a:ext uri="{FF2B5EF4-FFF2-40B4-BE49-F238E27FC236}">
+                <a16:creationId xmlns:a16="http://schemas.microsoft.com/office/drawing/2014/main" id="{BF25BBE2-6F1D-5975-8FEB-752EC76148E4}"/>
+              </a:ext>
+            </a:extLst>
+          </p:cNvPr>
+          <p:cNvSpPr txBox="1"/>
+          <p:nvPr/>
+        </p:nvSpPr>
+        <p:spPr>
+          <a:xfrm>
+            <a:off x="2037028" y="2846134"/>
+            <a:ext cx="1265090" cy="338554"/>
+          </a:xfrm>
+          <a:prstGeom prst="rect">
+            <a:avLst/>
+          </a:prstGeom>
+          <a:noFill/>
+          <a:ln>
+            <a:noFill/>
+          </a:ln>
+        </p:spPr>
+        <p:txBody>
+          <a:bodyPr wrap="none" rtlCol="0">
+            <a:spAutoFit/>
+          </a:bodyPr>
+          <a:lstStyle/>
+          <a:p>
+            <a:r>
+              <a:rPr lang="en-US" altLang="zh-CN" sz="1600" dirty="0">
+                <a:latin typeface="Times New Roman" panose="02020603050405020304" pitchFamily="18" charset="0"/>
+                <a:ea typeface="等线" panose="02010600030101010101" pitchFamily="2" charset="-122"/>
+                <a:cs typeface="Times New Roman" panose="02020603050405020304" pitchFamily="18" charset="0"/>
+              </a:rPr>
+              <a:t>relative wind</a:t>
             </a:r>
             <a:endParaRPr lang="zh-CN" altLang="en-US" sz="1600" baseline="-25000" dirty="0">
               <a:latin typeface="Times New Roman" panose="02020603050405020304" pitchFamily="18" charset="0"/>
@@ -16660,7 +17639,7 @@
         </p:nvSpPr>
         <p:spPr>
           <a:xfrm>
-            <a:off x="11000124" y="5631740"/>
+            <a:off x="11091604" y="4834100"/>
             <a:ext cx="124085" cy="124085"/>
           </a:xfrm>
           <a:prstGeom prst="flowChartSummingJunction">
@@ -16714,7 +17693,7 @@
         </p:nvCxnSpPr>
         <p:spPr>
           <a:xfrm>
-            <a:off x="11124209" y="5689279"/>
+            <a:off x="11215689" y="4891639"/>
             <a:ext cx="557431" cy="4504"/>
           </a:xfrm>
           <a:prstGeom prst="straightConnector1">
@@ -16758,7 +17737,7 @@
         </p:nvCxnSpPr>
         <p:spPr>
           <a:xfrm>
-            <a:off x="11062166" y="5755825"/>
+            <a:off x="11153646" y="4958185"/>
             <a:ext cx="0" cy="542901"/>
           </a:xfrm>
           <a:prstGeom prst="straightConnector1">
@@ -16800,7 +17779,7 @@
         </p:nvSpPr>
         <p:spPr>
           <a:xfrm>
-            <a:off x="1202102" y="5681210"/>
+            <a:off x="928131" y="4911380"/>
             <a:ext cx="124085" cy="124085"/>
           </a:xfrm>
           <a:prstGeom prst="flowChartSummingJunction">
@@ -16854,7 +17833,7 @@
         </p:nvCxnSpPr>
         <p:spPr>
           <a:xfrm flipH="1">
-            <a:off x="654196" y="5745099"/>
+            <a:off x="380225" y="4975269"/>
             <a:ext cx="547906" cy="0"/>
           </a:xfrm>
           <a:prstGeom prst="straightConnector1">
@@ -16898,7 +17877,7 @@
         </p:nvCxnSpPr>
         <p:spPr>
           <a:xfrm>
-            <a:off x="1264144" y="5805295"/>
+            <a:off x="990173" y="5035465"/>
             <a:ext cx="0" cy="542901"/>
           </a:xfrm>
           <a:prstGeom prst="straightConnector1">
@@ -16940,7 +17919,7 @@
         </p:nvGrpSpPr>
         <p:grpSpPr>
           <a:xfrm rot="153205">
-            <a:off x="646000" y="5672521"/>
+            <a:off x="372029" y="4902691"/>
             <a:ext cx="665791" cy="661173"/>
             <a:chOff x="746098" y="5323114"/>
             <a:chExt cx="665791" cy="661173"/>
@@ -17566,7 +18545,7 @@
           </p:nvCxnSpPr>
           <p:spPr>
             <a:xfrm rot="935833" flipV="1">
-              <a:off x="7767560" y="2850889"/>
+              <a:off x="7803576" y="2865144"/>
               <a:ext cx="0" cy="833166"/>
             </a:xfrm>
             <a:prstGeom prst="straightConnector1">
@@ -17611,7 +18590,7 @@
           </p:nvCxnSpPr>
           <p:spPr>
             <a:xfrm rot="935833" flipV="1">
-              <a:off x="7527439" y="2270462"/>
+              <a:off x="7506131" y="2264057"/>
               <a:ext cx="0" cy="1336933"/>
             </a:xfrm>
             <a:prstGeom prst="straightConnector1">
@@ -18319,7 +19298,7 @@
         </p:nvGrpSpPr>
         <p:grpSpPr>
           <a:xfrm>
-            <a:off x="10976099" y="5633932"/>
+            <a:off x="11067579" y="4836292"/>
             <a:ext cx="697199" cy="654705"/>
             <a:chOff x="10002352" y="5149325"/>
             <a:chExt cx="697199" cy="654705"/>
@@ -18744,7 +19723,7 @@
         </p:nvSpPr>
         <p:spPr>
           <a:xfrm>
-            <a:off x="387266" y="5745099"/>
+            <a:off x="113295" y="4975269"/>
             <a:ext cx="348172" cy="338554"/>
           </a:xfrm>
           <a:prstGeom prst="rect">
@@ -18802,7 +19781,7 @@
         </p:nvSpPr>
         <p:spPr>
           <a:xfrm>
-            <a:off x="1312586" y="5586548"/>
+            <a:off x="1038615" y="4816718"/>
             <a:ext cx="359394" cy="338554"/>
           </a:xfrm>
           <a:prstGeom prst="rect">
@@ -18851,7 +19830,7 @@
         </p:nvSpPr>
         <p:spPr>
           <a:xfrm>
-            <a:off x="968645" y="6214653"/>
+            <a:off x="694674" y="5444823"/>
             <a:ext cx="348172" cy="338554"/>
           </a:xfrm>
           <a:prstGeom prst="rect">
@@ -18900,7 +19879,7 @@
         </p:nvSpPr>
         <p:spPr>
           <a:xfrm>
-            <a:off x="1326187" y="6225724"/>
+            <a:off x="1052216" y="5455894"/>
             <a:ext cx="348172" cy="338554"/>
           </a:xfrm>
           <a:prstGeom prst="rect">
@@ -18958,7 +19937,7 @@
         </p:nvSpPr>
         <p:spPr>
           <a:xfrm>
-            <a:off x="1097806" y="5307463"/>
+            <a:off x="823835" y="4537633"/>
             <a:ext cx="359394" cy="338554"/>
           </a:xfrm>
           <a:prstGeom prst="rect">
@@ -19016,7 +19995,7 @@
         </p:nvSpPr>
         <p:spPr>
           <a:xfrm>
-            <a:off x="288840" y="5435856"/>
+            <a:off x="14869" y="4666026"/>
             <a:ext cx="359394" cy="338554"/>
           </a:xfrm>
           <a:prstGeom prst="rect">
@@ -19065,7 +20044,7 @@
         </p:nvSpPr>
         <p:spPr>
           <a:xfrm>
-            <a:off x="10710383" y="5250856"/>
+            <a:off x="10801863" y="4453216"/>
             <a:ext cx="359394" cy="338554"/>
           </a:xfrm>
           <a:prstGeom prst="rect">
@@ -19123,7 +20102,7 @@
         </p:nvSpPr>
         <p:spPr>
           <a:xfrm>
-            <a:off x="11681640" y="5417271"/>
+            <a:off x="11773120" y="4619631"/>
             <a:ext cx="359394" cy="338554"/>
           </a:xfrm>
           <a:prstGeom prst="rect">
@@ -19172,7 +20151,7 @@
         </p:nvSpPr>
         <p:spPr>
           <a:xfrm>
-            <a:off x="10960350" y="6253534"/>
+            <a:off x="11051830" y="5455894"/>
             <a:ext cx="348172" cy="338554"/>
           </a:xfrm>
           <a:prstGeom prst="rect">
@@ -19221,7 +20200,7 @@
         </p:nvSpPr>
         <p:spPr>
           <a:xfrm>
-            <a:off x="10635131" y="6178919"/>
+            <a:off x="10726611" y="5381279"/>
             <a:ext cx="348172" cy="338554"/>
           </a:xfrm>
           <a:prstGeom prst="rect">
@@ -19279,7 +20258,7 @@
         </p:nvSpPr>
         <p:spPr>
           <a:xfrm>
-            <a:off x="11601917" y="5774410"/>
+            <a:off x="11693397" y="4976770"/>
             <a:ext cx="359394" cy="338554"/>
           </a:xfrm>
           <a:prstGeom prst="rect">
@@ -19337,7 +20316,7 @@
         </p:nvSpPr>
         <p:spPr>
           <a:xfrm>
-            <a:off x="10630660" y="5529678"/>
+            <a:off x="10722140" y="4732038"/>
             <a:ext cx="359394" cy="338554"/>
           </a:xfrm>
           <a:prstGeom prst="rect">
@@ -21496,10 +22475,10 @@
           </a:prstGeom>
           <a:gradFill>
             <a:gsLst>
-              <a:gs pos="24000">
+              <a:gs pos="22000">
                 <a:schemeClr val="bg1"/>
               </a:gs>
-              <a:gs pos="48000">
+              <a:gs pos="41000">
                 <a:schemeClr val="bg1">
                   <a:alpha val="0"/>
                 </a:schemeClr>
@@ -22305,6 +23284,238 @@
                 <a:cs typeface="Times New Roman" panose="02020603050405020304" pitchFamily="18" charset="0"/>
               </a:rPr>
               <a:t>ϕ</a:t>
+            </a:r>
+            <a:endParaRPr lang="zh-CN" altLang="en-US" sz="1600" i="1" baseline="-25000" dirty="0">
+              <a:solidFill>
+                <a:srgbClr val="0000CD"/>
+              </a:solidFill>
+              <a:latin typeface="Times New Roman" panose="02020603050405020304" pitchFamily="18" charset="0"/>
+              <a:cs typeface="Times New Roman" panose="02020603050405020304" pitchFamily="18" charset="0"/>
+            </a:endParaRPr>
+          </a:p>
+        </p:txBody>
+      </p:sp>
+      <p:sp>
+        <p:nvSpPr>
+          <p:cNvPr id="2" name="文本框 1">
+            <a:extLst>
+              <a:ext uri="{FF2B5EF4-FFF2-40B4-BE49-F238E27FC236}">
+                <a16:creationId xmlns:a16="http://schemas.microsoft.com/office/drawing/2014/main" id="{B59E7ED7-701A-8C03-5826-48621390B84B}"/>
+              </a:ext>
+            </a:extLst>
+          </p:cNvPr>
+          <p:cNvSpPr txBox="1"/>
+          <p:nvPr/>
+        </p:nvSpPr>
+        <p:spPr>
+          <a:xfrm>
+            <a:off x="8206670" y="3346128"/>
+            <a:ext cx="461986" cy="338554"/>
+          </a:xfrm>
+          <a:prstGeom prst="rect">
+            <a:avLst/>
+          </a:prstGeom>
+          <a:noFill/>
+        </p:spPr>
+        <p:txBody>
+          <a:bodyPr wrap="none" rtlCol="0">
+            <a:spAutoFit/>
+          </a:bodyPr>
+          <a:lstStyle/>
+          <a:p>
+            <a:r>
+              <a:rPr lang="en-US" altLang="zh-CN" sz="1600" i="1" dirty="0" err="1">
+                <a:solidFill>
+                  <a:srgbClr val="0000CD"/>
+                </a:solidFill>
+                <a:latin typeface="Times New Roman" panose="02020603050405020304" pitchFamily="18" charset="0"/>
+                <a:cs typeface="Times New Roman" panose="02020603050405020304" pitchFamily="18" charset="0"/>
+              </a:rPr>
+              <a:t>h</a:t>
+            </a:r>
+            <a:r>
+              <a:rPr lang="en-US" altLang="zh-CN" sz="1600" i="1" baseline="-25000" dirty="0" err="1">
+                <a:solidFill>
+                  <a:srgbClr val="0000CD"/>
+                </a:solidFill>
+                <a:latin typeface="Times New Roman" panose="02020603050405020304" pitchFamily="18" charset="0"/>
+                <a:cs typeface="Times New Roman" panose="02020603050405020304" pitchFamily="18" charset="0"/>
+              </a:rPr>
+              <a:t>VT</a:t>
+            </a:r>
+            <a:endParaRPr lang="zh-CN" altLang="en-US" sz="1600" i="1" baseline="-25000" dirty="0">
+              <a:solidFill>
+                <a:srgbClr val="0000CD"/>
+              </a:solidFill>
+              <a:latin typeface="Times New Roman" panose="02020603050405020304" pitchFamily="18" charset="0"/>
+              <a:cs typeface="Times New Roman" panose="02020603050405020304" pitchFamily="18" charset="0"/>
+            </a:endParaRPr>
+          </a:p>
+        </p:txBody>
+      </p:sp>
+      <p:sp>
+        <p:nvSpPr>
+          <p:cNvPr id="3" name="文本框 2">
+            <a:extLst>
+              <a:ext uri="{FF2B5EF4-FFF2-40B4-BE49-F238E27FC236}">
+                <a16:creationId xmlns:a16="http://schemas.microsoft.com/office/drawing/2014/main" id="{D865C23B-9E31-C867-3FF2-4112EEB099C5}"/>
+              </a:ext>
+            </a:extLst>
+          </p:cNvPr>
+          <p:cNvSpPr txBox="1"/>
+          <p:nvPr/>
+        </p:nvSpPr>
+        <p:spPr>
+          <a:xfrm>
+            <a:off x="7529347" y="2766920"/>
+            <a:ext cx="470000" cy="338554"/>
+          </a:xfrm>
+          <a:prstGeom prst="rect">
+            <a:avLst/>
+          </a:prstGeom>
+          <a:noFill/>
+        </p:spPr>
+        <p:txBody>
+          <a:bodyPr wrap="none" rtlCol="0">
+            <a:spAutoFit/>
+          </a:bodyPr>
+          <a:lstStyle/>
+          <a:p>
+            <a:r>
+              <a:rPr lang="en-US" altLang="zh-CN" sz="1600" i="1" dirty="0" err="1">
+                <a:solidFill>
+                  <a:srgbClr val="0000CD"/>
+                </a:solidFill>
+                <a:latin typeface="Times New Roman" panose="02020603050405020304" pitchFamily="18" charset="0"/>
+                <a:cs typeface="Times New Roman" panose="02020603050405020304" pitchFamily="18" charset="0"/>
+              </a:rPr>
+              <a:t>h</a:t>
+            </a:r>
+            <a:r>
+              <a:rPr lang="en-US" altLang="zh-CN" sz="1600" i="1" baseline="-25000" dirty="0" err="1">
+                <a:solidFill>
+                  <a:srgbClr val="0000CD"/>
+                </a:solidFill>
+                <a:latin typeface="Times New Roman" panose="02020603050405020304" pitchFamily="18" charset="0"/>
+                <a:cs typeface="Times New Roman" panose="02020603050405020304" pitchFamily="18" charset="0"/>
+              </a:rPr>
+              <a:t>UR</a:t>
+            </a:r>
+            <a:endParaRPr lang="zh-CN" altLang="en-US" sz="1600" i="1" baseline="-25000" dirty="0">
+              <a:solidFill>
+                <a:srgbClr val="0000CD"/>
+              </a:solidFill>
+              <a:latin typeface="Times New Roman" panose="02020603050405020304" pitchFamily="18" charset="0"/>
+              <a:cs typeface="Times New Roman" panose="02020603050405020304" pitchFamily="18" charset="0"/>
+            </a:endParaRPr>
+          </a:p>
+        </p:txBody>
+      </p:sp>
+      <p:sp>
+        <p:nvSpPr>
+          <p:cNvPr id="4" name="文本框 3">
+            <a:extLst>
+              <a:ext uri="{FF2B5EF4-FFF2-40B4-BE49-F238E27FC236}">
+                <a16:creationId xmlns:a16="http://schemas.microsoft.com/office/drawing/2014/main" id="{A394A4D0-6823-8424-0281-F8AC5F6CB0BD}"/>
+              </a:ext>
+            </a:extLst>
+          </p:cNvPr>
+          <p:cNvSpPr txBox="1"/>
+          <p:nvPr/>
+        </p:nvSpPr>
+        <p:spPr>
+          <a:xfrm>
+            <a:off x="7875994" y="3033516"/>
+            <a:ext cx="445956" cy="338554"/>
+          </a:xfrm>
+          <a:prstGeom prst="rect">
+            <a:avLst/>
+          </a:prstGeom>
+          <a:noFill/>
+        </p:spPr>
+        <p:txBody>
+          <a:bodyPr wrap="none" rtlCol="0">
+            <a:spAutoFit/>
+          </a:bodyPr>
+          <a:lstStyle/>
+          <a:p>
+            <a:r>
+              <a:rPr lang="en-US" altLang="zh-CN" sz="1600" i="1" dirty="0" err="1">
+                <a:solidFill>
+                  <a:srgbClr val="0000CD"/>
+                </a:solidFill>
+                <a:latin typeface="Times New Roman" panose="02020603050405020304" pitchFamily="18" charset="0"/>
+                <a:cs typeface="Times New Roman" panose="02020603050405020304" pitchFamily="18" charset="0"/>
+              </a:rPr>
+              <a:t>h</a:t>
+            </a:r>
+            <a:r>
+              <a:rPr lang="en-US" altLang="zh-CN" sz="1600" i="1" baseline="-25000" dirty="0" err="1">
+                <a:solidFill>
+                  <a:srgbClr val="0000CD"/>
+                </a:solidFill>
+                <a:latin typeface="Times New Roman" panose="02020603050405020304" pitchFamily="18" charset="0"/>
+                <a:cs typeface="Times New Roman" panose="02020603050405020304" pitchFamily="18" charset="0"/>
+              </a:rPr>
+              <a:t>LR</a:t>
+            </a:r>
+            <a:endParaRPr lang="zh-CN" altLang="en-US" sz="1600" i="1" baseline="-25000" dirty="0">
+              <a:solidFill>
+                <a:srgbClr val="0000CD"/>
+              </a:solidFill>
+              <a:latin typeface="Times New Roman" panose="02020603050405020304" pitchFamily="18" charset="0"/>
+              <a:cs typeface="Times New Roman" panose="02020603050405020304" pitchFamily="18" charset="0"/>
+            </a:endParaRPr>
+          </a:p>
+        </p:txBody>
+      </p:sp>
+      <p:sp>
+        <p:nvSpPr>
+          <p:cNvPr id="5" name="文本框 4">
+            <a:extLst>
+              <a:ext uri="{FF2B5EF4-FFF2-40B4-BE49-F238E27FC236}">
+                <a16:creationId xmlns:a16="http://schemas.microsoft.com/office/drawing/2014/main" id="{5DBDA668-D12D-B5BA-A487-BD758F21D7F0}"/>
+              </a:ext>
+            </a:extLst>
+          </p:cNvPr>
+          <p:cNvSpPr txBox="1"/>
+          <p:nvPr/>
+        </p:nvSpPr>
+        <p:spPr>
+          <a:xfrm>
+            <a:off x="8902686" y="3552494"/>
+            <a:ext cx="461986" cy="338554"/>
+          </a:xfrm>
+          <a:prstGeom prst="rect">
+            <a:avLst/>
+          </a:prstGeom>
+          <a:noFill/>
+        </p:spPr>
+        <p:txBody>
+          <a:bodyPr wrap="none" rtlCol="0">
+            <a:spAutoFit/>
+          </a:bodyPr>
+          <a:lstStyle/>
+          <a:p>
+            <a:r>
+              <a:rPr lang="en-US" altLang="zh-CN" sz="1600" i="1" dirty="0" err="1">
+                <a:solidFill>
+                  <a:srgbClr val="0000CD"/>
+                </a:solidFill>
+                <a:latin typeface="Times New Roman" panose="02020603050405020304" pitchFamily="18" charset="0"/>
+                <a:cs typeface="Times New Roman" panose="02020603050405020304" pitchFamily="18" charset="0"/>
+              </a:rPr>
+              <a:t>h</a:t>
+            </a:r>
+            <a:r>
+              <a:rPr lang="en-US" altLang="zh-CN" sz="1600" i="1" baseline="-25000" dirty="0" err="1">
+                <a:solidFill>
+                  <a:srgbClr val="0000CD"/>
+                </a:solidFill>
+                <a:latin typeface="Times New Roman" panose="02020603050405020304" pitchFamily="18" charset="0"/>
+                <a:cs typeface="Times New Roman" panose="02020603050405020304" pitchFamily="18" charset="0"/>
+              </a:rPr>
+              <a:t>HT</a:t>
             </a:r>
             <a:endParaRPr lang="zh-CN" altLang="en-US" sz="1600" i="1" baseline="-25000" dirty="0">
               <a:solidFill>
@@ -23161,7 +24372,9 @@
               </a:ext>
             </a:extLst>
           </p:cNvPr>
-          <p:cNvCxnSpPr/>
+          <p:cNvCxnSpPr>
+            <a:cxnSpLocks/>
+          </p:cNvCxnSpPr>
           <p:nvPr/>
         </p:nvCxnSpPr>
         <p:spPr>
@@ -23483,6 +24696,3136 @@
     <p:extLst>
       <p:ext uri="{BB962C8B-B14F-4D97-AF65-F5344CB8AC3E}">
         <p14:creationId xmlns:p14="http://schemas.microsoft.com/office/powerpoint/2010/main" val="3137520481"/>
+      </p:ext>
+    </p:extLst>
+  </p:cSld>
+  <p:clrMapOvr>
+    <a:masterClrMapping/>
+  </p:clrMapOvr>
+</p:sld>
+</file>
+
+<file path=ppt/slides/slide5.xml><?xml version="1.0" encoding="utf-8"?>
+<p:sld xmlns:a="http://schemas.openxmlformats.org/drawingml/2006/main" xmlns:r="http://schemas.openxmlformats.org/officeDocument/2006/relationships" xmlns:p="http://schemas.openxmlformats.org/presentationml/2006/main">
+  <p:cSld>
+    <p:spTree>
+      <p:nvGrpSpPr>
+        <p:cNvPr id="1" name="">
+          <a:extLst>
+            <a:ext uri="{FF2B5EF4-FFF2-40B4-BE49-F238E27FC236}">
+              <a16:creationId xmlns:a16="http://schemas.microsoft.com/office/drawing/2014/main" id="{3C0BC437-7B0E-7DF8-F2B1-B9445588F67E}"/>
+            </a:ext>
+          </a:extLst>
+        </p:cNvPr>
+        <p:cNvGrpSpPr/>
+        <p:nvPr/>
+      </p:nvGrpSpPr>
+      <p:grpSpPr>
+        <a:xfrm>
+          <a:off x="0" y="0"/>
+          <a:ext cx="0" cy="0"/>
+          <a:chOff x="0" y="0"/>
+          <a:chExt cx="0" cy="0"/>
+        </a:xfrm>
+      </p:grpSpPr>
+      <p:sp>
+        <p:nvSpPr>
+          <p:cNvPr id="2" name="矩形 1">
+            <a:extLst>
+              <a:ext uri="{FF2B5EF4-FFF2-40B4-BE49-F238E27FC236}">
+                <a16:creationId xmlns:a16="http://schemas.microsoft.com/office/drawing/2014/main" id="{AAF2876B-BAD6-F898-5EFF-FA8340A43036}"/>
+              </a:ext>
+            </a:extLst>
+          </p:cNvPr>
+          <p:cNvSpPr/>
+          <p:nvPr/>
+        </p:nvSpPr>
+        <p:spPr>
+          <a:xfrm>
+            <a:off x="123576" y="3105414"/>
+            <a:ext cx="2450486" cy="647171"/>
+          </a:xfrm>
+          <a:prstGeom prst="rect">
+            <a:avLst/>
+          </a:prstGeom>
+          <a:solidFill>
+            <a:schemeClr val="bg1"/>
+          </a:solidFill>
+          <a:ln w="19050">
+            <a:solidFill>
+              <a:schemeClr val="tx1"/>
+            </a:solidFill>
+          </a:ln>
+        </p:spPr>
+        <p:style>
+          <a:lnRef idx="2">
+            <a:schemeClr val="accent1">
+              <a:shade val="50000"/>
+            </a:schemeClr>
+          </a:lnRef>
+          <a:fillRef idx="1">
+            <a:schemeClr val="accent1"/>
+          </a:fillRef>
+          <a:effectRef idx="0">
+            <a:schemeClr val="accent1"/>
+          </a:effectRef>
+          <a:fontRef idx="minor">
+            <a:schemeClr val="lt1"/>
+          </a:fontRef>
+        </p:style>
+        <p:txBody>
+          <a:bodyPr rtlCol="0" anchor="ctr"/>
+          <a:lstStyle/>
+          <a:p>
+            <a:pPr algn="ctr"/>
+            <a:r>
+              <a:rPr lang="en-US" altLang="zh-CN" sz="1400" dirty="0">
+                <a:solidFill>
+                  <a:schemeClr val="tx1"/>
+                </a:solidFill>
+                <a:latin typeface="Times New Roman" panose="02020603050405020304" pitchFamily="18" charset="0"/>
+                <a:cs typeface="Times New Roman" panose="02020603050405020304" pitchFamily="18" charset="0"/>
+              </a:rPr>
+              <a:t>State (rigid body)</a:t>
+            </a:r>
+            <a:endParaRPr lang="en-GB" sz="1400" noProof="0" dirty="0">
+              <a:solidFill>
+                <a:schemeClr val="tx1"/>
+              </a:solidFill>
+              <a:latin typeface="Times New Roman" panose="02020603050405020304" pitchFamily="18" charset="0"/>
+              <a:cs typeface="Times New Roman" panose="02020603050405020304" pitchFamily="18" charset="0"/>
+            </a:endParaRPr>
+          </a:p>
+          <a:p>
+            <a:pPr algn="ctr"/>
+            <a:r>
+              <a:rPr lang="en-GB" sz="1600" dirty="0">
+                <a:solidFill>
+                  <a:schemeClr val="tx1"/>
+                </a:solidFill>
+                <a:latin typeface="Times New Roman" panose="02020603050405020304" pitchFamily="18" charset="0"/>
+                <a:cs typeface="Times New Roman" panose="02020603050405020304" pitchFamily="18" charset="0"/>
+              </a:rPr>
+              <a:t>[</a:t>
+            </a:r>
+            <a:r>
+              <a:rPr lang="en-GB" sz="1600" i="1" dirty="0">
+                <a:solidFill>
+                  <a:schemeClr val="tx1"/>
+                </a:solidFill>
+                <a:latin typeface="Times New Roman" panose="02020603050405020304" pitchFamily="18" charset="0"/>
+                <a:cs typeface="Times New Roman" panose="02020603050405020304" pitchFamily="18" charset="0"/>
+              </a:rPr>
+              <a:t>u</a:t>
+            </a:r>
+            <a:r>
+              <a:rPr lang="en-GB" sz="1600" dirty="0">
+                <a:solidFill>
+                  <a:schemeClr val="tx1"/>
+                </a:solidFill>
+                <a:latin typeface="Times New Roman" panose="02020603050405020304" pitchFamily="18" charset="0"/>
+                <a:cs typeface="Times New Roman" panose="02020603050405020304" pitchFamily="18" charset="0"/>
+              </a:rPr>
+              <a:t>, </a:t>
+            </a:r>
+            <a:r>
+              <a:rPr lang="en-GB" sz="1600" i="1" dirty="0">
+                <a:solidFill>
+                  <a:schemeClr val="tx1"/>
+                </a:solidFill>
+                <a:latin typeface="Times New Roman" panose="02020603050405020304" pitchFamily="18" charset="0"/>
+                <a:cs typeface="Times New Roman" panose="02020603050405020304" pitchFamily="18" charset="0"/>
+              </a:rPr>
+              <a:t>v</a:t>
+            </a:r>
+            <a:r>
+              <a:rPr lang="en-GB" sz="1600" dirty="0">
+                <a:solidFill>
+                  <a:schemeClr val="tx1"/>
+                </a:solidFill>
+                <a:latin typeface="Times New Roman" panose="02020603050405020304" pitchFamily="18" charset="0"/>
+                <a:cs typeface="Times New Roman" panose="02020603050405020304" pitchFamily="18" charset="0"/>
+              </a:rPr>
+              <a:t>, </a:t>
+            </a:r>
+            <a:r>
+              <a:rPr lang="en-GB" sz="1600" i="1" dirty="0">
+                <a:solidFill>
+                  <a:schemeClr val="tx1"/>
+                </a:solidFill>
+                <a:latin typeface="Times New Roman" panose="02020603050405020304" pitchFamily="18" charset="0"/>
+                <a:cs typeface="Times New Roman" panose="02020603050405020304" pitchFamily="18" charset="0"/>
+              </a:rPr>
+              <a:t>w</a:t>
+            </a:r>
+            <a:r>
+              <a:rPr lang="en-GB" sz="1600" dirty="0">
+                <a:solidFill>
+                  <a:schemeClr val="tx1"/>
+                </a:solidFill>
+                <a:latin typeface="Times New Roman" panose="02020603050405020304" pitchFamily="18" charset="0"/>
+                <a:cs typeface="Times New Roman" panose="02020603050405020304" pitchFamily="18" charset="0"/>
+              </a:rPr>
+              <a:t>, </a:t>
+            </a:r>
+            <a:r>
+              <a:rPr lang="en-GB" sz="1600" i="1" dirty="0">
+                <a:solidFill>
+                  <a:schemeClr val="tx1"/>
+                </a:solidFill>
+                <a:latin typeface="Times New Roman" panose="02020603050405020304" pitchFamily="18" charset="0"/>
+                <a:cs typeface="Times New Roman" panose="02020603050405020304" pitchFamily="18" charset="0"/>
+              </a:rPr>
+              <a:t>p</a:t>
+            </a:r>
+            <a:r>
+              <a:rPr lang="en-GB" sz="1600" dirty="0">
+                <a:solidFill>
+                  <a:schemeClr val="tx1"/>
+                </a:solidFill>
+                <a:latin typeface="Times New Roman" panose="02020603050405020304" pitchFamily="18" charset="0"/>
+                <a:cs typeface="Times New Roman" panose="02020603050405020304" pitchFamily="18" charset="0"/>
+              </a:rPr>
+              <a:t>, </a:t>
+            </a:r>
+            <a:r>
+              <a:rPr lang="en-GB" sz="1600" i="1" dirty="0">
+                <a:solidFill>
+                  <a:schemeClr val="tx1"/>
+                </a:solidFill>
+                <a:latin typeface="Times New Roman" panose="02020603050405020304" pitchFamily="18" charset="0"/>
+                <a:cs typeface="Times New Roman" panose="02020603050405020304" pitchFamily="18" charset="0"/>
+              </a:rPr>
+              <a:t>q</a:t>
+            </a:r>
+            <a:r>
+              <a:rPr lang="en-GB" sz="1600" dirty="0">
+                <a:solidFill>
+                  <a:schemeClr val="tx1"/>
+                </a:solidFill>
+                <a:latin typeface="Times New Roman" panose="02020603050405020304" pitchFamily="18" charset="0"/>
+                <a:cs typeface="Times New Roman" panose="02020603050405020304" pitchFamily="18" charset="0"/>
+              </a:rPr>
+              <a:t>, </a:t>
+            </a:r>
+            <a:r>
+              <a:rPr lang="en-GB" sz="1600" i="1" dirty="0">
+                <a:solidFill>
+                  <a:schemeClr val="tx1"/>
+                </a:solidFill>
+                <a:latin typeface="Times New Roman" panose="02020603050405020304" pitchFamily="18" charset="0"/>
+                <a:cs typeface="Times New Roman" panose="02020603050405020304" pitchFamily="18" charset="0"/>
+              </a:rPr>
+              <a:t>r</a:t>
+            </a:r>
+            <a:r>
+              <a:rPr lang="en-GB" sz="1600" dirty="0">
+                <a:solidFill>
+                  <a:schemeClr val="tx1"/>
+                </a:solidFill>
+                <a:latin typeface="Times New Roman" panose="02020603050405020304" pitchFamily="18" charset="0"/>
+                <a:cs typeface="Times New Roman" panose="02020603050405020304" pitchFamily="18" charset="0"/>
+              </a:rPr>
+              <a:t>, </a:t>
+            </a:r>
+            <a:r>
+              <a:rPr lang="el-GR" sz="1600" i="1" dirty="0">
+                <a:solidFill>
+                  <a:schemeClr val="tx1"/>
+                </a:solidFill>
+                <a:latin typeface="Times New Roman" panose="02020603050405020304" pitchFamily="18" charset="0"/>
+                <a:ea typeface="等线" panose="02010600030101010101" pitchFamily="2" charset="-122"/>
+                <a:cs typeface="Times New Roman" panose="02020603050405020304" pitchFamily="18" charset="0"/>
+              </a:rPr>
+              <a:t>ϕ</a:t>
+            </a:r>
+            <a:r>
+              <a:rPr lang="en-US" sz="1600" dirty="0">
+                <a:solidFill>
+                  <a:schemeClr val="tx1"/>
+                </a:solidFill>
+                <a:latin typeface="Times New Roman" panose="02020603050405020304" pitchFamily="18" charset="0"/>
+                <a:ea typeface="等线" panose="02010600030101010101" pitchFamily="2" charset="-122"/>
+                <a:cs typeface="Times New Roman" panose="02020603050405020304" pitchFamily="18" charset="0"/>
+              </a:rPr>
+              <a:t>, </a:t>
+            </a:r>
+            <a:r>
+              <a:rPr lang="el-GR" sz="1600" i="1" dirty="0">
+                <a:solidFill>
+                  <a:schemeClr val="tx1"/>
+                </a:solidFill>
+                <a:latin typeface="Times New Roman" panose="02020603050405020304" pitchFamily="18" charset="0"/>
+                <a:ea typeface="等线" panose="02010600030101010101" pitchFamily="2" charset="-122"/>
+                <a:cs typeface="Times New Roman" panose="02020603050405020304" pitchFamily="18" charset="0"/>
+              </a:rPr>
+              <a:t>θ</a:t>
+            </a:r>
+            <a:r>
+              <a:rPr lang="en-US" sz="1600" dirty="0">
+                <a:solidFill>
+                  <a:schemeClr val="tx1"/>
+                </a:solidFill>
+                <a:latin typeface="Times New Roman" panose="02020603050405020304" pitchFamily="18" charset="0"/>
+                <a:ea typeface="等线" panose="02010600030101010101" pitchFamily="2" charset="-122"/>
+                <a:cs typeface="Times New Roman" panose="02020603050405020304" pitchFamily="18" charset="0"/>
+              </a:rPr>
+              <a:t>, </a:t>
+            </a:r>
+            <a:r>
+              <a:rPr lang="el-GR" sz="1600" i="1" dirty="0">
+                <a:solidFill>
+                  <a:schemeClr val="tx1"/>
+                </a:solidFill>
+                <a:latin typeface="Times New Roman" panose="02020603050405020304" pitchFamily="18" charset="0"/>
+                <a:ea typeface="等线" panose="02010600030101010101" pitchFamily="2" charset="-122"/>
+                <a:cs typeface="Times New Roman" panose="02020603050405020304" pitchFamily="18" charset="0"/>
+              </a:rPr>
+              <a:t>ψ</a:t>
+            </a:r>
+            <a:r>
+              <a:rPr lang="en-US" sz="1600" dirty="0">
+                <a:solidFill>
+                  <a:schemeClr val="tx1"/>
+                </a:solidFill>
+                <a:latin typeface="Times New Roman" panose="02020603050405020304" pitchFamily="18" charset="0"/>
+                <a:ea typeface="等线" panose="02010600030101010101" pitchFamily="2" charset="-122"/>
+                <a:cs typeface="Times New Roman" panose="02020603050405020304" pitchFamily="18" charset="0"/>
+              </a:rPr>
+              <a:t>]</a:t>
+            </a:r>
+            <a:r>
+              <a:rPr lang="en-GB" sz="1600" dirty="0">
+                <a:solidFill>
+                  <a:schemeClr val="tx1"/>
+                </a:solidFill>
+                <a:latin typeface="Times New Roman" panose="02020603050405020304" pitchFamily="18" charset="0"/>
+                <a:cs typeface="Times New Roman" panose="02020603050405020304" pitchFamily="18" charset="0"/>
+              </a:rPr>
+              <a:t> </a:t>
+            </a:r>
+            <a:endParaRPr lang="en-GB" sz="1600" noProof="0" dirty="0">
+              <a:solidFill>
+                <a:schemeClr val="tx1"/>
+              </a:solidFill>
+              <a:latin typeface="Times New Roman" panose="02020603050405020304" pitchFamily="18" charset="0"/>
+              <a:cs typeface="Times New Roman" panose="02020603050405020304" pitchFamily="18" charset="0"/>
+            </a:endParaRPr>
+          </a:p>
+        </p:txBody>
+      </p:sp>
+      <p:sp>
+        <p:nvSpPr>
+          <p:cNvPr id="9" name="矩形 8">
+            <a:extLst>
+              <a:ext uri="{FF2B5EF4-FFF2-40B4-BE49-F238E27FC236}">
+                <a16:creationId xmlns:a16="http://schemas.microsoft.com/office/drawing/2014/main" id="{A7EDD98C-1707-313A-02B8-85917AD97E8C}"/>
+              </a:ext>
+            </a:extLst>
+          </p:cNvPr>
+          <p:cNvSpPr/>
+          <p:nvPr/>
+        </p:nvSpPr>
+        <p:spPr>
+          <a:xfrm>
+            <a:off x="123576" y="4013084"/>
+            <a:ext cx="2450486" cy="647171"/>
+          </a:xfrm>
+          <a:prstGeom prst="rect">
+            <a:avLst/>
+          </a:prstGeom>
+          <a:solidFill>
+            <a:schemeClr val="bg1"/>
+          </a:solidFill>
+          <a:ln w="19050">
+            <a:solidFill>
+              <a:schemeClr val="tx1"/>
+            </a:solidFill>
+          </a:ln>
+        </p:spPr>
+        <p:style>
+          <a:lnRef idx="2">
+            <a:schemeClr val="accent1">
+              <a:shade val="50000"/>
+            </a:schemeClr>
+          </a:lnRef>
+          <a:fillRef idx="1">
+            <a:schemeClr val="accent1"/>
+          </a:fillRef>
+          <a:effectRef idx="0">
+            <a:schemeClr val="accent1"/>
+          </a:effectRef>
+          <a:fontRef idx="minor">
+            <a:schemeClr val="lt1"/>
+          </a:fontRef>
+        </p:style>
+        <p:txBody>
+          <a:bodyPr rtlCol="0" anchor="ctr"/>
+          <a:lstStyle/>
+          <a:p>
+            <a:pPr algn="ctr"/>
+            <a:r>
+              <a:rPr lang="en-US" altLang="zh-CN" sz="1400" dirty="0">
+                <a:solidFill>
+                  <a:schemeClr val="tx1"/>
+                </a:solidFill>
+                <a:latin typeface="Times New Roman" panose="02020603050405020304" pitchFamily="18" charset="0"/>
+                <a:cs typeface="Times New Roman" panose="02020603050405020304" pitchFamily="18" charset="0"/>
+              </a:rPr>
+              <a:t>Control</a:t>
+            </a:r>
+            <a:endParaRPr lang="en-GB" sz="1400" noProof="0" dirty="0">
+              <a:solidFill>
+                <a:schemeClr val="tx1"/>
+              </a:solidFill>
+              <a:latin typeface="Times New Roman" panose="02020603050405020304" pitchFamily="18" charset="0"/>
+              <a:cs typeface="Times New Roman" panose="02020603050405020304" pitchFamily="18" charset="0"/>
+            </a:endParaRPr>
+          </a:p>
+          <a:p>
+            <a:pPr algn="ctr"/>
+            <a:r>
+              <a:rPr lang="en-GB" altLang="zh-CN" sz="1600" dirty="0">
+                <a:solidFill>
+                  <a:schemeClr val="tx1"/>
+                </a:solidFill>
+                <a:latin typeface="Times New Roman" panose="02020603050405020304" pitchFamily="18" charset="0"/>
+                <a:cs typeface="Times New Roman" panose="02020603050405020304" pitchFamily="18" charset="0"/>
+              </a:rPr>
+              <a:t>[</a:t>
+            </a:r>
+            <a:r>
+              <a:rPr lang="el-GR" altLang="zh-CN" sz="1600" i="1" dirty="0">
+                <a:solidFill>
+                  <a:schemeClr val="tx1"/>
+                </a:solidFill>
+                <a:latin typeface="Times New Roman" panose="02020603050405020304" pitchFamily="18" charset="0"/>
+                <a:ea typeface="等线" panose="02010600030101010101" pitchFamily="2" charset="-122"/>
+                <a:cs typeface="Times New Roman" panose="02020603050405020304" pitchFamily="18" charset="0"/>
+              </a:rPr>
+              <a:t>θ</a:t>
+            </a:r>
+            <a:r>
+              <a:rPr lang="en-US" altLang="zh-CN" sz="1600" i="1" baseline="-25000" dirty="0">
+                <a:solidFill>
+                  <a:schemeClr val="tx1"/>
+                </a:solidFill>
+                <a:latin typeface="Times New Roman" panose="02020603050405020304" pitchFamily="18" charset="0"/>
+                <a:ea typeface="等线" panose="02010600030101010101" pitchFamily="2" charset="-122"/>
+                <a:cs typeface="Times New Roman" panose="02020603050405020304" pitchFamily="18" charset="0"/>
+              </a:rPr>
+              <a:t>0,UR</a:t>
+            </a:r>
+            <a:r>
+              <a:rPr lang="en-US" altLang="zh-CN" sz="1600" dirty="0">
+                <a:solidFill>
+                  <a:schemeClr val="tx1"/>
+                </a:solidFill>
+                <a:latin typeface="Times New Roman" panose="02020603050405020304" pitchFamily="18" charset="0"/>
+                <a:ea typeface="等线" panose="02010600030101010101" pitchFamily="2" charset="-122"/>
+                <a:cs typeface="Times New Roman" panose="02020603050405020304" pitchFamily="18" charset="0"/>
+              </a:rPr>
+              <a:t>, </a:t>
+            </a:r>
+            <a:r>
+              <a:rPr lang="el-GR" altLang="zh-CN" sz="1600" i="1" dirty="0">
+                <a:solidFill>
+                  <a:schemeClr val="tx1"/>
+                </a:solidFill>
+                <a:latin typeface="Times New Roman" panose="02020603050405020304" pitchFamily="18" charset="0"/>
+                <a:ea typeface="等线" panose="02010600030101010101" pitchFamily="2" charset="-122"/>
+                <a:cs typeface="Times New Roman" panose="02020603050405020304" pitchFamily="18" charset="0"/>
+              </a:rPr>
+              <a:t>θ</a:t>
+            </a:r>
+            <a:r>
+              <a:rPr lang="en-US" altLang="zh-CN" sz="1600" i="1" baseline="-25000" dirty="0">
+                <a:solidFill>
+                  <a:schemeClr val="tx1"/>
+                </a:solidFill>
+                <a:latin typeface="Times New Roman" panose="02020603050405020304" pitchFamily="18" charset="0"/>
+                <a:ea typeface="等线" panose="02010600030101010101" pitchFamily="2" charset="-122"/>
+                <a:cs typeface="Times New Roman" panose="02020603050405020304" pitchFamily="18" charset="0"/>
+              </a:rPr>
+              <a:t>0,LR</a:t>
+            </a:r>
+            <a:r>
+              <a:rPr lang="en-US" altLang="zh-CN" sz="1600" dirty="0">
+                <a:solidFill>
+                  <a:schemeClr val="tx1"/>
+                </a:solidFill>
+                <a:latin typeface="Times New Roman" panose="02020603050405020304" pitchFamily="18" charset="0"/>
+                <a:ea typeface="等线" panose="02010600030101010101" pitchFamily="2" charset="-122"/>
+                <a:cs typeface="Times New Roman" panose="02020603050405020304" pitchFamily="18" charset="0"/>
+              </a:rPr>
+              <a:t>, </a:t>
+            </a:r>
+            <a:r>
+              <a:rPr lang="el-GR" altLang="zh-CN" sz="1600" i="1" dirty="0">
+                <a:solidFill>
+                  <a:schemeClr val="tx1"/>
+                </a:solidFill>
+                <a:latin typeface="Times New Roman" panose="02020603050405020304" pitchFamily="18" charset="0"/>
+                <a:ea typeface="等线" panose="02010600030101010101" pitchFamily="2" charset="-122"/>
+                <a:cs typeface="Times New Roman" panose="02020603050405020304" pitchFamily="18" charset="0"/>
+              </a:rPr>
+              <a:t>θ</a:t>
+            </a:r>
+            <a:r>
+              <a:rPr lang="en-US" altLang="zh-CN" sz="1600" i="1" baseline="-25000" dirty="0">
+                <a:solidFill>
+                  <a:schemeClr val="tx1"/>
+                </a:solidFill>
+                <a:latin typeface="Times New Roman" panose="02020603050405020304" pitchFamily="18" charset="0"/>
+                <a:ea typeface="等线" panose="02010600030101010101" pitchFamily="2" charset="-122"/>
+                <a:cs typeface="Times New Roman" panose="02020603050405020304" pitchFamily="18" charset="0"/>
+              </a:rPr>
+              <a:t>1c</a:t>
+            </a:r>
+            <a:r>
+              <a:rPr lang="en-US" altLang="zh-CN" sz="1600" dirty="0">
+                <a:solidFill>
+                  <a:schemeClr val="tx1"/>
+                </a:solidFill>
+                <a:latin typeface="Times New Roman" panose="02020603050405020304" pitchFamily="18" charset="0"/>
+                <a:ea typeface="等线" panose="02010600030101010101" pitchFamily="2" charset="-122"/>
+                <a:cs typeface="Times New Roman" panose="02020603050405020304" pitchFamily="18" charset="0"/>
+              </a:rPr>
+              <a:t>, </a:t>
+            </a:r>
+            <a:r>
+              <a:rPr lang="el-GR" altLang="zh-CN" sz="1600" i="1" dirty="0">
+                <a:solidFill>
+                  <a:schemeClr val="tx1"/>
+                </a:solidFill>
+                <a:latin typeface="Times New Roman" panose="02020603050405020304" pitchFamily="18" charset="0"/>
+                <a:ea typeface="等线" panose="02010600030101010101" pitchFamily="2" charset="-122"/>
+                <a:cs typeface="Times New Roman" panose="02020603050405020304" pitchFamily="18" charset="0"/>
+              </a:rPr>
+              <a:t>θ</a:t>
+            </a:r>
+            <a:r>
+              <a:rPr lang="en-US" altLang="zh-CN" sz="1600" i="1" baseline="-25000" dirty="0">
+                <a:solidFill>
+                  <a:schemeClr val="tx1"/>
+                </a:solidFill>
+                <a:latin typeface="Times New Roman" panose="02020603050405020304" pitchFamily="18" charset="0"/>
+                <a:ea typeface="等线" panose="02010600030101010101" pitchFamily="2" charset="-122"/>
+                <a:cs typeface="Times New Roman" panose="02020603050405020304" pitchFamily="18" charset="0"/>
+              </a:rPr>
+              <a:t>1s</a:t>
+            </a:r>
+            <a:r>
+              <a:rPr lang="en-US" altLang="zh-CN" sz="1600" dirty="0">
+                <a:solidFill>
+                  <a:schemeClr val="tx1"/>
+                </a:solidFill>
+                <a:latin typeface="Times New Roman" panose="02020603050405020304" pitchFamily="18" charset="0"/>
+                <a:ea typeface="等线" panose="02010600030101010101" pitchFamily="2" charset="-122"/>
+                <a:cs typeface="Times New Roman" panose="02020603050405020304" pitchFamily="18" charset="0"/>
+              </a:rPr>
+              <a:t>, </a:t>
+            </a:r>
+            <a:r>
+              <a:rPr lang="el-GR" altLang="zh-CN" sz="1600" i="1" dirty="0">
+                <a:solidFill>
+                  <a:schemeClr val="tx1"/>
+                </a:solidFill>
+                <a:latin typeface="Times New Roman" panose="02020603050405020304" pitchFamily="18" charset="0"/>
+                <a:ea typeface="等线" panose="02010600030101010101" pitchFamily="2" charset="-122"/>
+                <a:cs typeface="Times New Roman" panose="02020603050405020304" pitchFamily="18" charset="0"/>
+              </a:rPr>
+              <a:t>δ</a:t>
+            </a:r>
+            <a:r>
+              <a:rPr lang="en-US" altLang="zh-CN" sz="1600" i="1" baseline="-25000" dirty="0">
+                <a:solidFill>
+                  <a:schemeClr val="tx1"/>
+                </a:solidFill>
+                <a:latin typeface="Times New Roman" panose="02020603050405020304" pitchFamily="18" charset="0"/>
+                <a:ea typeface="等线" panose="02010600030101010101" pitchFamily="2" charset="-122"/>
+                <a:cs typeface="Times New Roman" panose="02020603050405020304" pitchFamily="18" charset="0"/>
+              </a:rPr>
+              <a:t>E</a:t>
+            </a:r>
+            <a:r>
+              <a:rPr lang="en-US" altLang="zh-CN" sz="1600" dirty="0">
+                <a:solidFill>
+                  <a:schemeClr val="tx1"/>
+                </a:solidFill>
+                <a:latin typeface="Times New Roman" panose="02020603050405020304" pitchFamily="18" charset="0"/>
+                <a:ea typeface="等线" panose="02010600030101010101" pitchFamily="2" charset="-122"/>
+                <a:cs typeface="Times New Roman" panose="02020603050405020304" pitchFamily="18" charset="0"/>
+              </a:rPr>
+              <a:t>, </a:t>
+            </a:r>
+            <a:r>
+              <a:rPr lang="el-GR" altLang="zh-CN" sz="1600" i="1" dirty="0">
+                <a:solidFill>
+                  <a:schemeClr val="tx1"/>
+                </a:solidFill>
+                <a:latin typeface="Times New Roman" panose="02020603050405020304" pitchFamily="18" charset="0"/>
+                <a:ea typeface="等线" panose="02010600030101010101" pitchFamily="2" charset="-122"/>
+                <a:cs typeface="Times New Roman" panose="02020603050405020304" pitchFamily="18" charset="0"/>
+              </a:rPr>
+              <a:t>δ</a:t>
+            </a:r>
+            <a:r>
+              <a:rPr lang="en-US" altLang="zh-CN" sz="1600" i="1" baseline="-25000" dirty="0">
+                <a:solidFill>
+                  <a:schemeClr val="tx1"/>
+                </a:solidFill>
+                <a:latin typeface="Times New Roman" panose="02020603050405020304" pitchFamily="18" charset="0"/>
+                <a:ea typeface="等线" panose="02010600030101010101" pitchFamily="2" charset="-122"/>
+                <a:cs typeface="Times New Roman" panose="02020603050405020304" pitchFamily="18" charset="0"/>
+              </a:rPr>
+              <a:t>R</a:t>
+            </a:r>
+            <a:r>
+              <a:rPr lang="en-US" altLang="zh-CN" sz="1600" dirty="0">
+                <a:solidFill>
+                  <a:schemeClr val="tx1"/>
+                </a:solidFill>
+                <a:latin typeface="Times New Roman" panose="02020603050405020304" pitchFamily="18" charset="0"/>
+                <a:ea typeface="等线" panose="02010600030101010101" pitchFamily="2" charset="-122"/>
+                <a:cs typeface="Times New Roman" panose="02020603050405020304" pitchFamily="18" charset="0"/>
+              </a:rPr>
+              <a:t>]</a:t>
+            </a:r>
+            <a:r>
+              <a:rPr lang="en-GB" altLang="zh-CN" sz="1600" dirty="0">
+                <a:solidFill>
+                  <a:schemeClr val="tx1"/>
+                </a:solidFill>
+                <a:latin typeface="Times New Roman" panose="02020603050405020304" pitchFamily="18" charset="0"/>
+                <a:cs typeface="Times New Roman" panose="02020603050405020304" pitchFamily="18" charset="0"/>
+              </a:rPr>
+              <a:t> </a:t>
+            </a:r>
+            <a:endParaRPr lang="en-GB" altLang="zh-CN" sz="1600" noProof="0" dirty="0">
+              <a:solidFill>
+                <a:schemeClr val="tx1"/>
+              </a:solidFill>
+              <a:latin typeface="Times New Roman" panose="02020603050405020304" pitchFamily="18" charset="0"/>
+              <a:cs typeface="Times New Roman" panose="02020603050405020304" pitchFamily="18" charset="0"/>
+            </a:endParaRPr>
+          </a:p>
+        </p:txBody>
+      </p:sp>
+      <p:sp>
+        <p:nvSpPr>
+          <p:cNvPr id="15" name="矩形 14">
+            <a:extLst>
+              <a:ext uri="{FF2B5EF4-FFF2-40B4-BE49-F238E27FC236}">
+                <a16:creationId xmlns:a16="http://schemas.microsoft.com/office/drawing/2014/main" id="{A660F99D-A667-1157-0E3E-7E9D3C7C9C11}"/>
+              </a:ext>
+            </a:extLst>
+          </p:cNvPr>
+          <p:cNvSpPr/>
+          <p:nvPr/>
+        </p:nvSpPr>
+        <p:spPr>
+          <a:xfrm>
+            <a:off x="3266023" y="2435033"/>
+            <a:ext cx="3507204" cy="355832"/>
+          </a:xfrm>
+          <a:prstGeom prst="rect">
+            <a:avLst/>
+          </a:prstGeom>
+          <a:solidFill>
+            <a:schemeClr val="bg1"/>
+          </a:solidFill>
+          <a:ln w="19050">
+            <a:solidFill>
+              <a:srgbClr val="DC143C"/>
+            </a:solidFill>
+          </a:ln>
+        </p:spPr>
+        <p:style>
+          <a:lnRef idx="2">
+            <a:schemeClr val="accent1">
+              <a:shade val="50000"/>
+            </a:schemeClr>
+          </a:lnRef>
+          <a:fillRef idx="1">
+            <a:schemeClr val="accent1"/>
+          </a:fillRef>
+          <a:effectRef idx="0">
+            <a:schemeClr val="accent1"/>
+          </a:effectRef>
+          <a:fontRef idx="minor">
+            <a:schemeClr val="lt1"/>
+          </a:fontRef>
+        </p:style>
+        <p:txBody>
+          <a:bodyPr rtlCol="0" anchor="ctr"/>
+          <a:lstStyle/>
+          <a:p>
+            <a:pPr algn="ctr"/>
+            <a:r>
+              <a:rPr lang="en-US" altLang="zh-CN" sz="1400" dirty="0">
+                <a:solidFill>
+                  <a:srgbClr val="DC143C"/>
+                </a:solidFill>
+                <a:latin typeface="Times New Roman" panose="02020603050405020304" pitchFamily="18" charset="0"/>
+                <a:cs typeface="Times New Roman" panose="02020603050405020304" pitchFamily="18" charset="0"/>
+              </a:rPr>
+              <a:t>Fuselage aerodynamic model</a:t>
+            </a:r>
+            <a:endParaRPr lang="en-GB" sz="1400" noProof="0" dirty="0">
+              <a:solidFill>
+                <a:srgbClr val="DC143C"/>
+              </a:solidFill>
+              <a:latin typeface="Times New Roman" panose="02020603050405020304" pitchFamily="18" charset="0"/>
+              <a:cs typeface="Times New Roman" panose="02020603050405020304" pitchFamily="18" charset="0"/>
+            </a:endParaRPr>
+          </a:p>
+        </p:txBody>
+      </p:sp>
+      <p:grpSp>
+        <p:nvGrpSpPr>
+          <p:cNvPr id="57" name="组合 56">
+            <a:extLst>
+              <a:ext uri="{FF2B5EF4-FFF2-40B4-BE49-F238E27FC236}">
+                <a16:creationId xmlns:a16="http://schemas.microsoft.com/office/drawing/2014/main" id="{142D3A66-A215-3779-9C4C-56FA7DEE18C6}"/>
+              </a:ext>
+            </a:extLst>
+          </p:cNvPr>
+          <p:cNvGrpSpPr/>
+          <p:nvPr/>
+        </p:nvGrpSpPr>
+        <p:grpSpPr>
+          <a:xfrm>
+            <a:off x="3270296" y="2893430"/>
+            <a:ext cx="3507204" cy="1632542"/>
+            <a:chOff x="4372071" y="2005742"/>
+            <a:chExt cx="3453491" cy="1632542"/>
+          </a:xfrm>
+        </p:grpSpPr>
+        <p:sp>
+          <p:nvSpPr>
+            <p:cNvPr id="10" name="矩形 9">
+              <a:extLst>
+                <a:ext uri="{FF2B5EF4-FFF2-40B4-BE49-F238E27FC236}">
+                  <a16:creationId xmlns:a16="http://schemas.microsoft.com/office/drawing/2014/main" id="{E8F739D8-1BFC-A166-BB93-C7724506B868}"/>
+                </a:ext>
+              </a:extLst>
+            </p:cNvPr>
+            <p:cNvSpPr/>
+            <p:nvPr/>
+          </p:nvSpPr>
+          <p:spPr>
+            <a:xfrm>
+              <a:off x="4372071" y="2051546"/>
+              <a:ext cx="3453491" cy="1586738"/>
+            </a:xfrm>
+            <a:prstGeom prst="rect">
+              <a:avLst/>
+            </a:prstGeom>
+            <a:solidFill>
+              <a:schemeClr val="bg1"/>
+            </a:solidFill>
+            <a:ln w="19050">
+              <a:solidFill>
+                <a:srgbClr val="DC143C"/>
+              </a:solidFill>
+            </a:ln>
+          </p:spPr>
+          <p:style>
+            <a:lnRef idx="2">
+              <a:schemeClr val="accent1">
+                <a:shade val="50000"/>
+              </a:schemeClr>
+            </a:lnRef>
+            <a:fillRef idx="1">
+              <a:schemeClr val="accent1"/>
+            </a:fillRef>
+            <a:effectRef idx="0">
+              <a:schemeClr val="accent1"/>
+            </a:effectRef>
+            <a:fontRef idx="minor">
+              <a:schemeClr val="lt1"/>
+            </a:fontRef>
+          </p:style>
+          <p:txBody>
+            <a:bodyPr rtlCol="0" anchor="ctr"/>
+            <a:lstStyle/>
+            <a:p>
+              <a:pPr algn="ctr"/>
+              <a:endParaRPr lang="en-US" altLang="zh-CN" sz="1600" dirty="0">
+                <a:solidFill>
+                  <a:srgbClr val="DC143C"/>
+                </a:solidFill>
+                <a:latin typeface="Times New Roman" panose="02020603050405020304" pitchFamily="18" charset="0"/>
+                <a:cs typeface="Times New Roman" panose="02020603050405020304" pitchFamily="18" charset="0"/>
+              </a:endParaRPr>
+            </a:p>
+            <a:p>
+              <a:pPr algn="ctr"/>
+              <a:endParaRPr lang="en-US" altLang="zh-CN" sz="1600" dirty="0">
+                <a:solidFill>
+                  <a:srgbClr val="DC143C"/>
+                </a:solidFill>
+                <a:latin typeface="Times New Roman" panose="02020603050405020304" pitchFamily="18" charset="0"/>
+                <a:cs typeface="Times New Roman" panose="02020603050405020304" pitchFamily="18" charset="0"/>
+              </a:endParaRPr>
+            </a:p>
+            <a:p>
+              <a:pPr algn="ctr"/>
+              <a:endParaRPr lang="en-US" sz="1600" noProof="0" dirty="0">
+                <a:solidFill>
+                  <a:srgbClr val="DC143C"/>
+                </a:solidFill>
+                <a:latin typeface="Times New Roman" panose="02020603050405020304" pitchFamily="18" charset="0"/>
+                <a:cs typeface="Times New Roman" panose="02020603050405020304" pitchFamily="18" charset="0"/>
+              </a:endParaRPr>
+            </a:p>
+            <a:p>
+              <a:pPr algn="ctr"/>
+              <a:endParaRPr lang="en-US" sz="1600" dirty="0">
+                <a:solidFill>
+                  <a:srgbClr val="DC143C"/>
+                </a:solidFill>
+                <a:latin typeface="Times New Roman" panose="02020603050405020304" pitchFamily="18" charset="0"/>
+                <a:cs typeface="Times New Roman" panose="02020603050405020304" pitchFamily="18" charset="0"/>
+              </a:endParaRPr>
+            </a:p>
+            <a:p>
+              <a:pPr algn="ctr"/>
+              <a:endParaRPr lang="en-US" sz="1600" noProof="0" dirty="0">
+                <a:solidFill>
+                  <a:srgbClr val="DC143C"/>
+                </a:solidFill>
+                <a:latin typeface="Times New Roman" panose="02020603050405020304" pitchFamily="18" charset="0"/>
+                <a:cs typeface="Times New Roman" panose="02020603050405020304" pitchFamily="18" charset="0"/>
+              </a:endParaRPr>
+            </a:p>
+            <a:p>
+              <a:pPr algn="ctr"/>
+              <a:endParaRPr lang="en-US" sz="1600" dirty="0">
+                <a:solidFill>
+                  <a:srgbClr val="DC143C"/>
+                </a:solidFill>
+                <a:latin typeface="Times New Roman" panose="02020603050405020304" pitchFamily="18" charset="0"/>
+                <a:cs typeface="Times New Roman" panose="02020603050405020304" pitchFamily="18" charset="0"/>
+              </a:endParaRPr>
+            </a:p>
+            <a:p>
+              <a:pPr algn="ctr"/>
+              <a:endParaRPr lang="en-GB" sz="1600" noProof="0" dirty="0">
+                <a:solidFill>
+                  <a:srgbClr val="DC143C"/>
+                </a:solidFill>
+                <a:latin typeface="Times New Roman" panose="02020603050405020304" pitchFamily="18" charset="0"/>
+                <a:cs typeface="Times New Roman" panose="02020603050405020304" pitchFamily="18" charset="0"/>
+              </a:endParaRPr>
+            </a:p>
+          </p:txBody>
+        </p:sp>
+        <p:sp>
+          <p:nvSpPr>
+            <p:cNvPr id="37" name="矩形 36">
+              <a:extLst>
+                <a:ext uri="{FF2B5EF4-FFF2-40B4-BE49-F238E27FC236}">
+                  <a16:creationId xmlns:a16="http://schemas.microsoft.com/office/drawing/2014/main" id="{C3489DDE-D33C-001E-F789-ADB65077FD86}"/>
+                </a:ext>
+              </a:extLst>
+            </p:cNvPr>
+            <p:cNvSpPr/>
+            <p:nvPr/>
+          </p:nvSpPr>
+          <p:spPr>
+            <a:xfrm>
+              <a:off x="4504978" y="2323034"/>
+              <a:ext cx="3235524" cy="560250"/>
+            </a:xfrm>
+            <a:prstGeom prst="rect">
+              <a:avLst/>
+            </a:prstGeom>
+            <a:solidFill>
+              <a:schemeClr val="bg1"/>
+            </a:solidFill>
+            <a:ln w="19050">
+              <a:solidFill>
+                <a:schemeClr val="tx1"/>
+              </a:solidFill>
+            </a:ln>
+          </p:spPr>
+          <p:style>
+            <a:lnRef idx="2">
+              <a:schemeClr val="accent1">
+                <a:shade val="50000"/>
+              </a:schemeClr>
+            </a:lnRef>
+            <a:fillRef idx="1">
+              <a:schemeClr val="accent1"/>
+            </a:fillRef>
+            <a:effectRef idx="0">
+              <a:schemeClr val="accent1"/>
+            </a:effectRef>
+            <a:fontRef idx="minor">
+              <a:schemeClr val="lt1"/>
+            </a:fontRef>
+          </p:style>
+          <p:txBody>
+            <a:bodyPr rtlCol="0" anchor="ctr"/>
+            <a:lstStyle/>
+            <a:p>
+              <a:pPr algn="ctr">
+                <a:lnSpc>
+                  <a:spcPct val="85000"/>
+                </a:lnSpc>
+              </a:pPr>
+              <a:r>
+                <a:rPr lang="en-US" altLang="zh-CN" sz="1400" dirty="0">
+                  <a:solidFill>
+                    <a:schemeClr val="tx1"/>
+                  </a:solidFill>
+                  <a:latin typeface="Times New Roman" panose="02020603050405020304" pitchFamily="18" charset="0"/>
+                  <a:cs typeface="Times New Roman" panose="02020603050405020304" pitchFamily="18" charset="0"/>
+                </a:rPr>
+                <a:t>State (rotor)</a:t>
+              </a:r>
+              <a:endParaRPr lang="en-GB" sz="1400" noProof="0" dirty="0">
+                <a:solidFill>
+                  <a:schemeClr val="tx1"/>
+                </a:solidFill>
+                <a:latin typeface="Times New Roman" panose="02020603050405020304" pitchFamily="18" charset="0"/>
+                <a:cs typeface="Times New Roman" panose="02020603050405020304" pitchFamily="18" charset="0"/>
+              </a:endParaRPr>
+            </a:p>
+            <a:p>
+              <a:pPr algn="ctr">
+                <a:lnSpc>
+                  <a:spcPct val="85000"/>
+                </a:lnSpc>
+              </a:pPr>
+              <a:r>
+                <a:rPr lang="en-GB" altLang="zh-CN" sz="1600" dirty="0">
+                  <a:solidFill>
+                    <a:schemeClr val="tx1"/>
+                  </a:solidFill>
+                  <a:latin typeface="Times New Roman" panose="02020603050405020304" pitchFamily="18" charset="0"/>
+                  <a:cs typeface="Times New Roman" panose="02020603050405020304" pitchFamily="18" charset="0"/>
+                </a:rPr>
+                <a:t>[</a:t>
+              </a:r>
+              <a:r>
+                <a:rPr lang="el-GR" altLang="zh-CN" sz="1600" i="1" dirty="0">
+                  <a:solidFill>
+                    <a:schemeClr val="tx1"/>
+                  </a:solidFill>
+                  <a:latin typeface="Times New Roman" panose="02020603050405020304" pitchFamily="18" charset="0"/>
+                  <a:ea typeface="等线" panose="02010600030101010101" pitchFamily="2" charset="-122"/>
+                  <a:cs typeface="Times New Roman" panose="02020603050405020304" pitchFamily="18" charset="0"/>
+                </a:rPr>
+                <a:t>β</a:t>
+              </a:r>
+              <a:r>
+                <a:rPr lang="en-US" altLang="zh-CN" sz="1600" i="1" baseline="-25000" dirty="0">
+                  <a:solidFill>
+                    <a:schemeClr val="tx1"/>
+                  </a:solidFill>
+                  <a:latin typeface="Times New Roman" panose="02020603050405020304" pitchFamily="18" charset="0"/>
+                  <a:ea typeface="等线" panose="02010600030101010101" pitchFamily="2" charset="-122"/>
+                  <a:cs typeface="Times New Roman" panose="02020603050405020304" pitchFamily="18" charset="0"/>
+                </a:rPr>
+                <a:t>0,UR</a:t>
+              </a:r>
+              <a:r>
+                <a:rPr lang="en-US" altLang="zh-CN" sz="1600" dirty="0">
+                  <a:solidFill>
+                    <a:schemeClr val="tx1"/>
+                  </a:solidFill>
+                  <a:latin typeface="Times New Roman" panose="02020603050405020304" pitchFamily="18" charset="0"/>
+                  <a:ea typeface="等线" panose="02010600030101010101" pitchFamily="2" charset="-122"/>
+                  <a:cs typeface="Times New Roman" panose="02020603050405020304" pitchFamily="18" charset="0"/>
+                </a:rPr>
+                <a:t>, </a:t>
+              </a:r>
+              <a:r>
+                <a:rPr lang="el-GR" altLang="zh-CN" sz="1600" i="1" dirty="0">
+                  <a:solidFill>
+                    <a:schemeClr val="tx1"/>
+                  </a:solidFill>
+                  <a:latin typeface="Times New Roman" panose="02020603050405020304" pitchFamily="18" charset="0"/>
+                  <a:ea typeface="等线" panose="02010600030101010101" pitchFamily="2" charset="-122"/>
+                  <a:cs typeface="Times New Roman" panose="02020603050405020304" pitchFamily="18" charset="0"/>
+                </a:rPr>
+                <a:t>β</a:t>
+              </a:r>
+              <a:r>
+                <a:rPr lang="en-US" altLang="zh-CN" sz="1600" i="1" baseline="-25000" dirty="0">
+                  <a:solidFill>
+                    <a:schemeClr val="tx1"/>
+                  </a:solidFill>
+                  <a:latin typeface="Times New Roman" panose="02020603050405020304" pitchFamily="18" charset="0"/>
+                  <a:ea typeface="等线" panose="02010600030101010101" pitchFamily="2" charset="-122"/>
+                  <a:cs typeface="Times New Roman" panose="02020603050405020304" pitchFamily="18" charset="0"/>
+                </a:rPr>
+                <a:t>0,LR</a:t>
+              </a:r>
+              <a:r>
+                <a:rPr lang="en-US" altLang="zh-CN" sz="1600" dirty="0">
+                  <a:solidFill>
+                    <a:schemeClr val="tx1"/>
+                  </a:solidFill>
+                  <a:latin typeface="Times New Roman" panose="02020603050405020304" pitchFamily="18" charset="0"/>
+                  <a:ea typeface="等线" panose="02010600030101010101" pitchFamily="2" charset="-122"/>
+                  <a:cs typeface="Times New Roman" panose="02020603050405020304" pitchFamily="18" charset="0"/>
+                </a:rPr>
+                <a:t>, </a:t>
+              </a:r>
+              <a:r>
+                <a:rPr lang="el-GR" altLang="zh-CN" sz="1600" i="1" dirty="0">
+                  <a:solidFill>
+                    <a:schemeClr val="tx1"/>
+                  </a:solidFill>
+                  <a:latin typeface="Times New Roman" panose="02020603050405020304" pitchFamily="18" charset="0"/>
+                  <a:ea typeface="等线" panose="02010600030101010101" pitchFamily="2" charset="-122"/>
+                  <a:cs typeface="Times New Roman" panose="02020603050405020304" pitchFamily="18" charset="0"/>
+                </a:rPr>
+                <a:t>β</a:t>
+              </a:r>
+              <a:r>
+                <a:rPr lang="en-US" altLang="zh-CN" sz="1600" i="1" baseline="-25000" dirty="0">
+                  <a:solidFill>
+                    <a:schemeClr val="tx1"/>
+                  </a:solidFill>
+                  <a:latin typeface="Times New Roman" panose="02020603050405020304" pitchFamily="18" charset="0"/>
+                  <a:ea typeface="等线" panose="02010600030101010101" pitchFamily="2" charset="-122"/>
+                  <a:cs typeface="Times New Roman" panose="02020603050405020304" pitchFamily="18" charset="0"/>
+                </a:rPr>
+                <a:t>1c,UR</a:t>
+              </a:r>
+              <a:r>
+                <a:rPr lang="en-US" altLang="zh-CN" sz="1600" dirty="0">
+                  <a:solidFill>
+                    <a:schemeClr val="tx1"/>
+                  </a:solidFill>
+                  <a:latin typeface="Times New Roman" panose="02020603050405020304" pitchFamily="18" charset="0"/>
+                  <a:ea typeface="等线" panose="02010600030101010101" pitchFamily="2" charset="-122"/>
+                  <a:cs typeface="Times New Roman" panose="02020603050405020304" pitchFamily="18" charset="0"/>
+                </a:rPr>
+                <a:t>, </a:t>
+              </a:r>
+              <a:r>
+                <a:rPr lang="el-GR" altLang="zh-CN" sz="1600" i="1" dirty="0">
+                  <a:solidFill>
+                    <a:schemeClr val="tx1"/>
+                  </a:solidFill>
+                  <a:latin typeface="Times New Roman" panose="02020603050405020304" pitchFamily="18" charset="0"/>
+                  <a:ea typeface="等线" panose="02010600030101010101" pitchFamily="2" charset="-122"/>
+                  <a:cs typeface="Times New Roman" panose="02020603050405020304" pitchFamily="18" charset="0"/>
+                </a:rPr>
+                <a:t>β</a:t>
+              </a:r>
+              <a:r>
+                <a:rPr lang="en-US" altLang="zh-CN" sz="1600" i="1" baseline="-25000" dirty="0">
+                  <a:solidFill>
+                    <a:schemeClr val="tx1"/>
+                  </a:solidFill>
+                  <a:latin typeface="Times New Roman" panose="02020603050405020304" pitchFamily="18" charset="0"/>
+                  <a:ea typeface="等线" panose="02010600030101010101" pitchFamily="2" charset="-122"/>
+                  <a:cs typeface="Times New Roman" panose="02020603050405020304" pitchFamily="18" charset="0"/>
+                </a:rPr>
+                <a:t>1s,UR</a:t>
+              </a:r>
+              <a:r>
+                <a:rPr lang="en-US" altLang="zh-CN" sz="1600" dirty="0">
+                  <a:solidFill>
+                    <a:schemeClr val="tx1"/>
+                  </a:solidFill>
+                  <a:latin typeface="Times New Roman" panose="02020603050405020304" pitchFamily="18" charset="0"/>
+                  <a:ea typeface="等线" panose="02010600030101010101" pitchFamily="2" charset="-122"/>
+                  <a:cs typeface="Times New Roman" panose="02020603050405020304" pitchFamily="18" charset="0"/>
+                </a:rPr>
+                <a:t>, </a:t>
+              </a:r>
+              <a:r>
+                <a:rPr lang="el-GR" altLang="zh-CN" sz="1600" i="1" dirty="0">
+                  <a:solidFill>
+                    <a:schemeClr val="tx1"/>
+                  </a:solidFill>
+                  <a:latin typeface="Times New Roman" panose="02020603050405020304" pitchFamily="18" charset="0"/>
+                  <a:ea typeface="等线" panose="02010600030101010101" pitchFamily="2" charset="-122"/>
+                  <a:cs typeface="Times New Roman" panose="02020603050405020304" pitchFamily="18" charset="0"/>
+                </a:rPr>
+                <a:t>β</a:t>
+              </a:r>
+              <a:r>
+                <a:rPr lang="en-US" altLang="zh-CN" sz="1600" i="1" baseline="-25000" dirty="0">
+                  <a:solidFill>
+                    <a:schemeClr val="tx1"/>
+                  </a:solidFill>
+                  <a:latin typeface="Times New Roman" panose="02020603050405020304" pitchFamily="18" charset="0"/>
+                  <a:ea typeface="等线" panose="02010600030101010101" pitchFamily="2" charset="-122"/>
+                  <a:cs typeface="Times New Roman" panose="02020603050405020304" pitchFamily="18" charset="0"/>
+                </a:rPr>
+                <a:t>1c,LR</a:t>
+              </a:r>
+              <a:r>
+                <a:rPr lang="en-US" altLang="zh-CN" sz="1600" dirty="0">
+                  <a:solidFill>
+                    <a:schemeClr val="tx1"/>
+                  </a:solidFill>
+                  <a:latin typeface="Times New Roman" panose="02020603050405020304" pitchFamily="18" charset="0"/>
+                  <a:ea typeface="等线" panose="02010600030101010101" pitchFamily="2" charset="-122"/>
+                  <a:cs typeface="Times New Roman" panose="02020603050405020304" pitchFamily="18" charset="0"/>
+                </a:rPr>
+                <a:t>, </a:t>
+              </a:r>
+              <a:r>
+                <a:rPr lang="el-GR" altLang="zh-CN" sz="1600" i="1" dirty="0">
+                  <a:solidFill>
+                    <a:schemeClr val="tx1"/>
+                  </a:solidFill>
+                  <a:latin typeface="Times New Roman" panose="02020603050405020304" pitchFamily="18" charset="0"/>
+                  <a:ea typeface="等线" panose="02010600030101010101" pitchFamily="2" charset="-122"/>
+                  <a:cs typeface="Times New Roman" panose="02020603050405020304" pitchFamily="18" charset="0"/>
+                </a:rPr>
+                <a:t>β</a:t>
+              </a:r>
+              <a:r>
+                <a:rPr lang="en-US" altLang="zh-CN" sz="1600" i="1" baseline="-25000" dirty="0">
+                  <a:solidFill>
+                    <a:schemeClr val="tx1"/>
+                  </a:solidFill>
+                  <a:latin typeface="Times New Roman" panose="02020603050405020304" pitchFamily="18" charset="0"/>
+                  <a:ea typeface="等线" panose="02010600030101010101" pitchFamily="2" charset="-122"/>
+                  <a:cs typeface="Times New Roman" panose="02020603050405020304" pitchFamily="18" charset="0"/>
+                </a:rPr>
+                <a:t>1s,LR</a:t>
+              </a:r>
+              <a:r>
+                <a:rPr lang="en-US" altLang="zh-CN" sz="1600" dirty="0">
+                  <a:solidFill>
+                    <a:schemeClr val="tx1"/>
+                  </a:solidFill>
+                  <a:latin typeface="Times New Roman" panose="02020603050405020304" pitchFamily="18" charset="0"/>
+                  <a:ea typeface="等线" panose="02010600030101010101" pitchFamily="2" charset="-122"/>
+                  <a:cs typeface="Times New Roman" panose="02020603050405020304" pitchFamily="18" charset="0"/>
+                </a:rPr>
+                <a:t>]</a:t>
+              </a:r>
+              <a:r>
+                <a:rPr lang="en-GB" altLang="zh-CN" sz="1600" dirty="0">
+                  <a:solidFill>
+                    <a:schemeClr val="tx1"/>
+                  </a:solidFill>
+                  <a:latin typeface="Times New Roman" panose="02020603050405020304" pitchFamily="18" charset="0"/>
+                  <a:cs typeface="Times New Roman" panose="02020603050405020304" pitchFamily="18" charset="0"/>
+                </a:rPr>
+                <a:t> </a:t>
+              </a:r>
+              <a:endParaRPr lang="en-GB" altLang="zh-CN" sz="1600" noProof="0" dirty="0">
+                <a:solidFill>
+                  <a:schemeClr val="tx1"/>
+                </a:solidFill>
+                <a:latin typeface="Times New Roman" panose="02020603050405020304" pitchFamily="18" charset="0"/>
+                <a:cs typeface="Times New Roman" panose="02020603050405020304" pitchFamily="18" charset="0"/>
+              </a:endParaRPr>
+            </a:p>
+          </p:txBody>
+        </p:sp>
+        <p:sp>
+          <p:nvSpPr>
+            <p:cNvPr id="38" name="矩形 37">
+              <a:extLst>
+                <a:ext uri="{FF2B5EF4-FFF2-40B4-BE49-F238E27FC236}">
+                  <a16:creationId xmlns:a16="http://schemas.microsoft.com/office/drawing/2014/main" id="{C6C900F5-1B05-902A-8158-E0F9814CC211}"/>
+                </a:ext>
+              </a:extLst>
+            </p:cNvPr>
+            <p:cNvSpPr/>
+            <p:nvPr/>
+          </p:nvSpPr>
+          <p:spPr>
+            <a:xfrm>
+              <a:off x="4504978" y="2988310"/>
+              <a:ext cx="3235523" cy="560251"/>
+            </a:xfrm>
+            <a:prstGeom prst="rect">
+              <a:avLst/>
+            </a:prstGeom>
+            <a:solidFill>
+              <a:schemeClr val="bg1"/>
+            </a:solidFill>
+            <a:ln w="19050">
+              <a:solidFill>
+                <a:schemeClr val="tx1"/>
+              </a:solidFill>
+            </a:ln>
+          </p:spPr>
+          <p:style>
+            <a:lnRef idx="2">
+              <a:schemeClr val="accent1">
+                <a:shade val="50000"/>
+              </a:schemeClr>
+            </a:lnRef>
+            <a:fillRef idx="1">
+              <a:schemeClr val="accent1"/>
+            </a:fillRef>
+            <a:effectRef idx="0">
+              <a:schemeClr val="accent1"/>
+            </a:effectRef>
+            <a:fontRef idx="minor">
+              <a:schemeClr val="lt1"/>
+            </a:fontRef>
+          </p:style>
+          <p:txBody>
+            <a:bodyPr rtlCol="0" anchor="ctr"/>
+            <a:lstStyle/>
+            <a:p>
+              <a:pPr algn="ctr">
+                <a:lnSpc>
+                  <a:spcPct val="85000"/>
+                </a:lnSpc>
+              </a:pPr>
+              <a:r>
+                <a:rPr lang="en-US" altLang="zh-CN" sz="1400" dirty="0">
+                  <a:solidFill>
+                    <a:schemeClr val="tx1"/>
+                  </a:solidFill>
+                  <a:latin typeface="Times New Roman" panose="02020603050405020304" pitchFamily="18" charset="0"/>
+                  <a:cs typeface="Times New Roman" panose="02020603050405020304" pitchFamily="18" charset="0"/>
+                </a:rPr>
+                <a:t>State (inflow)</a:t>
+              </a:r>
+              <a:endParaRPr lang="en-GB" sz="1400" noProof="0" dirty="0">
+                <a:solidFill>
+                  <a:schemeClr val="tx1"/>
+                </a:solidFill>
+                <a:latin typeface="Times New Roman" panose="02020603050405020304" pitchFamily="18" charset="0"/>
+                <a:cs typeface="Times New Roman" panose="02020603050405020304" pitchFamily="18" charset="0"/>
+              </a:endParaRPr>
+            </a:p>
+            <a:p>
+              <a:pPr algn="ctr">
+                <a:lnSpc>
+                  <a:spcPct val="85000"/>
+                </a:lnSpc>
+              </a:pPr>
+              <a:r>
+                <a:rPr lang="en-GB" sz="1600" dirty="0">
+                  <a:solidFill>
+                    <a:schemeClr val="tx1"/>
+                  </a:solidFill>
+                  <a:latin typeface="Times New Roman" panose="02020603050405020304" pitchFamily="18" charset="0"/>
+                  <a:cs typeface="Times New Roman" panose="02020603050405020304" pitchFamily="18" charset="0"/>
+                </a:rPr>
+                <a:t>[</a:t>
+              </a:r>
+              <a:r>
+                <a:rPr lang="el-GR" altLang="zh-CN" sz="1600" i="1" dirty="0">
+                  <a:solidFill>
+                    <a:schemeClr val="tx1"/>
+                  </a:solidFill>
+                  <a:latin typeface="Times New Roman" panose="02020603050405020304" pitchFamily="18" charset="0"/>
+                  <a:ea typeface="等线" panose="02010600030101010101" pitchFamily="2" charset="-122"/>
+                  <a:cs typeface="Times New Roman" panose="02020603050405020304" pitchFamily="18" charset="0"/>
+                </a:rPr>
+                <a:t>λ</a:t>
+              </a:r>
+              <a:r>
+                <a:rPr lang="en-US" altLang="zh-CN" sz="1600" i="1" baseline="-25000" dirty="0">
+                  <a:solidFill>
+                    <a:schemeClr val="tx1"/>
+                  </a:solidFill>
+                  <a:latin typeface="Times New Roman" panose="02020603050405020304" pitchFamily="18" charset="0"/>
+                  <a:ea typeface="等线" panose="02010600030101010101" pitchFamily="2" charset="-122"/>
+                  <a:cs typeface="Times New Roman" panose="02020603050405020304" pitchFamily="18" charset="0"/>
+                </a:rPr>
+                <a:t>0,UR</a:t>
+              </a:r>
+              <a:r>
+                <a:rPr lang="en-US" altLang="zh-CN" sz="1600" dirty="0">
+                  <a:solidFill>
+                    <a:schemeClr val="tx1"/>
+                  </a:solidFill>
+                  <a:latin typeface="Times New Roman" panose="02020603050405020304" pitchFamily="18" charset="0"/>
+                  <a:ea typeface="等线" panose="02010600030101010101" pitchFamily="2" charset="-122"/>
+                  <a:cs typeface="Times New Roman" panose="02020603050405020304" pitchFamily="18" charset="0"/>
+                </a:rPr>
+                <a:t>, </a:t>
+              </a:r>
+              <a:r>
+                <a:rPr lang="el-GR" altLang="zh-CN" sz="1600" i="1" dirty="0">
+                  <a:solidFill>
+                    <a:schemeClr val="tx1"/>
+                  </a:solidFill>
+                  <a:latin typeface="Times New Roman" panose="02020603050405020304" pitchFamily="18" charset="0"/>
+                  <a:ea typeface="等线" panose="02010600030101010101" pitchFamily="2" charset="-122"/>
+                  <a:cs typeface="Times New Roman" panose="02020603050405020304" pitchFamily="18" charset="0"/>
+                </a:rPr>
+                <a:t>λ</a:t>
+              </a:r>
+              <a:r>
+                <a:rPr lang="en-US" altLang="zh-CN" sz="1600" i="1" baseline="-25000" dirty="0">
+                  <a:solidFill>
+                    <a:schemeClr val="tx1"/>
+                  </a:solidFill>
+                  <a:latin typeface="Times New Roman" panose="02020603050405020304" pitchFamily="18" charset="0"/>
+                  <a:ea typeface="等线" panose="02010600030101010101" pitchFamily="2" charset="-122"/>
+                  <a:cs typeface="Times New Roman" panose="02020603050405020304" pitchFamily="18" charset="0"/>
+                </a:rPr>
+                <a:t>0,LR</a:t>
+              </a:r>
+              <a:r>
+                <a:rPr lang="en-US" altLang="zh-CN" sz="1600" dirty="0">
+                  <a:solidFill>
+                    <a:schemeClr val="tx1"/>
+                  </a:solidFill>
+                  <a:latin typeface="Times New Roman" panose="02020603050405020304" pitchFamily="18" charset="0"/>
+                  <a:ea typeface="等线" panose="02010600030101010101" pitchFamily="2" charset="-122"/>
+                  <a:cs typeface="Times New Roman" panose="02020603050405020304" pitchFamily="18" charset="0"/>
+                </a:rPr>
+                <a:t>, </a:t>
+              </a:r>
+              <a:r>
+                <a:rPr lang="el-GR" altLang="zh-CN" sz="1600" i="1" dirty="0">
+                  <a:solidFill>
+                    <a:schemeClr val="tx1"/>
+                  </a:solidFill>
+                  <a:latin typeface="Times New Roman" panose="02020603050405020304" pitchFamily="18" charset="0"/>
+                  <a:ea typeface="等线" panose="02010600030101010101" pitchFamily="2" charset="-122"/>
+                  <a:cs typeface="Times New Roman" panose="02020603050405020304" pitchFamily="18" charset="0"/>
+                </a:rPr>
+                <a:t>λ</a:t>
+              </a:r>
+              <a:r>
+                <a:rPr lang="en-US" altLang="zh-CN" sz="1600" i="1" baseline="-25000" dirty="0">
+                  <a:solidFill>
+                    <a:schemeClr val="tx1"/>
+                  </a:solidFill>
+                  <a:latin typeface="Times New Roman" panose="02020603050405020304" pitchFamily="18" charset="0"/>
+                  <a:ea typeface="等线" panose="02010600030101010101" pitchFamily="2" charset="-122"/>
+                  <a:cs typeface="Times New Roman" panose="02020603050405020304" pitchFamily="18" charset="0"/>
+                </a:rPr>
+                <a:t>1c,UR</a:t>
+              </a:r>
+              <a:r>
+                <a:rPr lang="en-US" altLang="zh-CN" sz="1600" dirty="0">
+                  <a:solidFill>
+                    <a:schemeClr val="tx1"/>
+                  </a:solidFill>
+                  <a:latin typeface="Times New Roman" panose="02020603050405020304" pitchFamily="18" charset="0"/>
+                  <a:ea typeface="等线" panose="02010600030101010101" pitchFamily="2" charset="-122"/>
+                  <a:cs typeface="Times New Roman" panose="02020603050405020304" pitchFamily="18" charset="0"/>
+                </a:rPr>
+                <a:t>, </a:t>
+              </a:r>
+              <a:r>
+                <a:rPr lang="el-GR" altLang="zh-CN" sz="1600" i="1" dirty="0">
+                  <a:solidFill>
+                    <a:schemeClr val="tx1"/>
+                  </a:solidFill>
+                  <a:latin typeface="Times New Roman" panose="02020603050405020304" pitchFamily="18" charset="0"/>
+                  <a:ea typeface="等线" panose="02010600030101010101" pitchFamily="2" charset="-122"/>
+                  <a:cs typeface="Times New Roman" panose="02020603050405020304" pitchFamily="18" charset="0"/>
+                </a:rPr>
+                <a:t>λ</a:t>
+              </a:r>
+              <a:r>
+                <a:rPr lang="en-US" altLang="zh-CN" sz="1600" i="1" baseline="-25000" dirty="0">
+                  <a:solidFill>
+                    <a:schemeClr val="tx1"/>
+                  </a:solidFill>
+                  <a:latin typeface="Times New Roman" panose="02020603050405020304" pitchFamily="18" charset="0"/>
+                  <a:ea typeface="等线" panose="02010600030101010101" pitchFamily="2" charset="-122"/>
+                  <a:cs typeface="Times New Roman" panose="02020603050405020304" pitchFamily="18" charset="0"/>
+                </a:rPr>
+                <a:t>1s,UR</a:t>
+              </a:r>
+              <a:r>
+                <a:rPr lang="en-US" altLang="zh-CN" sz="1600" dirty="0">
+                  <a:solidFill>
+                    <a:schemeClr val="tx1"/>
+                  </a:solidFill>
+                  <a:latin typeface="Times New Roman" panose="02020603050405020304" pitchFamily="18" charset="0"/>
+                  <a:ea typeface="等线" panose="02010600030101010101" pitchFamily="2" charset="-122"/>
+                  <a:cs typeface="Times New Roman" panose="02020603050405020304" pitchFamily="18" charset="0"/>
+                </a:rPr>
+                <a:t>, </a:t>
+              </a:r>
+              <a:r>
+                <a:rPr lang="el-GR" altLang="zh-CN" sz="1600" i="1" dirty="0">
+                  <a:solidFill>
+                    <a:schemeClr val="tx1"/>
+                  </a:solidFill>
+                  <a:latin typeface="Times New Roman" panose="02020603050405020304" pitchFamily="18" charset="0"/>
+                  <a:ea typeface="等线" panose="02010600030101010101" pitchFamily="2" charset="-122"/>
+                  <a:cs typeface="Times New Roman" panose="02020603050405020304" pitchFamily="18" charset="0"/>
+                </a:rPr>
+                <a:t>λ</a:t>
+              </a:r>
+              <a:r>
+                <a:rPr lang="en-US" altLang="zh-CN" sz="1600" i="1" baseline="-25000" dirty="0">
+                  <a:solidFill>
+                    <a:schemeClr val="tx1"/>
+                  </a:solidFill>
+                  <a:latin typeface="Times New Roman" panose="02020603050405020304" pitchFamily="18" charset="0"/>
+                  <a:ea typeface="等线" panose="02010600030101010101" pitchFamily="2" charset="-122"/>
+                  <a:cs typeface="Times New Roman" panose="02020603050405020304" pitchFamily="18" charset="0"/>
+                </a:rPr>
+                <a:t>1c,LR</a:t>
+              </a:r>
+              <a:r>
+                <a:rPr lang="en-US" altLang="zh-CN" sz="1600" dirty="0">
+                  <a:solidFill>
+                    <a:schemeClr val="tx1"/>
+                  </a:solidFill>
+                  <a:latin typeface="Times New Roman" panose="02020603050405020304" pitchFamily="18" charset="0"/>
+                  <a:ea typeface="等线" panose="02010600030101010101" pitchFamily="2" charset="-122"/>
+                  <a:cs typeface="Times New Roman" panose="02020603050405020304" pitchFamily="18" charset="0"/>
+                </a:rPr>
+                <a:t>, </a:t>
+              </a:r>
+              <a:r>
+                <a:rPr lang="el-GR" altLang="zh-CN" sz="1600" i="1" dirty="0">
+                  <a:solidFill>
+                    <a:schemeClr val="tx1"/>
+                  </a:solidFill>
+                  <a:latin typeface="Times New Roman" panose="02020603050405020304" pitchFamily="18" charset="0"/>
+                  <a:ea typeface="等线" panose="02010600030101010101" pitchFamily="2" charset="-122"/>
+                  <a:cs typeface="Times New Roman" panose="02020603050405020304" pitchFamily="18" charset="0"/>
+                </a:rPr>
+                <a:t>λ</a:t>
+              </a:r>
+              <a:r>
+                <a:rPr lang="en-US" altLang="zh-CN" sz="1600" i="1" baseline="-25000" dirty="0">
+                  <a:solidFill>
+                    <a:schemeClr val="tx1"/>
+                  </a:solidFill>
+                  <a:latin typeface="Times New Roman" panose="02020603050405020304" pitchFamily="18" charset="0"/>
+                  <a:ea typeface="等线" panose="02010600030101010101" pitchFamily="2" charset="-122"/>
+                  <a:cs typeface="Times New Roman" panose="02020603050405020304" pitchFamily="18" charset="0"/>
+                </a:rPr>
+                <a:t>1s,LR</a:t>
+              </a:r>
+              <a:r>
+                <a:rPr lang="en-US" sz="1600" dirty="0">
+                  <a:solidFill>
+                    <a:schemeClr val="tx1"/>
+                  </a:solidFill>
+                  <a:latin typeface="Times New Roman" panose="02020603050405020304" pitchFamily="18" charset="0"/>
+                  <a:ea typeface="等线" panose="02010600030101010101" pitchFamily="2" charset="-122"/>
+                  <a:cs typeface="Times New Roman" panose="02020603050405020304" pitchFamily="18" charset="0"/>
+                </a:rPr>
+                <a:t>]</a:t>
+              </a:r>
+              <a:r>
+                <a:rPr lang="en-GB" sz="1600" dirty="0">
+                  <a:solidFill>
+                    <a:schemeClr val="tx1"/>
+                  </a:solidFill>
+                  <a:latin typeface="Times New Roman" panose="02020603050405020304" pitchFamily="18" charset="0"/>
+                  <a:cs typeface="Times New Roman" panose="02020603050405020304" pitchFamily="18" charset="0"/>
+                </a:rPr>
+                <a:t> </a:t>
+              </a:r>
+              <a:endParaRPr lang="en-GB" sz="1600" noProof="0" dirty="0">
+                <a:solidFill>
+                  <a:schemeClr val="tx1"/>
+                </a:solidFill>
+                <a:latin typeface="Times New Roman" panose="02020603050405020304" pitchFamily="18" charset="0"/>
+                <a:cs typeface="Times New Roman" panose="02020603050405020304" pitchFamily="18" charset="0"/>
+              </a:endParaRPr>
+            </a:p>
+          </p:txBody>
+        </p:sp>
+        <p:sp>
+          <p:nvSpPr>
+            <p:cNvPr id="49" name="矩形 48">
+              <a:extLst>
+                <a:ext uri="{FF2B5EF4-FFF2-40B4-BE49-F238E27FC236}">
+                  <a16:creationId xmlns:a16="http://schemas.microsoft.com/office/drawing/2014/main" id="{A1060CE9-02C1-80AC-E6ED-E7A0742ED67A}"/>
+                </a:ext>
+              </a:extLst>
+            </p:cNvPr>
+            <p:cNvSpPr/>
+            <p:nvPr/>
+          </p:nvSpPr>
+          <p:spPr>
+            <a:xfrm>
+              <a:off x="4764589" y="2005742"/>
+              <a:ext cx="2716300" cy="355832"/>
+            </a:xfrm>
+            <a:prstGeom prst="rect">
+              <a:avLst/>
+            </a:prstGeom>
+            <a:noFill/>
+            <a:ln w="19050">
+              <a:noFill/>
+            </a:ln>
+          </p:spPr>
+          <p:style>
+            <a:lnRef idx="2">
+              <a:schemeClr val="accent1">
+                <a:shade val="50000"/>
+              </a:schemeClr>
+            </a:lnRef>
+            <a:fillRef idx="1">
+              <a:schemeClr val="accent1"/>
+            </a:fillRef>
+            <a:effectRef idx="0">
+              <a:schemeClr val="accent1"/>
+            </a:effectRef>
+            <a:fontRef idx="minor">
+              <a:schemeClr val="lt1"/>
+            </a:fontRef>
+          </p:style>
+          <p:txBody>
+            <a:bodyPr rtlCol="0" anchor="ctr"/>
+            <a:lstStyle/>
+            <a:p>
+              <a:pPr algn="ctr"/>
+              <a:endParaRPr lang="en-US" altLang="zh-CN" sz="1400" dirty="0">
+                <a:solidFill>
+                  <a:srgbClr val="DC143C"/>
+                </a:solidFill>
+                <a:latin typeface="Times New Roman" panose="02020603050405020304" pitchFamily="18" charset="0"/>
+                <a:cs typeface="Times New Roman" panose="02020603050405020304" pitchFamily="18" charset="0"/>
+              </a:endParaRPr>
+            </a:p>
+            <a:p>
+              <a:pPr algn="ctr"/>
+              <a:r>
+                <a:rPr lang="en-US" altLang="zh-CN" sz="1400" dirty="0">
+                  <a:solidFill>
+                    <a:srgbClr val="DC143C"/>
+                  </a:solidFill>
+                  <a:latin typeface="Times New Roman" panose="02020603050405020304" pitchFamily="18" charset="0"/>
+                  <a:cs typeface="Times New Roman" panose="02020603050405020304" pitchFamily="18" charset="0"/>
+                </a:rPr>
+                <a:t>Rotor aerodynamic model</a:t>
+              </a:r>
+              <a:endParaRPr lang="en-US" sz="1400" dirty="0">
+                <a:solidFill>
+                  <a:srgbClr val="DC143C"/>
+                </a:solidFill>
+                <a:latin typeface="Times New Roman" panose="02020603050405020304" pitchFamily="18" charset="0"/>
+                <a:cs typeface="Times New Roman" panose="02020603050405020304" pitchFamily="18" charset="0"/>
+              </a:endParaRPr>
+            </a:p>
+            <a:p>
+              <a:pPr algn="ctr"/>
+              <a:endParaRPr lang="en-GB" sz="1400" noProof="0" dirty="0">
+                <a:solidFill>
+                  <a:srgbClr val="DC143C"/>
+                </a:solidFill>
+                <a:latin typeface="Times New Roman" panose="02020603050405020304" pitchFamily="18" charset="0"/>
+                <a:cs typeface="Times New Roman" panose="02020603050405020304" pitchFamily="18" charset="0"/>
+              </a:endParaRPr>
+            </a:p>
+          </p:txBody>
+        </p:sp>
+      </p:grpSp>
+      <p:sp>
+        <p:nvSpPr>
+          <p:cNvPr id="54" name="矩形 53">
+            <a:extLst>
+              <a:ext uri="{FF2B5EF4-FFF2-40B4-BE49-F238E27FC236}">
+                <a16:creationId xmlns:a16="http://schemas.microsoft.com/office/drawing/2014/main" id="{0D03CEB0-4241-1D72-2F28-3ABD32BE2175}"/>
+              </a:ext>
+            </a:extLst>
+          </p:cNvPr>
+          <p:cNvSpPr/>
+          <p:nvPr/>
+        </p:nvSpPr>
+        <p:spPr>
+          <a:xfrm>
+            <a:off x="123576" y="5225032"/>
+            <a:ext cx="2450486" cy="295223"/>
+          </a:xfrm>
+          <a:prstGeom prst="rect">
+            <a:avLst/>
+          </a:prstGeom>
+          <a:solidFill>
+            <a:schemeClr val="bg1"/>
+          </a:solidFill>
+          <a:ln w="19050">
+            <a:solidFill>
+              <a:schemeClr val="tx1"/>
+            </a:solidFill>
+          </a:ln>
+        </p:spPr>
+        <p:style>
+          <a:lnRef idx="2">
+            <a:schemeClr val="accent1">
+              <a:shade val="50000"/>
+            </a:schemeClr>
+          </a:lnRef>
+          <a:fillRef idx="1">
+            <a:schemeClr val="accent1"/>
+          </a:fillRef>
+          <a:effectRef idx="0">
+            <a:schemeClr val="accent1"/>
+          </a:effectRef>
+          <a:fontRef idx="minor">
+            <a:schemeClr val="lt1"/>
+          </a:fontRef>
+        </p:style>
+        <p:txBody>
+          <a:bodyPr rtlCol="0" anchor="ctr"/>
+          <a:lstStyle/>
+          <a:p>
+            <a:pPr algn="ctr"/>
+            <a:r>
+              <a:rPr lang="en-US" altLang="zh-CN" sz="1400" dirty="0">
+                <a:solidFill>
+                  <a:schemeClr val="tx1"/>
+                </a:solidFill>
+                <a:latin typeface="Times New Roman" panose="02020603050405020304" pitchFamily="18" charset="0"/>
+                <a:cs typeface="Times New Roman" panose="02020603050405020304" pitchFamily="18" charset="0"/>
+              </a:rPr>
+              <a:t>Mass &amp; Payload</a:t>
+            </a:r>
+            <a:endParaRPr lang="en-GB" sz="1600" noProof="0" dirty="0">
+              <a:solidFill>
+                <a:schemeClr val="tx1"/>
+              </a:solidFill>
+              <a:latin typeface="Times New Roman" panose="02020603050405020304" pitchFamily="18" charset="0"/>
+              <a:cs typeface="Times New Roman" panose="02020603050405020304" pitchFamily="18" charset="0"/>
+            </a:endParaRPr>
+          </a:p>
+        </p:txBody>
+      </p:sp>
+      <p:sp>
+        <p:nvSpPr>
+          <p:cNvPr id="59" name="矩形 58">
+            <a:extLst>
+              <a:ext uri="{FF2B5EF4-FFF2-40B4-BE49-F238E27FC236}">
+                <a16:creationId xmlns:a16="http://schemas.microsoft.com/office/drawing/2014/main" id="{303E864D-EC00-ED67-FDB5-0D98FFAEC9AF}"/>
+              </a:ext>
+            </a:extLst>
+          </p:cNvPr>
+          <p:cNvSpPr/>
+          <p:nvPr/>
+        </p:nvSpPr>
+        <p:spPr>
+          <a:xfrm>
+            <a:off x="3266023" y="4696045"/>
+            <a:ext cx="3511477" cy="355832"/>
+          </a:xfrm>
+          <a:prstGeom prst="rect">
+            <a:avLst/>
+          </a:prstGeom>
+          <a:solidFill>
+            <a:schemeClr val="bg1"/>
+          </a:solidFill>
+          <a:ln w="19050">
+            <a:solidFill>
+              <a:srgbClr val="DC143C"/>
+            </a:solidFill>
+          </a:ln>
+        </p:spPr>
+        <p:style>
+          <a:lnRef idx="2">
+            <a:schemeClr val="accent1">
+              <a:shade val="50000"/>
+            </a:schemeClr>
+          </a:lnRef>
+          <a:fillRef idx="1">
+            <a:schemeClr val="accent1"/>
+          </a:fillRef>
+          <a:effectRef idx="0">
+            <a:schemeClr val="accent1"/>
+          </a:effectRef>
+          <a:fontRef idx="minor">
+            <a:schemeClr val="lt1"/>
+          </a:fontRef>
+        </p:style>
+        <p:txBody>
+          <a:bodyPr rtlCol="0" anchor="ctr"/>
+          <a:lstStyle/>
+          <a:p>
+            <a:pPr algn="ctr"/>
+            <a:r>
+              <a:rPr lang="en-US" altLang="zh-CN" sz="1400" dirty="0">
+                <a:solidFill>
+                  <a:srgbClr val="DC143C"/>
+                </a:solidFill>
+                <a:latin typeface="Times New Roman" panose="02020603050405020304" pitchFamily="18" charset="0"/>
+                <a:cs typeface="Times New Roman" panose="02020603050405020304" pitchFamily="18" charset="0"/>
+              </a:rPr>
+              <a:t>Empennage aerodynamic model</a:t>
+            </a:r>
+            <a:endParaRPr lang="en-GB" altLang="zh-CN" sz="1400" noProof="0" dirty="0">
+              <a:solidFill>
+                <a:srgbClr val="DC143C"/>
+              </a:solidFill>
+              <a:latin typeface="Times New Roman" panose="02020603050405020304" pitchFamily="18" charset="0"/>
+              <a:cs typeface="Times New Roman" panose="02020603050405020304" pitchFamily="18" charset="0"/>
+            </a:endParaRPr>
+          </a:p>
+        </p:txBody>
+      </p:sp>
+      <p:cxnSp>
+        <p:nvCxnSpPr>
+          <p:cNvPr id="60" name="连接符: 肘形 59">
+            <a:extLst>
+              <a:ext uri="{FF2B5EF4-FFF2-40B4-BE49-F238E27FC236}">
+                <a16:creationId xmlns:a16="http://schemas.microsoft.com/office/drawing/2014/main" id="{914EB22B-EAF8-FED9-1D2B-DD117060A13A}"/>
+              </a:ext>
+            </a:extLst>
+          </p:cNvPr>
+          <p:cNvCxnSpPr>
+            <a:cxnSpLocks/>
+            <a:stCxn id="54" idx="3"/>
+            <a:endCxn id="184" idx="1"/>
+          </p:cNvCxnSpPr>
+          <p:nvPr/>
+        </p:nvCxnSpPr>
+        <p:spPr>
+          <a:xfrm>
+            <a:off x="2574062" y="5372644"/>
+            <a:ext cx="691961" cy="1"/>
+          </a:xfrm>
+          <a:prstGeom prst="bentConnector3">
+            <a:avLst/>
+          </a:prstGeom>
+          <a:ln w="12700">
+            <a:solidFill>
+              <a:schemeClr val="tx1"/>
+            </a:solidFill>
+            <a:tailEnd type="triangle"/>
+          </a:ln>
+        </p:spPr>
+        <p:style>
+          <a:lnRef idx="2">
+            <a:schemeClr val="accent1"/>
+          </a:lnRef>
+          <a:fillRef idx="0">
+            <a:schemeClr val="accent1"/>
+          </a:fillRef>
+          <a:effectRef idx="1">
+            <a:schemeClr val="accent1"/>
+          </a:effectRef>
+          <a:fontRef idx="minor">
+            <a:schemeClr val="tx1"/>
+          </a:fontRef>
+        </p:style>
+      </p:cxnSp>
+      <p:sp>
+        <p:nvSpPr>
+          <p:cNvPr id="129" name="矩形 128">
+            <a:extLst>
+              <a:ext uri="{FF2B5EF4-FFF2-40B4-BE49-F238E27FC236}">
+                <a16:creationId xmlns:a16="http://schemas.microsoft.com/office/drawing/2014/main" id="{3A7AE86E-05E7-CA0A-2CF4-FBBCD4F8F02F}"/>
+              </a:ext>
+            </a:extLst>
+          </p:cNvPr>
+          <p:cNvSpPr/>
+          <p:nvPr/>
+        </p:nvSpPr>
+        <p:spPr>
+          <a:xfrm>
+            <a:off x="10024490" y="2697388"/>
+            <a:ext cx="2078327" cy="647171"/>
+          </a:xfrm>
+          <a:prstGeom prst="rect">
+            <a:avLst/>
+          </a:prstGeom>
+          <a:solidFill>
+            <a:schemeClr val="bg1"/>
+          </a:solidFill>
+          <a:ln w="19050">
+            <a:solidFill>
+              <a:srgbClr val="0000CD"/>
+            </a:solidFill>
+          </a:ln>
+        </p:spPr>
+        <p:style>
+          <a:lnRef idx="2">
+            <a:schemeClr val="accent1">
+              <a:shade val="50000"/>
+            </a:schemeClr>
+          </a:lnRef>
+          <a:fillRef idx="1">
+            <a:schemeClr val="accent1"/>
+          </a:fillRef>
+          <a:effectRef idx="0">
+            <a:schemeClr val="accent1"/>
+          </a:effectRef>
+          <a:fontRef idx="minor">
+            <a:schemeClr val="lt1"/>
+          </a:fontRef>
+        </p:style>
+        <p:txBody>
+          <a:bodyPr rtlCol="0" anchor="ctr"/>
+          <a:lstStyle/>
+          <a:p>
+            <a:pPr algn="ctr"/>
+            <a:r>
+              <a:rPr lang="en-US" altLang="zh-CN" sz="1400" dirty="0">
+                <a:solidFill>
+                  <a:srgbClr val="0000CD"/>
+                </a:solidFill>
+                <a:latin typeface="Times New Roman" panose="02020603050405020304" pitchFamily="18" charset="0"/>
+                <a:cs typeface="Times New Roman" panose="02020603050405020304" pitchFamily="18" charset="0"/>
+              </a:rPr>
+              <a:t>Forces</a:t>
+            </a:r>
+          </a:p>
+          <a:p>
+            <a:pPr algn="ctr"/>
+            <a:r>
+              <a:rPr lang="en-GB" sz="1600" dirty="0">
+                <a:solidFill>
+                  <a:srgbClr val="0000CD"/>
+                </a:solidFill>
+                <a:latin typeface="Times New Roman" panose="02020603050405020304" pitchFamily="18" charset="0"/>
+                <a:cs typeface="Times New Roman" panose="02020603050405020304" pitchFamily="18" charset="0"/>
+              </a:rPr>
+              <a:t>[</a:t>
+            </a:r>
+            <a:r>
+              <a:rPr lang="en-GB" sz="1600" i="1" dirty="0">
+                <a:solidFill>
+                  <a:srgbClr val="0000CD"/>
+                </a:solidFill>
+                <a:latin typeface="Times New Roman" panose="02020603050405020304" pitchFamily="18" charset="0"/>
+                <a:cs typeface="Times New Roman" panose="02020603050405020304" pitchFamily="18" charset="0"/>
+              </a:rPr>
+              <a:t>X</a:t>
+            </a:r>
+            <a:r>
+              <a:rPr lang="en-GB" sz="1600" dirty="0">
+                <a:solidFill>
+                  <a:srgbClr val="0000CD"/>
+                </a:solidFill>
+                <a:latin typeface="Times New Roman" panose="02020603050405020304" pitchFamily="18" charset="0"/>
+                <a:cs typeface="Times New Roman" panose="02020603050405020304" pitchFamily="18" charset="0"/>
+              </a:rPr>
+              <a:t>, </a:t>
+            </a:r>
+            <a:r>
+              <a:rPr lang="en-GB" sz="1600" i="1" dirty="0">
+                <a:solidFill>
+                  <a:srgbClr val="0000CD"/>
+                </a:solidFill>
+                <a:latin typeface="Times New Roman" panose="02020603050405020304" pitchFamily="18" charset="0"/>
+                <a:cs typeface="Times New Roman" panose="02020603050405020304" pitchFamily="18" charset="0"/>
+              </a:rPr>
+              <a:t>Y</a:t>
+            </a:r>
+            <a:r>
+              <a:rPr lang="en-GB" sz="1600" dirty="0">
+                <a:solidFill>
+                  <a:srgbClr val="0000CD"/>
+                </a:solidFill>
+                <a:latin typeface="Times New Roman" panose="02020603050405020304" pitchFamily="18" charset="0"/>
+                <a:cs typeface="Times New Roman" panose="02020603050405020304" pitchFamily="18" charset="0"/>
+              </a:rPr>
+              <a:t>, </a:t>
+            </a:r>
+            <a:r>
+              <a:rPr lang="en-GB" sz="1600" i="1" dirty="0">
+                <a:solidFill>
+                  <a:srgbClr val="0000CD"/>
+                </a:solidFill>
+                <a:latin typeface="Times New Roman" panose="02020603050405020304" pitchFamily="18" charset="0"/>
+                <a:cs typeface="Times New Roman" panose="02020603050405020304" pitchFamily="18" charset="0"/>
+              </a:rPr>
+              <a:t>Z</a:t>
+            </a:r>
+            <a:r>
+              <a:rPr lang="en-US" sz="1600" dirty="0">
+                <a:solidFill>
+                  <a:srgbClr val="0000CD"/>
+                </a:solidFill>
+                <a:latin typeface="Times New Roman" panose="02020603050405020304" pitchFamily="18" charset="0"/>
+                <a:ea typeface="等线" panose="02010600030101010101" pitchFamily="2" charset="-122"/>
+                <a:cs typeface="Times New Roman" panose="02020603050405020304" pitchFamily="18" charset="0"/>
+              </a:rPr>
+              <a:t>]</a:t>
+            </a:r>
+            <a:r>
+              <a:rPr lang="en-GB" sz="1600" dirty="0">
+                <a:solidFill>
+                  <a:srgbClr val="0000CD"/>
+                </a:solidFill>
+                <a:latin typeface="Times New Roman" panose="02020603050405020304" pitchFamily="18" charset="0"/>
+                <a:cs typeface="Times New Roman" panose="02020603050405020304" pitchFamily="18" charset="0"/>
+              </a:rPr>
+              <a:t> </a:t>
+            </a:r>
+            <a:endParaRPr lang="en-GB" sz="1600" noProof="0" dirty="0">
+              <a:solidFill>
+                <a:srgbClr val="0000CD"/>
+              </a:solidFill>
+              <a:latin typeface="Times New Roman" panose="02020603050405020304" pitchFamily="18" charset="0"/>
+              <a:cs typeface="Times New Roman" panose="02020603050405020304" pitchFamily="18" charset="0"/>
+            </a:endParaRPr>
+          </a:p>
+        </p:txBody>
+      </p:sp>
+      <p:sp>
+        <p:nvSpPr>
+          <p:cNvPr id="131" name="矩形 130">
+            <a:extLst>
+              <a:ext uri="{FF2B5EF4-FFF2-40B4-BE49-F238E27FC236}">
+                <a16:creationId xmlns:a16="http://schemas.microsoft.com/office/drawing/2014/main" id="{B93E6DD7-FA5D-EFAA-144D-F09D1C33DD7E}"/>
+              </a:ext>
+            </a:extLst>
+          </p:cNvPr>
+          <p:cNvSpPr/>
+          <p:nvPr/>
+        </p:nvSpPr>
+        <p:spPr>
+          <a:xfrm>
+            <a:off x="10028763" y="3732603"/>
+            <a:ext cx="2074054" cy="647171"/>
+          </a:xfrm>
+          <a:prstGeom prst="rect">
+            <a:avLst/>
+          </a:prstGeom>
+          <a:solidFill>
+            <a:schemeClr val="bg1"/>
+          </a:solidFill>
+          <a:ln w="19050">
+            <a:solidFill>
+              <a:srgbClr val="0000CD"/>
+            </a:solidFill>
+          </a:ln>
+        </p:spPr>
+        <p:style>
+          <a:lnRef idx="2">
+            <a:schemeClr val="accent1">
+              <a:shade val="50000"/>
+            </a:schemeClr>
+          </a:lnRef>
+          <a:fillRef idx="1">
+            <a:schemeClr val="accent1"/>
+          </a:fillRef>
+          <a:effectRef idx="0">
+            <a:schemeClr val="accent1"/>
+          </a:effectRef>
+          <a:fontRef idx="minor">
+            <a:schemeClr val="lt1"/>
+          </a:fontRef>
+        </p:style>
+        <p:txBody>
+          <a:bodyPr rtlCol="0" anchor="ctr"/>
+          <a:lstStyle/>
+          <a:p>
+            <a:pPr algn="ctr"/>
+            <a:r>
+              <a:rPr lang="en-US" altLang="zh-CN" sz="1400" dirty="0">
+                <a:solidFill>
+                  <a:srgbClr val="0000CD"/>
+                </a:solidFill>
+                <a:latin typeface="Times New Roman" panose="02020603050405020304" pitchFamily="18" charset="0"/>
+                <a:cs typeface="Times New Roman" panose="02020603050405020304" pitchFamily="18" charset="0"/>
+              </a:rPr>
+              <a:t>Moments</a:t>
+            </a:r>
+          </a:p>
+          <a:p>
+            <a:pPr algn="ctr"/>
+            <a:r>
+              <a:rPr lang="en-GB" sz="1600" dirty="0">
+                <a:solidFill>
+                  <a:srgbClr val="0000CD"/>
+                </a:solidFill>
+                <a:latin typeface="Times New Roman" panose="02020603050405020304" pitchFamily="18" charset="0"/>
+                <a:cs typeface="Times New Roman" panose="02020603050405020304" pitchFamily="18" charset="0"/>
+              </a:rPr>
+              <a:t>[</a:t>
+            </a:r>
+            <a:r>
+              <a:rPr lang="en-GB" sz="1600" i="1" dirty="0">
+                <a:solidFill>
+                  <a:srgbClr val="0000CD"/>
+                </a:solidFill>
+                <a:latin typeface="Times New Roman" panose="02020603050405020304" pitchFamily="18" charset="0"/>
+                <a:cs typeface="Times New Roman" panose="02020603050405020304" pitchFamily="18" charset="0"/>
+              </a:rPr>
+              <a:t>L</a:t>
+            </a:r>
+            <a:r>
+              <a:rPr lang="en-GB" sz="1600" dirty="0">
+                <a:solidFill>
+                  <a:srgbClr val="0000CD"/>
+                </a:solidFill>
+                <a:latin typeface="Times New Roman" panose="02020603050405020304" pitchFamily="18" charset="0"/>
+                <a:cs typeface="Times New Roman" panose="02020603050405020304" pitchFamily="18" charset="0"/>
+              </a:rPr>
+              <a:t>, </a:t>
+            </a:r>
+            <a:r>
+              <a:rPr lang="en-GB" sz="1600" i="1" dirty="0">
+                <a:solidFill>
+                  <a:srgbClr val="0000CD"/>
+                </a:solidFill>
+                <a:latin typeface="Times New Roman" panose="02020603050405020304" pitchFamily="18" charset="0"/>
+                <a:cs typeface="Times New Roman" panose="02020603050405020304" pitchFamily="18" charset="0"/>
+              </a:rPr>
+              <a:t>M</a:t>
+            </a:r>
+            <a:r>
+              <a:rPr lang="en-GB" sz="1600" dirty="0">
+                <a:solidFill>
+                  <a:srgbClr val="0000CD"/>
+                </a:solidFill>
+                <a:latin typeface="Times New Roman" panose="02020603050405020304" pitchFamily="18" charset="0"/>
+                <a:cs typeface="Times New Roman" panose="02020603050405020304" pitchFamily="18" charset="0"/>
+              </a:rPr>
+              <a:t>, </a:t>
+            </a:r>
+            <a:r>
+              <a:rPr lang="en-GB" sz="1600" i="1" dirty="0">
+                <a:solidFill>
+                  <a:srgbClr val="0000CD"/>
+                </a:solidFill>
+                <a:latin typeface="Times New Roman" panose="02020603050405020304" pitchFamily="18" charset="0"/>
+                <a:cs typeface="Times New Roman" panose="02020603050405020304" pitchFamily="18" charset="0"/>
+              </a:rPr>
+              <a:t>N</a:t>
+            </a:r>
+            <a:r>
+              <a:rPr lang="en-US" sz="1600" dirty="0">
+                <a:solidFill>
+                  <a:srgbClr val="0000CD"/>
+                </a:solidFill>
+                <a:latin typeface="Times New Roman" panose="02020603050405020304" pitchFamily="18" charset="0"/>
+                <a:ea typeface="等线" panose="02010600030101010101" pitchFamily="2" charset="-122"/>
+                <a:cs typeface="Times New Roman" panose="02020603050405020304" pitchFamily="18" charset="0"/>
+              </a:rPr>
+              <a:t>]</a:t>
+            </a:r>
+            <a:r>
+              <a:rPr lang="en-GB" sz="1600" dirty="0">
+                <a:solidFill>
+                  <a:srgbClr val="0000CD"/>
+                </a:solidFill>
+                <a:latin typeface="Times New Roman" panose="02020603050405020304" pitchFamily="18" charset="0"/>
+                <a:cs typeface="Times New Roman" panose="02020603050405020304" pitchFamily="18" charset="0"/>
+              </a:rPr>
+              <a:t> </a:t>
+            </a:r>
+            <a:endParaRPr lang="en-GB" sz="1600" noProof="0" dirty="0">
+              <a:solidFill>
+                <a:srgbClr val="0000CD"/>
+              </a:solidFill>
+              <a:latin typeface="Times New Roman" panose="02020603050405020304" pitchFamily="18" charset="0"/>
+              <a:cs typeface="Times New Roman" panose="02020603050405020304" pitchFamily="18" charset="0"/>
+            </a:endParaRPr>
+          </a:p>
+        </p:txBody>
+      </p:sp>
+      <p:cxnSp>
+        <p:nvCxnSpPr>
+          <p:cNvPr id="142" name="连接符: 肘形 141">
+            <a:extLst>
+              <a:ext uri="{FF2B5EF4-FFF2-40B4-BE49-F238E27FC236}">
+                <a16:creationId xmlns:a16="http://schemas.microsoft.com/office/drawing/2014/main" id="{76E9733B-A75B-8D92-96A6-A56F783735F3}"/>
+              </a:ext>
+            </a:extLst>
+          </p:cNvPr>
+          <p:cNvCxnSpPr>
+            <a:cxnSpLocks/>
+            <a:stCxn id="9" idx="3"/>
+            <a:endCxn id="10" idx="1"/>
+          </p:cNvCxnSpPr>
+          <p:nvPr/>
+        </p:nvCxnSpPr>
+        <p:spPr>
+          <a:xfrm flipV="1">
+            <a:off x="2574062" y="3732603"/>
+            <a:ext cx="696234" cy="604067"/>
+          </a:xfrm>
+          <a:prstGeom prst="bentConnector3">
+            <a:avLst>
+              <a:gd name="adj1" fmla="val 50000"/>
+            </a:avLst>
+          </a:prstGeom>
+          <a:ln w="12700">
+            <a:solidFill>
+              <a:schemeClr val="tx1"/>
+            </a:solidFill>
+            <a:tailEnd type="triangle"/>
+          </a:ln>
+        </p:spPr>
+        <p:style>
+          <a:lnRef idx="2">
+            <a:schemeClr val="accent1"/>
+          </a:lnRef>
+          <a:fillRef idx="0">
+            <a:schemeClr val="accent1"/>
+          </a:fillRef>
+          <a:effectRef idx="1">
+            <a:schemeClr val="accent1"/>
+          </a:effectRef>
+          <a:fontRef idx="minor">
+            <a:schemeClr val="tx1"/>
+          </a:fontRef>
+        </p:style>
+      </p:cxnSp>
+      <p:cxnSp>
+        <p:nvCxnSpPr>
+          <p:cNvPr id="144" name="连接符: 肘形 143">
+            <a:extLst>
+              <a:ext uri="{FF2B5EF4-FFF2-40B4-BE49-F238E27FC236}">
+                <a16:creationId xmlns:a16="http://schemas.microsoft.com/office/drawing/2014/main" id="{A4194336-7F17-DCFE-DE10-BEFF0BD03C58}"/>
+              </a:ext>
+            </a:extLst>
+          </p:cNvPr>
+          <p:cNvCxnSpPr>
+            <a:cxnSpLocks/>
+            <a:stCxn id="2" idx="3"/>
+            <a:endCxn id="15" idx="1"/>
+          </p:cNvCxnSpPr>
+          <p:nvPr/>
+        </p:nvCxnSpPr>
+        <p:spPr>
+          <a:xfrm flipV="1">
+            <a:off x="2574062" y="2612949"/>
+            <a:ext cx="691961" cy="816051"/>
+          </a:xfrm>
+          <a:prstGeom prst="bentConnector3">
+            <a:avLst>
+              <a:gd name="adj1" fmla="val 50000"/>
+            </a:avLst>
+          </a:prstGeom>
+          <a:ln w="12700">
+            <a:solidFill>
+              <a:schemeClr val="tx1"/>
+            </a:solidFill>
+            <a:tailEnd type="triangle"/>
+          </a:ln>
+        </p:spPr>
+        <p:style>
+          <a:lnRef idx="2">
+            <a:schemeClr val="accent1"/>
+          </a:lnRef>
+          <a:fillRef idx="0">
+            <a:schemeClr val="accent1"/>
+          </a:fillRef>
+          <a:effectRef idx="1">
+            <a:schemeClr val="accent1"/>
+          </a:effectRef>
+          <a:fontRef idx="minor">
+            <a:schemeClr val="tx1"/>
+          </a:fontRef>
+        </p:style>
+      </p:cxnSp>
+      <p:cxnSp>
+        <p:nvCxnSpPr>
+          <p:cNvPr id="147" name="连接符: 肘形 146">
+            <a:extLst>
+              <a:ext uri="{FF2B5EF4-FFF2-40B4-BE49-F238E27FC236}">
+                <a16:creationId xmlns:a16="http://schemas.microsoft.com/office/drawing/2014/main" id="{124EAECC-8E9F-1C7D-F59C-2E2F6E590F39}"/>
+              </a:ext>
+            </a:extLst>
+          </p:cNvPr>
+          <p:cNvCxnSpPr>
+            <a:cxnSpLocks/>
+            <a:stCxn id="9" idx="3"/>
+            <a:endCxn id="59" idx="1"/>
+          </p:cNvCxnSpPr>
+          <p:nvPr/>
+        </p:nvCxnSpPr>
+        <p:spPr>
+          <a:xfrm>
+            <a:off x="2574062" y="4336670"/>
+            <a:ext cx="691961" cy="537291"/>
+          </a:xfrm>
+          <a:prstGeom prst="bentConnector3">
+            <a:avLst>
+              <a:gd name="adj1" fmla="val 50000"/>
+            </a:avLst>
+          </a:prstGeom>
+          <a:ln w="12700">
+            <a:solidFill>
+              <a:schemeClr val="tx1"/>
+            </a:solidFill>
+            <a:tailEnd type="triangle"/>
+          </a:ln>
+        </p:spPr>
+        <p:style>
+          <a:lnRef idx="2">
+            <a:schemeClr val="accent1"/>
+          </a:lnRef>
+          <a:fillRef idx="0">
+            <a:schemeClr val="accent1"/>
+          </a:fillRef>
+          <a:effectRef idx="1">
+            <a:schemeClr val="accent1"/>
+          </a:effectRef>
+          <a:fontRef idx="minor">
+            <a:schemeClr val="tx1"/>
+          </a:fontRef>
+        </p:style>
+      </p:cxnSp>
+      <p:cxnSp>
+        <p:nvCxnSpPr>
+          <p:cNvPr id="151" name="连接符: 肘形 150">
+            <a:extLst>
+              <a:ext uri="{FF2B5EF4-FFF2-40B4-BE49-F238E27FC236}">
+                <a16:creationId xmlns:a16="http://schemas.microsoft.com/office/drawing/2014/main" id="{EBF54475-C7DA-D965-070D-71237E66FB90}"/>
+              </a:ext>
+            </a:extLst>
+          </p:cNvPr>
+          <p:cNvCxnSpPr>
+            <a:cxnSpLocks/>
+            <a:stCxn id="9" idx="3"/>
+            <a:endCxn id="15" idx="1"/>
+          </p:cNvCxnSpPr>
+          <p:nvPr/>
+        </p:nvCxnSpPr>
+        <p:spPr>
+          <a:xfrm flipV="1">
+            <a:off x="2574062" y="2612949"/>
+            <a:ext cx="691961" cy="1723721"/>
+          </a:xfrm>
+          <a:prstGeom prst="bentConnector3">
+            <a:avLst>
+              <a:gd name="adj1" fmla="val 50000"/>
+            </a:avLst>
+          </a:prstGeom>
+          <a:ln w="12700">
+            <a:solidFill>
+              <a:schemeClr val="tx1"/>
+            </a:solidFill>
+            <a:tailEnd type="triangle"/>
+          </a:ln>
+        </p:spPr>
+        <p:style>
+          <a:lnRef idx="2">
+            <a:schemeClr val="accent1"/>
+          </a:lnRef>
+          <a:fillRef idx="0">
+            <a:schemeClr val="accent1"/>
+          </a:fillRef>
+          <a:effectRef idx="1">
+            <a:schemeClr val="accent1"/>
+          </a:effectRef>
+          <a:fontRef idx="minor">
+            <a:schemeClr val="tx1"/>
+          </a:fontRef>
+        </p:style>
+      </p:cxnSp>
+      <p:sp>
+        <p:nvSpPr>
+          <p:cNvPr id="171" name="矩形 170">
+            <a:extLst>
+              <a:ext uri="{FF2B5EF4-FFF2-40B4-BE49-F238E27FC236}">
+                <a16:creationId xmlns:a16="http://schemas.microsoft.com/office/drawing/2014/main" id="{4878A91F-8CFB-C1A2-7B8C-0053637F23EE}"/>
+              </a:ext>
+            </a:extLst>
+          </p:cNvPr>
+          <p:cNvSpPr/>
+          <p:nvPr/>
+        </p:nvSpPr>
+        <p:spPr>
+          <a:xfrm>
+            <a:off x="10028763" y="4873084"/>
+            <a:ext cx="2074054" cy="647171"/>
+          </a:xfrm>
+          <a:prstGeom prst="rect">
+            <a:avLst/>
+          </a:prstGeom>
+          <a:solidFill>
+            <a:schemeClr val="bg1"/>
+          </a:solidFill>
+          <a:ln w="19050">
+            <a:solidFill>
+              <a:srgbClr val="0000CD"/>
+            </a:solidFill>
+          </a:ln>
+        </p:spPr>
+        <p:style>
+          <a:lnRef idx="2">
+            <a:schemeClr val="accent1">
+              <a:shade val="50000"/>
+            </a:schemeClr>
+          </a:lnRef>
+          <a:fillRef idx="1">
+            <a:schemeClr val="accent1"/>
+          </a:fillRef>
+          <a:effectRef idx="0">
+            <a:schemeClr val="accent1"/>
+          </a:effectRef>
+          <a:fontRef idx="minor">
+            <a:schemeClr val="lt1"/>
+          </a:fontRef>
+        </p:style>
+        <p:txBody>
+          <a:bodyPr rtlCol="0" anchor="ctr"/>
+          <a:lstStyle/>
+          <a:p>
+            <a:pPr algn="ctr"/>
+            <a:r>
+              <a:rPr lang="en-US" altLang="zh-CN" sz="1400" dirty="0">
+                <a:solidFill>
+                  <a:srgbClr val="0000CD"/>
+                </a:solidFill>
+                <a:latin typeface="Times New Roman" panose="02020603050405020304" pitchFamily="18" charset="0"/>
+                <a:cs typeface="Times New Roman" panose="02020603050405020304" pitchFamily="18" charset="0"/>
+              </a:rPr>
+              <a:t>Moment of inertia</a:t>
+            </a:r>
+          </a:p>
+          <a:p>
+            <a:pPr algn="ctr"/>
+            <a:r>
+              <a:rPr lang="en-GB" altLang="zh-CN" sz="1600" dirty="0">
+                <a:solidFill>
+                  <a:srgbClr val="0000CD"/>
+                </a:solidFill>
+                <a:latin typeface="Times New Roman" panose="02020603050405020304" pitchFamily="18" charset="0"/>
+                <a:cs typeface="Times New Roman" panose="02020603050405020304" pitchFamily="18" charset="0"/>
+              </a:rPr>
+              <a:t>[</a:t>
+            </a:r>
+            <a:r>
+              <a:rPr lang="en-US" altLang="zh-CN" sz="1600" i="1" dirty="0" err="1">
+                <a:solidFill>
+                  <a:srgbClr val="0000CD"/>
+                </a:solidFill>
+                <a:latin typeface="Times New Roman" panose="02020603050405020304" pitchFamily="18" charset="0"/>
+                <a:ea typeface="等线" panose="02010600030101010101" pitchFamily="2" charset="-122"/>
+                <a:cs typeface="Times New Roman" panose="02020603050405020304" pitchFamily="18" charset="0"/>
+              </a:rPr>
+              <a:t>I</a:t>
+            </a:r>
+            <a:r>
+              <a:rPr lang="en-US" altLang="zh-CN" sz="1600" i="1" baseline="-25000" dirty="0" err="1">
+                <a:solidFill>
+                  <a:srgbClr val="0000CD"/>
+                </a:solidFill>
+                <a:latin typeface="Times New Roman" panose="02020603050405020304" pitchFamily="18" charset="0"/>
+                <a:ea typeface="等线" panose="02010600030101010101" pitchFamily="2" charset="-122"/>
+                <a:cs typeface="Times New Roman" panose="02020603050405020304" pitchFamily="18" charset="0"/>
+              </a:rPr>
+              <a:t>xx</a:t>
+            </a:r>
+            <a:r>
+              <a:rPr lang="en-US" altLang="zh-CN" sz="1600" dirty="0">
+                <a:solidFill>
+                  <a:srgbClr val="0000CD"/>
+                </a:solidFill>
+                <a:latin typeface="Times New Roman" panose="02020603050405020304" pitchFamily="18" charset="0"/>
+                <a:ea typeface="等线" panose="02010600030101010101" pitchFamily="2" charset="-122"/>
+                <a:cs typeface="Times New Roman" panose="02020603050405020304" pitchFamily="18" charset="0"/>
+              </a:rPr>
+              <a:t>, </a:t>
+            </a:r>
+            <a:r>
+              <a:rPr lang="en-US" altLang="zh-CN" sz="1600" i="1" dirty="0" err="1">
+                <a:solidFill>
+                  <a:srgbClr val="0000CD"/>
+                </a:solidFill>
+                <a:latin typeface="Times New Roman" panose="02020603050405020304" pitchFamily="18" charset="0"/>
+                <a:ea typeface="等线" panose="02010600030101010101" pitchFamily="2" charset="-122"/>
+                <a:cs typeface="Times New Roman" panose="02020603050405020304" pitchFamily="18" charset="0"/>
+              </a:rPr>
+              <a:t>I</a:t>
+            </a:r>
+            <a:r>
+              <a:rPr lang="en-US" altLang="zh-CN" sz="1600" i="1" baseline="-25000" dirty="0" err="1">
+                <a:solidFill>
+                  <a:srgbClr val="0000CD"/>
+                </a:solidFill>
+                <a:latin typeface="Times New Roman" panose="02020603050405020304" pitchFamily="18" charset="0"/>
+                <a:ea typeface="等线" panose="02010600030101010101" pitchFamily="2" charset="-122"/>
+                <a:cs typeface="Times New Roman" panose="02020603050405020304" pitchFamily="18" charset="0"/>
+              </a:rPr>
+              <a:t>yy</a:t>
+            </a:r>
+            <a:r>
+              <a:rPr lang="en-US" altLang="zh-CN" sz="1600" dirty="0">
+                <a:solidFill>
+                  <a:srgbClr val="0000CD"/>
+                </a:solidFill>
+                <a:latin typeface="Times New Roman" panose="02020603050405020304" pitchFamily="18" charset="0"/>
+                <a:ea typeface="等线" panose="02010600030101010101" pitchFamily="2" charset="-122"/>
+                <a:cs typeface="Times New Roman" panose="02020603050405020304" pitchFamily="18" charset="0"/>
+              </a:rPr>
+              <a:t>, </a:t>
+            </a:r>
+            <a:r>
+              <a:rPr lang="en-US" altLang="zh-CN" sz="1600" i="1" dirty="0">
+                <a:solidFill>
+                  <a:srgbClr val="0000CD"/>
+                </a:solidFill>
+                <a:latin typeface="Times New Roman" panose="02020603050405020304" pitchFamily="18" charset="0"/>
+                <a:ea typeface="等线" panose="02010600030101010101" pitchFamily="2" charset="-122"/>
+                <a:cs typeface="Times New Roman" panose="02020603050405020304" pitchFamily="18" charset="0"/>
+              </a:rPr>
+              <a:t>I</a:t>
+            </a:r>
+            <a:r>
+              <a:rPr lang="en-US" altLang="zh-CN" sz="1600" i="1" baseline="-25000" dirty="0">
+                <a:solidFill>
+                  <a:srgbClr val="0000CD"/>
+                </a:solidFill>
+                <a:latin typeface="Times New Roman" panose="02020603050405020304" pitchFamily="18" charset="0"/>
+                <a:ea typeface="等线" panose="02010600030101010101" pitchFamily="2" charset="-122"/>
+                <a:cs typeface="Times New Roman" panose="02020603050405020304" pitchFamily="18" charset="0"/>
+              </a:rPr>
+              <a:t>zz</a:t>
+            </a:r>
+            <a:r>
+              <a:rPr lang="en-US" altLang="zh-CN" sz="1600" dirty="0">
+                <a:solidFill>
+                  <a:srgbClr val="0000CD"/>
+                </a:solidFill>
+                <a:latin typeface="Times New Roman" panose="02020603050405020304" pitchFamily="18" charset="0"/>
+                <a:ea typeface="等线" panose="02010600030101010101" pitchFamily="2" charset="-122"/>
+                <a:cs typeface="Times New Roman" panose="02020603050405020304" pitchFamily="18" charset="0"/>
+              </a:rPr>
+              <a:t>, </a:t>
+            </a:r>
+            <a:r>
+              <a:rPr lang="en-US" altLang="zh-CN" sz="1600" i="1" dirty="0" err="1">
+                <a:solidFill>
+                  <a:srgbClr val="0000CD"/>
+                </a:solidFill>
+                <a:latin typeface="Times New Roman" panose="02020603050405020304" pitchFamily="18" charset="0"/>
+                <a:ea typeface="等线" panose="02010600030101010101" pitchFamily="2" charset="-122"/>
+                <a:cs typeface="Times New Roman" panose="02020603050405020304" pitchFamily="18" charset="0"/>
+              </a:rPr>
+              <a:t>I</a:t>
+            </a:r>
+            <a:r>
+              <a:rPr lang="en-US" altLang="zh-CN" sz="1600" i="1" baseline="-25000" dirty="0" err="1">
+                <a:solidFill>
+                  <a:srgbClr val="0000CD"/>
+                </a:solidFill>
+                <a:latin typeface="Times New Roman" panose="02020603050405020304" pitchFamily="18" charset="0"/>
+                <a:ea typeface="等线" panose="02010600030101010101" pitchFamily="2" charset="-122"/>
+                <a:cs typeface="Times New Roman" panose="02020603050405020304" pitchFamily="18" charset="0"/>
+              </a:rPr>
+              <a:t>xz</a:t>
+            </a:r>
+            <a:r>
+              <a:rPr lang="en-US" altLang="zh-CN" sz="1600" dirty="0">
+                <a:solidFill>
+                  <a:srgbClr val="0000CD"/>
+                </a:solidFill>
+                <a:latin typeface="Times New Roman" panose="02020603050405020304" pitchFamily="18" charset="0"/>
+                <a:ea typeface="等线" panose="02010600030101010101" pitchFamily="2" charset="-122"/>
+                <a:cs typeface="Times New Roman" panose="02020603050405020304" pitchFamily="18" charset="0"/>
+              </a:rPr>
+              <a:t>]</a:t>
+            </a:r>
+            <a:r>
+              <a:rPr lang="en-GB" altLang="zh-CN" sz="1600" dirty="0">
+                <a:solidFill>
+                  <a:srgbClr val="0000CD"/>
+                </a:solidFill>
+                <a:latin typeface="Times New Roman" panose="02020603050405020304" pitchFamily="18" charset="0"/>
+                <a:cs typeface="Times New Roman" panose="02020603050405020304" pitchFamily="18" charset="0"/>
+              </a:rPr>
+              <a:t> </a:t>
+            </a:r>
+            <a:endParaRPr lang="en-GB" altLang="zh-CN" sz="1600" noProof="0" dirty="0">
+              <a:solidFill>
+                <a:srgbClr val="0000CD"/>
+              </a:solidFill>
+              <a:latin typeface="Times New Roman" panose="02020603050405020304" pitchFamily="18" charset="0"/>
+              <a:cs typeface="Times New Roman" panose="02020603050405020304" pitchFamily="18" charset="0"/>
+            </a:endParaRPr>
+          </a:p>
+        </p:txBody>
+      </p:sp>
+      <p:sp>
+        <p:nvSpPr>
+          <p:cNvPr id="184" name="矩形 183">
+            <a:extLst>
+              <a:ext uri="{FF2B5EF4-FFF2-40B4-BE49-F238E27FC236}">
+                <a16:creationId xmlns:a16="http://schemas.microsoft.com/office/drawing/2014/main" id="{CA7EA20D-D9B4-C7C6-B2BE-2CEB6674261A}"/>
+              </a:ext>
+            </a:extLst>
+          </p:cNvPr>
+          <p:cNvSpPr/>
+          <p:nvPr/>
+        </p:nvSpPr>
+        <p:spPr>
+          <a:xfrm>
+            <a:off x="3266023" y="5225033"/>
+            <a:ext cx="3511477" cy="295223"/>
+          </a:xfrm>
+          <a:prstGeom prst="rect">
+            <a:avLst/>
+          </a:prstGeom>
+          <a:solidFill>
+            <a:schemeClr val="bg1"/>
+          </a:solidFill>
+          <a:ln w="19050">
+            <a:solidFill>
+              <a:srgbClr val="DC143C"/>
+            </a:solidFill>
+          </a:ln>
+        </p:spPr>
+        <p:style>
+          <a:lnRef idx="2">
+            <a:schemeClr val="accent1">
+              <a:shade val="50000"/>
+            </a:schemeClr>
+          </a:lnRef>
+          <a:fillRef idx="1">
+            <a:schemeClr val="accent1"/>
+          </a:fillRef>
+          <a:effectRef idx="0">
+            <a:schemeClr val="accent1"/>
+          </a:effectRef>
+          <a:fontRef idx="minor">
+            <a:schemeClr val="lt1"/>
+          </a:fontRef>
+        </p:style>
+        <p:txBody>
+          <a:bodyPr rtlCol="0" anchor="ctr"/>
+          <a:lstStyle/>
+          <a:p>
+            <a:pPr algn="ctr"/>
+            <a:r>
+              <a:rPr lang="en-US" altLang="zh-CN" sz="1400" dirty="0">
+                <a:solidFill>
+                  <a:srgbClr val="DC143C"/>
+                </a:solidFill>
+                <a:latin typeface="Times New Roman" panose="02020603050405020304" pitchFamily="18" charset="0"/>
+                <a:cs typeface="Times New Roman" panose="02020603050405020304" pitchFamily="18" charset="0"/>
+              </a:rPr>
+              <a:t>System &amp; structure model</a:t>
+            </a:r>
+            <a:endParaRPr lang="en-GB" altLang="zh-CN" sz="1400" noProof="0" dirty="0">
+              <a:solidFill>
+                <a:srgbClr val="DC143C"/>
+              </a:solidFill>
+              <a:latin typeface="Times New Roman" panose="02020603050405020304" pitchFamily="18" charset="0"/>
+              <a:cs typeface="Times New Roman" panose="02020603050405020304" pitchFamily="18" charset="0"/>
+            </a:endParaRPr>
+          </a:p>
+        </p:txBody>
+      </p:sp>
+      <p:cxnSp>
+        <p:nvCxnSpPr>
+          <p:cNvPr id="190" name="连接符: 肘形 189">
+            <a:extLst>
+              <a:ext uri="{FF2B5EF4-FFF2-40B4-BE49-F238E27FC236}">
+                <a16:creationId xmlns:a16="http://schemas.microsoft.com/office/drawing/2014/main" id="{1B7B88A0-671E-9D42-B970-6B461B6CE12E}"/>
+              </a:ext>
+            </a:extLst>
+          </p:cNvPr>
+          <p:cNvCxnSpPr>
+            <a:cxnSpLocks/>
+            <a:stCxn id="184" idx="3"/>
+            <a:endCxn id="171" idx="1"/>
+          </p:cNvCxnSpPr>
+          <p:nvPr/>
+        </p:nvCxnSpPr>
+        <p:spPr>
+          <a:xfrm flipV="1">
+            <a:off x="6777500" y="5196670"/>
+            <a:ext cx="3251263" cy="175975"/>
+          </a:xfrm>
+          <a:prstGeom prst="bentConnector3">
+            <a:avLst/>
+          </a:prstGeom>
+          <a:ln w="12700">
+            <a:solidFill>
+              <a:srgbClr val="0000CD"/>
+            </a:solidFill>
+            <a:tailEnd type="triangle"/>
+          </a:ln>
+        </p:spPr>
+        <p:style>
+          <a:lnRef idx="2">
+            <a:schemeClr val="accent1"/>
+          </a:lnRef>
+          <a:fillRef idx="0">
+            <a:schemeClr val="accent1"/>
+          </a:fillRef>
+          <a:effectRef idx="1">
+            <a:schemeClr val="accent1"/>
+          </a:effectRef>
+          <a:fontRef idx="minor">
+            <a:schemeClr val="tx1"/>
+          </a:fontRef>
+        </p:style>
+      </p:cxnSp>
+      <p:cxnSp>
+        <p:nvCxnSpPr>
+          <p:cNvPr id="196" name="连接符: 肘形 195">
+            <a:extLst>
+              <a:ext uri="{FF2B5EF4-FFF2-40B4-BE49-F238E27FC236}">
+                <a16:creationId xmlns:a16="http://schemas.microsoft.com/office/drawing/2014/main" id="{71347DC5-8F58-968E-18B1-732D1DC8584B}"/>
+              </a:ext>
+            </a:extLst>
+          </p:cNvPr>
+          <p:cNvCxnSpPr>
+            <a:cxnSpLocks/>
+            <a:stCxn id="184" idx="3"/>
+            <a:endCxn id="131" idx="1"/>
+          </p:cNvCxnSpPr>
+          <p:nvPr/>
+        </p:nvCxnSpPr>
+        <p:spPr>
+          <a:xfrm flipV="1">
+            <a:off x="6777500" y="4056189"/>
+            <a:ext cx="3251263" cy="1316456"/>
+          </a:xfrm>
+          <a:prstGeom prst="bentConnector3">
+            <a:avLst/>
+          </a:prstGeom>
+          <a:ln w="12700">
+            <a:solidFill>
+              <a:srgbClr val="0000CD"/>
+            </a:solidFill>
+            <a:tailEnd type="triangle"/>
+          </a:ln>
+        </p:spPr>
+        <p:style>
+          <a:lnRef idx="2">
+            <a:schemeClr val="accent1"/>
+          </a:lnRef>
+          <a:fillRef idx="0">
+            <a:schemeClr val="accent1"/>
+          </a:fillRef>
+          <a:effectRef idx="1">
+            <a:schemeClr val="accent1"/>
+          </a:effectRef>
+          <a:fontRef idx="minor">
+            <a:schemeClr val="tx1"/>
+          </a:fontRef>
+        </p:style>
+      </p:cxnSp>
+      <p:cxnSp>
+        <p:nvCxnSpPr>
+          <p:cNvPr id="199" name="连接符: 肘形 198">
+            <a:extLst>
+              <a:ext uri="{FF2B5EF4-FFF2-40B4-BE49-F238E27FC236}">
+                <a16:creationId xmlns:a16="http://schemas.microsoft.com/office/drawing/2014/main" id="{55DD9FD9-34D7-0A9D-EF1A-D5FE103BDA2A}"/>
+              </a:ext>
+            </a:extLst>
+          </p:cNvPr>
+          <p:cNvCxnSpPr>
+            <a:cxnSpLocks/>
+            <a:stCxn id="59" idx="3"/>
+            <a:endCxn id="131" idx="1"/>
+          </p:cNvCxnSpPr>
+          <p:nvPr/>
+        </p:nvCxnSpPr>
+        <p:spPr>
+          <a:xfrm flipV="1">
+            <a:off x="6777500" y="4056189"/>
+            <a:ext cx="3251263" cy="817772"/>
+          </a:xfrm>
+          <a:prstGeom prst="bentConnector3">
+            <a:avLst/>
+          </a:prstGeom>
+          <a:ln w="12700">
+            <a:solidFill>
+              <a:srgbClr val="0000CD"/>
+            </a:solidFill>
+            <a:tailEnd type="triangle"/>
+          </a:ln>
+        </p:spPr>
+        <p:style>
+          <a:lnRef idx="2">
+            <a:schemeClr val="accent1"/>
+          </a:lnRef>
+          <a:fillRef idx="0">
+            <a:schemeClr val="accent1"/>
+          </a:fillRef>
+          <a:effectRef idx="1">
+            <a:schemeClr val="accent1"/>
+          </a:effectRef>
+          <a:fontRef idx="minor">
+            <a:schemeClr val="tx1"/>
+          </a:fontRef>
+        </p:style>
+      </p:cxnSp>
+      <p:cxnSp>
+        <p:nvCxnSpPr>
+          <p:cNvPr id="205" name="连接符: 肘形 204">
+            <a:extLst>
+              <a:ext uri="{FF2B5EF4-FFF2-40B4-BE49-F238E27FC236}">
+                <a16:creationId xmlns:a16="http://schemas.microsoft.com/office/drawing/2014/main" id="{E96A241A-BE67-DBC2-F1E9-2BB697B4BCDC}"/>
+              </a:ext>
+            </a:extLst>
+          </p:cNvPr>
+          <p:cNvCxnSpPr>
+            <a:cxnSpLocks/>
+            <a:stCxn id="10" idx="3"/>
+            <a:endCxn id="131" idx="1"/>
+          </p:cNvCxnSpPr>
+          <p:nvPr/>
+        </p:nvCxnSpPr>
+        <p:spPr>
+          <a:xfrm>
+            <a:off x="6777500" y="3732603"/>
+            <a:ext cx="3251263" cy="323586"/>
+          </a:xfrm>
+          <a:prstGeom prst="bentConnector3">
+            <a:avLst/>
+          </a:prstGeom>
+          <a:ln w="12700">
+            <a:solidFill>
+              <a:srgbClr val="0000CD"/>
+            </a:solidFill>
+            <a:tailEnd type="triangle"/>
+          </a:ln>
+        </p:spPr>
+        <p:style>
+          <a:lnRef idx="2">
+            <a:schemeClr val="accent1"/>
+          </a:lnRef>
+          <a:fillRef idx="0">
+            <a:schemeClr val="accent1"/>
+          </a:fillRef>
+          <a:effectRef idx="1">
+            <a:schemeClr val="accent1"/>
+          </a:effectRef>
+          <a:fontRef idx="minor">
+            <a:schemeClr val="tx1"/>
+          </a:fontRef>
+        </p:style>
+      </p:cxnSp>
+      <p:cxnSp>
+        <p:nvCxnSpPr>
+          <p:cNvPr id="216" name="连接符: 肘形 215">
+            <a:extLst>
+              <a:ext uri="{FF2B5EF4-FFF2-40B4-BE49-F238E27FC236}">
+                <a16:creationId xmlns:a16="http://schemas.microsoft.com/office/drawing/2014/main" id="{CDB0FB27-BDB6-94FE-506B-DB690120D061}"/>
+              </a:ext>
+            </a:extLst>
+          </p:cNvPr>
+          <p:cNvCxnSpPr>
+            <a:cxnSpLocks/>
+            <a:stCxn id="15" idx="3"/>
+            <a:endCxn id="129" idx="1"/>
+          </p:cNvCxnSpPr>
+          <p:nvPr/>
+        </p:nvCxnSpPr>
+        <p:spPr>
+          <a:xfrm>
+            <a:off x="6773227" y="2612949"/>
+            <a:ext cx="3251263" cy="408025"/>
+          </a:xfrm>
+          <a:prstGeom prst="bentConnector3">
+            <a:avLst/>
+          </a:prstGeom>
+          <a:ln w="12700">
+            <a:solidFill>
+              <a:srgbClr val="0000CD"/>
+            </a:solidFill>
+            <a:tailEnd type="triangle"/>
+          </a:ln>
+        </p:spPr>
+        <p:style>
+          <a:lnRef idx="2">
+            <a:schemeClr val="accent1"/>
+          </a:lnRef>
+          <a:fillRef idx="0">
+            <a:schemeClr val="accent1"/>
+          </a:fillRef>
+          <a:effectRef idx="1">
+            <a:schemeClr val="accent1"/>
+          </a:effectRef>
+          <a:fontRef idx="minor">
+            <a:schemeClr val="tx1"/>
+          </a:fontRef>
+        </p:style>
+      </p:cxnSp>
+      <p:cxnSp>
+        <p:nvCxnSpPr>
+          <p:cNvPr id="219" name="连接符: 肘形 218">
+            <a:extLst>
+              <a:ext uri="{FF2B5EF4-FFF2-40B4-BE49-F238E27FC236}">
+                <a16:creationId xmlns:a16="http://schemas.microsoft.com/office/drawing/2014/main" id="{62207009-67C6-312A-989C-60DE4A34AE8E}"/>
+              </a:ext>
+            </a:extLst>
+          </p:cNvPr>
+          <p:cNvCxnSpPr>
+            <a:cxnSpLocks/>
+            <a:stCxn id="10" idx="3"/>
+            <a:endCxn id="129" idx="1"/>
+          </p:cNvCxnSpPr>
+          <p:nvPr/>
+        </p:nvCxnSpPr>
+        <p:spPr>
+          <a:xfrm flipV="1">
+            <a:off x="6777500" y="3020974"/>
+            <a:ext cx="3246990" cy="711629"/>
+          </a:xfrm>
+          <a:prstGeom prst="bentConnector3">
+            <a:avLst/>
+          </a:prstGeom>
+          <a:ln w="12700">
+            <a:solidFill>
+              <a:srgbClr val="0000CD"/>
+            </a:solidFill>
+            <a:tailEnd type="triangle"/>
+          </a:ln>
+        </p:spPr>
+        <p:style>
+          <a:lnRef idx="2">
+            <a:schemeClr val="accent1"/>
+          </a:lnRef>
+          <a:fillRef idx="0">
+            <a:schemeClr val="accent1"/>
+          </a:fillRef>
+          <a:effectRef idx="1">
+            <a:schemeClr val="accent1"/>
+          </a:effectRef>
+          <a:fontRef idx="minor">
+            <a:schemeClr val="tx1"/>
+          </a:fontRef>
+        </p:style>
+      </p:cxnSp>
+      <p:sp>
+        <p:nvSpPr>
+          <p:cNvPr id="254" name="矩形 253">
+            <a:extLst>
+              <a:ext uri="{FF2B5EF4-FFF2-40B4-BE49-F238E27FC236}">
+                <a16:creationId xmlns:a16="http://schemas.microsoft.com/office/drawing/2014/main" id="{0BE889AF-CB60-07E1-BFDE-185108361F98}"/>
+              </a:ext>
+            </a:extLst>
+          </p:cNvPr>
+          <p:cNvSpPr/>
+          <p:nvPr/>
+        </p:nvSpPr>
+        <p:spPr>
+          <a:xfrm>
+            <a:off x="6863884" y="4967280"/>
+            <a:ext cx="1407452" cy="560250"/>
+          </a:xfrm>
+          <a:prstGeom prst="rect">
+            <a:avLst/>
+          </a:prstGeom>
+          <a:noFill/>
+          <a:ln w="19050">
+            <a:noFill/>
+          </a:ln>
+        </p:spPr>
+        <p:style>
+          <a:lnRef idx="2">
+            <a:schemeClr val="accent1">
+              <a:shade val="50000"/>
+            </a:schemeClr>
+          </a:lnRef>
+          <a:fillRef idx="1">
+            <a:schemeClr val="accent1"/>
+          </a:fillRef>
+          <a:effectRef idx="0">
+            <a:schemeClr val="accent1"/>
+          </a:effectRef>
+          <a:fontRef idx="minor">
+            <a:schemeClr val="lt1"/>
+          </a:fontRef>
+        </p:style>
+        <p:txBody>
+          <a:bodyPr rtlCol="0" anchor="ctr"/>
+          <a:lstStyle/>
+          <a:p>
+            <a:pPr algn="ctr">
+              <a:lnSpc>
+                <a:spcPct val="85000"/>
+              </a:lnSpc>
+            </a:pPr>
+            <a:r>
+              <a:rPr lang="en-US" altLang="zh-CN" sz="1400" dirty="0">
+                <a:solidFill>
+                  <a:srgbClr val="0000CD"/>
+                </a:solidFill>
+                <a:latin typeface="Times New Roman" panose="02020603050405020304" pitchFamily="18" charset="0"/>
+                <a:cs typeface="Times New Roman" panose="02020603050405020304" pitchFamily="18" charset="0"/>
+              </a:rPr>
+              <a:t>CG</a:t>
+            </a:r>
+            <a:endParaRPr lang="en-GB" altLang="zh-CN" sz="1600" noProof="0" dirty="0">
+              <a:solidFill>
+                <a:srgbClr val="0000CD"/>
+              </a:solidFill>
+              <a:latin typeface="Times New Roman" panose="02020603050405020304" pitchFamily="18" charset="0"/>
+              <a:cs typeface="Times New Roman" panose="02020603050405020304" pitchFamily="18" charset="0"/>
+            </a:endParaRPr>
+          </a:p>
+        </p:txBody>
+      </p:sp>
+      <p:sp>
+        <p:nvSpPr>
+          <p:cNvPr id="256" name="矩形 255">
+            <a:extLst>
+              <a:ext uri="{FF2B5EF4-FFF2-40B4-BE49-F238E27FC236}">
+                <a16:creationId xmlns:a16="http://schemas.microsoft.com/office/drawing/2014/main" id="{F46990E2-D83E-C36D-FF9E-CED38A98AD8A}"/>
+              </a:ext>
+            </a:extLst>
+          </p:cNvPr>
+          <p:cNvSpPr/>
+          <p:nvPr/>
+        </p:nvSpPr>
+        <p:spPr>
+          <a:xfrm>
+            <a:off x="5996763" y="3215239"/>
+            <a:ext cx="3158556" cy="560250"/>
+          </a:xfrm>
+          <a:prstGeom prst="rect">
+            <a:avLst/>
+          </a:prstGeom>
+          <a:noFill/>
+          <a:ln w="19050">
+            <a:noFill/>
+          </a:ln>
+        </p:spPr>
+        <p:style>
+          <a:lnRef idx="2">
+            <a:schemeClr val="accent1">
+              <a:shade val="50000"/>
+            </a:schemeClr>
+          </a:lnRef>
+          <a:fillRef idx="1">
+            <a:schemeClr val="accent1"/>
+          </a:fillRef>
+          <a:effectRef idx="0">
+            <a:schemeClr val="accent1"/>
+          </a:effectRef>
+          <a:fontRef idx="minor">
+            <a:schemeClr val="lt1"/>
+          </a:fontRef>
+        </p:style>
+        <p:txBody>
+          <a:bodyPr rtlCol="0" anchor="ctr"/>
+          <a:lstStyle/>
+          <a:p>
+            <a:pPr algn="ctr">
+              <a:lnSpc>
+                <a:spcPct val="85000"/>
+              </a:lnSpc>
+            </a:pPr>
+            <a:r>
+              <a:rPr lang="en-US" altLang="zh-CN" sz="1400" dirty="0">
+                <a:solidFill>
+                  <a:srgbClr val="0000CD"/>
+                </a:solidFill>
+                <a:latin typeface="Times New Roman" panose="02020603050405020304" pitchFamily="18" charset="0"/>
+                <a:cs typeface="Times New Roman" panose="02020603050405020304" pitchFamily="18" charset="0"/>
+              </a:rPr>
+              <a:t>State (rotor)</a:t>
+            </a:r>
+            <a:r>
+              <a:rPr lang="en-GB" altLang="zh-CN" sz="1600" dirty="0">
+                <a:solidFill>
+                  <a:srgbClr val="0000CD"/>
+                </a:solidFill>
+                <a:latin typeface="Times New Roman" panose="02020603050405020304" pitchFamily="18" charset="0"/>
+                <a:cs typeface="Times New Roman" panose="02020603050405020304" pitchFamily="18" charset="0"/>
+              </a:rPr>
+              <a:t> </a:t>
+            </a:r>
+            <a:endParaRPr lang="en-GB" altLang="zh-CN" sz="1600" noProof="0" dirty="0">
+              <a:solidFill>
+                <a:srgbClr val="0000CD"/>
+              </a:solidFill>
+              <a:latin typeface="Times New Roman" panose="02020603050405020304" pitchFamily="18" charset="0"/>
+              <a:cs typeface="Times New Roman" panose="02020603050405020304" pitchFamily="18" charset="0"/>
+            </a:endParaRPr>
+          </a:p>
+          <a:p>
+            <a:pPr algn="ctr">
+              <a:lnSpc>
+                <a:spcPct val="85000"/>
+              </a:lnSpc>
+            </a:pPr>
+            <a:r>
+              <a:rPr lang="en-US" altLang="zh-CN" sz="1400" dirty="0">
+                <a:solidFill>
+                  <a:srgbClr val="0000CD"/>
+                </a:solidFill>
+                <a:latin typeface="Times New Roman" panose="02020603050405020304" pitchFamily="18" charset="0"/>
+                <a:cs typeface="Times New Roman" panose="02020603050405020304" pitchFamily="18" charset="0"/>
+              </a:rPr>
+              <a:t>Forces &amp; </a:t>
+            </a:r>
+            <a:r>
+              <a:rPr lang="en-GB" altLang="zh-CN" sz="1400" dirty="0">
+                <a:solidFill>
+                  <a:srgbClr val="0000CD"/>
+                </a:solidFill>
+                <a:latin typeface="Times New Roman" panose="02020603050405020304" pitchFamily="18" charset="0"/>
+                <a:cs typeface="Times New Roman" panose="02020603050405020304" pitchFamily="18" charset="0"/>
+              </a:rPr>
+              <a:t>Moments</a:t>
+            </a:r>
+            <a:endParaRPr lang="en-GB" altLang="zh-CN" sz="1400" noProof="0" dirty="0">
+              <a:solidFill>
+                <a:srgbClr val="0000CD"/>
+              </a:solidFill>
+              <a:latin typeface="Times New Roman" panose="02020603050405020304" pitchFamily="18" charset="0"/>
+              <a:cs typeface="Times New Roman" panose="02020603050405020304" pitchFamily="18" charset="0"/>
+            </a:endParaRPr>
+          </a:p>
+        </p:txBody>
+      </p:sp>
+      <p:sp>
+        <p:nvSpPr>
+          <p:cNvPr id="257" name="矩形 256">
+            <a:extLst>
+              <a:ext uri="{FF2B5EF4-FFF2-40B4-BE49-F238E27FC236}">
+                <a16:creationId xmlns:a16="http://schemas.microsoft.com/office/drawing/2014/main" id="{52D3922B-FF82-FDC9-2F23-129EEF3CDACB}"/>
+              </a:ext>
+            </a:extLst>
+          </p:cNvPr>
+          <p:cNvSpPr/>
+          <p:nvPr/>
+        </p:nvSpPr>
+        <p:spPr>
+          <a:xfrm>
+            <a:off x="5924686" y="4458504"/>
+            <a:ext cx="3285847" cy="560250"/>
+          </a:xfrm>
+          <a:prstGeom prst="rect">
+            <a:avLst/>
+          </a:prstGeom>
+          <a:noFill/>
+          <a:ln w="19050">
+            <a:noFill/>
+          </a:ln>
+        </p:spPr>
+        <p:style>
+          <a:lnRef idx="2">
+            <a:schemeClr val="accent1">
+              <a:shade val="50000"/>
+            </a:schemeClr>
+          </a:lnRef>
+          <a:fillRef idx="1">
+            <a:schemeClr val="accent1"/>
+          </a:fillRef>
+          <a:effectRef idx="0">
+            <a:schemeClr val="accent1"/>
+          </a:effectRef>
+          <a:fontRef idx="minor">
+            <a:schemeClr val="lt1"/>
+          </a:fontRef>
+        </p:style>
+        <p:txBody>
+          <a:bodyPr rtlCol="0" anchor="ctr"/>
+          <a:lstStyle/>
+          <a:p>
+            <a:pPr algn="ctr">
+              <a:lnSpc>
+                <a:spcPct val="85000"/>
+              </a:lnSpc>
+            </a:pPr>
+            <a:r>
+              <a:rPr lang="en-US" altLang="zh-CN" sz="1400" dirty="0">
+                <a:solidFill>
+                  <a:srgbClr val="0000CD"/>
+                </a:solidFill>
+                <a:latin typeface="Times New Roman" panose="02020603050405020304" pitchFamily="18" charset="0"/>
+                <a:cs typeface="Times New Roman" panose="02020603050405020304" pitchFamily="18" charset="0"/>
+              </a:rPr>
+              <a:t>Forces</a:t>
+            </a:r>
+            <a:r>
+              <a:rPr lang="en-GB" altLang="zh-CN" sz="1400" dirty="0">
+                <a:solidFill>
+                  <a:srgbClr val="0000CD"/>
+                </a:solidFill>
+                <a:latin typeface="Times New Roman" panose="02020603050405020304" pitchFamily="18" charset="0"/>
+                <a:cs typeface="Times New Roman" panose="02020603050405020304" pitchFamily="18" charset="0"/>
+              </a:rPr>
+              <a:t> </a:t>
+            </a:r>
+            <a:endParaRPr lang="en-GB" altLang="zh-CN" sz="1400" noProof="0" dirty="0">
+              <a:solidFill>
+                <a:srgbClr val="0000CD"/>
+              </a:solidFill>
+              <a:latin typeface="Times New Roman" panose="02020603050405020304" pitchFamily="18" charset="0"/>
+              <a:cs typeface="Times New Roman" panose="02020603050405020304" pitchFamily="18" charset="0"/>
+            </a:endParaRPr>
+          </a:p>
+        </p:txBody>
+      </p:sp>
+      <p:sp>
+        <p:nvSpPr>
+          <p:cNvPr id="291" name="矩形 290">
+            <a:extLst>
+              <a:ext uri="{FF2B5EF4-FFF2-40B4-BE49-F238E27FC236}">
+                <a16:creationId xmlns:a16="http://schemas.microsoft.com/office/drawing/2014/main" id="{EAF074FE-C5F3-EB74-F878-83EB2375ACA5}"/>
+              </a:ext>
+            </a:extLst>
+          </p:cNvPr>
+          <p:cNvSpPr/>
+          <p:nvPr/>
+        </p:nvSpPr>
+        <p:spPr>
+          <a:xfrm>
+            <a:off x="5996763" y="2203202"/>
+            <a:ext cx="3158556" cy="560250"/>
+          </a:xfrm>
+          <a:prstGeom prst="rect">
+            <a:avLst/>
+          </a:prstGeom>
+          <a:noFill/>
+          <a:ln w="19050">
+            <a:noFill/>
+          </a:ln>
+        </p:spPr>
+        <p:style>
+          <a:lnRef idx="2">
+            <a:schemeClr val="accent1">
+              <a:shade val="50000"/>
+            </a:schemeClr>
+          </a:lnRef>
+          <a:fillRef idx="1">
+            <a:schemeClr val="accent1"/>
+          </a:fillRef>
+          <a:effectRef idx="0">
+            <a:schemeClr val="accent1"/>
+          </a:effectRef>
+          <a:fontRef idx="minor">
+            <a:schemeClr val="lt1"/>
+          </a:fontRef>
+        </p:style>
+        <p:txBody>
+          <a:bodyPr rtlCol="0" anchor="ctr"/>
+          <a:lstStyle/>
+          <a:p>
+            <a:pPr algn="ctr">
+              <a:lnSpc>
+                <a:spcPct val="85000"/>
+              </a:lnSpc>
+            </a:pPr>
+            <a:r>
+              <a:rPr lang="en-US" altLang="zh-CN" sz="1400" dirty="0">
+                <a:solidFill>
+                  <a:srgbClr val="0000CD"/>
+                </a:solidFill>
+                <a:latin typeface="Times New Roman" panose="02020603050405020304" pitchFamily="18" charset="0"/>
+                <a:cs typeface="Times New Roman" panose="02020603050405020304" pitchFamily="18" charset="0"/>
+              </a:rPr>
+              <a:t>Forces &amp; </a:t>
+            </a:r>
+            <a:r>
+              <a:rPr lang="en-GB" altLang="zh-CN" sz="1400" dirty="0">
+                <a:solidFill>
+                  <a:srgbClr val="0000CD"/>
+                </a:solidFill>
+                <a:latin typeface="Times New Roman" panose="02020603050405020304" pitchFamily="18" charset="0"/>
+                <a:cs typeface="Times New Roman" panose="02020603050405020304" pitchFamily="18" charset="0"/>
+              </a:rPr>
+              <a:t>Moments</a:t>
+            </a:r>
+            <a:endParaRPr lang="en-GB" altLang="zh-CN" sz="1400" noProof="0" dirty="0">
+              <a:solidFill>
+                <a:srgbClr val="0000CD"/>
+              </a:solidFill>
+              <a:latin typeface="Times New Roman" panose="02020603050405020304" pitchFamily="18" charset="0"/>
+              <a:cs typeface="Times New Roman" panose="02020603050405020304" pitchFamily="18" charset="0"/>
+            </a:endParaRPr>
+          </a:p>
+        </p:txBody>
+      </p:sp>
+    </p:spTree>
+    <p:extLst>
+      <p:ext uri="{BB962C8B-B14F-4D97-AF65-F5344CB8AC3E}">
+        <p14:creationId xmlns:p14="http://schemas.microsoft.com/office/powerpoint/2010/main" val="1584463432"/>
       </p:ext>
     </p:extLst>
   </p:cSld>

--- a/HER05/01 - Mathematical Modeling/Sketch/Forces and Moments Sketch.pptx
+++ b/HER05/01 - Mathematical Modeling/Sketch/Forces and Moments Sketch.pptx
@@ -122,7 +122,7 @@
 <file path=ppt/revisionInfo.xml><?xml version="1.0" encoding="utf-8"?>
 <p1510:revInfo xmlns:a="http://schemas.openxmlformats.org/drawingml/2006/main" xmlns:r="http://schemas.openxmlformats.org/officeDocument/2006/relationships" xmlns:p1510="http://schemas.microsoft.com/office/powerpoint/2015/10/main">
   <p1510:revLst>
-    <p1510:client id="{CDC5B0EF-6BEB-4658-A9FF-CB66F6FA6C1E}" v="383" dt="2025-05-23T20:13:16.841"/>
+    <p1510:client id="{CDC5B0EF-6BEB-4658-A9FF-CB66F6FA6C1E}" v="413" dt="2025-05-24T00:52:37.993"/>
   </p1510:revLst>
 </p1510:revInfo>
 </file>
@@ -132,24 +132,16 @@
   <pc:docChgLst>
     <pc:chgData name="Li, Hanchen F" userId="3aee791e-6a2d-4da7-a77b-fbdf7bf15886" providerId="ADAL" clId="{CDC5B0EF-6BEB-4658-A9FF-CB66F6FA6C1E}"/>
     <pc:docChg chg="undo redo custSel addSld delSld modSld modMainMaster modNotesMaster">
-      <pc:chgData name="Li, Hanchen F" userId="3aee791e-6a2d-4da7-a77b-fbdf7bf15886" providerId="ADAL" clId="{CDC5B0EF-6BEB-4658-A9FF-CB66F6FA6C1E}" dt="2025-05-23T20:13:53.563" v="8153" actId="1076"/>
+      <pc:chgData name="Li, Hanchen F" userId="3aee791e-6a2d-4da7-a77b-fbdf7bf15886" providerId="ADAL" clId="{CDC5B0EF-6BEB-4658-A9FF-CB66F6FA6C1E}" dt="2025-05-24T01:05:10.287" v="8733" actId="20577"/>
       <pc:docMkLst>
         <pc:docMk/>
       </pc:docMkLst>
       <pc:sldChg chg="addSp delSp modSp new mod">
-        <pc:chgData name="Li, Hanchen F" userId="3aee791e-6a2d-4da7-a77b-fbdf7bf15886" providerId="ADAL" clId="{CDC5B0EF-6BEB-4658-A9FF-CB66F6FA6C1E}" dt="2025-05-23T16:55:18.405" v="7846" actId="207"/>
+        <pc:chgData name="Li, Hanchen F" userId="3aee791e-6a2d-4da7-a77b-fbdf7bf15886" providerId="ADAL" clId="{CDC5B0EF-6BEB-4658-A9FF-CB66F6FA6C1E}" dt="2025-05-24T00:53:12.071" v="8729" actId="1076"/>
         <pc:sldMkLst>
           <pc:docMk/>
           <pc:sldMk cId="2152317508" sldId="256"/>
         </pc:sldMkLst>
-        <pc:spChg chg="del">
-          <ac:chgData name="Li, Hanchen F" userId="3aee791e-6a2d-4da7-a77b-fbdf7bf15886" providerId="ADAL" clId="{CDC5B0EF-6BEB-4658-A9FF-CB66F6FA6C1E}" dt="2025-05-22T21:35:51.853" v="1" actId="478"/>
-          <ac:spMkLst>
-            <pc:docMk/>
-            <pc:sldMk cId="2152317508" sldId="256"/>
-            <ac:spMk id="2" creationId="{5E1BDCFA-D225-49BA-B506-002C6E8C0841}"/>
-          </ac:spMkLst>
-        </pc:spChg>
         <pc:spChg chg="add mod">
           <ac:chgData name="Li, Hanchen F" userId="3aee791e-6a2d-4da7-a77b-fbdf7bf15886" providerId="ADAL" clId="{CDC5B0EF-6BEB-4658-A9FF-CB66F6FA6C1E}" dt="2025-05-23T14:36:15.654" v="6688" actId="1076"/>
           <ac:spMkLst>
@@ -158,14 +150,6 @@
             <ac:spMk id="2" creationId="{B59E7ED7-701A-8C03-5826-48621390B84B}"/>
           </ac:spMkLst>
         </pc:spChg>
-        <pc:spChg chg="del">
-          <ac:chgData name="Li, Hanchen F" userId="3aee791e-6a2d-4da7-a77b-fbdf7bf15886" providerId="ADAL" clId="{CDC5B0EF-6BEB-4658-A9FF-CB66F6FA6C1E}" dt="2025-05-22T21:35:52.793" v="2" actId="478"/>
-          <ac:spMkLst>
-            <pc:docMk/>
-            <pc:sldMk cId="2152317508" sldId="256"/>
-            <ac:spMk id="3" creationId="{162F48E0-E4FB-0EB9-A006-E867A159080D}"/>
-          </ac:spMkLst>
-        </pc:spChg>
         <pc:spChg chg="add mod">
           <ac:chgData name="Li, Hanchen F" userId="3aee791e-6a2d-4da7-a77b-fbdf7bf15886" providerId="ADAL" clId="{CDC5B0EF-6BEB-4658-A9FF-CB66F6FA6C1E}" dt="2025-05-23T14:36:10.232" v="6686" actId="1076"/>
           <ac:spMkLst>
@@ -190,6 +174,14 @@
             <ac:spMk id="5" creationId="{5DBDA668-D12D-B5BA-A487-BD758F21D7F0}"/>
           </ac:spMkLst>
         </pc:spChg>
+        <pc:spChg chg="add mod">
+          <ac:chgData name="Li, Hanchen F" userId="3aee791e-6a2d-4da7-a77b-fbdf7bf15886" providerId="ADAL" clId="{CDC5B0EF-6BEB-4658-A9FF-CB66F6FA6C1E}" dt="2025-05-24T00:52:42.898" v="8722" actId="1076"/>
+          <ac:spMkLst>
+            <pc:docMk/>
+            <pc:sldMk cId="2152317508" sldId="256"/>
+            <ac:spMk id="7" creationId="{1D746C54-8DEE-DBC7-AEE4-692691C43277}"/>
+          </ac:spMkLst>
+        </pc:spChg>
         <pc:spChg chg="add mod topLvl">
           <ac:chgData name="Li, Hanchen F" userId="3aee791e-6a2d-4da7-a77b-fbdf7bf15886" providerId="ADAL" clId="{CDC5B0EF-6BEB-4658-A9FF-CB66F6FA6C1E}" dt="2025-05-22T23:17:33.494" v="3248" actId="14826"/>
           <ac:spMkLst>
@@ -198,14 +190,6 @@
             <ac:spMk id="30" creationId="{03E7375E-B3C1-217F-067E-365A732738CA}"/>
           </ac:spMkLst>
         </pc:spChg>
-        <pc:spChg chg="add del mod">
-          <ac:chgData name="Li, Hanchen F" userId="3aee791e-6a2d-4da7-a77b-fbdf7bf15886" providerId="ADAL" clId="{CDC5B0EF-6BEB-4658-A9FF-CB66F6FA6C1E}" dt="2025-05-22T22:16:22.014" v="1365" actId="478"/>
-          <ac:spMkLst>
-            <pc:docMk/>
-            <pc:sldMk cId="2152317508" sldId="256"/>
-            <ac:spMk id="31" creationId="{9D36162F-281C-C78D-3987-8F0E744FD048}"/>
-          </ac:spMkLst>
-        </pc:spChg>
         <pc:spChg chg="add mod ord topLvl">
           <ac:chgData name="Li, Hanchen F" userId="3aee791e-6a2d-4da7-a77b-fbdf7bf15886" providerId="ADAL" clId="{CDC5B0EF-6BEB-4658-A9FF-CB66F6FA6C1E}" dt="2025-05-22T23:17:33.494" v="3248" actId="14826"/>
           <ac:spMkLst>
@@ -238,22 +222,6 @@
             <ac:spMk id="134" creationId="{6100B307-914C-8BEC-6B3B-3C3AFCC6D832}"/>
           </ac:spMkLst>
         </pc:spChg>
-        <pc:spChg chg="add del mod ord">
-          <ac:chgData name="Li, Hanchen F" userId="3aee791e-6a2d-4da7-a77b-fbdf7bf15886" providerId="ADAL" clId="{CDC5B0EF-6BEB-4658-A9FF-CB66F6FA6C1E}" dt="2025-05-22T22:04:43.729" v="915" actId="478"/>
-          <ac:spMkLst>
-            <pc:docMk/>
-            <pc:sldMk cId="2152317508" sldId="256"/>
-            <ac:spMk id="150" creationId="{6A894B35-62C8-2FB6-E93B-1CB8CD75E5C8}"/>
-          </ac:spMkLst>
-        </pc:spChg>
-        <pc:spChg chg="add del mod ord">
-          <ac:chgData name="Li, Hanchen F" userId="3aee791e-6a2d-4da7-a77b-fbdf7bf15886" providerId="ADAL" clId="{CDC5B0EF-6BEB-4658-A9FF-CB66F6FA6C1E}" dt="2025-05-22T22:04:42.458" v="913" actId="478"/>
-          <ac:spMkLst>
-            <pc:docMk/>
-            <pc:sldMk cId="2152317508" sldId="256"/>
-            <ac:spMk id="151" creationId="{47CE325C-72FD-2A3D-7FE9-7CDC7D25B532}"/>
-          </ac:spMkLst>
-        </pc:spChg>
         <pc:spChg chg="add mod ord topLvl">
           <ac:chgData name="Li, Hanchen F" userId="3aee791e-6a2d-4da7-a77b-fbdf7bf15886" providerId="ADAL" clId="{CDC5B0EF-6BEB-4658-A9FF-CB66F6FA6C1E}" dt="2025-05-22T23:17:33.494" v="3248" actId="14826"/>
           <ac:spMkLst>
@@ -270,14 +238,6 @@
             <ac:spMk id="158" creationId="{48E4F557-14D2-AE99-53EA-B93325EFF8D3}"/>
           </ac:spMkLst>
         </pc:spChg>
-        <pc:spChg chg="add del mod">
-          <ac:chgData name="Li, Hanchen F" userId="3aee791e-6a2d-4da7-a77b-fbdf7bf15886" providerId="ADAL" clId="{CDC5B0EF-6BEB-4658-A9FF-CB66F6FA6C1E}" dt="2025-05-22T22:11:37.608" v="1179" actId="478"/>
-          <ac:spMkLst>
-            <pc:docMk/>
-            <pc:sldMk cId="2152317508" sldId="256"/>
-            <ac:spMk id="175" creationId="{C5AE0CFD-CB69-8F84-37A8-5CEE88611564}"/>
-          </ac:spMkLst>
-        </pc:spChg>
         <pc:spChg chg="add mod ord topLvl">
           <ac:chgData name="Li, Hanchen F" userId="3aee791e-6a2d-4da7-a77b-fbdf7bf15886" providerId="ADAL" clId="{CDC5B0EF-6BEB-4658-A9FF-CB66F6FA6C1E}" dt="2025-05-22T23:18:22.360" v="3254" actId="14826"/>
           <ac:spMkLst>
@@ -302,46 +262,6 @@
             <ac:spMk id="223" creationId="{F85F9F5E-7F8C-D806-1208-A61EF4A432E9}"/>
           </ac:spMkLst>
         </pc:spChg>
-        <pc:spChg chg="add mod">
-          <ac:chgData name="Li, Hanchen F" userId="3aee791e-6a2d-4da7-a77b-fbdf7bf15886" providerId="ADAL" clId="{CDC5B0EF-6BEB-4658-A9FF-CB66F6FA6C1E}" dt="2025-05-22T22:18:26.597" v="1439" actId="571"/>
-          <ac:spMkLst>
-            <pc:docMk/>
-            <pc:sldMk cId="2152317508" sldId="256"/>
-            <ac:spMk id="232" creationId="{4B698B2A-D14F-7091-D747-A2A9BB9B24A0}"/>
-          </ac:spMkLst>
-        </pc:spChg>
-        <pc:spChg chg="add mod">
-          <ac:chgData name="Li, Hanchen F" userId="3aee791e-6a2d-4da7-a77b-fbdf7bf15886" providerId="ADAL" clId="{CDC5B0EF-6BEB-4658-A9FF-CB66F6FA6C1E}" dt="2025-05-22T22:18:26.597" v="1439" actId="571"/>
-          <ac:spMkLst>
-            <pc:docMk/>
-            <pc:sldMk cId="2152317508" sldId="256"/>
-            <ac:spMk id="233" creationId="{73F5420B-42AF-1756-FAB1-8C2E3326440F}"/>
-          </ac:spMkLst>
-        </pc:spChg>
-        <pc:spChg chg="add mod">
-          <ac:chgData name="Li, Hanchen F" userId="3aee791e-6a2d-4da7-a77b-fbdf7bf15886" providerId="ADAL" clId="{CDC5B0EF-6BEB-4658-A9FF-CB66F6FA6C1E}" dt="2025-05-22T22:18:26.597" v="1439" actId="571"/>
-          <ac:spMkLst>
-            <pc:docMk/>
-            <pc:sldMk cId="2152317508" sldId="256"/>
-            <ac:spMk id="234" creationId="{964DE85A-5BB3-31C5-0EFC-65983F647B19}"/>
-          </ac:spMkLst>
-        </pc:spChg>
-        <pc:spChg chg="add mod">
-          <ac:chgData name="Li, Hanchen F" userId="3aee791e-6a2d-4da7-a77b-fbdf7bf15886" providerId="ADAL" clId="{CDC5B0EF-6BEB-4658-A9FF-CB66F6FA6C1E}" dt="2025-05-22T22:27:49.491" v="2188" actId="1076"/>
-          <ac:spMkLst>
-            <pc:docMk/>
-            <pc:sldMk cId="2152317508" sldId="256"/>
-            <ac:spMk id="258" creationId="{1C366095-B703-2ED1-DDCE-4FFFABBC7B1A}"/>
-          </ac:spMkLst>
-        </pc:spChg>
-        <pc:spChg chg="add mod">
-          <ac:chgData name="Li, Hanchen F" userId="3aee791e-6a2d-4da7-a77b-fbdf7bf15886" providerId="ADAL" clId="{CDC5B0EF-6BEB-4658-A9FF-CB66F6FA6C1E}" dt="2025-05-22T22:27:49.491" v="2188" actId="1076"/>
-          <ac:spMkLst>
-            <pc:docMk/>
-            <pc:sldMk cId="2152317508" sldId="256"/>
-            <ac:spMk id="259" creationId="{6C934AC5-A5AB-341E-3867-A4A411C61BA4}"/>
-          </ac:spMkLst>
-        </pc:spChg>
         <pc:spChg chg="add mod ord topLvl">
           <ac:chgData name="Li, Hanchen F" userId="3aee791e-6a2d-4da7-a77b-fbdf7bf15886" providerId="ADAL" clId="{CDC5B0EF-6BEB-4658-A9FF-CB66F6FA6C1E}" dt="2025-05-22T23:18:22.360" v="3254" actId="14826"/>
           <ac:spMkLst>
@@ -406,206 +326,6 @@
             <ac:spMk id="302" creationId="{9F1E5FAD-2D86-C8A9-B7BD-0D1C0A758411}"/>
           </ac:spMkLst>
         </pc:spChg>
-        <pc:spChg chg="mod">
-          <ac:chgData name="Li, Hanchen F" userId="3aee791e-6a2d-4da7-a77b-fbdf7bf15886" providerId="ADAL" clId="{CDC5B0EF-6BEB-4658-A9FF-CB66F6FA6C1E}" dt="2025-05-22T22:32:42.815" v="2492" actId="571"/>
-          <ac:spMkLst>
-            <pc:docMk/>
-            <pc:sldMk cId="2152317508" sldId="256"/>
-            <ac:spMk id="357" creationId="{2175F4C0-AAE7-52F8-B468-B7CEBEFDF7E0}"/>
-          </ac:spMkLst>
-        </pc:spChg>
-        <pc:spChg chg="mod">
-          <ac:chgData name="Li, Hanchen F" userId="3aee791e-6a2d-4da7-a77b-fbdf7bf15886" providerId="ADAL" clId="{CDC5B0EF-6BEB-4658-A9FF-CB66F6FA6C1E}" dt="2025-05-22T22:32:42.815" v="2492" actId="571"/>
-          <ac:spMkLst>
-            <pc:docMk/>
-            <pc:sldMk cId="2152317508" sldId="256"/>
-            <ac:spMk id="358" creationId="{2FA36215-C607-8F57-D8A6-273051604FBB}"/>
-          </ac:spMkLst>
-        </pc:spChg>
-        <pc:spChg chg="mod">
-          <ac:chgData name="Li, Hanchen F" userId="3aee791e-6a2d-4da7-a77b-fbdf7bf15886" providerId="ADAL" clId="{CDC5B0EF-6BEB-4658-A9FF-CB66F6FA6C1E}" dt="2025-05-22T22:32:42.815" v="2492" actId="571"/>
-          <ac:spMkLst>
-            <pc:docMk/>
-            <pc:sldMk cId="2152317508" sldId="256"/>
-            <ac:spMk id="359" creationId="{AF012E77-A5E7-F844-54B9-A734D895F077}"/>
-          </ac:spMkLst>
-        </pc:spChg>
-        <pc:spChg chg="mod">
-          <ac:chgData name="Li, Hanchen F" userId="3aee791e-6a2d-4da7-a77b-fbdf7bf15886" providerId="ADAL" clId="{CDC5B0EF-6BEB-4658-A9FF-CB66F6FA6C1E}" dt="2025-05-22T22:32:42.815" v="2492" actId="571"/>
-          <ac:spMkLst>
-            <pc:docMk/>
-            <pc:sldMk cId="2152317508" sldId="256"/>
-            <ac:spMk id="360" creationId="{2DC47447-562C-8C93-BB18-061654159F31}"/>
-          </ac:spMkLst>
-        </pc:spChg>
-        <pc:spChg chg="mod">
-          <ac:chgData name="Li, Hanchen F" userId="3aee791e-6a2d-4da7-a77b-fbdf7bf15886" providerId="ADAL" clId="{CDC5B0EF-6BEB-4658-A9FF-CB66F6FA6C1E}" dt="2025-05-22T22:32:42.815" v="2492" actId="571"/>
-          <ac:spMkLst>
-            <pc:docMk/>
-            <pc:sldMk cId="2152317508" sldId="256"/>
-            <ac:spMk id="365" creationId="{3DBE7F4C-4DA0-DF29-F66E-03BBF52ADB1F}"/>
-          </ac:spMkLst>
-        </pc:spChg>
-        <pc:spChg chg="mod">
-          <ac:chgData name="Li, Hanchen F" userId="3aee791e-6a2d-4da7-a77b-fbdf7bf15886" providerId="ADAL" clId="{CDC5B0EF-6BEB-4658-A9FF-CB66F6FA6C1E}" dt="2025-05-22T22:32:42.815" v="2492" actId="571"/>
-          <ac:spMkLst>
-            <pc:docMk/>
-            <pc:sldMk cId="2152317508" sldId="256"/>
-            <ac:spMk id="366" creationId="{2F1D725F-B358-494F-76F0-344D10693BE9}"/>
-          </ac:spMkLst>
-        </pc:spChg>
-        <pc:spChg chg="mod">
-          <ac:chgData name="Li, Hanchen F" userId="3aee791e-6a2d-4da7-a77b-fbdf7bf15886" providerId="ADAL" clId="{CDC5B0EF-6BEB-4658-A9FF-CB66F6FA6C1E}" dt="2025-05-22T22:32:42.815" v="2492" actId="571"/>
-          <ac:spMkLst>
-            <pc:docMk/>
-            <pc:sldMk cId="2152317508" sldId="256"/>
-            <ac:spMk id="368" creationId="{C18B9CCA-29CB-DC87-6E8F-BDA90463795D}"/>
-          </ac:spMkLst>
-        </pc:spChg>
-        <pc:spChg chg="mod">
-          <ac:chgData name="Li, Hanchen F" userId="3aee791e-6a2d-4da7-a77b-fbdf7bf15886" providerId="ADAL" clId="{CDC5B0EF-6BEB-4658-A9FF-CB66F6FA6C1E}" dt="2025-05-22T22:32:42.815" v="2492" actId="571"/>
-          <ac:spMkLst>
-            <pc:docMk/>
-            <pc:sldMk cId="2152317508" sldId="256"/>
-            <ac:spMk id="388" creationId="{424F4190-0A56-2B92-97D2-31147F10846A}"/>
-          </ac:spMkLst>
-        </pc:spChg>
-        <pc:spChg chg="mod">
-          <ac:chgData name="Li, Hanchen F" userId="3aee791e-6a2d-4da7-a77b-fbdf7bf15886" providerId="ADAL" clId="{CDC5B0EF-6BEB-4658-A9FF-CB66F6FA6C1E}" dt="2025-05-22T22:33:30.908" v="2505" actId="571"/>
-          <ac:spMkLst>
-            <pc:docMk/>
-            <pc:sldMk cId="2152317508" sldId="256"/>
-            <ac:spMk id="394" creationId="{07F750D8-7617-D794-BADE-62CD8C275C25}"/>
-          </ac:spMkLst>
-        </pc:spChg>
-        <pc:spChg chg="mod">
-          <ac:chgData name="Li, Hanchen F" userId="3aee791e-6a2d-4da7-a77b-fbdf7bf15886" providerId="ADAL" clId="{CDC5B0EF-6BEB-4658-A9FF-CB66F6FA6C1E}" dt="2025-05-22T22:33:30.908" v="2505" actId="571"/>
-          <ac:spMkLst>
-            <pc:docMk/>
-            <pc:sldMk cId="2152317508" sldId="256"/>
-            <ac:spMk id="395" creationId="{036F20E5-20B1-42C8-4F68-BFF03F42F355}"/>
-          </ac:spMkLst>
-        </pc:spChg>
-        <pc:spChg chg="mod">
-          <ac:chgData name="Li, Hanchen F" userId="3aee791e-6a2d-4da7-a77b-fbdf7bf15886" providerId="ADAL" clId="{CDC5B0EF-6BEB-4658-A9FF-CB66F6FA6C1E}" dt="2025-05-22T22:33:30.908" v="2505" actId="571"/>
-          <ac:spMkLst>
-            <pc:docMk/>
-            <pc:sldMk cId="2152317508" sldId="256"/>
-            <ac:spMk id="396" creationId="{CAF03C03-7A49-F61F-D721-2CDC41BEC411}"/>
-          </ac:spMkLst>
-        </pc:spChg>
-        <pc:spChg chg="mod">
-          <ac:chgData name="Li, Hanchen F" userId="3aee791e-6a2d-4da7-a77b-fbdf7bf15886" providerId="ADAL" clId="{CDC5B0EF-6BEB-4658-A9FF-CB66F6FA6C1E}" dt="2025-05-22T22:33:30.908" v="2505" actId="571"/>
-          <ac:spMkLst>
-            <pc:docMk/>
-            <pc:sldMk cId="2152317508" sldId="256"/>
-            <ac:spMk id="397" creationId="{88D69805-0619-C1C2-A81B-99806268B283}"/>
-          </ac:spMkLst>
-        </pc:spChg>
-        <pc:spChg chg="mod">
-          <ac:chgData name="Li, Hanchen F" userId="3aee791e-6a2d-4da7-a77b-fbdf7bf15886" providerId="ADAL" clId="{CDC5B0EF-6BEB-4658-A9FF-CB66F6FA6C1E}" dt="2025-05-22T22:33:30.908" v="2505" actId="571"/>
-          <ac:spMkLst>
-            <pc:docMk/>
-            <pc:sldMk cId="2152317508" sldId="256"/>
-            <ac:spMk id="398" creationId="{77848363-FB64-2EAB-0AE9-77387CBE1C4F}"/>
-          </ac:spMkLst>
-        </pc:spChg>
-        <pc:spChg chg="mod">
-          <ac:chgData name="Li, Hanchen F" userId="3aee791e-6a2d-4da7-a77b-fbdf7bf15886" providerId="ADAL" clId="{CDC5B0EF-6BEB-4658-A9FF-CB66F6FA6C1E}" dt="2025-05-22T22:33:30.908" v="2505" actId="571"/>
-          <ac:spMkLst>
-            <pc:docMk/>
-            <pc:sldMk cId="2152317508" sldId="256"/>
-            <ac:spMk id="399" creationId="{0A2EBE76-CBCD-D681-3657-50A740945322}"/>
-          </ac:spMkLst>
-        </pc:spChg>
-        <pc:spChg chg="mod">
-          <ac:chgData name="Li, Hanchen F" userId="3aee791e-6a2d-4da7-a77b-fbdf7bf15886" providerId="ADAL" clId="{CDC5B0EF-6BEB-4658-A9FF-CB66F6FA6C1E}" dt="2025-05-22T22:33:30.908" v="2505" actId="571"/>
-          <ac:spMkLst>
-            <pc:docMk/>
-            <pc:sldMk cId="2152317508" sldId="256"/>
-            <ac:spMk id="401" creationId="{2CE87F69-A4F0-CE63-3EDE-19A8954C8151}"/>
-          </ac:spMkLst>
-        </pc:spChg>
-        <pc:spChg chg="mod">
-          <ac:chgData name="Li, Hanchen F" userId="3aee791e-6a2d-4da7-a77b-fbdf7bf15886" providerId="ADAL" clId="{CDC5B0EF-6BEB-4658-A9FF-CB66F6FA6C1E}" dt="2025-05-22T22:33:30.908" v="2505" actId="571"/>
-          <ac:spMkLst>
-            <pc:docMk/>
-            <pc:sldMk cId="2152317508" sldId="256"/>
-            <ac:spMk id="420" creationId="{4094F9DE-3818-A6F1-E176-6CEC61A1B147}"/>
-          </ac:spMkLst>
-        </pc:spChg>
-        <pc:spChg chg="add del mod">
-          <ac:chgData name="Li, Hanchen F" userId="3aee791e-6a2d-4da7-a77b-fbdf7bf15886" providerId="ADAL" clId="{CDC5B0EF-6BEB-4658-A9FF-CB66F6FA6C1E}" dt="2025-05-22T22:34:08.197" v="2512" actId="478"/>
-          <ac:spMkLst>
-            <pc:docMk/>
-            <pc:sldMk cId="2152317508" sldId="256"/>
-            <ac:spMk id="423" creationId="{2C2D2E47-3D6F-D5E2-C540-24FB1F2D2C26}"/>
-          </ac:spMkLst>
-        </pc:spChg>
-        <pc:spChg chg="mod">
-          <ac:chgData name="Li, Hanchen F" userId="3aee791e-6a2d-4da7-a77b-fbdf7bf15886" providerId="ADAL" clId="{CDC5B0EF-6BEB-4658-A9FF-CB66F6FA6C1E}" dt="2025-05-22T22:35:52.716" v="2537" actId="571"/>
-          <ac:spMkLst>
-            <pc:docMk/>
-            <pc:sldMk cId="2152317508" sldId="256"/>
-            <ac:spMk id="430" creationId="{353C923F-0403-C17D-C94A-3DC830E73F7C}"/>
-          </ac:spMkLst>
-        </pc:spChg>
-        <pc:spChg chg="mod">
-          <ac:chgData name="Li, Hanchen F" userId="3aee791e-6a2d-4da7-a77b-fbdf7bf15886" providerId="ADAL" clId="{CDC5B0EF-6BEB-4658-A9FF-CB66F6FA6C1E}" dt="2025-05-22T22:35:52.716" v="2537" actId="571"/>
-          <ac:spMkLst>
-            <pc:docMk/>
-            <pc:sldMk cId="2152317508" sldId="256"/>
-            <ac:spMk id="431" creationId="{CC894AE3-BB40-717B-9C3E-F2CC4F669645}"/>
-          </ac:spMkLst>
-        </pc:spChg>
-        <pc:spChg chg="mod">
-          <ac:chgData name="Li, Hanchen F" userId="3aee791e-6a2d-4da7-a77b-fbdf7bf15886" providerId="ADAL" clId="{CDC5B0EF-6BEB-4658-A9FF-CB66F6FA6C1E}" dt="2025-05-22T22:35:52.716" v="2537" actId="571"/>
-          <ac:spMkLst>
-            <pc:docMk/>
-            <pc:sldMk cId="2152317508" sldId="256"/>
-            <ac:spMk id="432" creationId="{5F582C53-BBB8-E48D-F10C-3508F2A53512}"/>
-          </ac:spMkLst>
-        </pc:spChg>
-        <pc:spChg chg="mod">
-          <ac:chgData name="Li, Hanchen F" userId="3aee791e-6a2d-4da7-a77b-fbdf7bf15886" providerId="ADAL" clId="{CDC5B0EF-6BEB-4658-A9FF-CB66F6FA6C1E}" dt="2025-05-22T22:35:52.716" v="2537" actId="571"/>
-          <ac:spMkLst>
-            <pc:docMk/>
-            <pc:sldMk cId="2152317508" sldId="256"/>
-            <ac:spMk id="433" creationId="{FE73281F-5EA3-9847-F092-7085082B6B2C}"/>
-          </ac:spMkLst>
-        </pc:spChg>
-        <pc:spChg chg="mod">
-          <ac:chgData name="Li, Hanchen F" userId="3aee791e-6a2d-4da7-a77b-fbdf7bf15886" providerId="ADAL" clId="{CDC5B0EF-6BEB-4658-A9FF-CB66F6FA6C1E}" dt="2025-05-22T22:35:52.716" v="2537" actId="571"/>
-          <ac:spMkLst>
-            <pc:docMk/>
-            <pc:sldMk cId="2152317508" sldId="256"/>
-            <ac:spMk id="434" creationId="{B94B8BB4-E236-9AAC-BC93-9627B285EBD4}"/>
-          </ac:spMkLst>
-        </pc:spChg>
-        <pc:spChg chg="mod">
-          <ac:chgData name="Li, Hanchen F" userId="3aee791e-6a2d-4da7-a77b-fbdf7bf15886" providerId="ADAL" clId="{CDC5B0EF-6BEB-4658-A9FF-CB66F6FA6C1E}" dt="2025-05-22T22:35:52.716" v="2537" actId="571"/>
-          <ac:spMkLst>
-            <pc:docMk/>
-            <pc:sldMk cId="2152317508" sldId="256"/>
-            <ac:spMk id="435" creationId="{6A451C46-A9A7-327B-7B77-1BF23D217C28}"/>
-          </ac:spMkLst>
-        </pc:spChg>
-        <pc:spChg chg="mod">
-          <ac:chgData name="Li, Hanchen F" userId="3aee791e-6a2d-4da7-a77b-fbdf7bf15886" providerId="ADAL" clId="{CDC5B0EF-6BEB-4658-A9FF-CB66F6FA6C1E}" dt="2025-05-22T22:35:52.716" v="2537" actId="571"/>
-          <ac:spMkLst>
-            <pc:docMk/>
-            <pc:sldMk cId="2152317508" sldId="256"/>
-            <ac:spMk id="437" creationId="{41CE7D9F-5BD6-EF98-2389-471E0B885F8C}"/>
-          </ac:spMkLst>
-        </pc:spChg>
-        <pc:spChg chg="mod">
-          <ac:chgData name="Li, Hanchen F" userId="3aee791e-6a2d-4da7-a77b-fbdf7bf15886" providerId="ADAL" clId="{CDC5B0EF-6BEB-4658-A9FF-CB66F6FA6C1E}" dt="2025-05-22T22:35:52.716" v="2537" actId="571"/>
-          <ac:spMkLst>
-            <pc:docMk/>
-            <pc:sldMk cId="2152317508" sldId="256"/>
-            <ac:spMk id="457" creationId="{BB45642B-EE98-2D72-7B3C-B4A160C83D50}"/>
-          </ac:spMkLst>
-        </pc:spChg>
         <pc:spChg chg="add mod ord">
           <ac:chgData name="Li, Hanchen F" userId="3aee791e-6a2d-4da7-a77b-fbdf7bf15886" providerId="ADAL" clId="{CDC5B0EF-6BEB-4658-A9FF-CB66F6FA6C1E}" dt="2025-05-22T22:51:03.082" v="2877" actId="167"/>
           <ac:spMkLst>
@@ -614,14 +334,6 @@
             <ac:spMk id="485" creationId="{CB6B5EB7-A484-0097-8D2C-1168DFA37C1F}"/>
           </ac:spMkLst>
         </pc:spChg>
-        <pc:spChg chg="add del">
-          <ac:chgData name="Li, Hanchen F" userId="3aee791e-6a2d-4da7-a77b-fbdf7bf15886" providerId="ADAL" clId="{CDC5B0EF-6BEB-4658-A9FF-CB66F6FA6C1E}" dt="2025-05-22T22:45:25.050" v="2682" actId="11529"/>
-          <ac:spMkLst>
-            <pc:docMk/>
-            <pc:sldMk cId="2152317508" sldId="256"/>
-            <ac:spMk id="507" creationId="{3ADD458A-8BC0-4DF1-09EF-6F5DCA7F5F57}"/>
-          </ac:spMkLst>
-        </pc:spChg>
         <pc:spChg chg="add mod ord">
           <ac:chgData name="Li, Hanchen F" userId="3aee791e-6a2d-4da7-a77b-fbdf7bf15886" providerId="ADAL" clId="{CDC5B0EF-6BEB-4658-A9FF-CB66F6FA6C1E}" dt="2025-05-22T23:10:21.705" v="3230" actId="14100"/>
           <ac:spMkLst>
@@ -630,30 +342,6 @@
             <ac:spMk id="508" creationId="{9CE91A72-D1F8-5B45-C671-C1B856D4DEA1}"/>
           </ac:spMkLst>
         </pc:spChg>
-        <pc:spChg chg="add del">
-          <ac:chgData name="Li, Hanchen F" userId="3aee791e-6a2d-4da7-a77b-fbdf7bf15886" providerId="ADAL" clId="{CDC5B0EF-6BEB-4658-A9FF-CB66F6FA6C1E}" dt="2025-05-22T22:46:08.893" v="2701" actId="11529"/>
-          <ac:spMkLst>
-            <pc:docMk/>
-            <pc:sldMk cId="2152317508" sldId="256"/>
-            <ac:spMk id="509" creationId="{74C7F0FB-50DA-EEA8-4696-F7C31C7EFA5E}"/>
-          </ac:spMkLst>
-        </pc:spChg>
-        <pc:spChg chg="add del mod ord">
-          <ac:chgData name="Li, Hanchen F" userId="3aee791e-6a2d-4da7-a77b-fbdf7bf15886" providerId="ADAL" clId="{CDC5B0EF-6BEB-4658-A9FF-CB66F6FA6C1E}" dt="2025-05-22T22:50:16.648" v="2842" actId="478"/>
-          <ac:spMkLst>
-            <pc:docMk/>
-            <pc:sldMk cId="2152317508" sldId="256"/>
-            <ac:spMk id="510" creationId="{4C6A66CD-D7D5-0196-D48B-2703939D23AE}"/>
-          </ac:spMkLst>
-        </pc:spChg>
-        <pc:spChg chg="add mod">
-          <ac:chgData name="Li, Hanchen F" userId="3aee791e-6a2d-4da7-a77b-fbdf7bf15886" providerId="ADAL" clId="{CDC5B0EF-6BEB-4658-A9FF-CB66F6FA6C1E}" dt="2025-05-22T22:48:17.614" v="2752" actId="1076"/>
-          <ac:spMkLst>
-            <pc:docMk/>
-            <pc:sldMk cId="2152317508" sldId="256"/>
-            <ac:spMk id="511" creationId="{3667B02B-11CA-3645-1CC4-5E824B6B2BE8}"/>
-          </ac:spMkLst>
-        </pc:spChg>
         <pc:spChg chg="add mod ord">
           <ac:chgData name="Li, Hanchen F" userId="3aee791e-6a2d-4da7-a77b-fbdf7bf15886" providerId="ADAL" clId="{CDC5B0EF-6BEB-4658-A9FF-CB66F6FA6C1E}" dt="2025-05-22T23:10:21.705" v="3230" actId="14100"/>
           <ac:spMkLst>
@@ -670,46 +358,6 @@
             <ac:spMk id="513" creationId="{E21DA164-BD22-4F58-0276-49EA3B2D301D}"/>
           </ac:spMkLst>
         </pc:spChg>
-        <pc:spChg chg="add del mod">
-          <ac:chgData name="Li, Hanchen F" userId="3aee791e-6a2d-4da7-a77b-fbdf7bf15886" providerId="ADAL" clId="{CDC5B0EF-6BEB-4658-A9FF-CB66F6FA6C1E}" dt="2025-05-22T22:52:58.488" v="2919" actId="21"/>
-          <ac:spMkLst>
-            <pc:docMk/>
-            <pc:sldMk cId="2152317508" sldId="256"/>
-            <ac:spMk id="514" creationId="{5E62E6BA-4930-3D82-2DBC-A1FE2C4FA973}"/>
-          </ac:spMkLst>
-        </pc:spChg>
-        <pc:spChg chg="add del mod">
-          <ac:chgData name="Li, Hanchen F" userId="3aee791e-6a2d-4da7-a77b-fbdf7bf15886" providerId="ADAL" clId="{CDC5B0EF-6BEB-4658-A9FF-CB66F6FA6C1E}" dt="2025-05-22T22:52:58.488" v="2919" actId="21"/>
-          <ac:spMkLst>
-            <pc:docMk/>
-            <pc:sldMk cId="2152317508" sldId="256"/>
-            <ac:spMk id="515" creationId="{18A35F65-8A14-55E9-0AA8-2FC4F5745A5E}"/>
-          </ac:spMkLst>
-        </pc:spChg>
-        <pc:spChg chg="add del mod">
-          <ac:chgData name="Li, Hanchen F" userId="3aee791e-6a2d-4da7-a77b-fbdf7bf15886" providerId="ADAL" clId="{CDC5B0EF-6BEB-4658-A9FF-CB66F6FA6C1E}" dt="2025-05-22T22:52:58.488" v="2919" actId="21"/>
-          <ac:spMkLst>
-            <pc:docMk/>
-            <pc:sldMk cId="2152317508" sldId="256"/>
-            <ac:spMk id="516" creationId="{A89C7A44-EAFA-C4E8-7106-03FF109EF35D}"/>
-          </ac:spMkLst>
-        </pc:spChg>
-        <pc:spChg chg="add del mod">
-          <ac:chgData name="Li, Hanchen F" userId="3aee791e-6a2d-4da7-a77b-fbdf7bf15886" providerId="ADAL" clId="{CDC5B0EF-6BEB-4658-A9FF-CB66F6FA6C1E}" dt="2025-05-22T22:52:58.488" v="2919" actId="21"/>
-          <ac:spMkLst>
-            <pc:docMk/>
-            <pc:sldMk cId="2152317508" sldId="256"/>
-            <ac:spMk id="517" creationId="{EF685783-BB50-ABFA-F9E8-0F9ADB11FCD0}"/>
-          </ac:spMkLst>
-        </pc:spChg>
-        <pc:spChg chg="add del">
-          <ac:chgData name="Li, Hanchen F" userId="3aee791e-6a2d-4da7-a77b-fbdf7bf15886" providerId="ADAL" clId="{CDC5B0EF-6BEB-4658-A9FF-CB66F6FA6C1E}" dt="2025-05-22T22:50:50.145" v="2850" actId="478"/>
-          <ac:spMkLst>
-            <pc:docMk/>
-            <pc:sldMk cId="2152317508" sldId="256"/>
-            <ac:spMk id="520" creationId="{FA95078F-49E7-BD38-814B-032ACAF1B1C9}"/>
-          </ac:spMkLst>
-        </pc:spChg>
         <pc:spChg chg="add mod ord">
           <ac:chgData name="Li, Hanchen F" userId="3aee791e-6a2d-4da7-a77b-fbdf7bf15886" providerId="ADAL" clId="{CDC5B0EF-6BEB-4658-A9FF-CB66F6FA6C1E}" dt="2025-05-22T23:10:21.705" v="3230" actId="14100"/>
           <ac:spMkLst>
@@ -742,70 +390,6 @@
             <ac:spMk id="525" creationId="{037A5E4A-FF28-EE89-0F73-8338BF9CDAC6}"/>
           </ac:spMkLst>
         </pc:spChg>
-        <pc:spChg chg="add del mod">
-          <ac:chgData name="Li, Hanchen F" userId="3aee791e-6a2d-4da7-a77b-fbdf7bf15886" providerId="ADAL" clId="{CDC5B0EF-6BEB-4658-A9FF-CB66F6FA6C1E}" dt="2025-05-22T23:08:32.562" v="3210" actId="478"/>
-          <ac:spMkLst>
-            <pc:docMk/>
-            <pc:sldMk cId="2152317508" sldId="256"/>
-            <ac:spMk id="526" creationId="{5E62E6BA-4930-3D82-2DBC-A1FE2C4FA973}"/>
-          </ac:spMkLst>
-        </pc:spChg>
-        <pc:spChg chg="add del mod">
-          <ac:chgData name="Li, Hanchen F" userId="3aee791e-6a2d-4da7-a77b-fbdf7bf15886" providerId="ADAL" clId="{CDC5B0EF-6BEB-4658-A9FF-CB66F6FA6C1E}" dt="2025-05-22T23:08:31.984" v="3209" actId="478"/>
-          <ac:spMkLst>
-            <pc:docMk/>
-            <pc:sldMk cId="2152317508" sldId="256"/>
-            <ac:spMk id="527" creationId="{18A35F65-8A14-55E9-0AA8-2FC4F5745A5E}"/>
-          </ac:spMkLst>
-        </pc:spChg>
-        <pc:spChg chg="add del mod">
-          <ac:chgData name="Li, Hanchen F" userId="3aee791e-6a2d-4da7-a77b-fbdf7bf15886" providerId="ADAL" clId="{CDC5B0EF-6BEB-4658-A9FF-CB66F6FA6C1E}" dt="2025-05-22T23:08:31.617" v="3208" actId="478"/>
-          <ac:spMkLst>
-            <pc:docMk/>
-            <pc:sldMk cId="2152317508" sldId="256"/>
-            <ac:spMk id="528" creationId="{A89C7A44-EAFA-C4E8-7106-03FF109EF35D}"/>
-          </ac:spMkLst>
-        </pc:spChg>
-        <pc:spChg chg="add del mod">
-          <ac:chgData name="Li, Hanchen F" userId="3aee791e-6a2d-4da7-a77b-fbdf7bf15886" providerId="ADAL" clId="{CDC5B0EF-6BEB-4658-A9FF-CB66F6FA6C1E}" dt="2025-05-22T23:08:32.925" v="3211" actId="478"/>
-          <ac:spMkLst>
-            <pc:docMk/>
-            <pc:sldMk cId="2152317508" sldId="256"/>
-            <ac:spMk id="529" creationId="{EF685783-BB50-ABFA-F9E8-0F9ADB11FCD0}"/>
-          </ac:spMkLst>
-        </pc:spChg>
-        <pc:spChg chg="add del mod">
-          <ac:chgData name="Li, Hanchen F" userId="3aee791e-6a2d-4da7-a77b-fbdf7bf15886" providerId="ADAL" clId="{CDC5B0EF-6BEB-4658-A9FF-CB66F6FA6C1E}" dt="2025-05-22T22:53:11.704" v="2924" actId="478"/>
-          <ac:spMkLst>
-            <pc:docMk/>
-            <pc:sldMk cId="2152317508" sldId="256"/>
-            <ac:spMk id="530" creationId="{14E27340-A51B-AB5F-A43B-FEC7FD1EE39B}"/>
-          </ac:spMkLst>
-        </pc:spChg>
-        <pc:spChg chg="add del mod">
-          <ac:chgData name="Li, Hanchen F" userId="3aee791e-6a2d-4da7-a77b-fbdf7bf15886" providerId="ADAL" clId="{CDC5B0EF-6BEB-4658-A9FF-CB66F6FA6C1E}" dt="2025-05-22T22:53:11.704" v="2924" actId="478"/>
-          <ac:spMkLst>
-            <pc:docMk/>
-            <pc:sldMk cId="2152317508" sldId="256"/>
-            <ac:spMk id="531" creationId="{6BB19850-9A69-0378-D665-500FF9D2338A}"/>
-          </ac:spMkLst>
-        </pc:spChg>
-        <pc:spChg chg="add del mod">
-          <ac:chgData name="Li, Hanchen F" userId="3aee791e-6a2d-4da7-a77b-fbdf7bf15886" providerId="ADAL" clId="{CDC5B0EF-6BEB-4658-A9FF-CB66F6FA6C1E}" dt="2025-05-22T22:53:11.704" v="2924" actId="478"/>
-          <ac:spMkLst>
-            <pc:docMk/>
-            <pc:sldMk cId="2152317508" sldId="256"/>
-            <ac:spMk id="532" creationId="{8E015C2E-A406-B24E-73C4-92FD59E92B7C}"/>
-          </ac:spMkLst>
-        </pc:spChg>
-        <pc:spChg chg="add del mod">
-          <ac:chgData name="Li, Hanchen F" userId="3aee791e-6a2d-4da7-a77b-fbdf7bf15886" providerId="ADAL" clId="{CDC5B0EF-6BEB-4658-A9FF-CB66F6FA6C1E}" dt="2025-05-22T22:53:11.704" v="2924" actId="478"/>
-          <ac:spMkLst>
-            <pc:docMk/>
-            <pc:sldMk cId="2152317508" sldId="256"/>
-            <ac:spMk id="533" creationId="{2F21DF37-EE36-AB7C-4B9B-65E2823FA579}"/>
-          </ac:spMkLst>
-        </pc:spChg>
         <pc:spChg chg="add mod ord">
           <ac:chgData name="Li, Hanchen F" userId="3aee791e-6a2d-4da7-a77b-fbdf7bf15886" providerId="ADAL" clId="{CDC5B0EF-6BEB-4658-A9FF-CB66F6FA6C1E}" dt="2025-05-22T22:54:56.952" v="2961" actId="167"/>
           <ac:spMkLst>
@@ -822,14 +406,6 @@
             <ac:spMk id="543" creationId="{3D8C1A75-64EC-F6AB-A0D3-5769B06D19DB}"/>
           </ac:spMkLst>
         </pc:spChg>
-        <pc:spChg chg="add del mod">
-          <ac:chgData name="Li, Hanchen F" userId="3aee791e-6a2d-4da7-a77b-fbdf7bf15886" providerId="ADAL" clId="{CDC5B0EF-6BEB-4658-A9FF-CB66F6FA6C1E}" dt="2025-05-22T22:55:45.563" v="2963" actId="478"/>
-          <ac:spMkLst>
-            <pc:docMk/>
-            <pc:sldMk cId="2152317508" sldId="256"/>
-            <ac:spMk id="544" creationId="{53AA62CE-CBE6-0141-C81B-0C2372E6F719}"/>
-          </ac:spMkLst>
-        </pc:spChg>
         <pc:spChg chg="add mod ord">
           <ac:chgData name="Li, Hanchen F" userId="3aee791e-6a2d-4da7-a77b-fbdf7bf15886" providerId="ADAL" clId="{CDC5B0EF-6BEB-4658-A9FF-CB66F6FA6C1E}" dt="2025-05-22T22:54:56.952" v="2961" actId="167"/>
           <ac:spMkLst>
@@ -870,38 +446,6 @@
             <ac:spMk id="549" creationId="{8A1A5189-9C06-1388-F8C0-C6829E258E1D}"/>
           </ac:spMkLst>
         </pc:spChg>
-        <pc:spChg chg="mod">
-          <ac:chgData name="Li, Hanchen F" userId="3aee791e-6a2d-4da7-a77b-fbdf7bf15886" providerId="ADAL" clId="{CDC5B0EF-6BEB-4658-A9FF-CB66F6FA6C1E}" dt="2025-05-22T22:56:36.295" v="2986"/>
-          <ac:spMkLst>
-            <pc:docMk/>
-            <pc:sldMk cId="2152317508" sldId="256"/>
-            <ac:spMk id="552" creationId="{D0564ACF-5985-7B21-A1EF-97FE138B230A}"/>
-          </ac:spMkLst>
-        </pc:spChg>
-        <pc:spChg chg="mod">
-          <ac:chgData name="Li, Hanchen F" userId="3aee791e-6a2d-4da7-a77b-fbdf7bf15886" providerId="ADAL" clId="{CDC5B0EF-6BEB-4658-A9FF-CB66F6FA6C1E}" dt="2025-05-22T22:56:36.295" v="2986"/>
-          <ac:spMkLst>
-            <pc:docMk/>
-            <pc:sldMk cId="2152317508" sldId="256"/>
-            <ac:spMk id="553" creationId="{835809D5-53CF-0F86-EFA1-85F9EC7F8A7F}"/>
-          </ac:spMkLst>
-        </pc:spChg>
-        <pc:spChg chg="mod">
-          <ac:chgData name="Li, Hanchen F" userId="3aee791e-6a2d-4da7-a77b-fbdf7bf15886" providerId="ADAL" clId="{CDC5B0EF-6BEB-4658-A9FF-CB66F6FA6C1E}" dt="2025-05-22T22:56:36.295" v="2986"/>
-          <ac:spMkLst>
-            <pc:docMk/>
-            <pc:sldMk cId="2152317508" sldId="256"/>
-            <ac:spMk id="554" creationId="{442B29EC-CA94-FBDB-7FAF-19D5ACEF5FA0}"/>
-          </ac:spMkLst>
-        </pc:spChg>
-        <pc:spChg chg="mod">
-          <ac:chgData name="Li, Hanchen F" userId="3aee791e-6a2d-4da7-a77b-fbdf7bf15886" providerId="ADAL" clId="{CDC5B0EF-6BEB-4658-A9FF-CB66F6FA6C1E}" dt="2025-05-22T22:56:36.295" v="2986"/>
-          <ac:spMkLst>
-            <pc:docMk/>
-            <pc:sldMk cId="2152317508" sldId="256"/>
-            <ac:spMk id="555" creationId="{586A0FC3-3929-9B05-1440-56BC29481F46}"/>
-          </ac:spMkLst>
-        </pc:spChg>
         <pc:spChg chg="add del mod ord topLvl">
           <ac:chgData name="Li, Hanchen F" userId="3aee791e-6a2d-4da7-a77b-fbdf7bf15886" providerId="ADAL" clId="{CDC5B0EF-6BEB-4658-A9FF-CB66F6FA6C1E}" dt="2025-05-22T23:23:17.117" v="3357" actId="478"/>
           <ac:spMkLst>
@@ -966,38 +510,6 @@
             <ac:spMk id="567" creationId="{869053EF-1F6D-A07D-4594-B54AB4C7D495}"/>
           </ac:spMkLst>
         </pc:spChg>
-        <pc:spChg chg="mod ord topLvl">
-          <ac:chgData name="Li, Hanchen F" userId="3aee791e-6a2d-4da7-a77b-fbdf7bf15886" providerId="ADAL" clId="{CDC5B0EF-6BEB-4658-A9FF-CB66F6FA6C1E}" dt="2025-05-22T23:00:49.041" v="3075" actId="165"/>
-          <ac:spMkLst>
-            <pc:docMk/>
-            <pc:sldMk cId="2152317508" sldId="256"/>
-            <ac:spMk id="569" creationId="{DCCEA38E-1460-3AC7-6B9F-8BC5992745CC}"/>
-          </ac:spMkLst>
-        </pc:spChg>
-        <pc:spChg chg="mod ord topLvl">
-          <ac:chgData name="Li, Hanchen F" userId="3aee791e-6a2d-4da7-a77b-fbdf7bf15886" providerId="ADAL" clId="{CDC5B0EF-6BEB-4658-A9FF-CB66F6FA6C1E}" dt="2025-05-22T23:00:49.041" v="3075" actId="165"/>
-          <ac:spMkLst>
-            <pc:docMk/>
-            <pc:sldMk cId="2152317508" sldId="256"/>
-            <ac:spMk id="570" creationId="{641A682E-3E04-F4D9-BD9B-8FBF24E517F9}"/>
-          </ac:spMkLst>
-        </pc:spChg>
-        <pc:spChg chg="mod ord topLvl">
-          <ac:chgData name="Li, Hanchen F" userId="3aee791e-6a2d-4da7-a77b-fbdf7bf15886" providerId="ADAL" clId="{CDC5B0EF-6BEB-4658-A9FF-CB66F6FA6C1E}" dt="2025-05-22T23:00:49.041" v="3075" actId="165"/>
-          <ac:spMkLst>
-            <pc:docMk/>
-            <pc:sldMk cId="2152317508" sldId="256"/>
-            <ac:spMk id="571" creationId="{3A8C9D4D-97AF-B02C-1348-03B3732F8CA1}"/>
-          </ac:spMkLst>
-        </pc:spChg>
-        <pc:spChg chg="mod ord topLvl">
-          <ac:chgData name="Li, Hanchen F" userId="3aee791e-6a2d-4da7-a77b-fbdf7bf15886" providerId="ADAL" clId="{CDC5B0EF-6BEB-4658-A9FF-CB66F6FA6C1E}" dt="2025-05-22T23:00:49.041" v="3075" actId="165"/>
-          <ac:spMkLst>
-            <pc:docMk/>
-            <pc:sldMk cId="2152317508" sldId="256"/>
-            <ac:spMk id="572" creationId="{539F9509-72A7-B4B4-838F-F91E40E2ECED}"/>
-          </ac:spMkLst>
-        </pc:spChg>
         <pc:spChg chg="add mod ord">
           <ac:chgData name="Li, Hanchen F" userId="3aee791e-6a2d-4da7-a77b-fbdf7bf15886" providerId="ADAL" clId="{CDC5B0EF-6BEB-4658-A9FF-CB66F6FA6C1E}" dt="2025-05-22T23:10:21.705" v="3230" actId="14100"/>
           <ac:spMkLst>
@@ -1191,7 +703,7 @@
           </ac:spMkLst>
         </pc:spChg>
         <pc:spChg chg="add mod">
-          <ac:chgData name="Li, Hanchen F" userId="3aee791e-6a2d-4da7-a77b-fbdf7bf15886" providerId="ADAL" clId="{CDC5B0EF-6BEB-4658-A9FF-CB66F6FA6C1E}" dt="2025-05-23T16:54:39.979" v="7719" actId="1076"/>
+          <ac:chgData name="Li, Hanchen F" userId="3aee791e-6a2d-4da7-a77b-fbdf7bf15886" providerId="ADAL" clId="{CDC5B0EF-6BEB-4658-A9FF-CB66F6FA6C1E}" dt="2025-05-23T23:40:04.556" v="8220" actId="1076"/>
           <ac:spMkLst>
             <pc:docMk/>
             <pc:sldMk cId="2152317508" sldId="256"/>
@@ -1199,11 +711,11 @@
           </ac:spMkLst>
         </pc:spChg>
         <pc:spChg chg="add mod">
-          <ac:chgData name="Li, Hanchen F" userId="3aee791e-6a2d-4da7-a77b-fbdf7bf15886" providerId="ADAL" clId="{CDC5B0EF-6BEB-4658-A9FF-CB66F6FA6C1E}" dt="2025-05-22T23:20:39.951" v="3285" actId="1076"/>
+          <ac:chgData name="Li, Hanchen F" userId="3aee791e-6a2d-4da7-a77b-fbdf7bf15886" providerId="ADAL" clId="{CDC5B0EF-6BEB-4658-A9FF-CB66F6FA6C1E}" dt="2025-05-23T23:40:01.476" v="8219" actId="1076"/>
           <ac:spMkLst>
             <pc:docMk/>
             <pc:sldMk cId="2152317508" sldId="256"/>
-            <ac:spMk id="618" creationId="{AD6349BE-D1BE-C86E-46DB-009472548024}"/>
+            <ac:spMk id="619" creationId="{79E206C2-73FC-BC8D-0BF4-6E0E80BC3ECC}"/>
           </ac:spMkLst>
         </pc:spChg>
         <pc:spChg chg="add mod">
@@ -1211,27 +723,11 @@
           <ac:spMkLst>
             <pc:docMk/>
             <pc:sldMk cId="2152317508" sldId="256"/>
-            <ac:spMk id="619" creationId="{79E206C2-73FC-BC8D-0BF4-6E0E80BC3ECC}"/>
-          </ac:spMkLst>
-        </pc:spChg>
-        <pc:spChg chg="add del mod">
-          <ac:chgData name="Li, Hanchen F" userId="3aee791e-6a2d-4da7-a77b-fbdf7bf15886" providerId="ADAL" clId="{CDC5B0EF-6BEB-4658-A9FF-CB66F6FA6C1E}" dt="2025-05-22T23:21:39.343" v="3317" actId="478"/>
-          <ac:spMkLst>
-            <pc:docMk/>
-            <pc:sldMk cId="2152317508" sldId="256"/>
-            <ac:spMk id="620" creationId="{8520F19A-8877-F896-9205-0A28EDDE5F1D}"/>
+            <ac:spMk id="621" creationId="{1F4717BC-6CD4-9D6B-3F0B-F37256C12850}"/>
           </ac:spMkLst>
         </pc:spChg>
         <pc:spChg chg="add mod">
-          <ac:chgData name="Li, Hanchen F" userId="3aee791e-6a2d-4da7-a77b-fbdf7bf15886" providerId="ADAL" clId="{CDC5B0EF-6BEB-4658-A9FF-CB66F6FA6C1E}" dt="2025-05-23T16:54:39.979" v="7719" actId="1076"/>
-          <ac:spMkLst>
-            <pc:docMk/>
-            <pc:sldMk cId="2152317508" sldId="256"/>
-            <ac:spMk id="621" creationId="{1F4717BC-6CD4-9D6B-3F0B-F37256C12850}"/>
-          </ac:spMkLst>
-        </pc:spChg>
-        <pc:spChg chg="add mod">
-          <ac:chgData name="Li, Hanchen F" userId="3aee791e-6a2d-4da7-a77b-fbdf7bf15886" providerId="ADAL" clId="{CDC5B0EF-6BEB-4658-A9FF-CB66F6FA6C1E}" dt="2025-05-23T16:54:39.979" v="7719" actId="1076"/>
+          <ac:chgData name="Li, Hanchen F" userId="3aee791e-6a2d-4da7-a77b-fbdf7bf15886" providerId="ADAL" clId="{CDC5B0EF-6BEB-4658-A9FF-CB66F6FA6C1E}" dt="2025-05-23T23:39:57.228" v="8217" actId="1076"/>
           <ac:spMkLst>
             <pc:docMk/>
             <pc:sldMk cId="2152317508" sldId="256"/>
@@ -1239,23 +735,15 @@
           </ac:spMkLst>
         </pc:spChg>
         <pc:spChg chg="add mod">
-          <ac:chgData name="Li, Hanchen F" userId="3aee791e-6a2d-4da7-a77b-fbdf7bf15886" providerId="ADAL" clId="{CDC5B0EF-6BEB-4658-A9FF-CB66F6FA6C1E}" dt="2025-05-23T16:54:39.979" v="7719" actId="1076"/>
+          <ac:chgData name="Li, Hanchen F" userId="3aee791e-6a2d-4da7-a77b-fbdf7bf15886" providerId="ADAL" clId="{CDC5B0EF-6BEB-4658-A9FF-CB66F6FA6C1E}" dt="2025-05-23T23:39:59.387" v="8218" actId="1076"/>
           <ac:spMkLst>
             <pc:docMk/>
             <pc:sldMk cId="2152317508" sldId="256"/>
             <ac:spMk id="623" creationId="{BE97E01D-3E36-43CA-F999-3F23131BBA17}"/>
           </ac:spMkLst>
         </pc:spChg>
-        <pc:spChg chg="add del mod">
-          <ac:chgData name="Li, Hanchen F" userId="3aee791e-6a2d-4da7-a77b-fbdf7bf15886" providerId="ADAL" clId="{CDC5B0EF-6BEB-4658-A9FF-CB66F6FA6C1E}" dt="2025-05-22T23:23:27.646" v="3363" actId="478"/>
-          <ac:spMkLst>
-            <pc:docMk/>
-            <pc:sldMk cId="2152317508" sldId="256"/>
-            <ac:spMk id="624" creationId="{AE04DA84-3D05-723F-00E2-94C41788C5EE}"/>
-          </ac:spMkLst>
-        </pc:spChg>
         <pc:spChg chg="add mod">
-          <ac:chgData name="Li, Hanchen F" userId="3aee791e-6a2d-4da7-a77b-fbdf7bf15886" providerId="ADAL" clId="{CDC5B0EF-6BEB-4658-A9FF-CB66F6FA6C1E}" dt="2025-05-23T16:54:39.979" v="7719" actId="1076"/>
+          <ac:chgData name="Li, Hanchen F" userId="3aee791e-6a2d-4da7-a77b-fbdf7bf15886" providerId="ADAL" clId="{CDC5B0EF-6BEB-4658-A9FF-CB66F6FA6C1E}" dt="2025-05-23T23:40:07.182" v="8221" actId="1076"/>
           <ac:spMkLst>
             <pc:docMk/>
             <pc:sldMk cId="2152317508" sldId="256"/>
@@ -1263,7 +751,7 @@
           </ac:spMkLst>
         </pc:spChg>
         <pc:spChg chg="add mod">
-          <ac:chgData name="Li, Hanchen F" userId="3aee791e-6a2d-4da7-a77b-fbdf7bf15886" providerId="ADAL" clId="{CDC5B0EF-6BEB-4658-A9FF-CB66F6FA6C1E}" dt="2025-05-23T16:54:20.998" v="7715" actId="1076"/>
+          <ac:chgData name="Li, Hanchen F" userId="3aee791e-6a2d-4da7-a77b-fbdf7bf15886" providerId="ADAL" clId="{CDC5B0EF-6BEB-4658-A9FF-CB66F6FA6C1E}" dt="2025-05-23T23:39:42.388" v="8210" actId="1076"/>
           <ac:spMkLst>
             <pc:docMk/>
             <pc:sldMk cId="2152317508" sldId="256"/>
@@ -1287,7 +775,7 @@
           </ac:spMkLst>
         </pc:spChg>
         <pc:spChg chg="add mod">
-          <ac:chgData name="Li, Hanchen F" userId="3aee791e-6a2d-4da7-a77b-fbdf7bf15886" providerId="ADAL" clId="{CDC5B0EF-6BEB-4658-A9FF-CB66F6FA6C1E}" dt="2025-05-23T16:54:20.998" v="7715" actId="1076"/>
+          <ac:chgData name="Li, Hanchen F" userId="3aee791e-6a2d-4da7-a77b-fbdf7bf15886" providerId="ADAL" clId="{CDC5B0EF-6BEB-4658-A9FF-CB66F6FA6C1E}" dt="2025-05-23T23:39:37.445" v="8208" actId="1076"/>
           <ac:spMkLst>
             <pc:docMk/>
             <pc:sldMk cId="2152317508" sldId="256"/>
@@ -1295,7 +783,7 @@
           </ac:spMkLst>
         </pc:spChg>
         <pc:spChg chg="add mod">
-          <ac:chgData name="Li, Hanchen F" userId="3aee791e-6a2d-4da7-a77b-fbdf7bf15886" providerId="ADAL" clId="{CDC5B0EF-6BEB-4658-A9FF-CB66F6FA6C1E}" dt="2025-05-23T16:54:20.998" v="7715" actId="1076"/>
+          <ac:chgData name="Li, Hanchen F" userId="3aee791e-6a2d-4da7-a77b-fbdf7bf15886" providerId="ADAL" clId="{CDC5B0EF-6BEB-4658-A9FF-CB66F6FA6C1E}" dt="2025-05-23T23:39:40.676" v="8209" actId="1076"/>
           <ac:spMkLst>
             <pc:docMk/>
             <pc:sldMk cId="2152317508" sldId="256"/>
@@ -1303,7 +791,7 @@
           </ac:spMkLst>
         </pc:spChg>
         <pc:spChg chg="add mod">
-          <ac:chgData name="Li, Hanchen F" userId="3aee791e-6a2d-4da7-a77b-fbdf7bf15886" providerId="ADAL" clId="{CDC5B0EF-6BEB-4658-A9FF-CB66F6FA6C1E}" dt="2025-05-23T16:54:20.998" v="7715" actId="1076"/>
+          <ac:chgData name="Li, Hanchen F" userId="3aee791e-6a2d-4da7-a77b-fbdf7bf15886" providerId="ADAL" clId="{CDC5B0EF-6BEB-4658-A9FF-CB66F6FA6C1E}" dt="2025-05-23T23:39:45.618" v="8211" actId="1076"/>
           <ac:spMkLst>
             <pc:docMk/>
             <pc:sldMk cId="2152317508" sldId="256"/>
@@ -1318,86 +806,6 @@
             <ac:spMk id="632" creationId="{A61D15AF-B466-2D63-5FA5-552ED19C9A6C}"/>
           </ac:spMkLst>
         </pc:spChg>
-        <pc:spChg chg="add del mod ord">
-          <ac:chgData name="Li, Hanchen F" userId="3aee791e-6a2d-4da7-a77b-fbdf7bf15886" providerId="ADAL" clId="{CDC5B0EF-6BEB-4658-A9FF-CB66F6FA6C1E}" dt="2025-05-22T23:28:37.363" v="3454" actId="478"/>
-          <ac:spMkLst>
-            <pc:docMk/>
-            <pc:sldMk cId="2152317508" sldId="256"/>
-            <ac:spMk id="633" creationId="{A5EA9904-2F7A-143D-3851-EE542688C081}"/>
-          </ac:spMkLst>
-        </pc:spChg>
-        <pc:spChg chg="add del mod ord">
-          <ac:chgData name="Li, Hanchen F" userId="3aee791e-6a2d-4da7-a77b-fbdf7bf15886" providerId="ADAL" clId="{CDC5B0EF-6BEB-4658-A9FF-CB66F6FA6C1E}" dt="2025-05-22T23:28:37.363" v="3454" actId="478"/>
-          <ac:spMkLst>
-            <pc:docMk/>
-            <pc:sldMk cId="2152317508" sldId="256"/>
-            <ac:spMk id="634" creationId="{3776F018-984A-D46B-EC3A-1F67CB89E4B4}"/>
-          </ac:spMkLst>
-        </pc:spChg>
-        <pc:spChg chg="add del mod ord">
-          <ac:chgData name="Li, Hanchen F" userId="3aee791e-6a2d-4da7-a77b-fbdf7bf15886" providerId="ADAL" clId="{CDC5B0EF-6BEB-4658-A9FF-CB66F6FA6C1E}" dt="2025-05-22T23:28:37.363" v="3454" actId="478"/>
-          <ac:spMkLst>
-            <pc:docMk/>
-            <pc:sldMk cId="2152317508" sldId="256"/>
-            <ac:spMk id="635" creationId="{07FE687C-46DE-6696-C290-B41856054B9E}"/>
-          </ac:spMkLst>
-        </pc:spChg>
-        <pc:spChg chg="mod">
-          <ac:chgData name="Li, Hanchen F" userId="3aee791e-6a2d-4da7-a77b-fbdf7bf15886" providerId="ADAL" clId="{CDC5B0EF-6BEB-4658-A9FF-CB66F6FA6C1E}" dt="2025-05-22T23:28:40.007" v="3455"/>
-          <ac:spMkLst>
-            <pc:docMk/>
-            <pc:sldMk cId="2152317508" sldId="256"/>
-            <ac:spMk id="639" creationId="{865AE519-2E30-7580-F7FF-AE57BE573C72}"/>
-          </ac:spMkLst>
-        </pc:spChg>
-        <pc:spChg chg="mod">
-          <ac:chgData name="Li, Hanchen F" userId="3aee791e-6a2d-4da7-a77b-fbdf7bf15886" providerId="ADAL" clId="{CDC5B0EF-6BEB-4658-A9FF-CB66F6FA6C1E}" dt="2025-05-22T23:28:40.007" v="3455"/>
-          <ac:spMkLst>
-            <pc:docMk/>
-            <pc:sldMk cId="2152317508" sldId="256"/>
-            <ac:spMk id="640" creationId="{8C734C80-AC5D-1919-948E-DC25393F44EF}"/>
-          </ac:spMkLst>
-        </pc:spChg>
-        <pc:spChg chg="mod">
-          <ac:chgData name="Li, Hanchen F" userId="3aee791e-6a2d-4da7-a77b-fbdf7bf15886" providerId="ADAL" clId="{CDC5B0EF-6BEB-4658-A9FF-CB66F6FA6C1E}" dt="2025-05-22T23:28:40.007" v="3455"/>
-          <ac:spMkLst>
-            <pc:docMk/>
-            <pc:sldMk cId="2152317508" sldId="256"/>
-            <ac:spMk id="641" creationId="{6ABAF754-27C9-904D-7BF0-2CCEA9A8D3DC}"/>
-          </ac:spMkLst>
-        </pc:spChg>
-        <pc:spChg chg="mod">
-          <ac:chgData name="Li, Hanchen F" userId="3aee791e-6a2d-4da7-a77b-fbdf7bf15886" providerId="ADAL" clId="{CDC5B0EF-6BEB-4658-A9FF-CB66F6FA6C1E}" dt="2025-05-22T23:28:40.007" v="3455"/>
-          <ac:spMkLst>
-            <pc:docMk/>
-            <pc:sldMk cId="2152317508" sldId="256"/>
-            <ac:spMk id="642" creationId="{7F343B53-B7FF-524D-4F69-D98C9338273E}"/>
-          </ac:spMkLst>
-        </pc:spChg>
-        <pc:spChg chg="mod">
-          <ac:chgData name="Li, Hanchen F" userId="3aee791e-6a2d-4da7-a77b-fbdf7bf15886" providerId="ADAL" clId="{CDC5B0EF-6BEB-4658-A9FF-CB66F6FA6C1E}" dt="2025-05-22T23:28:40.007" v="3455"/>
-          <ac:spMkLst>
-            <pc:docMk/>
-            <pc:sldMk cId="2152317508" sldId="256"/>
-            <ac:spMk id="647" creationId="{5619DFC7-A8CE-BED4-E6C5-9E44FB0FAEBD}"/>
-          </ac:spMkLst>
-        </pc:spChg>
-        <pc:spChg chg="mod">
-          <ac:chgData name="Li, Hanchen F" userId="3aee791e-6a2d-4da7-a77b-fbdf7bf15886" providerId="ADAL" clId="{CDC5B0EF-6BEB-4658-A9FF-CB66F6FA6C1E}" dt="2025-05-22T23:28:40.007" v="3455"/>
-          <ac:spMkLst>
-            <pc:docMk/>
-            <pc:sldMk cId="2152317508" sldId="256"/>
-            <ac:spMk id="648" creationId="{80F13ABF-AF37-F79A-78E6-42BCE4FBE54F}"/>
-          </ac:spMkLst>
-        </pc:spChg>
-        <pc:spChg chg="mod">
-          <ac:chgData name="Li, Hanchen F" userId="3aee791e-6a2d-4da7-a77b-fbdf7bf15886" providerId="ADAL" clId="{CDC5B0EF-6BEB-4658-A9FF-CB66F6FA6C1E}" dt="2025-05-22T23:28:40.007" v="3455"/>
-          <ac:spMkLst>
-            <pc:docMk/>
-            <pc:sldMk cId="2152317508" sldId="256"/>
-            <ac:spMk id="650" creationId="{9F0CADA7-60CB-8AE7-DEDC-283EDD36603F}"/>
-          </ac:spMkLst>
-        </pc:spChg>
         <pc:spChg chg="add mod">
           <ac:chgData name="Li, Hanchen F" userId="3aee791e-6a2d-4da7-a77b-fbdf7bf15886" providerId="ADAL" clId="{CDC5B0EF-6BEB-4658-A9FF-CB66F6FA6C1E}" dt="2025-05-22T23:34:17.088" v="3611" actId="1037"/>
           <ac:spMkLst>
@@ -1406,14 +814,6 @@
             <ac:spMk id="669" creationId="{A123FB79-41B3-6095-12D2-8997AD6F70A2}"/>
           </ac:spMkLst>
         </pc:spChg>
-        <pc:spChg chg="add del mod">
-          <ac:chgData name="Li, Hanchen F" userId="3aee791e-6a2d-4da7-a77b-fbdf7bf15886" providerId="ADAL" clId="{CDC5B0EF-6BEB-4658-A9FF-CB66F6FA6C1E}" dt="2025-05-22T23:29:18.480" v="3474" actId="478"/>
-          <ac:spMkLst>
-            <pc:docMk/>
-            <pc:sldMk cId="2152317508" sldId="256"/>
-            <ac:spMk id="670" creationId="{D63B6F7A-0D92-BDAC-9F6F-C77D466FCB9D}"/>
-          </ac:spMkLst>
-        </pc:spChg>
         <pc:spChg chg="add mod">
           <ac:chgData name="Li, Hanchen F" userId="3aee791e-6a2d-4da7-a77b-fbdf7bf15886" providerId="ADAL" clId="{CDC5B0EF-6BEB-4658-A9FF-CB66F6FA6C1E}" dt="2025-05-22T23:29:46.579" v="3485" actId="1076"/>
           <ac:spMkLst>
@@ -1463,7 +863,7 @@
           </ac:spMkLst>
         </pc:spChg>
         <pc:spChg chg="add mod">
-          <ac:chgData name="Li, Hanchen F" userId="3aee791e-6a2d-4da7-a77b-fbdf7bf15886" providerId="ADAL" clId="{CDC5B0EF-6BEB-4658-A9FF-CB66F6FA6C1E}" dt="2025-05-22T23:33:14.083" v="3558" actId="1076"/>
+          <ac:chgData name="Li, Hanchen F" userId="3aee791e-6a2d-4da7-a77b-fbdf7bf15886" providerId="ADAL" clId="{CDC5B0EF-6BEB-4658-A9FF-CB66F6FA6C1E}" dt="2025-05-23T23:40:45.630" v="8236" actId="20577"/>
           <ac:spMkLst>
             <pc:docMk/>
             <pc:sldMk cId="2152317508" sldId="256"/>
@@ -1495,14 +895,6 @@
           </ac:spMkLst>
         </pc:spChg>
         <pc:spChg chg="add mod">
-          <ac:chgData name="Li, Hanchen F" userId="3aee791e-6a2d-4da7-a77b-fbdf7bf15886" providerId="ADAL" clId="{CDC5B0EF-6BEB-4658-A9FF-CB66F6FA6C1E}" dt="2025-05-22T23:34:45.395" v="3616"/>
-          <ac:spMkLst>
-            <pc:docMk/>
-            <pc:sldMk cId="2152317508" sldId="256"/>
-            <ac:spMk id="684" creationId="{BBD157F2-14D4-AFDA-6862-22C8F211621A}"/>
-          </ac:spMkLst>
-        </pc:spChg>
-        <pc:spChg chg="add mod">
           <ac:chgData name="Li, Hanchen F" userId="3aee791e-6a2d-4da7-a77b-fbdf7bf15886" providerId="ADAL" clId="{CDC5B0EF-6BEB-4658-A9FF-CB66F6FA6C1E}" dt="2025-05-22T23:35:09.078" v="3625" actId="1076"/>
           <ac:spMkLst>
             <pc:docMk/>
@@ -1551,14 +943,6 @@
           </ac:spMkLst>
         </pc:spChg>
         <pc:spChg chg="add mod">
-          <ac:chgData name="Li, Hanchen F" userId="3aee791e-6a2d-4da7-a77b-fbdf7bf15886" providerId="ADAL" clId="{CDC5B0EF-6BEB-4658-A9FF-CB66F6FA6C1E}" dt="2025-05-22T23:38:32.254" v="3723" actId="1076"/>
-          <ac:spMkLst>
-            <pc:docMk/>
-            <pc:sldMk cId="2152317508" sldId="256"/>
-            <ac:spMk id="692" creationId="{7B3B7283-F52F-5539-6F3D-3356D5B84098}"/>
-          </ac:spMkLst>
-        </pc:spChg>
-        <pc:spChg chg="add mod">
           <ac:chgData name="Li, Hanchen F" userId="3aee791e-6a2d-4da7-a77b-fbdf7bf15886" providerId="ADAL" clId="{CDC5B0EF-6BEB-4658-A9FF-CB66F6FA6C1E}" dt="2025-05-22T23:39:38.538" v="3765" actId="1076"/>
           <ac:spMkLst>
             <pc:docMk/>
@@ -1583,14 +967,6 @@
           </ac:spMkLst>
         </pc:spChg>
         <pc:spChg chg="add mod">
-          <ac:chgData name="Li, Hanchen F" userId="3aee791e-6a2d-4da7-a77b-fbdf7bf15886" providerId="ADAL" clId="{CDC5B0EF-6BEB-4658-A9FF-CB66F6FA6C1E}" dt="2025-05-22T23:40:17.110" v="3785"/>
-          <ac:spMkLst>
-            <pc:docMk/>
-            <pc:sldMk cId="2152317508" sldId="256"/>
-            <ac:spMk id="696" creationId="{18A4729B-C9B6-38E0-2318-1BA03F457525}"/>
-          </ac:spMkLst>
-        </pc:spChg>
-        <pc:spChg chg="add mod">
           <ac:chgData name="Li, Hanchen F" userId="3aee791e-6a2d-4da7-a77b-fbdf7bf15886" providerId="ADAL" clId="{CDC5B0EF-6BEB-4658-A9FF-CB66F6FA6C1E}" dt="2025-05-22T23:46:08.041" v="4608" actId="207"/>
           <ac:spMkLst>
             <pc:docMk/>
@@ -1630,94 +1006,6 @@
             <ac:spMk id="701" creationId="{0E0344B6-55C6-DA8D-C738-0A0E7B1E1CDB}"/>
           </ac:spMkLst>
         </pc:spChg>
-        <pc:spChg chg="mod">
-          <ac:chgData name="Li, Hanchen F" userId="3aee791e-6a2d-4da7-a77b-fbdf7bf15886" providerId="ADAL" clId="{CDC5B0EF-6BEB-4658-A9FF-CB66F6FA6C1E}" dt="2025-05-22T23:41:51.460" v="3804" actId="571"/>
-          <ac:spMkLst>
-            <pc:docMk/>
-            <pc:sldMk cId="2152317508" sldId="256"/>
-            <ac:spMk id="703" creationId="{CB0F317C-49D4-D8E0-97D8-3FBD929C9D87}"/>
-          </ac:spMkLst>
-        </pc:spChg>
-        <pc:spChg chg="mod">
-          <ac:chgData name="Li, Hanchen F" userId="3aee791e-6a2d-4da7-a77b-fbdf7bf15886" providerId="ADAL" clId="{CDC5B0EF-6BEB-4658-A9FF-CB66F6FA6C1E}" dt="2025-05-22T23:41:51.460" v="3804" actId="571"/>
-          <ac:spMkLst>
-            <pc:docMk/>
-            <pc:sldMk cId="2152317508" sldId="256"/>
-            <ac:spMk id="704" creationId="{7165CA5F-BF3F-1749-DB18-A95A617230D6}"/>
-          </ac:spMkLst>
-        </pc:spChg>
-        <pc:spChg chg="mod">
-          <ac:chgData name="Li, Hanchen F" userId="3aee791e-6a2d-4da7-a77b-fbdf7bf15886" providerId="ADAL" clId="{CDC5B0EF-6BEB-4658-A9FF-CB66F6FA6C1E}" dt="2025-05-22T23:41:51.460" v="3804" actId="571"/>
-          <ac:spMkLst>
-            <pc:docMk/>
-            <pc:sldMk cId="2152317508" sldId="256"/>
-            <ac:spMk id="705" creationId="{FE335AD4-DA3C-3121-2181-E45D5D4DFD88}"/>
-          </ac:spMkLst>
-        </pc:spChg>
-        <pc:spChg chg="mod">
-          <ac:chgData name="Li, Hanchen F" userId="3aee791e-6a2d-4da7-a77b-fbdf7bf15886" providerId="ADAL" clId="{CDC5B0EF-6BEB-4658-A9FF-CB66F6FA6C1E}" dt="2025-05-22T23:41:51.460" v="3804" actId="571"/>
-          <ac:spMkLst>
-            <pc:docMk/>
-            <pc:sldMk cId="2152317508" sldId="256"/>
-            <ac:spMk id="706" creationId="{11BF934D-D6AA-C597-7839-6BA3994222B4}"/>
-          </ac:spMkLst>
-        </pc:spChg>
-        <pc:spChg chg="mod">
-          <ac:chgData name="Li, Hanchen F" userId="3aee791e-6a2d-4da7-a77b-fbdf7bf15886" providerId="ADAL" clId="{CDC5B0EF-6BEB-4658-A9FF-CB66F6FA6C1E}" dt="2025-05-22T23:41:51.460" v="3804" actId="571"/>
-          <ac:spMkLst>
-            <pc:docMk/>
-            <pc:sldMk cId="2152317508" sldId="256"/>
-            <ac:spMk id="707" creationId="{47EB62D3-938B-7005-1830-AE573A6BED6B}"/>
-          </ac:spMkLst>
-        </pc:spChg>
-        <pc:spChg chg="mod">
-          <ac:chgData name="Li, Hanchen F" userId="3aee791e-6a2d-4da7-a77b-fbdf7bf15886" providerId="ADAL" clId="{CDC5B0EF-6BEB-4658-A9FF-CB66F6FA6C1E}" dt="2025-05-22T23:41:51.460" v="3804" actId="571"/>
-          <ac:spMkLst>
-            <pc:docMk/>
-            <pc:sldMk cId="2152317508" sldId="256"/>
-            <ac:spMk id="708" creationId="{9D91AA31-946E-4172-60DC-A90E80C9F983}"/>
-          </ac:spMkLst>
-        </pc:spChg>
-        <pc:spChg chg="mod">
-          <ac:chgData name="Li, Hanchen F" userId="3aee791e-6a2d-4da7-a77b-fbdf7bf15886" providerId="ADAL" clId="{CDC5B0EF-6BEB-4658-A9FF-CB66F6FA6C1E}" dt="2025-05-22T23:41:51.460" v="3804" actId="571"/>
-          <ac:spMkLst>
-            <pc:docMk/>
-            <pc:sldMk cId="2152317508" sldId="256"/>
-            <ac:spMk id="710" creationId="{CFD8E652-F3A1-05FF-C4BE-FB7507D560A7}"/>
-          </ac:spMkLst>
-        </pc:spChg>
-        <pc:spChg chg="add del mod">
-          <ac:chgData name="Li, Hanchen F" userId="3aee791e-6a2d-4da7-a77b-fbdf7bf15886" providerId="ADAL" clId="{CDC5B0EF-6BEB-4658-A9FF-CB66F6FA6C1E}" dt="2025-05-22T23:41:51.547" v="3805" actId="21"/>
-          <ac:spMkLst>
-            <pc:docMk/>
-            <pc:sldMk cId="2152317508" sldId="256"/>
-            <ac:spMk id="729" creationId="{71B2C373-AAB7-A6E5-0ECD-456D54D44C37}"/>
-          </ac:spMkLst>
-        </pc:spChg>
-        <pc:spChg chg="add del mod">
-          <ac:chgData name="Li, Hanchen F" userId="3aee791e-6a2d-4da7-a77b-fbdf7bf15886" providerId="ADAL" clId="{CDC5B0EF-6BEB-4658-A9FF-CB66F6FA6C1E}" dt="2025-05-22T23:41:51.547" v="3805" actId="21"/>
-          <ac:spMkLst>
-            <pc:docMk/>
-            <pc:sldMk cId="2152317508" sldId="256"/>
-            <ac:spMk id="730" creationId="{6321BE6F-F697-A68B-6BD8-0DFC63A59984}"/>
-          </ac:spMkLst>
-        </pc:spChg>
-        <pc:spChg chg="del">
-          <ac:chgData name="Li, Hanchen F" userId="3aee791e-6a2d-4da7-a77b-fbdf7bf15886" providerId="ADAL" clId="{CDC5B0EF-6BEB-4658-A9FF-CB66F6FA6C1E}" dt="2025-05-22T23:41:51.547" v="3805" actId="21"/>
-          <ac:spMkLst>
-            <pc:docMk/>
-            <pc:sldMk cId="2152317508" sldId="256"/>
-            <ac:spMk id="731" creationId="{FB7BCB4A-61E7-4A45-DE1B-6F319BD54F1D}"/>
-          </ac:spMkLst>
-        </pc:spChg>
-        <pc:spChg chg="add del mod">
-          <ac:chgData name="Li, Hanchen F" userId="3aee791e-6a2d-4da7-a77b-fbdf7bf15886" providerId="ADAL" clId="{CDC5B0EF-6BEB-4658-A9FF-CB66F6FA6C1E}" dt="2025-05-22T23:41:51.547" v="3805" actId="21"/>
-          <ac:spMkLst>
-            <pc:docMk/>
-            <pc:sldMk cId="2152317508" sldId="256"/>
-            <ac:spMk id="732" creationId="{998BA73F-9C3A-625D-E735-16200BBA8A9E}"/>
-          </ac:spMkLst>
-        </pc:spChg>
         <pc:spChg chg="add mod">
           <ac:chgData name="Li, Hanchen F" userId="3aee791e-6a2d-4da7-a77b-fbdf7bf15886" providerId="ADAL" clId="{CDC5B0EF-6BEB-4658-A9FF-CB66F6FA6C1E}" dt="2025-05-22T23:42:42.066" v="3822" actId="1076"/>
           <ac:spMkLst>
@@ -1735,7 +1023,7 @@
           </ac:spMkLst>
         </pc:spChg>
         <pc:spChg chg="add mod">
-          <ac:chgData name="Li, Hanchen F" userId="3aee791e-6a2d-4da7-a77b-fbdf7bf15886" providerId="ADAL" clId="{CDC5B0EF-6BEB-4658-A9FF-CB66F6FA6C1E}" dt="2025-05-22T23:43:12.152" v="3838" actId="1076"/>
+          <ac:chgData name="Li, Hanchen F" userId="3aee791e-6a2d-4da7-a77b-fbdf7bf15886" providerId="ADAL" clId="{CDC5B0EF-6BEB-4658-A9FF-CB66F6FA6C1E}" dt="2025-05-24T00:53:08.040" v="8728" actId="1076"/>
           <ac:spMkLst>
             <pc:docMk/>
             <pc:sldMk cId="2152317508" sldId="256"/>
@@ -1847,7 +1135,7 @@
           </ac:spMkLst>
         </pc:spChg>
         <pc:spChg chg="add mod">
-          <ac:chgData name="Li, Hanchen F" userId="3aee791e-6a2d-4da7-a77b-fbdf7bf15886" providerId="ADAL" clId="{CDC5B0EF-6BEB-4658-A9FF-CB66F6FA6C1E}" dt="2025-05-22T23:52:11.374" v="5363" actId="1076"/>
+          <ac:chgData name="Li, Hanchen F" userId="3aee791e-6a2d-4da7-a77b-fbdf7bf15886" providerId="ADAL" clId="{CDC5B0EF-6BEB-4658-A9FF-CB66F6FA6C1E}" dt="2025-05-24T00:53:12.071" v="8729" actId="1076"/>
           <ac:spMkLst>
             <pc:docMk/>
             <pc:sldMk cId="2152317508" sldId="256"/>
@@ -1863,7 +1151,7 @@
           </ac:spMkLst>
         </pc:spChg>
         <pc:spChg chg="add mod">
-          <ac:chgData name="Li, Hanchen F" userId="3aee791e-6a2d-4da7-a77b-fbdf7bf15886" providerId="ADAL" clId="{CDC5B0EF-6BEB-4658-A9FF-CB66F6FA6C1E}" dt="2025-05-22T23:52:15.683" v="5365" actId="1076"/>
+          <ac:chgData name="Li, Hanchen F" userId="3aee791e-6a2d-4da7-a77b-fbdf7bf15886" providerId="ADAL" clId="{CDC5B0EF-6BEB-4658-A9FF-CB66F6FA6C1E}" dt="2025-05-23T21:51:39.489" v="8162" actId="1076"/>
           <ac:spMkLst>
             <pc:docMk/>
             <pc:sldMk cId="2152317508" sldId="256"/>
@@ -1894,46 +1182,6 @@
             <ac:spMk id="754" creationId="{654F74DC-C54D-160E-7F76-CC6C6D091C52}"/>
           </ac:spMkLst>
         </pc:spChg>
-        <pc:grpChg chg="add del mod">
-          <ac:chgData name="Li, Hanchen F" userId="3aee791e-6a2d-4da7-a77b-fbdf7bf15886" providerId="ADAL" clId="{CDC5B0EF-6BEB-4658-A9FF-CB66F6FA6C1E}" dt="2025-05-22T22:34:42.509" v="2518" actId="165"/>
-          <ac:grpSpMkLst>
-            <pc:docMk/>
-            <pc:sldMk cId="2152317508" sldId="256"/>
-            <ac:grpSpMk id="355" creationId="{166B3321-36F6-B1B0-74A7-7921A5AFAE10}"/>
-          </ac:grpSpMkLst>
-        </pc:grpChg>
-        <pc:grpChg chg="add mod">
-          <ac:chgData name="Li, Hanchen F" userId="3aee791e-6a2d-4da7-a77b-fbdf7bf15886" providerId="ADAL" clId="{CDC5B0EF-6BEB-4658-A9FF-CB66F6FA6C1E}" dt="2025-05-22T22:32:42.815" v="2492" actId="571"/>
-          <ac:grpSpMkLst>
-            <pc:docMk/>
-            <pc:sldMk cId="2152317508" sldId="256"/>
-            <ac:grpSpMk id="356" creationId="{43093A2E-7AF8-5484-966E-77633E6BB8AB}"/>
-          </ac:grpSpMkLst>
-        </pc:grpChg>
-        <pc:grpChg chg="add mod">
-          <ac:chgData name="Li, Hanchen F" userId="3aee791e-6a2d-4da7-a77b-fbdf7bf15886" providerId="ADAL" clId="{CDC5B0EF-6BEB-4658-A9FF-CB66F6FA6C1E}" dt="2025-05-22T22:33:00.317" v="2499" actId="164"/>
-          <ac:grpSpMkLst>
-            <pc:docMk/>
-            <pc:sldMk cId="2152317508" sldId="256"/>
-            <ac:grpSpMk id="391" creationId="{B9C8AA83-18EE-4369-05C8-CC94C9DACD30}"/>
-          </ac:grpSpMkLst>
-        </pc:grpChg>
-        <pc:grpChg chg="add del mod">
-          <ac:chgData name="Li, Hanchen F" userId="3aee791e-6a2d-4da7-a77b-fbdf7bf15886" providerId="ADAL" clId="{CDC5B0EF-6BEB-4658-A9FF-CB66F6FA6C1E}" dt="2025-05-22T22:34:11.502" v="2513" actId="165"/>
-          <ac:grpSpMkLst>
-            <pc:docMk/>
-            <pc:sldMk cId="2152317508" sldId="256"/>
-            <ac:grpSpMk id="392" creationId="{655F10D5-D8FE-7751-2DB1-76133F4C0E9B}"/>
-          </ac:grpSpMkLst>
-        </pc:grpChg>
-        <pc:grpChg chg="add mod">
-          <ac:chgData name="Li, Hanchen F" userId="3aee791e-6a2d-4da7-a77b-fbdf7bf15886" providerId="ADAL" clId="{CDC5B0EF-6BEB-4658-A9FF-CB66F6FA6C1E}" dt="2025-05-22T22:33:30.908" v="2505" actId="571"/>
-          <ac:grpSpMkLst>
-            <pc:docMk/>
-            <pc:sldMk cId="2152317508" sldId="256"/>
-            <ac:grpSpMk id="393" creationId="{44E90F6F-25EB-C803-A7C9-6DCE04B4BCD9}"/>
-          </ac:grpSpMkLst>
-        </pc:grpChg>
         <pc:grpChg chg="add mod">
           <ac:chgData name="Li, Hanchen F" userId="3aee791e-6a2d-4da7-a77b-fbdf7bf15886" providerId="ADAL" clId="{CDC5B0EF-6BEB-4658-A9FF-CB66F6FA6C1E}" dt="2025-05-22T23:54:34.384" v="5813" actId="1076"/>
           <ac:grpSpMkLst>
@@ -1951,59 +1199,11 @@
           </ac:grpSpMkLst>
         </pc:grpChg>
         <pc:grpChg chg="add mod">
-          <ac:chgData name="Li, Hanchen F" userId="3aee791e-6a2d-4da7-a77b-fbdf7bf15886" providerId="ADAL" clId="{CDC5B0EF-6BEB-4658-A9FF-CB66F6FA6C1E}" dt="2025-05-22T22:34:52.852" v="2520" actId="164"/>
-          <ac:grpSpMkLst>
-            <pc:docMk/>
-            <pc:sldMk cId="2152317508" sldId="256"/>
-            <ac:grpSpMk id="426" creationId="{E7755238-0C32-6E8B-567E-00133BA0B990}"/>
-          </ac:grpSpMkLst>
-        </pc:grpChg>
-        <pc:grpChg chg="add mod ord">
-          <ac:chgData name="Li, Hanchen F" userId="3aee791e-6a2d-4da7-a77b-fbdf7bf15886" providerId="ADAL" clId="{CDC5B0EF-6BEB-4658-A9FF-CB66F6FA6C1E}" dt="2025-05-22T22:35:17.683" v="2530" actId="164"/>
-          <ac:grpSpMkLst>
-            <pc:docMk/>
-            <pc:sldMk cId="2152317508" sldId="256"/>
-            <ac:grpSpMk id="427" creationId="{D6AC52BF-DF42-D89A-F1E3-6C820C4D4B0D}"/>
-          </ac:grpSpMkLst>
-        </pc:grpChg>
-        <pc:grpChg chg="add mod">
           <ac:chgData name="Li, Hanchen F" userId="3aee791e-6a2d-4da7-a77b-fbdf7bf15886" providerId="ADAL" clId="{CDC5B0EF-6BEB-4658-A9FF-CB66F6FA6C1E}" dt="2025-05-22T23:17:33.494" v="3248" actId="14826"/>
           <ac:grpSpMkLst>
             <pc:docMk/>
             <pc:sldMk cId="2152317508" sldId="256"/>
             <ac:grpSpMk id="428" creationId="{F1CC0E8C-32AF-8801-F6A5-56F625B0D8B5}"/>
-          </ac:grpSpMkLst>
-        </pc:grpChg>
-        <pc:grpChg chg="add mod">
-          <ac:chgData name="Li, Hanchen F" userId="3aee791e-6a2d-4da7-a77b-fbdf7bf15886" providerId="ADAL" clId="{CDC5B0EF-6BEB-4658-A9FF-CB66F6FA6C1E}" dt="2025-05-22T22:35:52.716" v="2537" actId="571"/>
-          <ac:grpSpMkLst>
-            <pc:docMk/>
-            <pc:sldMk cId="2152317508" sldId="256"/>
-            <ac:grpSpMk id="429" creationId="{0EDE0F1C-FA80-2D03-8E9C-F22DDD407B2F}"/>
-          </ac:grpSpMkLst>
-        </pc:grpChg>
-        <pc:grpChg chg="add mod">
-          <ac:chgData name="Li, Hanchen F" userId="3aee791e-6a2d-4da7-a77b-fbdf7bf15886" providerId="ADAL" clId="{CDC5B0EF-6BEB-4658-A9FF-CB66F6FA6C1E}" dt="2025-05-22T22:36:48.758" v="2549" actId="164"/>
-          <ac:grpSpMkLst>
-            <pc:docMk/>
-            <pc:sldMk cId="2152317508" sldId="256"/>
-            <ac:grpSpMk id="460" creationId="{354B14CC-D7B8-FDC6-3783-C4F423127C61}"/>
-          </ac:grpSpMkLst>
-        </pc:grpChg>
-        <pc:grpChg chg="add del mod">
-          <ac:chgData name="Li, Hanchen F" userId="3aee791e-6a2d-4da7-a77b-fbdf7bf15886" providerId="ADAL" clId="{CDC5B0EF-6BEB-4658-A9FF-CB66F6FA6C1E}" dt="2025-05-22T22:38:18.031" v="2575" actId="164"/>
-          <ac:grpSpMkLst>
-            <pc:docMk/>
-            <pc:sldMk cId="2152317508" sldId="256"/>
-            <ac:grpSpMk id="465" creationId="{6E65C25A-6CBF-ED57-2712-38D4A5541F0A}"/>
-          </ac:grpSpMkLst>
-        </pc:grpChg>
-        <pc:grpChg chg="add mod">
-          <ac:chgData name="Li, Hanchen F" userId="3aee791e-6a2d-4da7-a77b-fbdf7bf15886" providerId="ADAL" clId="{CDC5B0EF-6BEB-4658-A9FF-CB66F6FA6C1E}" dt="2025-05-22T22:38:52.491" v="2584" actId="164"/>
-          <ac:grpSpMkLst>
-            <pc:docMk/>
-            <pc:sldMk cId="2152317508" sldId="256"/>
-            <ac:grpSpMk id="470" creationId="{87ABD01C-67E9-17BE-2859-422B7E5B0449}"/>
           </ac:grpSpMkLst>
         </pc:grpChg>
         <pc:grpChg chg="add del mod ord">
@@ -2022,62 +1222,6 @@
             <ac:grpSpMk id="481" creationId="{40A442D5-4219-0962-DA42-B84C6DC6D1B2}"/>
           </ac:grpSpMkLst>
         </pc:grpChg>
-        <pc:grpChg chg="add del mod">
-          <ac:chgData name="Li, Hanchen F" userId="3aee791e-6a2d-4da7-a77b-fbdf7bf15886" providerId="ADAL" clId="{CDC5B0EF-6BEB-4658-A9FF-CB66F6FA6C1E}" dt="2025-05-22T22:43:33.800" v="2657" actId="165"/>
-          <ac:grpSpMkLst>
-            <pc:docMk/>
-            <pc:sldMk cId="2152317508" sldId="256"/>
-            <ac:grpSpMk id="491" creationId="{DE0993C8-7E75-19F2-036F-F28D25E2A671}"/>
-          </ac:grpSpMkLst>
-        </pc:grpChg>
-        <pc:grpChg chg="add del mod ord">
-          <ac:chgData name="Li, Hanchen F" userId="3aee791e-6a2d-4da7-a77b-fbdf7bf15886" providerId="ADAL" clId="{CDC5B0EF-6BEB-4658-A9FF-CB66F6FA6C1E}" dt="2025-05-22T23:01:21.347" v="3088" actId="165"/>
-          <ac:grpSpMkLst>
-            <pc:docMk/>
-            <pc:sldMk cId="2152317508" sldId="256"/>
-            <ac:grpSpMk id="550" creationId="{A4522C79-5C54-514B-4D66-FA428EC3A1BC}"/>
-          </ac:grpSpMkLst>
-        </pc:grpChg>
-        <pc:grpChg chg="add del mod">
-          <ac:chgData name="Li, Hanchen F" userId="3aee791e-6a2d-4da7-a77b-fbdf7bf15886" providerId="ADAL" clId="{CDC5B0EF-6BEB-4658-A9FF-CB66F6FA6C1E}" dt="2025-05-22T22:56:42.102" v="2989" actId="478"/>
-          <ac:grpSpMkLst>
-            <pc:docMk/>
-            <pc:sldMk cId="2152317508" sldId="256"/>
-            <ac:grpSpMk id="551" creationId="{D3721C4B-DCCD-8808-5338-AFF6B165F3E1}"/>
-          </ac:grpSpMkLst>
-        </pc:grpChg>
-        <pc:grpChg chg="add del mod">
-          <ac:chgData name="Li, Hanchen F" userId="3aee791e-6a2d-4da7-a77b-fbdf7bf15886" providerId="ADAL" clId="{CDC5B0EF-6BEB-4658-A9FF-CB66F6FA6C1E}" dt="2025-05-22T22:57:06.505" v="2995" actId="165"/>
-          <ac:grpSpMkLst>
-            <pc:docMk/>
-            <pc:sldMk cId="2152317508" sldId="256"/>
-            <ac:grpSpMk id="556" creationId="{470BD3F7-2E0F-A9BF-DA62-5828AF9E78B7}"/>
-          </ac:grpSpMkLst>
-        </pc:grpChg>
-        <pc:grpChg chg="add del mod">
-          <ac:chgData name="Li, Hanchen F" userId="3aee791e-6a2d-4da7-a77b-fbdf7bf15886" providerId="ADAL" clId="{CDC5B0EF-6BEB-4658-A9FF-CB66F6FA6C1E}" dt="2025-05-22T23:00:49.791" v="3078" actId="1076"/>
-          <ac:grpSpMkLst>
-            <pc:docMk/>
-            <pc:sldMk cId="2152317508" sldId="256"/>
-            <ac:grpSpMk id="568" creationId="{33ECFEAF-4FFB-00A7-5F28-6572D3A7578B}"/>
-          </ac:grpSpMkLst>
-        </pc:grpChg>
-        <pc:grpChg chg="add mod ord">
-          <ac:chgData name="Li, Hanchen F" userId="3aee791e-6a2d-4da7-a77b-fbdf7bf15886" providerId="ADAL" clId="{CDC5B0EF-6BEB-4658-A9FF-CB66F6FA6C1E}" dt="2025-05-22T23:00:46.484" v="3071" actId="164"/>
-          <ac:grpSpMkLst>
-            <pc:docMk/>
-            <pc:sldMk cId="2152317508" sldId="256"/>
-            <ac:grpSpMk id="573" creationId="{AE8D1CE3-0A52-3B33-51A8-FD530B962FE8}"/>
-          </ac:grpSpMkLst>
-        </pc:grpChg>
-        <pc:grpChg chg="add del mod">
-          <ac:chgData name="Li, Hanchen F" userId="3aee791e-6a2d-4da7-a77b-fbdf7bf15886" providerId="ADAL" clId="{CDC5B0EF-6BEB-4658-A9FF-CB66F6FA6C1E}" dt="2025-05-22T23:07:51.464" v="3196" actId="165"/>
-          <ac:grpSpMkLst>
-            <pc:docMk/>
-            <pc:sldMk cId="2152317508" sldId="256"/>
-            <ac:grpSpMk id="598" creationId="{01078348-67D2-12A1-802D-942076DFB26A}"/>
-          </ac:grpSpMkLst>
-        </pc:grpChg>
         <pc:grpChg chg="add mod ord">
           <ac:chgData name="Li, Hanchen F" userId="3aee791e-6a2d-4da7-a77b-fbdf7bf15886" providerId="ADAL" clId="{CDC5B0EF-6BEB-4658-A9FF-CB66F6FA6C1E}" dt="2025-05-22T23:08:21.457" v="3207" actId="167"/>
           <ac:grpSpMkLst>
@@ -2086,102 +1230,6 @@
             <ac:grpSpMk id="599" creationId="{100A3D7A-31B6-C1F6-362A-DBAC2613A66A}"/>
           </ac:grpSpMkLst>
         </pc:grpChg>
-        <pc:grpChg chg="add mod">
-          <ac:chgData name="Li, Hanchen F" userId="3aee791e-6a2d-4da7-a77b-fbdf7bf15886" providerId="ADAL" clId="{CDC5B0EF-6BEB-4658-A9FF-CB66F6FA6C1E}" dt="2025-05-22T23:28:40.007" v="3455"/>
-          <ac:grpSpMkLst>
-            <pc:docMk/>
-            <pc:sldMk cId="2152317508" sldId="256"/>
-            <ac:grpSpMk id="636" creationId="{19D87EE8-2A59-AE6E-B689-61C72F8B4736}"/>
-          </ac:grpSpMkLst>
-        </pc:grpChg>
-        <pc:grpChg chg="mod">
-          <ac:chgData name="Li, Hanchen F" userId="3aee791e-6a2d-4da7-a77b-fbdf7bf15886" providerId="ADAL" clId="{CDC5B0EF-6BEB-4658-A9FF-CB66F6FA6C1E}" dt="2025-05-22T23:28:40.007" v="3455"/>
-          <ac:grpSpMkLst>
-            <pc:docMk/>
-            <pc:sldMk cId="2152317508" sldId="256"/>
-            <ac:grpSpMk id="638" creationId="{033BF98B-2E5E-E941-4CB2-1880A07C5D19}"/>
-          </ac:grpSpMkLst>
-        </pc:grpChg>
-        <pc:grpChg chg="del">
-          <ac:chgData name="Li, Hanchen F" userId="3aee791e-6a2d-4da7-a77b-fbdf7bf15886" providerId="ADAL" clId="{CDC5B0EF-6BEB-4658-A9FF-CB66F6FA6C1E}" dt="2025-05-22T23:41:51.547" v="3805" actId="21"/>
-          <ac:grpSpMkLst>
-            <pc:docMk/>
-            <pc:sldMk cId="2152317508" sldId="256"/>
-            <ac:grpSpMk id="702" creationId="{E8D19BFC-8A26-B9BD-C208-D867A570943F}"/>
-          </ac:grpSpMkLst>
-        </pc:grpChg>
-        <pc:picChg chg="add del mod modCrop">
-          <ac:chgData name="Li, Hanchen F" userId="3aee791e-6a2d-4da7-a77b-fbdf7bf15886" providerId="ADAL" clId="{CDC5B0EF-6BEB-4658-A9FF-CB66F6FA6C1E}" dt="2025-05-22T22:00:32.909" v="826" actId="478"/>
-          <ac:picMkLst>
-            <pc:docMk/>
-            <pc:sldMk cId="2152317508" sldId="256"/>
-            <ac:picMk id="5" creationId="{B9BBEB48-71C0-CBB4-7797-E9A6D58DEDB8}"/>
-          </ac:picMkLst>
-        </pc:picChg>
-        <pc:picChg chg="add del mod ord modCrop">
-          <ac:chgData name="Li, Hanchen F" userId="3aee791e-6a2d-4da7-a77b-fbdf7bf15886" providerId="ADAL" clId="{CDC5B0EF-6BEB-4658-A9FF-CB66F6FA6C1E}" dt="2025-05-22T22:00:38.316" v="832" actId="478"/>
-          <ac:picMkLst>
-            <pc:docMk/>
-            <pc:sldMk cId="2152317508" sldId="256"/>
-            <ac:picMk id="7" creationId="{3013834A-AC33-0614-D3B0-B36AF64B8622}"/>
-          </ac:picMkLst>
-        </pc:picChg>
-        <pc:picChg chg="add mod">
-          <ac:chgData name="Li, Hanchen F" userId="3aee791e-6a2d-4da7-a77b-fbdf7bf15886" providerId="ADAL" clId="{CDC5B0EF-6BEB-4658-A9FF-CB66F6FA6C1E}" dt="2025-05-22T21:51:05.782" v="528"/>
-          <ac:picMkLst>
-            <pc:docMk/>
-            <pc:sldMk cId="2152317508" sldId="256"/>
-            <ac:picMk id="101" creationId="{59CBF0C9-B684-58D4-7E6D-B106C9EAD405}"/>
-          </ac:picMkLst>
-        </pc:picChg>
-        <pc:picChg chg="add del mod">
-          <ac:chgData name="Li, Hanchen F" userId="3aee791e-6a2d-4da7-a77b-fbdf7bf15886" providerId="ADAL" clId="{CDC5B0EF-6BEB-4658-A9FF-CB66F6FA6C1E}" dt="2025-05-22T21:57:38.338" v="699" actId="478"/>
-          <ac:picMkLst>
-            <pc:docMk/>
-            <pc:sldMk cId="2152317508" sldId="256"/>
-            <ac:picMk id="132" creationId="{01237896-ACDC-DA4D-584C-4D3E0CEEF3B4}"/>
-          </ac:picMkLst>
-        </pc:picChg>
-        <pc:picChg chg="add mod">
-          <ac:chgData name="Li, Hanchen F" userId="3aee791e-6a2d-4da7-a77b-fbdf7bf15886" providerId="ADAL" clId="{CDC5B0EF-6BEB-4658-A9FF-CB66F6FA6C1E}" dt="2025-05-22T21:59:25.552" v="714"/>
-          <ac:picMkLst>
-            <pc:docMk/>
-            <pc:sldMk cId="2152317508" sldId="256"/>
-            <ac:picMk id="136" creationId="{0443F2E1-8BEB-9150-977A-982E88E46458}"/>
-          </ac:picMkLst>
-        </pc:picChg>
-        <pc:picChg chg="add mod">
-          <ac:chgData name="Li, Hanchen F" userId="3aee791e-6a2d-4da7-a77b-fbdf7bf15886" providerId="ADAL" clId="{CDC5B0EF-6BEB-4658-A9FF-CB66F6FA6C1E}" dt="2025-05-22T21:59:25.552" v="714"/>
-          <ac:picMkLst>
-            <pc:docMk/>
-            <pc:sldMk cId="2152317508" sldId="256"/>
-            <ac:picMk id="138" creationId="{9ED084CC-1CD4-2086-DD57-2149A568E2C9}"/>
-          </ac:picMkLst>
-        </pc:picChg>
-        <pc:picChg chg="add del mod">
-          <ac:chgData name="Li, Hanchen F" userId="3aee791e-6a2d-4da7-a77b-fbdf7bf15886" providerId="ADAL" clId="{CDC5B0EF-6BEB-4658-A9FF-CB66F6FA6C1E}" dt="2025-05-22T22:01:37.625" v="840" actId="478"/>
-          <ac:picMkLst>
-            <pc:docMk/>
-            <pc:sldMk cId="2152317508" sldId="256"/>
-            <ac:picMk id="140" creationId="{23BC560E-FD06-FF4D-620E-FB641F841025}"/>
-          </ac:picMkLst>
-        </pc:picChg>
-        <pc:picChg chg="add del mod ord">
-          <ac:chgData name="Li, Hanchen F" userId="3aee791e-6a2d-4da7-a77b-fbdf7bf15886" providerId="ADAL" clId="{CDC5B0EF-6BEB-4658-A9FF-CB66F6FA6C1E}" dt="2025-05-22T22:01:36.700" v="839" actId="478"/>
-          <ac:picMkLst>
-            <pc:docMk/>
-            <pc:sldMk cId="2152317508" sldId="256"/>
-            <ac:picMk id="142" creationId="{6147E238-AD29-55BD-4C77-6FCA6F532265}"/>
-          </ac:picMkLst>
-        </pc:picChg>
-        <pc:picChg chg="add mod">
-          <ac:chgData name="Li, Hanchen F" userId="3aee791e-6a2d-4da7-a77b-fbdf7bf15886" providerId="ADAL" clId="{CDC5B0EF-6BEB-4658-A9FF-CB66F6FA6C1E}" dt="2025-05-22T22:00:52.291" v="838" actId="571"/>
-          <ac:picMkLst>
-            <pc:docMk/>
-            <pc:sldMk cId="2152317508" sldId="256"/>
-            <ac:picMk id="143" creationId="{064E2DB1-556D-1530-7CA3-44AC59DEFA54}"/>
-          </ac:picMkLst>
-        </pc:picChg>
         <pc:picChg chg="add mod ord topLvl">
           <ac:chgData name="Li, Hanchen F" userId="3aee791e-6a2d-4da7-a77b-fbdf7bf15886" providerId="ADAL" clId="{CDC5B0EF-6BEB-4658-A9FF-CB66F6FA6C1E}" dt="2025-05-22T23:17:33.494" v="3248" actId="14826"/>
           <ac:picMkLst>
@@ -2198,38 +1246,14 @@
             <ac:picMk id="147" creationId="{F7890D1C-36FA-7F8E-9990-C3FA4573F15B}"/>
           </ac:picMkLst>
         </pc:picChg>
-        <pc:picChg chg="mod">
-          <ac:chgData name="Li, Hanchen F" userId="3aee791e-6a2d-4da7-a77b-fbdf7bf15886" providerId="ADAL" clId="{CDC5B0EF-6BEB-4658-A9FF-CB66F6FA6C1E}" dt="2025-05-22T22:32:42.815" v="2492" actId="571"/>
-          <ac:picMkLst>
+        <pc:cxnChg chg="add mod">
+          <ac:chgData name="Li, Hanchen F" userId="3aee791e-6a2d-4da7-a77b-fbdf7bf15886" providerId="ADAL" clId="{CDC5B0EF-6BEB-4658-A9FF-CB66F6FA6C1E}" dt="2025-05-24T00:52:35.099" v="8720" actId="1076"/>
+          <ac:cxnSpMkLst>
             <pc:docMk/>
             <pc:sldMk cId="2152317508" sldId="256"/>
-            <ac:picMk id="361" creationId="{4C8E4AA8-55AF-5E9A-79F6-6641C3385484}"/>
-          </ac:picMkLst>
-        </pc:picChg>
-        <pc:picChg chg="mod">
-          <ac:chgData name="Li, Hanchen F" userId="3aee791e-6a2d-4da7-a77b-fbdf7bf15886" providerId="ADAL" clId="{CDC5B0EF-6BEB-4658-A9FF-CB66F6FA6C1E}" dt="2025-05-22T22:33:30.908" v="2505" actId="571"/>
-          <ac:picMkLst>
-            <pc:docMk/>
-            <pc:sldMk cId="2152317508" sldId="256"/>
-            <ac:picMk id="400" creationId="{8D23E045-EB36-8C18-8A4F-BE4947101A34}"/>
-          </ac:picMkLst>
-        </pc:picChg>
-        <pc:picChg chg="mod">
-          <ac:chgData name="Li, Hanchen F" userId="3aee791e-6a2d-4da7-a77b-fbdf7bf15886" providerId="ADAL" clId="{CDC5B0EF-6BEB-4658-A9FF-CB66F6FA6C1E}" dt="2025-05-22T22:35:52.716" v="2537" actId="571"/>
-          <ac:picMkLst>
-            <pc:docMk/>
-            <pc:sldMk cId="2152317508" sldId="256"/>
-            <ac:picMk id="436" creationId="{2B27DB95-4890-BF01-BD53-C750B540C67D}"/>
-          </ac:picMkLst>
-        </pc:picChg>
-        <pc:picChg chg="mod">
-          <ac:chgData name="Li, Hanchen F" userId="3aee791e-6a2d-4da7-a77b-fbdf7bf15886" providerId="ADAL" clId="{CDC5B0EF-6BEB-4658-A9FF-CB66F6FA6C1E}" dt="2025-05-22T23:28:40.007" v="3455"/>
-          <ac:picMkLst>
-            <pc:docMk/>
-            <pc:sldMk cId="2152317508" sldId="256"/>
-            <ac:picMk id="643" creationId="{BAD032B4-1C63-FF2F-FC55-F345D71AC24B}"/>
-          </ac:picMkLst>
-        </pc:picChg>
+            <ac:cxnSpMk id="6" creationId="{8D35F380-2EF8-27C9-CA2D-198CC4E8D9A5}"/>
+          </ac:cxnSpMkLst>
+        </pc:cxnChg>
         <pc:cxnChg chg="add mod ord">
           <ac:chgData name="Li, Hanchen F" userId="3aee791e-6a2d-4da7-a77b-fbdf7bf15886" providerId="ADAL" clId="{CDC5B0EF-6BEB-4658-A9FF-CB66F6FA6C1E}" dt="2025-05-22T22:35:17.683" v="2530" actId="164"/>
           <ac:cxnSpMkLst>
@@ -2239,43 +1263,11 @@
           </ac:cxnSpMkLst>
         </pc:cxnChg>
         <pc:cxnChg chg="add mod">
-          <ac:chgData name="Li, Hanchen F" userId="3aee791e-6a2d-4da7-a77b-fbdf7bf15886" providerId="ADAL" clId="{CDC5B0EF-6BEB-4658-A9FF-CB66F6FA6C1E}" dt="2025-05-22T21:39:21.649" v="81" actId="1076"/>
-          <ac:cxnSpMkLst>
-            <pc:docMk/>
-            <pc:sldMk cId="2152317508" sldId="256"/>
-            <ac:cxnSpMk id="15" creationId="{0A6F2F36-655E-D471-11AA-0FF073426B68}"/>
-          </ac:cxnSpMkLst>
-        </pc:cxnChg>
-        <pc:cxnChg chg="add del mod">
-          <ac:chgData name="Li, Hanchen F" userId="3aee791e-6a2d-4da7-a77b-fbdf7bf15886" providerId="ADAL" clId="{CDC5B0EF-6BEB-4658-A9FF-CB66F6FA6C1E}" dt="2025-05-22T22:16:24.236" v="1368" actId="478"/>
-          <ac:cxnSpMkLst>
-            <pc:docMk/>
-            <pc:sldMk cId="2152317508" sldId="256"/>
-            <ac:cxnSpMk id="16" creationId="{24F1A102-C5B0-ABA3-06A0-3186E2F25D0E}"/>
-          </ac:cxnSpMkLst>
-        </pc:cxnChg>
-        <pc:cxnChg chg="add mod">
           <ac:chgData name="Li, Hanchen F" userId="3aee791e-6a2d-4da7-a77b-fbdf7bf15886" providerId="ADAL" clId="{CDC5B0EF-6BEB-4658-A9FF-CB66F6FA6C1E}" dt="2025-05-22T22:35:21.362" v="2531" actId="164"/>
           <ac:cxnSpMkLst>
             <pc:docMk/>
             <pc:sldMk cId="2152317508" sldId="256"/>
             <ac:cxnSpMk id="18" creationId="{BFC97AB2-D586-B684-02F7-4904C316E565}"/>
-          </ac:cxnSpMkLst>
-        </pc:cxnChg>
-        <pc:cxnChg chg="add del mod">
-          <ac:chgData name="Li, Hanchen F" userId="3aee791e-6a2d-4da7-a77b-fbdf7bf15886" providerId="ADAL" clId="{CDC5B0EF-6BEB-4658-A9FF-CB66F6FA6C1E}" dt="2025-05-22T22:10:40.866" v="1135" actId="478"/>
-          <ac:cxnSpMkLst>
-            <pc:docMk/>
-            <pc:sldMk cId="2152317508" sldId="256"/>
-            <ac:cxnSpMk id="21" creationId="{FD38C3F5-681E-36CE-35E4-206AE6643E7E}"/>
-          </ac:cxnSpMkLst>
-        </pc:cxnChg>
-        <pc:cxnChg chg="add del mod">
-          <ac:chgData name="Li, Hanchen F" userId="3aee791e-6a2d-4da7-a77b-fbdf7bf15886" providerId="ADAL" clId="{CDC5B0EF-6BEB-4658-A9FF-CB66F6FA6C1E}" dt="2025-05-22T21:42:00.873" v="110" actId="478"/>
-          <ac:cxnSpMkLst>
-            <pc:docMk/>
-            <pc:sldMk cId="2152317508" sldId="256"/>
-            <ac:cxnSpMk id="26" creationId="{5146F454-6FEA-2120-B2D5-5E5F41647186}"/>
           </ac:cxnSpMkLst>
         </pc:cxnChg>
         <pc:cxnChg chg="add mod">
@@ -2295,51 +1287,11 @@
           </ac:cxnSpMkLst>
         </pc:cxnChg>
         <pc:cxnChg chg="add mod">
-          <ac:chgData name="Li, Hanchen F" userId="3aee791e-6a2d-4da7-a77b-fbdf7bf15886" providerId="ADAL" clId="{CDC5B0EF-6BEB-4658-A9FF-CB66F6FA6C1E}" dt="2025-05-22T21:44:03.295" v="141" actId="571"/>
-          <ac:cxnSpMkLst>
-            <pc:docMk/>
-            <pc:sldMk cId="2152317508" sldId="256"/>
-            <ac:cxnSpMk id="41" creationId="{5C92D918-B7B1-80FC-913C-B72DA8A13B39}"/>
-          </ac:cxnSpMkLst>
-        </pc:cxnChg>
-        <pc:cxnChg chg="add mod">
           <ac:chgData name="Li, Hanchen F" userId="3aee791e-6a2d-4da7-a77b-fbdf7bf15886" providerId="ADAL" clId="{CDC5B0EF-6BEB-4658-A9FF-CB66F6FA6C1E}" dt="2025-05-22T22:27:21.828" v="2184" actId="1038"/>
           <ac:cxnSpMkLst>
             <pc:docMk/>
             <pc:sldMk cId="2152317508" sldId="256"/>
             <ac:cxnSpMk id="54" creationId="{C7815A4D-BE3D-0D36-EB69-D2583C6341AF}"/>
-          </ac:cxnSpMkLst>
-        </pc:cxnChg>
-        <pc:cxnChg chg="add del mod">
-          <ac:chgData name="Li, Hanchen F" userId="3aee791e-6a2d-4da7-a77b-fbdf7bf15886" providerId="ADAL" clId="{CDC5B0EF-6BEB-4658-A9FF-CB66F6FA6C1E}" dt="2025-05-22T21:47:23.135" v="331" actId="478"/>
-          <ac:cxnSpMkLst>
-            <pc:docMk/>
-            <pc:sldMk cId="2152317508" sldId="256"/>
-            <ac:cxnSpMk id="64" creationId="{12F59E88-9067-4580-058F-217B67AE9C08}"/>
-          </ac:cxnSpMkLst>
-        </pc:cxnChg>
-        <pc:cxnChg chg="add del mod">
-          <ac:chgData name="Li, Hanchen F" userId="3aee791e-6a2d-4da7-a77b-fbdf7bf15886" providerId="ADAL" clId="{CDC5B0EF-6BEB-4658-A9FF-CB66F6FA6C1E}" dt="2025-05-22T21:47:23.778" v="332" actId="478"/>
-          <ac:cxnSpMkLst>
-            <pc:docMk/>
-            <pc:sldMk cId="2152317508" sldId="256"/>
-            <ac:cxnSpMk id="65" creationId="{930069E3-B375-0548-C14E-F83C0A59512B}"/>
-          </ac:cxnSpMkLst>
-        </pc:cxnChg>
-        <pc:cxnChg chg="add del mod">
-          <ac:chgData name="Li, Hanchen F" userId="3aee791e-6a2d-4da7-a77b-fbdf7bf15886" providerId="ADAL" clId="{CDC5B0EF-6BEB-4658-A9FF-CB66F6FA6C1E}" dt="2025-05-22T21:47:24.629" v="333" actId="478"/>
-          <ac:cxnSpMkLst>
-            <pc:docMk/>
-            <pc:sldMk cId="2152317508" sldId="256"/>
-            <ac:cxnSpMk id="66" creationId="{368883D8-FD9E-CC07-4559-58E5720477DD}"/>
-          </ac:cxnSpMkLst>
-        </pc:cxnChg>
-        <pc:cxnChg chg="add del">
-          <ac:chgData name="Li, Hanchen F" userId="3aee791e-6a2d-4da7-a77b-fbdf7bf15886" providerId="ADAL" clId="{CDC5B0EF-6BEB-4658-A9FF-CB66F6FA6C1E}" dt="2025-05-22T21:46:56.882" v="319" actId="11529"/>
-          <ac:cxnSpMkLst>
-            <pc:docMk/>
-            <pc:sldMk cId="2152317508" sldId="256"/>
-            <ac:cxnSpMk id="68" creationId="{091A50EE-76C4-C2F0-5FB6-034FB37DE714}"/>
           </ac:cxnSpMkLst>
         </pc:cxnChg>
         <pc:cxnChg chg="add mod">
@@ -2358,44 +1310,12 @@
             <ac:cxnSpMk id="80" creationId="{0DF3227B-686C-F0EC-2E2F-EB029E531004}"/>
           </ac:cxnSpMkLst>
         </pc:cxnChg>
-        <pc:cxnChg chg="add del mod">
-          <ac:chgData name="Li, Hanchen F" userId="3aee791e-6a2d-4da7-a77b-fbdf7bf15886" providerId="ADAL" clId="{CDC5B0EF-6BEB-4658-A9FF-CB66F6FA6C1E}" dt="2025-05-22T21:49:17.991" v="365" actId="478"/>
-          <ac:cxnSpMkLst>
-            <pc:docMk/>
-            <pc:sldMk cId="2152317508" sldId="256"/>
-            <ac:cxnSpMk id="82" creationId="{B820E569-7208-420F-8AF8-E99615902D6B}"/>
-          </ac:cxnSpMkLst>
-        </pc:cxnChg>
         <pc:cxnChg chg="add mod">
           <ac:chgData name="Li, Hanchen F" userId="3aee791e-6a2d-4da7-a77b-fbdf7bf15886" providerId="ADAL" clId="{CDC5B0EF-6BEB-4658-A9FF-CB66F6FA6C1E}" dt="2025-05-22T22:08:46.129" v="1101" actId="1076"/>
           <ac:cxnSpMkLst>
             <pc:docMk/>
             <pc:sldMk cId="2152317508" sldId="256"/>
             <ac:cxnSpMk id="84" creationId="{79D2A366-B413-8528-AC73-86E9F16DB2B7}"/>
-          </ac:cxnSpMkLst>
-        </pc:cxnChg>
-        <pc:cxnChg chg="add mod">
-          <ac:chgData name="Li, Hanchen F" userId="3aee791e-6a2d-4da7-a77b-fbdf7bf15886" providerId="ADAL" clId="{CDC5B0EF-6BEB-4658-A9FF-CB66F6FA6C1E}" dt="2025-05-22T21:49:02.287" v="356" actId="1076"/>
-          <ac:cxnSpMkLst>
-            <pc:docMk/>
-            <pc:sldMk cId="2152317508" sldId="256"/>
-            <ac:cxnSpMk id="87" creationId="{EED98FDA-8BAF-3BA0-6B62-462DD27C1889}"/>
-          </ac:cxnSpMkLst>
-        </pc:cxnChg>
-        <pc:cxnChg chg="add mod">
-          <ac:chgData name="Li, Hanchen F" userId="3aee791e-6a2d-4da7-a77b-fbdf7bf15886" providerId="ADAL" clId="{CDC5B0EF-6BEB-4658-A9FF-CB66F6FA6C1E}" dt="2025-05-22T21:49:00.765" v="355"/>
-          <ac:cxnSpMkLst>
-            <pc:docMk/>
-            <pc:sldMk cId="2152317508" sldId="256"/>
-            <ac:cxnSpMk id="88" creationId="{6E98A819-42DB-5C30-D41A-67751644DF79}"/>
-          </ac:cxnSpMkLst>
-        </pc:cxnChg>
-        <pc:cxnChg chg="add mod">
-          <ac:chgData name="Li, Hanchen F" userId="3aee791e-6a2d-4da7-a77b-fbdf7bf15886" providerId="ADAL" clId="{CDC5B0EF-6BEB-4658-A9FF-CB66F6FA6C1E}" dt="2025-05-22T21:49:05.229" v="358"/>
-          <ac:cxnSpMkLst>
-            <pc:docMk/>
-            <pc:sldMk cId="2152317508" sldId="256"/>
-            <ac:cxnSpMk id="89" creationId="{C18C0C20-4328-F0A5-5405-6CF0F10579E2}"/>
           </ac:cxnSpMkLst>
         </pc:cxnChg>
         <pc:cxnChg chg="add mod">
@@ -2422,148 +1342,12 @@
             <ac:cxnSpMk id="96" creationId="{2BBF5184-413D-2598-FCC2-C84A6439D634}"/>
           </ac:cxnSpMkLst>
         </pc:cxnChg>
-        <pc:cxnChg chg="add del mod">
-          <ac:chgData name="Li, Hanchen F" userId="3aee791e-6a2d-4da7-a77b-fbdf7bf15886" providerId="ADAL" clId="{CDC5B0EF-6BEB-4658-A9FF-CB66F6FA6C1E}" dt="2025-05-22T22:16:23.702" v="1367" actId="478"/>
-          <ac:cxnSpMkLst>
-            <pc:docMk/>
-            <pc:sldMk cId="2152317508" sldId="256"/>
-            <ac:cxnSpMk id="98" creationId="{4FC2C294-20EE-7222-4C21-5256EF06ED10}"/>
-          </ac:cxnSpMkLst>
-        </pc:cxnChg>
-        <pc:cxnChg chg="add del mod">
-          <ac:chgData name="Li, Hanchen F" userId="3aee791e-6a2d-4da7-a77b-fbdf7bf15886" providerId="ADAL" clId="{CDC5B0EF-6BEB-4658-A9FF-CB66F6FA6C1E}" dt="2025-05-22T22:16:22.014" v="1365" actId="478"/>
-          <ac:cxnSpMkLst>
-            <pc:docMk/>
-            <pc:sldMk cId="2152317508" sldId="256"/>
-            <ac:cxnSpMk id="99" creationId="{EB985349-41A9-B808-3D8E-66E7146D6BB6}"/>
-          </ac:cxnSpMkLst>
-        </pc:cxnChg>
-        <pc:cxnChg chg="add del mod">
-          <ac:chgData name="Li, Hanchen F" userId="3aee791e-6a2d-4da7-a77b-fbdf7bf15886" providerId="ADAL" clId="{CDC5B0EF-6BEB-4658-A9FF-CB66F6FA6C1E}" dt="2025-05-22T22:16:22.905" v="1366" actId="478"/>
-          <ac:cxnSpMkLst>
-            <pc:docMk/>
-            <pc:sldMk cId="2152317508" sldId="256"/>
-            <ac:cxnSpMk id="100" creationId="{D17DA1D0-AACD-0557-EA47-285FA4DABC8C}"/>
-          </ac:cxnSpMkLst>
-        </pc:cxnChg>
-        <pc:cxnChg chg="add mod">
-          <ac:chgData name="Li, Hanchen F" userId="3aee791e-6a2d-4da7-a77b-fbdf7bf15886" providerId="ADAL" clId="{CDC5B0EF-6BEB-4658-A9FF-CB66F6FA6C1E}" dt="2025-05-22T21:51:05.782" v="528"/>
-          <ac:cxnSpMkLst>
-            <pc:docMk/>
-            <pc:sldMk cId="2152317508" sldId="256"/>
-            <ac:cxnSpMk id="102" creationId="{A4DFBE38-1FA5-A73E-FE25-73EA45B36C10}"/>
-          </ac:cxnSpMkLst>
-        </pc:cxnChg>
-        <pc:cxnChg chg="add mod">
-          <ac:chgData name="Li, Hanchen F" userId="3aee791e-6a2d-4da7-a77b-fbdf7bf15886" providerId="ADAL" clId="{CDC5B0EF-6BEB-4658-A9FF-CB66F6FA6C1E}" dt="2025-05-22T21:51:05.782" v="528"/>
-          <ac:cxnSpMkLst>
-            <pc:docMk/>
-            <pc:sldMk cId="2152317508" sldId="256"/>
-            <ac:cxnSpMk id="103" creationId="{04BBE53E-0B85-8B66-C561-4B22FBA51184}"/>
-          </ac:cxnSpMkLst>
-        </pc:cxnChg>
-        <pc:cxnChg chg="add mod">
-          <ac:chgData name="Li, Hanchen F" userId="3aee791e-6a2d-4da7-a77b-fbdf7bf15886" providerId="ADAL" clId="{CDC5B0EF-6BEB-4658-A9FF-CB66F6FA6C1E}" dt="2025-05-22T21:51:05.782" v="528"/>
-          <ac:cxnSpMkLst>
-            <pc:docMk/>
-            <pc:sldMk cId="2152317508" sldId="256"/>
-            <ac:cxnSpMk id="104" creationId="{991EF7BD-60B4-F953-205C-A5F1DB5C0ED1}"/>
-          </ac:cxnSpMkLst>
-        </pc:cxnChg>
-        <pc:cxnChg chg="add mod">
-          <ac:chgData name="Li, Hanchen F" userId="3aee791e-6a2d-4da7-a77b-fbdf7bf15886" providerId="ADAL" clId="{CDC5B0EF-6BEB-4658-A9FF-CB66F6FA6C1E}" dt="2025-05-22T21:51:05.782" v="528"/>
-          <ac:cxnSpMkLst>
-            <pc:docMk/>
-            <pc:sldMk cId="2152317508" sldId="256"/>
-            <ac:cxnSpMk id="105" creationId="{F1423DB6-8A85-AE38-55D6-F3C133BA49B9}"/>
-          </ac:cxnSpMkLst>
-        </pc:cxnChg>
-        <pc:cxnChg chg="add del mod">
-          <ac:chgData name="Li, Hanchen F" userId="3aee791e-6a2d-4da7-a77b-fbdf7bf15886" providerId="ADAL" clId="{CDC5B0EF-6BEB-4658-A9FF-CB66F6FA6C1E}" dt="2025-05-22T21:51:30.135" v="570" actId="478"/>
-          <ac:cxnSpMkLst>
-            <pc:docMk/>
-            <pc:sldMk cId="2152317508" sldId="256"/>
-            <ac:cxnSpMk id="106" creationId="{85254D83-2245-DD10-2B4B-4152907F9F5A}"/>
-          </ac:cxnSpMkLst>
-        </pc:cxnChg>
-        <pc:cxnChg chg="add del mod">
-          <ac:chgData name="Li, Hanchen F" userId="3aee791e-6a2d-4da7-a77b-fbdf7bf15886" providerId="ADAL" clId="{CDC5B0EF-6BEB-4658-A9FF-CB66F6FA6C1E}" dt="2025-05-22T22:16:22.014" v="1365" actId="478"/>
-          <ac:cxnSpMkLst>
-            <pc:docMk/>
-            <pc:sldMk cId="2152317508" sldId="256"/>
-            <ac:cxnSpMk id="107" creationId="{2CAA1E56-7B16-308C-F8CB-12E90559CEB8}"/>
-          </ac:cxnSpMkLst>
-        </pc:cxnChg>
-        <pc:cxnChg chg="add del mod">
-          <ac:chgData name="Li, Hanchen F" userId="3aee791e-6a2d-4da7-a77b-fbdf7bf15886" providerId="ADAL" clId="{CDC5B0EF-6BEB-4658-A9FF-CB66F6FA6C1E}" dt="2025-05-22T22:16:22.014" v="1365" actId="478"/>
-          <ac:cxnSpMkLst>
-            <pc:docMk/>
-            <pc:sldMk cId="2152317508" sldId="256"/>
-            <ac:cxnSpMk id="108" creationId="{448A65EE-4C87-93EE-A90B-B74D46A120D0}"/>
-          </ac:cxnSpMkLst>
-        </pc:cxnChg>
-        <pc:cxnChg chg="add del mod">
-          <ac:chgData name="Li, Hanchen F" userId="3aee791e-6a2d-4da7-a77b-fbdf7bf15886" providerId="ADAL" clId="{CDC5B0EF-6BEB-4658-A9FF-CB66F6FA6C1E}" dt="2025-05-22T22:16:22.014" v="1365" actId="478"/>
-          <ac:cxnSpMkLst>
-            <pc:docMk/>
-            <pc:sldMk cId="2152317508" sldId="256"/>
-            <ac:cxnSpMk id="109" creationId="{75BE30EC-CEEB-D5C6-02AE-7CB0E85F9C15}"/>
-          </ac:cxnSpMkLst>
-        </pc:cxnChg>
-        <pc:cxnChg chg="add mod">
-          <ac:chgData name="Li, Hanchen F" userId="3aee791e-6a2d-4da7-a77b-fbdf7bf15886" providerId="ADAL" clId="{CDC5B0EF-6BEB-4658-A9FF-CB66F6FA6C1E}" dt="2025-05-22T21:52:29.016" v="627"/>
-          <ac:cxnSpMkLst>
-            <pc:docMk/>
-            <pc:sldMk cId="2152317508" sldId="256"/>
-            <ac:cxnSpMk id="112" creationId="{CAAA6F5A-0CDA-ED44-878D-9018C627B6EE}"/>
-          </ac:cxnSpMkLst>
-        </pc:cxnChg>
         <pc:cxnChg chg="add mod">
           <ac:chgData name="Li, Hanchen F" userId="3aee791e-6a2d-4da7-a77b-fbdf7bf15886" providerId="ADAL" clId="{CDC5B0EF-6BEB-4658-A9FF-CB66F6FA6C1E}" dt="2025-05-22T22:08:15.426" v="1093" actId="1035"/>
           <ac:cxnSpMkLst>
             <pc:docMk/>
             <pc:sldMk cId="2152317508" sldId="256"/>
             <ac:cxnSpMk id="113" creationId="{373E8CBE-4B88-2DFF-4079-6E202632BC13}"/>
-          </ac:cxnSpMkLst>
-        </pc:cxnChg>
-        <pc:cxnChg chg="add del mod">
-          <ac:chgData name="Li, Hanchen F" userId="3aee791e-6a2d-4da7-a77b-fbdf7bf15886" providerId="ADAL" clId="{CDC5B0EF-6BEB-4658-A9FF-CB66F6FA6C1E}" dt="2025-05-22T22:16:22.014" v="1365" actId="478"/>
-          <ac:cxnSpMkLst>
-            <pc:docMk/>
-            <pc:sldMk cId="2152317508" sldId="256"/>
-            <ac:cxnSpMk id="115" creationId="{09AA8BA6-28AC-2234-12F7-17045289497D}"/>
-          </ac:cxnSpMkLst>
-        </pc:cxnChg>
-        <pc:cxnChg chg="add del">
-          <ac:chgData name="Li, Hanchen F" userId="3aee791e-6a2d-4da7-a77b-fbdf7bf15886" providerId="ADAL" clId="{CDC5B0EF-6BEB-4658-A9FF-CB66F6FA6C1E}" dt="2025-05-22T21:53:40.377" v="639" actId="11529"/>
-          <ac:cxnSpMkLst>
-            <pc:docMk/>
-            <pc:sldMk cId="2152317508" sldId="256"/>
-            <ac:cxnSpMk id="119" creationId="{54E4C1D5-CA83-4022-EEA7-DED3D427BDD5}"/>
-          </ac:cxnSpMkLst>
-        </pc:cxnChg>
-        <pc:cxnChg chg="add del mod">
-          <ac:chgData name="Li, Hanchen F" userId="3aee791e-6a2d-4da7-a77b-fbdf7bf15886" providerId="ADAL" clId="{CDC5B0EF-6BEB-4658-A9FF-CB66F6FA6C1E}" dt="2025-05-22T21:56:17.521" v="682" actId="11529"/>
-          <ac:cxnSpMkLst>
-            <pc:docMk/>
-            <pc:sldMk cId="2152317508" sldId="256"/>
-            <ac:cxnSpMk id="123" creationId="{8E126466-EB91-34B5-EAB0-296E0EBCF3F6}"/>
-          </ac:cxnSpMkLst>
-        </pc:cxnChg>
-        <pc:cxnChg chg="add del">
-          <ac:chgData name="Li, Hanchen F" userId="3aee791e-6a2d-4da7-a77b-fbdf7bf15886" providerId="ADAL" clId="{CDC5B0EF-6BEB-4658-A9FF-CB66F6FA6C1E}" dt="2025-05-22T21:56:23.079" v="684" actId="11529"/>
-          <ac:cxnSpMkLst>
-            <pc:docMk/>
-            <pc:sldMk cId="2152317508" sldId="256"/>
-            <ac:cxnSpMk id="125" creationId="{53967D39-E595-4C9C-9881-48EE51F6AF40}"/>
-          </ac:cxnSpMkLst>
-        </pc:cxnChg>
-        <pc:cxnChg chg="add del">
-          <ac:chgData name="Li, Hanchen F" userId="3aee791e-6a2d-4da7-a77b-fbdf7bf15886" providerId="ADAL" clId="{CDC5B0EF-6BEB-4658-A9FF-CB66F6FA6C1E}" dt="2025-05-22T21:56:37.047" v="686" actId="11529"/>
-          <ac:cxnSpMkLst>
-            <pc:docMk/>
-            <pc:sldMk cId="2152317508" sldId="256"/>
-            <ac:cxnSpMk id="127" creationId="{B5B96FEF-1EAC-4D92-D16C-9F64FAF9F796}"/>
           </ac:cxnSpMkLst>
         </pc:cxnChg>
         <pc:cxnChg chg="add mod">
@@ -2582,14 +1366,6 @@
             <ac:cxnSpMk id="148" creationId="{060D26C6-F8D3-6610-42C5-778A5FB1F946}"/>
           </ac:cxnSpMkLst>
         </pc:cxnChg>
-        <pc:cxnChg chg="add del mod ord">
-          <ac:chgData name="Li, Hanchen F" userId="3aee791e-6a2d-4da7-a77b-fbdf7bf15886" providerId="ADAL" clId="{CDC5B0EF-6BEB-4658-A9FF-CB66F6FA6C1E}" dt="2025-05-22T22:04:43.173" v="914" actId="478"/>
-          <ac:cxnSpMkLst>
-            <pc:docMk/>
-            <pc:sldMk cId="2152317508" sldId="256"/>
-            <ac:cxnSpMk id="152" creationId="{A6F66CF3-9118-FD34-28C3-D1887E475CBC}"/>
-          </ac:cxnSpMkLst>
-        </pc:cxnChg>
         <pc:cxnChg chg="add mod ord">
           <ac:chgData name="Li, Hanchen F" userId="3aee791e-6a2d-4da7-a77b-fbdf7bf15886" providerId="ADAL" clId="{CDC5B0EF-6BEB-4658-A9FF-CB66F6FA6C1E}" dt="2025-05-22T22:07:52.811" v="1023" actId="1035"/>
           <ac:cxnSpMkLst>
@@ -2606,30 +1382,6 @@
             <ac:cxnSpMk id="170" creationId="{DD6DD07B-470A-D2AF-3CC6-4334B7C92FD7}"/>
           </ac:cxnSpMkLst>
         </pc:cxnChg>
-        <pc:cxnChg chg="add del mod">
-          <ac:chgData name="Li, Hanchen F" userId="3aee791e-6a2d-4da7-a77b-fbdf7bf15886" providerId="ADAL" clId="{CDC5B0EF-6BEB-4658-A9FF-CB66F6FA6C1E}" dt="2025-05-22T22:13:59.436" v="1222" actId="478"/>
-          <ac:cxnSpMkLst>
-            <pc:docMk/>
-            <pc:sldMk cId="2152317508" sldId="256"/>
-            <ac:cxnSpMk id="182" creationId="{6B3FED2E-1665-A2EE-2F3E-0140394EF84A}"/>
-          </ac:cxnSpMkLst>
-        </pc:cxnChg>
-        <pc:cxnChg chg="add del mod">
-          <ac:chgData name="Li, Hanchen F" userId="3aee791e-6a2d-4da7-a77b-fbdf7bf15886" providerId="ADAL" clId="{CDC5B0EF-6BEB-4658-A9FF-CB66F6FA6C1E}" dt="2025-05-22T22:13:47.776" v="1219" actId="478"/>
-          <ac:cxnSpMkLst>
-            <pc:docMk/>
-            <pc:sldMk cId="2152317508" sldId="256"/>
-            <ac:cxnSpMk id="186" creationId="{36612256-4C37-7BDD-3782-4F2158862ABA}"/>
-          </ac:cxnSpMkLst>
-        </pc:cxnChg>
-        <pc:cxnChg chg="add del mod">
-          <ac:chgData name="Li, Hanchen F" userId="3aee791e-6a2d-4da7-a77b-fbdf7bf15886" providerId="ADAL" clId="{CDC5B0EF-6BEB-4658-A9FF-CB66F6FA6C1E}" dt="2025-05-22T22:14:44.552" v="1238" actId="478"/>
-          <ac:cxnSpMkLst>
-            <pc:docMk/>
-            <pc:sldMk cId="2152317508" sldId="256"/>
-            <ac:cxnSpMk id="188" creationId="{1BD0B5D4-6C5C-29A4-4F8F-F5ED3B7A6703}"/>
-          </ac:cxnSpMkLst>
-        </pc:cxnChg>
         <pc:cxnChg chg="add mod">
           <ac:chgData name="Li, Hanchen F" userId="3aee791e-6a2d-4da7-a77b-fbdf7bf15886" providerId="ADAL" clId="{CDC5B0EF-6BEB-4658-A9FF-CB66F6FA6C1E}" dt="2025-05-22T22:34:51.982" v="2519" actId="164"/>
           <ac:cxnSpMkLst>
@@ -2646,14 +1398,6 @@
             <ac:cxnSpMk id="192" creationId="{FEAE4C49-6FFC-7540-E16D-54D59F206E3B}"/>
           </ac:cxnSpMkLst>
         </pc:cxnChg>
-        <pc:cxnChg chg="add del mod">
-          <ac:chgData name="Li, Hanchen F" userId="3aee791e-6a2d-4da7-a77b-fbdf7bf15886" providerId="ADAL" clId="{CDC5B0EF-6BEB-4658-A9FF-CB66F6FA6C1E}" dt="2025-05-22T22:14:43.633" v="1237" actId="478"/>
-          <ac:cxnSpMkLst>
-            <pc:docMk/>
-            <pc:sldMk cId="2152317508" sldId="256"/>
-            <ac:cxnSpMk id="194" creationId="{CEF76CB0-4BFA-C86F-7692-4C4D2CD78548}"/>
-          </ac:cxnSpMkLst>
-        </pc:cxnChg>
         <pc:cxnChg chg="add mod">
           <ac:chgData name="Li, Hanchen F" userId="3aee791e-6a2d-4da7-a77b-fbdf7bf15886" providerId="ADAL" clId="{CDC5B0EF-6BEB-4658-A9FF-CB66F6FA6C1E}" dt="2025-05-22T22:29:23.094" v="2452" actId="14100"/>
           <ac:cxnSpMkLst>
@@ -2694,62 +1438,6 @@
             <ac:cxnSpMk id="208" creationId="{91F191B3-8473-EA8B-D791-FFE8786B3AFB}"/>
           </ac:cxnSpMkLst>
         </pc:cxnChg>
-        <pc:cxnChg chg="add mod">
-          <ac:chgData name="Li, Hanchen F" userId="3aee791e-6a2d-4da7-a77b-fbdf7bf15886" providerId="ADAL" clId="{CDC5B0EF-6BEB-4658-A9FF-CB66F6FA6C1E}" dt="2025-05-22T22:17:59.025" v="1434" actId="1076"/>
-          <ac:cxnSpMkLst>
-            <pc:docMk/>
-            <pc:sldMk cId="2152317508" sldId="256"/>
-            <ac:cxnSpMk id="214" creationId="{3C721E6C-5F32-B048-B405-B61C66A69617}"/>
-          </ac:cxnSpMkLst>
-        </pc:cxnChg>
-        <pc:cxnChg chg="add mod">
-          <ac:chgData name="Li, Hanchen F" userId="3aee791e-6a2d-4da7-a77b-fbdf7bf15886" providerId="ADAL" clId="{CDC5B0EF-6BEB-4658-A9FF-CB66F6FA6C1E}" dt="2025-05-22T22:17:59.025" v="1434" actId="1076"/>
-          <ac:cxnSpMkLst>
-            <pc:docMk/>
-            <pc:sldMk cId="2152317508" sldId="256"/>
-            <ac:cxnSpMk id="215" creationId="{A4FD00C8-6CAB-56CB-5BCB-8EFA3FD87743}"/>
-          </ac:cxnSpMkLst>
-        </pc:cxnChg>
-        <pc:cxnChg chg="add mod">
-          <ac:chgData name="Li, Hanchen F" userId="3aee791e-6a2d-4da7-a77b-fbdf7bf15886" providerId="ADAL" clId="{CDC5B0EF-6BEB-4658-A9FF-CB66F6FA6C1E}" dt="2025-05-22T22:17:59.025" v="1434" actId="1076"/>
-          <ac:cxnSpMkLst>
-            <pc:docMk/>
-            <pc:sldMk cId="2152317508" sldId="256"/>
-            <ac:cxnSpMk id="216" creationId="{672BE63A-75B6-6632-52EB-57B3F33D4F43}"/>
-          </ac:cxnSpMkLst>
-        </pc:cxnChg>
-        <pc:cxnChg chg="add mod">
-          <ac:chgData name="Li, Hanchen F" userId="3aee791e-6a2d-4da7-a77b-fbdf7bf15886" providerId="ADAL" clId="{CDC5B0EF-6BEB-4658-A9FF-CB66F6FA6C1E}" dt="2025-05-22T22:17:59.025" v="1434" actId="1076"/>
-          <ac:cxnSpMkLst>
-            <pc:docMk/>
-            <pc:sldMk cId="2152317508" sldId="256"/>
-            <ac:cxnSpMk id="217" creationId="{C8E26735-6F08-C318-E17B-0764F143EE90}"/>
-          </ac:cxnSpMkLst>
-        </pc:cxnChg>
-        <pc:cxnChg chg="add mod">
-          <ac:chgData name="Li, Hanchen F" userId="3aee791e-6a2d-4da7-a77b-fbdf7bf15886" providerId="ADAL" clId="{CDC5B0EF-6BEB-4658-A9FF-CB66F6FA6C1E}" dt="2025-05-22T22:17:59.025" v="1434" actId="1076"/>
-          <ac:cxnSpMkLst>
-            <pc:docMk/>
-            <pc:sldMk cId="2152317508" sldId="256"/>
-            <ac:cxnSpMk id="218" creationId="{9CEB4D75-4E1C-F514-6DE1-ED9567AF8503}"/>
-          </ac:cxnSpMkLst>
-        </pc:cxnChg>
-        <pc:cxnChg chg="add mod">
-          <ac:chgData name="Li, Hanchen F" userId="3aee791e-6a2d-4da7-a77b-fbdf7bf15886" providerId="ADAL" clId="{CDC5B0EF-6BEB-4658-A9FF-CB66F6FA6C1E}" dt="2025-05-22T22:17:59.025" v="1434" actId="1076"/>
-          <ac:cxnSpMkLst>
-            <pc:docMk/>
-            <pc:sldMk cId="2152317508" sldId="256"/>
-            <ac:cxnSpMk id="219" creationId="{C6B10ED0-A98B-8F0B-2B20-646AEA0D035A}"/>
-          </ac:cxnSpMkLst>
-        </pc:cxnChg>
-        <pc:cxnChg chg="add mod">
-          <ac:chgData name="Li, Hanchen F" userId="3aee791e-6a2d-4da7-a77b-fbdf7bf15886" providerId="ADAL" clId="{CDC5B0EF-6BEB-4658-A9FF-CB66F6FA6C1E}" dt="2025-05-22T22:17:59.025" v="1434" actId="1076"/>
-          <ac:cxnSpMkLst>
-            <pc:docMk/>
-            <pc:sldMk cId="2152317508" sldId="256"/>
-            <ac:cxnSpMk id="220" creationId="{BA689186-E8E9-8EF1-EF8C-3221D77779E1}"/>
-          </ac:cxnSpMkLst>
-        </pc:cxnChg>
         <pc:cxnChg chg="add del mod">
           <ac:chgData name="Li, Hanchen F" userId="3aee791e-6a2d-4da7-a77b-fbdf7bf15886" providerId="ADAL" clId="{CDC5B0EF-6BEB-4658-A9FF-CB66F6FA6C1E}" dt="2025-05-22T23:36:41.195" v="3686" actId="478"/>
           <ac:cxnSpMkLst>
@@ -2775,14 +1463,6 @@
           </ac:cxnSpMkLst>
         </pc:cxnChg>
         <pc:cxnChg chg="add del mod">
-          <ac:chgData name="Li, Hanchen F" userId="3aee791e-6a2d-4da7-a77b-fbdf7bf15886" providerId="ADAL" clId="{CDC5B0EF-6BEB-4658-A9FF-CB66F6FA6C1E}" dt="2025-05-22T22:19:25.376" v="1859" actId="478"/>
-          <ac:cxnSpMkLst>
-            <pc:docMk/>
-            <pc:sldMk cId="2152317508" sldId="256"/>
-            <ac:cxnSpMk id="227" creationId="{0F712CCF-E6E3-80B6-6C01-26D91EE95B2C}"/>
-          </ac:cxnSpMkLst>
-        </pc:cxnChg>
-        <pc:cxnChg chg="add del mod">
           <ac:chgData name="Li, Hanchen F" userId="3aee791e-6a2d-4da7-a77b-fbdf7bf15886" providerId="ADAL" clId="{CDC5B0EF-6BEB-4658-A9FF-CB66F6FA6C1E}" dt="2025-05-22T23:36:39.847" v="3682" actId="478"/>
           <ac:cxnSpMkLst>
             <pc:docMk/>
@@ -2815,70 +1495,6 @@
           </ac:cxnSpMkLst>
         </pc:cxnChg>
         <pc:cxnChg chg="add mod">
-          <ac:chgData name="Li, Hanchen F" userId="3aee791e-6a2d-4da7-a77b-fbdf7bf15886" providerId="ADAL" clId="{CDC5B0EF-6BEB-4658-A9FF-CB66F6FA6C1E}" dt="2025-05-22T22:18:26.597" v="1439" actId="571"/>
-          <ac:cxnSpMkLst>
-            <pc:docMk/>
-            <pc:sldMk cId="2152317508" sldId="256"/>
-            <ac:cxnSpMk id="235" creationId="{D1864796-738D-0955-5012-D53EFFCEEF2C}"/>
-          </ac:cxnSpMkLst>
-        </pc:cxnChg>
-        <pc:cxnChg chg="add mod">
-          <ac:chgData name="Li, Hanchen F" userId="3aee791e-6a2d-4da7-a77b-fbdf7bf15886" providerId="ADAL" clId="{CDC5B0EF-6BEB-4658-A9FF-CB66F6FA6C1E}" dt="2025-05-22T22:18:26.074" v="1437" actId="1076"/>
-          <ac:cxnSpMkLst>
-            <pc:docMk/>
-            <pc:sldMk cId="2152317508" sldId="256"/>
-            <ac:cxnSpMk id="236" creationId="{077B5C13-2B99-6C27-5BED-97BCD274F5DE}"/>
-          </ac:cxnSpMkLst>
-        </pc:cxnChg>
-        <pc:cxnChg chg="add mod">
-          <ac:chgData name="Li, Hanchen F" userId="3aee791e-6a2d-4da7-a77b-fbdf7bf15886" providerId="ADAL" clId="{CDC5B0EF-6BEB-4658-A9FF-CB66F6FA6C1E}" dt="2025-05-22T22:18:26.597" v="1439" actId="571"/>
-          <ac:cxnSpMkLst>
-            <pc:docMk/>
-            <pc:sldMk cId="2152317508" sldId="256"/>
-            <ac:cxnSpMk id="237" creationId="{CEC5EBCE-1FB4-7F3D-1B80-F9CCCB62AFB0}"/>
-          </ac:cxnSpMkLst>
-        </pc:cxnChg>
-        <pc:cxnChg chg="add mod">
-          <ac:chgData name="Li, Hanchen F" userId="3aee791e-6a2d-4da7-a77b-fbdf7bf15886" providerId="ADAL" clId="{CDC5B0EF-6BEB-4658-A9FF-CB66F6FA6C1E}" dt="2025-05-22T22:18:26.597" v="1439" actId="571"/>
-          <ac:cxnSpMkLst>
-            <pc:docMk/>
-            <pc:sldMk cId="2152317508" sldId="256"/>
-            <ac:cxnSpMk id="238" creationId="{AFE419DA-69F5-BD42-6F2F-4940B9ABC520}"/>
-          </ac:cxnSpMkLst>
-        </pc:cxnChg>
-        <pc:cxnChg chg="add mod">
-          <ac:chgData name="Li, Hanchen F" userId="3aee791e-6a2d-4da7-a77b-fbdf7bf15886" providerId="ADAL" clId="{CDC5B0EF-6BEB-4658-A9FF-CB66F6FA6C1E}" dt="2025-05-22T22:18:26.597" v="1439" actId="571"/>
-          <ac:cxnSpMkLst>
-            <pc:docMk/>
-            <pc:sldMk cId="2152317508" sldId="256"/>
-            <ac:cxnSpMk id="239" creationId="{3616B7D3-09DA-DB27-5053-0B49D6E20193}"/>
-          </ac:cxnSpMkLst>
-        </pc:cxnChg>
-        <pc:cxnChg chg="add mod">
-          <ac:chgData name="Li, Hanchen F" userId="3aee791e-6a2d-4da7-a77b-fbdf7bf15886" providerId="ADAL" clId="{CDC5B0EF-6BEB-4658-A9FF-CB66F6FA6C1E}" dt="2025-05-22T22:18:26.597" v="1439" actId="571"/>
-          <ac:cxnSpMkLst>
-            <pc:docMk/>
-            <pc:sldMk cId="2152317508" sldId="256"/>
-            <ac:cxnSpMk id="240" creationId="{4300023D-4CAD-0176-8B60-5498EE8D44EC}"/>
-          </ac:cxnSpMkLst>
-        </pc:cxnChg>
-        <pc:cxnChg chg="add mod">
-          <ac:chgData name="Li, Hanchen F" userId="3aee791e-6a2d-4da7-a77b-fbdf7bf15886" providerId="ADAL" clId="{CDC5B0EF-6BEB-4658-A9FF-CB66F6FA6C1E}" dt="2025-05-22T22:18:26.597" v="1439" actId="571"/>
-          <ac:cxnSpMkLst>
-            <pc:docMk/>
-            <pc:sldMk cId="2152317508" sldId="256"/>
-            <ac:cxnSpMk id="241" creationId="{BD36A716-50D0-070A-EFCA-BB7864640979}"/>
-          </ac:cxnSpMkLst>
-        </pc:cxnChg>
-        <pc:cxnChg chg="mod">
-          <ac:chgData name="Li, Hanchen F" userId="3aee791e-6a2d-4da7-a77b-fbdf7bf15886" providerId="ADAL" clId="{CDC5B0EF-6BEB-4658-A9FF-CB66F6FA6C1E}" dt="2025-05-22T22:18:26.597" v="1439" actId="571"/>
-          <ac:cxnSpMkLst>
-            <pc:docMk/>
-            <pc:sldMk cId="2152317508" sldId="256"/>
-            <ac:cxnSpMk id="242" creationId="{D79CC868-176E-622A-2585-201FB8C7770F}"/>
-          </ac:cxnSpMkLst>
-        </pc:cxnChg>
-        <pc:cxnChg chg="add mod">
           <ac:chgData name="Li, Hanchen F" userId="3aee791e-6a2d-4da7-a77b-fbdf7bf15886" providerId="ADAL" clId="{CDC5B0EF-6BEB-4658-A9FF-CB66F6FA6C1E}" dt="2025-05-22T22:27:01.095" v="2133" actId="1037"/>
           <ac:cxnSpMkLst>
             <pc:docMk/>
@@ -2887,7 +1503,7 @@
           </ac:cxnSpMkLst>
         </pc:cxnChg>
         <pc:cxnChg chg="add mod">
-          <ac:chgData name="Li, Hanchen F" userId="3aee791e-6a2d-4da7-a77b-fbdf7bf15886" providerId="ADAL" clId="{CDC5B0EF-6BEB-4658-A9FF-CB66F6FA6C1E}" dt="2025-05-22T22:21:14.332" v="2015" actId="1076"/>
+          <ac:chgData name="Li, Hanchen F" userId="3aee791e-6a2d-4da7-a77b-fbdf7bf15886" providerId="ADAL" clId="{CDC5B0EF-6BEB-4658-A9FF-CB66F6FA6C1E}" dt="2025-05-23T21:51:39.772" v="8163" actId="14100"/>
           <ac:cxnSpMkLst>
             <pc:docMk/>
             <pc:sldMk cId="2152317508" sldId="256"/>
@@ -2919,54 +1535,6 @@
           </ac:cxnSpMkLst>
         </pc:cxnChg>
         <pc:cxnChg chg="add mod">
-          <ac:chgData name="Li, Hanchen F" userId="3aee791e-6a2d-4da7-a77b-fbdf7bf15886" providerId="ADAL" clId="{CDC5B0EF-6BEB-4658-A9FF-CB66F6FA6C1E}" dt="2025-05-22T22:27:49.491" v="2188" actId="1076"/>
-          <ac:cxnSpMkLst>
-            <pc:docMk/>
-            <pc:sldMk cId="2152317508" sldId="256"/>
-            <ac:cxnSpMk id="260" creationId="{2C3F8D1B-5DD9-58B3-A1FF-54AF55FC1B86}"/>
-          </ac:cxnSpMkLst>
-        </pc:cxnChg>
-        <pc:cxnChg chg="add mod">
-          <ac:chgData name="Li, Hanchen F" userId="3aee791e-6a2d-4da7-a77b-fbdf7bf15886" providerId="ADAL" clId="{CDC5B0EF-6BEB-4658-A9FF-CB66F6FA6C1E}" dt="2025-05-22T22:27:49.491" v="2188" actId="1076"/>
-          <ac:cxnSpMkLst>
-            <pc:docMk/>
-            <pc:sldMk cId="2152317508" sldId="256"/>
-            <ac:cxnSpMk id="261" creationId="{E6BF069A-DAE6-B493-2B3F-A6C2564EA4E0}"/>
-          </ac:cxnSpMkLst>
-        </pc:cxnChg>
-        <pc:cxnChg chg="add mod">
-          <ac:chgData name="Li, Hanchen F" userId="3aee791e-6a2d-4da7-a77b-fbdf7bf15886" providerId="ADAL" clId="{CDC5B0EF-6BEB-4658-A9FF-CB66F6FA6C1E}" dt="2025-05-22T22:27:49.491" v="2188" actId="1076"/>
-          <ac:cxnSpMkLst>
-            <pc:docMk/>
-            <pc:sldMk cId="2152317508" sldId="256"/>
-            <ac:cxnSpMk id="262" creationId="{12EAE7CC-9526-4C1C-0733-75D640AA55CF}"/>
-          </ac:cxnSpMkLst>
-        </pc:cxnChg>
-        <pc:cxnChg chg="add mod">
-          <ac:chgData name="Li, Hanchen F" userId="3aee791e-6a2d-4da7-a77b-fbdf7bf15886" providerId="ADAL" clId="{CDC5B0EF-6BEB-4658-A9FF-CB66F6FA6C1E}" dt="2025-05-22T22:27:49.491" v="2188" actId="1076"/>
-          <ac:cxnSpMkLst>
-            <pc:docMk/>
-            <pc:sldMk cId="2152317508" sldId="256"/>
-            <ac:cxnSpMk id="263" creationId="{79712BF8-57A0-9A36-6963-9AC943B14A11}"/>
-          </ac:cxnSpMkLst>
-        </pc:cxnChg>
-        <pc:cxnChg chg="add mod">
-          <ac:chgData name="Li, Hanchen F" userId="3aee791e-6a2d-4da7-a77b-fbdf7bf15886" providerId="ADAL" clId="{CDC5B0EF-6BEB-4658-A9FF-CB66F6FA6C1E}" dt="2025-05-22T22:27:49.491" v="2188" actId="1076"/>
-          <ac:cxnSpMkLst>
-            <pc:docMk/>
-            <pc:sldMk cId="2152317508" sldId="256"/>
-            <ac:cxnSpMk id="264" creationId="{0FF4D336-BF74-3F6F-FB5E-75ED9AD38312}"/>
-          </ac:cxnSpMkLst>
-        </pc:cxnChg>
-        <pc:cxnChg chg="add mod">
-          <ac:chgData name="Li, Hanchen F" userId="3aee791e-6a2d-4da7-a77b-fbdf7bf15886" providerId="ADAL" clId="{CDC5B0EF-6BEB-4658-A9FF-CB66F6FA6C1E}" dt="2025-05-22T22:27:49.491" v="2188" actId="1076"/>
-          <ac:cxnSpMkLst>
-            <pc:docMk/>
-            <pc:sldMk cId="2152317508" sldId="256"/>
-            <ac:cxnSpMk id="265" creationId="{DC42E367-2196-8E86-BC5F-11656845C41A}"/>
-          </ac:cxnSpMkLst>
-        </pc:cxnChg>
-        <pc:cxnChg chg="add mod">
           <ac:chgData name="Li, Hanchen F" userId="3aee791e-6a2d-4da7-a77b-fbdf7bf15886" providerId="ADAL" clId="{CDC5B0EF-6BEB-4658-A9FF-CB66F6FA6C1E}" dt="2025-05-22T22:28:24.769" v="2437" actId="1037"/>
           <ac:cxnSpMkLst>
             <pc:docMk/>
@@ -3046,54 +1614,6 @@
             <ac:cxnSpMk id="287" creationId="{BC6D1C4C-A396-A543-3006-FC720EFD2BAB}"/>
           </ac:cxnSpMkLst>
         </pc:cxnChg>
-        <pc:cxnChg chg="add del mod">
-          <ac:chgData name="Li, Hanchen F" userId="3aee791e-6a2d-4da7-a77b-fbdf7bf15886" providerId="ADAL" clId="{CDC5B0EF-6BEB-4658-A9FF-CB66F6FA6C1E}" dt="2025-05-22T22:31:52.744" v="2481" actId="478"/>
-          <ac:cxnSpMkLst>
-            <pc:docMk/>
-            <pc:sldMk cId="2152317508" sldId="256"/>
-            <ac:cxnSpMk id="289" creationId="{0EC4F635-7AB7-2813-9B6D-98F3214CE2F9}"/>
-          </ac:cxnSpMkLst>
-        </pc:cxnChg>
-        <pc:cxnChg chg="add del mod">
-          <ac:chgData name="Li, Hanchen F" userId="3aee791e-6a2d-4da7-a77b-fbdf7bf15886" providerId="ADAL" clId="{CDC5B0EF-6BEB-4658-A9FF-CB66F6FA6C1E}" dt="2025-05-22T22:31:52.744" v="2481" actId="478"/>
-          <ac:cxnSpMkLst>
-            <pc:docMk/>
-            <pc:sldMk cId="2152317508" sldId="256"/>
-            <ac:cxnSpMk id="290" creationId="{F3427408-D9D3-0FE6-BE08-78493103B793}"/>
-          </ac:cxnSpMkLst>
-        </pc:cxnChg>
-        <pc:cxnChg chg="add mod">
-          <ac:chgData name="Li, Hanchen F" userId="3aee791e-6a2d-4da7-a77b-fbdf7bf15886" providerId="ADAL" clId="{CDC5B0EF-6BEB-4658-A9FF-CB66F6FA6C1E}" dt="2025-05-22T22:31:42.395" v="2478"/>
-          <ac:cxnSpMkLst>
-            <pc:docMk/>
-            <pc:sldMk cId="2152317508" sldId="256"/>
-            <ac:cxnSpMk id="293" creationId="{A82B62C9-245E-94F4-3D1F-2080C95922D7}"/>
-          </ac:cxnSpMkLst>
-        </pc:cxnChg>
-        <pc:cxnChg chg="add mod">
-          <ac:chgData name="Li, Hanchen F" userId="3aee791e-6a2d-4da7-a77b-fbdf7bf15886" providerId="ADAL" clId="{CDC5B0EF-6BEB-4658-A9FF-CB66F6FA6C1E}" dt="2025-05-22T22:31:42.395" v="2478"/>
-          <ac:cxnSpMkLst>
-            <pc:docMk/>
-            <pc:sldMk cId="2152317508" sldId="256"/>
-            <ac:cxnSpMk id="294" creationId="{2C661D81-D1D1-284D-276D-65537A692618}"/>
-          </ac:cxnSpMkLst>
-        </pc:cxnChg>
-        <pc:cxnChg chg="add mod">
-          <ac:chgData name="Li, Hanchen F" userId="3aee791e-6a2d-4da7-a77b-fbdf7bf15886" providerId="ADAL" clId="{CDC5B0EF-6BEB-4658-A9FF-CB66F6FA6C1E}" dt="2025-05-22T22:31:48.356" v="2480"/>
-          <ac:cxnSpMkLst>
-            <pc:docMk/>
-            <pc:sldMk cId="2152317508" sldId="256"/>
-            <ac:cxnSpMk id="297" creationId="{10CD96D7-1E97-FEE7-9DBE-D9F9665700FC}"/>
-          </ac:cxnSpMkLst>
-        </pc:cxnChg>
-        <pc:cxnChg chg="add mod">
-          <ac:chgData name="Li, Hanchen F" userId="3aee791e-6a2d-4da7-a77b-fbdf7bf15886" providerId="ADAL" clId="{CDC5B0EF-6BEB-4658-A9FF-CB66F6FA6C1E}" dt="2025-05-22T22:31:48.356" v="2480"/>
-          <ac:cxnSpMkLst>
-            <pc:docMk/>
-            <pc:sldMk cId="2152317508" sldId="256"/>
-            <ac:cxnSpMk id="298" creationId="{55B50AA2-D1AC-5C70-99AF-33CDD9E6367B}"/>
-          </ac:cxnSpMkLst>
-        </pc:cxnChg>
         <pc:cxnChg chg="add mod ord">
           <ac:chgData name="Li, Hanchen F" userId="3aee791e-6a2d-4da7-a77b-fbdf7bf15886" providerId="ADAL" clId="{CDC5B0EF-6BEB-4658-A9FF-CB66F6FA6C1E}" dt="2025-05-23T16:54:39.979" v="7719" actId="1076"/>
           <ac:cxnSpMkLst>
@@ -3126,28 +1646,12 @@
             <ac:cxnSpMk id="304" creationId="{A6EE3A5B-5AE9-D053-02A8-3899EAD21351}"/>
           </ac:cxnSpMkLst>
         </pc:cxnChg>
-        <pc:cxnChg chg="add del mod topLvl">
-          <ac:chgData name="Li, Hanchen F" userId="3aee791e-6a2d-4da7-a77b-fbdf7bf15886" providerId="ADAL" clId="{CDC5B0EF-6BEB-4658-A9FF-CB66F6FA6C1E}" dt="2025-05-22T23:32:31.317" v="3540" actId="478"/>
-          <ac:cxnSpMkLst>
-            <pc:docMk/>
-            <pc:sldMk cId="2152317508" sldId="256"/>
-            <ac:cxnSpMk id="462" creationId="{C0A4462B-678B-31AC-9304-CED8F2F55AD7}"/>
-          </ac:cxnSpMkLst>
-        </pc:cxnChg>
         <pc:cxnChg chg="add mod topLvl">
           <ac:chgData name="Li, Hanchen F" userId="3aee791e-6a2d-4da7-a77b-fbdf7bf15886" providerId="ADAL" clId="{CDC5B0EF-6BEB-4658-A9FF-CB66F6FA6C1E}" dt="2025-05-22T22:43:53.687" v="2661" actId="1076"/>
           <ac:cxnSpMkLst>
             <pc:docMk/>
             <pc:sldMk cId="2152317508" sldId="256"/>
             <ac:cxnSpMk id="463" creationId="{10451E52-E204-D840-CB8B-B13B2966A110}"/>
-          </ac:cxnSpMkLst>
-        </pc:cxnChg>
-        <pc:cxnChg chg="add del mod">
-          <ac:chgData name="Li, Hanchen F" userId="3aee791e-6a2d-4da7-a77b-fbdf7bf15886" providerId="ADAL" clId="{CDC5B0EF-6BEB-4658-A9FF-CB66F6FA6C1E}" dt="2025-05-22T22:41:36.075" v="2620" actId="478"/>
-          <ac:cxnSpMkLst>
-            <pc:docMk/>
-            <pc:sldMk cId="2152317508" sldId="256"/>
-            <ac:cxnSpMk id="472" creationId="{261A8699-D505-A90A-C2E6-F209D3666136}"/>
           </ac:cxnSpMkLst>
         </pc:cxnChg>
         <pc:cxnChg chg="add mod ord">
@@ -3158,36 +1662,12 @@
             <ac:cxnSpMk id="483" creationId="{5AF17CA7-72F7-9647-1F1D-D8A25CFF497A}"/>
           </ac:cxnSpMkLst>
         </pc:cxnChg>
-        <pc:cxnChg chg="add del mod">
-          <ac:chgData name="Li, Hanchen F" userId="3aee791e-6a2d-4da7-a77b-fbdf7bf15886" providerId="ADAL" clId="{CDC5B0EF-6BEB-4658-A9FF-CB66F6FA6C1E}" dt="2025-05-22T22:44:31.422" v="2669" actId="11529"/>
-          <ac:cxnSpMkLst>
-            <pc:docMk/>
-            <pc:sldMk cId="2152317508" sldId="256"/>
-            <ac:cxnSpMk id="493" creationId="{39B7CA80-F88D-F41F-EC08-0FB2C1336A93}"/>
-          </ac:cxnSpMkLst>
-        </pc:cxnChg>
-        <pc:cxnChg chg="add del mod">
-          <ac:chgData name="Li, Hanchen F" userId="3aee791e-6a2d-4da7-a77b-fbdf7bf15886" providerId="ADAL" clId="{CDC5B0EF-6BEB-4658-A9FF-CB66F6FA6C1E}" dt="2025-05-22T22:45:10.372" v="2680" actId="478"/>
-          <ac:cxnSpMkLst>
-            <pc:docMk/>
-            <pc:sldMk cId="2152317508" sldId="256"/>
-            <ac:cxnSpMk id="498" creationId="{4C7A0A6F-9A50-30BF-2B4F-BD5DD212EA30}"/>
-          </ac:cxnSpMkLst>
-        </pc:cxnChg>
         <pc:cxnChg chg="add mod">
           <ac:chgData name="Li, Hanchen F" userId="3aee791e-6a2d-4da7-a77b-fbdf7bf15886" providerId="ADAL" clId="{CDC5B0EF-6BEB-4658-A9FF-CB66F6FA6C1E}" dt="2025-05-22T22:54:10.992" v="2944" actId="1076"/>
           <ac:cxnSpMkLst>
             <pc:docMk/>
             <pc:sldMk cId="2152317508" sldId="256"/>
             <ac:cxnSpMk id="534" creationId="{28DCBBF2-569A-BF19-FBF4-A7AE295AFA26}"/>
-          </ac:cxnSpMkLst>
-        </pc:cxnChg>
-        <pc:cxnChg chg="add del mod">
-          <ac:chgData name="Li, Hanchen F" userId="3aee791e-6a2d-4da7-a77b-fbdf7bf15886" providerId="ADAL" clId="{CDC5B0EF-6BEB-4658-A9FF-CB66F6FA6C1E}" dt="2025-05-22T22:57:37.868" v="3001" actId="478"/>
-          <ac:cxnSpMkLst>
-            <pc:docMk/>
-            <pc:sldMk cId="2152317508" sldId="256"/>
-            <ac:cxnSpMk id="561" creationId="{66BDEC67-9807-7EB0-1D2F-0E548FBFE800}"/>
           </ac:cxnSpMkLst>
         </pc:cxnChg>
         <pc:cxnChg chg="add mod">
@@ -3230,23 +1710,23 @@
             <ac:cxnSpMk id="689" creationId="{6F97B8BC-4C0E-5980-22FE-67E841C54176}"/>
           </ac:cxnSpMkLst>
         </pc:cxnChg>
-        <pc:cxnChg chg="mod">
-          <ac:chgData name="Li, Hanchen F" userId="3aee791e-6a2d-4da7-a77b-fbdf7bf15886" providerId="ADAL" clId="{CDC5B0EF-6BEB-4658-A9FF-CB66F6FA6C1E}" dt="2025-05-22T23:41:51.547" v="3805" actId="21"/>
-          <ac:cxnSpMkLst>
-            <pc:docMk/>
-            <pc:sldMk cId="2152317508" sldId="256"/>
-            <ac:cxnSpMk id="722" creationId="{84B8A443-77A0-9DF4-F52D-40D4E67FB021}"/>
-          </ac:cxnSpMkLst>
-        </pc:cxnChg>
       </pc:sldChg>
       <pc:sldChg chg="addSp delSp modSp add mod">
-        <pc:chgData name="Li, Hanchen F" userId="3aee791e-6a2d-4da7-a77b-fbdf7bf15886" providerId="ADAL" clId="{CDC5B0EF-6BEB-4658-A9FF-CB66F6FA6C1E}" dt="2025-05-23T16:58:46.410" v="7922" actId="14100"/>
+        <pc:chgData name="Li, Hanchen F" userId="3aee791e-6a2d-4da7-a77b-fbdf7bf15886" providerId="ADAL" clId="{CDC5B0EF-6BEB-4658-A9FF-CB66F6FA6C1E}" dt="2025-05-24T01:05:10.287" v="8733" actId="20577"/>
         <pc:sldMkLst>
           <pc:docMk/>
           <pc:sldMk cId="3137520481" sldId="257"/>
         </pc:sldMkLst>
         <pc:spChg chg="add mod">
-          <ac:chgData name="Li, Hanchen F" userId="3aee791e-6a2d-4da7-a77b-fbdf7bf15886" providerId="ADAL" clId="{CDC5B0EF-6BEB-4658-A9FF-CB66F6FA6C1E}" dt="2025-05-22T23:56:20.213" v="5838" actId="20577"/>
+          <ac:chgData name="Li, Hanchen F" userId="3aee791e-6a2d-4da7-a77b-fbdf7bf15886" providerId="ADAL" clId="{CDC5B0EF-6BEB-4658-A9FF-CB66F6FA6C1E}" dt="2025-05-24T00:33:27.897" v="8254" actId="1076"/>
+          <ac:spMkLst>
+            <pc:docMk/>
+            <pc:sldMk cId="3137520481" sldId="257"/>
+            <ac:spMk id="6" creationId="{9700E06F-C76F-24DC-265D-8FF8611C4CE5}"/>
+          </ac:spMkLst>
+        </pc:spChg>
+        <pc:spChg chg="add mod">
+          <ac:chgData name="Li, Hanchen F" userId="3aee791e-6a2d-4da7-a77b-fbdf7bf15886" providerId="ADAL" clId="{CDC5B0EF-6BEB-4658-A9FF-CB66F6FA6C1E}" dt="2025-05-24T00:35:36" v="8285" actId="1076"/>
           <ac:spMkLst>
             <pc:docMk/>
             <pc:sldMk cId="3137520481" sldId="257"/>
@@ -3269,16 +1749,8 @@
             <ac:spMk id="12" creationId="{1D56ECA4-C46A-60CB-1C38-972A8E49F49A}"/>
           </ac:spMkLst>
         </pc:spChg>
-        <pc:spChg chg="mod">
-          <ac:chgData name="Li, Hanchen F" userId="3aee791e-6a2d-4da7-a77b-fbdf7bf15886" providerId="ADAL" clId="{CDC5B0EF-6BEB-4658-A9FF-CB66F6FA6C1E}" dt="2025-05-22T23:57:22.554" v="5854"/>
-          <ac:spMkLst>
-            <pc:docMk/>
-            <pc:sldMk cId="3137520481" sldId="257"/>
-            <ac:spMk id="16" creationId="{69B6103D-9E2E-44B5-2772-5DAFDEB0B2B1}"/>
-          </ac:spMkLst>
-        </pc:spChg>
         <pc:spChg chg="add del mod">
-          <ac:chgData name="Li, Hanchen F" userId="3aee791e-6a2d-4da7-a77b-fbdf7bf15886" providerId="ADAL" clId="{CDC5B0EF-6BEB-4658-A9FF-CB66F6FA6C1E}" dt="2025-05-22T23:57:50.856" v="5867" actId="1076"/>
+          <ac:chgData name="Li, Hanchen F" userId="3aee791e-6a2d-4da7-a77b-fbdf7bf15886" providerId="ADAL" clId="{CDC5B0EF-6BEB-4658-A9FF-CB66F6FA6C1E}" dt="2025-05-23T23:40:13.163" v="8223" actId="1076"/>
           <ac:spMkLst>
             <pc:docMk/>
             <pc:sldMk cId="3137520481" sldId="257"/>
@@ -3286,23 +1758,23 @@
           </ac:spMkLst>
         </pc:spChg>
         <pc:spChg chg="add del mod">
-          <ac:chgData name="Li, Hanchen F" userId="3aee791e-6a2d-4da7-a77b-fbdf7bf15886" providerId="ADAL" clId="{CDC5B0EF-6BEB-4658-A9FF-CB66F6FA6C1E}" dt="2025-05-22T23:57:53.110" v="5868" actId="478"/>
+          <ac:chgData name="Li, Hanchen F" userId="3aee791e-6a2d-4da7-a77b-fbdf7bf15886" providerId="ADAL" clId="{CDC5B0EF-6BEB-4658-A9FF-CB66F6FA6C1E}" dt="2025-05-24T00:35:27.987" v="8282" actId="478"/>
           <ac:spMkLst>
             <pc:docMk/>
             <pc:sldMk cId="3137520481" sldId="257"/>
-            <ac:spMk id="21" creationId="{68BD032E-8C12-E0C8-3F10-A544E66D3BC5}"/>
+            <ac:spMk id="21" creationId="{8D035917-F096-4DBF-E18C-4F6BA757D7F9}"/>
+          </ac:spMkLst>
+        </pc:spChg>
+        <pc:spChg chg="add mod">
+          <ac:chgData name="Li, Hanchen F" userId="3aee791e-6a2d-4da7-a77b-fbdf7bf15886" providerId="ADAL" clId="{CDC5B0EF-6BEB-4658-A9FF-CB66F6FA6C1E}" dt="2025-05-24T00:41:58.135" v="8407" actId="1076"/>
+          <ac:spMkLst>
+            <pc:docMk/>
+            <pc:sldMk cId="3137520481" sldId="257"/>
+            <ac:spMk id="22" creationId="{4226639B-0001-43F7-B0EA-0D705E8B5890}"/>
           </ac:spMkLst>
         </pc:spChg>
         <pc:spChg chg="add del mod">
-          <ac:chgData name="Li, Hanchen F" userId="3aee791e-6a2d-4da7-a77b-fbdf7bf15886" providerId="ADAL" clId="{CDC5B0EF-6BEB-4658-A9FF-CB66F6FA6C1E}" dt="2025-05-22T23:57:54.344" v="5869" actId="478"/>
-          <ac:spMkLst>
-            <pc:docMk/>
-            <pc:sldMk cId="3137520481" sldId="257"/>
-            <ac:spMk id="22" creationId="{3FB4E32F-E293-472D-6102-2BDE0FCD7D71}"/>
-          </ac:spMkLst>
-        </pc:spChg>
-        <pc:spChg chg="add del mod">
-          <ac:chgData name="Li, Hanchen F" userId="3aee791e-6a2d-4da7-a77b-fbdf7bf15886" providerId="ADAL" clId="{CDC5B0EF-6BEB-4658-A9FF-CB66F6FA6C1E}" dt="2025-05-22T23:58:08.725" v="5874" actId="1076"/>
+          <ac:chgData name="Li, Hanchen F" userId="3aee791e-6a2d-4da7-a77b-fbdf7bf15886" providerId="ADAL" clId="{CDC5B0EF-6BEB-4658-A9FF-CB66F6FA6C1E}" dt="2025-05-23T23:40:28.501" v="8232" actId="1076"/>
           <ac:spMkLst>
             <pc:docMk/>
             <pc:sldMk cId="3137520481" sldId="257"/>
@@ -3310,21 +1782,13 @@
           </ac:spMkLst>
         </pc:spChg>
         <pc:spChg chg="add mod">
-          <ac:chgData name="Li, Hanchen F" userId="3aee791e-6a2d-4da7-a77b-fbdf7bf15886" providerId="ADAL" clId="{CDC5B0EF-6BEB-4658-A9FF-CB66F6FA6C1E}" dt="2025-05-22T23:58:19.125" v="5878" actId="1076"/>
+          <ac:chgData name="Li, Hanchen F" userId="3aee791e-6a2d-4da7-a77b-fbdf7bf15886" providerId="ADAL" clId="{CDC5B0EF-6BEB-4658-A9FF-CB66F6FA6C1E}" dt="2025-05-23T23:40:26.524" v="8231" actId="1076"/>
           <ac:spMkLst>
             <pc:docMk/>
             <pc:sldMk cId="3137520481" sldId="257"/>
             <ac:spMk id="24" creationId="{353B4A2E-4D26-C115-B554-FEEE96FAC67E}"/>
           </ac:spMkLst>
         </pc:spChg>
-        <pc:spChg chg="add del mod">
-          <ac:chgData name="Li, Hanchen F" userId="3aee791e-6a2d-4da7-a77b-fbdf7bf15886" providerId="ADAL" clId="{CDC5B0EF-6BEB-4658-A9FF-CB66F6FA6C1E}" dt="2025-05-22T23:57:46.846" v="5866" actId="478"/>
-          <ac:spMkLst>
-            <pc:docMk/>
-            <pc:sldMk cId="3137520481" sldId="257"/>
-            <ac:spMk id="25" creationId="{82C1C871-CBF8-5981-0A77-F2619FBE08D9}"/>
-          </ac:spMkLst>
-        </pc:spChg>
         <pc:spChg chg="add mod">
           <ac:chgData name="Li, Hanchen F" userId="3aee791e-6a2d-4da7-a77b-fbdf7bf15886" providerId="ADAL" clId="{CDC5B0EF-6BEB-4658-A9FF-CB66F6FA6C1E}" dt="2025-05-23T00:02:20.669" v="5954" actId="1076"/>
           <ac:spMkLst>
@@ -3358,7 +1822,23 @@
           </ac:spMkLst>
         </pc:spChg>
         <pc:spChg chg="add mod">
-          <ac:chgData name="Li, Hanchen F" userId="3aee791e-6a2d-4da7-a77b-fbdf7bf15886" providerId="ADAL" clId="{CDC5B0EF-6BEB-4658-A9FF-CB66F6FA6C1E}" dt="2025-05-23T00:02:54.172" v="5964" actId="1076"/>
+          <ac:chgData name="Li, Hanchen F" userId="3aee791e-6a2d-4da7-a77b-fbdf7bf15886" providerId="ADAL" clId="{CDC5B0EF-6BEB-4658-A9FF-CB66F6FA6C1E}" dt="2025-05-24T00:36:57.438" v="8332" actId="20577"/>
+          <ac:spMkLst>
+            <pc:docMk/>
+            <pc:sldMk cId="3137520481" sldId="257"/>
+            <ac:spMk id="35" creationId="{5B806E30-E46B-7D19-A740-208391EA72B9}"/>
+          </ac:spMkLst>
+        </pc:spChg>
+        <pc:spChg chg="add mod">
+          <ac:chgData name="Li, Hanchen F" userId="3aee791e-6a2d-4da7-a77b-fbdf7bf15886" providerId="ADAL" clId="{CDC5B0EF-6BEB-4658-A9FF-CB66F6FA6C1E}" dt="2025-05-24T00:41:13.792" v="8391" actId="1076"/>
+          <ac:spMkLst>
+            <pc:docMk/>
+            <pc:sldMk cId="3137520481" sldId="257"/>
+            <ac:spMk id="41" creationId="{784151CB-C975-343E-6987-A065C851DAAF}"/>
+          </ac:spMkLst>
+        </pc:spChg>
+        <pc:spChg chg="add mod">
+          <ac:chgData name="Li, Hanchen F" userId="3aee791e-6a2d-4da7-a77b-fbdf7bf15886" providerId="ADAL" clId="{CDC5B0EF-6BEB-4658-A9FF-CB66F6FA6C1E}" dt="2025-05-24T00:48:05.629" v="8668" actId="1076"/>
           <ac:spMkLst>
             <pc:docMk/>
             <pc:sldMk cId="3137520481" sldId="257"/>
@@ -3374,7 +1854,7 @@
           </ac:spMkLst>
         </pc:spChg>
         <pc:spChg chg="add mod">
-          <ac:chgData name="Li, Hanchen F" userId="3aee791e-6a2d-4da7-a77b-fbdf7bf15886" providerId="ADAL" clId="{CDC5B0EF-6BEB-4658-A9FF-CB66F6FA6C1E}" dt="2025-05-23T00:04:50.392" v="6003"/>
+          <ac:chgData name="Li, Hanchen F" userId="3aee791e-6a2d-4da7-a77b-fbdf7bf15886" providerId="ADAL" clId="{CDC5B0EF-6BEB-4658-A9FF-CB66F6FA6C1E}" dt="2025-05-24T01:05:08.206" v="8732" actId="20577"/>
           <ac:spMkLst>
             <pc:docMk/>
             <pc:sldMk cId="3137520481" sldId="257"/>
@@ -3382,133 +1862,93 @@
           </ac:spMkLst>
         </pc:spChg>
         <pc:spChg chg="add mod">
-          <ac:chgData name="Li, Hanchen F" userId="3aee791e-6a2d-4da7-a77b-fbdf7bf15886" providerId="ADAL" clId="{CDC5B0EF-6BEB-4658-A9FF-CB66F6FA6C1E}" dt="2025-05-23T00:04:53.432" v="6004" actId="1076"/>
+          <ac:chgData name="Li, Hanchen F" userId="3aee791e-6a2d-4da7-a77b-fbdf7bf15886" providerId="ADAL" clId="{CDC5B0EF-6BEB-4658-A9FF-CB66F6FA6C1E}" dt="2025-05-24T01:05:10.287" v="8733" actId="20577"/>
           <ac:spMkLst>
             <pc:docMk/>
             <pc:sldMk cId="3137520481" sldId="257"/>
             <ac:spMk id="53" creationId="{044A02A3-8FD4-9AA5-F9D6-8FC76EED89B4}"/>
           </ac:spMkLst>
         </pc:spChg>
-        <pc:spChg chg="del">
-          <ac:chgData name="Li, Hanchen F" userId="3aee791e-6a2d-4da7-a77b-fbdf7bf15886" providerId="ADAL" clId="{CDC5B0EF-6BEB-4658-A9FF-CB66F6FA6C1E}" dt="2025-05-22T23:55:25.259" v="5818" actId="478"/>
+        <pc:spChg chg="add mod">
+          <ac:chgData name="Li, Hanchen F" userId="3aee791e-6a2d-4da7-a77b-fbdf7bf15886" providerId="ADAL" clId="{CDC5B0EF-6BEB-4658-A9FF-CB66F6FA6C1E}" dt="2025-05-24T00:42:04.199" v="8408" actId="1076"/>
           <ac:spMkLst>
             <pc:docMk/>
             <pc:sldMk cId="3137520481" sldId="257"/>
-            <ac:spMk id="513" creationId="{CC70CC15-81F3-831C-1F5B-8BADE05D2440}"/>
-          </ac:spMkLst>
-        </pc:spChg>
-        <pc:spChg chg="del">
-          <ac:chgData name="Li, Hanchen F" userId="3aee791e-6a2d-4da7-a77b-fbdf7bf15886" providerId="ADAL" clId="{CDC5B0EF-6BEB-4658-A9FF-CB66F6FA6C1E}" dt="2025-05-22T23:55:25.259" v="5818" actId="478"/>
+            <ac:spMk id="55" creationId="{6A77F17C-8C65-7FDA-DAC3-98A8468E9257}"/>
+          </ac:spMkLst>
+        </pc:spChg>
+        <pc:spChg chg="add mod">
+          <ac:chgData name="Li, Hanchen F" userId="3aee791e-6a2d-4da7-a77b-fbdf7bf15886" providerId="ADAL" clId="{CDC5B0EF-6BEB-4658-A9FF-CB66F6FA6C1E}" dt="2025-05-24T00:47:29.241" v="8652" actId="207"/>
           <ac:spMkLst>
             <pc:docMk/>
             <pc:sldMk cId="3137520481" sldId="257"/>
-            <ac:spMk id="557" creationId="{66515051-D552-F32C-022A-79ADC602B748}"/>
-          </ac:spMkLst>
-        </pc:spChg>
-        <pc:spChg chg="del">
-          <ac:chgData name="Li, Hanchen F" userId="3aee791e-6a2d-4da7-a77b-fbdf7bf15886" providerId="ADAL" clId="{CDC5B0EF-6BEB-4658-A9FF-CB66F6FA6C1E}" dt="2025-05-22T23:55:25.259" v="5818" actId="478"/>
+            <ac:spMk id="74" creationId="{5B5F92B9-05C2-A7CD-9D02-AB11C8B66D90}"/>
+          </ac:spMkLst>
+        </pc:spChg>
+        <pc:spChg chg="add mod">
+          <ac:chgData name="Li, Hanchen F" userId="3aee791e-6a2d-4da7-a77b-fbdf7bf15886" providerId="ADAL" clId="{CDC5B0EF-6BEB-4658-A9FF-CB66F6FA6C1E}" dt="2025-05-24T00:42:46.034" v="8523" actId="1076"/>
           <ac:spMkLst>
             <pc:docMk/>
             <pc:sldMk cId="3137520481" sldId="257"/>
-            <ac:spMk id="574" creationId="{7FF54E02-5EF4-907F-FB1C-C0D0F409B93C}"/>
-          </ac:spMkLst>
-        </pc:spChg>
-        <pc:spChg chg="del">
-          <ac:chgData name="Li, Hanchen F" userId="3aee791e-6a2d-4da7-a77b-fbdf7bf15886" providerId="ADAL" clId="{CDC5B0EF-6BEB-4658-A9FF-CB66F6FA6C1E}" dt="2025-05-22T23:55:25.259" v="5818" actId="478"/>
+            <ac:spMk id="75" creationId="{FB23F848-8C8F-1BC6-1398-C7A8E6AD91DD}"/>
+          </ac:spMkLst>
+        </pc:spChg>
+        <pc:spChg chg="add mod">
+          <ac:chgData name="Li, Hanchen F" userId="3aee791e-6a2d-4da7-a77b-fbdf7bf15886" providerId="ADAL" clId="{CDC5B0EF-6BEB-4658-A9FF-CB66F6FA6C1E}" dt="2025-05-24T00:46:35.473" v="8552" actId="1076"/>
           <ac:spMkLst>
             <pc:docMk/>
             <pc:sldMk cId="3137520481" sldId="257"/>
-            <ac:spMk id="578" creationId="{803CCF95-7BDF-7A8F-B05C-45583BB4AC9C}"/>
-          </ac:spMkLst>
-        </pc:spChg>
-        <pc:spChg chg="del">
-          <ac:chgData name="Li, Hanchen F" userId="3aee791e-6a2d-4da7-a77b-fbdf7bf15886" providerId="ADAL" clId="{CDC5B0EF-6BEB-4658-A9FF-CB66F6FA6C1E}" dt="2025-05-22T23:55:25.259" v="5818" actId="478"/>
+            <ac:spMk id="79" creationId="{F25CBC90-FA6E-4164-2AF0-F783CF6072D2}"/>
+          </ac:spMkLst>
+        </pc:spChg>
+        <pc:spChg chg="add mod">
+          <ac:chgData name="Li, Hanchen F" userId="3aee791e-6a2d-4da7-a77b-fbdf7bf15886" providerId="ADAL" clId="{CDC5B0EF-6BEB-4658-A9FF-CB66F6FA6C1E}" dt="2025-05-24T00:45:55.994" v="8537" actId="1076"/>
           <ac:spMkLst>
             <pc:docMk/>
             <pc:sldMk cId="3137520481" sldId="257"/>
-            <ac:spMk id="589" creationId="{125A4915-84E0-9BE4-A82E-72692BD5DD13}"/>
-          </ac:spMkLst>
-        </pc:spChg>
-        <pc:spChg chg="del">
-          <ac:chgData name="Li, Hanchen F" userId="3aee791e-6a2d-4da7-a77b-fbdf7bf15886" providerId="ADAL" clId="{CDC5B0EF-6BEB-4658-A9FF-CB66F6FA6C1E}" dt="2025-05-22T23:55:25.259" v="5818" actId="478"/>
+            <ac:spMk id="80" creationId="{940B8AAC-264C-6DA7-6123-0345AF11E6BA}"/>
+          </ac:spMkLst>
+        </pc:spChg>
+        <pc:spChg chg="add mod">
+          <ac:chgData name="Li, Hanchen F" userId="3aee791e-6a2d-4da7-a77b-fbdf7bf15886" providerId="ADAL" clId="{CDC5B0EF-6BEB-4658-A9FF-CB66F6FA6C1E}" dt="2025-05-24T00:46:01.551" v="8539" actId="1076"/>
           <ac:spMkLst>
             <pc:docMk/>
             <pc:sldMk cId="3137520481" sldId="257"/>
-            <ac:spMk id="674" creationId="{74E941D2-F751-191B-532C-4948E903A9E1}"/>
-          </ac:spMkLst>
-        </pc:spChg>
-        <pc:spChg chg="del">
-          <ac:chgData name="Li, Hanchen F" userId="3aee791e-6a2d-4da7-a77b-fbdf7bf15886" providerId="ADAL" clId="{CDC5B0EF-6BEB-4658-A9FF-CB66F6FA6C1E}" dt="2025-05-22T23:55:25.259" v="5818" actId="478"/>
+            <ac:spMk id="81" creationId="{B05312CD-F777-79FD-4B52-FD8F95ADB7C9}"/>
+          </ac:spMkLst>
+        </pc:spChg>
+        <pc:spChg chg="add mod">
+          <ac:chgData name="Li, Hanchen F" userId="3aee791e-6a2d-4da7-a77b-fbdf7bf15886" providerId="ADAL" clId="{CDC5B0EF-6BEB-4658-A9FF-CB66F6FA6C1E}" dt="2025-05-24T00:49:23.872" v="8680" actId="1076"/>
           <ac:spMkLst>
             <pc:docMk/>
             <pc:sldMk cId="3137520481" sldId="257"/>
-            <ac:spMk id="676" creationId="{D3BE6559-755D-78AD-2AC7-7921EE886AFC}"/>
-          </ac:spMkLst>
-        </pc:spChg>
-        <pc:spChg chg="del">
-          <ac:chgData name="Li, Hanchen F" userId="3aee791e-6a2d-4da7-a77b-fbdf7bf15886" providerId="ADAL" clId="{CDC5B0EF-6BEB-4658-A9FF-CB66F6FA6C1E}" dt="2025-05-22T23:55:28.546" v="5822" actId="478"/>
+            <ac:spMk id="95" creationId="{08AC8145-7DDF-0E51-D70F-B0BCCD616ED5}"/>
+          </ac:spMkLst>
+        </pc:spChg>
+        <pc:spChg chg="add mod">
+          <ac:chgData name="Li, Hanchen F" userId="3aee791e-6a2d-4da7-a77b-fbdf7bf15886" providerId="ADAL" clId="{CDC5B0EF-6BEB-4658-A9FF-CB66F6FA6C1E}" dt="2025-05-24T00:50:53.176" v="8718" actId="1035"/>
           <ac:spMkLst>
             <pc:docMk/>
             <pc:sldMk cId="3137520481" sldId="257"/>
-            <ac:spMk id="685" creationId="{85BB7845-0E68-4C3B-22D0-B05E4447C648}"/>
-          </ac:spMkLst>
-        </pc:spChg>
-        <pc:spChg chg="del">
-          <ac:chgData name="Li, Hanchen F" userId="3aee791e-6a2d-4da7-a77b-fbdf7bf15886" providerId="ADAL" clId="{CDC5B0EF-6BEB-4658-A9FF-CB66F6FA6C1E}" dt="2025-05-22T23:55:25.259" v="5818" actId="478"/>
-          <ac:spMkLst>
-            <pc:docMk/>
-            <pc:sldMk cId="3137520481" sldId="257"/>
-            <ac:spMk id="699" creationId="{61A5D2FF-0570-8015-F40B-1A8B6807CC37}"/>
-          </ac:spMkLst>
-        </pc:spChg>
-        <pc:spChg chg="del">
-          <ac:chgData name="Li, Hanchen F" userId="3aee791e-6a2d-4da7-a77b-fbdf7bf15886" providerId="ADAL" clId="{CDC5B0EF-6BEB-4658-A9FF-CB66F6FA6C1E}" dt="2025-05-22T23:55:25.259" v="5818" actId="478"/>
-          <ac:spMkLst>
-            <pc:docMk/>
-            <pc:sldMk cId="3137520481" sldId="257"/>
-            <ac:spMk id="733" creationId="{B7B937E8-0247-B63B-0DEF-3E52064A7B62}"/>
-          </ac:spMkLst>
-        </pc:spChg>
-        <pc:spChg chg="del">
-          <ac:chgData name="Li, Hanchen F" userId="3aee791e-6a2d-4da7-a77b-fbdf7bf15886" providerId="ADAL" clId="{CDC5B0EF-6BEB-4658-A9FF-CB66F6FA6C1E}" dt="2025-05-22T23:55:25.259" v="5818" actId="478"/>
-          <ac:spMkLst>
-            <pc:docMk/>
-            <pc:sldMk cId="3137520481" sldId="257"/>
-            <ac:spMk id="738" creationId="{D8B67F8D-5BC8-D250-2EC7-2E9BC501D33F}"/>
-          </ac:spMkLst>
-        </pc:spChg>
-        <pc:spChg chg="del">
-          <ac:chgData name="Li, Hanchen F" userId="3aee791e-6a2d-4da7-a77b-fbdf7bf15886" providerId="ADAL" clId="{CDC5B0EF-6BEB-4658-A9FF-CB66F6FA6C1E}" dt="2025-05-22T23:55:26.594" v="5819" actId="478"/>
-          <ac:spMkLst>
-            <pc:docMk/>
-            <pc:sldMk cId="3137520481" sldId="257"/>
-            <ac:spMk id="745" creationId="{D4BA42E6-D900-1C7E-63AC-DB6E716824F5}"/>
-          </ac:spMkLst>
-        </pc:spChg>
-        <pc:grpChg chg="add del mod">
-          <ac:chgData name="Li, Hanchen F" userId="3aee791e-6a2d-4da7-a77b-fbdf7bf15886" providerId="ADAL" clId="{CDC5B0EF-6BEB-4658-A9FF-CB66F6FA6C1E}" dt="2025-05-22T23:57:45" v="5865" actId="478"/>
-          <ac:grpSpMkLst>
-            <pc:docMk/>
-            <pc:sldMk cId="3137520481" sldId="257"/>
-            <ac:grpSpMk id="15" creationId="{0E0BC0E4-8790-CA17-0C47-FAA07F664D84}"/>
-          </ac:grpSpMkLst>
-        </pc:grpChg>
-        <pc:grpChg chg="del mod">
-          <ac:chgData name="Li, Hanchen F" userId="3aee791e-6a2d-4da7-a77b-fbdf7bf15886" providerId="ADAL" clId="{CDC5B0EF-6BEB-4658-A9FF-CB66F6FA6C1E}" dt="2025-05-22T23:55:27.653" v="5821" actId="478"/>
-          <ac:grpSpMkLst>
-            <pc:docMk/>
-            <pc:sldMk cId="3137520481" sldId="257"/>
-            <ac:grpSpMk id="478" creationId="{69001A84-224C-161A-735E-D43B68617784}"/>
-          </ac:grpSpMkLst>
-        </pc:grpChg>
-        <pc:picChg chg="add mod">
-          <ac:chgData name="Li, Hanchen F" userId="3aee791e-6a2d-4da7-a77b-fbdf7bf15886" providerId="ADAL" clId="{CDC5B0EF-6BEB-4658-A9FF-CB66F6FA6C1E}" dt="2025-05-23T00:03:03.309" v="5967" actId="1076"/>
+            <ac:spMk id="98" creationId="{757A896F-48AA-74B1-98EB-B77E3A4F9541}"/>
+          </ac:spMkLst>
+        </pc:spChg>
+        <pc:picChg chg="add del mod">
+          <ac:chgData name="Li, Hanchen F" userId="3aee791e-6a2d-4da7-a77b-fbdf7bf15886" providerId="ADAL" clId="{CDC5B0EF-6BEB-4658-A9FF-CB66F6FA6C1E}" dt="2025-05-24T00:49:14.429" v="8678" actId="1076"/>
           <ac:picMkLst>
             <pc:docMk/>
             <pc:sldMk cId="3137520481" sldId="257"/>
             <ac:picMk id="3" creationId="{4CEAE2BB-ED8C-A2AD-B6C5-083DFBB5BF78}"/>
           </ac:picMkLst>
         </pc:picChg>
+        <pc:cxnChg chg="add mod">
+          <ac:chgData name="Li, Hanchen F" userId="3aee791e-6a2d-4da7-a77b-fbdf7bf15886" providerId="ADAL" clId="{CDC5B0EF-6BEB-4658-A9FF-CB66F6FA6C1E}" dt="2025-05-24T00:32:44.798" v="8240" actId="14100"/>
+          <ac:cxnSpMkLst>
+            <pc:docMk/>
+            <pc:sldMk cId="3137520481" sldId="257"/>
+            <ac:cxnSpMk id="2" creationId="{A4B13EC4-2D02-F1F2-C310-288E80243905}"/>
+          </ac:cxnSpMkLst>
+        </pc:cxnChg>
         <pc:cxnChg chg="add mod">
           <ac:chgData name="Li, Hanchen F" userId="3aee791e-6a2d-4da7-a77b-fbdf7bf15886" providerId="ADAL" clId="{CDC5B0EF-6BEB-4658-A9FF-CB66F6FA6C1E}" dt="2025-05-23T16:58:02.232" v="7857" actId="1076"/>
           <ac:cxnSpMkLst>
@@ -3525,14 +1965,6 @@
             <ac:cxnSpMk id="4" creationId="{0E43F9AE-287E-36BB-34F6-C6F92169902D}"/>
           </ac:cxnSpMkLst>
         </pc:cxnChg>
-        <pc:cxnChg chg="add del">
-          <ac:chgData name="Li, Hanchen F" userId="3aee791e-6a2d-4da7-a77b-fbdf7bf15886" providerId="ADAL" clId="{CDC5B0EF-6BEB-4658-A9FF-CB66F6FA6C1E}" dt="2025-05-22T23:56:47.766" v="5840" actId="478"/>
-          <ac:cxnSpMkLst>
-            <pc:docMk/>
-            <pc:sldMk cId="3137520481" sldId="257"/>
-            <ac:cxnSpMk id="10" creationId="{078D4133-A84D-577D-111B-C035DA0D5290}"/>
-          </ac:cxnSpMkLst>
-        </pc:cxnChg>
         <pc:cxnChg chg="add mod">
           <ac:chgData name="Li, Hanchen F" userId="3aee791e-6a2d-4da7-a77b-fbdf7bf15886" providerId="ADAL" clId="{CDC5B0EF-6BEB-4658-A9FF-CB66F6FA6C1E}" dt="2025-05-22T23:58:29.467" v="5879" actId="208"/>
           <ac:cxnSpMkLst>
@@ -3550,7 +1982,23 @@
           </ac:cxnSpMkLst>
         </pc:cxnChg>
         <pc:cxnChg chg="add mod">
-          <ac:chgData name="Li, Hanchen F" userId="3aee791e-6a2d-4da7-a77b-fbdf7bf15886" providerId="ADAL" clId="{CDC5B0EF-6BEB-4658-A9FF-CB66F6FA6C1E}" dt="2025-05-22T23:59:54.843" v="5901" actId="14100"/>
+          <ac:chgData name="Li, Hanchen F" userId="3aee791e-6a2d-4da7-a77b-fbdf7bf15886" providerId="ADAL" clId="{CDC5B0EF-6BEB-4658-A9FF-CB66F6FA6C1E}" dt="2025-05-24T00:41:51.625" v="8404" actId="1076"/>
+          <ac:cxnSpMkLst>
+            <pc:docMk/>
+            <pc:sldMk cId="3137520481" sldId="257"/>
+            <ac:cxnSpMk id="25" creationId="{585188A3-2425-D867-BB54-8713386C8D59}"/>
+          </ac:cxnSpMkLst>
+        </pc:cxnChg>
+        <pc:cxnChg chg="add mod">
+          <ac:chgData name="Li, Hanchen F" userId="3aee791e-6a2d-4da7-a77b-fbdf7bf15886" providerId="ADAL" clId="{CDC5B0EF-6BEB-4658-A9FF-CB66F6FA6C1E}" dt="2025-05-24T00:37:02.429" v="8333" actId="1076"/>
+          <ac:cxnSpMkLst>
+            <pc:docMk/>
+            <pc:sldMk cId="3137520481" sldId="257"/>
+            <ac:cxnSpMk id="30" creationId="{C0EE0300-66D0-0AA6-766D-E4F38CFC8D77}"/>
+          </ac:cxnSpMkLst>
+        </pc:cxnChg>
+        <pc:cxnChg chg="add mod">
+          <ac:chgData name="Li, Hanchen F" userId="3aee791e-6a2d-4da7-a77b-fbdf7bf15886" providerId="ADAL" clId="{CDC5B0EF-6BEB-4658-A9FF-CB66F6FA6C1E}" dt="2025-05-24T00:34:39.528" v="8270" actId="1076"/>
           <ac:cxnSpMkLst>
             <pc:docMk/>
             <pc:sldMk cId="3137520481" sldId="257"/>
@@ -3566,15 +2014,23 @@
           </ac:cxnSpMkLst>
         </pc:cxnChg>
         <pc:cxnChg chg="add mod">
-          <ac:chgData name="Li, Hanchen F" userId="3aee791e-6a2d-4da7-a77b-fbdf7bf15886" providerId="ADAL" clId="{CDC5B0EF-6BEB-4658-A9FF-CB66F6FA6C1E}" dt="2025-05-23T16:58:46.410" v="7922" actId="14100"/>
+          <ac:chgData name="Li, Hanchen F" userId="3aee791e-6a2d-4da7-a77b-fbdf7bf15886" providerId="ADAL" clId="{CDC5B0EF-6BEB-4658-A9FF-CB66F6FA6C1E}" dt="2025-05-24T00:41:45.401" v="8402" actId="14100"/>
+          <ac:cxnSpMkLst>
+            <pc:docMk/>
+            <pc:sldMk cId="3137520481" sldId="257"/>
+            <ac:cxnSpMk id="37" creationId="{0CFD51FD-AF08-0001-FA2A-150037603E7F}"/>
+          </ac:cxnSpMkLst>
+        </pc:cxnChg>
+        <pc:cxnChg chg="add mod">
+          <ac:chgData name="Li, Hanchen F" userId="3aee791e-6a2d-4da7-a77b-fbdf7bf15886" providerId="ADAL" clId="{CDC5B0EF-6BEB-4658-A9FF-CB66F6FA6C1E}" dt="2025-05-24T01:02:26.893" v="8731" actId="1076"/>
           <ac:cxnSpMkLst>
             <pc:docMk/>
             <pc:sldMk cId="3137520481" sldId="257"/>
             <ac:cxnSpMk id="40" creationId="{484BEFF4-71E7-8955-B2B8-36A0C5284C4D}"/>
           </ac:cxnSpMkLst>
         </pc:cxnChg>
-        <pc:cxnChg chg="add mod">
-          <ac:chgData name="Li, Hanchen F" userId="3aee791e-6a2d-4da7-a77b-fbdf7bf15886" providerId="ADAL" clId="{CDC5B0EF-6BEB-4658-A9FF-CB66F6FA6C1E}" dt="2025-05-23T00:02:08.312" v="5951" actId="14100"/>
+        <pc:cxnChg chg="add del mod">
+          <ac:chgData name="Li, Hanchen F" userId="3aee791e-6a2d-4da7-a77b-fbdf7bf15886" providerId="ADAL" clId="{CDC5B0EF-6BEB-4658-A9FF-CB66F6FA6C1E}" dt="2025-05-24T00:47:38.439" v="8662" actId="478"/>
           <ac:cxnSpMkLst>
             <pc:docMk/>
             <pc:sldMk cId="3137520481" sldId="257"/>
@@ -3582,11 +2038,19 @@
           </ac:cxnSpMkLst>
         </pc:cxnChg>
         <pc:cxnChg chg="add mod">
-          <ac:chgData name="Li, Hanchen F" userId="3aee791e-6a2d-4da7-a77b-fbdf7bf15886" providerId="ADAL" clId="{CDC5B0EF-6BEB-4658-A9FF-CB66F6FA6C1E}" dt="2025-05-23T16:58:45.916" v="7921" actId="1076"/>
+          <ac:chgData name="Li, Hanchen F" userId="3aee791e-6a2d-4da7-a77b-fbdf7bf15886" providerId="ADAL" clId="{CDC5B0EF-6BEB-4658-A9FF-CB66F6FA6C1E}" dt="2025-05-24T00:47:52.516" v="8666" actId="14100"/>
           <ac:cxnSpMkLst>
             <pc:docMk/>
             <pc:sldMk cId="3137520481" sldId="257"/>
             <ac:cxnSpMk id="44" creationId="{D7B098D4-15C3-C67F-AC23-E46157C0BE33}"/>
+          </ac:cxnSpMkLst>
+        </pc:cxnChg>
+        <pc:cxnChg chg="add mod">
+          <ac:chgData name="Li, Hanchen F" userId="3aee791e-6a2d-4da7-a77b-fbdf7bf15886" providerId="ADAL" clId="{CDC5B0EF-6BEB-4658-A9FF-CB66F6FA6C1E}" dt="2025-05-24T00:41:43.285" v="8401" actId="14100"/>
+          <ac:cxnSpMkLst>
+            <pc:docMk/>
+            <pc:sldMk cId="3137520481" sldId="257"/>
+            <ac:cxnSpMk id="46" creationId="{DD3F70FD-8DC4-00CB-65BE-08E8228B12BA}"/>
           </ac:cxnSpMkLst>
         </pc:cxnChg>
         <pc:cxnChg chg="add mod">
@@ -3603,6 +2067,94 @@
             <pc:docMk/>
             <pc:sldMk cId="3137520481" sldId="257"/>
             <ac:cxnSpMk id="49" creationId="{0FBCA506-360C-E9E1-0741-ADFB5D682755}"/>
+          </ac:cxnSpMkLst>
+        </pc:cxnChg>
+        <pc:cxnChg chg="add del mod">
+          <ac:chgData name="Li, Hanchen F" userId="3aee791e-6a2d-4da7-a77b-fbdf7bf15886" providerId="ADAL" clId="{CDC5B0EF-6BEB-4658-A9FF-CB66F6FA6C1E}" dt="2025-05-24T00:40:40.796" v="8382" actId="478"/>
+          <ac:cxnSpMkLst>
+            <pc:docMk/>
+            <pc:sldMk cId="3137520481" sldId="257"/>
+            <ac:cxnSpMk id="57" creationId="{A7D1F15E-D124-4F64-7F2D-EAE66D993939}"/>
+          </ac:cxnSpMkLst>
+        </pc:cxnChg>
+        <pc:cxnChg chg="add del mod">
+          <ac:chgData name="Li, Hanchen F" userId="3aee791e-6a2d-4da7-a77b-fbdf7bf15886" providerId="ADAL" clId="{CDC5B0EF-6BEB-4658-A9FF-CB66F6FA6C1E}" dt="2025-05-24T00:40:40.796" v="8382" actId="478"/>
+          <ac:cxnSpMkLst>
+            <pc:docMk/>
+            <pc:sldMk cId="3137520481" sldId="257"/>
+            <ac:cxnSpMk id="58" creationId="{EBFA7DC6-BCD5-A730-BCC8-F29C1B2565A5}"/>
+          </ac:cxnSpMkLst>
+        </pc:cxnChg>
+        <pc:cxnChg chg="add mod">
+          <ac:chgData name="Li, Hanchen F" userId="3aee791e-6a2d-4da7-a77b-fbdf7bf15886" providerId="ADAL" clId="{CDC5B0EF-6BEB-4658-A9FF-CB66F6FA6C1E}" dt="2025-05-24T00:46:54.637" v="8631" actId="14100"/>
+          <ac:cxnSpMkLst>
+            <pc:docMk/>
+            <pc:sldMk cId="3137520481" sldId="257"/>
+            <ac:cxnSpMk id="59" creationId="{F10ACB7C-C2E9-4CE3-47D4-C342C45DC8E8}"/>
+          </ac:cxnSpMkLst>
+        </pc:cxnChg>
+        <pc:cxnChg chg="add mod">
+          <ac:chgData name="Li, Hanchen F" userId="3aee791e-6a2d-4da7-a77b-fbdf7bf15886" providerId="ADAL" clId="{CDC5B0EF-6BEB-4658-A9FF-CB66F6FA6C1E}" dt="2025-05-24T00:41:36.338" v="8398" actId="14100"/>
+          <ac:cxnSpMkLst>
+            <pc:docMk/>
+            <pc:sldMk cId="3137520481" sldId="257"/>
+            <ac:cxnSpMk id="61" creationId="{1E941D0A-CFDC-950C-79E6-4F2B6E587315}"/>
+          </ac:cxnSpMkLst>
+        </pc:cxnChg>
+        <pc:cxnChg chg="add mod">
+          <ac:chgData name="Li, Hanchen F" userId="3aee791e-6a2d-4da7-a77b-fbdf7bf15886" providerId="ADAL" clId="{CDC5B0EF-6BEB-4658-A9FF-CB66F6FA6C1E}" dt="2025-05-24T00:41:34.942" v="8397" actId="14100"/>
+          <ac:cxnSpMkLst>
+            <pc:docMk/>
+            <pc:sldMk cId="3137520481" sldId="257"/>
+            <ac:cxnSpMk id="64" creationId="{0583C440-FD44-1D4D-E1B6-A27D98A74663}"/>
+          </ac:cxnSpMkLst>
+        </pc:cxnChg>
+        <pc:cxnChg chg="add mod">
+          <ac:chgData name="Li, Hanchen F" userId="3aee791e-6a2d-4da7-a77b-fbdf7bf15886" providerId="ADAL" clId="{CDC5B0EF-6BEB-4658-A9FF-CB66F6FA6C1E}" dt="2025-05-24T00:45:30.413" v="8528" actId="14100"/>
+          <ac:cxnSpMkLst>
+            <pc:docMk/>
+            <pc:sldMk cId="3137520481" sldId="257"/>
+            <ac:cxnSpMk id="76" creationId="{5CC74EC5-5ABE-A8ED-F92F-DAC754155B70}"/>
+          </ac:cxnSpMkLst>
+        </pc:cxnChg>
+        <pc:cxnChg chg="add mod">
+          <ac:chgData name="Li, Hanchen F" userId="3aee791e-6a2d-4da7-a77b-fbdf7bf15886" providerId="ADAL" clId="{CDC5B0EF-6BEB-4658-A9FF-CB66F6FA6C1E}" dt="2025-05-24T00:45:38.349" v="8531" actId="1076"/>
+          <ac:cxnSpMkLst>
+            <pc:docMk/>
+            <pc:sldMk cId="3137520481" sldId="257"/>
+            <ac:cxnSpMk id="78" creationId="{9C6FC589-B5DF-51D8-0F64-2A528D9D4A35}"/>
+          </ac:cxnSpMkLst>
+        </pc:cxnChg>
+        <pc:cxnChg chg="add mod">
+          <ac:chgData name="Li, Hanchen F" userId="3aee791e-6a2d-4da7-a77b-fbdf7bf15886" providerId="ADAL" clId="{CDC5B0EF-6BEB-4658-A9FF-CB66F6FA6C1E}" dt="2025-05-24T00:46:23.374" v="8550" actId="14100"/>
+          <ac:cxnSpMkLst>
+            <pc:docMk/>
+            <pc:sldMk cId="3137520481" sldId="257"/>
+            <ac:cxnSpMk id="82" creationId="{0A5498A6-A0C0-9A85-CCD4-C67C21B5DF66}"/>
+          </ac:cxnSpMkLst>
+        </pc:cxnChg>
+        <pc:cxnChg chg="add mod">
+          <ac:chgData name="Li, Hanchen F" userId="3aee791e-6a2d-4da7-a77b-fbdf7bf15886" providerId="ADAL" clId="{CDC5B0EF-6BEB-4658-A9FF-CB66F6FA6C1E}" dt="2025-05-24T00:47:03.381" v="8633" actId="1076"/>
+          <ac:cxnSpMkLst>
+            <pc:docMk/>
+            <pc:sldMk cId="3137520481" sldId="257"/>
+            <ac:cxnSpMk id="88" creationId="{77CB9A69-00E2-54E3-E75E-B949E51E5BD8}"/>
+          </ac:cxnSpMkLst>
+        </pc:cxnChg>
+        <pc:cxnChg chg="add mod">
+          <ac:chgData name="Li, Hanchen F" userId="3aee791e-6a2d-4da7-a77b-fbdf7bf15886" providerId="ADAL" clId="{CDC5B0EF-6BEB-4658-A9FF-CB66F6FA6C1E}" dt="2025-05-24T00:49:12.704" v="8676" actId="14100"/>
+          <ac:cxnSpMkLst>
+            <pc:docMk/>
+            <pc:sldMk cId="3137520481" sldId="257"/>
+            <ac:cxnSpMk id="93" creationId="{5E9E2717-1417-D984-5CAC-9879A07784A5}"/>
+          </ac:cxnSpMkLst>
+        </pc:cxnChg>
+        <pc:cxnChg chg="add mod">
+          <ac:chgData name="Li, Hanchen F" userId="3aee791e-6a2d-4da7-a77b-fbdf7bf15886" providerId="ADAL" clId="{CDC5B0EF-6BEB-4658-A9FF-CB66F6FA6C1E}" dt="2025-05-24T00:50:49.367" v="8717" actId="1035"/>
+          <ac:cxnSpMkLst>
+            <pc:docMk/>
+            <pc:sldMk cId="3137520481" sldId="257"/>
+            <ac:cxnSpMk id="97" creationId="{B43CBE80-B09D-B56C-7A61-47630402BA28}"/>
           </ac:cxnSpMkLst>
         </pc:cxnChg>
       </pc:sldChg>
@@ -3612,126 +2164,6 @@
           <pc:docMk/>
           <pc:sldMk cId="4277506326" sldId="257"/>
         </pc:sldMkLst>
-        <pc:spChg chg="add del">
-          <ac:chgData name="Li, Hanchen F" userId="3aee791e-6a2d-4da7-a77b-fbdf7bf15886" providerId="ADAL" clId="{CDC5B0EF-6BEB-4658-A9FF-CB66F6FA6C1E}" dt="2025-05-22T23:23:18.333" v="3360" actId="478"/>
-          <ac:spMkLst>
-            <pc:docMk/>
-            <pc:sldMk cId="4277506326" sldId="257"/>
-            <ac:spMk id="299" creationId="{444EF53C-2C27-69D3-BE2D-1463AF267515}"/>
-          </ac:spMkLst>
-        </pc:spChg>
-        <pc:spChg chg="add del">
-          <ac:chgData name="Li, Hanchen F" userId="3aee791e-6a2d-4da7-a77b-fbdf7bf15886" providerId="ADAL" clId="{CDC5B0EF-6BEB-4658-A9FF-CB66F6FA6C1E}" dt="2025-05-22T23:23:18.333" v="3360" actId="478"/>
-          <ac:spMkLst>
-            <pc:docMk/>
-            <pc:sldMk cId="4277506326" sldId="257"/>
-            <ac:spMk id="508" creationId="{6D0F9164-561D-48CD-7581-FBEC2DC5AC87}"/>
-          </ac:spMkLst>
-        </pc:spChg>
-        <pc:spChg chg="add del">
-          <ac:chgData name="Li, Hanchen F" userId="3aee791e-6a2d-4da7-a77b-fbdf7bf15886" providerId="ADAL" clId="{CDC5B0EF-6BEB-4658-A9FF-CB66F6FA6C1E}" dt="2025-05-22T23:23:18.333" v="3360" actId="478"/>
-          <ac:spMkLst>
-            <pc:docMk/>
-            <pc:sldMk cId="4277506326" sldId="257"/>
-            <ac:spMk id="513" creationId="{8B6602DB-0608-D0E4-2503-7612F3B8EF20}"/>
-          </ac:spMkLst>
-        </pc:spChg>
-        <pc:spChg chg="add del">
-          <ac:chgData name="Li, Hanchen F" userId="3aee791e-6a2d-4da7-a77b-fbdf7bf15886" providerId="ADAL" clId="{CDC5B0EF-6BEB-4658-A9FF-CB66F6FA6C1E}" dt="2025-05-22T23:23:18.333" v="3360" actId="478"/>
-          <ac:spMkLst>
-            <pc:docMk/>
-            <pc:sldMk cId="4277506326" sldId="257"/>
-            <ac:spMk id="523" creationId="{251191F4-0844-95B4-CA79-8467043AC12A}"/>
-          </ac:spMkLst>
-        </pc:spChg>
-        <pc:spChg chg="add del">
-          <ac:chgData name="Li, Hanchen F" userId="3aee791e-6a2d-4da7-a77b-fbdf7bf15886" providerId="ADAL" clId="{CDC5B0EF-6BEB-4658-A9FF-CB66F6FA6C1E}" dt="2025-05-22T23:23:18.333" v="3360" actId="478"/>
-          <ac:spMkLst>
-            <pc:docMk/>
-            <pc:sldMk cId="4277506326" sldId="257"/>
-            <ac:spMk id="525" creationId="{D665E02C-4ADA-7551-1349-7289F70DDEBF}"/>
-          </ac:spMkLst>
-        </pc:spChg>
-        <pc:spChg chg="add del">
-          <ac:chgData name="Li, Hanchen F" userId="3aee791e-6a2d-4da7-a77b-fbdf7bf15886" providerId="ADAL" clId="{CDC5B0EF-6BEB-4658-A9FF-CB66F6FA6C1E}" dt="2025-05-22T23:23:18.333" v="3360" actId="478"/>
-          <ac:spMkLst>
-            <pc:docMk/>
-            <pc:sldMk cId="4277506326" sldId="257"/>
-            <ac:spMk id="546" creationId="{D394E27E-1EE5-B9DB-F64B-E0342F8ACEB0}"/>
-          </ac:spMkLst>
-        </pc:spChg>
-        <pc:spChg chg="add del">
-          <ac:chgData name="Li, Hanchen F" userId="3aee791e-6a2d-4da7-a77b-fbdf7bf15886" providerId="ADAL" clId="{CDC5B0EF-6BEB-4658-A9FF-CB66F6FA6C1E}" dt="2025-05-22T23:23:18.333" v="3360" actId="478"/>
-          <ac:spMkLst>
-            <pc:docMk/>
-            <pc:sldMk cId="4277506326" sldId="257"/>
-            <ac:spMk id="548" creationId="{BEA5D0DC-61F0-320A-FEF7-911BD8D313EE}"/>
-          </ac:spMkLst>
-        </pc:spChg>
-        <pc:spChg chg="add del">
-          <ac:chgData name="Li, Hanchen F" userId="3aee791e-6a2d-4da7-a77b-fbdf7bf15886" providerId="ADAL" clId="{CDC5B0EF-6BEB-4658-A9FF-CB66F6FA6C1E}" dt="2025-05-22T23:23:18.333" v="3360" actId="478"/>
-          <ac:spMkLst>
-            <pc:docMk/>
-            <pc:sldMk cId="4277506326" sldId="257"/>
-            <ac:spMk id="574" creationId="{9EA73AD2-417E-5C97-37E0-0922FE9A0BA2}"/>
-          </ac:spMkLst>
-        </pc:spChg>
-        <pc:spChg chg="add del">
-          <ac:chgData name="Li, Hanchen F" userId="3aee791e-6a2d-4da7-a77b-fbdf7bf15886" providerId="ADAL" clId="{CDC5B0EF-6BEB-4658-A9FF-CB66F6FA6C1E}" dt="2025-05-22T23:23:18.333" v="3360" actId="478"/>
-          <ac:spMkLst>
-            <pc:docMk/>
-            <pc:sldMk cId="4277506326" sldId="257"/>
-            <ac:spMk id="583" creationId="{67430E88-1EFC-FE48-7578-31C0CA1D6F79}"/>
-          </ac:spMkLst>
-        </pc:spChg>
-        <pc:spChg chg="add del">
-          <ac:chgData name="Li, Hanchen F" userId="3aee791e-6a2d-4da7-a77b-fbdf7bf15886" providerId="ADAL" clId="{CDC5B0EF-6BEB-4658-A9FF-CB66F6FA6C1E}" dt="2025-05-22T23:23:18.333" v="3360" actId="478"/>
-          <ac:spMkLst>
-            <pc:docMk/>
-            <pc:sldMk cId="4277506326" sldId="257"/>
-            <ac:spMk id="619" creationId="{6B379CFF-15D4-9EC0-3D8C-B4ED636488F1}"/>
-          </ac:spMkLst>
-        </pc:spChg>
-        <pc:spChg chg="add del">
-          <ac:chgData name="Li, Hanchen F" userId="3aee791e-6a2d-4da7-a77b-fbdf7bf15886" providerId="ADAL" clId="{CDC5B0EF-6BEB-4658-A9FF-CB66F6FA6C1E}" dt="2025-05-22T23:23:17.363" v="3358" actId="478"/>
-          <ac:spMkLst>
-            <pc:docMk/>
-            <pc:sldMk cId="4277506326" sldId="257"/>
-            <ac:spMk id="621" creationId="{4C73F73F-246E-AD97-D9B6-02ADA5E7E9D0}"/>
-          </ac:spMkLst>
-        </pc:spChg>
-        <pc:spChg chg="add del">
-          <ac:chgData name="Li, Hanchen F" userId="3aee791e-6a2d-4da7-a77b-fbdf7bf15886" providerId="ADAL" clId="{CDC5B0EF-6BEB-4658-A9FF-CB66F6FA6C1E}" dt="2025-05-22T23:23:17.835" v="3359" actId="478"/>
-          <ac:spMkLst>
-            <pc:docMk/>
-            <pc:sldMk cId="4277506326" sldId="257"/>
-            <ac:spMk id="622" creationId="{EC249BE6-2C36-718D-75FC-93791336F6DE}"/>
-          </ac:spMkLst>
-        </pc:spChg>
-        <pc:grpChg chg="add del">
-          <ac:chgData name="Li, Hanchen F" userId="3aee791e-6a2d-4da7-a77b-fbdf7bf15886" providerId="ADAL" clId="{CDC5B0EF-6BEB-4658-A9FF-CB66F6FA6C1E}" dt="2025-05-22T23:23:18.627" v="3361" actId="478"/>
-          <ac:grpSpMkLst>
-            <pc:docMk/>
-            <pc:sldMk cId="4277506326" sldId="257"/>
-            <ac:grpSpMk id="478" creationId="{0C58BD6A-E0F4-DCAA-BD65-100DAFA29F32}"/>
-          </ac:grpSpMkLst>
-        </pc:grpChg>
-        <pc:grpChg chg="add del">
-          <ac:chgData name="Li, Hanchen F" userId="3aee791e-6a2d-4da7-a77b-fbdf7bf15886" providerId="ADAL" clId="{CDC5B0EF-6BEB-4658-A9FF-CB66F6FA6C1E}" dt="2025-05-22T23:23:17.835" v="3359" actId="478"/>
-          <ac:grpSpMkLst>
-            <pc:docMk/>
-            <pc:sldMk cId="4277506326" sldId="257"/>
-            <ac:grpSpMk id="481" creationId="{7A6A397E-F226-5317-3EE5-1D59A8066B79}"/>
-          </ac:grpSpMkLst>
-        </pc:grpChg>
-        <pc:cxnChg chg="add del">
-          <ac:chgData name="Li, Hanchen F" userId="3aee791e-6a2d-4da7-a77b-fbdf7bf15886" providerId="ADAL" clId="{CDC5B0EF-6BEB-4658-A9FF-CB66F6FA6C1E}" dt="2025-05-22T23:23:17.835" v="3359" actId="478"/>
-          <ac:cxnSpMkLst>
-            <pc:docMk/>
-            <pc:sldMk cId="4277506326" sldId="257"/>
-            <ac:cxnSpMk id="301" creationId="{9BBA46A3-64AC-00F5-F418-D892885B254F}"/>
-          </ac:cxnSpMkLst>
-        </pc:cxnChg>
       </pc:sldChg>
       <pc:sldChg chg="addSp delSp modSp new mod">
         <pc:chgData name="Li, Hanchen F" userId="3aee791e-6a2d-4da7-a77b-fbdf7bf15886" providerId="ADAL" clId="{CDC5B0EF-6BEB-4658-A9FF-CB66F6FA6C1E}" dt="2025-05-23T00:19:58.620" v="6262" actId="1076"/>
@@ -4365,7 +2797,7 @@
         </pc:cxnChg>
       </pc:sldChg>
       <pc:sldChg chg="addSp delSp modSp add mod">
-        <pc:chgData name="Li, Hanchen F" userId="3aee791e-6a2d-4da7-a77b-fbdf7bf15886" providerId="ADAL" clId="{CDC5B0EF-6BEB-4658-A9FF-CB66F6FA6C1E}" dt="2025-05-23T17:26:02.660" v="7954" actId="1076"/>
+        <pc:chgData name="Li, Hanchen F" userId="3aee791e-6a2d-4da7-a77b-fbdf7bf15886" providerId="ADAL" clId="{CDC5B0EF-6BEB-4658-A9FF-CB66F6FA6C1E}" dt="2025-05-24T00:38:25.595" v="8353" actId="1076"/>
         <pc:sldMkLst>
           <pc:docMk/>
           <pc:sldMk cId="3652000193" sldId="259"/>
@@ -4379,6 +2811,14 @@
           </ac:spMkLst>
         </pc:spChg>
         <pc:spChg chg="add mod">
+          <ac:chgData name="Li, Hanchen F" userId="3aee791e-6a2d-4da7-a77b-fbdf7bf15886" providerId="ADAL" clId="{CDC5B0EF-6BEB-4658-A9FF-CB66F6FA6C1E}" dt="2025-05-24T00:38:25.595" v="8353" actId="1076"/>
+          <ac:spMkLst>
+            <pc:docMk/>
+            <pc:sldMk cId="3652000193" sldId="259"/>
+            <ac:spMk id="5" creationId="{A99B7D23-105E-D18E-65E4-64567B400750}"/>
+          </ac:spMkLst>
+        </pc:spChg>
+        <pc:spChg chg="add mod">
           <ac:chgData name="Li, Hanchen F" userId="3aee791e-6a2d-4da7-a77b-fbdf7bf15886" providerId="ADAL" clId="{CDC5B0EF-6BEB-4658-A9FF-CB66F6FA6C1E}" dt="2025-05-23T17:25:10.928" v="7951" actId="1076"/>
           <ac:spMkLst>
             <pc:docMk/>
@@ -4483,7 +2923,7 @@
           </ac:spMkLst>
         </pc:spChg>
         <pc:spChg chg="add mod">
-          <ac:chgData name="Li, Hanchen F" userId="3aee791e-6a2d-4da7-a77b-fbdf7bf15886" providerId="ADAL" clId="{CDC5B0EF-6BEB-4658-A9FF-CB66F6FA6C1E}" dt="2025-05-23T17:26:02.660" v="7954" actId="1076"/>
+          <ac:chgData name="Li, Hanchen F" userId="3aee791e-6a2d-4da7-a77b-fbdf7bf15886" providerId="ADAL" clId="{CDC5B0EF-6BEB-4658-A9FF-CB66F6FA6C1E}" dt="2025-05-24T00:37:56.522" v="8337" actId="947"/>
           <ac:spMkLst>
             <pc:docMk/>
             <pc:sldMk cId="3652000193" sldId="259"/>
@@ -4602,6 +3042,14 @@
             <ac:cxnSpMk id="4" creationId="{5C7F541E-055E-5256-9BD4-940C26108F6D}"/>
           </ac:cxnSpMkLst>
         </pc:cxnChg>
+        <pc:cxnChg chg="add mod">
+          <ac:chgData name="Li, Hanchen F" userId="3aee791e-6a2d-4da7-a77b-fbdf7bf15886" providerId="ADAL" clId="{CDC5B0EF-6BEB-4658-A9FF-CB66F6FA6C1E}" dt="2025-05-24T00:38:12.937" v="8343" actId="14100"/>
+          <ac:cxnSpMkLst>
+            <pc:docMk/>
+            <pc:sldMk cId="3652000193" sldId="259"/>
+            <ac:cxnSpMk id="6" creationId="{38FDEDED-D3E3-29D7-43C5-5C0EAB2A8C8F}"/>
+          </ac:cxnSpMkLst>
+        </pc:cxnChg>
         <pc:cxnChg chg="add del mod">
           <ac:chgData name="Li, Hanchen F" userId="3aee791e-6a2d-4da7-a77b-fbdf7bf15886" providerId="ADAL" clId="{CDC5B0EF-6BEB-4658-A9FF-CB66F6FA6C1E}" dt="2025-05-23T00:24:56.401" v="6354" actId="164"/>
           <ac:cxnSpMkLst>
@@ -4652,13 +3100,13 @@
         </pc:cxnChg>
       </pc:sldChg>
       <pc:sldChg chg="addSp delSp modSp add mod">
-        <pc:chgData name="Li, Hanchen F" userId="3aee791e-6a2d-4da7-a77b-fbdf7bf15886" providerId="ADAL" clId="{CDC5B0EF-6BEB-4658-A9FF-CB66F6FA6C1E}" dt="2025-05-23T20:13:53.563" v="8153" actId="1076"/>
+        <pc:chgData name="Li, Hanchen F" userId="3aee791e-6a2d-4da7-a77b-fbdf7bf15886" providerId="ADAL" clId="{CDC5B0EF-6BEB-4658-A9FF-CB66F6FA6C1E}" dt="2025-05-23T22:16:14.082" v="8200" actId="403"/>
         <pc:sldMkLst>
           <pc:docMk/>
           <pc:sldMk cId="1584463432" sldId="260"/>
         </pc:sldMkLst>
         <pc:spChg chg="add mod">
-          <ac:chgData name="Li, Hanchen F" userId="3aee791e-6a2d-4da7-a77b-fbdf7bf15886" providerId="ADAL" clId="{CDC5B0EF-6BEB-4658-A9FF-CB66F6FA6C1E}" dt="2025-05-23T16:42:20.319" v="7684" actId="1038"/>
+          <ac:chgData name="Li, Hanchen F" userId="3aee791e-6a2d-4da7-a77b-fbdf7bf15886" providerId="ADAL" clId="{CDC5B0EF-6BEB-4658-A9FF-CB66F6FA6C1E}" dt="2025-05-23T22:14:27.977" v="8181" actId="403"/>
           <ac:spMkLst>
             <pc:docMk/>
             <pc:sldMk cId="1584463432" sldId="260"/>
@@ -4698,7 +3146,7 @@
           </ac:spMkLst>
         </pc:spChg>
         <pc:spChg chg="add mod">
-          <ac:chgData name="Li, Hanchen F" userId="3aee791e-6a2d-4da7-a77b-fbdf7bf15886" providerId="ADAL" clId="{CDC5B0EF-6BEB-4658-A9FF-CB66F6FA6C1E}" dt="2025-05-23T16:42:20.319" v="7684" actId="1038"/>
+          <ac:chgData name="Li, Hanchen F" userId="3aee791e-6a2d-4da7-a77b-fbdf7bf15886" providerId="ADAL" clId="{CDC5B0EF-6BEB-4658-A9FF-CB66F6FA6C1E}" dt="2025-05-23T22:14:25.795" v="8180" actId="403"/>
           <ac:spMkLst>
             <pc:docMk/>
             <pc:sldMk cId="1584463432" sldId="260"/>
@@ -4818,7 +3266,7 @@
           </ac:spMkLst>
         </pc:spChg>
         <pc:spChg chg="add mod">
-          <ac:chgData name="Li, Hanchen F" userId="3aee791e-6a2d-4da7-a77b-fbdf7bf15886" providerId="ADAL" clId="{CDC5B0EF-6BEB-4658-A9FF-CB66F6FA6C1E}" dt="2025-05-23T16:39:54.002" v="7644" actId="2711"/>
+          <ac:chgData name="Li, Hanchen F" userId="3aee791e-6a2d-4da7-a77b-fbdf7bf15886" providerId="ADAL" clId="{CDC5B0EF-6BEB-4658-A9FF-CB66F6FA6C1E}" dt="2025-05-23T22:15:57.088" v="8197" actId="114"/>
           <ac:spMkLst>
             <pc:docMk/>
             <pc:sldMk cId="1584463432" sldId="260"/>
@@ -4826,7 +3274,7 @@
           </ac:spMkLst>
         </pc:spChg>
         <pc:spChg chg="add mod">
-          <ac:chgData name="Li, Hanchen F" userId="3aee791e-6a2d-4da7-a77b-fbdf7bf15886" providerId="ADAL" clId="{CDC5B0EF-6BEB-4658-A9FF-CB66F6FA6C1E}" dt="2025-05-23T16:39:54.002" v="7644" actId="2711"/>
+          <ac:chgData name="Li, Hanchen F" userId="3aee791e-6a2d-4da7-a77b-fbdf7bf15886" providerId="ADAL" clId="{CDC5B0EF-6BEB-4658-A9FF-CB66F6FA6C1E}" dt="2025-05-23T22:16:14.082" v="8200" actId="403"/>
           <ac:spMkLst>
             <pc:docMk/>
             <pc:sldMk cId="1584463432" sldId="260"/>
@@ -4834,7 +3282,7 @@
           </ac:spMkLst>
         </pc:spChg>
         <pc:spChg chg="add mod">
-          <ac:chgData name="Li, Hanchen F" userId="3aee791e-6a2d-4da7-a77b-fbdf7bf15886" providerId="ADAL" clId="{CDC5B0EF-6BEB-4658-A9FF-CB66F6FA6C1E}" dt="2025-05-23T16:40:00.587" v="7645" actId="2085"/>
+          <ac:chgData name="Li, Hanchen F" userId="3aee791e-6a2d-4da7-a77b-fbdf7bf15886" providerId="ADAL" clId="{CDC5B0EF-6BEB-4658-A9FF-CB66F6FA6C1E}" dt="2025-05-23T22:14:33.522" v="8186" actId="20577"/>
           <ac:spMkLst>
             <pc:docMk/>
             <pc:sldMk cId="1584463432" sldId="260"/>
@@ -5376,46 +3824,6 @@
           <pc:docMk/>
           <pc:sldMasterMk cId="3626057741" sldId="2147483648"/>
         </pc:sldMasterMkLst>
-        <pc:spChg chg="mod">
-          <ac:chgData name="Li, Hanchen F" userId="3aee791e-6a2d-4da7-a77b-fbdf7bf15886" providerId="ADAL" clId="{CDC5B0EF-6BEB-4658-A9FF-CB66F6FA6C1E}" dt="2025-05-22T21:36:01.782" v="3"/>
-          <ac:spMkLst>
-            <pc:docMk/>
-            <pc:sldMasterMk cId="3626057741" sldId="2147483648"/>
-            <ac:spMk id="2" creationId="{EC867880-FCC3-BE9A-5ACB-4FB6C7F33E19}"/>
-          </ac:spMkLst>
-        </pc:spChg>
-        <pc:spChg chg="mod">
-          <ac:chgData name="Li, Hanchen F" userId="3aee791e-6a2d-4da7-a77b-fbdf7bf15886" providerId="ADAL" clId="{CDC5B0EF-6BEB-4658-A9FF-CB66F6FA6C1E}" dt="2025-05-22T21:36:01.782" v="3"/>
-          <ac:spMkLst>
-            <pc:docMk/>
-            <pc:sldMasterMk cId="3626057741" sldId="2147483648"/>
-            <ac:spMk id="3" creationId="{F903FD7D-D780-3A4E-4145-40371644E19E}"/>
-          </ac:spMkLst>
-        </pc:spChg>
-        <pc:spChg chg="mod">
-          <ac:chgData name="Li, Hanchen F" userId="3aee791e-6a2d-4da7-a77b-fbdf7bf15886" providerId="ADAL" clId="{CDC5B0EF-6BEB-4658-A9FF-CB66F6FA6C1E}" dt="2025-05-22T21:36:01.782" v="3"/>
-          <ac:spMkLst>
-            <pc:docMk/>
-            <pc:sldMasterMk cId="3626057741" sldId="2147483648"/>
-            <ac:spMk id="4" creationId="{74C6CAD5-F18E-C725-54F2-E1F4BEC10D00}"/>
-          </ac:spMkLst>
-        </pc:spChg>
-        <pc:spChg chg="mod">
-          <ac:chgData name="Li, Hanchen F" userId="3aee791e-6a2d-4da7-a77b-fbdf7bf15886" providerId="ADAL" clId="{CDC5B0EF-6BEB-4658-A9FF-CB66F6FA6C1E}" dt="2025-05-22T21:36:01.782" v="3"/>
-          <ac:spMkLst>
-            <pc:docMk/>
-            <pc:sldMasterMk cId="3626057741" sldId="2147483648"/>
-            <ac:spMk id="5" creationId="{EF5FCE45-4CA5-96B8-3673-48020ED61F65}"/>
-          </ac:spMkLst>
-        </pc:spChg>
-        <pc:spChg chg="mod">
-          <ac:chgData name="Li, Hanchen F" userId="3aee791e-6a2d-4da7-a77b-fbdf7bf15886" providerId="ADAL" clId="{CDC5B0EF-6BEB-4658-A9FF-CB66F6FA6C1E}" dt="2025-05-22T21:36:01.782" v="3"/>
-          <ac:spMkLst>
-            <pc:docMk/>
-            <pc:sldMasterMk cId="3626057741" sldId="2147483648"/>
-            <ac:spMk id="6" creationId="{D579F98C-F325-074C-5CAD-DD7E9CC915E9}"/>
-          </ac:spMkLst>
-        </pc:spChg>
         <pc:sldLayoutChg chg="modSp">
           <pc:chgData name="Li, Hanchen F" userId="3aee791e-6a2d-4da7-a77b-fbdf7bf15886" providerId="ADAL" clId="{CDC5B0EF-6BEB-4658-A9FF-CB66F6FA6C1E}" dt="2025-05-22T21:36:01.782" v="3"/>
           <pc:sldLayoutMkLst>
@@ -5423,24 +3831,6 @@
             <pc:sldMasterMk cId="3626057741" sldId="2147483648"/>
             <pc:sldLayoutMk cId="1943014678" sldId="2147483649"/>
           </pc:sldLayoutMkLst>
-          <pc:spChg chg="mod">
-            <ac:chgData name="Li, Hanchen F" userId="3aee791e-6a2d-4da7-a77b-fbdf7bf15886" providerId="ADAL" clId="{CDC5B0EF-6BEB-4658-A9FF-CB66F6FA6C1E}" dt="2025-05-22T21:36:01.782" v="3"/>
-            <ac:spMkLst>
-              <pc:docMk/>
-              <pc:sldMasterMk cId="3626057741" sldId="2147483648"/>
-              <pc:sldLayoutMk cId="1943014678" sldId="2147483649"/>
-              <ac:spMk id="2" creationId="{1C152884-FD9F-42F2-DB7D-75C56C53F86B}"/>
-            </ac:spMkLst>
-          </pc:spChg>
-          <pc:spChg chg="mod">
-            <ac:chgData name="Li, Hanchen F" userId="3aee791e-6a2d-4da7-a77b-fbdf7bf15886" providerId="ADAL" clId="{CDC5B0EF-6BEB-4658-A9FF-CB66F6FA6C1E}" dt="2025-05-22T21:36:01.782" v="3"/>
-            <ac:spMkLst>
-              <pc:docMk/>
-              <pc:sldMasterMk cId="3626057741" sldId="2147483648"/>
-              <pc:sldLayoutMk cId="1943014678" sldId="2147483649"/>
-              <ac:spMk id="3" creationId="{58D5E4C8-1AA3-6C01-304D-14983EEE16D4}"/>
-            </ac:spMkLst>
-          </pc:spChg>
         </pc:sldLayoutChg>
         <pc:sldLayoutChg chg="modSp">
           <pc:chgData name="Li, Hanchen F" userId="3aee791e-6a2d-4da7-a77b-fbdf7bf15886" providerId="ADAL" clId="{CDC5B0EF-6BEB-4658-A9FF-CB66F6FA6C1E}" dt="2025-05-22T21:36:01.782" v="3"/>
@@ -5449,24 +3839,6 @@
             <pc:sldMasterMk cId="3626057741" sldId="2147483648"/>
             <pc:sldLayoutMk cId="2499854334" sldId="2147483651"/>
           </pc:sldLayoutMkLst>
-          <pc:spChg chg="mod">
-            <ac:chgData name="Li, Hanchen F" userId="3aee791e-6a2d-4da7-a77b-fbdf7bf15886" providerId="ADAL" clId="{CDC5B0EF-6BEB-4658-A9FF-CB66F6FA6C1E}" dt="2025-05-22T21:36:01.782" v="3"/>
-            <ac:spMkLst>
-              <pc:docMk/>
-              <pc:sldMasterMk cId="3626057741" sldId="2147483648"/>
-              <pc:sldLayoutMk cId="2499854334" sldId="2147483651"/>
-              <ac:spMk id="2" creationId="{EA53DABC-12A5-C905-E97A-FBACCE1104FC}"/>
-            </ac:spMkLst>
-          </pc:spChg>
-          <pc:spChg chg="mod">
-            <ac:chgData name="Li, Hanchen F" userId="3aee791e-6a2d-4da7-a77b-fbdf7bf15886" providerId="ADAL" clId="{CDC5B0EF-6BEB-4658-A9FF-CB66F6FA6C1E}" dt="2025-05-22T21:36:01.782" v="3"/>
-            <ac:spMkLst>
-              <pc:docMk/>
-              <pc:sldMasterMk cId="3626057741" sldId="2147483648"/>
-              <pc:sldLayoutMk cId="2499854334" sldId="2147483651"/>
-              <ac:spMk id="3" creationId="{2EE8FF3D-C23A-78F8-8C33-35CE2021E58C}"/>
-            </ac:spMkLst>
-          </pc:spChg>
         </pc:sldLayoutChg>
         <pc:sldLayoutChg chg="modSp">
           <pc:chgData name="Li, Hanchen F" userId="3aee791e-6a2d-4da7-a77b-fbdf7bf15886" providerId="ADAL" clId="{CDC5B0EF-6BEB-4658-A9FF-CB66F6FA6C1E}" dt="2025-05-22T21:36:01.782" v="3"/>
@@ -5475,24 +3847,6 @@
             <pc:sldMasterMk cId="3626057741" sldId="2147483648"/>
             <pc:sldLayoutMk cId="4136100517" sldId="2147483652"/>
           </pc:sldLayoutMkLst>
-          <pc:spChg chg="mod">
-            <ac:chgData name="Li, Hanchen F" userId="3aee791e-6a2d-4da7-a77b-fbdf7bf15886" providerId="ADAL" clId="{CDC5B0EF-6BEB-4658-A9FF-CB66F6FA6C1E}" dt="2025-05-22T21:36:01.782" v="3"/>
-            <ac:spMkLst>
-              <pc:docMk/>
-              <pc:sldMasterMk cId="3626057741" sldId="2147483648"/>
-              <pc:sldLayoutMk cId="4136100517" sldId="2147483652"/>
-              <ac:spMk id="3" creationId="{7B0BBD89-B42E-943E-5E21-D0C43C6A1DAE}"/>
-            </ac:spMkLst>
-          </pc:spChg>
-          <pc:spChg chg="mod">
-            <ac:chgData name="Li, Hanchen F" userId="3aee791e-6a2d-4da7-a77b-fbdf7bf15886" providerId="ADAL" clId="{CDC5B0EF-6BEB-4658-A9FF-CB66F6FA6C1E}" dt="2025-05-22T21:36:01.782" v="3"/>
-            <ac:spMkLst>
-              <pc:docMk/>
-              <pc:sldMasterMk cId="3626057741" sldId="2147483648"/>
-              <pc:sldLayoutMk cId="4136100517" sldId="2147483652"/>
-              <ac:spMk id="4" creationId="{445280C5-CF0D-B680-7544-C2C1F79F38D9}"/>
-            </ac:spMkLst>
-          </pc:spChg>
         </pc:sldLayoutChg>
         <pc:sldLayoutChg chg="modSp">
           <pc:chgData name="Li, Hanchen F" userId="3aee791e-6a2d-4da7-a77b-fbdf7bf15886" providerId="ADAL" clId="{CDC5B0EF-6BEB-4658-A9FF-CB66F6FA6C1E}" dt="2025-05-22T21:36:01.782" v="3"/>
@@ -5501,51 +3855,6 @@
             <pc:sldMasterMk cId="3626057741" sldId="2147483648"/>
             <pc:sldLayoutMk cId="2634004646" sldId="2147483653"/>
           </pc:sldLayoutMkLst>
-          <pc:spChg chg="mod">
-            <ac:chgData name="Li, Hanchen F" userId="3aee791e-6a2d-4da7-a77b-fbdf7bf15886" providerId="ADAL" clId="{CDC5B0EF-6BEB-4658-A9FF-CB66F6FA6C1E}" dt="2025-05-22T21:36:01.782" v="3"/>
-            <ac:spMkLst>
-              <pc:docMk/>
-              <pc:sldMasterMk cId="3626057741" sldId="2147483648"/>
-              <pc:sldLayoutMk cId="2634004646" sldId="2147483653"/>
-              <ac:spMk id="2" creationId="{B05024F1-2057-EBE7-2D8C-EB8025D0898C}"/>
-            </ac:spMkLst>
-          </pc:spChg>
-          <pc:spChg chg="mod">
-            <ac:chgData name="Li, Hanchen F" userId="3aee791e-6a2d-4da7-a77b-fbdf7bf15886" providerId="ADAL" clId="{CDC5B0EF-6BEB-4658-A9FF-CB66F6FA6C1E}" dt="2025-05-22T21:36:01.782" v="3"/>
-            <ac:spMkLst>
-              <pc:docMk/>
-              <pc:sldMasterMk cId="3626057741" sldId="2147483648"/>
-              <pc:sldLayoutMk cId="2634004646" sldId="2147483653"/>
-              <ac:spMk id="3" creationId="{F5FA57F3-CAED-FCF1-5A29-2B8092BE7D00}"/>
-            </ac:spMkLst>
-          </pc:spChg>
-          <pc:spChg chg="mod">
-            <ac:chgData name="Li, Hanchen F" userId="3aee791e-6a2d-4da7-a77b-fbdf7bf15886" providerId="ADAL" clId="{CDC5B0EF-6BEB-4658-A9FF-CB66F6FA6C1E}" dt="2025-05-22T21:36:01.782" v="3"/>
-            <ac:spMkLst>
-              <pc:docMk/>
-              <pc:sldMasterMk cId="3626057741" sldId="2147483648"/>
-              <pc:sldLayoutMk cId="2634004646" sldId="2147483653"/>
-              <ac:spMk id="4" creationId="{E4A7A4FD-5750-2E54-A770-C0B553BB4459}"/>
-            </ac:spMkLst>
-          </pc:spChg>
-          <pc:spChg chg="mod">
-            <ac:chgData name="Li, Hanchen F" userId="3aee791e-6a2d-4da7-a77b-fbdf7bf15886" providerId="ADAL" clId="{CDC5B0EF-6BEB-4658-A9FF-CB66F6FA6C1E}" dt="2025-05-22T21:36:01.782" v="3"/>
-            <ac:spMkLst>
-              <pc:docMk/>
-              <pc:sldMasterMk cId="3626057741" sldId="2147483648"/>
-              <pc:sldLayoutMk cId="2634004646" sldId="2147483653"/>
-              <ac:spMk id="5" creationId="{4533F8B7-66D7-59DE-7241-DDADBCA18E10}"/>
-            </ac:spMkLst>
-          </pc:spChg>
-          <pc:spChg chg="mod">
-            <ac:chgData name="Li, Hanchen F" userId="3aee791e-6a2d-4da7-a77b-fbdf7bf15886" providerId="ADAL" clId="{CDC5B0EF-6BEB-4658-A9FF-CB66F6FA6C1E}" dt="2025-05-22T21:36:01.782" v="3"/>
-            <ac:spMkLst>
-              <pc:docMk/>
-              <pc:sldMasterMk cId="3626057741" sldId="2147483648"/>
-              <pc:sldLayoutMk cId="2634004646" sldId="2147483653"/>
-              <ac:spMk id="6" creationId="{B6A1D5F7-55C2-CFAF-A4DD-ADD73706CA88}"/>
-            </ac:spMkLst>
-          </pc:spChg>
         </pc:sldLayoutChg>
         <pc:sldLayoutChg chg="modSp">
           <pc:chgData name="Li, Hanchen F" userId="3aee791e-6a2d-4da7-a77b-fbdf7bf15886" providerId="ADAL" clId="{CDC5B0EF-6BEB-4658-A9FF-CB66F6FA6C1E}" dt="2025-05-22T21:36:01.782" v="3"/>
@@ -5554,33 +3863,6 @@
             <pc:sldMasterMk cId="3626057741" sldId="2147483648"/>
             <pc:sldLayoutMk cId="2897894365" sldId="2147483656"/>
           </pc:sldLayoutMkLst>
-          <pc:spChg chg="mod">
-            <ac:chgData name="Li, Hanchen F" userId="3aee791e-6a2d-4da7-a77b-fbdf7bf15886" providerId="ADAL" clId="{CDC5B0EF-6BEB-4658-A9FF-CB66F6FA6C1E}" dt="2025-05-22T21:36:01.782" v="3"/>
-            <ac:spMkLst>
-              <pc:docMk/>
-              <pc:sldMasterMk cId="3626057741" sldId="2147483648"/>
-              <pc:sldLayoutMk cId="2897894365" sldId="2147483656"/>
-              <ac:spMk id="2" creationId="{AFC9C4D9-3CAF-BC1E-DFED-9E786EA01945}"/>
-            </ac:spMkLst>
-          </pc:spChg>
-          <pc:spChg chg="mod">
-            <ac:chgData name="Li, Hanchen F" userId="3aee791e-6a2d-4da7-a77b-fbdf7bf15886" providerId="ADAL" clId="{CDC5B0EF-6BEB-4658-A9FF-CB66F6FA6C1E}" dt="2025-05-22T21:36:01.782" v="3"/>
-            <ac:spMkLst>
-              <pc:docMk/>
-              <pc:sldMasterMk cId="3626057741" sldId="2147483648"/>
-              <pc:sldLayoutMk cId="2897894365" sldId="2147483656"/>
-              <ac:spMk id="3" creationId="{377551C2-4FBA-A4E1-36EF-465DCCD1F219}"/>
-            </ac:spMkLst>
-          </pc:spChg>
-          <pc:spChg chg="mod">
-            <ac:chgData name="Li, Hanchen F" userId="3aee791e-6a2d-4da7-a77b-fbdf7bf15886" providerId="ADAL" clId="{CDC5B0EF-6BEB-4658-A9FF-CB66F6FA6C1E}" dt="2025-05-22T21:36:01.782" v="3"/>
-            <ac:spMkLst>
-              <pc:docMk/>
-              <pc:sldMasterMk cId="3626057741" sldId="2147483648"/>
-              <pc:sldLayoutMk cId="2897894365" sldId="2147483656"/>
-              <ac:spMk id="4" creationId="{464D6FBF-D1E4-CC4D-7EE4-C8A25AD3F5CA}"/>
-            </ac:spMkLst>
-          </pc:spChg>
         </pc:sldLayoutChg>
         <pc:sldLayoutChg chg="modSp">
           <pc:chgData name="Li, Hanchen F" userId="3aee791e-6a2d-4da7-a77b-fbdf7bf15886" providerId="ADAL" clId="{CDC5B0EF-6BEB-4658-A9FF-CB66F6FA6C1E}" dt="2025-05-22T21:36:01.782" v="3"/>
@@ -5589,33 +3871,6 @@
             <pc:sldMasterMk cId="3626057741" sldId="2147483648"/>
             <pc:sldLayoutMk cId="3681102178" sldId="2147483657"/>
           </pc:sldLayoutMkLst>
-          <pc:spChg chg="mod">
-            <ac:chgData name="Li, Hanchen F" userId="3aee791e-6a2d-4da7-a77b-fbdf7bf15886" providerId="ADAL" clId="{CDC5B0EF-6BEB-4658-A9FF-CB66F6FA6C1E}" dt="2025-05-22T21:36:01.782" v="3"/>
-            <ac:spMkLst>
-              <pc:docMk/>
-              <pc:sldMasterMk cId="3626057741" sldId="2147483648"/>
-              <pc:sldLayoutMk cId="3681102178" sldId="2147483657"/>
-              <ac:spMk id="2" creationId="{7C733B67-9B7C-D56B-310C-D82ABB770BBF}"/>
-            </ac:spMkLst>
-          </pc:spChg>
-          <pc:spChg chg="mod">
-            <ac:chgData name="Li, Hanchen F" userId="3aee791e-6a2d-4da7-a77b-fbdf7bf15886" providerId="ADAL" clId="{CDC5B0EF-6BEB-4658-A9FF-CB66F6FA6C1E}" dt="2025-05-22T21:36:01.782" v="3"/>
-            <ac:spMkLst>
-              <pc:docMk/>
-              <pc:sldMasterMk cId="3626057741" sldId="2147483648"/>
-              <pc:sldLayoutMk cId="3681102178" sldId="2147483657"/>
-              <ac:spMk id="3" creationId="{EA681B44-280B-4D27-C2BB-F69EE2F23D6A}"/>
-            </ac:spMkLst>
-          </pc:spChg>
-          <pc:spChg chg="mod">
-            <ac:chgData name="Li, Hanchen F" userId="3aee791e-6a2d-4da7-a77b-fbdf7bf15886" providerId="ADAL" clId="{CDC5B0EF-6BEB-4658-A9FF-CB66F6FA6C1E}" dt="2025-05-22T21:36:01.782" v="3"/>
-            <ac:spMkLst>
-              <pc:docMk/>
-              <pc:sldMasterMk cId="3626057741" sldId="2147483648"/>
-              <pc:sldLayoutMk cId="3681102178" sldId="2147483657"/>
-              <ac:spMk id="4" creationId="{A0FE7298-2D40-61F7-9FE3-E3147272C019}"/>
-            </ac:spMkLst>
-          </pc:spChg>
         </pc:sldLayoutChg>
         <pc:sldLayoutChg chg="modSp">
           <pc:chgData name="Li, Hanchen F" userId="3aee791e-6a2d-4da7-a77b-fbdf7bf15886" providerId="ADAL" clId="{CDC5B0EF-6BEB-4658-A9FF-CB66F6FA6C1E}" dt="2025-05-22T21:36:01.782" v="3"/>
@@ -5624,24 +3879,6 @@
             <pc:sldMasterMk cId="3626057741" sldId="2147483648"/>
             <pc:sldLayoutMk cId="2218223006" sldId="2147483659"/>
           </pc:sldLayoutMkLst>
-          <pc:spChg chg="mod">
-            <ac:chgData name="Li, Hanchen F" userId="3aee791e-6a2d-4da7-a77b-fbdf7bf15886" providerId="ADAL" clId="{CDC5B0EF-6BEB-4658-A9FF-CB66F6FA6C1E}" dt="2025-05-22T21:36:01.782" v="3"/>
-            <ac:spMkLst>
-              <pc:docMk/>
-              <pc:sldMasterMk cId="3626057741" sldId="2147483648"/>
-              <pc:sldLayoutMk cId="2218223006" sldId="2147483659"/>
-              <ac:spMk id="2" creationId="{D1E8D855-B21D-7B08-D761-48A83D14205B}"/>
-            </ac:spMkLst>
-          </pc:spChg>
-          <pc:spChg chg="mod">
-            <ac:chgData name="Li, Hanchen F" userId="3aee791e-6a2d-4da7-a77b-fbdf7bf15886" providerId="ADAL" clId="{CDC5B0EF-6BEB-4658-A9FF-CB66F6FA6C1E}" dt="2025-05-22T21:36:01.782" v="3"/>
-            <ac:spMkLst>
-              <pc:docMk/>
-              <pc:sldMasterMk cId="3626057741" sldId="2147483648"/>
-              <pc:sldLayoutMk cId="2218223006" sldId="2147483659"/>
-              <ac:spMk id="3" creationId="{665563B6-57F9-29CC-B625-85EABF31A8C3}"/>
-            </ac:spMkLst>
-          </pc:spChg>
         </pc:sldLayoutChg>
       </pc:sldMasterChg>
       <pc:sldMasterChg chg="modSp modSldLayout">
@@ -5650,46 +3887,6 @@
           <pc:docMk/>
           <pc:sldMasterMk cId="2832921018" sldId="2147483660"/>
         </pc:sldMasterMkLst>
-        <pc:spChg chg="mod">
-          <ac:chgData name="Li, Hanchen F" userId="3aee791e-6a2d-4da7-a77b-fbdf7bf15886" providerId="ADAL" clId="{CDC5B0EF-6BEB-4658-A9FF-CB66F6FA6C1E}" dt="2025-05-22T21:36:33.895" v="9"/>
-          <ac:spMkLst>
-            <pc:docMk/>
-            <pc:sldMasterMk cId="2832921018" sldId="2147483660"/>
-            <ac:spMk id="2" creationId="{00000000-0000-0000-0000-000000000000}"/>
-          </ac:spMkLst>
-        </pc:spChg>
-        <pc:spChg chg="mod">
-          <ac:chgData name="Li, Hanchen F" userId="3aee791e-6a2d-4da7-a77b-fbdf7bf15886" providerId="ADAL" clId="{CDC5B0EF-6BEB-4658-A9FF-CB66F6FA6C1E}" dt="2025-05-22T21:36:33.895" v="9"/>
-          <ac:spMkLst>
-            <pc:docMk/>
-            <pc:sldMasterMk cId="2832921018" sldId="2147483660"/>
-            <ac:spMk id="3" creationId="{00000000-0000-0000-0000-000000000000}"/>
-          </ac:spMkLst>
-        </pc:spChg>
-        <pc:spChg chg="mod">
-          <ac:chgData name="Li, Hanchen F" userId="3aee791e-6a2d-4da7-a77b-fbdf7bf15886" providerId="ADAL" clId="{CDC5B0EF-6BEB-4658-A9FF-CB66F6FA6C1E}" dt="2025-05-22T21:36:33.895" v="9"/>
-          <ac:spMkLst>
-            <pc:docMk/>
-            <pc:sldMasterMk cId="2832921018" sldId="2147483660"/>
-            <ac:spMk id="4" creationId="{00000000-0000-0000-0000-000000000000}"/>
-          </ac:spMkLst>
-        </pc:spChg>
-        <pc:spChg chg="mod">
-          <ac:chgData name="Li, Hanchen F" userId="3aee791e-6a2d-4da7-a77b-fbdf7bf15886" providerId="ADAL" clId="{CDC5B0EF-6BEB-4658-A9FF-CB66F6FA6C1E}" dt="2025-05-22T21:36:33.895" v="9"/>
-          <ac:spMkLst>
-            <pc:docMk/>
-            <pc:sldMasterMk cId="2832921018" sldId="2147483660"/>
-            <ac:spMk id="5" creationId="{00000000-0000-0000-0000-000000000000}"/>
-          </ac:spMkLst>
-        </pc:spChg>
-        <pc:spChg chg="mod">
-          <ac:chgData name="Li, Hanchen F" userId="3aee791e-6a2d-4da7-a77b-fbdf7bf15886" providerId="ADAL" clId="{CDC5B0EF-6BEB-4658-A9FF-CB66F6FA6C1E}" dt="2025-05-22T21:36:33.895" v="9"/>
-          <ac:spMkLst>
-            <pc:docMk/>
-            <pc:sldMasterMk cId="2832921018" sldId="2147483660"/>
-            <ac:spMk id="6" creationId="{00000000-0000-0000-0000-000000000000}"/>
-          </ac:spMkLst>
-        </pc:spChg>
         <pc:sldLayoutChg chg="modSp">
           <pc:chgData name="Li, Hanchen F" userId="3aee791e-6a2d-4da7-a77b-fbdf7bf15886" providerId="ADAL" clId="{CDC5B0EF-6BEB-4658-A9FF-CB66F6FA6C1E}" dt="2025-05-22T21:36:33.895" v="9"/>
           <pc:sldLayoutMkLst>
@@ -5697,24 +3894,6 @@
             <pc:sldMasterMk cId="2832921018" sldId="2147483660"/>
             <pc:sldLayoutMk cId="2188281178" sldId="2147483661"/>
           </pc:sldLayoutMkLst>
-          <pc:spChg chg="mod">
-            <ac:chgData name="Li, Hanchen F" userId="3aee791e-6a2d-4da7-a77b-fbdf7bf15886" providerId="ADAL" clId="{CDC5B0EF-6BEB-4658-A9FF-CB66F6FA6C1E}" dt="2025-05-22T21:36:33.895" v="9"/>
-            <ac:spMkLst>
-              <pc:docMk/>
-              <pc:sldMasterMk cId="2832921018" sldId="2147483660"/>
-              <pc:sldLayoutMk cId="2188281178" sldId="2147483661"/>
-              <ac:spMk id="2" creationId="{00000000-0000-0000-0000-000000000000}"/>
-            </ac:spMkLst>
-          </pc:spChg>
-          <pc:spChg chg="mod">
-            <ac:chgData name="Li, Hanchen F" userId="3aee791e-6a2d-4da7-a77b-fbdf7bf15886" providerId="ADAL" clId="{CDC5B0EF-6BEB-4658-A9FF-CB66F6FA6C1E}" dt="2025-05-22T21:36:33.895" v="9"/>
-            <ac:spMkLst>
-              <pc:docMk/>
-              <pc:sldMasterMk cId="2832921018" sldId="2147483660"/>
-              <pc:sldLayoutMk cId="2188281178" sldId="2147483661"/>
-              <ac:spMk id="3" creationId="{00000000-0000-0000-0000-000000000000}"/>
-            </ac:spMkLst>
-          </pc:spChg>
         </pc:sldLayoutChg>
         <pc:sldLayoutChg chg="modSp">
           <pc:chgData name="Li, Hanchen F" userId="3aee791e-6a2d-4da7-a77b-fbdf7bf15886" providerId="ADAL" clId="{CDC5B0EF-6BEB-4658-A9FF-CB66F6FA6C1E}" dt="2025-05-22T21:36:33.895" v="9"/>
@@ -5723,24 +3902,6 @@
             <pc:sldMasterMk cId="2832921018" sldId="2147483660"/>
             <pc:sldLayoutMk cId="1379408304" sldId="2147483663"/>
           </pc:sldLayoutMkLst>
-          <pc:spChg chg="mod">
-            <ac:chgData name="Li, Hanchen F" userId="3aee791e-6a2d-4da7-a77b-fbdf7bf15886" providerId="ADAL" clId="{CDC5B0EF-6BEB-4658-A9FF-CB66F6FA6C1E}" dt="2025-05-22T21:36:33.895" v="9"/>
-            <ac:spMkLst>
-              <pc:docMk/>
-              <pc:sldMasterMk cId="2832921018" sldId="2147483660"/>
-              <pc:sldLayoutMk cId="1379408304" sldId="2147483663"/>
-              <ac:spMk id="2" creationId="{00000000-0000-0000-0000-000000000000}"/>
-            </ac:spMkLst>
-          </pc:spChg>
-          <pc:spChg chg="mod">
-            <ac:chgData name="Li, Hanchen F" userId="3aee791e-6a2d-4da7-a77b-fbdf7bf15886" providerId="ADAL" clId="{CDC5B0EF-6BEB-4658-A9FF-CB66F6FA6C1E}" dt="2025-05-22T21:36:33.895" v="9"/>
-            <ac:spMkLst>
-              <pc:docMk/>
-              <pc:sldMasterMk cId="2832921018" sldId="2147483660"/>
-              <pc:sldLayoutMk cId="1379408304" sldId="2147483663"/>
-              <ac:spMk id="3" creationId="{00000000-0000-0000-0000-000000000000}"/>
-            </ac:spMkLst>
-          </pc:spChg>
         </pc:sldLayoutChg>
         <pc:sldLayoutChg chg="modSp">
           <pc:chgData name="Li, Hanchen F" userId="3aee791e-6a2d-4da7-a77b-fbdf7bf15886" providerId="ADAL" clId="{CDC5B0EF-6BEB-4658-A9FF-CB66F6FA6C1E}" dt="2025-05-22T21:36:33.895" v="9"/>
@@ -5749,24 +3910,6 @@
             <pc:sldMasterMk cId="2832921018" sldId="2147483660"/>
             <pc:sldLayoutMk cId="708412680" sldId="2147483664"/>
           </pc:sldLayoutMkLst>
-          <pc:spChg chg="mod">
-            <ac:chgData name="Li, Hanchen F" userId="3aee791e-6a2d-4da7-a77b-fbdf7bf15886" providerId="ADAL" clId="{CDC5B0EF-6BEB-4658-A9FF-CB66F6FA6C1E}" dt="2025-05-22T21:36:33.895" v="9"/>
-            <ac:spMkLst>
-              <pc:docMk/>
-              <pc:sldMasterMk cId="2832921018" sldId="2147483660"/>
-              <pc:sldLayoutMk cId="708412680" sldId="2147483664"/>
-              <ac:spMk id="3" creationId="{00000000-0000-0000-0000-000000000000}"/>
-            </ac:spMkLst>
-          </pc:spChg>
-          <pc:spChg chg="mod">
-            <ac:chgData name="Li, Hanchen F" userId="3aee791e-6a2d-4da7-a77b-fbdf7bf15886" providerId="ADAL" clId="{CDC5B0EF-6BEB-4658-A9FF-CB66F6FA6C1E}" dt="2025-05-22T21:36:33.895" v="9"/>
-            <ac:spMkLst>
-              <pc:docMk/>
-              <pc:sldMasterMk cId="2832921018" sldId="2147483660"/>
-              <pc:sldLayoutMk cId="708412680" sldId="2147483664"/>
-              <ac:spMk id="4" creationId="{00000000-0000-0000-0000-000000000000}"/>
-            </ac:spMkLst>
-          </pc:spChg>
         </pc:sldLayoutChg>
         <pc:sldLayoutChg chg="modSp">
           <pc:chgData name="Li, Hanchen F" userId="3aee791e-6a2d-4da7-a77b-fbdf7bf15886" providerId="ADAL" clId="{CDC5B0EF-6BEB-4658-A9FF-CB66F6FA6C1E}" dt="2025-05-22T21:36:33.895" v="9"/>
@@ -5775,51 +3918,6 @@
             <pc:sldMasterMk cId="2832921018" sldId="2147483660"/>
             <pc:sldLayoutMk cId="3391006602" sldId="2147483665"/>
           </pc:sldLayoutMkLst>
-          <pc:spChg chg="mod">
-            <ac:chgData name="Li, Hanchen F" userId="3aee791e-6a2d-4da7-a77b-fbdf7bf15886" providerId="ADAL" clId="{CDC5B0EF-6BEB-4658-A9FF-CB66F6FA6C1E}" dt="2025-05-22T21:36:33.895" v="9"/>
-            <ac:spMkLst>
-              <pc:docMk/>
-              <pc:sldMasterMk cId="2832921018" sldId="2147483660"/>
-              <pc:sldLayoutMk cId="3391006602" sldId="2147483665"/>
-              <ac:spMk id="2" creationId="{00000000-0000-0000-0000-000000000000}"/>
-            </ac:spMkLst>
-          </pc:spChg>
-          <pc:spChg chg="mod">
-            <ac:chgData name="Li, Hanchen F" userId="3aee791e-6a2d-4da7-a77b-fbdf7bf15886" providerId="ADAL" clId="{CDC5B0EF-6BEB-4658-A9FF-CB66F6FA6C1E}" dt="2025-05-22T21:36:33.895" v="9"/>
-            <ac:spMkLst>
-              <pc:docMk/>
-              <pc:sldMasterMk cId="2832921018" sldId="2147483660"/>
-              <pc:sldLayoutMk cId="3391006602" sldId="2147483665"/>
-              <ac:spMk id="3" creationId="{00000000-0000-0000-0000-000000000000}"/>
-            </ac:spMkLst>
-          </pc:spChg>
-          <pc:spChg chg="mod">
-            <ac:chgData name="Li, Hanchen F" userId="3aee791e-6a2d-4da7-a77b-fbdf7bf15886" providerId="ADAL" clId="{CDC5B0EF-6BEB-4658-A9FF-CB66F6FA6C1E}" dt="2025-05-22T21:36:33.895" v="9"/>
-            <ac:spMkLst>
-              <pc:docMk/>
-              <pc:sldMasterMk cId="2832921018" sldId="2147483660"/>
-              <pc:sldLayoutMk cId="3391006602" sldId="2147483665"/>
-              <ac:spMk id="4" creationId="{00000000-0000-0000-0000-000000000000}"/>
-            </ac:spMkLst>
-          </pc:spChg>
-          <pc:spChg chg="mod">
-            <ac:chgData name="Li, Hanchen F" userId="3aee791e-6a2d-4da7-a77b-fbdf7bf15886" providerId="ADAL" clId="{CDC5B0EF-6BEB-4658-A9FF-CB66F6FA6C1E}" dt="2025-05-22T21:36:33.895" v="9"/>
-            <ac:spMkLst>
-              <pc:docMk/>
-              <pc:sldMasterMk cId="2832921018" sldId="2147483660"/>
-              <pc:sldLayoutMk cId="3391006602" sldId="2147483665"/>
-              <ac:spMk id="5" creationId="{00000000-0000-0000-0000-000000000000}"/>
-            </ac:spMkLst>
-          </pc:spChg>
-          <pc:spChg chg="mod">
-            <ac:chgData name="Li, Hanchen F" userId="3aee791e-6a2d-4da7-a77b-fbdf7bf15886" providerId="ADAL" clId="{CDC5B0EF-6BEB-4658-A9FF-CB66F6FA6C1E}" dt="2025-05-22T21:36:33.895" v="9"/>
-            <ac:spMkLst>
-              <pc:docMk/>
-              <pc:sldMasterMk cId="2832921018" sldId="2147483660"/>
-              <pc:sldLayoutMk cId="3391006602" sldId="2147483665"/>
-              <ac:spMk id="6" creationId="{00000000-0000-0000-0000-000000000000}"/>
-            </ac:spMkLst>
-          </pc:spChg>
         </pc:sldLayoutChg>
         <pc:sldLayoutChg chg="modSp">
           <pc:chgData name="Li, Hanchen F" userId="3aee791e-6a2d-4da7-a77b-fbdf7bf15886" providerId="ADAL" clId="{CDC5B0EF-6BEB-4658-A9FF-CB66F6FA6C1E}" dt="2025-05-22T21:36:33.895" v="9"/>
@@ -5828,33 +3926,6 @@
             <pc:sldMasterMk cId="2832921018" sldId="2147483660"/>
             <pc:sldLayoutMk cId="3517119780" sldId="2147483668"/>
           </pc:sldLayoutMkLst>
-          <pc:spChg chg="mod">
-            <ac:chgData name="Li, Hanchen F" userId="3aee791e-6a2d-4da7-a77b-fbdf7bf15886" providerId="ADAL" clId="{CDC5B0EF-6BEB-4658-A9FF-CB66F6FA6C1E}" dt="2025-05-22T21:36:33.895" v="9"/>
-            <ac:spMkLst>
-              <pc:docMk/>
-              <pc:sldMasterMk cId="2832921018" sldId="2147483660"/>
-              <pc:sldLayoutMk cId="3517119780" sldId="2147483668"/>
-              <ac:spMk id="2" creationId="{00000000-0000-0000-0000-000000000000}"/>
-            </ac:spMkLst>
-          </pc:spChg>
-          <pc:spChg chg="mod">
-            <ac:chgData name="Li, Hanchen F" userId="3aee791e-6a2d-4da7-a77b-fbdf7bf15886" providerId="ADAL" clId="{CDC5B0EF-6BEB-4658-A9FF-CB66F6FA6C1E}" dt="2025-05-22T21:36:33.895" v="9"/>
-            <ac:spMkLst>
-              <pc:docMk/>
-              <pc:sldMasterMk cId="2832921018" sldId="2147483660"/>
-              <pc:sldLayoutMk cId="3517119780" sldId="2147483668"/>
-              <ac:spMk id="3" creationId="{00000000-0000-0000-0000-000000000000}"/>
-            </ac:spMkLst>
-          </pc:spChg>
-          <pc:spChg chg="mod">
-            <ac:chgData name="Li, Hanchen F" userId="3aee791e-6a2d-4da7-a77b-fbdf7bf15886" providerId="ADAL" clId="{CDC5B0EF-6BEB-4658-A9FF-CB66F6FA6C1E}" dt="2025-05-22T21:36:33.895" v="9"/>
-            <ac:spMkLst>
-              <pc:docMk/>
-              <pc:sldMasterMk cId="2832921018" sldId="2147483660"/>
-              <pc:sldLayoutMk cId="3517119780" sldId="2147483668"/>
-              <ac:spMk id="4" creationId="{00000000-0000-0000-0000-000000000000}"/>
-            </ac:spMkLst>
-          </pc:spChg>
         </pc:sldLayoutChg>
         <pc:sldLayoutChg chg="modSp">
           <pc:chgData name="Li, Hanchen F" userId="3aee791e-6a2d-4da7-a77b-fbdf7bf15886" providerId="ADAL" clId="{CDC5B0EF-6BEB-4658-A9FF-CB66F6FA6C1E}" dt="2025-05-22T21:36:33.895" v="9"/>
@@ -5863,33 +3934,6 @@
             <pc:sldMasterMk cId="2832921018" sldId="2147483660"/>
             <pc:sldLayoutMk cId="107555040" sldId="2147483669"/>
           </pc:sldLayoutMkLst>
-          <pc:spChg chg="mod">
-            <ac:chgData name="Li, Hanchen F" userId="3aee791e-6a2d-4da7-a77b-fbdf7bf15886" providerId="ADAL" clId="{CDC5B0EF-6BEB-4658-A9FF-CB66F6FA6C1E}" dt="2025-05-22T21:36:33.895" v="9"/>
-            <ac:spMkLst>
-              <pc:docMk/>
-              <pc:sldMasterMk cId="2832921018" sldId="2147483660"/>
-              <pc:sldLayoutMk cId="107555040" sldId="2147483669"/>
-              <ac:spMk id="2" creationId="{00000000-0000-0000-0000-000000000000}"/>
-            </ac:spMkLst>
-          </pc:spChg>
-          <pc:spChg chg="mod">
-            <ac:chgData name="Li, Hanchen F" userId="3aee791e-6a2d-4da7-a77b-fbdf7bf15886" providerId="ADAL" clId="{CDC5B0EF-6BEB-4658-A9FF-CB66F6FA6C1E}" dt="2025-05-22T21:36:33.895" v="9"/>
-            <ac:spMkLst>
-              <pc:docMk/>
-              <pc:sldMasterMk cId="2832921018" sldId="2147483660"/>
-              <pc:sldLayoutMk cId="107555040" sldId="2147483669"/>
-              <ac:spMk id="3" creationId="{00000000-0000-0000-0000-000000000000}"/>
-            </ac:spMkLst>
-          </pc:spChg>
-          <pc:spChg chg="mod">
-            <ac:chgData name="Li, Hanchen F" userId="3aee791e-6a2d-4da7-a77b-fbdf7bf15886" providerId="ADAL" clId="{CDC5B0EF-6BEB-4658-A9FF-CB66F6FA6C1E}" dt="2025-05-22T21:36:33.895" v="9"/>
-            <ac:spMkLst>
-              <pc:docMk/>
-              <pc:sldMasterMk cId="2832921018" sldId="2147483660"/>
-              <pc:sldLayoutMk cId="107555040" sldId="2147483669"/>
-              <ac:spMk id="4" creationId="{00000000-0000-0000-0000-000000000000}"/>
-            </ac:spMkLst>
-          </pc:spChg>
         </pc:sldLayoutChg>
         <pc:sldLayoutChg chg="modSp">
           <pc:chgData name="Li, Hanchen F" userId="3aee791e-6a2d-4da7-a77b-fbdf7bf15886" providerId="ADAL" clId="{CDC5B0EF-6BEB-4658-A9FF-CB66F6FA6C1E}" dt="2025-05-22T21:36:33.895" v="9"/>
@@ -5898,24 +3942,6 @@
             <pc:sldMasterMk cId="2832921018" sldId="2147483660"/>
             <pc:sldLayoutMk cId="1955127079" sldId="2147483671"/>
           </pc:sldLayoutMkLst>
-          <pc:spChg chg="mod">
-            <ac:chgData name="Li, Hanchen F" userId="3aee791e-6a2d-4da7-a77b-fbdf7bf15886" providerId="ADAL" clId="{CDC5B0EF-6BEB-4658-A9FF-CB66F6FA6C1E}" dt="2025-05-22T21:36:33.895" v="9"/>
-            <ac:spMkLst>
-              <pc:docMk/>
-              <pc:sldMasterMk cId="2832921018" sldId="2147483660"/>
-              <pc:sldLayoutMk cId="1955127079" sldId="2147483671"/>
-              <ac:spMk id="2" creationId="{00000000-0000-0000-0000-000000000000}"/>
-            </ac:spMkLst>
-          </pc:spChg>
-          <pc:spChg chg="mod">
-            <ac:chgData name="Li, Hanchen F" userId="3aee791e-6a2d-4da7-a77b-fbdf7bf15886" providerId="ADAL" clId="{CDC5B0EF-6BEB-4658-A9FF-CB66F6FA6C1E}" dt="2025-05-22T21:36:33.895" v="9"/>
-            <ac:spMkLst>
-              <pc:docMk/>
-              <pc:sldMasterMk cId="2832921018" sldId="2147483660"/>
-              <pc:sldLayoutMk cId="1955127079" sldId="2147483671"/>
-              <ac:spMk id="3" creationId="{00000000-0000-0000-0000-000000000000}"/>
-            </ac:spMkLst>
-          </pc:spChg>
         </pc:sldLayoutChg>
       </pc:sldMasterChg>
     </pc:docChg>
@@ -6005,7 +4031,7 @@
           <a:p>
             <a:fld id="{DF1088C5-931A-42D2-8AA4-FA289862AAD0}" type="datetimeFigureOut">
               <a:rPr lang="zh-CN" altLang="en-US" smtClean="0"/>
-              <a:t>2025/5/23</a:t>
+              <a:t>2025/5/24</a:t>
             </a:fld>
             <a:endParaRPr lang="zh-CN" altLang="en-US"/>
           </a:p>
@@ -6895,7 +4921,7 @@
           <a:p>
             <a:fld id="{3CAF1464-0EA4-453D-A90B-03B04D244405}" type="datetimeFigureOut">
               <a:rPr lang="zh-CN" altLang="en-US" smtClean="0"/>
-              <a:t>2025/5/23</a:t>
+              <a:t>2025/5/24</a:t>
             </a:fld>
             <a:endParaRPr lang="zh-CN" altLang="en-US"/>
           </a:p>
@@ -7065,7 +5091,7 @@
           <a:p>
             <a:fld id="{3CAF1464-0EA4-453D-A90B-03B04D244405}" type="datetimeFigureOut">
               <a:rPr lang="zh-CN" altLang="en-US" smtClean="0"/>
-              <a:t>2025/5/23</a:t>
+              <a:t>2025/5/24</a:t>
             </a:fld>
             <a:endParaRPr lang="zh-CN" altLang="en-US"/>
           </a:p>
@@ -7245,7 +5271,7 @@
           <a:p>
             <a:fld id="{3CAF1464-0EA4-453D-A90B-03B04D244405}" type="datetimeFigureOut">
               <a:rPr lang="zh-CN" altLang="en-US" smtClean="0"/>
-              <a:t>2025/5/23</a:t>
+              <a:t>2025/5/24</a:t>
             </a:fld>
             <a:endParaRPr lang="zh-CN" altLang="en-US"/>
           </a:p>
@@ -7415,7 +5441,7 @@
           <a:p>
             <a:fld id="{3CAF1464-0EA4-453D-A90B-03B04D244405}" type="datetimeFigureOut">
               <a:rPr lang="zh-CN" altLang="en-US" smtClean="0"/>
-              <a:t>2025/5/23</a:t>
+              <a:t>2025/5/24</a:t>
             </a:fld>
             <a:endParaRPr lang="zh-CN" altLang="en-US"/>
           </a:p>
@@ -7661,7 +5687,7 @@
           <a:p>
             <a:fld id="{3CAF1464-0EA4-453D-A90B-03B04D244405}" type="datetimeFigureOut">
               <a:rPr lang="zh-CN" altLang="en-US" smtClean="0"/>
-              <a:t>2025/5/23</a:t>
+              <a:t>2025/5/24</a:t>
             </a:fld>
             <a:endParaRPr lang="zh-CN" altLang="en-US"/>
           </a:p>
@@ -7893,7 +5919,7 @@
           <a:p>
             <a:fld id="{3CAF1464-0EA4-453D-A90B-03B04D244405}" type="datetimeFigureOut">
               <a:rPr lang="zh-CN" altLang="en-US" smtClean="0"/>
-              <a:t>2025/5/23</a:t>
+              <a:t>2025/5/24</a:t>
             </a:fld>
             <a:endParaRPr lang="zh-CN" altLang="en-US"/>
           </a:p>
@@ -8260,7 +6286,7 @@
           <a:p>
             <a:fld id="{3CAF1464-0EA4-453D-A90B-03B04D244405}" type="datetimeFigureOut">
               <a:rPr lang="zh-CN" altLang="en-US" smtClean="0"/>
-              <a:t>2025/5/23</a:t>
+              <a:t>2025/5/24</a:t>
             </a:fld>
             <a:endParaRPr lang="zh-CN" altLang="en-US"/>
           </a:p>
@@ -8378,7 +6404,7 @@
           <a:p>
             <a:fld id="{3CAF1464-0EA4-453D-A90B-03B04D244405}" type="datetimeFigureOut">
               <a:rPr lang="zh-CN" altLang="en-US" smtClean="0"/>
-              <a:t>2025/5/23</a:t>
+              <a:t>2025/5/24</a:t>
             </a:fld>
             <a:endParaRPr lang="zh-CN" altLang="en-US"/>
           </a:p>
@@ -8473,7 +6499,7 @@
           <a:p>
             <a:fld id="{3CAF1464-0EA4-453D-A90B-03B04D244405}" type="datetimeFigureOut">
               <a:rPr lang="zh-CN" altLang="en-US" smtClean="0"/>
-              <a:t>2025/5/23</a:t>
+              <a:t>2025/5/24</a:t>
             </a:fld>
             <a:endParaRPr lang="zh-CN" altLang="en-US"/>
           </a:p>
@@ -8750,7 +6776,7 @@
           <a:p>
             <a:fld id="{3CAF1464-0EA4-453D-A90B-03B04D244405}" type="datetimeFigureOut">
               <a:rPr lang="zh-CN" altLang="en-US" smtClean="0"/>
-              <a:t>2025/5/23</a:t>
+              <a:t>2025/5/24</a:t>
             </a:fld>
             <a:endParaRPr lang="zh-CN" altLang="en-US"/>
           </a:p>
@@ -9007,7 +7033,7 @@
           <a:p>
             <a:fld id="{3CAF1464-0EA4-453D-A90B-03B04D244405}" type="datetimeFigureOut">
               <a:rPr lang="zh-CN" altLang="en-US" smtClean="0"/>
-              <a:t>2025/5/23</a:t>
+              <a:t>2025/5/24</a:t>
             </a:fld>
             <a:endParaRPr lang="zh-CN" altLang="en-US"/>
           </a:p>
@@ -9220,7 +7246,7 @@
           <a:p>
             <a:fld id="{3CAF1464-0EA4-453D-A90B-03B04D244405}" type="datetimeFigureOut">
               <a:rPr lang="zh-CN" altLang="en-US" smtClean="0"/>
-              <a:t>2025/5/23</a:t>
+              <a:t>2025/5/24</a:t>
             </a:fld>
             <a:endParaRPr lang="zh-CN" altLang="en-US"/>
           </a:p>
@@ -12862,7 +10888,7 @@
         <p:spPr>
           <a:xfrm>
             <a:off x="8168427" y="2119692"/>
-            <a:ext cx="333746" cy="338554"/>
+            <a:ext cx="492443" cy="338554"/>
           </a:xfrm>
           <a:prstGeom prst="rect">
             <a:avLst/>
@@ -12899,6 +10925,17 @@
                 <a:cs typeface="Times New Roman" panose="02020603050405020304" pitchFamily="18" charset="0"/>
               </a:rPr>
               <a:t>Ω</a:t>
+            </a:r>
+            <a:r>
+              <a:rPr lang="en-US" altLang="zh-CN" sz="1600" i="1" baseline="-25000" dirty="0">
+                <a:solidFill>
+                  <a:srgbClr val="0000CD"/>
+                </a:solidFill>
+                <a:latin typeface="Times New Roman" panose="02020603050405020304" pitchFamily="18" charset="0"/>
+                <a:ea typeface="等线" panose="02010600030101010101" pitchFamily="2" charset="-122"/>
+                <a:cs typeface="Times New Roman" panose="02020603050405020304" pitchFamily="18" charset="0"/>
+              </a:rPr>
+              <a:t>LR</a:t>
             </a:r>
             <a:endParaRPr lang="zh-CN" altLang="en-US" sz="1600" i="1" baseline="-25000" dirty="0">
               <a:solidFill>
@@ -13670,6 +11707,124 @@
           </a:p>
         </p:txBody>
       </p:sp>
+      <p:sp>
+        <p:nvSpPr>
+          <p:cNvPr id="5" name="文本框 4">
+            <a:extLst>
+              <a:ext uri="{FF2B5EF4-FFF2-40B4-BE49-F238E27FC236}">
+                <a16:creationId xmlns:a16="http://schemas.microsoft.com/office/drawing/2014/main" id="{A99B7D23-105E-D18E-65E4-64567B400750}"/>
+              </a:ext>
+            </a:extLst>
+          </p:cNvPr>
+          <p:cNvSpPr txBox="1"/>
+          <p:nvPr/>
+        </p:nvSpPr>
+        <p:spPr>
+          <a:xfrm>
+            <a:off x="5386540" y="2063207"/>
+            <a:ext cx="516488" cy="338554"/>
+          </a:xfrm>
+          <a:prstGeom prst="rect">
+            <a:avLst/>
+          </a:prstGeom>
+          <a:gradFill>
+            <a:gsLst>
+              <a:gs pos="27000">
+                <a:schemeClr val="bg1"/>
+              </a:gs>
+              <a:gs pos="43000">
+                <a:schemeClr val="bg1">
+                  <a:alpha val="0"/>
+                </a:schemeClr>
+              </a:gs>
+            </a:gsLst>
+            <a:path path="circle">
+              <a:fillToRect l="50000" t="50000" r="50000" b="50000"/>
+            </a:path>
+          </a:gradFill>
+        </p:spPr>
+        <p:txBody>
+          <a:bodyPr wrap="none" rtlCol="0">
+            <a:spAutoFit/>
+          </a:bodyPr>
+          <a:lstStyle/>
+          <a:p>
+            <a:r>
+              <a:rPr lang="el-GR" altLang="zh-CN" sz="1600" i="1" dirty="0">
+                <a:solidFill>
+                  <a:srgbClr val="0000CD"/>
+                </a:solidFill>
+                <a:latin typeface="Times New Roman" panose="02020603050405020304" pitchFamily="18" charset="0"/>
+                <a:ea typeface="等线" panose="02010600030101010101" pitchFamily="2" charset="-122"/>
+                <a:cs typeface="Times New Roman" panose="02020603050405020304" pitchFamily="18" charset="0"/>
+              </a:rPr>
+              <a:t>Ω</a:t>
+            </a:r>
+            <a:r>
+              <a:rPr lang="en-US" altLang="zh-CN" sz="1600" i="1" baseline="-25000" dirty="0">
+                <a:solidFill>
+                  <a:srgbClr val="0000CD"/>
+                </a:solidFill>
+                <a:latin typeface="Times New Roman" panose="02020603050405020304" pitchFamily="18" charset="0"/>
+                <a:ea typeface="等线" panose="02010600030101010101" pitchFamily="2" charset="-122"/>
+                <a:cs typeface="Times New Roman" panose="02020603050405020304" pitchFamily="18" charset="0"/>
+              </a:rPr>
+              <a:t>UR</a:t>
+            </a:r>
+            <a:endParaRPr lang="zh-CN" altLang="en-US" sz="1600" i="1" baseline="-25000" dirty="0">
+              <a:solidFill>
+                <a:srgbClr val="0000CD"/>
+              </a:solidFill>
+              <a:latin typeface="Times New Roman" panose="02020603050405020304" pitchFamily="18" charset="0"/>
+              <a:cs typeface="Times New Roman" panose="02020603050405020304" pitchFamily="18" charset="0"/>
+            </a:endParaRPr>
+          </a:p>
+        </p:txBody>
+      </p:sp>
+      <p:cxnSp>
+        <p:nvCxnSpPr>
+          <p:cNvPr id="6" name="直接箭头连接符 5">
+            <a:extLst>
+              <a:ext uri="{FF2B5EF4-FFF2-40B4-BE49-F238E27FC236}">
+                <a16:creationId xmlns:a16="http://schemas.microsoft.com/office/drawing/2014/main" id="{38FDEDED-D3E3-29D7-43C5-5C0EAB2A8C8F}"/>
+              </a:ext>
+            </a:extLst>
+          </p:cNvPr>
+          <p:cNvCxnSpPr>
+            <a:cxnSpLocks/>
+          </p:cNvCxnSpPr>
+          <p:nvPr/>
+        </p:nvCxnSpPr>
+        <p:spPr>
+          <a:xfrm flipV="1">
+            <a:off x="5959980" y="2375462"/>
+            <a:ext cx="136020" cy="27987"/>
+          </a:xfrm>
+          <a:prstGeom prst="straightConnector1">
+            <a:avLst/>
+          </a:prstGeom>
+          <a:ln w="57150">
+            <a:solidFill>
+              <a:srgbClr val="0000CD"/>
+            </a:solidFill>
+            <a:tailEnd type="triangle"/>
+          </a:ln>
+        </p:spPr>
+        <p:style>
+          <a:lnRef idx="2">
+            <a:schemeClr val="accent1"/>
+          </a:lnRef>
+          <a:fillRef idx="0">
+            <a:schemeClr val="accent1"/>
+          </a:fillRef>
+          <a:effectRef idx="1">
+            <a:schemeClr val="accent1"/>
+          </a:effectRef>
+          <a:fontRef idx="minor">
+            <a:schemeClr val="tx1"/>
+          </a:fontRef>
+        </p:style>
+      </p:cxnSp>
     </p:spTree>
     <p:extLst>
       <p:ext uri="{BB962C8B-B14F-4D97-AF65-F5344CB8AC3E}">
@@ -19723,8 +17878,8 @@
         </p:nvSpPr>
         <p:spPr>
           <a:xfrm>
-            <a:off x="113295" y="4975269"/>
-            <a:ext cx="348172" cy="338554"/>
+            <a:off x="157807" y="4968361"/>
+            <a:ext cx="276038" cy="338554"/>
           </a:xfrm>
           <a:prstGeom prst="rect">
             <a:avLst/>
@@ -19738,24 +17893,14 @@
           <a:lstStyle/>
           <a:p>
             <a:r>
-              <a:rPr lang="en-US" altLang="zh-CN" sz="1600" i="1" dirty="0" err="1">
+              <a:rPr lang="en-US" altLang="zh-CN" sz="1600" i="1" dirty="0">
                 <a:solidFill>
                   <a:srgbClr val="0000CD"/>
                 </a:solidFill>
                 <a:latin typeface="Times New Roman" panose="02020603050405020304" pitchFamily="18" charset="0"/>
                 <a:cs typeface="Times New Roman" panose="02020603050405020304" pitchFamily="18" charset="0"/>
               </a:rPr>
-              <a:t>z</a:t>
-            </a:r>
-            <a:r>
-              <a:rPr lang="en-US" altLang="zh-CN" sz="1600" i="1" baseline="-25000" dirty="0" err="1">
-                <a:solidFill>
-                  <a:srgbClr val="0000CD"/>
-                </a:solidFill>
-                <a:latin typeface="Times New Roman" panose="02020603050405020304" pitchFamily="18" charset="0"/>
-                <a:cs typeface="Times New Roman" panose="02020603050405020304" pitchFamily="18" charset="0"/>
-              </a:rPr>
-              <a:t>B</a:t>
+              <a:t>x</a:t>
             </a:r>
             <a:endParaRPr lang="zh-CN" altLang="en-US" sz="1600" i="1" baseline="-25000" dirty="0">
               <a:solidFill>
@@ -19781,7 +17926,7 @@
         </p:nvSpPr>
         <p:spPr>
           <a:xfrm>
-            <a:off x="1038615" y="4816718"/>
+            <a:off x="1039324" y="4773304"/>
             <a:ext cx="359394" cy="338554"/>
           </a:xfrm>
           <a:prstGeom prst="rect">
@@ -19879,8 +18024,8 @@
         </p:nvSpPr>
         <p:spPr>
           <a:xfrm>
-            <a:off x="1052216" y="5455894"/>
-            <a:ext cx="348172" cy="338554"/>
+            <a:off x="1024272" y="5455894"/>
+            <a:ext cx="264816" cy="338554"/>
           </a:xfrm>
           <a:prstGeom prst="rect">
             <a:avLst/>
@@ -19894,7 +18039,7 @@
           <a:lstStyle/>
           <a:p>
             <a:r>
-              <a:rPr lang="en-US" altLang="zh-CN" sz="1600" i="1" dirty="0" err="1">
+              <a:rPr lang="en-US" altLang="zh-CN" sz="1600" i="1" dirty="0">
                 <a:solidFill>
                   <a:srgbClr val="0000CD"/>
                 </a:solidFill>
@@ -19902,16 +18047,6 @@
                 <a:cs typeface="Times New Roman" panose="02020603050405020304" pitchFamily="18" charset="0"/>
               </a:rPr>
               <a:t>z</a:t>
-            </a:r>
-            <a:r>
-              <a:rPr lang="en-US" altLang="zh-CN" sz="1600" i="1" baseline="-25000" dirty="0" err="1">
-                <a:solidFill>
-                  <a:srgbClr val="0000CD"/>
-                </a:solidFill>
-                <a:latin typeface="Times New Roman" panose="02020603050405020304" pitchFamily="18" charset="0"/>
-                <a:cs typeface="Times New Roman" panose="02020603050405020304" pitchFamily="18" charset="0"/>
-              </a:rPr>
-              <a:t>B</a:t>
             </a:r>
             <a:endParaRPr lang="zh-CN" altLang="en-US" sz="1600" i="1" baseline="-25000" dirty="0">
               <a:solidFill>
@@ -19937,8 +18072,8 @@
         </p:nvSpPr>
         <p:spPr>
           <a:xfrm>
-            <a:off x="823835" y="4537633"/>
-            <a:ext cx="359394" cy="338554"/>
+            <a:off x="852154" y="4553860"/>
+            <a:ext cx="276038" cy="338554"/>
           </a:xfrm>
           <a:prstGeom prst="rect">
             <a:avLst/>
@@ -19952,7 +18087,7 @@
           <a:lstStyle/>
           <a:p>
             <a:r>
-              <a:rPr lang="en-US" altLang="zh-CN" sz="1600" i="1" dirty="0" err="1">
+              <a:rPr lang="en-US" altLang="zh-CN" sz="1600" i="1" dirty="0">
                 <a:solidFill>
                   <a:srgbClr val="0000CD"/>
                 </a:solidFill>
@@ -19960,16 +18095,6 @@
                 <a:cs typeface="Times New Roman" panose="02020603050405020304" pitchFamily="18" charset="0"/>
               </a:rPr>
               <a:t>y</a:t>
-            </a:r>
-            <a:r>
-              <a:rPr lang="en-US" altLang="zh-CN" sz="1600" i="1" baseline="-25000" dirty="0" err="1">
-                <a:solidFill>
-                  <a:srgbClr val="0000CD"/>
-                </a:solidFill>
-                <a:latin typeface="Times New Roman" panose="02020603050405020304" pitchFamily="18" charset="0"/>
-                <a:cs typeface="Times New Roman" panose="02020603050405020304" pitchFamily="18" charset="0"/>
-              </a:rPr>
-              <a:t>B</a:t>
             </a:r>
             <a:endParaRPr lang="zh-CN" altLang="en-US" sz="1600" i="1" baseline="-25000" dirty="0">
               <a:solidFill>
@@ -19995,7 +18120,7 @@
         </p:nvSpPr>
         <p:spPr>
           <a:xfrm>
-            <a:off x="14869" y="4666026"/>
+            <a:off x="51488" y="4696911"/>
             <a:ext cx="359394" cy="338554"/>
           </a:xfrm>
           <a:prstGeom prst="rect">
@@ -20044,8 +18169,8 @@
         </p:nvSpPr>
         <p:spPr>
           <a:xfrm>
-            <a:off x="10801863" y="4453216"/>
-            <a:ext cx="359394" cy="338554"/>
+            <a:off x="10909778" y="4519971"/>
+            <a:ext cx="276038" cy="338554"/>
           </a:xfrm>
           <a:prstGeom prst="rect">
             <a:avLst/>
@@ -20059,7 +18184,7 @@
           <a:lstStyle/>
           <a:p>
             <a:r>
-              <a:rPr lang="en-US" altLang="zh-CN" sz="1600" i="1" dirty="0" err="1">
+              <a:rPr lang="en-US" altLang="zh-CN" sz="1600" i="1" dirty="0">
                 <a:solidFill>
                   <a:srgbClr val="0000CD"/>
                 </a:solidFill>
@@ -20067,16 +18192,6 @@
                 <a:cs typeface="Times New Roman" panose="02020603050405020304" pitchFamily="18" charset="0"/>
               </a:rPr>
               <a:t>x</a:t>
-            </a:r>
-            <a:r>
-              <a:rPr lang="en-US" altLang="zh-CN" sz="1600" i="1" baseline="-25000" dirty="0" err="1">
-                <a:solidFill>
-                  <a:srgbClr val="0000CD"/>
-                </a:solidFill>
-                <a:latin typeface="Times New Roman" panose="02020603050405020304" pitchFamily="18" charset="0"/>
-                <a:cs typeface="Times New Roman" panose="02020603050405020304" pitchFamily="18" charset="0"/>
-              </a:rPr>
-              <a:t>B</a:t>
             </a:r>
             <a:endParaRPr lang="zh-CN" altLang="en-US" sz="1600" i="1" baseline="-25000" dirty="0">
               <a:solidFill>
@@ -20200,8 +18315,8 @@
         </p:nvSpPr>
         <p:spPr>
           <a:xfrm>
-            <a:off x="10726611" y="5381279"/>
-            <a:ext cx="348172" cy="338554"/>
+            <a:off x="10802174" y="5409089"/>
+            <a:ext cx="264816" cy="338554"/>
           </a:xfrm>
           <a:prstGeom prst="rect">
             <a:avLst/>
@@ -20215,7 +18330,7 @@
           <a:lstStyle/>
           <a:p>
             <a:r>
-              <a:rPr lang="en-US" altLang="zh-CN" sz="1600" i="1" dirty="0" err="1">
+              <a:rPr lang="en-US" altLang="zh-CN" sz="1600" i="1" dirty="0">
                 <a:solidFill>
                   <a:srgbClr val="0000CD"/>
                 </a:solidFill>
@@ -20223,16 +18338,6 @@
                 <a:cs typeface="Times New Roman" panose="02020603050405020304" pitchFamily="18" charset="0"/>
               </a:rPr>
               <a:t>z</a:t>
-            </a:r>
-            <a:r>
-              <a:rPr lang="en-US" altLang="zh-CN" sz="1600" i="1" baseline="-25000" dirty="0" err="1">
-                <a:solidFill>
-                  <a:srgbClr val="0000CD"/>
-                </a:solidFill>
-                <a:latin typeface="Times New Roman" panose="02020603050405020304" pitchFamily="18" charset="0"/>
-                <a:cs typeface="Times New Roman" panose="02020603050405020304" pitchFamily="18" charset="0"/>
-              </a:rPr>
-              <a:t>B</a:t>
             </a:r>
             <a:endParaRPr lang="zh-CN" altLang="en-US" sz="1600" i="1" baseline="-25000" dirty="0">
               <a:solidFill>
@@ -20258,8 +18363,8 @@
         </p:nvSpPr>
         <p:spPr>
           <a:xfrm>
-            <a:off x="11693397" y="4976770"/>
-            <a:ext cx="359394" cy="338554"/>
+            <a:off x="11719597" y="4911380"/>
+            <a:ext cx="276038" cy="338554"/>
           </a:xfrm>
           <a:prstGeom prst="rect">
             <a:avLst/>
@@ -20273,7 +18378,7 @@
           <a:lstStyle/>
           <a:p>
             <a:r>
-              <a:rPr lang="en-US" altLang="zh-CN" sz="1600" i="1" dirty="0" err="1">
+              <a:rPr lang="en-US" altLang="zh-CN" sz="1600" i="1" dirty="0">
                 <a:solidFill>
                   <a:srgbClr val="0000CD"/>
                 </a:solidFill>
@@ -20281,16 +18386,6 @@
                 <a:cs typeface="Times New Roman" panose="02020603050405020304" pitchFamily="18" charset="0"/>
               </a:rPr>
               <a:t>y</a:t>
-            </a:r>
-            <a:r>
-              <a:rPr lang="en-US" altLang="zh-CN" sz="1600" i="1" baseline="-25000" dirty="0" err="1">
-                <a:solidFill>
-                  <a:srgbClr val="0000CD"/>
-                </a:solidFill>
-                <a:latin typeface="Times New Roman" panose="02020603050405020304" pitchFamily="18" charset="0"/>
-                <a:cs typeface="Times New Roman" panose="02020603050405020304" pitchFamily="18" charset="0"/>
-              </a:rPr>
-              <a:t>B</a:t>
             </a:r>
             <a:endParaRPr lang="zh-CN" altLang="en-US" sz="1600" i="1" baseline="-25000" dirty="0">
               <a:solidFill>
@@ -20316,7 +18411,7 @@
         </p:nvSpPr>
         <p:spPr>
           <a:xfrm>
-            <a:off x="10722140" y="4732038"/>
+            <a:off x="10750924" y="4706910"/>
             <a:ext cx="359394" cy="338554"/>
           </a:xfrm>
           <a:prstGeom prst="rect">
@@ -21987,8 +20082,8 @@
         </p:nvSpPr>
         <p:spPr>
           <a:xfrm>
-            <a:off x="6868796" y="3075742"/>
-            <a:ext cx="506870" cy="338554"/>
+            <a:off x="6840000" y="3089424"/>
+            <a:ext cx="593432" cy="338554"/>
           </a:xfrm>
           <a:prstGeom prst="rect">
             <a:avLst/>
@@ -22001,6 +20096,16 @@
           </a:bodyPr>
           <a:lstStyle/>
           <a:p>
+            <a:r>
+              <a:rPr lang="en-US" altLang="zh-CN" sz="1600" dirty="0">
+                <a:solidFill>
+                  <a:srgbClr val="DC143C"/>
+                </a:solidFill>
+                <a:latin typeface="Times New Roman" panose="02020603050405020304" pitchFamily="18" charset="0"/>
+                <a:cs typeface="Times New Roman" panose="02020603050405020304" pitchFamily="18" charset="0"/>
+              </a:rPr>
+              <a:t>2</a:t>
+            </a:r>
             <a:r>
               <a:rPr lang="en-US" altLang="zh-CN" sz="1600" i="1" dirty="0">
                 <a:solidFill>
@@ -22923,7 +21028,7 @@
         </p:nvSpPr>
         <p:spPr>
           <a:xfrm>
-            <a:off x="11410862" y="4170325"/>
+            <a:off x="11244936" y="3821672"/>
             <a:ext cx="449547" cy="338554"/>
           </a:xfrm>
           <a:prstGeom prst="rect">
@@ -23520,6 +21625,108 @@
             <a:endParaRPr lang="zh-CN" altLang="en-US" sz="1600" i="1" baseline="-25000" dirty="0">
               <a:solidFill>
                 <a:srgbClr val="0000CD"/>
+              </a:solidFill>
+              <a:latin typeface="Times New Roman" panose="02020603050405020304" pitchFamily="18" charset="0"/>
+              <a:cs typeface="Times New Roman" panose="02020603050405020304" pitchFamily="18" charset="0"/>
+            </a:endParaRPr>
+          </a:p>
+        </p:txBody>
+      </p:sp>
+      <p:cxnSp>
+        <p:nvCxnSpPr>
+          <p:cNvPr id="6" name="直接箭头连接符 5">
+            <a:extLst>
+              <a:ext uri="{FF2B5EF4-FFF2-40B4-BE49-F238E27FC236}">
+                <a16:creationId xmlns:a16="http://schemas.microsoft.com/office/drawing/2014/main" id="{8D35F380-2EF8-27C9-CA2D-198CC4E8D9A5}"/>
+              </a:ext>
+            </a:extLst>
+          </p:cNvPr>
+          <p:cNvCxnSpPr>
+            <a:cxnSpLocks/>
+          </p:cNvCxnSpPr>
+          <p:nvPr/>
+        </p:nvCxnSpPr>
+        <p:spPr>
+          <a:xfrm rot="935833">
+            <a:off x="8798796" y="3556585"/>
+            <a:ext cx="686238" cy="0"/>
+          </a:xfrm>
+          <a:prstGeom prst="straightConnector1">
+            <a:avLst/>
+          </a:prstGeom>
+          <a:ln w="12700">
+            <a:solidFill>
+              <a:srgbClr val="DC143C"/>
+            </a:solidFill>
+            <a:tailEnd type="triangle"/>
+          </a:ln>
+        </p:spPr>
+        <p:style>
+          <a:lnRef idx="2">
+            <a:schemeClr val="accent1"/>
+          </a:lnRef>
+          <a:fillRef idx="0">
+            <a:schemeClr val="accent1"/>
+          </a:fillRef>
+          <a:effectRef idx="1">
+            <a:schemeClr val="accent1"/>
+          </a:effectRef>
+          <a:fontRef idx="minor">
+            <a:schemeClr val="tx1"/>
+          </a:fontRef>
+        </p:style>
+      </p:cxnSp>
+      <p:sp>
+        <p:nvSpPr>
+          <p:cNvPr id="7" name="文本框 6">
+            <a:extLst>
+              <a:ext uri="{FF2B5EF4-FFF2-40B4-BE49-F238E27FC236}">
+                <a16:creationId xmlns:a16="http://schemas.microsoft.com/office/drawing/2014/main" id="{1D746C54-8DEE-DBC7-AEE4-692691C43277}"/>
+              </a:ext>
+            </a:extLst>
+          </p:cNvPr>
+          <p:cNvSpPr txBox="1"/>
+          <p:nvPr/>
+        </p:nvSpPr>
+        <p:spPr>
+          <a:xfrm>
+            <a:off x="9041574" y="3218137"/>
+            <a:ext cx="449547" cy="338554"/>
+          </a:xfrm>
+          <a:prstGeom prst="rect">
+            <a:avLst/>
+          </a:prstGeom>
+          <a:noFill/>
+        </p:spPr>
+        <p:txBody>
+          <a:bodyPr wrap="none" rtlCol="0">
+            <a:spAutoFit/>
+          </a:bodyPr>
+          <a:lstStyle/>
+          <a:p>
+            <a:r>
+              <a:rPr lang="en-US" altLang="zh-CN" sz="1600" i="1" dirty="0">
+                <a:solidFill>
+                  <a:srgbClr val="DC143C"/>
+                </a:solidFill>
+                <a:latin typeface="Times New Roman" panose="02020603050405020304" pitchFamily="18" charset="0"/>
+                <a:cs typeface="Times New Roman" panose="02020603050405020304" pitchFamily="18" charset="0"/>
+              </a:rPr>
+              <a:t>L</a:t>
+            </a:r>
+            <a:r>
+              <a:rPr lang="en-US" altLang="zh-CN" sz="1600" i="1" baseline="-25000" dirty="0">
+                <a:solidFill>
+                  <a:srgbClr val="DC143C"/>
+                </a:solidFill>
+                <a:latin typeface="Times New Roman" panose="02020603050405020304" pitchFamily="18" charset="0"/>
+                <a:cs typeface="Times New Roman" panose="02020603050405020304" pitchFamily="18" charset="0"/>
+              </a:rPr>
+              <a:t>VT</a:t>
+            </a:r>
+            <a:endParaRPr lang="zh-CN" altLang="en-US" sz="1600" i="1" baseline="-25000" dirty="0">
+              <a:solidFill>
+                <a:srgbClr val="DC143C"/>
               </a:solidFill>
               <a:latin typeface="Times New Roman" panose="02020603050405020304" pitchFamily="18" charset="0"/>
               <a:cs typeface="Times New Roman" panose="02020603050405020304" pitchFamily="18" charset="0"/>
@@ -23865,7 +22072,7 @@
         </p:nvSpPr>
         <p:spPr>
           <a:xfrm>
-            <a:off x="9505724" y="856883"/>
+            <a:off x="9479550" y="856883"/>
             <a:ext cx="449547" cy="338554"/>
           </a:xfrm>
           <a:prstGeom prst="rect">
@@ -24063,8 +22270,8 @@
         </p:nvSpPr>
         <p:spPr>
           <a:xfrm>
-            <a:off x="268382" y="5554939"/>
-            <a:ext cx="393056" cy="338554"/>
+            <a:off x="374682" y="5573975"/>
+            <a:ext cx="276038" cy="338554"/>
           </a:xfrm>
           <a:prstGeom prst="rect">
             <a:avLst/>
@@ -24085,17 +22292,7 @@
                 <a:latin typeface="Times New Roman" panose="02020603050405020304" pitchFamily="18" charset="0"/>
                 <a:cs typeface="Times New Roman" panose="02020603050405020304" pitchFamily="18" charset="0"/>
               </a:rPr>
-              <a:t>X</a:t>
-            </a:r>
-            <a:r>
-              <a:rPr lang="en-US" altLang="zh-CN" sz="1600" i="1" baseline="-25000" dirty="0">
-                <a:solidFill>
-                  <a:srgbClr val="0000CD"/>
-                </a:solidFill>
-                <a:latin typeface="Times New Roman" panose="02020603050405020304" pitchFamily="18" charset="0"/>
-                <a:cs typeface="Times New Roman" panose="02020603050405020304" pitchFamily="18" charset="0"/>
-              </a:rPr>
-              <a:t>B</a:t>
+              <a:t>x</a:t>
             </a:r>
             <a:endParaRPr lang="zh-CN" altLang="en-US" sz="1600" i="1" baseline="-25000" dirty="0">
               <a:solidFill>
@@ -24121,8 +22318,8 @@
         </p:nvSpPr>
         <p:spPr>
           <a:xfrm>
-            <a:off x="1073226" y="5832663"/>
-            <a:ext cx="381836" cy="338554"/>
+            <a:off x="1132948" y="5762594"/>
+            <a:ext cx="264816" cy="338554"/>
           </a:xfrm>
           <a:prstGeom prst="rect">
             <a:avLst/>
@@ -24143,17 +22340,7 @@
                 <a:latin typeface="Times New Roman" panose="02020603050405020304" pitchFamily="18" charset="0"/>
                 <a:cs typeface="Times New Roman" panose="02020603050405020304" pitchFamily="18" charset="0"/>
               </a:rPr>
-              <a:t>Z</a:t>
-            </a:r>
-            <a:r>
-              <a:rPr lang="en-US" altLang="zh-CN" sz="1600" i="1" baseline="-25000" dirty="0">
-                <a:solidFill>
-                  <a:srgbClr val="0000CD"/>
-                </a:solidFill>
-                <a:latin typeface="Times New Roman" panose="02020603050405020304" pitchFamily="18" charset="0"/>
-                <a:cs typeface="Times New Roman" panose="02020603050405020304" pitchFamily="18" charset="0"/>
-              </a:rPr>
-              <a:t>B</a:t>
+              <a:t>z</a:t>
             </a:r>
             <a:endParaRPr lang="zh-CN" altLang="en-US" sz="1600" i="1" baseline="-25000" dirty="0">
               <a:solidFill>
@@ -24179,8 +22366,8 @@
         </p:nvSpPr>
         <p:spPr>
           <a:xfrm>
-            <a:off x="1073226" y="4748984"/>
-            <a:ext cx="381836" cy="338554"/>
+            <a:off x="1121726" y="4799836"/>
+            <a:ext cx="276038" cy="338554"/>
           </a:xfrm>
           <a:prstGeom prst="rect">
             <a:avLst/>
@@ -24201,17 +22388,7 @@
                 <a:latin typeface="Times New Roman" panose="02020603050405020304" pitchFamily="18" charset="0"/>
                 <a:cs typeface="Times New Roman" panose="02020603050405020304" pitchFamily="18" charset="0"/>
               </a:rPr>
-              <a:t>Y</a:t>
-            </a:r>
-            <a:r>
-              <a:rPr lang="en-US" altLang="zh-CN" sz="1600" i="1" baseline="-25000" dirty="0">
-                <a:solidFill>
-                  <a:srgbClr val="0000CD"/>
-                </a:solidFill>
-                <a:latin typeface="Times New Roman" panose="02020603050405020304" pitchFamily="18" charset="0"/>
-                <a:cs typeface="Times New Roman" panose="02020603050405020304" pitchFamily="18" charset="0"/>
-              </a:rPr>
-              <a:t>B</a:t>
+              <a:t>y</a:t>
             </a:r>
             <a:endParaRPr lang="zh-CN" altLang="en-US" sz="1600" i="1" baseline="-25000" dirty="0">
               <a:solidFill>
@@ -24290,9 +22467,9 @@
           <p:nvPr/>
         </p:nvCxnSpPr>
         <p:spPr>
-          <a:xfrm flipV="1">
-            <a:off x="7061200" y="4748984"/>
-            <a:ext cx="96097" cy="123583"/>
+          <a:xfrm flipH="1" flipV="1">
+            <a:off x="3279775" y="4752476"/>
+            <a:ext cx="82550" cy="113184"/>
           </a:xfrm>
           <a:prstGeom prst="straightConnector1">
             <a:avLst/>
@@ -24379,7 +22556,7 @@
         </p:nvCxnSpPr>
         <p:spPr>
           <a:xfrm>
-            <a:off x="4343400" y="2548466"/>
+            <a:off x="4343400" y="2105026"/>
             <a:ext cx="5109977" cy="0"/>
           </a:xfrm>
           <a:prstGeom prst="straightConnector1">
@@ -24391,49 +22568,6 @@
             </a:solidFill>
             <a:headEnd type="triangle"/>
             <a:tailEnd type="triangle"/>
-          </a:ln>
-        </p:spPr>
-        <p:style>
-          <a:lnRef idx="2">
-            <a:schemeClr val="accent1"/>
-          </a:lnRef>
-          <a:fillRef idx="0">
-            <a:schemeClr val="accent1"/>
-          </a:fillRef>
-          <a:effectRef idx="1">
-            <a:schemeClr val="accent1"/>
-          </a:effectRef>
-          <a:fontRef idx="minor">
-            <a:schemeClr val="tx1"/>
-          </a:fontRef>
-        </p:style>
-      </p:cxnSp>
-      <p:cxnSp>
-        <p:nvCxnSpPr>
-          <p:cNvPr id="42" name="直接连接符 41">
-            <a:extLst>
-              <a:ext uri="{FF2B5EF4-FFF2-40B4-BE49-F238E27FC236}">
-                <a16:creationId xmlns:a16="http://schemas.microsoft.com/office/drawing/2014/main" id="{8701D711-4C16-8C03-77C8-7C73B02F717A}"/>
-              </a:ext>
-            </a:extLst>
-          </p:cNvPr>
-          <p:cNvCxnSpPr>
-            <a:cxnSpLocks/>
-          </p:cNvCxnSpPr>
-          <p:nvPr/>
-        </p:nvCxnSpPr>
-        <p:spPr>
-          <a:xfrm>
-            <a:off x="9453377" y="2193925"/>
-            <a:ext cx="0" cy="476250"/>
-          </a:xfrm>
-          <a:prstGeom prst="line">
-            <a:avLst/>
-          </a:prstGeom>
-          <a:ln w="12700">
-            <a:solidFill>
-              <a:srgbClr val="0000CD"/>
-            </a:solidFill>
           </a:ln>
         </p:spPr>
         <p:style>
@@ -24467,8 +22601,8 @@
         </p:nvCxnSpPr>
         <p:spPr>
           <a:xfrm>
-            <a:off x="4343399" y="2351617"/>
-            <a:ext cx="0" cy="450850"/>
+            <a:off x="4343399" y="1963738"/>
+            <a:ext cx="0" cy="589491"/>
           </a:xfrm>
           <a:prstGeom prst="line">
             <a:avLst/>
@@ -24508,7 +22642,7 @@
         </p:nvSpPr>
         <p:spPr>
           <a:xfrm>
-            <a:off x="6660128" y="2146413"/>
+            <a:off x="6697852" y="1747311"/>
             <a:ext cx="401072" cy="338554"/>
           </a:xfrm>
           <a:prstGeom prst="rect">
@@ -24636,7 +22770,7 @@
         </p:nvSpPr>
         <p:spPr>
           <a:xfrm>
-            <a:off x="5959455" y="4193428"/>
+            <a:off x="3466113" y="4400242"/>
             <a:ext cx="1401346" cy="502702"/>
           </a:xfrm>
           <a:prstGeom prst="rect">
@@ -24683,6 +22817,1382 @@
               <a:t>(rotor reaction torque)</a:t>
             </a:r>
             <a:endParaRPr lang="zh-CN" altLang="en-US" sz="1600" baseline="-25000" dirty="0">
+              <a:solidFill>
+                <a:srgbClr val="DC143C"/>
+              </a:solidFill>
+              <a:latin typeface="Times New Roman" panose="02020603050405020304" pitchFamily="18" charset="0"/>
+              <a:cs typeface="Times New Roman" panose="02020603050405020304" pitchFamily="18" charset="0"/>
+            </a:endParaRPr>
+          </a:p>
+        </p:txBody>
+      </p:sp>
+      <p:cxnSp>
+        <p:nvCxnSpPr>
+          <p:cNvPr id="2" name="直接箭头连接符 1">
+            <a:extLst>
+              <a:ext uri="{FF2B5EF4-FFF2-40B4-BE49-F238E27FC236}">
+                <a16:creationId xmlns:a16="http://schemas.microsoft.com/office/drawing/2014/main" id="{A4B13EC4-2D02-F1F2-C310-288E80243905}"/>
+              </a:ext>
+            </a:extLst>
+          </p:cNvPr>
+          <p:cNvCxnSpPr>
+            <a:cxnSpLocks/>
+          </p:cNvCxnSpPr>
+          <p:nvPr/>
+        </p:nvCxnSpPr>
+        <p:spPr>
+          <a:xfrm flipV="1">
+            <a:off x="4343399" y="2628900"/>
+            <a:ext cx="0" cy="476412"/>
+          </a:xfrm>
+          <a:prstGeom prst="straightConnector1">
+            <a:avLst/>
+          </a:prstGeom>
+          <a:ln w="12700">
+            <a:solidFill>
+              <a:srgbClr val="DC143C"/>
+            </a:solidFill>
+            <a:tailEnd type="triangle"/>
+          </a:ln>
+        </p:spPr>
+        <p:style>
+          <a:lnRef idx="2">
+            <a:schemeClr val="accent1"/>
+          </a:lnRef>
+          <a:fillRef idx="0">
+            <a:schemeClr val="accent1"/>
+          </a:fillRef>
+          <a:effectRef idx="1">
+            <a:schemeClr val="accent1"/>
+          </a:effectRef>
+          <a:fontRef idx="minor">
+            <a:schemeClr val="tx1"/>
+          </a:fontRef>
+        </p:style>
+      </p:cxnSp>
+      <p:sp>
+        <p:nvSpPr>
+          <p:cNvPr id="6" name="文本框 5">
+            <a:extLst>
+              <a:ext uri="{FF2B5EF4-FFF2-40B4-BE49-F238E27FC236}">
+                <a16:creationId xmlns:a16="http://schemas.microsoft.com/office/drawing/2014/main" id="{9700E06F-C76F-24DC-265D-8FF8611C4CE5}"/>
+              </a:ext>
+            </a:extLst>
+          </p:cNvPr>
+          <p:cNvSpPr txBox="1"/>
+          <p:nvPr/>
+        </p:nvSpPr>
+        <p:spPr>
+          <a:xfrm>
+            <a:off x="4330004" y="2503682"/>
+            <a:ext cx="381836" cy="338554"/>
+          </a:xfrm>
+          <a:prstGeom prst="rect">
+            <a:avLst/>
+          </a:prstGeom>
+          <a:noFill/>
+        </p:spPr>
+        <p:txBody>
+          <a:bodyPr wrap="none" rtlCol="0">
+            <a:spAutoFit/>
+          </a:bodyPr>
+          <a:lstStyle/>
+          <a:p>
+            <a:r>
+              <a:rPr lang="en-US" altLang="zh-CN" sz="1600" i="1" dirty="0">
+                <a:solidFill>
+                  <a:srgbClr val="DC143C"/>
+                </a:solidFill>
+                <a:latin typeface="Times New Roman" panose="02020603050405020304" pitchFamily="18" charset="0"/>
+                <a:cs typeface="Times New Roman" panose="02020603050405020304" pitchFamily="18" charset="0"/>
+              </a:rPr>
+              <a:t>Y</a:t>
+            </a:r>
+            <a:r>
+              <a:rPr lang="en-US" altLang="zh-CN" sz="1600" i="1" baseline="-25000" dirty="0">
+                <a:solidFill>
+                  <a:srgbClr val="DC143C"/>
+                </a:solidFill>
+                <a:latin typeface="Times New Roman" panose="02020603050405020304" pitchFamily="18" charset="0"/>
+                <a:cs typeface="Times New Roman" panose="02020603050405020304" pitchFamily="18" charset="0"/>
+              </a:rPr>
+              <a:t>F</a:t>
+            </a:r>
+            <a:endParaRPr lang="zh-CN" altLang="en-US" sz="1600" i="1" baseline="-25000" dirty="0">
+              <a:solidFill>
+                <a:srgbClr val="DC143C"/>
+              </a:solidFill>
+              <a:latin typeface="Times New Roman" panose="02020603050405020304" pitchFamily="18" charset="0"/>
+              <a:cs typeface="Times New Roman" panose="02020603050405020304" pitchFamily="18" charset="0"/>
+            </a:endParaRPr>
+          </a:p>
+        </p:txBody>
+      </p:sp>
+      <p:sp>
+        <p:nvSpPr>
+          <p:cNvPr id="22" name="文本框 21">
+            <a:extLst>
+              <a:ext uri="{FF2B5EF4-FFF2-40B4-BE49-F238E27FC236}">
+                <a16:creationId xmlns:a16="http://schemas.microsoft.com/office/drawing/2014/main" id="{4226639B-0001-43F7-B0EA-0D705E8B5890}"/>
+              </a:ext>
+            </a:extLst>
+          </p:cNvPr>
+          <p:cNvSpPr txBox="1"/>
+          <p:nvPr/>
+        </p:nvSpPr>
+        <p:spPr>
+          <a:xfrm>
+            <a:off x="5624877" y="3088881"/>
+            <a:ext cx="1043876" cy="338554"/>
+          </a:xfrm>
+          <a:prstGeom prst="rect">
+            <a:avLst/>
+          </a:prstGeom>
+          <a:noFill/>
+          <a:ln>
+            <a:noFill/>
+          </a:ln>
+        </p:spPr>
+        <p:txBody>
+          <a:bodyPr wrap="none" rtlCol="0">
+            <a:spAutoFit/>
+          </a:bodyPr>
+          <a:lstStyle/>
+          <a:p>
+            <a:r>
+              <a:rPr lang="en-US" altLang="zh-CN" sz="1600" i="1" dirty="0">
+                <a:solidFill>
+                  <a:srgbClr val="DC143C"/>
+                </a:solidFill>
+                <a:latin typeface="Times New Roman" panose="02020603050405020304" pitchFamily="18" charset="0"/>
+                <a:cs typeface="Times New Roman" panose="02020603050405020304" pitchFamily="18" charset="0"/>
+              </a:rPr>
+              <a:t>H</a:t>
+            </a:r>
+            <a:r>
+              <a:rPr lang="en-US" altLang="zh-CN" sz="1600" i="1" baseline="-25000" dirty="0">
+                <a:solidFill>
+                  <a:srgbClr val="DC143C"/>
+                </a:solidFill>
+                <a:latin typeface="Times New Roman" panose="02020603050405020304" pitchFamily="18" charset="0"/>
+                <a:cs typeface="Times New Roman" panose="02020603050405020304" pitchFamily="18" charset="0"/>
+              </a:rPr>
+              <a:t>LR </a:t>
+            </a:r>
+            <a:r>
+              <a:rPr lang="en-US" altLang="zh-CN" sz="1600" i="1" dirty="0">
+                <a:solidFill>
+                  <a:srgbClr val="DC143C"/>
+                </a:solidFill>
+                <a:latin typeface="Times New Roman" panose="02020603050405020304" pitchFamily="18" charset="0"/>
+                <a:cs typeface="Times New Roman" panose="02020603050405020304" pitchFamily="18" charset="0"/>
+              </a:rPr>
+              <a:t>+ H</a:t>
+            </a:r>
+            <a:r>
+              <a:rPr lang="en-US" altLang="zh-CN" sz="1600" i="1" baseline="-25000" dirty="0">
+                <a:solidFill>
+                  <a:srgbClr val="DC143C"/>
+                </a:solidFill>
+                <a:latin typeface="Times New Roman" panose="02020603050405020304" pitchFamily="18" charset="0"/>
+                <a:cs typeface="Times New Roman" panose="02020603050405020304" pitchFamily="18" charset="0"/>
+              </a:rPr>
+              <a:t>UR</a:t>
+            </a:r>
+            <a:endParaRPr lang="zh-CN" altLang="en-US" sz="1600" i="1" baseline="-25000" dirty="0">
+              <a:solidFill>
+                <a:srgbClr val="DC143C"/>
+              </a:solidFill>
+              <a:latin typeface="Times New Roman" panose="02020603050405020304" pitchFamily="18" charset="0"/>
+              <a:cs typeface="Times New Roman" panose="02020603050405020304" pitchFamily="18" charset="0"/>
+            </a:endParaRPr>
+          </a:p>
+        </p:txBody>
+      </p:sp>
+      <p:cxnSp>
+        <p:nvCxnSpPr>
+          <p:cNvPr id="25" name="直接箭头连接符 24">
+            <a:extLst>
+              <a:ext uri="{FF2B5EF4-FFF2-40B4-BE49-F238E27FC236}">
+                <a16:creationId xmlns:a16="http://schemas.microsoft.com/office/drawing/2014/main" id="{585188A3-2425-D867-BB54-8713386C8D59}"/>
+              </a:ext>
+            </a:extLst>
+          </p:cNvPr>
+          <p:cNvCxnSpPr>
+            <a:cxnSpLocks/>
+          </p:cNvCxnSpPr>
+          <p:nvPr/>
+        </p:nvCxnSpPr>
+        <p:spPr>
+          <a:xfrm>
+            <a:off x="5314950" y="3454694"/>
+            <a:ext cx="1428750" cy="0"/>
+          </a:xfrm>
+          <a:prstGeom prst="straightConnector1">
+            <a:avLst/>
+          </a:prstGeom>
+          <a:ln w="12700">
+            <a:solidFill>
+              <a:srgbClr val="DC143C"/>
+            </a:solidFill>
+            <a:tailEnd type="triangle"/>
+          </a:ln>
+        </p:spPr>
+        <p:style>
+          <a:lnRef idx="2">
+            <a:schemeClr val="accent1"/>
+          </a:lnRef>
+          <a:fillRef idx="0">
+            <a:schemeClr val="accent1"/>
+          </a:fillRef>
+          <a:effectRef idx="1">
+            <a:schemeClr val="accent1"/>
+          </a:effectRef>
+          <a:fontRef idx="minor">
+            <a:schemeClr val="tx1"/>
+          </a:fontRef>
+        </p:style>
+      </p:cxnSp>
+      <p:cxnSp>
+        <p:nvCxnSpPr>
+          <p:cNvPr id="30" name="直接箭头连接符 29">
+            <a:extLst>
+              <a:ext uri="{FF2B5EF4-FFF2-40B4-BE49-F238E27FC236}">
+                <a16:creationId xmlns:a16="http://schemas.microsoft.com/office/drawing/2014/main" id="{C0EE0300-66D0-0AA6-766D-E4F38CFC8D77}"/>
+              </a:ext>
+            </a:extLst>
+          </p:cNvPr>
+          <p:cNvCxnSpPr>
+            <a:cxnSpLocks/>
+          </p:cNvCxnSpPr>
+          <p:nvPr/>
+        </p:nvCxnSpPr>
+        <p:spPr>
+          <a:xfrm flipV="1">
+            <a:off x="5231341" y="2567517"/>
+            <a:ext cx="0" cy="805393"/>
+          </a:xfrm>
+          <a:prstGeom prst="straightConnector1">
+            <a:avLst/>
+          </a:prstGeom>
+          <a:ln w="12700">
+            <a:solidFill>
+              <a:srgbClr val="DC143C"/>
+            </a:solidFill>
+            <a:tailEnd type="triangle"/>
+          </a:ln>
+        </p:spPr>
+        <p:style>
+          <a:lnRef idx="2">
+            <a:schemeClr val="accent1"/>
+          </a:lnRef>
+          <a:fillRef idx="0">
+            <a:schemeClr val="accent1"/>
+          </a:fillRef>
+          <a:effectRef idx="1">
+            <a:schemeClr val="accent1"/>
+          </a:effectRef>
+          <a:fontRef idx="minor">
+            <a:schemeClr val="tx1"/>
+          </a:fontRef>
+        </p:style>
+      </p:cxnSp>
+      <p:sp>
+        <p:nvSpPr>
+          <p:cNvPr id="35" name="文本框 34">
+            <a:extLst>
+              <a:ext uri="{FF2B5EF4-FFF2-40B4-BE49-F238E27FC236}">
+                <a16:creationId xmlns:a16="http://schemas.microsoft.com/office/drawing/2014/main" id="{5B806E30-E46B-7D19-A740-208391EA72B9}"/>
+              </a:ext>
+            </a:extLst>
+          </p:cNvPr>
+          <p:cNvSpPr txBox="1"/>
+          <p:nvPr/>
+        </p:nvSpPr>
+        <p:spPr>
+          <a:xfrm>
+            <a:off x="5223933" y="2478271"/>
+            <a:ext cx="976549" cy="338554"/>
+          </a:xfrm>
+          <a:prstGeom prst="rect">
+            <a:avLst/>
+          </a:prstGeom>
+          <a:gradFill>
+            <a:gsLst>
+              <a:gs pos="13000">
+                <a:schemeClr val="bg1"/>
+              </a:gs>
+              <a:gs pos="76000">
+                <a:schemeClr val="bg1">
+                  <a:alpha val="0"/>
+                </a:schemeClr>
+              </a:gs>
+            </a:gsLst>
+            <a:path path="circle">
+              <a:fillToRect l="50000" t="50000" r="50000" b="50000"/>
+            </a:path>
+          </a:gradFill>
+          <a:ln>
+            <a:noFill/>
+          </a:ln>
+        </p:spPr>
+        <p:txBody>
+          <a:bodyPr wrap="none" rtlCol="0">
+            <a:spAutoFit/>
+          </a:bodyPr>
+          <a:lstStyle/>
+          <a:p>
+            <a:r>
+              <a:rPr lang="en-US" altLang="zh-CN" sz="1600" i="1" dirty="0">
+                <a:solidFill>
+                  <a:srgbClr val="DC143C"/>
+                </a:solidFill>
+                <a:latin typeface="Times New Roman" panose="02020603050405020304" pitchFamily="18" charset="0"/>
+                <a:cs typeface="Times New Roman" panose="02020603050405020304" pitchFamily="18" charset="0"/>
+              </a:rPr>
+              <a:t>Y</a:t>
+            </a:r>
+            <a:r>
+              <a:rPr lang="en-US" altLang="zh-CN" sz="1600" i="1" baseline="-25000" dirty="0">
+                <a:solidFill>
+                  <a:srgbClr val="DC143C"/>
+                </a:solidFill>
+                <a:latin typeface="Times New Roman" panose="02020603050405020304" pitchFamily="18" charset="0"/>
+                <a:cs typeface="Times New Roman" panose="02020603050405020304" pitchFamily="18" charset="0"/>
+              </a:rPr>
+              <a:t>LR </a:t>
+            </a:r>
+            <a:r>
+              <a:rPr lang="en-US" altLang="zh-CN" sz="1600" i="1" dirty="0">
+                <a:solidFill>
+                  <a:srgbClr val="DC143C"/>
+                </a:solidFill>
+                <a:latin typeface="Times New Roman" panose="02020603050405020304" pitchFamily="18" charset="0"/>
+                <a:cs typeface="Times New Roman" panose="02020603050405020304" pitchFamily="18" charset="0"/>
+              </a:rPr>
+              <a:t>+ Y</a:t>
+            </a:r>
+            <a:r>
+              <a:rPr lang="en-US" altLang="zh-CN" sz="1600" i="1" baseline="-25000" dirty="0">
+                <a:solidFill>
+                  <a:srgbClr val="DC143C"/>
+                </a:solidFill>
+                <a:latin typeface="Times New Roman" panose="02020603050405020304" pitchFamily="18" charset="0"/>
+                <a:cs typeface="Times New Roman" panose="02020603050405020304" pitchFamily="18" charset="0"/>
+              </a:rPr>
+              <a:t>UR</a:t>
+            </a:r>
+            <a:endParaRPr lang="zh-CN" altLang="en-US" sz="1600" i="1" baseline="-25000" dirty="0">
+              <a:solidFill>
+                <a:srgbClr val="DC143C"/>
+              </a:solidFill>
+              <a:latin typeface="Times New Roman" panose="02020603050405020304" pitchFamily="18" charset="0"/>
+              <a:cs typeface="Times New Roman" panose="02020603050405020304" pitchFamily="18" charset="0"/>
+            </a:endParaRPr>
+          </a:p>
+        </p:txBody>
+      </p:sp>
+      <p:cxnSp>
+        <p:nvCxnSpPr>
+          <p:cNvPr id="37" name="直接箭头连接符 36">
+            <a:extLst>
+              <a:ext uri="{FF2B5EF4-FFF2-40B4-BE49-F238E27FC236}">
+                <a16:creationId xmlns:a16="http://schemas.microsoft.com/office/drawing/2014/main" id="{0CFD51FD-AF08-0001-FA2A-150037603E7F}"/>
+              </a:ext>
+            </a:extLst>
+          </p:cNvPr>
+          <p:cNvCxnSpPr>
+            <a:cxnSpLocks/>
+          </p:cNvCxnSpPr>
+          <p:nvPr/>
+        </p:nvCxnSpPr>
+        <p:spPr>
+          <a:xfrm flipH="1">
+            <a:off x="4594132" y="3462922"/>
+            <a:ext cx="555718" cy="215378"/>
+          </a:xfrm>
+          <a:prstGeom prst="straightConnector1">
+            <a:avLst/>
+          </a:prstGeom>
+          <a:ln w="12700">
+            <a:solidFill>
+              <a:srgbClr val="DC143C"/>
+            </a:solidFill>
+            <a:tailEnd type="triangle"/>
+          </a:ln>
+        </p:spPr>
+        <p:style>
+          <a:lnRef idx="2">
+            <a:schemeClr val="accent1"/>
+          </a:lnRef>
+          <a:fillRef idx="0">
+            <a:schemeClr val="accent1"/>
+          </a:fillRef>
+          <a:effectRef idx="1">
+            <a:schemeClr val="accent1"/>
+          </a:effectRef>
+          <a:fontRef idx="minor">
+            <a:schemeClr val="tx1"/>
+          </a:fontRef>
+        </p:style>
+      </p:cxnSp>
+      <p:sp>
+        <p:nvSpPr>
+          <p:cNvPr id="41" name="文本框 40">
+            <a:extLst>
+              <a:ext uri="{FF2B5EF4-FFF2-40B4-BE49-F238E27FC236}">
+                <a16:creationId xmlns:a16="http://schemas.microsoft.com/office/drawing/2014/main" id="{784151CB-C975-343E-6987-A065C851DAAF}"/>
+              </a:ext>
+            </a:extLst>
+          </p:cNvPr>
+          <p:cNvSpPr txBox="1"/>
+          <p:nvPr/>
+        </p:nvSpPr>
+        <p:spPr>
+          <a:xfrm>
+            <a:off x="4181081" y="3556798"/>
+            <a:ext cx="481222" cy="338554"/>
+          </a:xfrm>
+          <a:prstGeom prst="rect">
+            <a:avLst/>
+          </a:prstGeom>
+          <a:noFill/>
+        </p:spPr>
+        <p:txBody>
+          <a:bodyPr wrap="none" rtlCol="0">
+            <a:spAutoFit/>
+          </a:bodyPr>
+          <a:lstStyle/>
+          <a:p>
+            <a:r>
+              <a:rPr lang="en-US" altLang="zh-CN" sz="1600" i="1" dirty="0">
+                <a:solidFill>
+                  <a:srgbClr val="DC143C"/>
+                </a:solidFill>
+                <a:latin typeface="Times New Roman" panose="02020603050405020304" pitchFamily="18" charset="0"/>
+                <a:cs typeface="Times New Roman" panose="02020603050405020304" pitchFamily="18" charset="0"/>
+              </a:rPr>
+              <a:t>T</a:t>
+            </a:r>
+            <a:r>
+              <a:rPr lang="en-US" altLang="zh-CN" sz="1600" i="1" baseline="-25000" dirty="0">
+                <a:solidFill>
+                  <a:srgbClr val="DC143C"/>
+                </a:solidFill>
+                <a:latin typeface="Times New Roman" panose="02020603050405020304" pitchFamily="18" charset="0"/>
+                <a:cs typeface="Times New Roman" panose="02020603050405020304" pitchFamily="18" charset="0"/>
+              </a:rPr>
+              <a:t>UR</a:t>
+            </a:r>
+            <a:endParaRPr lang="zh-CN" altLang="en-US" sz="1600" i="1" baseline="-25000" dirty="0">
+              <a:solidFill>
+                <a:srgbClr val="DC143C"/>
+              </a:solidFill>
+              <a:latin typeface="Times New Roman" panose="02020603050405020304" pitchFamily="18" charset="0"/>
+              <a:cs typeface="Times New Roman" panose="02020603050405020304" pitchFamily="18" charset="0"/>
+            </a:endParaRPr>
+          </a:p>
+        </p:txBody>
+      </p:sp>
+      <p:cxnSp>
+        <p:nvCxnSpPr>
+          <p:cNvPr id="46" name="直接箭头连接符 45">
+            <a:extLst>
+              <a:ext uri="{FF2B5EF4-FFF2-40B4-BE49-F238E27FC236}">
+                <a16:creationId xmlns:a16="http://schemas.microsoft.com/office/drawing/2014/main" id="{DD3F70FD-8DC4-00CB-65BE-08E8228B12BA}"/>
+              </a:ext>
+            </a:extLst>
+          </p:cNvPr>
+          <p:cNvCxnSpPr>
+            <a:cxnSpLocks/>
+          </p:cNvCxnSpPr>
+          <p:nvPr/>
+        </p:nvCxnSpPr>
+        <p:spPr>
+          <a:xfrm flipH="1">
+            <a:off x="4554281" y="3454694"/>
+            <a:ext cx="595569" cy="116369"/>
+          </a:xfrm>
+          <a:prstGeom prst="straightConnector1">
+            <a:avLst/>
+          </a:prstGeom>
+          <a:ln w="12700">
+            <a:solidFill>
+              <a:srgbClr val="DC143C"/>
+            </a:solidFill>
+            <a:tailEnd type="triangle"/>
+          </a:ln>
+        </p:spPr>
+        <p:style>
+          <a:lnRef idx="2">
+            <a:schemeClr val="accent1"/>
+          </a:lnRef>
+          <a:fillRef idx="0">
+            <a:schemeClr val="accent1"/>
+          </a:fillRef>
+          <a:effectRef idx="1">
+            <a:schemeClr val="accent1"/>
+          </a:effectRef>
+          <a:fontRef idx="minor">
+            <a:schemeClr val="tx1"/>
+          </a:fontRef>
+        </p:style>
+      </p:cxnSp>
+      <p:sp>
+        <p:nvSpPr>
+          <p:cNvPr id="55" name="文本框 54">
+            <a:extLst>
+              <a:ext uri="{FF2B5EF4-FFF2-40B4-BE49-F238E27FC236}">
+                <a16:creationId xmlns:a16="http://schemas.microsoft.com/office/drawing/2014/main" id="{6A77F17C-8C65-7FDA-DAC3-98A8468E9257}"/>
+              </a:ext>
+            </a:extLst>
+          </p:cNvPr>
+          <p:cNvSpPr txBox="1"/>
+          <p:nvPr/>
+        </p:nvSpPr>
+        <p:spPr>
+          <a:xfrm>
+            <a:off x="4389872" y="3178996"/>
+            <a:ext cx="457176" cy="338554"/>
+          </a:xfrm>
+          <a:prstGeom prst="rect">
+            <a:avLst/>
+          </a:prstGeom>
+          <a:noFill/>
+        </p:spPr>
+        <p:txBody>
+          <a:bodyPr wrap="none" rtlCol="0">
+            <a:spAutoFit/>
+          </a:bodyPr>
+          <a:lstStyle/>
+          <a:p>
+            <a:r>
+              <a:rPr lang="en-US" altLang="zh-CN" sz="1600" i="1" dirty="0">
+                <a:solidFill>
+                  <a:srgbClr val="DC143C"/>
+                </a:solidFill>
+                <a:latin typeface="Times New Roman" panose="02020603050405020304" pitchFamily="18" charset="0"/>
+                <a:cs typeface="Times New Roman" panose="02020603050405020304" pitchFamily="18" charset="0"/>
+              </a:rPr>
+              <a:t>T</a:t>
+            </a:r>
+            <a:r>
+              <a:rPr lang="en-US" altLang="zh-CN" sz="1600" i="1" baseline="-25000" dirty="0">
+                <a:solidFill>
+                  <a:srgbClr val="DC143C"/>
+                </a:solidFill>
+                <a:latin typeface="Times New Roman" panose="02020603050405020304" pitchFamily="18" charset="0"/>
+                <a:cs typeface="Times New Roman" panose="02020603050405020304" pitchFamily="18" charset="0"/>
+              </a:rPr>
+              <a:t>LR</a:t>
+            </a:r>
+            <a:endParaRPr lang="zh-CN" altLang="en-US" sz="1600" i="1" baseline="-25000" dirty="0">
+              <a:solidFill>
+                <a:srgbClr val="DC143C"/>
+              </a:solidFill>
+              <a:latin typeface="Times New Roman" panose="02020603050405020304" pitchFamily="18" charset="0"/>
+              <a:cs typeface="Times New Roman" panose="02020603050405020304" pitchFamily="18" charset="0"/>
+            </a:endParaRPr>
+          </a:p>
+        </p:txBody>
+      </p:sp>
+      <p:cxnSp>
+        <p:nvCxnSpPr>
+          <p:cNvPr id="59" name="直接箭头连接符 58">
+            <a:extLst>
+              <a:ext uri="{FF2B5EF4-FFF2-40B4-BE49-F238E27FC236}">
+                <a16:creationId xmlns:a16="http://schemas.microsoft.com/office/drawing/2014/main" id="{F10ACB7C-C2E9-4CE3-47D4-C342C45DC8E8}"/>
+              </a:ext>
+            </a:extLst>
+          </p:cNvPr>
+          <p:cNvCxnSpPr>
+            <a:cxnSpLocks/>
+          </p:cNvCxnSpPr>
+          <p:nvPr/>
+        </p:nvCxnSpPr>
+        <p:spPr>
+          <a:xfrm>
+            <a:off x="4343399" y="2462742"/>
+            <a:ext cx="880534" cy="0"/>
+          </a:xfrm>
+          <a:prstGeom prst="straightConnector1">
+            <a:avLst/>
+          </a:prstGeom>
+          <a:ln w="12700">
+            <a:solidFill>
+              <a:srgbClr val="0000CD"/>
+            </a:solidFill>
+            <a:headEnd type="triangle"/>
+            <a:tailEnd type="triangle"/>
+          </a:ln>
+        </p:spPr>
+        <p:style>
+          <a:lnRef idx="2">
+            <a:schemeClr val="accent1"/>
+          </a:lnRef>
+          <a:fillRef idx="0">
+            <a:schemeClr val="accent1"/>
+          </a:fillRef>
+          <a:effectRef idx="1">
+            <a:schemeClr val="accent1"/>
+          </a:effectRef>
+          <a:fontRef idx="minor">
+            <a:schemeClr val="tx1"/>
+          </a:fontRef>
+        </p:style>
+      </p:cxnSp>
+      <p:cxnSp>
+        <p:nvCxnSpPr>
+          <p:cNvPr id="61" name="直接箭头连接符 60">
+            <a:extLst>
+              <a:ext uri="{FF2B5EF4-FFF2-40B4-BE49-F238E27FC236}">
+                <a16:creationId xmlns:a16="http://schemas.microsoft.com/office/drawing/2014/main" id="{1E941D0A-CFDC-950C-79E6-4F2B6E587315}"/>
+              </a:ext>
+            </a:extLst>
+          </p:cNvPr>
+          <p:cNvCxnSpPr>
+            <a:cxnSpLocks/>
+          </p:cNvCxnSpPr>
+          <p:nvPr/>
+        </p:nvCxnSpPr>
+        <p:spPr>
+          <a:xfrm>
+            <a:off x="4343399" y="3241039"/>
+            <a:ext cx="0" cy="205396"/>
+          </a:xfrm>
+          <a:prstGeom prst="straightConnector1">
+            <a:avLst/>
+          </a:prstGeom>
+          <a:ln w="12700">
+            <a:solidFill>
+              <a:srgbClr val="0000CD"/>
+            </a:solidFill>
+            <a:headEnd type="triangle"/>
+            <a:tailEnd type="triangle"/>
+          </a:ln>
+        </p:spPr>
+        <p:style>
+          <a:lnRef idx="2">
+            <a:schemeClr val="accent1"/>
+          </a:lnRef>
+          <a:fillRef idx="0">
+            <a:schemeClr val="accent1"/>
+          </a:fillRef>
+          <a:effectRef idx="1">
+            <a:schemeClr val="accent1"/>
+          </a:effectRef>
+          <a:fontRef idx="minor">
+            <a:schemeClr val="tx1"/>
+          </a:fontRef>
+        </p:style>
+      </p:cxnSp>
+      <p:cxnSp>
+        <p:nvCxnSpPr>
+          <p:cNvPr id="64" name="直接连接符 63">
+            <a:extLst>
+              <a:ext uri="{FF2B5EF4-FFF2-40B4-BE49-F238E27FC236}">
+                <a16:creationId xmlns:a16="http://schemas.microsoft.com/office/drawing/2014/main" id="{0583C440-FD44-1D4D-E1B6-A27D98A74663}"/>
+              </a:ext>
+            </a:extLst>
+          </p:cNvPr>
+          <p:cNvCxnSpPr>
+            <a:cxnSpLocks/>
+          </p:cNvCxnSpPr>
+          <p:nvPr/>
+        </p:nvCxnSpPr>
+        <p:spPr>
+          <a:xfrm flipH="1">
+            <a:off x="4277504" y="3451258"/>
+            <a:ext cx="144188" cy="0"/>
+          </a:xfrm>
+          <a:prstGeom prst="line">
+            <a:avLst/>
+          </a:prstGeom>
+          <a:ln w="12700">
+            <a:solidFill>
+              <a:srgbClr val="0000CD"/>
+            </a:solidFill>
+          </a:ln>
+        </p:spPr>
+        <p:style>
+          <a:lnRef idx="2">
+            <a:schemeClr val="accent1"/>
+          </a:lnRef>
+          <a:fillRef idx="0">
+            <a:schemeClr val="accent1"/>
+          </a:fillRef>
+          <a:effectRef idx="1">
+            <a:schemeClr val="accent1"/>
+          </a:effectRef>
+          <a:fontRef idx="minor">
+            <a:schemeClr val="tx1"/>
+          </a:fontRef>
+        </p:style>
+      </p:cxnSp>
+      <p:sp>
+        <p:nvSpPr>
+          <p:cNvPr id="74" name="文本框 73">
+            <a:extLst>
+              <a:ext uri="{FF2B5EF4-FFF2-40B4-BE49-F238E27FC236}">
+                <a16:creationId xmlns:a16="http://schemas.microsoft.com/office/drawing/2014/main" id="{5B5F92B9-05C2-A7CD-9D02-AB11C8B66D90}"/>
+              </a:ext>
+            </a:extLst>
+          </p:cNvPr>
+          <p:cNvSpPr txBox="1"/>
+          <p:nvPr/>
+        </p:nvSpPr>
+        <p:spPr>
+          <a:xfrm>
+            <a:off x="4580098" y="2107452"/>
+            <a:ext cx="466794" cy="338554"/>
+          </a:xfrm>
+          <a:prstGeom prst="rect">
+            <a:avLst/>
+          </a:prstGeom>
+          <a:noFill/>
+        </p:spPr>
+        <p:txBody>
+          <a:bodyPr wrap="none" rtlCol="0">
+            <a:spAutoFit/>
+          </a:bodyPr>
+          <a:lstStyle/>
+          <a:p>
+            <a:r>
+              <a:rPr lang="en-US" altLang="zh-CN" sz="1600" i="1" dirty="0" err="1">
+                <a:solidFill>
+                  <a:srgbClr val="0000CD"/>
+                </a:solidFill>
+                <a:latin typeface="Times New Roman" panose="02020603050405020304" pitchFamily="18" charset="0"/>
+                <a:cs typeface="Times New Roman" panose="02020603050405020304" pitchFamily="18" charset="0"/>
+              </a:rPr>
+              <a:t>x</a:t>
+            </a:r>
+            <a:r>
+              <a:rPr lang="en-US" altLang="zh-CN" sz="1600" i="1" baseline="-25000" dirty="0" err="1">
+                <a:solidFill>
+                  <a:srgbClr val="0000CD"/>
+                </a:solidFill>
+                <a:latin typeface="Times New Roman" panose="02020603050405020304" pitchFamily="18" charset="0"/>
+                <a:cs typeface="Times New Roman" panose="02020603050405020304" pitchFamily="18" charset="0"/>
+              </a:rPr>
+              <a:t>CG</a:t>
+            </a:r>
+            <a:endParaRPr lang="zh-CN" altLang="en-US" sz="1600" i="1" baseline="-25000" dirty="0">
+              <a:solidFill>
+                <a:srgbClr val="0000CD"/>
+              </a:solidFill>
+              <a:latin typeface="Times New Roman" panose="02020603050405020304" pitchFamily="18" charset="0"/>
+              <a:cs typeface="Times New Roman" panose="02020603050405020304" pitchFamily="18" charset="0"/>
+            </a:endParaRPr>
+          </a:p>
+        </p:txBody>
+      </p:sp>
+      <p:sp>
+        <p:nvSpPr>
+          <p:cNvPr id="75" name="文本框 74">
+            <a:extLst>
+              <a:ext uri="{FF2B5EF4-FFF2-40B4-BE49-F238E27FC236}">
+                <a16:creationId xmlns:a16="http://schemas.microsoft.com/office/drawing/2014/main" id="{FB23F848-8C8F-1BC6-1398-C7A8E6AD91DD}"/>
+              </a:ext>
+            </a:extLst>
+          </p:cNvPr>
+          <p:cNvSpPr txBox="1"/>
+          <p:nvPr/>
+        </p:nvSpPr>
+        <p:spPr>
+          <a:xfrm>
+            <a:off x="3851768" y="3105312"/>
+            <a:ext cx="466794" cy="338554"/>
+          </a:xfrm>
+          <a:prstGeom prst="rect">
+            <a:avLst/>
+          </a:prstGeom>
+          <a:noFill/>
+        </p:spPr>
+        <p:txBody>
+          <a:bodyPr wrap="none" rtlCol="0">
+            <a:spAutoFit/>
+          </a:bodyPr>
+          <a:lstStyle/>
+          <a:p>
+            <a:r>
+              <a:rPr lang="en-US" altLang="zh-CN" sz="1600" i="1" dirty="0" err="1">
+                <a:solidFill>
+                  <a:srgbClr val="0000CD"/>
+                </a:solidFill>
+                <a:latin typeface="Times New Roman" panose="02020603050405020304" pitchFamily="18" charset="0"/>
+                <a:cs typeface="Times New Roman" panose="02020603050405020304" pitchFamily="18" charset="0"/>
+              </a:rPr>
+              <a:t>y</a:t>
+            </a:r>
+            <a:r>
+              <a:rPr lang="en-US" altLang="zh-CN" sz="1600" i="1" baseline="-25000" dirty="0" err="1">
+                <a:solidFill>
+                  <a:srgbClr val="0000CD"/>
+                </a:solidFill>
+                <a:latin typeface="Times New Roman" panose="02020603050405020304" pitchFamily="18" charset="0"/>
+                <a:cs typeface="Times New Roman" panose="02020603050405020304" pitchFamily="18" charset="0"/>
+              </a:rPr>
+              <a:t>CG</a:t>
+            </a:r>
+            <a:endParaRPr lang="zh-CN" altLang="en-US" sz="1600" i="1" baseline="-25000" dirty="0">
+              <a:solidFill>
+                <a:srgbClr val="0000CD"/>
+              </a:solidFill>
+              <a:latin typeface="Times New Roman" panose="02020603050405020304" pitchFamily="18" charset="0"/>
+              <a:cs typeface="Times New Roman" panose="02020603050405020304" pitchFamily="18" charset="0"/>
+            </a:endParaRPr>
+          </a:p>
+        </p:txBody>
+      </p:sp>
+      <p:cxnSp>
+        <p:nvCxnSpPr>
+          <p:cNvPr id="76" name="直接箭头连接符 75">
+            <a:extLst>
+              <a:ext uri="{FF2B5EF4-FFF2-40B4-BE49-F238E27FC236}">
+                <a16:creationId xmlns:a16="http://schemas.microsoft.com/office/drawing/2014/main" id="{5CC74EC5-5ABE-A8ED-F92F-DAC754155B70}"/>
+              </a:ext>
+            </a:extLst>
+          </p:cNvPr>
+          <p:cNvCxnSpPr>
+            <a:cxnSpLocks/>
+          </p:cNvCxnSpPr>
+          <p:nvPr/>
+        </p:nvCxnSpPr>
+        <p:spPr>
+          <a:xfrm>
+            <a:off x="9798689" y="2113360"/>
+            <a:ext cx="421636" cy="0"/>
+          </a:xfrm>
+          <a:prstGeom prst="straightConnector1">
+            <a:avLst/>
+          </a:prstGeom>
+          <a:ln w="12700">
+            <a:solidFill>
+              <a:srgbClr val="DC143C"/>
+            </a:solidFill>
+            <a:tailEnd type="triangle"/>
+          </a:ln>
+        </p:spPr>
+        <p:style>
+          <a:lnRef idx="2">
+            <a:schemeClr val="accent1"/>
+          </a:lnRef>
+          <a:fillRef idx="0">
+            <a:schemeClr val="accent1"/>
+          </a:fillRef>
+          <a:effectRef idx="1">
+            <a:schemeClr val="accent1"/>
+          </a:effectRef>
+          <a:fontRef idx="minor">
+            <a:schemeClr val="tx1"/>
+          </a:fontRef>
+        </p:style>
+      </p:cxnSp>
+      <p:cxnSp>
+        <p:nvCxnSpPr>
+          <p:cNvPr id="78" name="直接箭头连接符 77">
+            <a:extLst>
+              <a:ext uri="{FF2B5EF4-FFF2-40B4-BE49-F238E27FC236}">
+                <a16:creationId xmlns:a16="http://schemas.microsoft.com/office/drawing/2014/main" id="{9C6FC589-B5DF-51D8-0F64-2A528D9D4A35}"/>
+              </a:ext>
+            </a:extLst>
+          </p:cNvPr>
+          <p:cNvCxnSpPr>
+            <a:cxnSpLocks/>
+          </p:cNvCxnSpPr>
+          <p:nvPr/>
+        </p:nvCxnSpPr>
+        <p:spPr>
+          <a:xfrm>
+            <a:off x="9798689" y="4793063"/>
+            <a:ext cx="421636" cy="0"/>
+          </a:xfrm>
+          <a:prstGeom prst="straightConnector1">
+            <a:avLst/>
+          </a:prstGeom>
+          <a:ln w="12700">
+            <a:solidFill>
+              <a:srgbClr val="DC143C"/>
+            </a:solidFill>
+            <a:tailEnd type="triangle"/>
+          </a:ln>
+        </p:spPr>
+        <p:style>
+          <a:lnRef idx="2">
+            <a:schemeClr val="accent1"/>
+          </a:lnRef>
+          <a:fillRef idx="0">
+            <a:schemeClr val="accent1"/>
+          </a:fillRef>
+          <a:effectRef idx="1">
+            <a:schemeClr val="accent1"/>
+          </a:effectRef>
+          <a:fontRef idx="minor">
+            <a:schemeClr val="tx1"/>
+          </a:fontRef>
+        </p:style>
+      </p:cxnSp>
+      <p:sp>
+        <p:nvSpPr>
+          <p:cNvPr id="79" name="文本框 78">
+            <a:extLst>
+              <a:ext uri="{FF2B5EF4-FFF2-40B4-BE49-F238E27FC236}">
+                <a16:creationId xmlns:a16="http://schemas.microsoft.com/office/drawing/2014/main" id="{F25CBC90-FA6E-4164-2AF0-F783CF6072D2}"/>
+              </a:ext>
+            </a:extLst>
+          </p:cNvPr>
+          <p:cNvSpPr txBox="1"/>
+          <p:nvPr/>
+        </p:nvSpPr>
+        <p:spPr>
+          <a:xfrm>
+            <a:off x="10329908" y="3274589"/>
+            <a:ext cx="506870" cy="338554"/>
+          </a:xfrm>
+          <a:prstGeom prst="rect">
+            <a:avLst/>
+          </a:prstGeom>
+          <a:noFill/>
+        </p:spPr>
+        <p:txBody>
+          <a:bodyPr wrap="none" rtlCol="0">
+            <a:spAutoFit/>
+          </a:bodyPr>
+          <a:lstStyle/>
+          <a:p>
+            <a:r>
+              <a:rPr lang="en-US" altLang="zh-CN" sz="1600" i="1" dirty="0">
+                <a:solidFill>
+                  <a:srgbClr val="DC143C"/>
+                </a:solidFill>
+                <a:latin typeface="Times New Roman" panose="02020603050405020304" pitchFamily="18" charset="0"/>
+                <a:cs typeface="Times New Roman" panose="02020603050405020304" pitchFamily="18" charset="0"/>
+              </a:rPr>
+              <a:t>D</a:t>
+            </a:r>
+            <a:r>
+              <a:rPr lang="en-US" altLang="zh-CN" sz="1600" i="1" baseline="-25000" dirty="0">
+                <a:solidFill>
+                  <a:srgbClr val="DC143C"/>
+                </a:solidFill>
+                <a:latin typeface="Times New Roman" panose="02020603050405020304" pitchFamily="18" charset="0"/>
+                <a:cs typeface="Times New Roman" panose="02020603050405020304" pitchFamily="18" charset="0"/>
+              </a:rPr>
+              <a:t>HT</a:t>
+            </a:r>
+            <a:endParaRPr lang="zh-CN" altLang="en-US" sz="1600" i="1" baseline="-25000" dirty="0">
+              <a:solidFill>
+                <a:srgbClr val="DC143C"/>
+              </a:solidFill>
+              <a:latin typeface="Times New Roman" panose="02020603050405020304" pitchFamily="18" charset="0"/>
+              <a:cs typeface="Times New Roman" panose="02020603050405020304" pitchFamily="18" charset="0"/>
+            </a:endParaRPr>
+          </a:p>
+        </p:txBody>
+      </p:sp>
+      <p:sp>
+        <p:nvSpPr>
+          <p:cNvPr id="80" name="文本框 79">
+            <a:extLst>
+              <a:ext uri="{FF2B5EF4-FFF2-40B4-BE49-F238E27FC236}">
+                <a16:creationId xmlns:a16="http://schemas.microsoft.com/office/drawing/2014/main" id="{940B8AAC-264C-6DA7-6123-0345AF11E6BA}"/>
+              </a:ext>
+            </a:extLst>
+          </p:cNvPr>
+          <p:cNvSpPr txBox="1"/>
+          <p:nvPr/>
+        </p:nvSpPr>
+        <p:spPr>
+          <a:xfrm>
+            <a:off x="10204433" y="1944083"/>
+            <a:ext cx="506870" cy="338554"/>
+          </a:xfrm>
+          <a:prstGeom prst="rect">
+            <a:avLst/>
+          </a:prstGeom>
+          <a:noFill/>
+        </p:spPr>
+        <p:txBody>
+          <a:bodyPr wrap="none" rtlCol="0">
+            <a:spAutoFit/>
+          </a:bodyPr>
+          <a:lstStyle/>
+          <a:p>
+            <a:r>
+              <a:rPr lang="en-US" altLang="zh-CN" sz="1600" i="1" dirty="0">
+                <a:solidFill>
+                  <a:srgbClr val="DC143C"/>
+                </a:solidFill>
+                <a:latin typeface="Times New Roman" panose="02020603050405020304" pitchFamily="18" charset="0"/>
+                <a:cs typeface="Times New Roman" panose="02020603050405020304" pitchFamily="18" charset="0"/>
+              </a:rPr>
+              <a:t>D</a:t>
+            </a:r>
+            <a:r>
+              <a:rPr lang="en-US" altLang="zh-CN" sz="1600" i="1" baseline="-25000" dirty="0">
+                <a:solidFill>
+                  <a:srgbClr val="DC143C"/>
+                </a:solidFill>
+                <a:latin typeface="Times New Roman" panose="02020603050405020304" pitchFamily="18" charset="0"/>
+                <a:cs typeface="Times New Roman" panose="02020603050405020304" pitchFamily="18" charset="0"/>
+              </a:rPr>
+              <a:t>VT</a:t>
+            </a:r>
+            <a:endParaRPr lang="zh-CN" altLang="en-US" sz="1600" i="1" baseline="-25000" dirty="0">
+              <a:solidFill>
+                <a:srgbClr val="DC143C"/>
+              </a:solidFill>
+              <a:latin typeface="Times New Roman" panose="02020603050405020304" pitchFamily="18" charset="0"/>
+              <a:cs typeface="Times New Roman" panose="02020603050405020304" pitchFamily="18" charset="0"/>
+            </a:endParaRPr>
+          </a:p>
+        </p:txBody>
+      </p:sp>
+      <p:sp>
+        <p:nvSpPr>
+          <p:cNvPr id="81" name="文本框 80">
+            <a:extLst>
+              <a:ext uri="{FF2B5EF4-FFF2-40B4-BE49-F238E27FC236}">
+                <a16:creationId xmlns:a16="http://schemas.microsoft.com/office/drawing/2014/main" id="{B05312CD-F777-79FD-4B52-FD8F95ADB7C9}"/>
+              </a:ext>
+            </a:extLst>
+          </p:cNvPr>
+          <p:cNvSpPr txBox="1"/>
+          <p:nvPr/>
+        </p:nvSpPr>
+        <p:spPr>
+          <a:xfrm>
+            <a:off x="10204433" y="4609748"/>
+            <a:ext cx="506870" cy="338554"/>
+          </a:xfrm>
+          <a:prstGeom prst="rect">
+            <a:avLst/>
+          </a:prstGeom>
+          <a:noFill/>
+        </p:spPr>
+        <p:txBody>
+          <a:bodyPr wrap="none" rtlCol="0">
+            <a:spAutoFit/>
+          </a:bodyPr>
+          <a:lstStyle/>
+          <a:p>
+            <a:r>
+              <a:rPr lang="en-US" altLang="zh-CN" sz="1600" i="1" dirty="0">
+                <a:solidFill>
+                  <a:srgbClr val="DC143C"/>
+                </a:solidFill>
+                <a:latin typeface="Times New Roman" panose="02020603050405020304" pitchFamily="18" charset="0"/>
+                <a:cs typeface="Times New Roman" panose="02020603050405020304" pitchFamily="18" charset="0"/>
+              </a:rPr>
+              <a:t>D</a:t>
+            </a:r>
+            <a:r>
+              <a:rPr lang="en-US" altLang="zh-CN" sz="1600" i="1" baseline="-25000" dirty="0">
+                <a:solidFill>
+                  <a:srgbClr val="DC143C"/>
+                </a:solidFill>
+                <a:latin typeface="Times New Roman" panose="02020603050405020304" pitchFamily="18" charset="0"/>
+                <a:cs typeface="Times New Roman" panose="02020603050405020304" pitchFamily="18" charset="0"/>
+              </a:rPr>
+              <a:t>VT</a:t>
+            </a:r>
+            <a:endParaRPr lang="zh-CN" altLang="en-US" sz="1600" i="1" baseline="-25000" dirty="0">
+              <a:solidFill>
+                <a:srgbClr val="DC143C"/>
+              </a:solidFill>
+              <a:latin typeface="Times New Roman" panose="02020603050405020304" pitchFamily="18" charset="0"/>
+              <a:cs typeface="Times New Roman" panose="02020603050405020304" pitchFamily="18" charset="0"/>
+            </a:endParaRPr>
+          </a:p>
+        </p:txBody>
+      </p:sp>
+      <p:cxnSp>
+        <p:nvCxnSpPr>
+          <p:cNvPr id="82" name="直接箭头连接符 81">
+            <a:extLst>
+              <a:ext uri="{FF2B5EF4-FFF2-40B4-BE49-F238E27FC236}">
+                <a16:creationId xmlns:a16="http://schemas.microsoft.com/office/drawing/2014/main" id="{0A5498A6-A0C0-9A85-CCD4-C67C21B5DF66}"/>
+              </a:ext>
+            </a:extLst>
+          </p:cNvPr>
+          <p:cNvCxnSpPr>
+            <a:cxnSpLocks/>
+          </p:cNvCxnSpPr>
+          <p:nvPr/>
+        </p:nvCxnSpPr>
+        <p:spPr>
+          <a:xfrm>
+            <a:off x="9798689" y="3443866"/>
+            <a:ext cx="551917" cy="0"/>
+          </a:xfrm>
+          <a:prstGeom prst="straightConnector1">
+            <a:avLst/>
+          </a:prstGeom>
+          <a:ln w="12700">
+            <a:solidFill>
+              <a:srgbClr val="DC143C"/>
+            </a:solidFill>
+            <a:tailEnd type="triangle"/>
+          </a:ln>
+        </p:spPr>
+        <p:style>
+          <a:lnRef idx="2">
+            <a:schemeClr val="accent1"/>
+          </a:lnRef>
+          <a:fillRef idx="0">
+            <a:schemeClr val="accent1"/>
+          </a:fillRef>
+          <a:effectRef idx="1">
+            <a:schemeClr val="accent1"/>
+          </a:effectRef>
+          <a:fontRef idx="minor">
+            <a:schemeClr val="tx1"/>
+          </a:fontRef>
+        </p:style>
+      </p:cxnSp>
+      <p:cxnSp>
+        <p:nvCxnSpPr>
+          <p:cNvPr id="88" name="直接连接符 87">
+            <a:extLst>
+              <a:ext uri="{FF2B5EF4-FFF2-40B4-BE49-F238E27FC236}">
+                <a16:creationId xmlns:a16="http://schemas.microsoft.com/office/drawing/2014/main" id="{77CB9A69-00E2-54E3-E75E-B949E51E5BD8}"/>
+              </a:ext>
+            </a:extLst>
+          </p:cNvPr>
+          <p:cNvCxnSpPr>
+            <a:cxnSpLocks/>
+          </p:cNvCxnSpPr>
+          <p:nvPr/>
+        </p:nvCxnSpPr>
+        <p:spPr>
+          <a:xfrm>
+            <a:off x="5231341" y="2337329"/>
+            <a:ext cx="0" cy="215900"/>
+          </a:xfrm>
+          <a:prstGeom prst="line">
+            <a:avLst/>
+          </a:prstGeom>
+          <a:ln w="12700">
+            <a:solidFill>
+              <a:srgbClr val="0000CD"/>
+            </a:solidFill>
+          </a:ln>
+        </p:spPr>
+        <p:style>
+          <a:lnRef idx="2">
+            <a:schemeClr val="accent1"/>
+          </a:lnRef>
+          <a:fillRef idx="0">
+            <a:schemeClr val="accent1"/>
+          </a:fillRef>
+          <a:effectRef idx="1">
+            <a:schemeClr val="accent1"/>
+          </a:effectRef>
+          <a:fontRef idx="minor">
+            <a:schemeClr val="tx1"/>
+          </a:fontRef>
+        </p:style>
+      </p:cxnSp>
+      <p:cxnSp>
+        <p:nvCxnSpPr>
+          <p:cNvPr id="93" name="直接箭头连接符 92">
+            <a:extLst>
+              <a:ext uri="{FF2B5EF4-FFF2-40B4-BE49-F238E27FC236}">
+                <a16:creationId xmlns:a16="http://schemas.microsoft.com/office/drawing/2014/main" id="{5E9E2717-1417-D984-5CAC-9879A07784A5}"/>
+              </a:ext>
+            </a:extLst>
+          </p:cNvPr>
+          <p:cNvCxnSpPr>
+            <a:cxnSpLocks/>
+          </p:cNvCxnSpPr>
+          <p:nvPr/>
+        </p:nvCxnSpPr>
+        <p:spPr>
+          <a:xfrm>
+            <a:off x="4405723" y="3179290"/>
+            <a:ext cx="407772" cy="0"/>
+          </a:xfrm>
+          <a:prstGeom prst="straightConnector1">
+            <a:avLst/>
+          </a:prstGeom>
+          <a:ln w="12700">
+            <a:solidFill>
+              <a:srgbClr val="DC143C"/>
+            </a:solidFill>
+            <a:tailEnd type="triangle"/>
+          </a:ln>
+        </p:spPr>
+        <p:style>
+          <a:lnRef idx="2">
+            <a:schemeClr val="accent1"/>
+          </a:lnRef>
+          <a:fillRef idx="0">
+            <a:schemeClr val="accent1"/>
+          </a:fillRef>
+          <a:effectRef idx="1">
+            <a:schemeClr val="accent1"/>
+          </a:effectRef>
+          <a:fontRef idx="minor">
+            <a:schemeClr val="tx1"/>
+          </a:fontRef>
+        </p:style>
+      </p:cxnSp>
+      <p:sp>
+        <p:nvSpPr>
+          <p:cNvPr id="95" name="文本框 94">
+            <a:extLst>
+              <a:ext uri="{FF2B5EF4-FFF2-40B4-BE49-F238E27FC236}">
+                <a16:creationId xmlns:a16="http://schemas.microsoft.com/office/drawing/2014/main" id="{08AC8145-7DDF-0E51-D70F-B0BCCD616ED5}"/>
+              </a:ext>
+            </a:extLst>
+          </p:cNvPr>
+          <p:cNvSpPr txBox="1"/>
+          <p:nvPr/>
+        </p:nvSpPr>
+        <p:spPr>
+          <a:xfrm>
+            <a:off x="4768784" y="3002497"/>
+            <a:ext cx="332142" cy="338554"/>
+          </a:xfrm>
+          <a:prstGeom prst="rect">
+            <a:avLst/>
+          </a:prstGeom>
+          <a:noFill/>
+        </p:spPr>
+        <p:txBody>
+          <a:bodyPr wrap="none" rtlCol="0">
+            <a:spAutoFit/>
+          </a:bodyPr>
+          <a:lstStyle/>
+          <a:p>
+            <a:r>
+              <a:rPr lang="en-US" altLang="zh-CN" sz="1600" i="1" dirty="0">
+                <a:solidFill>
+                  <a:srgbClr val="DC143C"/>
+                </a:solidFill>
+                <a:latin typeface="Times New Roman" panose="02020603050405020304" pitchFamily="18" charset="0"/>
+                <a:cs typeface="Times New Roman" panose="02020603050405020304" pitchFamily="18" charset="0"/>
+              </a:rPr>
+              <a:t>D</a:t>
+            </a:r>
+            <a:endParaRPr lang="zh-CN" altLang="en-US" sz="1600" i="1" baseline="-25000" dirty="0">
+              <a:solidFill>
+                <a:srgbClr val="DC143C"/>
+              </a:solidFill>
+              <a:latin typeface="Times New Roman" panose="02020603050405020304" pitchFamily="18" charset="0"/>
+              <a:cs typeface="Times New Roman" panose="02020603050405020304" pitchFamily="18" charset="0"/>
+            </a:endParaRPr>
+          </a:p>
+        </p:txBody>
+      </p:sp>
+      <p:cxnSp>
+        <p:nvCxnSpPr>
+          <p:cNvPr id="97" name="直接箭头连接符 96">
+            <a:extLst>
+              <a:ext uri="{FF2B5EF4-FFF2-40B4-BE49-F238E27FC236}">
+                <a16:creationId xmlns:a16="http://schemas.microsoft.com/office/drawing/2014/main" id="{B43CBE80-B09D-B56C-7A61-47630402BA28}"/>
+              </a:ext>
+            </a:extLst>
+          </p:cNvPr>
+          <p:cNvCxnSpPr>
+            <a:cxnSpLocks/>
+          </p:cNvCxnSpPr>
+          <p:nvPr/>
+        </p:nvCxnSpPr>
+        <p:spPr>
+          <a:xfrm flipV="1">
+            <a:off x="9453377" y="3715915"/>
+            <a:ext cx="0" cy="1057248"/>
+          </a:xfrm>
+          <a:prstGeom prst="straightConnector1">
+            <a:avLst/>
+          </a:prstGeom>
+          <a:ln w="12700">
+            <a:solidFill>
+              <a:srgbClr val="DC143C"/>
+            </a:solidFill>
+            <a:tailEnd type="triangle"/>
+          </a:ln>
+        </p:spPr>
+        <p:style>
+          <a:lnRef idx="2">
+            <a:schemeClr val="accent1"/>
+          </a:lnRef>
+          <a:fillRef idx="0">
+            <a:schemeClr val="accent1"/>
+          </a:fillRef>
+          <a:effectRef idx="1">
+            <a:schemeClr val="accent1"/>
+          </a:effectRef>
+          <a:fontRef idx="minor">
+            <a:schemeClr val="tx1"/>
+          </a:fontRef>
+        </p:style>
+      </p:cxnSp>
+      <p:sp>
+        <p:nvSpPr>
+          <p:cNvPr id="98" name="文本框 97">
+            <a:extLst>
+              <a:ext uri="{FF2B5EF4-FFF2-40B4-BE49-F238E27FC236}">
+                <a16:creationId xmlns:a16="http://schemas.microsoft.com/office/drawing/2014/main" id="{757A896F-48AA-74B1-98EB-B77E3A4F9541}"/>
+              </a:ext>
+            </a:extLst>
+          </p:cNvPr>
+          <p:cNvSpPr txBox="1"/>
+          <p:nvPr/>
+        </p:nvSpPr>
+        <p:spPr>
+          <a:xfrm>
+            <a:off x="9479550" y="3550448"/>
+            <a:ext cx="449547" cy="338554"/>
+          </a:xfrm>
+          <a:prstGeom prst="rect">
+            <a:avLst/>
+          </a:prstGeom>
+          <a:gradFill>
+            <a:gsLst>
+              <a:gs pos="9000">
+                <a:schemeClr val="bg1"/>
+              </a:gs>
+              <a:gs pos="91000">
+                <a:schemeClr val="bg1">
+                  <a:alpha val="0"/>
+                </a:schemeClr>
+              </a:gs>
+            </a:gsLst>
+            <a:path path="circle">
+              <a:fillToRect l="50000" t="50000" r="50000" b="50000"/>
+            </a:path>
+          </a:gradFill>
+        </p:spPr>
+        <p:txBody>
+          <a:bodyPr wrap="none" rtlCol="0">
+            <a:spAutoFit/>
+          </a:bodyPr>
+          <a:lstStyle/>
+          <a:p>
+            <a:r>
+              <a:rPr lang="en-US" altLang="zh-CN" sz="1600" i="1" dirty="0">
+                <a:solidFill>
+                  <a:srgbClr val="DC143C"/>
+                </a:solidFill>
+                <a:latin typeface="Times New Roman" panose="02020603050405020304" pitchFamily="18" charset="0"/>
+                <a:cs typeface="Times New Roman" panose="02020603050405020304" pitchFamily="18" charset="0"/>
+              </a:rPr>
+              <a:t>L</a:t>
+            </a:r>
+            <a:r>
+              <a:rPr lang="en-US" altLang="zh-CN" sz="1600" i="1" baseline="-25000" dirty="0">
+                <a:solidFill>
+                  <a:srgbClr val="DC143C"/>
+                </a:solidFill>
+                <a:latin typeface="Times New Roman" panose="02020603050405020304" pitchFamily="18" charset="0"/>
+                <a:cs typeface="Times New Roman" panose="02020603050405020304" pitchFamily="18" charset="0"/>
+              </a:rPr>
+              <a:t>VT</a:t>
+            </a:r>
+            <a:endParaRPr lang="zh-CN" altLang="en-US" sz="1600" i="1" baseline="-25000" dirty="0">
               <a:solidFill>
                 <a:srgbClr val="DC143C"/>
               </a:solidFill>
@@ -24786,9 +24296,29 @@
                 <a:latin typeface="Times New Roman" panose="02020603050405020304" pitchFamily="18" charset="0"/>
                 <a:cs typeface="Times New Roman" panose="02020603050405020304" pitchFamily="18" charset="0"/>
               </a:rPr>
-              <a:t>State (rigid body)</a:t>
-            </a:r>
-            <a:endParaRPr lang="en-GB" sz="1400" noProof="0" dirty="0">
+              <a:t>State (rigid body) </a:t>
+            </a:r>
+            <a:r>
+              <a:rPr lang="en-US" altLang="zh-CN" sz="1600" b="1" dirty="0">
+                <a:solidFill>
+                  <a:schemeClr val="tx1"/>
+                </a:solidFill>
+                <a:latin typeface="Times New Roman" panose="02020603050405020304" pitchFamily="18" charset="0"/>
+                <a:cs typeface="Times New Roman" panose="02020603050405020304" pitchFamily="18" charset="0"/>
+              </a:rPr>
+              <a:t>x</a:t>
+            </a:r>
+            <a:r>
+              <a:rPr lang="en-US" altLang="zh-CN" sz="1600" i="1" dirty="0">
+                <a:solidFill>
+                  <a:schemeClr val="tx1"/>
+                </a:solidFill>
+                <a:latin typeface="Times New Roman" panose="02020603050405020304" pitchFamily="18" charset="0"/>
+                <a:cs typeface="Times New Roman" panose="02020603050405020304" pitchFamily="18" charset="0"/>
+              </a:rPr>
+              <a:t>(t)</a:t>
+            </a:r>
+            <a:endParaRPr lang="en-GB" sz="1400" i="1" noProof="0" dirty="0">
               <a:solidFill>
                 <a:schemeClr val="tx1"/>
               </a:solidFill>
@@ -25072,7 +24602,27 @@
                 <a:latin typeface="Times New Roman" panose="02020603050405020304" pitchFamily="18" charset="0"/>
                 <a:cs typeface="Times New Roman" panose="02020603050405020304" pitchFamily="18" charset="0"/>
               </a:rPr>
-              <a:t>Control</a:t>
+              <a:t>Control </a:t>
+            </a:r>
+            <a:r>
+              <a:rPr lang="en-US" altLang="zh-CN" sz="1600" b="1" dirty="0">
+                <a:solidFill>
+                  <a:schemeClr val="tx1"/>
+                </a:solidFill>
+                <a:latin typeface="Times New Roman" panose="02020603050405020304" pitchFamily="18" charset="0"/>
+                <a:cs typeface="Times New Roman" panose="02020603050405020304" pitchFamily="18" charset="0"/>
+              </a:rPr>
+              <a:t>u</a:t>
+            </a:r>
+            <a:r>
+              <a:rPr lang="en-US" altLang="zh-CN" sz="1600" i="1" dirty="0">
+                <a:solidFill>
+                  <a:schemeClr val="tx1"/>
+                </a:solidFill>
+                <a:latin typeface="Times New Roman" panose="02020603050405020304" pitchFamily="18" charset="0"/>
+                <a:cs typeface="Times New Roman" panose="02020603050405020304" pitchFamily="18" charset="0"/>
+              </a:rPr>
+              <a:t>(t)</a:t>
             </a:r>
             <a:endParaRPr lang="en-GB" sz="1400" noProof="0" dirty="0">
               <a:solidFill>
@@ -25584,7 +25134,37 @@
                   <a:latin typeface="Times New Roman" panose="02020603050405020304" pitchFamily="18" charset="0"/>
                   <a:cs typeface="Times New Roman" panose="02020603050405020304" pitchFamily="18" charset="0"/>
                 </a:rPr>
-                <a:t>State (rotor)</a:t>
+                <a:t>State (rotor) </a:t>
+              </a:r>
+              <a:r>
+                <a:rPr lang="en-US" altLang="zh-CN" sz="1600" b="1" dirty="0" err="1">
+                  <a:solidFill>
+                    <a:schemeClr val="tx1"/>
+                  </a:solidFill>
+                  <a:latin typeface="Times New Roman" panose="02020603050405020304" pitchFamily="18" charset="0"/>
+                  <a:cs typeface="Times New Roman" panose="02020603050405020304" pitchFamily="18" charset="0"/>
+                </a:rPr>
+                <a:t>x</a:t>
+              </a:r>
+              <a:r>
+                <a:rPr lang="en-US" altLang="zh-CN" sz="1600" b="1" i="1" baseline="-25000" dirty="0" err="1">
+                  <a:solidFill>
+                    <a:schemeClr val="tx1"/>
+                  </a:solidFill>
+                  <a:latin typeface="Times New Roman" panose="02020603050405020304" pitchFamily="18" charset="0"/>
+                  <a:cs typeface="Times New Roman" panose="02020603050405020304" pitchFamily="18" charset="0"/>
+                </a:rPr>
+                <a:t>r</a:t>
+              </a:r>
+              <a:r>
+                <a:rPr lang="en-US" altLang="zh-CN" sz="1600" i="1" dirty="0">
+                  <a:solidFill>
+                    <a:schemeClr val="tx1"/>
+                  </a:solidFill>
+                  <a:latin typeface="Times New Roman" panose="02020603050405020304" pitchFamily="18" charset="0"/>
+                  <a:cs typeface="Times New Roman" panose="02020603050405020304" pitchFamily="18" charset="0"/>
+                </a:rPr>
+                <a:t>(t)</a:t>
               </a:r>
               <a:endParaRPr lang="en-GB" sz="1400" noProof="0" dirty="0">
                 <a:solidFill>
@@ -25890,9 +25470,39 @@
                   <a:latin typeface="Times New Roman" panose="02020603050405020304" pitchFamily="18" charset="0"/>
                   <a:cs typeface="Times New Roman" panose="02020603050405020304" pitchFamily="18" charset="0"/>
                 </a:rPr>
-                <a:t>State (inflow)</a:t>
+                <a:t>State (inflow) </a:t>
               </a:r>
-              <a:endParaRPr lang="en-GB" sz="1400" noProof="0" dirty="0">
+              <a:r>
+                <a:rPr lang="en-US" altLang="zh-CN" sz="1600" b="1" dirty="0">
+                  <a:solidFill>
+                    <a:schemeClr val="tx1"/>
+                  </a:solidFill>
+                  <a:latin typeface="Times New Roman" panose="02020603050405020304" pitchFamily="18" charset="0"/>
+                  <a:cs typeface="Times New Roman" panose="02020603050405020304" pitchFamily="18" charset="0"/>
+                </a:rPr>
+                <a:t>x</a:t>
+              </a:r>
+              <a:r>
+                <a:rPr lang="en-US" altLang="zh-CN" sz="1600" b="1" i="1" baseline="-25000" dirty="0">
+                  <a:solidFill>
+                    <a:schemeClr val="tx1"/>
+                  </a:solidFill>
+                  <a:latin typeface="Times New Roman" panose="02020603050405020304" pitchFamily="18" charset="0"/>
+                  <a:cs typeface="Times New Roman" panose="02020603050405020304" pitchFamily="18" charset="0"/>
+                </a:rPr>
+                <a:t>i</a:t>
+              </a:r>
+              <a:r>
+                <a:rPr lang="en-US" altLang="zh-CN" sz="1600" i="1" dirty="0">
+                  <a:solidFill>
+                    <a:schemeClr val="tx1"/>
+                  </a:solidFill>
+                  <a:latin typeface="Times New Roman" panose="02020603050405020304" pitchFamily="18" charset="0"/>
+                  <a:cs typeface="Times New Roman" panose="02020603050405020304" pitchFamily="18" charset="0"/>
+                </a:rPr>
+                <a:t>(t)</a:t>
+              </a:r>
+              <a:endParaRPr lang="en-GB" sz="1600" noProof="0" dirty="0">
                 <a:solidFill>
                   <a:schemeClr val="tx1"/>
                 </a:solidFill>

--- a/HER05/01 - Mathematical Modeling/Sketch/Forces and Moments Sketch.pptx
+++ b/HER05/01 - Mathematical Modeling/Sketch/Forces and Moments Sketch.pptx
@@ -132,7 +132,7 @@
   <pc:docChgLst>
     <pc:chgData name="Li, Hanchen F" userId="3aee791e-6a2d-4da7-a77b-fbdf7bf15886" providerId="ADAL" clId="{CDC5B0EF-6BEB-4658-A9FF-CB66F6FA6C1E}"/>
     <pc:docChg chg="undo redo custSel addSld delSld modSld modMainMaster modNotesMaster">
-      <pc:chgData name="Li, Hanchen F" userId="3aee791e-6a2d-4da7-a77b-fbdf7bf15886" providerId="ADAL" clId="{CDC5B0EF-6BEB-4658-A9FF-CB66F6FA6C1E}" dt="2025-05-24T01:05:10.287" v="8733" actId="20577"/>
+      <pc:chgData name="Li, Hanchen F" userId="3aee791e-6a2d-4da7-a77b-fbdf7bf15886" providerId="ADAL" clId="{CDC5B0EF-6BEB-4658-A9FF-CB66F6FA6C1E}" dt="2025-05-24T18:05:08.571" v="8746" actId="20577"/>
       <pc:docMkLst>
         <pc:docMk/>
       </pc:docMkLst>
@@ -1712,7 +1712,7 @@
         </pc:cxnChg>
       </pc:sldChg>
       <pc:sldChg chg="addSp delSp modSp add mod">
-        <pc:chgData name="Li, Hanchen F" userId="3aee791e-6a2d-4da7-a77b-fbdf7bf15886" providerId="ADAL" clId="{CDC5B0EF-6BEB-4658-A9FF-CB66F6FA6C1E}" dt="2025-05-24T01:05:10.287" v="8733" actId="20577"/>
+        <pc:chgData name="Li, Hanchen F" userId="3aee791e-6a2d-4da7-a77b-fbdf7bf15886" providerId="ADAL" clId="{CDC5B0EF-6BEB-4658-A9FF-CB66F6FA6C1E}" dt="2025-05-24T18:02:17.886" v="8740" actId="20577"/>
         <pc:sldMkLst>
           <pc:docMk/>
           <pc:sldMk cId="3137520481" sldId="257"/>
@@ -1854,7 +1854,7 @@
           </ac:spMkLst>
         </pc:spChg>
         <pc:spChg chg="add mod">
-          <ac:chgData name="Li, Hanchen F" userId="3aee791e-6a2d-4da7-a77b-fbdf7bf15886" providerId="ADAL" clId="{CDC5B0EF-6BEB-4658-A9FF-CB66F6FA6C1E}" dt="2025-05-24T01:05:08.206" v="8732" actId="20577"/>
+          <ac:chgData name="Li, Hanchen F" userId="3aee791e-6a2d-4da7-a77b-fbdf7bf15886" providerId="ADAL" clId="{CDC5B0EF-6BEB-4658-A9FF-CB66F6FA6C1E}" dt="2025-05-24T18:02:17.886" v="8740" actId="20577"/>
           <ac:spMkLst>
             <pc:docMk/>
             <pc:sldMk cId="3137520481" sldId="257"/>
@@ -1862,7 +1862,7 @@
           </ac:spMkLst>
         </pc:spChg>
         <pc:spChg chg="add mod">
-          <ac:chgData name="Li, Hanchen F" userId="3aee791e-6a2d-4da7-a77b-fbdf7bf15886" providerId="ADAL" clId="{CDC5B0EF-6BEB-4658-A9FF-CB66F6FA6C1E}" dt="2025-05-24T01:05:10.287" v="8733" actId="20577"/>
+          <ac:chgData name="Li, Hanchen F" userId="3aee791e-6a2d-4da7-a77b-fbdf7bf15886" providerId="ADAL" clId="{CDC5B0EF-6BEB-4658-A9FF-CB66F6FA6C1E}" dt="2025-05-24T18:02:13.505" v="8736" actId="20577"/>
           <ac:spMkLst>
             <pc:docMk/>
             <pc:sldMk cId="3137520481" sldId="257"/>
@@ -2797,7 +2797,7 @@
         </pc:cxnChg>
       </pc:sldChg>
       <pc:sldChg chg="addSp delSp modSp add mod">
-        <pc:chgData name="Li, Hanchen F" userId="3aee791e-6a2d-4da7-a77b-fbdf7bf15886" providerId="ADAL" clId="{CDC5B0EF-6BEB-4658-A9FF-CB66F6FA6C1E}" dt="2025-05-24T00:38:25.595" v="8353" actId="1076"/>
+        <pc:chgData name="Li, Hanchen F" userId="3aee791e-6a2d-4da7-a77b-fbdf7bf15886" providerId="ADAL" clId="{CDC5B0EF-6BEB-4658-A9FF-CB66F6FA6C1E}" dt="2025-05-24T18:05:08.571" v="8746" actId="20577"/>
         <pc:sldMkLst>
           <pc:docMk/>
           <pc:sldMk cId="3652000193" sldId="259"/>
@@ -2811,7 +2811,7 @@
           </ac:spMkLst>
         </pc:spChg>
         <pc:spChg chg="add mod">
-          <ac:chgData name="Li, Hanchen F" userId="3aee791e-6a2d-4da7-a77b-fbdf7bf15886" providerId="ADAL" clId="{CDC5B0EF-6BEB-4658-A9FF-CB66F6FA6C1E}" dt="2025-05-24T00:38:25.595" v="8353" actId="1076"/>
+          <ac:chgData name="Li, Hanchen F" userId="3aee791e-6a2d-4da7-a77b-fbdf7bf15886" providerId="ADAL" clId="{CDC5B0EF-6BEB-4658-A9FF-CB66F6FA6C1E}" dt="2025-05-24T18:05:08.571" v="8746" actId="20577"/>
           <ac:spMkLst>
             <pc:docMk/>
             <pc:sldMk cId="3652000193" sldId="259"/>
@@ -2923,7 +2923,7 @@
           </ac:spMkLst>
         </pc:spChg>
         <pc:spChg chg="add mod">
-          <ac:chgData name="Li, Hanchen F" userId="3aee791e-6a2d-4da7-a77b-fbdf7bf15886" providerId="ADAL" clId="{CDC5B0EF-6BEB-4658-A9FF-CB66F6FA6C1E}" dt="2025-05-24T00:37:56.522" v="8337" actId="947"/>
+          <ac:chgData name="Li, Hanchen F" userId="3aee791e-6a2d-4da7-a77b-fbdf7bf15886" providerId="ADAL" clId="{CDC5B0EF-6BEB-4658-A9FF-CB66F6FA6C1E}" dt="2025-05-24T18:05:06.600" v="8745" actId="20577"/>
           <ac:spMkLst>
             <pc:docMk/>
             <pc:sldMk cId="3652000193" sldId="259"/>
@@ -10888,7 +10888,7 @@
         <p:spPr>
           <a:xfrm>
             <a:off x="8168427" y="2119692"/>
-            <a:ext cx="492443" cy="338554"/>
+            <a:ext cx="516488" cy="338554"/>
           </a:xfrm>
           <a:prstGeom prst="rect">
             <a:avLst/>
@@ -10935,7 +10935,7 @@
                 <a:ea typeface="等线" panose="02010600030101010101" pitchFamily="2" charset="-122"/>
                 <a:cs typeface="Times New Roman" panose="02020603050405020304" pitchFamily="18" charset="0"/>
               </a:rPr>
-              <a:t>LR</a:t>
+              <a:t>UR</a:t>
             </a:r>
             <a:endParaRPr lang="zh-CN" altLang="en-US" sz="1600" i="1" baseline="-25000" dirty="0">
               <a:solidFill>
@@ -11722,7 +11722,7 @@
         <p:spPr>
           <a:xfrm>
             <a:off x="5386540" y="2063207"/>
-            <a:ext cx="516488" cy="338554"/>
+            <a:ext cx="492443" cy="338554"/>
           </a:xfrm>
           <a:prstGeom prst="rect">
             <a:avLst/>
@@ -11769,7 +11769,7 @@
                 <a:ea typeface="等线" panose="02010600030101010101" pitchFamily="2" charset="-122"/>
                 <a:cs typeface="Times New Roman" panose="02020603050405020304" pitchFamily="18" charset="0"/>
               </a:rPr>
-              <a:t>UR</a:t>
+              <a:t>LR</a:t>
             </a:r>
             <a:endParaRPr lang="zh-CN" altLang="en-US" sz="1600" i="1" baseline="-25000" dirty="0">
               <a:solidFill>
@@ -22732,7 +22732,7 @@
                 <a:latin typeface="Times New Roman" panose="02020603050405020304" pitchFamily="18" charset="0"/>
                 <a:cs typeface="Times New Roman" panose="02020603050405020304" pitchFamily="18" charset="0"/>
               </a:rPr>
-              <a:t>UR</a:t>
+              <a:t>LR</a:t>
             </a:r>
           </a:p>
           <a:p>
@@ -22802,7 +22802,7 @@
                 <a:latin typeface="Times New Roman" panose="02020603050405020304" pitchFamily="18" charset="0"/>
                 <a:cs typeface="Times New Roman" panose="02020603050405020304" pitchFamily="18" charset="0"/>
               </a:rPr>
-              <a:t>LR</a:t>
+              <a:t>UR</a:t>
             </a:r>
           </a:p>
           <a:p>

--- a/HER05/01 - Mathematical Modeling/Sketch/Forces and Moments Sketch.pptx
+++ b/HER05/01 - Mathematical Modeling/Sketch/Forces and Moments Sketch.pptx
@@ -122,7 +122,7 @@
 <file path=ppt/revisionInfo.xml><?xml version="1.0" encoding="utf-8"?>
 <p1510:revInfo xmlns:a="http://schemas.openxmlformats.org/drawingml/2006/main" xmlns:r="http://schemas.openxmlformats.org/officeDocument/2006/relationships" xmlns:p1510="http://schemas.microsoft.com/office/powerpoint/2015/10/main">
   <p1510:revLst>
-    <p1510:client id="{CDC5B0EF-6BEB-4658-A9FF-CB66F6FA6C1E}" v="413" dt="2025-05-24T00:52:37.993"/>
+    <p1510:client id="{CDC5B0EF-6BEB-4658-A9FF-CB66F6FA6C1E}" v="422" dt="2025-05-26T23:53:54.292"/>
   </p1510:revLst>
 </p1510:revInfo>
 </file>
@@ -132,12 +132,12 @@
   <pc:docChgLst>
     <pc:chgData name="Li, Hanchen F" userId="3aee791e-6a2d-4da7-a77b-fbdf7bf15886" providerId="ADAL" clId="{CDC5B0EF-6BEB-4658-A9FF-CB66F6FA6C1E}"/>
     <pc:docChg chg="undo redo custSel addSld delSld modSld modMainMaster modNotesMaster">
-      <pc:chgData name="Li, Hanchen F" userId="3aee791e-6a2d-4da7-a77b-fbdf7bf15886" providerId="ADAL" clId="{CDC5B0EF-6BEB-4658-A9FF-CB66F6FA6C1E}" dt="2025-05-24T18:05:08.571" v="8746" actId="20577"/>
+      <pc:chgData name="Li, Hanchen F" userId="3aee791e-6a2d-4da7-a77b-fbdf7bf15886" providerId="ADAL" clId="{CDC5B0EF-6BEB-4658-A9FF-CB66F6FA6C1E}" dt="2025-05-26T23:57:00.737" v="8871" actId="20577"/>
       <pc:docMkLst>
         <pc:docMk/>
       </pc:docMkLst>
       <pc:sldChg chg="addSp delSp modSp new mod">
-        <pc:chgData name="Li, Hanchen F" userId="3aee791e-6a2d-4da7-a77b-fbdf7bf15886" providerId="ADAL" clId="{CDC5B0EF-6BEB-4658-A9FF-CB66F6FA6C1E}" dt="2025-05-24T00:53:12.071" v="8729" actId="1076"/>
+        <pc:chgData name="Li, Hanchen F" userId="3aee791e-6a2d-4da7-a77b-fbdf7bf15886" providerId="ADAL" clId="{CDC5B0EF-6BEB-4658-A9FF-CB66F6FA6C1E}" dt="2025-05-26T23:54:02.443" v="8826" actId="1076"/>
         <pc:sldMkLst>
           <pc:docMk/>
           <pc:sldMk cId="2152317508" sldId="256"/>
@@ -182,6 +182,70 @@
             <ac:spMk id="7" creationId="{1D746C54-8DEE-DBC7-AEE4-692691C43277}"/>
           </ac:spMkLst>
         </pc:spChg>
+        <pc:spChg chg="add mod">
+          <ac:chgData name="Li, Hanchen F" userId="3aee791e-6a2d-4da7-a77b-fbdf7bf15886" providerId="ADAL" clId="{CDC5B0EF-6BEB-4658-A9FF-CB66F6FA6C1E}" dt="2025-05-26T23:53:48.568" v="8819" actId="207"/>
+          <ac:spMkLst>
+            <pc:docMk/>
+            <pc:sldMk cId="2152317508" sldId="256"/>
+            <ac:spMk id="8" creationId="{C970256C-9125-E58F-41CB-BCB372A65021}"/>
+          </ac:spMkLst>
+        </pc:spChg>
+        <pc:spChg chg="add mod">
+          <ac:chgData name="Li, Hanchen F" userId="3aee791e-6a2d-4da7-a77b-fbdf7bf15886" providerId="ADAL" clId="{CDC5B0EF-6BEB-4658-A9FF-CB66F6FA6C1E}" dt="2025-05-26T23:51:47.382" v="8775" actId="1076"/>
+          <ac:spMkLst>
+            <pc:docMk/>
+            <pc:sldMk cId="2152317508" sldId="256"/>
+            <ac:spMk id="10" creationId="{E9A659B2-194D-0885-8AC2-353E66878043}"/>
+          </ac:spMkLst>
+        </pc:spChg>
+        <pc:spChg chg="add mod">
+          <ac:chgData name="Li, Hanchen F" userId="3aee791e-6a2d-4da7-a77b-fbdf7bf15886" providerId="ADAL" clId="{CDC5B0EF-6BEB-4658-A9FF-CB66F6FA6C1E}" dt="2025-05-26T23:52:24.036" v="8790" actId="1076"/>
+          <ac:spMkLst>
+            <pc:docMk/>
+            <pc:sldMk cId="2152317508" sldId="256"/>
+            <ac:spMk id="11" creationId="{748B245D-DDD1-D633-8299-57FFD78B75DB}"/>
+          </ac:spMkLst>
+        </pc:spChg>
+        <pc:spChg chg="add mod">
+          <ac:chgData name="Li, Hanchen F" userId="3aee791e-6a2d-4da7-a77b-fbdf7bf15886" providerId="ADAL" clId="{CDC5B0EF-6BEB-4658-A9FF-CB66F6FA6C1E}" dt="2025-05-26T23:53:12.383" v="8807" actId="1076"/>
+          <ac:spMkLst>
+            <pc:docMk/>
+            <pc:sldMk cId="2152317508" sldId="256"/>
+            <ac:spMk id="12" creationId="{CBF57178-3723-EBDF-C047-205E47A5D9F4}"/>
+          </ac:spMkLst>
+        </pc:spChg>
+        <pc:spChg chg="add mod">
+          <ac:chgData name="Li, Hanchen F" userId="3aee791e-6a2d-4da7-a77b-fbdf7bf15886" providerId="ADAL" clId="{CDC5B0EF-6BEB-4658-A9FF-CB66F6FA6C1E}" dt="2025-05-26T23:53:05.165" v="8803" actId="1076"/>
+          <ac:spMkLst>
+            <pc:docMk/>
+            <pc:sldMk cId="2152317508" sldId="256"/>
+            <ac:spMk id="13" creationId="{5B325EA7-5DA3-E802-BF27-A0F44547445F}"/>
+          </ac:spMkLst>
+        </pc:spChg>
+        <pc:spChg chg="add mod">
+          <ac:chgData name="Li, Hanchen F" userId="3aee791e-6a2d-4da7-a77b-fbdf7bf15886" providerId="ADAL" clId="{CDC5B0EF-6BEB-4658-A9FF-CB66F6FA6C1E}" dt="2025-05-26T23:53:28.173" v="8812" actId="20577"/>
+          <ac:spMkLst>
+            <pc:docMk/>
+            <pc:sldMk cId="2152317508" sldId="256"/>
+            <ac:spMk id="14" creationId="{38B81D18-C49E-DC29-B75A-57ED2C559C17}"/>
+          </ac:spMkLst>
+        </pc:spChg>
+        <pc:spChg chg="add mod">
+          <ac:chgData name="Li, Hanchen F" userId="3aee791e-6a2d-4da7-a77b-fbdf7bf15886" providerId="ADAL" clId="{CDC5B0EF-6BEB-4658-A9FF-CB66F6FA6C1E}" dt="2025-05-26T23:53:44.414" v="8818" actId="207"/>
+          <ac:spMkLst>
+            <pc:docMk/>
+            <pc:sldMk cId="2152317508" sldId="256"/>
+            <ac:spMk id="15" creationId="{DAA01678-E4F6-05B3-F922-3A08CD642EB5}"/>
+          </ac:spMkLst>
+        </pc:spChg>
+        <pc:spChg chg="add mod">
+          <ac:chgData name="Li, Hanchen F" userId="3aee791e-6a2d-4da7-a77b-fbdf7bf15886" providerId="ADAL" clId="{CDC5B0EF-6BEB-4658-A9FF-CB66F6FA6C1E}" dt="2025-05-26T23:54:02.443" v="8826" actId="1076"/>
+          <ac:spMkLst>
+            <pc:docMk/>
+            <pc:sldMk cId="2152317508" sldId="256"/>
+            <ac:spMk id="16" creationId="{145E91E2-0567-B454-6E6B-0DC473E2A4D0}"/>
+          </ac:spMkLst>
+        </pc:spChg>
         <pc:spChg chg="add mod topLvl">
           <ac:chgData name="Li, Hanchen F" userId="3aee791e-6a2d-4da7-a77b-fbdf7bf15886" providerId="ADAL" clId="{CDC5B0EF-6BEB-4658-A9FF-CB66F6FA6C1E}" dt="2025-05-22T23:17:33.494" v="3248" actId="14826"/>
           <ac:spMkLst>
@@ -814,8 +878,8 @@
             <ac:spMk id="669" creationId="{A123FB79-41B3-6095-12D2-8997AD6F70A2}"/>
           </ac:spMkLst>
         </pc:spChg>
-        <pc:spChg chg="add mod">
-          <ac:chgData name="Li, Hanchen F" userId="3aee791e-6a2d-4da7-a77b-fbdf7bf15886" providerId="ADAL" clId="{CDC5B0EF-6BEB-4658-A9FF-CB66F6FA6C1E}" dt="2025-05-22T23:29:46.579" v="3485" actId="1076"/>
+        <pc:spChg chg="add del mod">
+          <ac:chgData name="Li, Hanchen F" userId="3aee791e-6a2d-4da7-a77b-fbdf7bf15886" providerId="ADAL" clId="{CDC5B0EF-6BEB-4658-A9FF-CB66F6FA6C1E}" dt="2025-05-26T23:51:13.039" v="8761" actId="478"/>
           <ac:spMkLst>
             <pc:docMk/>
             <pc:sldMk cId="2152317508" sldId="256"/>
@@ -830,8 +894,8 @@
             <ac:spMk id="672" creationId="{C94978E5-38D3-C72E-4BC7-EA21E8DEA92A}"/>
           </ac:spMkLst>
         </pc:spChg>
-        <pc:spChg chg="add mod">
-          <ac:chgData name="Li, Hanchen F" userId="3aee791e-6a2d-4da7-a77b-fbdf7bf15886" providerId="ADAL" clId="{CDC5B0EF-6BEB-4658-A9FF-CB66F6FA6C1E}" dt="2025-05-22T23:45:44.734" v="4320" actId="207"/>
+        <pc:spChg chg="add del mod">
+          <ac:chgData name="Li, Hanchen F" userId="3aee791e-6a2d-4da7-a77b-fbdf7bf15886" providerId="ADAL" clId="{CDC5B0EF-6BEB-4658-A9FF-CB66F6FA6C1E}" dt="2025-05-26T23:50:53.609" v="8755" actId="478"/>
           <ac:spMkLst>
             <pc:docMk/>
             <pc:sldMk cId="2152317508" sldId="256"/>
@@ -839,7 +903,7 @@
           </ac:spMkLst>
         </pc:spChg>
         <pc:spChg chg="add mod">
-          <ac:chgData name="Li, Hanchen F" userId="3aee791e-6a2d-4da7-a77b-fbdf7bf15886" providerId="ADAL" clId="{CDC5B0EF-6BEB-4658-A9FF-CB66F6FA6C1E}" dt="2025-05-22T23:47:23.772" v="4881" actId="1076"/>
+          <ac:chgData name="Li, Hanchen F" userId="3aee791e-6a2d-4da7-a77b-fbdf7bf15886" providerId="ADAL" clId="{CDC5B0EF-6BEB-4658-A9FF-CB66F6FA6C1E}" dt="2025-05-26T23:50:51.104" v="8754" actId="1076"/>
           <ac:spMkLst>
             <pc:docMk/>
             <pc:sldMk cId="2152317508" sldId="256"/>
@@ -1031,15 +1095,15 @@
           </ac:spMkLst>
         </pc:spChg>
         <pc:spChg chg="add mod">
-          <ac:chgData name="Li, Hanchen F" userId="3aee791e-6a2d-4da7-a77b-fbdf7bf15886" providerId="ADAL" clId="{CDC5B0EF-6BEB-4658-A9FF-CB66F6FA6C1E}" dt="2025-05-22T23:46:38.614" v="4872" actId="207"/>
+          <ac:chgData name="Li, Hanchen F" userId="3aee791e-6a2d-4da7-a77b-fbdf7bf15886" providerId="ADAL" clId="{CDC5B0EF-6BEB-4658-A9FF-CB66F6FA6C1E}" dt="2025-05-26T23:52:11.808" v="8784" actId="1076"/>
           <ac:spMkLst>
             <pc:docMk/>
             <pc:sldMk cId="2152317508" sldId="256"/>
             <ac:spMk id="736" creationId="{EE4076E9-DC44-CB9F-E117-46DA295CF84E}"/>
           </ac:spMkLst>
         </pc:spChg>
-        <pc:spChg chg="add mod">
-          <ac:chgData name="Li, Hanchen F" userId="3aee791e-6a2d-4da7-a77b-fbdf7bf15886" providerId="ADAL" clId="{CDC5B0EF-6BEB-4658-A9FF-CB66F6FA6C1E}" dt="2025-05-22T23:46:34.616" v="4814" actId="207"/>
+        <pc:spChg chg="add del mod">
+          <ac:chgData name="Li, Hanchen F" userId="3aee791e-6a2d-4da7-a77b-fbdf7bf15886" providerId="ADAL" clId="{CDC5B0EF-6BEB-4658-A9FF-CB66F6FA6C1E}" dt="2025-05-26T23:52:14.060" v="8785" actId="478"/>
           <ac:spMkLst>
             <pc:docMk/>
             <pc:sldMk cId="2152317508" sldId="256"/>
@@ -1062,32 +1126,32 @@
             <ac:spMk id="739" creationId="{6D3DA571-6C18-4EFE-ED2A-063D2F002717}"/>
           </ac:spMkLst>
         </pc:spChg>
-        <pc:spChg chg="add mod">
-          <ac:chgData name="Li, Hanchen F" userId="3aee791e-6a2d-4da7-a77b-fbdf7bf15886" providerId="ADAL" clId="{CDC5B0EF-6BEB-4658-A9FF-CB66F6FA6C1E}" dt="2025-05-22T23:47:50.233" v="4892" actId="20577"/>
+        <pc:spChg chg="add del mod">
+          <ac:chgData name="Li, Hanchen F" userId="3aee791e-6a2d-4da7-a77b-fbdf7bf15886" providerId="ADAL" clId="{CDC5B0EF-6BEB-4658-A9FF-CB66F6FA6C1E}" dt="2025-05-26T23:53:32.499" v="8813" actId="478"/>
           <ac:spMkLst>
             <pc:docMk/>
             <pc:sldMk cId="2152317508" sldId="256"/>
             <ac:spMk id="740" creationId="{5C05FDFA-069A-1211-391D-6535C7B3AB3F}"/>
           </ac:spMkLst>
         </pc:spChg>
-        <pc:spChg chg="add mod">
-          <ac:chgData name="Li, Hanchen F" userId="3aee791e-6a2d-4da7-a77b-fbdf7bf15886" providerId="ADAL" clId="{CDC5B0EF-6BEB-4658-A9FF-CB66F6FA6C1E}" dt="2025-05-22T23:49:01.969" v="5003" actId="1076"/>
+        <pc:spChg chg="add del mod">
+          <ac:chgData name="Li, Hanchen F" userId="3aee791e-6a2d-4da7-a77b-fbdf7bf15886" providerId="ADAL" clId="{CDC5B0EF-6BEB-4658-A9FF-CB66F6FA6C1E}" dt="2025-05-26T23:53:18.669" v="8808" actId="478"/>
           <ac:spMkLst>
             <pc:docMk/>
             <pc:sldMk cId="2152317508" sldId="256"/>
             <ac:spMk id="741" creationId="{C3BB3AE5-380E-3C8F-7915-31796B6B7783}"/>
           </ac:spMkLst>
         </pc:spChg>
-        <pc:spChg chg="add mod">
-          <ac:chgData name="Li, Hanchen F" userId="3aee791e-6a2d-4da7-a77b-fbdf7bf15886" providerId="ADAL" clId="{CDC5B0EF-6BEB-4658-A9FF-CB66F6FA6C1E}" dt="2025-05-23T16:55:18.405" v="7846" actId="207"/>
+        <pc:spChg chg="add del mod">
+          <ac:chgData name="Li, Hanchen F" userId="3aee791e-6a2d-4da7-a77b-fbdf7bf15886" providerId="ADAL" clId="{CDC5B0EF-6BEB-4658-A9FF-CB66F6FA6C1E}" dt="2025-05-26T23:52:49.447" v="8798" actId="478"/>
           <ac:spMkLst>
             <pc:docMk/>
             <pc:sldMk cId="2152317508" sldId="256"/>
             <ac:spMk id="742" creationId="{52B53972-AFE9-F924-2D9E-BB933025E733}"/>
           </ac:spMkLst>
         </pc:spChg>
-        <pc:spChg chg="add mod">
-          <ac:chgData name="Li, Hanchen F" userId="3aee791e-6a2d-4da7-a77b-fbdf7bf15886" providerId="ADAL" clId="{CDC5B0EF-6BEB-4658-A9FF-CB66F6FA6C1E}" dt="2025-05-22T23:49:34.697" v="5009" actId="1076"/>
+        <pc:spChg chg="add del mod">
+          <ac:chgData name="Li, Hanchen F" userId="3aee791e-6a2d-4da7-a77b-fbdf7bf15886" providerId="ADAL" clId="{CDC5B0EF-6BEB-4658-A9FF-CB66F6FA6C1E}" dt="2025-05-26T23:52:37.750" v="8793" actId="478"/>
           <ac:spMkLst>
             <pc:docMk/>
             <pc:sldMk cId="2152317508" sldId="256"/>
@@ -1150,8 +1214,8 @@
             <ac:spMk id="750" creationId="{2864E7F6-D1E7-8631-D443-4B6B887CD189}"/>
           </ac:spMkLst>
         </pc:spChg>
-        <pc:spChg chg="add mod">
-          <ac:chgData name="Li, Hanchen F" userId="3aee791e-6a2d-4da7-a77b-fbdf7bf15886" providerId="ADAL" clId="{CDC5B0EF-6BEB-4658-A9FF-CB66F6FA6C1E}" dt="2025-05-23T21:51:39.489" v="8162" actId="1076"/>
+        <pc:spChg chg="add del mod">
+          <ac:chgData name="Li, Hanchen F" userId="3aee791e-6a2d-4da7-a77b-fbdf7bf15886" providerId="ADAL" clId="{CDC5B0EF-6BEB-4658-A9FF-CB66F6FA6C1E}" dt="2025-05-26T23:53:54.086" v="8820" actId="478"/>
           <ac:spMkLst>
             <pc:docMk/>
             <pc:sldMk cId="2152317508" sldId="256"/>
@@ -1183,7 +1247,7 @@
           </ac:spMkLst>
         </pc:spChg>
         <pc:grpChg chg="add mod">
-          <ac:chgData name="Li, Hanchen F" userId="3aee791e-6a2d-4da7-a77b-fbdf7bf15886" providerId="ADAL" clId="{CDC5B0EF-6BEB-4658-A9FF-CB66F6FA6C1E}" dt="2025-05-22T23:54:34.384" v="5813" actId="1076"/>
+          <ac:chgData name="Li, Hanchen F" userId="3aee791e-6a2d-4da7-a77b-fbdf7bf15886" providerId="ADAL" clId="{CDC5B0EF-6BEB-4658-A9FF-CB66F6FA6C1E}" dt="2025-05-26T23:53:07.061" v="8805" actId="1076"/>
           <ac:grpSpMkLst>
             <pc:docMk/>
             <pc:sldMk cId="2152317508" sldId="256"/>
@@ -1207,7 +1271,7 @@
           </ac:grpSpMkLst>
         </pc:grpChg>
         <pc:grpChg chg="add del mod ord">
-          <ac:chgData name="Li, Hanchen F" userId="3aee791e-6a2d-4da7-a77b-fbdf7bf15886" providerId="ADAL" clId="{CDC5B0EF-6BEB-4658-A9FF-CB66F6FA6C1E}" dt="2025-05-23T16:54:24.837" v="7717" actId="1076"/>
+          <ac:chgData name="Li, Hanchen F" userId="3aee791e-6a2d-4da7-a77b-fbdf7bf15886" providerId="ADAL" clId="{CDC5B0EF-6BEB-4658-A9FF-CB66F6FA6C1E}" dt="2025-05-26T23:51:45.095" v="8774" actId="1076"/>
           <ac:grpSpMkLst>
             <pc:docMk/>
             <pc:sldMk cId="2152317508" sldId="256"/>
@@ -1757,14 +1821,6 @@
             <ac:spMk id="20" creationId="{9FDBF980-E1E1-B0A3-D564-A2844E7C95E4}"/>
           </ac:spMkLst>
         </pc:spChg>
-        <pc:spChg chg="add del mod">
-          <ac:chgData name="Li, Hanchen F" userId="3aee791e-6a2d-4da7-a77b-fbdf7bf15886" providerId="ADAL" clId="{CDC5B0EF-6BEB-4658-A9FF-CB66F6FA6C1E}" dt="2025-05-24T00:35:27.987" v="8282" actId="478"/>
-          <ac:spMkLst>
-            <pc:docMk/>
-            <pc:sldMk cId="3137520481" sldId="257"/>
-            <ac:spMk id="21" creationId="{8D035917-F096-4DBF-E18C-4F6BA757D7F9}"/>
-          </ac:spMkLst>
-        </pc:spChg>
         <pc:spChg chg="add mod">
           <ac:chgData name="Li, Hanchen F" userId="3aee791e-6a2d-4da7-a77b-fbdf7bf15886" providerId="ADAL" clId="{CDC5B0EF-6BEB-4658-A9FF-CB66F6FA6C1E}" dt="2025-05-24T00:41:58.135" v="8407" actId="1076"/>
           <ac:spMkLst>
@@ -1846,14 +1902,6 @@
           </ac:spMkLst>
         </pc:spChg>
         <pc:spChg chg="add mod">
-          <ac:chgData name="Li, Hanchen F" userId="3aee791e-6a2d-4da7-a77b-fbdf7bf15886" providerId="ADAL" clId="{CDC5B0EF-6BEB-4658-A9FF-CB66F6FA6C1E}" dt="2025-05-23T00:03:07.943" v="5969" actId="1076"/>
-          <ac:spMkLst>
-            <pc:docMk/>
-            <pc:sldMk cId="3137520481" sldId="257"/>
-            <ac:spMk id="51" creationId="{BB95600C-A67E-3159-4646-4FDC9B0522BF}"/>
-          </ac:spMkLst>
-        </pc:spChg>
-        <pc:spChg chg="add mod">
           <ac:chgData name="Li, Hanchen F" userId="3aee791e-6a2d-4da7-a77b-fbdf7bf15886" providerId="ADAL" clId="{CDC5B0EF-6BEB-4658-A9FF-CB66F6FA6C1E}" dt="2025-05-24T18:02:17.886" v="8740" actId="20577"/>
           <ac:spMkLst>
             <pc:docMk/>
@@ -1950,14 +1998,6 @@
           </ac:cxnSpMkLst>
         </pc:cxnChg>
         <pc:cxnChg chg="add mod">
-          <ac:chgData name="Li, Hanchen F" userId="3aee791e-6a2d-4da7-a77b-fbdf7bf15886" providerId="ADAL" clId="{CDC5B0EF-6BEB-4658-A9FF-CB66F6FA6C1E}" dt="2025-05-23T16:58:02.232" v="7857" actId="1076"/>
-          <ac:cxnSpMkLst>
-            <pc:docMk/>
-            <pc:sldMk cId="3137520481" sldId="257"/>
-            <ac:cxnSpMk id="2" creationId="{D6C73526-2A7F-9DD3-3F80-406DA998A835}"/>
-          </ac:cxnSpMkLst>
-        </pc:cxnChg>
-        <pc:cxnChg chg="add mod">
           <ac:chgData name="Li, Hanchen F" userId="3aee791e-6a2d-4da7-a77b-fbdf7bf15886" providerId="ADAL" clId="{CDC5B0EF-6BEB-4658-A9FF-CB66F6FA6C1E}" dt="2025-05-22T23:56:07.134" v="5833" actId="1076"/>
           <ac:cxnSpMkLst>
             <pc:docMk/>
@@ -2029,14 +2069,6 @@
             <ac:cxnSpMk id="40" creationId="{484BEFF4-71E7-8955-B2B8-36A0C5284C4D}"/>
           </ac:cxnSpMkLst>
         </pc:cxnChg>
-        <pc:cxnChg chg="add del mod">
-          <ac:chgData name="Li, Hanchen F" userId="3aee791e-6a2d-4da7-a77b-fbdf7bf15886" providerId="ADAL" clId="{CDC5B0EF-6BEB-4658-A9FF-CB66F6FA6C1E}" dt="2025-05-24T00:47:38.439" v="8662" actId="478"/>
-          <ac:cxnSpMkLst>
-            <pc:docMk/>
-            <pc:sldMk cId="3137520481" sldId="257"/>
-            <ac:cxnSpMk id="42" creationId="{8701D711-4C16-8C03-77C8-7C73B02F717A}"/>
-          </ac:cxnSpMkLst>
-        </pc:cxnChg>
         <pc:cxnChg chg="add mod">
           <ac:chgData name="Li, Hanchen F" userId="3aee791e-6a2d-4da7-a77b-fbdf7bf15886" providerId="ADAL" clId="{CDC5B0EF-6BEB-4658-A9FF-CB66F6FA6C1E}" dt="2025-05-24T00:47:52.516" v="8666" actId="14100"/>
           <ac:cxnSpMkLst>
@@ -2051,38 +2083,6 @@
             <pc:docMk/>
             <pc:sldMk cId="3137520481" sldId="257"/>
             <ac:cxnSpMk id="46" creationId="{DD3F70FD-8DC4-00CB-65BE-08E8228B12BA}"/>
-          </ac:cxnSpMkLst>
-        </pc:cxnChg>
-        <pc:cxnChg chg="add mod">
-          <ac:chgData name="Li, Hanchen F" userId="3aee791e-6a2d-4da7-a77b-fbdf7bf15886" providerId="ADAL" clId="{CDC5B0EF-6BEB-4658-A9FF-CB66F6FA6C1E}" dt="2025-05-23T00:02:33.511" v="5959" actId="571"/>
-          <ac:cxnSpMkLst>
-            <pc:docMk/>
-            <pc:sldMk cId="3137520481" sldId="257"/>
-            <ac:cxnSpMk id="48" creationId="{32CB9493-0873-F5F2-8757-F63FD9EE7B8E}"/>
-          </ac:cxnSpMkLst>
-        </pc:cxnChg>
-        <pc:cxnChg chg="add mod">
-          <ac:chgData name="Li, Hanchen F" userId="3aee791e-6a2d-4da7-a77b-fbdf7bf15886" providerId="ADAL" clId="{CDC5B0EF-6BEB-4658-A9FF-CB66F6FA6C1E}" dt="2025-05-23T00:02:35.627" v="5961"/>
-          <ac:cxnSpMkLst>
-            <pc:docMk/>
-            <pc:sldMk cId="3137520481" sldId="257"/>
-            <ac:cxnSpMk id="49" creationId="{0FBCA506-360C-E9E1-0741-ADFB5D682755}"/>
-          </ac:cxnSpMkLst>
-        </pc:cxnChg>
-        <pc:cxnChg chg="add del mod">
-          <ac:chgData name="Li, Hanchen F" userId="3aee791e-6a2d-4da7-a77b-fbdf7bf15886" providerId="ADAL" clId="{CDC5B0EF-6BEB-4658-A9FF-CB66F6FA6C1E}" dt="2025-05-24T00:40:40.796" v="8382" actId="478"/>
-          <ac:cxnSpMkLst>
-            <pc:docMk/>
-            <pc:sldMk cId="3137520481" sldId="257"/>
-            <ac:cxnSpMk id="57" creationId="{A7D1F15E-D124-4F64-7F2D-EAE66D993939}"/>
-          </ac:cxnSpMkLst>
-        </pc:cxnChg>
-        <pc:cxnChg chg="add del mod">
-          <ac:chgData name="Li, Hanchen F" userId="3aee791e-6a2d-4da7-a77b-fbdf7bf15886" providerId="ADAL" clId="{CDC5B0EF-6BEB-4658-A9FF-CB66F6FA6C1E}" dt="2025-05-24T00:40:40.796" v="8382" actId="478"/>
-          <ac:cxnSpMkLst>
-            <pc:docMk/>
-            <pc:sldMk cId="3137520481" sldId="257"/>
-            <ac:cxnSpMk id="58" creationId="{EBFA7DC6-BCD5-A730-BCC8-F29C1B2565A5}"/>
           </ac:cxnSpMkLst>
         </pc:cxnChg>
         <pc:cxnChg chg="add mod">
@@ -2171,22 +2171,6 @@
           <pc:docMk/>
           <pc:sldMk cId="3834972223" sldId="258"/>
         </pc:sldMkLst>
-        <pc:spChg chg="del">
-          <ac:chgData name="Li, Hanchen F" userId="3aee791e-6a2d-4da7-a77b-fbdf7bf15886" providerId="ADAL" clId="{CDC5B0EF-6BEB-4658-A9FF-CB66F6FA6C1E}" dt="2025-05-23T00:07:21.674" v="6007" actId="478"/>
-          <ac:spMkLst>
-            <pc:docMk/>
-            <pc:sldMk cId="3834972223" sldId="258"/>
-            <ac:spMk id="2" creationId="{8ED1A22E-FB8F-422B-6D1E-7A5A89E6119C}"/>
-          </ac:spMkLst>
-        </pc:spChg>
-        <pc:spChg chg="del">
-          <ac:chgData name="Li, Hanchen F" userId="3aee791e-6a2d-4da7-a77b-fbdf7bf15886" providerId="ADAL" clId="{CDC5B0EF-6BEB-4658-A9FF-CB66F6FA6C1E}" dt="2025-05-23T00:07:20.935" v="6006" actId="478"/>
-          <ac:spMkLst>
-            <pc:docMk/>
-            <pc:sldMk cId="3834972223" sldId="258"/>
-            <ac:spMk id="3" creationId="{EA702C2E-A51C-0181-FF82-9D2749543A0D}"/>
-          </ac:spMkLst>
-        </pc:spChg>
         <pc:spChg chg="add mod ord">
           <ac:chgData name="Li, Hanchen F" userId="3aee791e-6a2d-4da7-a77b-fbdf7bf15886" providerId="ADAL" clId="{CDC5B0EF-6BEB-4658-A9FF-CB66F6FA6C1E}" dt="2025-05-23T00:12:26.212" v="6114" actId="208"/>
           <ac:spMkLst>
@@ -2220,27 +2204,11 @@
           </ac:spMkLst>
         </pc:spChg>
         <pc:spChg chg="add mod ord">
-          <ac:chgData name="Li, Hanchen F" userId="3aee791e-6a2d-4da7-a77b-fbdf7bf15886" providerId="ADAL" clId="{CDC5B0EF-6BEB-4658-A9FF-CB66F6FA6C1E}" dt="2025-05-23T00:09:40.295" v="6059" actId="1076"/>
-          <ac:spMkLst>
-            <pc:docMk/>
-            <pc:sldMk cId="3834972223" sldId="258"/>
-            <ac:spMk id="18" creationId="{B74AD992-1D06-95AD-0350-D9B0D76C9A52}"/>
-          </ac:spMkLst>
-        </pc:spChg>
-        <pc:spChg chg="add mod ord">
           <ac:chgData name="Li, Hanchen F" userId="3aee791e-6a2d-4da7-a77b-fbdf7bf15886" providerId="ADAL" clId="{CDC5B0EF-6BEB-4658-A9FF-CB66F6FA6C1E}" dt="2025-05-23T00:12:31.110" v="6115" actId="2085"/>
           <ac:spMkLst>
             <pc:docMk/>
             <pc:sldMk cId="3834972223" sldId="258"/>
             <ac:spMk id="19" creationId="{00BE844E-FDBA-BB12-B655-D9B733710326}"/>
-          </ac:spMkLst>
-        </pc:spChg>
-        <pc:spChg chg="add del mod">
-          <ac:chgData name="Li, Hanchen F" userId="3aee791e-6a2d-4da7-a77b-fbdf7bf15886" providerId="ADAL" clId="{CDC5B0EF-6BEB-4658-A9FF-CB66F6FA6C1E}" dt="2025-05-23T00:10:13.111" v="6079" actId="478"/>
-          <ac:spMkLst>
-            <pc:docMk/>
-            <pc:sldMk cId="3834972223" sldId="258"/>
-            <ac:spMk id="20" creationId="{B82F763E-3C46-1403-7BA7-ACBD456C4506}"/>
           </ac:spMkLst>
         </pc:spChg>
         <pc:spChg chg="add mod ord">
@@ -2259,14 +2227,6 @@
             <ac:spMk id="35" creationId="{628697DE-3941-2AFE-E321-2D6667A519EA}"/>
           </ac:spMkLst>
         </pc:spChg>
-        <pc:spChg chg="add del mod">
-          <ac:chgData name="Li, Hanchen F" userId="3aee791e-6a2d-4da7-a77b-fbdf7bf15886" providerId="ADAL" clId="{CDC5B0EF-6BEB-4658-A9FF-CB66F6FA6C1E}" dt="2025-05-23T00:13:16.616" v="6124" actId="478"/>
-          <ac:spMkLst>
-            <pc:docMk/>
-            <pc:sldMk cId="3834972223" sldId="258"/>
-            <ac:spMk id="36" creationId="{8F5EC0E9-5322-D2DD-EC48-5E75D2578328}"/>
-          </ac:spMkLst>
-        </pc:spChg>
         <pc:spChg chg="add mod">
           <ac:chgData name="Li, Hanchen F" userId="3aee791e-6a2d-4da7-a77b-fbdf7bf15886" providerId="ADAL" clId="{CDC5B0EF-6BEB-4658-A9FF-CB66F6FA6C1E}" dt="2025-05-23T00:13:18.537" v="6125" actId="1076"/>
           <ac:spMkLst>
@@ -2307,102 +2267,6 @@
             <ac:spMk id="41" creationId="{C17FC6F7-5871-3E6E-6168-959CD481B76D}"/>
           </ac:spMkLst>
         </pc:spChg>
-        <pc:spChg chg="add del mod">
-          <ac:chgData name="Li, Hanchen F" userId="3aee791e-6a2d-4da7-a77b-fbdf7bf15886" providerId="ADAL" clId="{CDC5B0EF-6BEB-4658-A9FF-CB66F6FA6C1E}" dt="2025-05-23T00:16:23.367" v="6170" actId="478"/>
-          <ac:spMkLst>
-            <pc:docMk/>
-            <pc:sldMk cId="3834972223" sldId="258"/>
-            <ac:spMk id="42" creationId="{B1F910C0-C623-094F-7567-099BBB3D77B3}"/>
-          </ac:spMkLst>
-        </pc:spChg>
-        <pc:spChg chg="add del mod">
-          <ac:chgData name="Li, Hanchen F" userId="3aee791e-6a2d-4da7-a77b-fbdf7bf15886" providerId="ADAL" clId="{CDC5B0EF-6BEB-4658-A9FF-CB66F6FA6C1E}" dt="2025-05-23T00:16:22.602" v="6169" actId="478"/>
-          <ac:spMkLst>
-            <pc:docMk/>
-            <pc:sldMk cId="3834972223" sldId="258"/>
-            <ac:spMk id="43" creationId="{3CDB5943-6008-79F9-D86B-1DE02ADBC5C4}"/>
-          </ac:spMkLst>
-        </pc:spChg>
-        <pc:spChg chg="add del mod">
-          <ac:chgData name="Li, Hanchen F" userId="3aee791e-6a2d-4da7-a77b-fbdf7bf15886" providerId="ADAL" clId="{CDC5B0EF-6BEB-4658-A9FF-CB66F6FA6C1E}" dt="2025-05-23T00:16:36.536" v="6181" actId="478"/>
-          <ac:spMkLst>
-            <pc:docMk/>
-            <pc:sldMk cId="3834972223" sldId="258"/>
-            <ac:spMk id="44" creationId="{4236736E-6F7E-A09E-993A-4148595263C3}"/>
-          </ac:spMkLst>
-        </pc:spChg>
-        <pc:spChg chg="add del mod">
-          <ac:chgData name="Li, Hanchen F" userId="3aee791e-6a2d-4da7-a77b-fbdf7bf15886" providerId="ADAL" clId="{CDC5B0EF-6BEB-4658-A9FF-CB66F6FA6C1E}" dt="2025-05-23T00:16:37.391" v="6182" actId="478"/>
-          <ac:spMkLst>
-            <pc:docMk/>
-            <pc:sldMk cId="3834972223" sldId="258"/>
-            <ac:spMk id="45" creationId="{BACEBC52-72BE-68D1-B7E2-AA486FE0AF66}"/>
-          </ac:spMkLst>
-        </pc:spChg>
-        <pc:spChg chg="add del mod">
-          <ac:chgData name="Li, Hanchen F" userId="3aee791e-6a2d-4da7-a77b-fbdf7bf15886" providerId="ADAL" clId="{CDC5B0EF-6BEB-4658-A9FF-CB66F6FA6C1E}" dt="2025-05-23T00:16:42.757" v="6188" actId="478"/>
-          <ac:spMkLst>
-            <pc:docMk/>
-            <pc:sldMk cId="3834972223" sldId="258"/>
-            <ac:spMk id="46" creationId="{93B4F9CD-3FCF-17E3-0385-2D7321AEF0DB}"/>
-          </ac:spMkLst>
-        </pc:spChg>
-        <pc:spChg chg="add del mod">
-          <ac:chgData name="Li, Hanchen F" userId="3aee791e-6a2d-4da7-a77b-fbdf7bf15886" providerId="ADAL" clId="{CDC5B0EF-6BEB-4658-A9FF-CB66F6FA6C1E}" dt="2025-05-23T00:16:50.313" v="6193" actId="478"/>
-          <ac:spMkLst>
-            <pc:docMk/>
-            <pc:sldMk cId="3834972223" sldId="258"/>
-            <ac:spMk id="47" creationId="{3D5340FA-7EF1-E0D6-1CF2-7BD3306046FD}"/>
-          </ac:spMkLst>
-        </pc:spChg>
-        <pc:spChg chg="del">
-          <ac:chgData name="Li, Hanchen F" userId="3aee791e-6a2d-4da7-a77b-fbdf7bf15886" providerId="ADAL" clId="{CDC5B0EF-6BEB-4658-A9FF-CB66F6FA6C1E}" dt="2025-05-23T00:16:30.386" v="6175" actId="478"/>
-          <ac:spMkLst>
-            <pc:docMk/>
-            <pc:sldMk cId="3834972223" sldId="258"/>
-            <ac:spMk id="54" creationId="{EB879EBF-2574-0859-0C13-7961217DE684}"/>
-          </ac:spMkLst>
-        </pc:spChg>
-        <pc:spChg chg="add del mod">
-          <ac:chgData name="Li, Hanchen F" userId="3aee791e-6a2d-4da7-a77b-fbdf7bf15886" providerId="ADAL" clId="{CDC5B0EF-6BEB-4658-A9FF-CB66F6FA6C1E}" dt="2025-05-23T00:16:41.080" v="6186" actId="478"/>
-          <ac:spMkLst>
-            <pc:docMk/>
-            <pc:sldMk cId="3834972223" sldId="258"/>
-            <ac:spMk id="55" creationId="{172D3023-89FC-B769-8101-AAE5BBF9A808}"/>
-          </ac:spMkLst>
-        </pc:spChg>
-        <pc:spChg chg="del">
-          <ac:chgData name="Li, Hanchen F" userId="3aee791e-6a2d-4da7-a77b-fbdf7bf15886" providerId="ADAL" clId="{CDC5B0EF-6BEB-4658-A9FF-CB66F6FA6C1E}" dt="2025-05-23T00:16:27.769" v="6172" actId="478"/>
-          <ac:spMkLst>
-            <pc:docMk/>
-            <pc:sldMk cId="3834972223" sldId="258"/>
-            <ac:spMk id="56" creationId="{446EC50F-B77C-FBC9-06DF-6A7FC17E9501}"/>
-          </ac:spMkLst>
-        </pc:spChg>
-        <pc:spChg chg="add del mod">
-          <ac:chgData name="Li, Hanchen F" userId="3aee791e-6a2d-4da7-a77b-fbdf7bf15886" providerId="ADAL" clId="{CDC5B0EF-6BEB-4658-A9FF-CB66F6FA6C1E}" dt="2025-05-23T00:16:46.453" v="6190" actId="478"/>
-          <ac:spMkLst>
-            <pc:docMk/>
-            <pc:sldMk cId="3834972223" sldId="258"/>
-            <ac:spMk id="57" creationId="{9611B2E5-C63D-7249-F819-03620B1E8675}"/>
-          </ac:spMkLst>
-        </pc:spChg>
-        <pc:spChg chg="add del mod">
-          <ac:chgData name="Li, Hanchen F" userId="3aee791e-6a2d-4da7-a77b-fbdf7bf15886" providerId="ADAL" clId="{CDC5B0EF-6BEB-4658-A9FF-CB66F6FA6C1E}" dt="2025-05-23T00:16:30.389" v="6177"/>
-          <ac:spMkLst>
-            <pc:docMk/>
-            <pc:sldMk cId="3834972223" sldId="258"/>
-            <ac:spMk id="58" creationId="{489B747A-0342-191B-DEF7-AE8DCCE906FB}"/>
-          </ac:spMkLst>
-        </pc:spChg>
-        <pc:spChg chg="add del mod">
-          <ac:chgData name="Li, Hanchen F" userId="3aee791e-6a2d-4da7-a77b-fbdf7bf15886" providerId="ADAL" clId="{CDC5B0EF-6BEB-4658-A9FF-CB66F6FA6C1E}" dt="2025-05-23T00:16:40.129" v="6185" actId="478"/>
-          <ac:spMkLst>
-            <pc:docMk/>
-            <pc:sldMk cId="3834972223" sldId="258"/>
-            <ac:spMk id="59" creationId="{3EC77697-997E-E7B8-FFC4-AD485313A0F2}"/>
-          </ac:spMkLst>
-        </pc:spChg>
         <pc:spChg chg="add mod">
           <ac:chgData name="Li, Hanchen F" userId="3aee791e-6a2d-4da7-a77b-fbdf7bf15886" providerId="ADAL" clId="{CDC5B0EF-6BEB-4658-A9FF-CB66F6FA6C1E}" dt="2025-05-23T00:16:08.409" v="6164" actId="208"/>
           <ac:spMkLst>
@@ -2587,28 +2451,12 @@
             <ac:spMk id="95" creationId="{DEB07ABE-8011-7510-5D9D-BF2A0776E5F1}"/>
           </ac:spMkLst>
         </pc:spChg>
-        <pc:spChg chg="add mod">
-          <ac:chgData name="Li, Hanchen F" userId="3aee791e-6a2d-4da7-a77b-fbdf7bf15886" providerId="ADAL" clId="{CDC5B0EF-6BEB-4658-A9FF-CB66F6FA6C1E}" dt="2025-05-23T00:19:42.259" v="6256" actId="571"/>
-          <ac:spMkLst>
-            <pc:docMk/>
-            <pc:sldMk cId="3834972223" sldId="258"/>
-            <ac:spMk id="96" creationId="{A956922A-D76A-2EB6-4CFB-A20173569114}"/>
-          </ac:spMkLst>
-        </pc:spChg>
         <pc:cxnChg chg="add mod">
           <ac:chgData name="Li, Hanchen F" userId="3aee791e-6a2d-4da7-a77b-fbdf7bf15886" providerId="ADAL" clId="{CDC5B0EF-6BEB-4658-A9FF-CB66F6FA6C1E}" dt="2025-05-23T00:08:06.351" v="6022" actId="1582"/>
           <ac:cxnSpMkLst>
             <pc:docMk/>
             <pc:sldMk cId="3834972223" sldId="258"/>
             <ac:cxnSpMk id="5" creationId="{18762C28-FBC6-CB91-EEAA-4EF4F00D7B86}"/>
-          </ac:cxnSpMkLst>
-        </pc:cxnChg>
-        <pc:cxnChg chg="add mod">
-          <ac:chgData name="Li, Hanchen F" userId="3aee791e-6a2d-4da7-a77b-fbdf7bf15886" providerId="ADAL" clId="{CDC5B0EF-6BEB-4658-A9FF-CB66F6FA6C1E}" dt="2025-05-23T00:07:32.558" v="6011" actId="571"/>
-          <ac:cxnSpMkLst>
-            <pc:docMk/>
-            <pc:sldMk cId="3834972223" sldId="258"/>
-            <ac:cxnSpMk id="6" creationId="{9C66AC33-0B5A-3E07-E7A0-DEB35F4B44DA}"/>
           </ac:cxnSpMkLst>
         </pc:cxnChg>
         <pc:cxnChg chg="add mod">
@@ -2649,54 +2497,6 @@
             <pc:docMk/>
             <pc:sldMk cId="3834972223" sldId="258"/>
             <ac:cxnSpMk id="32" creationId="{BDA6F119-1BF1-B9D0-6669-21A2089A39F7}"/>
-          </ac:cxnSpMkLst>
-        </pc:cxnChg>
-        <pc:cxnChg chg="del">
-          <ac:chgData name="Li, Hanchen F" userId="3aee791e-6a2d-4da7-a77b-fbdf7bf15886" providerId="ADAL" clId="{CDC5B0EF-6BEB-4658-A9FF-CB66F6FA6C1E}" dt="2025-05-23T00:16:28.601" v="6173" actId="478"/>
-          <ac:cxnSpMkLst>
-            <pc:docMk/>
-            <pc:sldMk cId="3834972223" sldId="258"/>
-            <ac:cxnSpMk id="48" creationId="{05574B9A-8495-B988-E834-D69532AB9CE3}"/>
-          </ac:cxnSpMkLst>
-        </pc:cxnChg>
-        <pc:cxnChg chg="del">
-          <ac:chgData name="Li, Hanchen F" userId="3aee791e-6a2d-4da7-a77b-fbdf7bf15886" providerId="ADAL" clId="{CDC5B0EF-6BEB-4658-A9FF-CB66F6FA6C1E}" dt="2025-05-23T00:16:45.212" v="6189" actId="478"/>
-          <ac:cxnSpMkLst>
-            <pc:docMk/>
-            <pc:sldMk cId="3834972223" sldId="258"/>
-            <ac:cxnSpMk id="49" creationId="{AE11AEC7-B0EC-35BF-3EC2-FA81436EA889}"/>
-          </ac:cxnSpMkLst>
-        </pc:cxnChg>
-        <pc:cxnChg chg="del">
-          <ac:chgData name="Li, Hanchen F" userId="3aee791e-6a2d-4da7-a77b-fbdf7bf15886" providerId="ADAL" clId="{CDC5B0EF-6BEB-4658-A9FF-CB66F6FA6C1E}" dt="2025-05-23T00:16:38.392" v="6183" actId="478"/>
-          <ac:cxnSpMkLst>
-            <pc:docMk/>
-            <pc:sldMk cId="3834972223" sldId="258"/>
-            <ac:cxnSpMk id="50" creationId="{C1E59E84-2212-A861-93B1-0C1D68FEDCC3}"/>
-          </ac:cxnSpMkLst>
-        </pc:cxnChg>
-        <pc:cxnChg chg="del">
-          <ac:chgData name="Li, Hanchen F" userId="3aee791e-6a2d-4da7-a77b-fbdf7bf15886" providerId="ADAL" clId="{CDC5B0EF-6BEB-4658-A9FF-CB66F6FA6C1E}" dt="2025-05-23T00:16:41.783" v="6187" actId="478"/>
-          <ac:cxnSpMkLst>
-            <pc:docMk/>
-            <pc:sldMk cId="3834972223" sldId="258"/>
-            <ac:cxnSpMk id="51" creationId="{27408277-587F-F12D-CAEB-27F6AC622EAB}"/>
-          </ac:cxnSpMkLst>
-        </pc:cxnChg>
-        <pc:cxnChg chg="del">
-          <ac:chgData name="Li, Hanchen F" userId="3aee791e-6a2d-4da7-a77b-fbdf7bf15886" providerId="ADAL" clId="{CDC5B0EF-6BEB-4658-A9FF-CB66F6FA6C1E}" dt="2025-05-23T00:16:32.959" v="6178" actId="478"/>
-          <ac:cxnSpMkLst>
-            <pc:docMk/>
-            <pc:sldMk cId="3834972223" sldId="258"/>
-            <ac:cxnSpMk id="52" creationId="{D7A417A7-5D8E-49A9-FC89-0D981241A837}"/>
-          </ac:cxnSpMkLst>
-        </pc:cxnChg>
-        <pc:cxnChg chg="del">
-          <ac:chgData name="Li, Hanchen F" userId="3aee791e-6a2d-4da7-a77b-fbdf7bf15886" providerId="ADAL" clId="{CDC5B0EF-6BEB-4658-A9FF-CB66F6FA6C1E}" dt="2025-05-23T00:16:25.027" v="6171" actId="478"/>
-          <ac:cxnSpMkLst>
-            <pc:docMk/>
-            <pc:sldMk cId="3834972223" sldId="258"/>
-            <ac:cxnSpMk id="53" creationId="{A1DDB7FF-5B24-4675-6907-7DC9FAF972EF}"/>
           </ac:cxnSpMkLst>
         </pc:cxnChg>
         <pc:cxnChg chg="mod">
@@ -2826,36 +2626,12 @@
             <ac:spMk id="9" creationId="{BF25BBE2-6F1D-5975-8FEB-752EC76148E4}"/>
           </ac:spMkLst>
         </pc:spChg>
-        <pc:spChg chg="del">
-          <ac:chgData name="Li, Hanchen F" userId="3aee791e-6a2d-4da7-a77b-fbdf7bf15886" providerId="ADAL" clId="{CDC5B0EF-6BEB-4658-A9FF-CB66F6FA6C1E}" dt="2025-05-23T00:20:08.880" v="6264" actId="478"/>
-          <ac:spMkLst>
-            <pc:docMk/>
-            <pc:sldMk cId="3652000193" sldId="259"/>
-            <ac:spMk id="14" creationId="{6B22E7D2-FA18-6905-A326-0CE796968AC6}"/>
-          </ac:spMkLst>
-        </pc:spChg>
-        <pc:spChg chg="del">
-          <ac:chgData name="Li, Hanchen F" userId="3aee791e-6a2d-4da7-a77b-fbdf7bf15886" providerId="ADAL" clId="{CDC5B0EF-6BEB-4658-A9FF-CB66F6FA6C1E}" dt="2025-05-23T00:20:08.880" v="6264" actId="478"/>
-          <ac:spMkLst>
-            <pc:docMk/>
-            <pc:sldMk cId="3652000193" sldId="259"/>
-            <ac:spMk id="19" creationId="{FD655111-359C-395D-D65D-C1D3AD855C4B}"/>
-          </ac:spMkLst>
-        </pc:spChg>
         <pc:spChg chg="add del mod">
           <ac:chgData name="Li, Hanchen F" userId="3aee791e-6a2d-4da7-a77b-fbdf7bf15886" providerId="ADAL" clId="{CDC5B0EF-6BEB-4658-A9FF-CB66F6FA6C1E}" dt="2025-05-23T00:24:50.598" v="6353" actId="164"/>
           <ac:spMkLst>
             <pc:docMk/>
             <pc:sldMk cId="3652000193" sldId="259"/>
             <ac:spMk id="29" creationId="{0E1F0E19-53B7-E1CA-F674-32DE6B8AD4EA}"/>
-          </ac:spMkLst>
-        </pc:spChg>
-        <pc:spChg chg="del">
-          <ac:chgData name="Li, Hanchen F" userId="3aee791e-6a2d-4da7-a77b-fbdf7bf15886" providerId="ADAL" clId="{CDC5B0EF-6BEB-4658-A9FF-CB66F6FA6C1E}" dt="2025-05-23T00:20:08.880" v="6264" actId="478"/>
-          <ac:spMkLst>
-            <pc:docMk/>
-            <pc:sldMk cId="3652000193" sldId="259"/>
-            <ac:spMk id="37" creationId="{E021F8C4-8215-E448-B8C6-74DA771CCA10}"/>
           </ac:spMkLst>
         </pc:spChg>
         <pc:spChg chg="add mod">
@@ -2864,62 +2640,6 @@
             <pc:docMk/>
             <pc:sldMk cId="3652000193" sldId="259"/>
             <ac:spMk id="47" creationId="{8F4F9A0D-46B0-EF9B-CEFD-18CBC8C1E28B}"/>
-          </ac:spMkLst>
-        </pc:spChg>
-        <pc:spChg chg="del">
-          <ac:chgData name="Li, Hanchen F" userId="3aee791e-6a2d-4da7-a77b-fbdf7bf15886" providerId="ADAL" clId="{CDC5B0EF-6BEB-4658-A9FF-CB66F6FA6C1E}" dt="2025-05-23T00:20:08.880" v="6264" actId="478"/>
-          <ac:spMkLst>
-            <pc:docMk/>
-            <pc:sldMk cId="3652000193" sldId="259"/>
-            <ac:spMk id="75" creationId="{FD41AE33-12EE-7CD9-3518-5B941895E57D}"/>
-          </ac:spMkLst>
-        </pc:spChg>
-        <pc:spChg chg="del">
-          <ac:chgData name="Li, Hanchen F" userId="3aee791e-6a2d-4da7-a77b-fbdf7bf15886" providerId="ADAL" clId="{CDC5B0EF-6BEB-4658-A9FF-CB66F6FA6C1E}" dt="2025-05-23T00:20:08.880" v="6264" actId="478"/>
-          <ac:spMkLst>
-            <pc:docMk/>
-            <pc:sldMk cId="3652000193" sldId="259"/>
-            <ac:spMk id="76" creationId="{2E83CF09-4701-A45D-EAA3-9A5585E05ABE}"/>
-          </ac:spMkLst>
-        </pc:spChg>
-        <pc:spChg chg="del">
-          <ac:chgData name="Li, Hanchen F" userId="3aee791e-6a2d-4da7-a77b-fbdf7bf15886" providerId="ADAL" clId="{CDC5B0EF-6BEB-4658-A9FF-CB66F6FA6C1E}" dt="2025-05-23T00:20:08.880" v="6264" actId="478"/>
-          <ac:spMkLst>
-            <pc:docMk/>
-            <pc:sldMk cId="3652000193" sldId="259"/>
-            <ac:spMk id="79" creationId="{A83D819F-14A3-7131-79B5-AC4860029E6B}"/>
-          </ac:spMkLst>
-        </pc:spChg>
-        <pc:spChg chg="del">
-          <ac:chgData name="Li, Hanchen F" userId="3aee791e-6a2d-4da7-a77b-fbdf7bf15886" providerId="ADAL" clId="{CDC5B0EF-6BEB-4658-A9FF-CB66F6FA6C1E}" dt="2025-05-23T00:20:08.880" v="6264" actId="478"/>
-          <ac:spMkLst>
-            <pc:docMk/>
-            <pc:sldMk cId="3652000193" sldId="259"/>
-            <ac:spMk id="80" creationId="{BBE5819F-494D-2F3F-EB6B-A317155DD7C2}"/>
-          </ac:spMkLst>
-        </pc:spChg>
-        <pc:spChg chg="del">
-          <ac:chgData name="Li, Hanchen F" userId="3aee791e-6a2d-4da7-a77b-fbdf7bf15886" providerId="ADAL" clId="{CDC5B0EF-6BEB-4658-A9FF-CB66F6FA6C1E}" dt="2025-05-23T00:20:08.880" v="6264" actId="478"/>
-          <ac:spMkLst>
-            <pc:docMk/>
-            <pc:sldMk cId="3652000193" sldId="259"/>
-            <ac:spMk id="83" creationId="{8C37A12D-076D-E22D-190F-BC80F30ACA46}"/>
-          </ac:spMkLst>
-        </pc:spChg>
-        <pc:spChg chg="del">
-          <ac:chgData name="Li, Hanchen F" userId="3aee791e-6a2d-4da7-a77b-fbdf7bf15886" providerId="ADAL" clId="{CDC5B0EF-6BEB-4658-A9FF-CB66F6FA6C1E}" dt="2025-05-23T00:20:08.880" v="6264" actId="478"/>
-          <ac:spMkLst>
-            <pc:docMk/>
-            <pc:sldMk cId="3652000193" sldId="259"/>
-            <ac:spMk id="93" creationId="{3D202B73-70A0-C800-E87D-90806A67C021}"/>
-          </ac:spMkLst>
-        </pc:spChg>
-        <pc:spChg chg="del">
-          <ac:chgData name="Li, Hanchen F" userId="3aee791e-6a2d-4da7-a77b-fbdf7bf15886" providerId="ADAL" clId="{CDC5B0EF-6BEB-4658-A9FF-CB66F6FA6C1E}" dt="2025-05-23T00:20:08.880" v="6264" actId="478"/>
-          <ac:spMkLst>
-            <pc:docMk/>
-            <pc:sldMk cId="3652000193" sldId="259"/>
-            <ac:spMk id="95" creationId="{D302B668-09ED-122A-67A8-991E4A88D935}"/>
           </ac:spMkLst>
         </pc:spChg>
         <pc:spChg chg="add mod">
@@ -3003,14 +2723,6 @@
           </ac:spMkLst>
         </pc:spChg>
         <pc:grpChg chg="add mod">
-          <ac:chgData name="Li, Hanchen F" userId="3aee791e-6a2d-4da7-a77b-fbdf7bf15886" providerId="ADAL" clId="{CDC5B0EF-6BEB-4658-A9FF-CB66F6FA6C1E}" dt="2025-05-23T00:24:21.624" v="6342" actId="164"/>
-          <ac:grpSpMkLst>
-            <pc:docMk/>
-            <pc:sldMk cId="3652000193" sldId="259"/>
-            <ac:grpSpMk id="50" creationId="{6A824F68-A360-05D3-2DB7-2D15E8688F77}"/>
-          </ac:grpSpMkLst>
-        </pc:grpChg>
-        <pc:grpChg chg="add mod">
           <ac:chgData name="Li, Hanchen F" userId="3aee791e-6a2d-4da7-a77b-fbdf7bf15886" providerId="ADAL" clId="{CDC5B0EF-6BEB-4658-A9FF-CB66F6FA6C1E}" dt="2025-05-23T00:24:56.401" v="6354" actId="164"/>
           <ac:grpSpMkLst>
             <pc:docMk/>
@@ -3100,7 +2812,7 @@
         </pc:cxnChg>
       </pc:sldChg>
       <pc:sldChg chg="addSp delSp modSp add mod">
-        <pc:chgData name="Li, Hanchen F" userId="3aee791e-6a2d-4da7-a77b-fbdf7bf15886" providerId="ADAL" clId="{CDC5B0EF-6BEB-4658-A9FF-CB66F6FA6C1E}" dt="2025-05-23T22:16:14.082" v="8200" actId="403"/>
+        <pc:chgData name="Li, Hanchen F" userId="3aee791e-6a2d-4da7-a77b-fbdf7bf15886" providerId="ADAL" clId="{CDC5B0EF-6BEB-4658-A9FF-CB66F6FA6C1E}" dt="2025-05-26T23:57:00.737" v="8871" actId="20577"/>
         <pc:sldMkLst>
           <pc:docMk/>
           <pc:sldMk cId="1584463432" sldId="260"/>
@@ -3113,40 +2825,8 @@
             <ac:spMk id="2" creationId="{AAF2876B-BAD6-F898-5EFF-FA8340A43036}"/>
           </ac:spMkLst>
         </pc:spChg>
-        <pc:spChg chg="add del mod">
-          <ac:chgData name="Li, Hanchen F" userId="3aee791e-6a2d-4da7-a77b-fbdf7bf15886" providerId="ADAL" clId="{CDC5B0EF-6BEB-4658-A9FF-CB66F6FA6C1E}" dt="2025-05-23T15:58:10.780" v="6755" actId="478"/>
-          <ac:spMkLst>
-            <pc:docMk/>
-            <pc:sldMk cId="1584463432" sldId="260"/>
-            <ac:spMk id="5" creationId="{684702EF-55A4-CFA5-1D2F-F9C0D12209B4}"/>
-          </ac:spMkLst>
-        </pc:spChg>
-        <pc:spChg chg="add del mod">
-          <ac:chgData name="Li, Hanchen F" userId="3aee791e-6a2d-4da7-a77b-fbdf7bf15886" providerId="ADAL" clId="{CDC5B0EF-6BEB-4658-A9FF-CB66F6FA6C1E}" dt="2025-05-23T16:04:54.590" v="6876" actId="478"/>
-          <ac:spMkLst>
-            <pc:docMk/>
-            <pc:sldMk cId="1584463432" sldId="260"/>
-            <ac:spMk id="6" creationId="{F72265FE-24DA-C3E9-1D3C-A9E6F121B3C1}"/>
-          </ac:spMkLst>
-        </pc:spChg>
-        <pc:spChg chg="del">
-          <ac:chgData name="Li, Hanchen F" userId="3aee791e-6a2d-4da7-a77b-fbdf7bf15886" providerId="ADAL" clId="{CDC5B0EF-6BEB-4658-A9FF-CB66F6FA6C1E}" dt="2025-05-23T15:56:22.779" v="6697" actId="478"/>
-          <ac:spMkLst>
-            <pc:docMk/>
-            <pc:sldMk cId="1584463432" sldId="260"/>
-            <ac:spMk id="7" creationId="{C15C0B3F-411B-B948-9420-66BBB07A0DF6}"/>
-          </ac:spMkLst>
-        </pc:spChg>
-        <pc:spChg chg="add del mod">
-          <ac:chgData name="Li, Hanchen F" userId="3aee791e-6a2d-4da7-a77b-fbdf7bf15886" providerId="ADAL" clId="{CDC5B0EF-6BEB-4658-A9FF-CB66F6FA6C1E}" dt="2025-05-23T16:04:50.980" v="6874" actId="478"/>
-          <ac:spMkLst>
-            <pc:docMk/>
-            <pc:sldMk cId="1584463432" sldId="260"/>
-            <ac:spMk id="8" creationId="{0CFE3C6A-5B60-AC72-7E58-9CBF415DB81F}"/>
-          </ac:spMkLst>
-        </pc:spChg>
         <pc:spChg chg="add mod">
-          <ac:chgData name="Li, Hanchen F" userId="3aee791e-6a2d-4da7-a77b-fbdf7bf15886" providerId="ADAL" clId="{CDC5B0EF-6BEB-4658-A9FF-CB66F6FA6C1E}" dt="2025-05-23T22:14:25.795" v="8180" actId="403"/>
+          <ac:chgData name="Li, Hanchen F" userId="3aee791e-6a2d-4da7-a77b-fbdf7bf15886" providerId="ADAL" clId="{CDC5B0EF-6BEB-4658-A9FF-CB66F6FA6C1E}" dt="2025-05-26T23:54:59.802" v="8837" actId="948"/>
           <ac:spMkLst>
             <pc:docMk/>
             <pc:sldMk cId="1584463432" sldId="260"/>
@@ -3161,22 +2841,6 @@
             <ac:spMk id="10" creationId="{E8F739D8-1BFC-A166-BB93-C7724506B868}"/>
           </ac:spMkLst>
         </pc:spChg>
-        <pc:spChg chg="del">
-          <ac:chgData name="Li, Hanchen F" userId="3aee791e-6a2d-4da7-a77b-fbdf7bf15886" providerId="ADAL" clId="{CDC5B0EF-6BEB-4658-A9FF-CB66F6FA6C1E}" dt="2025-05-23T15:56:18.875" v="6691" actId="478"/>
-          <ac:spMkLst>
-            <pc:docMk/>
-            <pc:sldMk cId="1584463432" sldId="260"/>
-            <ac:spMk id="11" creationId="{035FC631-1391-0EE5-EC5E-0C9DE95B3DF1}"/>
-          </ac:spMkLst>
-        </pc:spChg>
-        <pc:spChg chg="del">
-          <ac:chgData name="Li, Hanchen F" userId="3aee791e-6a2d-4da7-a77b-fbdf7bf15886" providerId="ADAL" clId="{CDC5B0EF-6BEB-4658-A9FF-CB66F6FA6C1E}" dt="2025-05-23T15:56:18.875" v="6691" actId="478"/>
-          <ac:spMkLst>
-            <pc:docMk/>
-            <pc:sldMk cId="1584463432" sldId="260"/>
-            <ac:spMk id="12" creationId="{E578D8A9-D597-04FB-E328-EBCE6610A399}"/>
-          </ac:spMkLst>
-        </pc:spChg>
         <pc:spChg chg="add mod">
           <ac:chgData name="Li, Hanchen F" userId="3aee791e-6a2d-4da7-a77b-fbdf7bf15886" providerId="ADAL" clId="{CDC5B0EF-6BEB-4658-A9FF-CB66F6FA6C1E}" dt="2025-05-23T20:12:59.891" v="8141" actId="1038"/>
           <ac:spMkLst>
@@ -3185,88 +2849,8 @@
             <ac:spMk id="15" creationId="{A660F99D-A667-1157-0E3E-7E9D3C7C9C11}"/>
           </ac:spMkLst>
         </pc:spChg>
-        <pc:spChg chg="add del mod">
-          <ac:chgData name="Li, Hanchen F" userId="3aee791e-6a2d-4da7-a77b-fbdf7bf15886" providerId="ADAL" clId="{CDC5B0EF-6BEB-4658-A9FF-CB66F6FA6C1E}" dt="2025-05-23T16:16:54.715" v="7198" actId="478"/>
-          <ac:spMkLst>
-            <pc:docMk/>
-            <pc:sldMk cId="1584463432" sldId="260"/>
-            <ac:spMk id="16" creationId="{C6A9C31E-1E61-3564-1F1D-B364FFEBFC7B}"/>
-          </ac:spMkLst>
-        </pc:spChg>
-        <pc:spChg chg="add del mod">
-          <ac:chgData name="Li, Hanchen F" userId="3aee791e-6a2d-4da7-a77b-fbdf7bf15886" providerId="ADAL" clId="{CDC5B0EF-6BEB-4658-A9FF-CB66F6FA6C1E}" dt="2025-05-23T16:15:21.930" v="7137" actId="478"/>
-          <ac:spMkLst>
-            <pc:docMk/>
-            <pc:sldMk cId="1584463432" sldId="260"/>
-            <ac:spMk id="17" creationId="{ABE786CB-45BA-0E21-94AF-FF4D010A8014}"/>
-          </ac:spMkLst>
-        </pc:spChg>
-        <pc:spChg chg="del">
-          <ac:chgData name="Li, Hanchen F" userId="3aee791e-6a2d-4da7-a77b-fbdf7bf15886" providerId="ADAL" clId="{CDC5B0EF-6BEB-4658-A9FF-CB66F6FA6C1E}" dt="2025-05-23T15:56:24.274" v="6698" actId="478"/>
-          <ac:spMkLst>
-            <pc:docMk/>
-            <pc:sldMk cId="1584463432" sldId="260"/>
-            <ac:spMk id="20" creationId="{AA78E5CA-4621-2CD7-60D2-B6C137825661}"/>
-          </ac:spMkLst>
-        </pc:spChg>
-        <pc:spChg chg="del">
-          <ac:chgData name="Li, Hanchen F" userId="3aee791e-6a2d-4da7-a77b-fbdf7bf15886" providerId="ADAL" clId="{CDC5B0EF-6BEB-4658-A9FF-CB66F6FA6C1E}" dt="2025-05-23T15:56:18.875" v="6691" actId="478"/>
-          <ac:spMkLst>
-            <pc:docMk/>
-            <pc:sldMk cId="1584463432" sldId="260"/>
-            <ac:spMk id="23" creationId="{322CA0B6-E7C6-23FA-4D66-9142D0F1F71D}"/>
-          </ac:spMkLst>
-        </pc:spChg>
-        <pc:spChg chg="del">
-          <ac:chgData name="Li, Hanchen F" userId="3aee791e-6a2d-4da7-a77b-fbdf7bf15886" providerId="ADAL" clId="{CDC5B0EF-6BEB-4658-A9FF-CB66F6FA6C1E}" dt="2025-05-23T15:56:18.875" v="6691" actId="478"/>
-          <ac:spMkLst>
-            <pc:docMk/>
-            <pc:sldMk cId="1584463432" sldId="260"/>
-            <ac:spMk id="24" creationId="{3E31D628-65D2-1FD3-7C69-BD506ED2CF4F}"/>
-          </ac:spMkLst>
-        </pc:spChg>
-        <pc:spChg chg="del">
-          <ac:chgData name="Li, Hanchen F" userId="3aee791e-6a2d-4da7-a77b-fbdf7bf15886" providerId="ADAL" clId="{CDC5B0EF-6BEB-4658-A9FF-CB66F6FA6C1E}" dt="2025-05-23T15:56:18.875" v="6691" actId="478"/>
-          <ac:spMkLst>
-            <pc:docMk/>
-            <pc:sldMk cId="1584463432" sldId="260"/>
-            <ac:spMk id="28" creationId="{6FFB6D6B-B600-5A0A-5D46-71C224A459C8}"/>
-          </ac:spMkLst>
-        </pc:spChg>
-        <pc:spChg chg="del">
-          <ac:chgData name="Li, Hanchen F" userId="3aee791e-6a2d-4da7-a77b-fbdf7bf15886" providerId="ADAL" clId="{CDC5B0EF-6BEB-4658-A9FF-CB66F6FA6C1E}" dt="2025-05-23T15:56:18.875" v="6691" actId="478"/>
-          <ac:spMkLst>
-            <pc:docMk/>
-            <pc:sldMk cId="1584463432" sldId="260"/>
-            <ac:spMk id="29" creationId="{767EC806-F7FA-A94A-B79A-EBAD1DADEC91}"/>
-          </ac:spMkLst>
-        </pc:spChg>
         <pc:spChg chg="add mod">
-          <ac:chgData name="Li, Hanchen F" userId="3aee791e-6a2d-4da7-a77b-fbdf7bf15886" providerId="ADAL" clId="{CDC5B0EF-6BEB-4658-A9FF-CB66F6FA6C1E}" dt="2025-05-23T16:10:22.949" v="7014" actId="1076"/>
-          <ac:spMkLst>
-            <pc:docMk/>
-            <pc:sldMk cId="1584463432" sldId="260"/>
-            <ac:spMk id="30" creationId="{CBB96978-A4AE-E899-C48F-8A0806E69DC4}"/>
-          </ac:spMkLst>
-        </pc:spChg>
-        <pc:spChg chg="del">
-          <ac:chgData name="Li, Hanchen F" userId="3aee791e-6a2d-4da7-a77b-fbdf7bf15886" providerId="ADAL" clId="{CDC5B0EF-6BEB-4658-A9FF-CB66F6FA6C1E}" dt="2025-05-23T15:56:18.875" v="6691" actId="478"/>
-          <ac:spMkLst>
-            <pc:docMk/>
-            <pc:sldMk cId="1584463432" sldId="260"/>
-            <ac:spMk id="31" creationId="{C3AEB81C-BD3B-A92E-62F0-B30F5BE3675B}"/>
-          </ac:spMkLst>
-        </pc:spChg>
-        <pc:spChg chg="del mod">
-          <ac:chgData name="Li, Hanchen F" userId="3aee791e-6a2d-4da7-a77b-fbdf7bf15886" providerId="ADAL" clId="{CDC5B0EF-6BEB-4658-A9FF-CB66F6FA6C1E}" dt="2025-05-23T15:57:18.857" v="6738" actId="478"/>
-          <ac:spMkLst>
-            <pc:docMk/>
-            <pc:sldMk cId="1584463432" sldId="260"/>
-            <ac:spMk id="32" creationId="{7B9D6849-61E2-17B3-3A21-CB30DD4C677E}"/>
-          </ac:spMkLst>
-        </pc:spChg>
-        <pc:spChg chg="add mod">
-          <ac:chgData name="Li, Hanchen F" userId="3aee791e-6a2d-4da7-a77b-fbdf7bf15886" providerId="ADAL" clId="{CDC5B0EF-6BEB-4658-A9FF-CB66F6FA6C1E}" dt="2025-05-23T22:15:57.088" v="8197" actId="114"/>
+          <ac:chgData name="Li, Hanchen F" userId="3aee791e-6a2d-4da7-a77b-fbdf7bf15886" providerId="ADAL" clId="{CDC5B0EF-6BEB-4658-A9FF-CB66F6FA6C1E}" dt="2025-05-26T23:55:55.225" v="8852" actId="948"/>
           <ac:spMkLst>
             <pc:docMk/>
             <pc:sldMk cId="1584463432" sldId="260"/>
@@ -3274,7 +2858,7 @@
           </ac:spMkLst>
         </pc:spChg>
         <pc:spChg chg="add mod">
-          <ac:chgData name="Li, Hanchen F" userId="3aee791e-6a2d-4da7-a77b-fbdf7bf15886" providerId="ADAL" clId="{CDC5B0EF-6BEB-4658-A9FF-CB66F6FA6C1E}" dt="2025-05-23T22:16:14.082" v="8200" actId="403"/>
+          <ac:chgData name="Li, Hanchen F" userId="3aee791e-6a2d-4da7-a77b-fbdf7bf15886" providerId="ADAL" clId="{CDC5B0EF-6BEB-4658-A9FF-CB66F6FA6C1E}" dt="2025-05-26T23:57:00.737" v="8871" actId="20577"/>
           <ac:spMkLst>
             <pc:docMk/>
             <pc:sldMk cId="1584463432" sldId="260"/>
@@ -3289,44 +2873,12 @@
             <ac:spMk id="49" creationId="{A1060CE9-02C1-80AC-E6ED-E7A0742ED67A}"/>
           </ac:spMkLst>
         </pc:spChg>
-        <pc:spChg chg="del">
-          <ac:chgData name="Li, Hanchen F" userId="3aee791e-6a2d-4da7-a77b-fbdf7bf15886" providerId="ADAL" clId="{CDC5B0EF-6BEB-4658-A9FF-CB66F6FA6C1E}" dt="2025-05-23T15:56:18.875" v="6691" actId="478"/>
-          <ac:spMkLst>
-            <pc:docMk/>
-            <pc:sldMk cId="1584463432" sldId="260"/>
-            <ac:spMk id="50" creationId="{833FADE0-6619-25FD-F73C-AE61E894D557}"/>
-          </ac:spMkLst>
-        </pc:spChg>
-        <pc:spChg chg="del">
-          <ac:chgData name="Li, Hanchen F" userId="3aee791e-6a2d-4da7-a77b-fbdf7bf15886" providerId="ADAL" clId="{CDC5B0EF-6BEB-4658-A9FF-CB66F6FA6C1E}" dt="2025-05-23T15:56:18.875" v="6691" actId="478"/>
-          <ac:spMkLst>
-            <pc:docMk/>
-            <pc:sldMk cId="1584463432" sldId="260"/>
-            <ac:spMk id="52" creationId="{83436275-9370-E18B-5B54-AE80873119E4}"/>
-          </ac:spMkLst>
-        </pc:spChg>
-        <pc:spChg chg="del">
-          <ac:chgData name="Li, Hanchen F" userId="3aee791e-6a2d-4da7-a77b-fbdf7bf15886" providerId="ADAL" clId="{CDC5B0EF-6BEB-4658-A9FF-CB66F6FA6C1E}" dt="2025-05-23T15:56:18.875" v="6691" actId="478"/>
-          <ac:spMkLst>
-            <pc:docMk/>
-            <pc:sldMk cId="1584463432" sldId="260"/>
-            <ac:spMk id="53" creationId="{CEEA90DB-D653-2675-6995-7B97CAFD3689}"/>
-          </ac:spMkLst>
-        </pc:spChg>
         <pc:spChg chg="add mod">
           <ac:chgData name="Li, Hanchen F" userId="3aee791e-6a2d-4da7-a77b-fbdf7bf15886" providerId="ADAL" clId="{CDC5B0EF-6BEB-4658-A9FF-CB66F6FA6C1E}" dt="2025-05-23T16:42:20.319" v="7684" actId="1038"/>
           <ac:spMkLst>
             <pc:docMk/>
             <pc:sldMk cId="1584463432" sldId="260"/>
             <ac:spMk id="54" creationId="{0D03CEB0-4241-1D72-2F28-3ABD32BE2175}"/>
-          </ac:spMkLst>
-        </pc:spChg>
-        <pc:spChg chg="add del mod">
-          <ac:chgData name="Li, Hanchen F" userId="3aee791e-6a2d-4da7-a77b-fbdf7bf15886" providerId="ADAL" clId="{CDC5B0EF-6BEB-4658-A9FF-CB66F6FA6C1E}" dt="2025-05-23T16:32:32.314" v="7564" actId="478"/>
-          <ac:spMkLst>
-            <pc:docMk/>
-            <pc:sldMk cId="1584463432" sldId="260"/>
-            <ac:spMk id="58" creationId="{1FFEA000-03C3-CADF-0956-E2C7532FE86B}"/>
           </ac:spMkLst>
         </pc:spChg>
         <pc:spChg chg="add mod">
@@ -3338,35 +2890,11 @@
           </ac:spMkLst>
         </pc:spChg>
         <pc:spChg chg="add mod">
-          <ac:chgData name="Li, Hanchen F" userId="3aee791e-6a2d-4da7-a77b-fbdf7bf15886" providerId="ADAL" clId="{CDC5B0EF-6BEB-4658-A9FF-CB66F6FA6C1E}" dt="2025-05-23T16:25:39.865" v="7340"/>
-          <ac:spMkLst>
-            <pc:docMk/>
-            <pc:sldMk cId="1584463432" sldId="260"/>
-            <ac:spMk id="126" creationId="{A502B73A-A1A0-76C5-1BFD-62CB32CD3FC7}"/>
-          </ac:spMkLst>
-        </pc:spChg>
-        <pc:spChg chg="add del mod">
-          <ac:chgData name="Li, Hanchen F" userId="3aee791e-6a2d-4da7-a77b-fbdf7bf15886" providerId="ADAL" clId="{CDC5B0EF-6BEB-4658-A9FF-CB66F6FA6C1E}" dt="2025-05-23T16:26:50.601" v="7377" actId="478"/>
-          <ac:spMkLst>
-            <pc:docMk/>
-            <pc:sldMk cId="1584463432" sldId="260"/>
-            <ac:spMk id="127" creationId="{E3670639-E5DA-4752-087D-EF0E0630D2B7}"/>
-          </ac:spMkLst>
-        </pc:spChg>
-        <pc:spChg chg="add mod">
           <ac:chgData name="Li, Hanchen F" userId="3aee791e-6a2d-4da7-a77b-fbdf7bf15886" providerId="ADAL" clId="{CDC5B0EF-6BEB-4658-A9FF-CB66F6FA6C1E}" dt="2025-05-23T16:42:25.130" v="7707" actId="1038"/>
           <ac:spMkLst>
             <pc:docMk/>
             <pc:sldMk cId="1584463432" sldId="260"/>
             <ac:spMk id="129" creationId="{3A7AE86E-05E7-CA0A-2CF4-FBBCD4F8F02F}"/>
-          </ac:spMkLst>
-        </pc:spChg>
-        <pc:spChg chg="add del mod">
-          <ac:chgData name="Li, Hanchen F" userId="3aee791e-6a2d-4da7-a77b-fbdf7bf15886" providerId="ADAL" clId="{CDC5B0EF-6BEB-4658-A9FF-CB66F6FA6C1E}" dt="2025-05-23T16:27:26.257" v="7408" actId="478"/>
-          <ac:spMkLst>
-            <pc:docMk/>
-            <pc:sldMk cId="1584463432" sldId="260"/>
-            <ac:spMk id="130" creationId="{05C7F9BF-DA57-2AFC-E6E0-EDFD4433072D}"/>
           </ac:spMkLst>
         </pc:spChg>
         <pc:spChg chg="add mod">
@@ -3394,75 +2922,11 @@
           </ac:spMkLst>
         </pc:spChg>
         <pc:spChg chg="add mod">
-          <ac:chgData name="Li, Hanchen F" userId="3aee791e-6a2d-4da7-a77b-fbdf7bf15886" providerId="ADAL" clId="{CDC5B0EF-6BEB-4658-A9FF-CB66F6FA6C1E}" dt="2025-05-23T20:09:33.148" v="7965" actId="571"/>
-          <ac:spMkLst>
-            <pc:docMk/>
-            <pc:sldMk cId="1584463432" sldId="260"/>
-            <ac:spMk id="235" creationId="{215CE413-DCA8-2C63-1850-71C30A64683E}"/>
-          </ac:spMkLst>
-        </pc:spChg>
-        <pc:spChg chg="mod">
-          <ac:chgData name="Li, Hanchen F" userId="3aee791e-6a2d-4da7-a77b-fbdf7bf15886" providerId="ADAL" clId="{CDC5B0EF-6BEB-4658-A9FF-CB66F6FA6C1E}" dt="2025-05-23T20:09:33.148" v="7965" actId="571"/>
-          <ac:spMkLst>
-            <pc:docMk/>
-            <pc:sldMk cId="1584463432" sldId="260"/>
-            <ac:spMk id="237" creationId="{908E95F4-2561-DEE5-6705-87724A3A98C7}"/>
-          </ac:spMkLst>
-        </pc:spChg>
-        <pc:spChg chg="mod">
-          <ac:chgData name="Li, Hanchen F" userId="3aee791e-6a2d-4da7-a77b-fbdf7bf15886" providerId="ADAL" clId="{CDC5B0EF-6BEB-4658-A9FF-CB66F6FA6C1E}" dt="2025-05-23T20:09:33.148" v="7965" actId="571"/>
-          <ac:spMkLst>
-            <pc:docMk/>
-            <pc:sldMk cId="1584463432" sldId="260"/>
-            <ac:spMk id="238" creationId="{A099CE58-70D0-95FC-140C-A64743ADFFB5}"/>
-          </ac:spMkLst>
-        </pc:spChg>
-        <pc:spChg chg="mod">
-          <ac:chgData name="Li, Hanchen F" userId="3aee791e-6a2d-4da7-a77b-fbdf7bf15886" providerId="ADAL" clId="{CDC5B0EF-6BEB-4658-A9FF-CB66F6FA6C1E}" dt="2025-05-23T20:09:33.148" v="7965" actId="571"/>
-          <ac:spMkLst>
-            <pc:docMk/>
-            <pc:sldMk cId="1584463432" sldId="260"/>
-            <ac:spMk id="239" creationId="{B92FE556-8DBD-C7FB-08C2-004F3D469868}"/>
-          </ac:spMkLst>
-        </pc:spChg>
-        <pc:spChg chg="mod">
-          <ac:chgData name="Li, Hanchen F" userId="3aee791e-6a2d-4da7-a77b-fbdf7bf15886" providerId="ADAL" clId="{CDC5B0EF-6BEB-4658-A9FF-CB66F6FA6C1E}" dt="2025-05-23T20:09:33.148" v="7965" actId="571"/>
-          <ac:spMkLst>
-            <pc:docMk/>
-            <pc:sldMk cId="1584463432" sldId="260"/>
-            <ac:spMk id="240" creationId="{9BC2613A-863A-87C1-517C-1AC74CF95450}"/>
-          </ac:spMkLst>
-        </pc:spChg>
-        <pc:spChg chg="add mod">
-          <ac:chgData name="Li, Hanchen F" userId="3aee791e-6a2d-4da7-a77b-fbdf7bf15886" providerId="ADAL" clId="{CDC5B0EF-6BEB-4658-A9FF-CB66F6FA6C1E}" dt="2025-05-23T20:09:33.148" v="7965" actId="571"/>
-          <ac:spMkLst>
-            <pc:docMk/>
-            <pc:sldMk cId="1584463432" sldId="260"/>
-            <ac:spMk id="241" creationId="{34EEFF6D-A9C9-BE98-DEBD-E8B99626AED6}"/>
-          </ac:spMkLst>
-        </pc:spChg>
-        <pc:spChg chg="add mod">
-          <ac:chgData name="Li, Hanchen F" userId="3aee791e-6a2d-4da7-a77b-fbdf7bf15886" providerId="ADAL" clId="{CDC5B0EF-6BEB-4658-A9FF-CB66F6FA6C1E}" dt="2025-05-23T20:09:33.148" v="7965" actId="571"/>
-          <ac:spMkLst>
-            <pc:docMk/>
-            <pc:sldMk cId="1584463432" sldId="260"/>
-            <ac:spMk id="242" creationId="{A5864EC1-76B1-AF11-9FFE-B23E54D1A649}"/>
-          </ac:spMkLst>
-        </pc:spChg>
-        <pc:spChg chg="add mod">
           <ac:chgData name="Li, Hanchen F" userId="3aee791e-6a2d-4da7-a77b-fbdf7bf15886" providerId="ADAL" clId="{CDC5B0EF-6BEB-4658-A9FF-CB66F6FA6C1E}" dt="2025-05-23T20:13:53.563" v="8153" actId="1076"/>
           <ac:spMkLst>
             <pc:docMk/>
             <pc:sldMk cId="1584463432" sldId="260"/>
             <ac:spMk id="254" creationId="{0BE889AF-CB60-07E1-BFDE-185108361F98}"/>
-          </ac:spMkLst>
-        </pc:spChg>
-        <pc:spChg chg="add del mod">
-          <ac:chgData name="Li, Hanchen F" userId="3aee791e-6a2d-4da7-a77b-fbdf7bf15886" providerId="ADAL" clId="{CDC5B0EF-6BEB-4658-A9FF-CB66F6FA6C1E}" dt="2025-05-23T20:12:20.063" v="8076" actId="478"/>
-          <ac:spMkLst>
-            <pc:docMk/>
-            <pc:sldMk cId="1584463432" sldId="260"/>
-            <ac:spMk id="255" creationId="{4582AD9A-2DC3-92CE-5F4B-EE2D5A8AE8E2}"/>
           </ac:spMkLst>
         </pc:spChg>
         <pc:spChg chg="add mod">
@@ -3482,70 +2946,6 @@
           </ac:spMkLst>
         </pc:spChg>
         <pc:spChg chg="add mod">
-          <ac:chgData name="Li, Hanchen F" userId="3aee791e-6a2d-4da7-a77b-fbdf7bf15886" providerId="ADAL" clId="{CDC5B0EF-6BEB-4658-A9FF-CB66F6FA6C1E}" dt="2025-05-23T20:12:06.865" v="8069" actId="571"/>
-          <ac:spMkLst>
-            <pc:docMk/>
-            <pc:sldMk cId="1584463432" sldId="260"/>
-            <ac:spMk id="258" creationId="{D92A412E-04F7-7441-47FB-4B8C4EB0AF63}"/>
-          </ac:spMkLst>
-        </pc:spChg>
-        <pc:spChg chg="add mod">
-          <ac:chgData name="Li, Hanchen F" userId="3aee791e-6a2d-4da7-a77b-fbdf7bf15886" providerId="ADAL" clId="{CDC5B0EF-6BEB-4658-A9FF-CB66F6FA6C1E}" dt="2025-05-23T20:12:50.330" v="8097" actId="571"/>
-          <ac:spMkLst>
-            <pc:docMk/>
-            <pc:sldMk cId="1584463432" sldId="260"/>
-            <ac:spMk id="267" creationId="{C32A2DC8-B411-7789-04C8-0E8ACE19077D}"/>
-          </ac:spMkLst>
-        </pc:spChg>
-        <pc:spChg chg="mod">
-          <ac:chgData name="Li, Hanchen F" userId="3aee791e-6a2d-4da7-a77b-fbdf7bf15886" providerId="ADAL" clId="{CDC5B0EF-6BEB-4658-A9FF-CB66F6FA6C1E}" dt="2025-05-23T20:12:50.330" v="8097" actId="571"/>
-          <ac:spMkLst>
-            <pc:docMk/>
-            <pc:sldMk cId="1584463432" sldId="260"/>
-            <ac:spMk id="269" creationId="{09B0830C-F740-8EB8-B08D-E49488E7B6F5}"/>
-          </ac:spMkLst>
-        </pc:spChg>
-        <pc:spChg chg="mod">
-          <ac:chgData name="Li, Hanchen F" userId="3aee791e-6a2d-4da7-a77b-fbdf7bf15886" providerId="ADAL" clId="{CDC5B0EF-6BEB-4658-A9FF-CB66F6FA6C1E}" dt="2025-05-23T20:12:50.330" v="8097" actId="571"/>
-          <ac:spMkLst>
-            <pc:docMk/>
-            <pc:sldMk cId="1584463432" sldId="260"/>
-            <ac:spMk id="270" creationId="{B8CA79DB-2539-1398-01C6-71A97421BAE1}"/>
-          </ac:spMkLst>
-        </pc:spChg>
-        <pc:spChg chg="mod">
-          <ac:chgData name="Li, Hanchen F" userId="3aee791e-6a2d-4da7-a77b-fbdf7bf15886" providerId="ADAL" clId="{CDC5B0EF-6BEB-4658-A9FF-CB66F6FA6C1E}" dt="2025-05-23T20:12:50.330" v="8097" actId="571"/>
-          <ac:spMkLst>
-            <pc:docMk/>
-            <pc:sldMk cId="1584463432" sldId="260"/>
-            <ac:spMk id="271" creationId="{79F5345C-234A-8AB1-9AB1-B24FABB59622}"/>
-          </ac:spMkLst>
-        </pc:spChg>
-        <pc:spChg chg="mod">
-          <ac:chgData name="Li, Hanchen F" userId="3aee791e-6a2d-4da7-a77b-fbdf7bf15886" providerId="ADAL" clId="{CDC5B0EF-6BEB-4658-A9FF-CB66F6FA6C1E}" dt="2025-05-23T20:12:50.330" v="8097" actId="571"/>
-          <ac:spMkLst>
-            <pc:docMk/>
-            <pc:sldMk cId="1584463432" sldId="260"/>
-            <ac:spMk id="272" creationId="{7D111463-DA7E-1348-435B-CC365742CBDA}"/>
-          </ac:spMkLst>
-        </pc:spChg>
-        <pc:spChg chg="add mod">
-          <ac:chgData name="Li, Hanchen F" userId="3aee791e-6a2d-4da7-a77b-fbdf7bf15886" providerId="ADAL" clId="{CDC5B0EF-6BEB-4658-A9FF-CB66F6FA6C1E}" dt="2025-05-23T20:12:50.330" v="8097" actId="571"/>
-          <ac:spMkLst>
-            <pc:docMk/>
-            <pc:sldMk cId="1584463432" sldId="260"/>
-            <ac:spMk id="273" creationId="{BE47B69D-DC72-636D-2C81-997DF609E204}"/>
-          </ac:spMkLst>
-        </pc:spChg>
-        <pc:spChg chg="add mod">
-          <ac:chgData name="Li, Hanchen F" userId="3aee791e-6a2d-4da7-a77b-fbdf7bf15886" providerId="ADAL" clId="{CDC5B0EF-6BEB-4658-A9FF-CB66F6FA6C1E}" dt="2025-05-23T20:12:50.330" v="8097" actId="571"/>
-          <ac:spMkLst>
-            <pc:docMk/>
-            <pc:sldMk cId="1584463432" sldId="260"/>
-            <ac:spMk id="274" creationId="{FA7EB1DC-9258-6227-1589-0C232B1A18A3}"/>
-          </ac:spMkLst>
-        </pc:spChg>
-        <pc:spChg chg="add mod">
           <ac:chgData name="Li, Hanchen F" userId="3aee791e-6a2d-4da7-a77b-fbdf7bf15886" providerId="ADAL" clId="{CDC5B0EF-6BEB-4658-A9FF-CB66F6FA6C1E}" dt="2025-05-23T20:13:32.969" v="8148" actId="1076"/>
           <ac:spMkLst>
             <pc:docMk/>
@@ -3561,140 +2961,12 @@
             <ac:grpSpMk id="57" creationId="{142D3A66-A215-3779-9C4C-56FA7DEE18C6}"/>
           </ac:grpSpMkLst>
         </pc:grpChg>
-        <pc:grpChg chg="add mod">
-          <ac:chgData name="Li, Hanchen F" userId="3aee791e-6a2d-4da7-a77b-fbdf7bf15886" providerId="ADAL" clId="{CDC5B0EF-6BEB-4658-A9FF-CB66F6FA6C1E}" dt="2025-05-23T20:09:33.148" v="7965" actId="571"/>
-          <ac:grpSpMkLst>
-            <pc:docMk/>
-            <pc:sldMk cId="1584463432" sldId="260"/>
-            <ac:grpSpMk id="236" creationId="{82C087EC-1479-9297-78E1-5B8E0E11E377}"/>
-          </ac:grpSpMkLst>
-        </pc:grpChg>
-        <pc:grpChg chg="add mod">
-          <ac:chgData name="Li, Hanchen F" userId="3aee791e-6a2d-4da7-a77b-fbdf7bf15886" providerId="ADAL" clId="{CDC5B0EF-6BEB-4658-A9FF-CB66F6FA6C1E}" dt="2025-05-23T20:12:50.330" v="8097" actId="571"/>
-          <ac:grpSpMkLst>
-            <pc:docMk/>
-            <pc:sldMk cId="1584463432" sldId="260"/>
-            <ac:grpSpMk id="268" creationId="{7F2646B9-B3AE-E60F-E1F3-82151C3ECD53}"/>
-          </ac:grpSpMkLst>
-        </pc:grpChg>
-        <pc:picChg chg="del mod">
-          <ac:chgData name="Li, Hanchen F" userId="3aee791e-6a2d-4da7-a77b-fbdf7bf15886" providerId="ADAL" clId="{CDC5B0EF-6BEB-4658-A9FF-CB66F6FA6C1E}" dt="2025-05-23T15:56:19.789" v="6693" actId="478"/>
-          <ac:picMkLst>
-            <pc:docMk/>
-            <pc:sldMk cId="1584463432" sldId="260"/>
-            <ac:picMk id="3" creationId="{8503FABF-0327-8A44-5784-0CC1EE4367B6}"/>
-          </ac:picMkLst>
-        </pc:picChg>
-        <pc:cxnChg chg="del">
-          <ac:chgData name="Li, Hanchen F" userId="3aee791e-6a2d-4da7-a77b-fbdf7bf15886" providerId="ADAL" clId="{CDC5B0EF-6BEB-4658-A9FF-CB66F6FA6C1E}" dt="2025-05-23T15:56:21.796" v="6696" actId="478"/>
-          <ac:cxnSpMkLst>
-            <pc:docMk/>
-            <pc:sldMk cId="1584463432" sldId="260"/>
-            <ac:cxnSpMk id="4" creationId="{6E2CBDF1-A672-A701-60DD-94637F5B404D}"/>
-          </ac:cxnSpMkLst>
-        </pc:cxnChg>
-        <pc:cxnChg chg="add del mod">
-          <ac:chgData name="Li, Hanchen F" userId="3aee791e-6a2d-4da7-a77b-fbdf7bf15886" providerId="ADAL" clId="{CDC5B0EF-6BEB-4658-A9FF-CB66F6FA6C1E}" dt="2025-05-23T16:09:59.579" v="7004" actId="11529"/>
-          <ac:cxnSpMkLst>
-            <pc:docMk/>
-            <pc:sldMk cId="1584463432" sldId="260"/>
-            <ac:cxnSpMk id="19" creationId="{7FE74403-402A-6BEB-A25E-26D34C90EE1F}"/>
-          </ac:cxnSpMkLst>
-        </pc:cxnChg>
-        <pc:cxnChg chg="add del mod">
-          <ac:chgData name="Li, Hanchen F" userId="3aee791e-6a2d-4da7-a77b-fbdf7bf15886" providerId="ADAL" clId="{CDC5B0EF-6BEB-4658-A9FF-CB66F6FA6C1E}" dt="2025-05-23T16:28:36.026" v="7446" actId="478"/>
-          <ac:cxnSpMkLst>
-            <pc:docMk/>
-            <pc:sldMk cId="1584463432" sldId="260"/>
-            <ac:cxnSpMk id="22" creationId="{396D9843-5F6D-2E31-C099-E962B39D142E}"/>
-          </ac:cxnSpMkLst>
-        </pc:cxnChg>
-        <pc:cxnChg chg="del">
-          <ac:chgData name="Li, Hanchen F" userId="3aee791e-6a2d-4da7-a77b-fbdf7bf15886" providerId="ADAL" clId="{CDC5B0EF-6BEB-4658-A9FF-CB66F6FA6C1E}" dt="2025-05-23T15:56:20.561" v="6694" actId="478"/>
-          <ac:cxnSpMkLst>
-            <pc:docMk/>
-            <pc:sldMk cId="1584463432" sldId="260"/>
-            <ac:cxnSpMk id="40" creationId="{8CBD5324-2207-162F-1DE4-E6CE617831FA}"/>
-          </ac:cxnSpMkLst>
-        </pc:cxnChg>
-        <pc:cxnChg chg="del">
-          <ac:chgData name="Li, Hanchen F" userId="3aee791e-6a2d-4da7-a77b-fbdf7bf15886" providerId="ADAL" clId="{CDC5B0EF-6BEB-4658-A9FF-CB66F6FA6C1E}" dt="2025-05-23T15:56:21.294" v="6695" actId="478"/>
-          <ac:cxnSpMkLst>
-            <pc:docMk/>
-            <pc:sldMk cId="1584463432" sldId="260"/>
-            <ac:cxnSpMk id="42" creationId="{87126867-632B-3F03-6E84-EE77D48D5F48}"/>
-          </ac:cxnSpMkLst>
-        </pc:cxnChg>
         <pc:cxnChg chg="add mod">
           <ac:chgData name="Li, Hanchen F" userId="3aee791e-6a2d-4da7-a77b-fbdf7bf15886" providerId="ADAL" clId="{CDC5B0EF-6BEB-4658-A9FF-CB66F6FA6C1E}" dt="2025-05-23T20:12:59.891" v="8141" actId="1038"/>
           <ac:cxnSpMkLst>
             <pc:docMk/>
             <pc:sldMk cId="1584463432" sldId="260"/>
             <ac:cxnSpMk id="60" creationId="{914EB22B-EAF8-FED9-1D2B-DD117060A13A}"/>
-          </ac:cxnSpMkLst>
-        </pc:cxnChg>
-        <pc:cxnChg chg="add del mod">
-          <ac:chgData name="Li, Hanchen F" userId="3aee791e-6a2d-4da7-a77b-fbdf7bf15886" providerId="ADAL" clId="{CDC5B0EF-6BEB-4658-A9FF-CB66F6FA6C1E}" dt="2025-05-23T16:28:43.841" v="7450" actId="478"/>
-          <ac:cxnSpMkLst>
-            <pc:docMk/>
-            <pc:sldMk cId="1584463432" sldId="260"/>
-            <ac:cxnSpMk id="66" creationId="{D5FF7EFE-BDB9-4F48-E346-A4F81692CA48}"/>
-          </ac:cxnSpMkLst>
-        </pc:cxnChg>
-        <pc:cxnChg chg="add del mod">
-          <ac:chgData name="Li, Hanchen F" userId="3aee791e-6a2d-4da7-a77b-fbdf7bf15886" providerId="ADAL" clId="{CDC5B0EF-6BEB-4658-A9FF-CB66F6FA6C1E}" dt="2025-05-23T16:28:35.238" v="7445" actId="478"/>
-          <ac:cxnSpMkLst>
-            <pc:docMk/>
-            <pc:sldMk cId="1584463432" sldId="260"/>
-            <ac:cxnSpMk id="69" creationId="{4AD77737-FA3E-5AE3-E268-208D72BB1730}"/>
-          </ac:cxnSpMkLst>
-        </pc:cxnChg>
-        <pc:cxnChg chg="add del mod">
-          <ac:chgData name="Li, Hanchen F" userId="3aee791e-6a2d-4da7-a77b-fbdf7bf15886" providerId="ADAL" clId="{CDC5B0EF-6BEB-4658-A9FF-CB66F6FA6C1E}" dt="2025-05-23T16:28:34.074" v="7443" actId="478"/>
-          <ac:cxnSpMkLst>
-            <pc:docMk/>
-            <pc:sldMk cId="1584463432" sldId="260"/>
-            <ac:cxnSpMk id="73" creationId="{6C615112-F7FC-952D-4652-2CD95276ACA5}"/>
-          </ac:cxnSpMkLst>
-        </pc:cxnChg>
-        <pc:cxnChg chg="add del mod">
-          <ac:chgData name="Li, Hanchen F" userId="3aee791e-6a2d-4da7-a77b-fbdf7bf15886" providerId="ADAL" clId="{CDC5B0EF-6BEB-4658-A9FF-CB66F6FA6C1E}" dt="2025-05-23T16:28:34.721" v="7444" actId="478"/>
-          <ac:cxnSpMkLst>
-            <pc:docMk/>
-            <pc:sldMk cId="1584463432" sldId="260"/>
-            <ac:cxnSpMk id="90" creationId="{690C707A-5770-3DF6-8248-B93B1A3E9E7B}"/>
-          </ac:cxnSpMkLst>
-        </pc:cxnChg>
-        <pc:cxnChg chg="add del mod">
-          <ac:chgData name="Li, Hanchen F" userId="3aee791e-6a2d-4da7-a77b-fbdf7bf15886" providerId="ADAL" clId="{CDC5B0EF-6BEB-4658-A9FF-CB66F6FA6C1E}" dt="2025-05-23T16:31:24.157" v="7545" actId="478"/>
-          <ac:cxnSpMkLst>
-            <pc:docMk/>
-            <pc:sldMk cId="1584463432" sldId="260"/>
-            <ac:cxnSpMk id="132" creationId="{45FD4F0C-D9BB-85E2-A25D-8ECFF673E762}"/>
-          </ac:cxnSpMkLst>
-        </pc:cxnChg>
-        <pc:cxnChg chg="add del mod">
-          <ac:chgData name="Li, Hanchen F" userId="3aee791e-6a2d-4da7-a77b-fbdf7bf15886" providerId="ADAL" clId="{CDC5B0EF-6BEB-4658-A9FF-CB66F6FA6C1E}" dt="2025-05-23T16:31:23.631" v="7544" actId="478"/>
-          <ac:cxnSpMkLst>
-            <pc:docMk/>
-            <pc:sldMk cId="1584463432" sldId="260"/>
-            <ac:cxnSpMk id="135" creationId="{1EEFF99F-6C11-F2C4-38DD-CC0550A14213}"/>
-          </ac:cxnSpMkLst>
-        </pc:cxnChg>
-        <pc:cxnChg chg="add del mod">
-          <ac:chgData name="Li, Hanchen F" userId="3aee791e-6a2d-4da7-a77b-fbdf7bf15886" providerId="ADAL" clId="{CDC5B0EF-6BEB-4658-A9FF-CB66F6FA6C1E}" dt="2025-05-23T16:28:23.562" v="7438" actId="478"/>
-          <ac:cxnSpMkLst>
-            <pc:docMk/>
-            <pc:sldMk cId="1584463432" sldId="260"/>
-            <ac:cxnSpMk id="138" creationId="{C7F3ED52-0D5E-B2A6-7101-F12F1AFEDEB1}"/>
-          </ac:cxnSpMkLst>
-        </pc:cxnChg>
-        <pc:cxnChg chg="add del mod">
-          <ac:chgData name="Li, Hanchen F" userId="3aee791e-6a2d-4da7-a77b-fbdf7bf15886" providerId="ADAL" clId="{CDC5B0EF-6BEB-4658-A9FF-CB66F6FA6C1E}" dt="2025-05-23T16:31:22.964" v="7543" actId="478"/>
-          <ac:cxnSpMkLst>
-            <pc:docMk/>
-            <pc:sldMk cId="1584463432" sldId="260"/>
-            <ac:cxnSpMk id="139" creationId="{5B3EFE0D-9564-AEE1-B9DC-243B2DBF7EDE}"/>
           </ac:cxnSpMkLst>
         </pc:cxnChg>
         <pc:cxnChg chg="add mod">
@@ -3729,30 +3001,6 @@
             <ac:cxnSpMk id="151" creationId="{EBF54475-C7DA-D965-070D-71237E66FB90}"/>
           </ac:cxnSpMkLst>
         </pc:cxnChg>
-        <pc:cxnChg chg="add del mod">
-          <ac:chgData name="Li, Hanchen F" userId="3aee791e-6a2d-4da7-a77b-fbdf7bf15886" providerId="ADAL" clId="{CDC5B0EF-6BEB-4658-A9FF-CB66F6FA6C1E}" dt="2025-05-23T16:31:22.455" v="7542" actId="478"/>
-          <ac:cxnSpMkLst>
-            <pc:docMk/>
-            <pc:sldMk cId="1584463432" sldId="260"/>
-            <ac:cxnSpMk id="162" creationId="{CC231C5D-4C28-0638-50E1-28E448471AFF}"/>
-          </ac:cxnSpMkLst>
-        </pc:cxnChg>
-        <pc:cxnChg chg="add del mod">
-          <ac:chgData name="Li, Hanchen F" userId="3aee791e-6a2d-4da7-a77b-fbdf7bf15886" providerId="ADAL" clId="{CDC5B0EF-6BEB-4658-A9FF-CB66F6FA6C1E}" dt="2025-05-23T16:31:21.828" v="7541" actId="478"/>
-          <ac:cxnSpMkLst>
-            <pc:docMk/>
-            <pc:sldMk cId="1584463432" sldId="260"/>
-            <ac:cxnSpMk id="172" creationId="{2F27C024-0664-3ACF-5888-835C35001354}"/>
-          </ac:cxnSpMkLst>
-        </pc:cxnChg>
-        <pc:cxnChg chg="add del mod">
-          <ac:chgData name="Li, Hanchen F" userId="3aee791e-6a2d-4da7-a77b-fbdf7bf15886" providerId="ADAL" clId="{CDC5B0EF-6BEB-4658-A9FF-CB66F6FA6C1E}" dt="2025-05-23T16:31:21.376" v="7540" actId="478"/>
-          <ac:cxnSpMkLst>
-            <pc:docMk/>
-            <pc:sldMk cId="1584463432" sldId="260"/>
-            <ac:cxnSpMk id="174" creationId="{734AFDFC-A414-9D92-2527-6AF427594022}"/>
-          </ac:cxnSpMkLst>
-        </pc:cxnChg>
         <pc:cxnChg chg="add mod">
           <ac:chgData name="Li, Hanchen F" userId="3aee791e-6a2d-4da7-a77b-fbdf7bf15886" providerId="ADAL" clId="{CDC5B0EF-6BEB-4658-A9FF-CB66F6FA6C1E}" dt="2025-05-23T16:42:25.130" v="7707" actId="1038"/>
           <ac:cxnSpMkLst>
@@ -3777,28 +3025,12 @@
             <ac:cxnSpMk id="199" creationId="{55DD9FD9-34D7-0A9D-EF1A-D5FE103BDA2A}"/>
           </ac:cxnSpMkLst>
         </pc:cxnChg>
-        <pc:cxnChg chg="add del mod">
-          <ac:chgData name="Li, Hanchen F" userId="3aee791e-6a2d-4da7-a77b-fbdf7bf15886" providerId="ADAL" clId="{CDC5B0EF-6BEB-4658-A9FF-CB66F6FA6C1E}" dt="2025-05-23T16:41:46.026" v="7657" actId="478"/>
-          <ac:cxnSpMkLst>
-            <pc:docMk/>
-            <pc:sldMk cId="1584463432" sldId="260"/>
-            <ac:cxnSpMk id="202" creationId="{4F073178-BF1D-51C5-9DC7-9D3C97769ADF}"/>
-          </ac:cxnSpMkLst>
-        </pc:cxnChg>
         <pc:cxnChg chg="add mod">
           <ac:chgData name="Li, Hanchen F" userId="3aee791e-6a2d-4da7-a77b-fbdf7bf15886" providerId="ADAL" clId="{CDC5B0EF-6BEB-4658-A9FF-CB66F6FA6C1E}" dt="2025-05-23T20:09:51.216" v="7970" actId="14100"/>
           <ac:cxnSpMkLst>
             <pc:docMk/>
             <pc:sldMk cId="1584463432" sldId="260"/>
             <ac:cxnSpMk id="205" creationId="{E96A241A-BE67-DBC2-F1E9-2BB697B4BCDC}"/>
-          </ac:cxnSpMkLst>
-        </pc:cxnChg>
-        <pc:cxnChg chg="add del mod">
-          <ac:chgData name="Li, Hanchen F" userId="3aee791e-6a2d-4da7-a77b-fbdf7bf15886" providerId="ADAL" clId="{CDC5B0EF-6BEB-4658-A9FF-CB66F6FA6C1E}" dt="2025-05-23T16:41:48.139" v="7658" actId="478"/>
-          <ac:cxnSpMkLst>
-            <pc:docMk/>
-            <pc:sldMk cId="1584463432" sldId="260"/>
-            <ac:cxnSpMk id="208" creationId="{9CD24189-018C-0180-4F2D-7D4083421338}"/>
           </ac:cxnSpMkLst>
         </pc:cxnChg>
         <pc:cxnChg chg="add mod">
@@ -4031,7 +3263,7 @@
           <a:p>
             <a:fld id="{DF1088C5-931A-42D2-8AA4-FA289862AAD0}" type="datetimeFigureOut">
               <a:rPr lang="zh-CN" altLang="en-US" smtClean="0"/>
-              <a:t>2025/5/24</a:t>
+              <a:t>2025/5/27</a:t>
             </a:fld>
             <a:endParaRPr lang="zh-CN" altLang="en-US"/>
           </a:p>
@@ -4921,7 +4153,7 @@
           <a:p>
             <a:fld id="{3CAF1464-0EA4-453D-A90B-03B04D244405}" type="datetimeFigureOut">
               <a:rPr lang="zh-CN" altLang="en-US" smtClean="0"/>
-              <a:t>2025/5/24</a:t>
+              <a:t>2025/5/27</a:t>
             </a:fld>
             <a:endParaRPr lang="zh-CN" altLang="en-US"/>
           </a:p>
@@ -5091,7 +4323,7 @@
           <a:p>
             <a:fld id="{3CAF1464-0EA4-453D-A90B-03B04D244405}" type="datetimeFigureOut">
               <a:rPr lang="zh-CN" altLang="en-US" smtClean="0"/>
-              <a:t>2025/5/24</a:t>
+              <a:t>2025/5/27</a:t>
             </a:fld>
             <a:endParaRPr lang="zh-CN" altLang="en-US"/>
           </a:p>
@@ -5271,7 +4503,7 @@
           <a:p>
             <a:fld id="{3CAF1464-0EA4-453D-A90B-03B04D244405}" type="datetimeFigureOut">
               <a:rPr lang="zh-CN" altLang="en-US" smtClean="0"/>
-              <a:t>2025/5/24</a:t>
+              <a:t>2025/5/27</a:t>
             </a:fld>
             <a:endParaRPr lang="zh-CN" altLang="en-US"/>
           </a:p>
@@ -5441,7 +4673,7 @@
           <a:p>
             <a:fld id="{3CAF1464-0EA4-453D-A90B-03B04D244405}" type="datetimeFigureOut">
               <a:rPr lang="zh-CN" altLang="en-US" smtClean="0"/>
-              <a:t>2025/5/24</a:t>
+              <a:t>2025/5/27</a:t>
             </a:fld>
             <a:endParaRPr lang="zh-CN" altLang="en-US"/>
           </a:p>
@@ -5687,7 +4919,7 @@
           <a:p>
             <a:fld id="{3CAF1464-0EA4-453D-A90B-03B04D244405}" type="datetimeFigureOut">
               <a:rPr lang="zh-CN" altLang="en-US" smtClean="0"/>
-              <a:t>2025/5/24</a:t>
+              <a:t>2025/5/27</a:t>
             </a:fld>
             <a:endParaRPr lang="zh-CN" altLang="en-US"/>
           </a:p>
@@ -5919,7 +5151,7 @@
           <a:p>
             <a:fld id="{3CAF1464-0EA4-453D-A90B-03B04D244405}" type="datetimeFigureOut">
               <a:rPr lang="zh-CN" altLang="en-US" smtClean="0"/>
-              <a:t>2025/5/24</a:t>
+              <a:t>2025/5/27</a:t>
             </a:fld>
             <a:endParaRPr lang="zh-CN" altLang="en-US"/>
           </a:p>
@@ -6286,7 +5518,7 @@
           <a:p>
             <a:fld id="{3CAF1464-0EA4-453D-A90B-03B04D244405}" type="datetimeFigureOut">
               <a:rPr lang="zh-CN" altLang="en-US" smtClean="0"/>
-              <a:t>2025/5/24</a:t>
+              <a:t>2025/5/27</a:t>
             </a:fld>
             <a:endParaRPr lang="zh-CN" altLang="en-US"/>
           </a:p>
@@ -6404,7 +5636,7 @@
           <a:p>
             <a:fld id="{3CAF1464-0EA4-453D-A90B-03B04D244405}" type="datetimeFigureOut">
               <a:rPr lang="zh-CN" altLang="en-US" smtClean="0"/>
-              <a:t>2025/5/24</a:t>
+              <a:t>2025/5/27</a:t>
             </a:fld>
             <a:endParaRPr lang="zh-CN" altLang="en-US"/>
           </a:p>
@@ -6499,7 +5731,7 @@
           <a:p>
             <a:fld id="{3CAF1464-0EA4-453D-A90B-03B04D244405}" type="datetimeFigureOut">
               <a:rPr lang="zh-CN" altLang="en-US" smtClean="0"/>
-              <a:t>2025/5/24</a:t>
+              <a:t>2025/5/27</a:t>
             </a:fld>
             <a:endParaRPr lang="zh-CN" altLang="en-US"/>
           </a:p>
@@ -6776,7 +6008,7 @@
           <a:p>
             <a:fld id="{3CAF1464-0EA4-453D-A90B-03B04D244405}" type="datetimeFigureOut">
               <a:rPr lang="zh-CN" altLang="en-US" smtClean="0"/>
-              <a:t>2025/5/24</a:t>
+              <a:t>2025/5/27</a:t>
             </a:fld>
             <a:endParaRPr lang="zh-CN" altLang="en-US"/>
           </a:p>
@@ -7033,7 +6265,7 @@
           <a:p>
             <a:fld id="{3CAF1464-0EA4-453D-A90B-03B04D244405}" type="datetimeFigureOut">
               <a:rPr lang="zh-CN" altLang="en-US" smtClean="0"/>
-              <a:t>2025/5/24</a:t>
+              <a:t>2025/5/27</a:t>
             </a:fld>
             <a:endParaRPr lang="zh-CN" altLang="en-US"/>
           </a:p>
@@ -7246,7 +6478,7 @@
           <a:p>
             <a:fld id="{3CAF1464-0EA4-453D-A90B-03B04D244405}" type="datetimeFigureOut">
               <a:rPr lang="zh-CN" altLang="en-US" smtClean="0"/>
-              <a:t>2025/5/24</a:t>
+              <a:t>2025/5/27</a:t>
             </a:fld>
             <a:endParaRPr lang="zh-CN" altLang="en-US"/>
           </a:p>
@@ -18544,64 +17776,6 @@
       </p:sp>
       <p:sp>
         <p:nvSpPr>
-          <p:cNvPr id="671" name="文本框 670">
-            <a:extLst>
-              <a:ext uri="{FF2B5EF4-FFF2-40B4-BE49-F238E27FC236}">
-                <a16:creationId xmlns:a16="http://schemas.microsoft.com/office/drawing/2014/main" id="{48721D70-ADC2-65F2-CF96-A9148310688B}"/>
-              </a:ext>
-            </a:extLst>
-          </p:cNvPr>
-          <p:cNvSpPr txBox="1"/>
-          <p:nvPr/>
-        </p:nvSpPr>
-        <p:spPr>
-          <a:xfrm>
-            <a:off x="1737084" y="3990949"/>
-            <a:ext cx="500458" cy="338554"/>
-          </a:xfrm>
-          <a:prstGeom prst="rect">
-            <a:avLst/>
-          </a:prstGeom>
-          <a:noFill/>
-        </p:spPr>
-        <p:txBody>
-          <a:bodyPr wrap="none" rtlCol="0">
-            <a:spAutoFit/>
-          </a:bodyPr>
-          <a:lstStyle/>
-          <a:p>
-            <a:r>
-              <a:rPr lang="en-US" altLang="zh-CN" sz="1600" i="1" dirty="0" err="1">
-                <a:solidFill>
-                  <a:srgbClr val="DC143C"/>
-                </a:solidFill>
-                <a:latin typeface="Times New Roman" panose="02020603050405020304" pitchFamily="18" charset="0"/>
-                <a:cs typeface="Times New Roman" panose="02020603050405020304" pitchFamily="18" charset="0"/>
-              </a:rPr>
-              <a:t>M</a:t>
-            </a:r>
-            <a:r>
-              <a:rPr lang="en-US" altLang="zh-CN" sz="1600" i="1" baseline="-25000" dirty="0" err="1">
-                <a:solidFill>
-                  <a:srgbClr val="DC143C"/>
-                </a:solidFill>
-                <a:latin typeface="Times New Roman" panose="02020603050405020304" pitchFamily="18" charset="0"/>
-                <a:cs typeface="Times New Roman" panose="02020603050405020304" pitchFamily="18" charset="0"/>
-              </a:rPr>
-              <a:t>yF</a:t>
-            </a:r>
-            <a:endParaRPr lang="zh-CN" altLang="en-US" sz="1600" i="1" baseline="-25000" dirty="0">
-              <a:solidFill>
-                <a:srgbClr val="DC143C"/>
-              </a:solidFill>
-              <a:latin typeface="Times New Roman" panose="02020603050405020304" pitchFamily="18" charset="0"/>
-              <a:cs typeface="Times New Roman" panose="02020603050405020304" pitchFamily="18" charset="0"/>
-            </a:endParaRPr>
-          </a:p>
-        </p:txBody>
-      </p:sp>
-      <p:sp>
-        <p:nvSpPr>
           <p:cNvPr id="672" name="文本框 671">
             <a:extLst>
               <a:ext uri="{FF2B5EF4-FFF2-40B4-BE49-F238E27FC236}">
@@ -18660,10 +17834,10 @@
       </p:sp>
       <p:sp>
         <p:nvSpPr>
-          <p:cNvPr id="673" name="文本框 672">
-            <a:extLst>
-              <a:ext uri="{FF2B5EF4-FFF2-40B4-BE49-F238E27FC236}">
-                <a16:creationId xmlns:a16="http://schemas.microsoft.com/office/drawing/2014/main" id="{5A7B8730-BD7F-1D04-4A62-5FA63DD009A6}"/>
+          <p:cNvPr id="674" name="文本框 673">
+            <a:extLst>
+              <a:ext uri="{FF2B5EF4-FFF2-40B4-BE49-F238E27FC236}">
+                <a16:creationId xmlns:a16="http://schemas.microsoft.com/office/drawing/2014/main" id="{A935AE22-62AE-F8AB-1407-39E208CA744F}"/>
               </a:ext>
             </a:extLst>
           </p:cNvPr>
@@ -18672,65 +17846,7 @@
         </p:nvSpPr>
         <p:spPr>
           <a:xfrm>
-            <a:off x="2215676" y="2809179"/>
-            <a:ext cx="575799" cy="338554"/>
-          </a:xfrm>
-          <a:prstGeom prst="rect">
-            <a:avLst/>
-          </a:prstGeom>
-          <a:noFill/>
-        </p:spPr>
-        <p:txBody>
-          <a:bodyPr wrap="none" rtlCol="0">
-            <a:spAutoFit/>
-          </a:bodyPr>
-          <a:lstStyle/>
-          <a:p>
-            <a:r>
-              <a:rPr lang="en-US" altLang="zh-CN" sz="1600" i="1" dirty="0" err="1">
-                <a:solidFill>
-                  <a:srgbClr val="DC143C"/>
-                </a:solidFill>
-                <a:latin typeface="Times New Roman" panose="02020603050405020304" pitchFamily="18" charset="0"/>
-                <a:cs typeface="Times New Roman" panose="02020603050405020304" pitchFamily="18" charset="0"/>
-              </a:rPr>
-              <a:t>M</a:t>
-            </a:r>
-            <a:r>
-              <a:rPr lang="en-US" altLang="zh-CN" sz="1600" i="1" baseline="-25000" dirty="0" err="1">
-                <a:solidFill>
-                  <a:srgbClr val="DC143C"/>
-                </a:solidFill>
-                <a:latin typeface="Times New Roman" panose="02020603050405020304" pitchFamily="18" charset="0"/>
-                <a:cs typeface="Times New Roman" panose="02020603050405020304" pitchFamily="18" charset="0"/>
-              </a:rPr>
-              <a:t>yLR</a:t>
-            </a:r>
-            <a:endParaRPr lang="zh-CN" altLang="en-US" sz="1600" i="1" baseline="-25000" dirty="0">
-              <a:solidFill>
-                <a:srgbClr val="DC143C"/>
-              </a:solidFill>
-              <a:latin typeface="Times New Roman" panose="02020603050405020304" pitchFamily="18" charset="0"/>
-              <a:cs typeface="Times New Roman" panose="02020603050405020304" pitchFamily="18" charset="0"/>
-            </a:endParaRPr>
-          </a:p>
-        </p:txBody>
-      </p:sp>
-      <p:sp>
-        <p:nvSpPr>
-          <p:cNvPr id="674" name="文本框 673">
-            <a:extLst>
-              <a:ext uri="{FF2B5EF4-FFF2-40B4-BE49-F238E27FC236}">
-                <a16:creationId xmlns:a16="http://schemas.microsoft.com/office/drawing/2014/main" id="{A935AE22-62AE-F8AB-1407-39E208CA744F}"/>
-              </a:ext>
-            </a:extLst>
-          </p:cNvPr>
-          <p:cNvSpPr txBox="1"/>
-          <p:nvPr/>
-        </p:nvSpPr>
-        <p:spPr>
-          <a:xfrm>
-            <a:off x="2103821" y="2332435"/>
+            <a:off x="2103073" y="2302182"/>
             <a:ext cx="599844" cy="338554"/>
           </a:xfrm>
           <a:prstGeom prst="rect">
@@ -18759,7 +17875,7 @@
           <a:lstStyle/>
           <a:p>
             <a:r>
-              <a:rPr lang="en-US" altLang="zh-CN" sz="1600" i="1" dirty="0" err="1">
+              <a:rPr lang="en-US" altLang="zh-CN" sz="1600" i="1" dirty="0">
                 <a:solidFill>
                   <a:srgbClr val="DC143C"/>
                 </a:solidFill>
@@ -18769,14 +17885,24 @@
               <a:t>M</a:t>
             </a:r>
             <a:r>
-              <a:rPr lang="en-US" altLang="zh-CN" sz="1600" i="1" baseline="-25000" dirty="0" err="1">
+              <a:rPr lang="en-US" altLang="zh-CN" sz="1600" i="1" baseline="-25000" dirty="0">
                 <a:solidFill>
                   <a:srgbClr val="DC143C"/>
                 </a:solidFill>
                 <a:latin typeface="Times New Roman" panose="02020603050405020304" pitchFamily="18" charset="0"/>
                 <a:cs typeface="Times New Roman" panose="02020603050405020304" pitchFamily="18" charset="0"/>
               </a:rPr>
-              <a:t>yUR</a:t>
+              <a:t>y</a:t>
+            </a:r>
+            <a:r>
+              <a:rPr lang="en-US" altLang="zh-CN" sz="1600" i="1" baseline="-55000" dirty="0">
+                <a:solidFill>
+                  <a:srgbClr val="DC143C"/>
+                </a:solidFill>
+                <a:latin typeface="Times New Roman" panose="02020603050405020304" pitchFamily="18" charset="0"/>
+                <a:cs typeface="Times New Roman" panose="02020603050405020304" pitchFamily="18" charset="0"/>
+              </a:rPr>
+              <a:t>UR</a:t>
             </a:r>
             <a:endParaRPr lang="zh-CN" altLang="en-US" sz="1600" i="1" baseline="-25000" dirty="0">
               <a:solidFill>
@@ -20150,8 +19276,8 @@
         </p:nvSpPr>
         <p:spPr>
           <a:xfrm>
-            <a:off x="2351194" y="912193"/>
-            <a:ext cx="633507" cy="338554"/>
+            <a:off x="2371241" y="912193"/>
+            <a:ext cx="599844" cy="338554"/>
           </a:xfrm>
           <a:prstGeom prst="rect">
             <a:avLst/>
@@ -20198,62 +19324,10 @@
                 <a:ea typeface="等线" panose="02010600030101010101" pitchFamily="2" charset="-122"/>
                 <a:cs typeface="Times New Roman" panose="02020603050405020304" pitchFamily="18" charset="0"/>
               </a:rPr>
-              <a:t>1c,UR</a:t>
-            </a:r>
-            <a:endParaRPr lang="zh-CN" altLang="en-US" sz="1600" i="1" baseline="-25000" dirty="0">
-              <a:solidFill>
-                <a:srgbClr val="0000CD"/>
-              </a:solidFill>
-              <a:latin typeface="Times New Roman" panose="02020603050405020304" pitchFamily="18" charset="0"/>
-              <a:cs typeface="Times New Roman" panose="02020603050405020304" pitchFamily="18" charset="0"/>
-            </a:endParaRPr>
-          </a:p>
-        </p:txBody>
-      </p:sp>
-      <p:sp>
-        <p:nvSpPr>
-          <p:cNvPr id="737" name="文本框 736">
-            <a:extLst>
-              <a:ext uri="{FF2B5EF4-FFF2-40B4-BE49-F238E27FC236}">
-                <a16:creationId xmlns:a16="http://schemas.microsoft.com/office/drawing/2014/main" id="{94D702E4-E09F-8517-606F-3C66E6865576}"/>
-              </a:ext>
-            </a:extLst>
-          </p:cNvPr>
-          <p:cNvSpPr txBox="1"/>
-          <p:nvPr/>
-        </p:nvSpPr>
-        <p:spPr>
-          <a:xfrm>
-            <a:off x="2560622" y="1823826"/>
-            <a:ext cx="633507" cy="338554"/>
-          </a:xfrm>
-          <a:prstGeom prst="rect">
-            <a:avLst/>
-          </a:prstGeom>
-          <a:gradFill>
-            <a:gsLst>
-              <a:gs pos="44000">
-                <a:schemeClr val="bg1"/>
-              </a:gs>
-              <a:gs pos="70000">
-                <a:schemeClr val="bg1">
-                  <a:alpha val="0"/>
-                </a:schemeClr>
-              </a:gs>
-            </a:gsLst>
-            <a:path path="circle">
-              <a:fillToRect l="50000" t="50000" r="50000" b="50000"/>
-            </a:path>
-          </a:gradFill>
-        </p:spPr>
-        <p:txBody>
-          <a:bodyPr wrap="none" rtlCol="0">
-            <a:spAutoFit/>
-          </a:bodyPr>
-          <a:lstStyle/>
-          <a:p>
-            <a:r>
-              <a:rPr lang="el-GR" altLang="zh-CN" sz="1600" i="1" dirty="0">
+              <a:t>1c</a:t>
+            </a:r>
+            <a:r>
+              <a:rPr lang="en-US" altLang="zh-CN" sz="1600" i="1" baseline="-55000" dirty="0">
                 <a:solidFill>
                   <a:srgbClr val="0000CD"/>
                 </a:solidFill>
@@ -20261,18 +19335,7 @@
                 <a:ea typeface="等线" panose="02010600030101010101" pitchFamily="2" charset="-122"/>
                 <a:cs typeface="Times New Roman" panose="02020603050405020304" pitchFamily="18" charset="0"/>
               </a:rPr>
-              <a:t>β</a:t>
-            </a:r>
-            <a:r>
-              <a:rPr lang="en-US" altLang="zh-CN" sz="1600" i="1" baseline="-25000" dirty="0">
-                <a:solidFill>
-                  <a:srgbClr val="0000CD"/>
-                </a:solidFill>
-                <a:latin typeface="Times New Roman" panose="02020603050405020304" pitchFamily="18" charset="0"/>
-                <a:ea typeface="等线" panose="02010600030101010101" pitchFamily="2" charset="-122"/>
-                <a:cs typeface="Times New Roman" panose="02020603050405020304" pitchFamily="18" charset="0"/>
-              </a:rPr>
-              <a:t>1c,LR</a:t>
+              <a:t>UR</a:t>
             </a:r>
             <a:endParaRPr lang="zh-CN" altLang="en-US" sz="1600" i="1" baseline="-25000" dirty="0">
               <a:solidFill>
@@ -20430,10 +19493,10 @@
       </p:sp>
       <p:sp>
         <p:nvSpPr>
-          <p:cNvPr id="740" name="文本框 739">
-            <a:extLst>
-              <a:ext uri="{FF2B5EF4-FFF2-40B4-BE49-F238E27FC236}">
-                <a16:creationId xmlns:a16="http://schemas.microsoft.com/office/drawing/2014/main" id="{5C05FDFA-069A-1211-391D-6535C7B3AB3F}"/>
+          <p:cNvPr id="744" name="文本框 743">
+            <a:extLst>
+              <a:ext uri="{FF2B5EF4-FFF2-40B4-BE49-F238E27FC236}">
+                <a16:creationId xmlns:a16="http://schemas.microsoft.com/office/drawing/2014/main" id="{2BC70BC8-903A-BD01-023B-0547825CD8A6}"/>
               </a:ext>
             </a:extLst>
           </p:cNvPr>
@@ -20442,8 +19505,8 @@
         </p:nvSpPr>
         <p:spPr>
           <a:xfrm>
-            <a:off x="9402771" y="2790673"/>
-            <a:ext cx="575799" cy="338554"/>
+            <a:off x="9782678" y="5455894"/>
+            <a:ext cx="356188" cy="338554"/>
           </a:xfrm>
           <a:prstGeom prst="rect">
             <a:avLst/>
@@ -20457,24 +19520,14 @@
           <a:lstStyle/>
           <a:p>
             <a:r>
-              <a:rPr lang="en-US" altLang="zh-CN" sz="1600" i="1" dirty="0" err="1">
+              <a:rPr lang="en-US" altLang="zh-CN" sz="1600" i="1" dirty="0">
                 <a:solidFill>
                   <a:srgbClr val="DC143C"/>
                 </a:solidFill>
                 <a:latin typeface="Times New Roman" panose="02020603050405020304" pitchFamily="18" charset="0"/>
                 <a:cs typeface="Times New Roman" panose="02020603050405020304" pitchFamily="18" charset="0"/>
               </a:rPr>
-              <a:t>M</a:t>
-            </a:r>
-            <a:r>
-              <a:rPr lang="en-US" altLang="zh-CN" sz="1600" i="1" baseline="-25000" dirty="0" err="1">
-                <a:solidFill>
-                  <a:srgbClr val="DC143C"/>
-                </a:solidFill>
-                <a:latin typeface="Times New Roman" panose="02020603050405020304" pitchFamily="18" charset="0"/>
-                <a:cs typeface="Times New Roman" panose="02020603050405020304" pitchFamily="18" charset="0"/>
-              </a:rPr>
-              <a:t>xLR</a:t>
+              <a:t>W</a:t>
             </a:r>
             <a:endParaRPr lang="zh-CN" altLang="en-US" sz="1600" i="1" baseline="-25000" dirty="0">
               <a:solidFill>
@@ -20488,10 +19541,10 @@
       </p:sp>
       <p:sp>
         <p:nvSpPr>
-          <p:cNvPr id="741" name="文本框 740">
-            <a:extLst>
-              <a:ext uri="{FF2B5EF4-FFF2-40B4-BE49-F238E27FC236}">
-                <a16:creationId xmlns:a16="http://schemas.microsoft.com/office/drawing/2014/main" id="{C3BB3AE5-380E-3C8F-7915-31796B6B7783}"/>
+          <p:cNvPr id="745" name="文本框 744">
+            <a:extLst>
+              <a:ext uri="{FF2B5EF4-FFF2-40B4-BE49-F238E27FC236}">
+                <a16:creationId xmlns:a16="http://schemas.microsoft.com/office/drawing/2014/main" id="{C6BE3402-24E9-7236-D6D8-500C6579CD80}"/>
               </a:ext>
             </a:extLst>
           </p:cNvPr>
@@ -20500,8 +19553,196 @@
         </p:nvSpPr>
         <p:spPr>
           <a:xfrm>
-            <a:off x="9451093" y="2266222"/>
-            <a:ext cx="599844" cy="338554"/>
+            <a:off x="9773570" y="418770"/>
+            <a:ext cx="481222" cy="338554"/>
+          </a:xfrm>
+          <a:prstGeom prst="rect">
+            <a:avLst/>
+          </a:prstGeom>
+          <a:noFill/>
+        </p:spPr>
+        <p:txBody>
+          <a:bodyPr wrap="none" rtlCol="0">
+            <a:spAutoFit/>
+          </a:bodyPr>
+          <a:lstStyle/>
+          <a:p>
+            <a:r>
+              <a:rPr lang="en-US" altLang="zh-CN" sz="1600" i="1" dirty="0">
+                <a:solidFill>
+                  <a:srgbClr val="DC143C"/>
+                </a:solidFill>
+                <a:latin typeface="Times New Roman" panose="02020603050405020304" pitchFamily="18" charset="0"/>
+                <a:cs typeface="Times New Roman" panose="02020603050405020304" pitchFamily="18" charset="0"/>
+              </a:rPr>
+              <a:t>T</a:t>
+            </a:r>
+            <a:r>
+              <a:rPr lang="en-US" altLang="zh-CN" sz="1600" i="1" baseline="-25000" dirty="0">
+                <a:solidFill>
+                  <a:srgbClr val="DC143C"/>
+                </a:solidFill>
+                <a:latin typeface="Times New Roman" panose="02020603050405020304" pitchFamily="18" charset="0"/>
+                <a:cs typeface="Times New Roman" panose="02020603050405020304" pitchFamily="18" charset="0"/>
+              </a:rPr>
+              <a:t>UR</a:t>
+            </a:r>
+            <a:endParaRPr lang="zh-CN" altLang="en-US" sz="1600" i="1" baseline="-25000" dirty="0">
+              <a:solidFill>
+                <a:srgbClr val="DC143C"/>
+              </a:solidFill>
+              <a:latin typeface="Times New Roman" panose="02020603050405020304" pitchFamily="18" charset="0"/>
+              <a:cs typeface="Times New Roman" panose="02020603050405020304" pitchFamily="18" charset="0"/>
+            </a:endParaRPr>
+          </a:p>
+        </p:txBody>
+      </p:sp>
+      <p:sp>
+        <p:nvSpPr>
+          <p:cNvPr id="746" name="文本框 745">
+            <a:extLst>
+              <a:ext uri="{FF2B5EF4-FFF2-40B4-BE49-F238E27FC236}">
+                <a16:creationId xmlns:a16="http://schemas.microsoft.com/office/drawing/2014/main" id="{0F92675F-F254-A4D0-212B-67359F7B649C}"/>
+              </a:ext>
+            </a:extLst>
+          </p:cNvPr>
+          <p:cNvSpPr txBox="1"/>
+          <p:nvPr/>
+        </p:nvSpPr>
+        <p:spPr>
+          <a:xfrm>
+            <a:off x="9658881" y="1001547"/>
+            <a:ext cx="457176" cy="338554"/>
+          </a:xfrm>
+          <a:prstGeom prst="rect">
+            <a:avLst/>
+          </a:prstGeom>
+          <a:noFill/>
+        </p:spPr>
+        <p:txBody>
+          <a:bodyPr wrap="none" rtlCol="0">
+            <a:spAutoFit/>
+          </a:bodyPr>
+          <a:lstStyle/>
+          <a:p>
+            <a:r>
+              <a:rPr lang="en-US" altLang="zh-CN" sz="1600" i="1" dirty="0">
+                <a:solidFill>
+                  <a:srgbClr val="DC143C"/>
+                </a:solidFill>
+                <a:latin typeface="Times New Roman" panose="02020603050405020304" pitchFamily="18" charset="0"/>
+                <a:cs typeface="Times New Roman" panose="02020603050405020304" pitchFamily="18" charset="0"/>
+              </a:rPr>
+              <a:t>T</a:t>
+            </a:r>
+            <a:r>
+              <a:rPr lang="en-US" altLang="zh-CN" sz="1600" i="1" baseline="-25000" dirty="0">
+                <a:solidFill>
+                  <a:srgbClr val="DC143C"/>
+                </a:solidFill>
+                <a:latin typeface="Times New Roman" panose="02020603050405020304" pitchFamily="18" charset="0"/>
+                <a:cs typeface="Times New Roman" panose="02020603050405020304" pitchFamily="18" charset="0"/>
+              </a:rPr>
+              <a:t>LR</a:t>
+            </a:r>
+            <a:endParaRPr lang="zh-CN" altLang="en-US" sz="1600" i="1" baseline="-25000" dirty="0">
+              <a:solidFill>
+                <a:srgbClr val="DC143C"/>
+              </a:solidFill>
+              <a:latin typeface="Times New Roman" panose="02020603050405020304" pitchFamily="18" charset="0"/>
+              <a:cs typeface="Times New Roman" panose="02020603050405020304" pitchFamily="18" charset="0"/>
+            </a:endParaRPr>
+          </a:p>
+        </p:txBody>
+      </p:sp>
+      <p:sp>
+        <p:nvSpPr>
+          <p:cNvPr id="747" name="文本框 746">
+            <a:extLst>
+              <a:ext uri="{FF2B5EF4-FFF2-40B4-BE49-F238E27FC236}">
+                <a16:creationId xmlns:a16="http://schemas.microsoft.com/office/drawing/2014/main" id="{9A53B4AF-9B29-93D8-B37B-B96B6DFE0487}"/>
+              </a:ext>
+            </a:extLst>
+          </p:cNvPr>
+          <p:cNvSpPr txBox="1"/>
+          <p:nvPr/>
+        </p:nvSpPr>
+        <p:spPr>
+          <a:xfrm>
+            <a:off x="10965982" y="2530473"/>
+            <a:ext cx="481222" cy="338554"/>
+          </a:xfrm>
+          <a:prstGeom prst="rect">
+            <a:avLst/>
+          </a:prstGeom>
+          <a:gradFill>
+            <a:gsLst>
+              <a:gs pos="23000">
+                <a:schemeClr val="bg1"/>
+              </a:gs>
+              <a:gs pos="55000">
+                <a:schemeClr val="bg1">
+                  <a:alpha val="0"/>
+                </a:schemeClr>
+              </a:gs>
+            </a:gsLst>
+            <a:path path="circle">
+              <a:fillToRect l="50000" t="50000" r="50000" b="50000"/>
+            </a:path>
+          </a:gradFill>
+        </p:spPr>
+        <p:txBody>
+          <a:bodyPr wrap="none" rtlCol="0">
+            <a:spAutoFit/>
+          </a:bodyPr>
+          <a:lstStyle/>
+          <a:p>
+            <a:r>
+              <a:rPr lang="en-US" altLang="zh-CN" sz="1600" i="1" dirty="0">
+                <a:solidFill>
+                  <a:srgbClr val="DC143C"/>
+                </a:solidFill>
+                <a:latin typeface="Times New Roman" panose="02020603050405020304" pitchFamily="18" charset="0"/>
+                <a:cs typeface="Times New Roman" panose="02020603050405020304" pitchFamily="18" charset="0"/>
+              </a:rPr>
+              <a:t>Y</a:t>
+            </a:r>
+            <a:r>
+              <a:rPr lang="en-US" altLang="zh-CN" sz="1600" i="1" baseline="-25000" dirty="0">
+                <a:solidFill>
+                  <a:srgbClr val="DC143C"/>
+                </a:solidFill>
+                <a:latin typeface="Times New Roman" panose="02020603050405020304" pitchFamily="18" charset="0"/>
+                <a:cs typeface="Times New Roman" panose="02020603050405020304" pitchFamily="18" charset="0"/>
+              </a:rPr>
+              <a:t>UR</a:t>
+            </a:r>
+            <a:endParaRPr lang="zh-CN" altLang="en-US" sz="1600" i="1" baseline="-25000" dirty="0">
+              <a:solidFill>
+                <a:srgbClr val="DC143C"/>
+              </a:solidFill>
+              <a:latin typeface="Times New Roman" panose="02020603050405020304" pitchFamily="18" charset="0"/>
+              <a:cs typeface="Times New Roman" panose="02020603050405020304" pitchFamily="18" charset="0"/>
+            </a:endParaRPr>
+          </a:p>
+        </p:txBody>
+      </p:sp>
+      <p:sp>
+        <p:nvSpPr>
+          <p:cNvPr id="748" name="文本框 747">
+            <a:extLst>
+              <a:ext uri="{FF2B5EF4-FFF2-40B4-BE49-F238E27FC236}">
+                <a16:creationId xmlns:a16="http://schemas.microsoft.com/office/drawing/2014/main" id="{111AA687-624F-620E-C99D-F8D54B78F662}"/>
+              </a:ext>
+            </a:extLst>
+          </p:cNvPr>
+          <p:cNvSpPr txBox="1"/>
+          <p:nvPr/>
+        </p:nvSpPr>
+        <p:spPr>
+          <a:xfrm>
+            <a:off x="10917387" y="3089347"/>
+            <a:ext cx="457176" cy="338554"/>
           </a:xfrm>
           <a:prstGeom prst="rect">
             <a:avLst/>
@@ -20529,24 +19770,24 @@
           <a:lstStyle/>
           <a:p>
             <a:r>
-              <a:rPr lang="en-US" altLang="zh-CN" sz="1600" i="1" dirty="0" err="1">
+              <a:rPr lang="en-US" altLang="zh-CN" sz="1600" i="1" dirty="0">
                 <a:solidFill>
                   <a:srgbClr val="DC143C"/>
                 </a:solidFill>
                 <a:latin typeface="Times New Roman" panose="02020603050405020304" pitchFamily="18" charset="0"/>
                 <a:cs typeface="Times New Roman" panose="02020603050405020304" pitchFamily="18" charset="0"/>
               </a:rPr>
-              <a:t>M</a:t>
-            </a:r>
-            <a:r>
-              <a:rPr lang="en-US" altLang="zh-CN" sz="1600" i="1" baseline="-25000" dirty="0" err="1">
+              <a:t>Y</a:t>
+            </a:r>
+            <a:r>
+              <a:rPr lang="en-US" altLang="zh-CN" sz="1600" i="1" baseline="-25000" dirty="0">
                 <a:solidFill>
                   <a:srgbClr val="DC143C"/>
                 </a:solidFill>
                 <a:latin typeface="Times New Roman" panose="02020603050405020304" pitchFamily="18" charset="0"/>
                 <a:cs typeface="Times New Roman" panose="02020603050405020304" pitchFamily="18" charset="0"/>
               </a:rPr>
-              <a:t>xUR</a:t>
+              <a:t>LR</a:t>
             </a:r>
             <a:endParaRPr lang="zh-CN" altLang="en-US" sz="1600" i="1" baseline="-25000" dirty="0">
               <a:solidFill>
@@ -20560,10 +19801,10 @@
       </p:sp>
       <p:sp>
         <p:nvSpPr>
-          <p:cNvPr id="742" name="文本框 741">
-            <a:extLst>
-              <a:ext uri="{FF2B5EF4-FFF2-40B4-BE49-F238E27FC236}">
-                <a16:creationId xmlns:a16="http://schemas.microsoft.com/office/drawing/2014/main" id="{52B53972-AFE9-F924-2D9E-BB933025E733}"/>
+          <p:cNvPr id="749" name="文本框 748">
+            <a:extLst>
+              <a:ext uri="{FF2B5EF4-FFF2-40B4-BE49-F238E27FC236}">
+                <a16:creationId xmlns:a16="http://schemas.microsoft.com/office/drawing/2014/main" id="{FDFA0785-AA60-C97B-E868-DD5E0D7DEDC8}"/>
               </a:ext>
             </a:extLst>
           </p:cNvPr>
@@ -20572,27 +19813,13 @@
         </p:nvSpPr>
         <p:spPr>
           <a:xfrm>
-            <a:off x="10219853" y="992026"/>
-            <a:ext cx="633507" cy="338554"/>
+            <a:off x="11244936" y="3821672"/>
+            <a:ext cx="449547" cy="338554"/>
           </a:xfrm>
           <a:prstGeom prst="rect">
             <a:avLst/>
           </a:prstGeom>
-          <a:gradFill>
-            <a:gsLst>
-              <a:gs pos="22000">
-                <a:schemeClr val="bg1"/>
-              </a:gs>
-              <a:gs pos="41000">
-                <a:schemeClr val="bg1">
-                  <a:alpha val="0"/>
-                </a:schemeClr>
-              </a:gs>
-            </a:gsLst>
-            <a:path path="circle">
-              <a:fillToRect l="50000" t="50000" r="50000" b="50000"/>
-            </a:path>
-          </a:gradFill>
+          <a:noFill/>
         </p:spPr>
         <p:txBody>
           <a:bodyPr wrap="none" rtlCol="0">
@@ -20601,148 +19828,24 @@
           <a:lstStyle/>
           <a:p>
             <a:r>
-              <a:rPr lang="el-GR" altLang="zh-CN" sz="1600" i="1" dirty="0">
-                <a:solidFill>
-                  <a:srgbClr val="0000CD"/>
-                </a:solidFill>
-                <a:latin typeface="Times New Roman" panose="02020603050405020304" pitchFamily="18" charset="0"/>
-                <a:ea typeface="等线" panose="02010600030101010101" pitchFamily="2" charset="-122"/>
-                <a:cs typeface="Times New Roman" panose="02020603050405020304" pitchFamily="18" charset="0"/>
-              </a:rPr>
-              <a:t>β</a:t>
+              <a:rPr lang="en-US" altLang="zh-CN" sz="1600" i="1" dirty="0">
+                <a:solidFill>
+                  <a:srgbClr val="DC143C"/>
+                </a:solidFill>
+                <a:latin typeface="Times New Roman" panose="02020603050405020304" pitchFamily="18" charset="0"/>
+                <a:cs typeface="Times New Roman" panose="02020603050405020304" pitchFamily="18" charset="0"/>
+              </a:rPr>
+              <a:t>L</a:t>
             </a:r>
             <a:r>
               <a:rPr lang="en-US" altLang="zh-CN" sz="1600" i="1" baseline="-25000" dirty="0">
                 <a:solidFill>
-                  <a:srgbClr val="0000CD"/>
-                </a:solidFill>
-                <a:latin typeface="Times New Roman" panose="02020603050405020304" pitchFamily="18" charset="0"/>
-                <a:ea typeface="等线" panose="02010600030101010101" pitchFamily="2" charset="-122"/>
-                <a:cs typeface="Times New Roman" panose="02020603050405020304" pitchFamily="18" charset="0"/>
-              </a:rPr>
-              <a:t>1s,UR</a:t>
-            </a:r>
-            <a:endParaRPr lang="zh-CN" altLang="en-US" sz="1600" i="1" baseline="-25000" dirty="0">
-              <a:solidFill>
-                <a:srgbClr val="0000CD"/>
-              </a:solidFill>
-              <a:latin typeface="Times New Roman" panose="02020603050405020304" pitchFamily="18" charset="0"/>
-              <a:cs typeface="Times New Roman" panose="02020603050405020304" pitchFamily="18" charset="0"/>
-            </a:endParaRPr>
-          </a:p>
-        </p:txBody>
-      </p:sp>
-      <p:sp>
-        <p:nvSpPr>
-          <p:cNvPr id="743" name="文本框 742">
-            <a:extLst>
-              <a:ext uri="{FF2B5EF4-FFF2-40B4-BE49-F238E27FC236}">
-                <a16:creationId xmlns:a16="http://schemas.microsoft.com/office/drawing/2014/main" id="{4A4AA55F-5428-4951-AFB7-460E89C61A98}"/>
-              </a:ext>
-            </a:extLst>
-          </p:cNvPr>
-          <p:cNvSpPr txBox="1"/>
-          <p:nvPr/>
-        </p:nvSpPr>
-        <p:spPr>
-          <a:xfrm>
-            <a:off x="10055830" y="2022927"/>
-            <a:ext cx="601447" cy="338554"/>
-          </a:xfrm>
-          <a:prstGeom prst="rect">
-            <a:avLst/>
-          </a:prstGeom>
-          <a:gradFill>
-            <a:gsLst>
-              <a:gs pos="44000">
-                <a:schemeClr val="bg1"/>
-              </a:gs>
-              <a:gs pos="70000">
-                <a:schemeClr val="bg1">
-                  <a:alpha val="0"/>
-                </a:schemeClr>
-              </a:gs>
-            </a:gsLst>
-            <a:path path="circle">
-              <a:fillToRect l="50000" t="50000" r="50000" b="50000"/>
-            </a:path>
-          </a:gradFill>
-        </p:spPr>
-        <p:txBody>
-          <a:bodyPr wrap="none" rtlCol="0">
-            <a:spAutoFit/>
-          </a:bodyPr>
-          <a:lstStyle/>
-          <a:p>
-            <a:r>
-              <a:rPr lang="el-GR" altLang="zh-CN" sz="1600" i="1" dirty="0">
-                <a:solidFill>
-                  <a:srgbClr val="0000CD"/>
-                </a:solidFill>
-                <a:latin typeface="Times New Roman" panose="02020603050405020304" pitchFamily="18" charset="0"/>
-                <a:ea typeface="等线" panose="02010600030101010101" pitchFamily="2" charset="-122"/>
-                <a:cs typeface="Times New Roman" panose="02020603050405020304" pitchFamily="18" charset="0"/>
-              </a:rPr>
-              <a:t>β</a:t>
-            </a:r>
-            <a:r>
-              <a:rPr lang="en-US" altLang="zh-CN" sz="1600" i="1" baseline="-25000" dirty="0">
-                <a:solidFill>
-                  <a:srgbClr val="0000CD"/>
-                </a:solidFill>
-                <a:latin typeface="Times New Roman" panose="02020603050405020304" pitchFamily="18" charset="0"/>
-                <a:ea typeface="等线" panose="02010600030101010101" pitchFamily="2" charset="-122"/>
-                <a:cs typeface="Times New Roman" panose="02020603050405020304" pitchFamily="18" charset="0"/>
-              </a:rPr>
-              <a:t>1s,LR</a:t>
-            </a:r>
-            <a:endParaRPr lang="zh-CN" altLang="en-US" sz="1600" i="1" baseline="-25000" dirty="0">
-              <a:solidFill>
-                <a:srgbClr val="0000CD"/>
-              </a:solidFill>
-              <a:latin typeface="Times New Roman" panose="02020603050405020304" pitchFamily="18" charset="0"/>
-              <a:cs typeface="Times New Roman" panose="02020603050405020304" pitchFamily="18" charset="0"/>
-            </a:endParaRPr>
-          </a:p>
-        </p:txBody>
-      </p:sp>
-      <p:sp>
-        <p:nvSpPr>
-          <p:cNvPr id="744" name="文本框 743">
-            <a:extLst>
-              <a:ext uri="{FF2B5EF4-FFF2-40B4-BE49-F238E27FC236}">
-                <a16:creationId xmlns:a16="http://schemas.microsoft.com/office/drawing/2014/main" id="{2BC70BC8-903A-BD01-023B-0547825CD8A6}"/>
-              </a:ext>
-            </a:extLst>
-          </p:cNvPr>
-          <p:cNvSpPr txBox="1"/>
-          <p:nvPr/>
-        </p:nvSpPr>
-        <p:spPr>
-          <a:xfrm>
-            <a:off x="9782678" y="5455894"/>
-            <a:ext cx="356188" cy="338554"/>
-          </a:xfrm>
-          <a:prstGeom prst="rect">
-            <a:avLst/>
-          </a:prstGeom>
-          <a:noFill/>
-        </p:spPr>
-        <p:txBody>
-          <a:bodyPr wrap="none" rtlCol="0">
-            <a:spAutoFit/>
-          </a:bodyPr>
-          <a:lstStyle/>
-          <a:p>
-            <a:r>
-              <a:rPr lang="en-US" altLang="zh-CN" sz="1600" i="1" dirty="0">
-                <a:solidFill>
                   <a:srgbClr val="DC143C"/>
                 </a:solidFill>
                 <a:latin typeface="Times New Roman" panose="02020603050405020304" pitchFamily="18" charset="0"/>
                 <a:cs typeface="Times New Roman" panose="02020603050405020304" pitchFamily="18" charset="0"/>
               </a:rPr>
-              <a:t>W</a:t>
+              <a:t>VT</a:t>
             </a:r>
             <a:endParaRPr lang="zh-CN" altLang="en-US" sz="1600" i="1" baseline="-25000" dirty="0">
               <a:solidFill>
@@ -20756,10 +19859,10 @@
       </p:sp>
       <p:sp>
         <p:nvSpPr>
-          <p:cNvPr id="745" name="文本框 744">
-            <a:extLst>
-              <a:ext uri="{FF2B5EF4-FFF2-40B4-BE49-F238E27FC236}">
-                <a16:creationId xmlns:a16="http://schemas.microsoft.com/office/drawing/2014/main" id="{C6BE3402-24E9-7236-D6D8-500C6579CD80}"/>
+          <p:cNvPr id="750" name="文本框 749">
+            <a:extLst>
+              <a:ext uri="{FF2B5EF4-FFF2-40B4-BE49-F238E27FC236}">
+                <a16:creationId xmlns:a16="http://schemas.microsoft.com/office/drawing/2014/main" id="{2864E7F6-D1E7-8631-D443-4B6B887CD189}"/>
               </a:ext>
             </a:extLst>
           </p:cNvPr>
@@ -20768,8 +19871,8 @@
         </p:nvSpPr>
         <p:spPr>
           <a:xfrm>
-            <a:off x="9773570" y="418770"/>
-            <a:ext cx="481222" cy="338554"/>
+            <a:off x="10306288" y="4251780"/>
+            <a:ext cx="381836" cy="338554"/>
           </a:xfrm>
           <a:prstGeom prst="rect">
             <a:avLst/>
@@ -20790,7 +19893,7 @@
                 <a:latin typeface="Times New Roman" panose="02020603050405020304" pitchFamily="18" charset="0"/>
                 <a:cs typeface="Times New Roman" panose="02020603050405020304" pitchFamily="18" charset="0"/>
               </a:rPr>
-              <a:t>T</a:t>
+              <a:t>Y</a:t>
             </a:r>
             <a:r>
               <a:rPr lang="en-US" altLang="zh-CN" sz="1600" i="1" baseline="-25000" dirty="0">
@@ -20800,383 +19903,7 @@
                 <a:latin typeface="Times New Roman" panose="02020603050405020304" pitchFamily="18" charset="0"/>
                 <a:cs typeface="Times New Roman" panose="02020603050405020304" pitchFamily="18" charset="0"/>
               </a:rPr>
-              <a:t>UR</a:t>
-            </a:r>
-            <a:endParaRPr lang="zh-CN" altLang="en-US" sz="1600" i="1" baseline="-25000" dirty="0">
-              <a:solidFill>
-                <a:srgbClr val="DC143C"/>
-              </a:solidFill>
-              <a:latin typeface="Times New Roman" panose="02020603050405020304" pitchFamily="18" charset="0"/>
-              <a:cs typeface="Times New Roman" panose="02020603050405020304" pitchFamily="18" charset="0"/>
-            </a:endParaRPr>
-          </a:p>
-        </p:txBody>
-      </p:sp>
-      <p:sp>
-        <p:nvSpPr>
-          <p:cNvPr id="746" name="文本框 745">
-            <a:extLst>
-              <a:ext uri="{FF2B5EF4-FFF2-40B4-BE49-F238E27FC236}">
-                <a16:creationId xmlns:a16="http://schemas.microsoft.com/office/drawing/2014/main" id="{0F92675F-F254-A4D0-212B-67359F7B649C}"/>
-              </a:ext>
-            </a:extLst>
-          </p:cNvPr>
-          <p:cNvSpPr txBox="1"/>
-          <p:nvPr/>
-        </p:nvSpPr>
-        <p:spPr>
-          <a:xfrm>
-            <a:off x="9658881" y="1001547"/>
-            <a:ext cx="457176" cy="338554"/>
-          </a:xfrm>
-          <a:prstGeom prst="rect">
-            <a:avLst/>
-          </a:prstGeom>
-          <a:noFill/>
-        </p:spPr>
-        <p:txBody>
-          <a:bodyPr wrap="none" rtlCol="0">
-            <a:spAutoFit/>
-          </a:bodyPr>
-          <a:lstStyle/>
-          <a:p>
-            <a:r>
-              <a:rPr lang="en-US" altLang="zh-CN" sz="1600" i="1" dirty="0">
-                <a:solidFill>
-                  <a:srgbClr val="DC143C"/>
-                </a:solidFill>
-                <a:latin typeface="Times New Roman" panose="02020603050405020304" pitchFamily="18" charset="0"/>
-                <a:cs typeface="Times New Roman" panose="02020603050405020304" pitchFamily="18" charset="0"/>
-              </a:rPr>
-              <a:t>T</a:t>
-            </a:r>
-            <a:r>
-              <a:rPr lang="en-US" altLang="zh-CN" sz="1600" i="1" baseline="-25000" dirty="0">
-                <a:solidFill>
-                  <a:srgbClr val="DC143C"/>
-                </a:solidFill>
-                <a:latin typeface="Times New Roman" panose="02020603050405020304" pitchFamily="18" charset="0"/>
-                <a:cs typeface="Times New Roman" panose="02020603050405020304" pitchFamily="18" charset="0"/>
-              </a:rPr>
-              <a:t>LR</a:t>
-            </a:r>
-            <a:endParaRPr lang="zh-CN" altLang="en-US" sz="1600" i="1" baseline="-25000" dirty="0">
-              <a:solidFill>
-                <a:srgbClr val="DC143C"/>
-              </a:solidFill>
-              <a:latin typeface="Times New Roman" panose="02020603050405020304" pitchFamily="18" charset="0"/>
-              <a:cs typeface="Times New Roman" panose="02020603050405020304" pitchFamily="18" charset="0"/>
-            </a:endParaRPr>
-          </a:p>
-        </p:txBody>
-      </p:sp>
-      <p:sp>
-        <p:nvSpPr>
-          <p:cNvPr id="747" name="文本框 746">
-            <a:extLst>
-              <a:ext uri="{FF2B5EF4-FFF2-40B4-BE49-F238E27FC236}">
-                <a16:creationId xmlns:a16="http://schemas.microsoft.com/office/drawing/2014/main" id="{9A53B4AF-9B29-93D8-B37B-B96B6DFE0487}"/>
-              </a:ext>
-            </a:extLst>
-          </p:cNvPr>
-          <p:cNvSpPr txBox="1"/>
-          <p:nvPr/>
-        </p:nvSpPr>
-        <p:spPr>
-          <a:xfrm>
-            <a:off x="10965982" y="2530473"/>
-            <a:ext cx="481222" cy="338554"/>
-          </a:xfrm>
-          <a:prstGeom prst="rect">
-            <a:avLst/>
-          </a:prstGeom>
-          <a:gradFill>
-            <a:gsLst>
-              <a:gs pos="23000">
-                <a:schemeClr val="bg1"/>
-              </a:gs>
-              <a:gs pos="55000">
-                <a:schemeClr val="bg1">
-                  <a:alpha val="0"/>
-                </a:schemeClr>
-              </a:gs>
-            </a:gsLst>
-            <a:path path="circle">
-              <a:fillToRect l="50000" t="50000" r="50000" b="50000"/>
-            </a:path>
-          </a:gradFill>
-        </p:spPr>
-        <p:txBody>
-          <a:bodyPr wrap="none" rtlCol="0">
-            <a:spAutoFit/>
-          </a:bodyPr>
-          <a:lstStyle/>
-          <a:p>
-            <a:r>
-              <a:rPr lang="en-US" altLang="zh-CN" sz="1600" i="1" dirty="0">
-                <a:solidFill>
-                  <a:srgbClr val="DC143C"/>
-                </a:solidFill>
-                <a:latin typeface="Times New Roman" panose="02020603050405020304" pitchFamily="18" charset="0"/>
-                <a:cs typeface="Times New Roman" panose="02020603050405020304" pitchFamily="18" charset="0"/>
-              </a:rPr>
-              <a:t>Y</a:t>
-            </a:r>
-            <a:r>
-              <a:rPr lang="en-US" altLang="zh-CN" sz="1600" i="1" baseline="-25000" dirty="0">
-                <a:solidFill>
-                  <a:srgbClr val="DC143C"/>
-                </a:solidFill>
-                <a:latin typeface="Times New Roman" panose="02020603050405020304" pitchFamily="18" charset="0"/>
-                <a:cs typeface="Times New Roman" panose="02020603050405020304" pitchFamily="18" charset="0"/>
-              </a:rPr>
-              <a:t>UR</a:t>
-            </a:r>
-            <a:endParaRPr lang="zh-CN" altLang="en-US" sz="1600" i="1" baseline="-25000" dirty="0">
-              <a:solidFill>
-                <a:srgbClr val="DC143C"/>
-              </a:solidFill>
-              <a:latin typeface="Times New Roman" panose="02020603050405020304" pitchFamily="18" charset="0"/>
-              <a:cs typeface="Times New Roman" panose="02020603050405020304" pitchFamily="18" charset="0"/>
-            </a:endParaRPr>
-          </a:p>
-        </p:txBody>
-      </p:sp>
-      <p:sp>
-        <p:nvSpPr>
-          <p:cNvPr id="748" name="文本框 747">
-            <a:extLst>
-              <a:ext uri="{FF2B5EF4-FFF2-40B4-BE49-F238E27FC236}">
-                <a16:creationId xmlns:a16="http://schemas.microsoft.com/office/drawing/2014/main" id="{111AA687-624F-620E-C99D-F8D54B78F662}"/>
-              </a:ext>
-            </a:extLst>
-          </p:cNvPr>
-          <p:cNvSpPr txBox="1"/>
-          <p:nvPr/>
-        </p:nvSpPr>
-        <p:spPr>
-          <a:xfrm>
-            <a:off x="10917387" y="3089347"/>
-            <a:ext cx="457176" cy="338554"/>
-          </a:xfrm>
-          <a:prstGeom prst="rect">
-            <a:avLst/>
-          </a:prstGeom>
-          <a:gradFill>
-            <a:gsLst>
-              <a:gs pos="39000">
-                <a:schemeClr val="bg1"/>
-              </a:gs>
-              <a:gs pos="76000">
-                <a:schemeClr val="bg1">
-                  <a:alpha val="0"/>
-                </a:schemeClr>
-              </a:gs>
-            </a:gsLst>
-            <a:path path="circle">
-              <a:fillToRect l="50000" t="50000" r="50000" b="50000"/>
-            </a:path>
-          </a:gradFill>
-        </p:spPr>
-        <p:txBody>
-          <a:bodyPr wrap="none" rtlCol="0">
-            <a:spAutoFit/>
-          </a:bodyPr>
-          <a:lstStyle/>
-          <a:p>
-            <a:r>
-              <a:rPr lang="en-US" altLang="zh-CN" sz="1600" i="1" dirty="0">
-                <a:solidFill>
-                  <a:srgbClr val="DC143C"/>
-                </a:solidFill>
-                <a:latin typeface="Times New Roman" panose="02020603050405020304" pitchFamily="18" charset="0"/>
-                <a:cs typeface="Times New Roman" panose="02020603050405020304" pitchFamily="18" charset="0"/>
-              </a:rPr>
-              <a:t>Y</a:t>
-            </a:r>
-            <a:r>
-              <a:rPr lang="en-US" altLang="zh-CN" sz="1600" i="1" baseline="-25000" dirty="0">
-                <a:solidFill>
-                  <a:srgbClr val="DC143C"/>
-                </a:solidFill>
-                <a:latin typeface="Times New Roman" panose="02020603050405020304" pitchFamily="18" charset="0"/>
-                <a:cs typeface="Times New Roman" panose="02020603050405020304" pitchFamily="18" charset="0"/>
-              </a:rPr>
-              <a:t>LR</a:t>
-            </a:r>
-            <a:endParaRPr lang="zh-CN" altLang="en-US" sz="1600" i="1" baseline="-25000" dirty="0">
-              <a:solidFill>
-                <a:srgbClr val="DC143C"/>
-              </a:solidFill>
-              <a:latin typeface="Times New Roman" panose="02020603050405020304" pitchFamily="18" charset="0"/>
-              <a:cs typeface="Times New Roman" panose="02020603050405020304" pitchFamily="18" charset="0"/>
-            </a:endParaRPr>
-          </a:p>
-        </p:txBody>
-      </p:sp>
-      <p:sp>
-        <p:nvSpPr>
-          <p:cNvPr id="749" name="文本框 748">
-            <a:extLst>
-              <a:ext uri="{FF2B5EF4-FFF2-40B4-BE49-F238E27FC236}">
-                <a16:creationId xmlns:a16="http://schemas.microsoft.com/office/drawing/2014/main" id="{FDFA0785-AA60-C97B-E868-DD5E0D7DEDC8}"/>
-              </a:ext>
-            </a:extLst>
-          </p:cNvPr>
-          <p:cNvSpPr txBox="1"/>
-          <p:nvPr/>
-        </p:nvSpPr>
-        <p:spPr>
-          <a:xfrm>
-            <a:off x="11244936" y="3821672"/>
-            <a:ext cx="449547" cy="338554"/>
-          </a:xfrm>
-          <a:prstGeom prst="rect">
-            <a:avLst/>
-          </a:prstGeom>
-          <a:noFill/>
-        </p:spPr>
-        <p:txBody>
-          <a:bodyPr wrap="none" rtlCol="0">
-            <a:spAutoFit/>
-          </a:bodyPr>
-          <a:lstStyle/>
-          <a:p>
-            <a:r>
-              <a:rPr lang="en-US" altLang="zh-CN" sz="1600" i="1" dirty="0">
-                <a:solidFill>
-                  <a:srgbClr val="DC143C"/>
-                </a:solidFill>
-                <a:latin typeface="Times New Roman" panose="02020603050405020304" pitchFamily="18" charset="0"/>
-                <a:cs typeface="Times New Roman" panose="02020603050405020304" pitchFamily="18" charset="0"/>
-              </a:rPr>
-              <a:t>L</a:t>
-            </a:r>
-            <a:r>
-              <a:rPr lang="en-US" altLang="zh-CN" sz="1600" i="1" baseline="-25000" dirty="0">
-                <a:solidFill>
-                  <a:srgbClr val="DC143C"/>
-                </a:solidFill>
-                <a:latin typeface="Times New Roman" panose="02020603050405020304" pitchFamily="18" charset="0"/>
-                <a:cs typeface="Times New Roman" panose="02020603050405020304" pitchFamily="18" charset="0"/>
-              </a:rPr>
-              <a:t>VT</a:t>
-            </a:r>
-            <a:endParaRPr lang="zh-CN" altLang="en-US" sz="1600" i="1" baseline="-25000" dirty="0">
-              <a:solidFill>
-                <a:srgbClr val="DC143C"/>
-              </a:solidFill>
-              <a:latin typeface="Times New Roman" panose="02020603050405020304" pitchFamily="18" charset="0"/>
-              <a:cs typeface="Times New Roman" panose="02020603050405020304" pitchFamily="18" charset="0"/>
-            </a:endParaRPr>
-          </a:p>
-        </p:txBody>
-      </p:sp>
-      <p:sp>
-        <p:nvSpPr>
-          <p:cNvPr id="750" name="文本框 749">
-            <a:extLst>
-              <a:ext uri="{FF2B5EF4-FFF2-40B4-BE49-F238E27FC236}">
-                <a16:creationId xmlns:a16="http://schemas.microsoft.com/office/drawing/2014/main" id="{2864E7F6-D1E7-8631-D443-4B6B887CD189}"/>
-              </a:ext>
-            </a:extLst>
-          </p:cNvPr>
-          <p:cNvSpPr txBox="1"/>
-          <p:nvPr/>
-        </p:nvSpPr>
-        <p:spPr>
-          <a:xfrm>
-            <a:off x="10306288" y="4251780"/>
-            <a:ext cx="381836" cy="338554"/>
-          </a:xfrm>
-          <a:prstGeom prst="rect">
-            <a:avLst/>
-          </a:prstGeom>
-          <a:noFill/>
-        </p:spPr>
-        <p:txBody>
-          <a:bodyPr wrap="none" rtlCol="0">
-            <a:spAutoFit/>
-          </a:bodyPr>
-          <a:lstStyle/>
-          <a:p>
-            <a:r>
-              <a:rPr lang="en-US" altLang="zh-CN" sz="1600" i="1" dirty="0">
-                <a:solidFill>
-                  <a:srgbClr val="DC143C"/>
-                </a:solidFill>
-                <a:latin typeface="Times New Roman" panose="02020603050405020304" pitchFamily="18" charset="0"/>
-                <a:cs typeface="Times New Roman" panose="02020603050405020304" pitchFamily="18" charset="0"/>
-              </a:rPr>
-              <a:t>Y</a:t>
-            </a:r>
-            <a:r>
-              <a:rPr lang="en-US" altLang="zh-CN" sz="1600" i="1" baseline="-25000" dirty="0">
-                <a:solidFill>
-                  <a:srgbClr val="DC143C"/>
-                </a:solidFill>
-                <a:latin typeface="Times New Roman" panose="02020603050405020304" pitchFamily="18" charset="0"/>
-                <a:cs typeface="Times New Roman" panose="02020603050405020304" pitchFamily="18" charset="0"/>
-              </a:rPr>
               <a:t>F</a:t>
-            </a:r>
-            <a:endParaRPr lang="zh-CN" altLang="en-US" sz="1600" i="1" baseline="-25000" dirty="0">
-              <a:solidFill>
-                <a:srgbClr val="DC143C"/>
-              </a:solidFill>
-              <a:latin typeface="Times New Roman" panose="02020603050405020304" pitchFamily="18" charset="0"/>
-              <a:cs typeface="Times New Roman" panose="02020603050405020304" pitchFamily="18" charset="0"/>
-            </a:endParaRPr>
-          </a:p>
-        </p:txBody>
-      </p:sp>
-      <p:sp>
-        <p:nvSpPr>
-          <p:cNvPr id="751" name="文本框 750">
-            <a:extLst>
-              <a:ext uri="{FF2B5EF4-FFF2-40B4-BE49-F238E27FC236}">
-                <a16:creationId xmlns:a16="http://schemas.microsoft.com/office/drawing/2014/main" id="{8681218D-9205-44F7-6506-CC2120DF707D}"/>
-              </a:ext>
-            </a:extLst>
-          </p:cNvPr>
-          <p:cNvSpPr txBox="1"/>
-          <p:nvPr/>
-        </p:nvSpPr>
-        <p:spPr>
-          <a:xfrm>
-            <a:off x="10031115" y="3825505"/>
-            <a:ext cx="500458" cy="338554"/>
-          </a:xfrm>
-          <a:prstGeom prst="rect">
-            <a:avLst/>
-          </a:prstGeom>
-          <a:noFill/>
-        </p:spPr>
-        <p:txBody>
-          <a:bodyPr wrap="none" rtlCol="0">
-            <a:spAutoFit/>
-          </a:bodyPr>
-          <a:lstStyle/>
-          <a:p>
-            <a:r>
-              <a:rPr lang="en-US" altLang="zh-CN" sz="1600" i="1" dirty="0" err="1">
-                <a:solidFill>
-                  <a:srgbClr val="DC143C"/>
-                </a:solidFill>
-                <a:latin typeface="Times New Roman" panose="02020603050405020304" pitchFamily="18" charset="0"/>
-                <a:cs typeface="Times New Roman" panose="02020603050405020304" pitchFamily="18" charset="0"/>
-              </a:rPr>
-              <a:t>M</a:t>
-            </a:r>
-            <a:r>
-              <a:rPr lang="en-US" altLang="zh-CN" sz="1600" i="1" baseline="-25000" dirty="0" err="1">
-                <a:solidFill>
-                  <a:srgbClr val="DC143C"/>
-                </a:solidFill>
-                <a:latin typeface="Times New Roman" panose="02020603050405020304" pitchFamily="18" charset="0"/>
-                <a:cs typeface="Times New Roman" panose="02020603050405020304" pitchFamily="18" charset="0"/>
-              </a:rPr>
-              <a:t>xF</a:t>
             </a:r>
             <a:endParaRPr lang="zh-CN" altLang="en-US" sz="1600" i="1" baseline="-25000" dirty="0">
               <a:solidFill>
@@ -21723,6 +20450,618 @@
                 <a:cs typeface="Times New Roman" panose="02020603050405020304" pitchFamily="18" charset="0"/>
               </a:rPr>
               <a:t>VT</a:t>
+            </a:r>
+            <a:endParaRPr lang="zh-CN" altLang="en-US" sz="1600" i="1" baseline="-25000" dirty="0">
+              <a:solidFill>
+                <a:srgbClr val="DC143C"/>
+              </a:solidFill>
+              <a:latin typeface="Times New Roman" panose="02020603050405020304" pitchFamily="18" charset="0"/>
+              <a:cs typeface="Times New Roman" panose="02020603050405020304" pitchFamily="18" charset="0"/>
+            </a:endParaRPr>
+          </a:p>
+        </p:txBody>
+      </p:sp>
+      <p:sp>
+        <p:nvSpPr>
+          <p:cNvPr id="8" name="文本框 7">
+            <a:extLst>
+              <a:ext uri="{FF2B5EF4-FFF2-40B4-BE49-F238E27FC236}">
+                <a16:creationId xmlns:a16="http://schemas.microsoft.com/office/drawing/2014/main" id="{C970256C-9125-E58F-41CB-BCB372A65021}"/>
+              </a:ext>
+            </a:extLst>
+          </p:cNvPr>
+          <p:cNvSpPr txBox="1"/>
+          <p:nvPr/>
+        </p:nvSpPr>
+        <p:spPr>
+          <a:xfrm>
+            <a:off x="2219762" y="2780008"/>
+            <a:ext cx="575799" cy="338554"/>
+          </a:xfrm>
+          <a:prstGeom prst="rect">
+            <a:avLst/>
+          </a:prstGeom>
+          <a:noFill/>
+        </p:spPr>
+        <p:txBody>
+          <a:bodyPr wrap="none" rtlCol="0">
+            <a:spAutoFit/>
+          </a:bodyPr>
+          <a:lstStyle/>
+          <a:p>
+            <a:r>
+              <a:rPr lang="en-US" altLang="zh-CN" sz="1600" i="1" dirty="0" err="1">
+                <a:solidFill>
+                  <a:srgbClr val="DC143C"/>
+                </a:solidFill>
+                <a:latin typeface="Times New Roman" panose="02020603050405020304" pitchFamily="18" charset="0"/>
+                <a:cs typeface="Times New Roman" panose="02020603050405020304" pitchFamily="18" charset="0"/>
+              </a:rPr>
+              <a:t>M</a:t>
+            </a:r>
+            <a:r>
+              <a:rPr lang="en-US" altLang="zh-CN" sz="1600" i="1" baseline="-25000" dirty="0" err="1">
+                <a:solidFill>
+                  <a:srgbClr val="DC143C"/>
+                </a:solidFill>
+                <a:latin typeface="Times New Roman" panose="02020603050405020304" pitchFamily="18" charset="0"/>
+                <a:cs typeface="Times New Roman" panose="02020603050405020304" pitchFamily="18" charset="0"/>
+              </a:rPr>
+              <a:t>y</a:t>
+            </a:r>
+            <a:r>
+              <a:rPr lang="en-US" altLang="zh-CN" sz="1600" i="1" baseline="-55000" dirty="0" err="1">
+                <a:solidFill>
+                  <a:srgbClr val="DC143C"/>
+                </a:solidFill>
+                <a:latin typeface="Times New Roman" panose="02020603050405020304" pitchFamily="18" charset="0"/>
+                <a:cs typeface="Times New Roman" panose="02020603050405020304" pitchFamily="18" charset="0"/>
+              </a:rPr>
+              <a:t>LR</a:t>
+            </a:r>
+            <a:endParaRPr lang="zh-CN" altLang="en-US" sz="1600" i="1" baseline="-25000" dirty="0">
+              <a:solidFill>
+                <a:srgbClr val="DC143C"/>
+              </a:solidFill>
+              <a:latin typeface="Times New Roman" panose="02020603050405020304" pitchFamily="18" charset="0"/>
+              <a:cs typeface="Times New Roman" panose="02020603050405020304" pitchFamily="18" charset="0"/>
+            </a:endParaRPr>
+          </a:p>
+        </p:txBody>
+      </p:sp>
+      <p:sp>
+        <p:nvSpPr>
+          <p:cNvPr id="10" name="文本框 9">
+            <a:extLst>
+              <a:ext uri="{FF2B5EF4-FFF2-40B4-BE49-F238E27FC236}">
+                <a16:creationId xmlns:a16="http://schemas.microsoft.com/office/drawing/2014/main" id="{E9A659B2-194D-0885-8AC2-353E66878043}"/>
+              </a:ext>
+            </a:extLst>
+          </p:cNvPr>
+          <p:cNvSpPr txBox="1"/>
+          <p:nvPr/>
+        </p:nvSpPr>
+        <p:spPr>
+          <a:xfrm>
+            <a:off x="1747489" y="4015185"/>
+            <a:ext cx="500458" cy="338554"/>
+          </a:xfrm>
+          <a:prstGeom prst="rect">
+            <a:avLst/>
+          </a:prstGeom>
+          <a:noFill/>
+          <a:ln>
+            <a:noFill/>
+          </a:ln>
+        </p:spPr>
+        <p:txBody>
+          <a:bodyPr wrap="none" rtlCol="0">
+            <a:spAutoFit/>
+          </a:bodyPr>
+          <a:lstStyle/>
+          <a:p>
+            <a:r>
+              <a:rPr lang="en-US" altLang="zh-CN" sz="1600" i="1" dirty="0" err="1">
+                <a:solidFill>
+                  <a:srgbClr val="DC143C"/>
+                </a:solidFill>
+                <a:latin typeface="Times New Roman" panose="02020603050405020304" pitchFamily="18" charset="0"/>
+                <a:cs typeface="Times New Roman" panose="02020603050405020304" pitchFamily="18" charset="0"/>
+              </a:rPr>
+              <a:t>M</a:t>
+            </a:r>
+            <a:r>
+              <a:rPr lang="en-US" altLang="zh-CN" sz="1600" i="1" baseline="-25000" dirty="0" err="1">
+                <a:solidFill>
+                  <a:srgbClr val="DC143C"/>
+                </a:solidFill>
+                <a:latin typeface="Times New Roman" panose="02020603050405020304" pitchFamily="18" charset="0"/>
+                <a:cs typeface="Times New Roman" panose="02020603050405020304" pitchFamily="18" charset="0"/>
+              </a:rPr>
+              <a:t>y</a:t>
+            </a:r>
+            <a:r>
+              <a:rPr lang="en-US" altLang="zh-CN" sz="1600" i="1" baseline="-55000" dirty="0" err="1">
+                <a:solidFill>
+                  <a:srgbClr val="DC143C"/>
+                </a:solidFill>
+                <a:latin typeface="Times New Roman" panose="02020603050405020304" pitchFamily="18" charset="0"/>
+                <a:cs typeface="Times New Roman" panose="02020603050405020304" pitchFamily="18" charset="0"/>
+              </a:rPr>
+              <a:t>F</a:t>
+            </a:r>
+            <a:endParaRPr lang="zh-CN" altLang="en-US" sz="1600" i="1" baseline="-25000" dirty="0">
+              <a:solidFill>
+                <a:srgbClr val="DC143C"/>
+              </a:solidFill>
+              <a:latin typeface="Times New Roman" panose="02020603050405020304" pitchFamily="18" charset="0"/>
+              <a:cs typeface="Times New Roman" panose="02020603050405020304" pitchFamily="18" charset="0"/>
+            </a:endParaRPr>
+          </a:p>
+        </p:txBody>
+      </p:sp>
+      <p:sp>
+        <p:nvSpPr>
+          <p:cNvPr id="11" name="文本框 10">
+            <a:extLst>
+              <a:ext uri="{FF2B5EF4-FFF2-40B4-BE49-F238E27FC236}">
+                <a16:creationId xmlns:a16="http://schemas.microsoft.com/office/drawing/2014/main" id="{748B245D-DDD1-D633-8299-57FFD78B75DB}"/>
+              </a:ext>
+            </a:extLst>
+          </p:cNvPr>
+          <p:cNvSpPr txBox="1"/>
+          <p:nvPr/>
+        </p:nvSpPr>
+        <p:spPr>
+          <a:xfrm>
+            <a:off x="2505583" y="1808190"/>
+            <a:ext cx="575799" cy="338554"/>
+          </a:xfrm>
+          <a:prstGeom prst="rect">
+            <a:avLst/>
+          </a:prstGeom>
+          <a:gradFill>
+            <a:gsLst>
+              <a:gs pos="27000">
+                <a:schemeClr val="bg1"/>
+              </a:gs>
+              <a:gs pos="43000">
+                <a:schemeClr val="bg1">
+                  <a:alpha val="0"/>
+                </a:schemeClr>
+              </a:gs>
+            </a:gsLst>
+            <a:path path="circle">
+              <a:fillToRect l="50000" t="50000" r="50000" b="50000"/>
+            </a:path>
+          </a:gradFill>
+        </p:spPr>
+        <p:txBody>
+          <a:bodyPr wrap="none" rtlCol="0">
+            <a:spAutoFit/>
+          </a:bodyPr>
+          <a:lstStyle/>
+          <a:p>
+            <a:r>
+              <a:rPr lang="el-GR" altLang="zh-CN" sz="1600" i="1" dirty="0">
+                <a:solidFill>
+                  <a:srgbClr val="0000CD"/>
+                </a:solidFill>
+                <a:latin typeface="Times New Roman" panose="02020603050405020304" pitchFamily="18" charset="0"/>
+                <a:ea typeface="等线" panose="02010600030101010101" pitchFamily="2" charset="-122"/>
+                <a:cs typeface="Times New Roman" panose="02020603050405020304" pitchFamily="18" charset="0"/>
+              </a:rPr>
+              <a:t>β</a:t>
+            </a:r>
+            <a:r>
+              <a:rPr lang="en-US" altLang="zh-CN" sz="1600" i="1" baseline="-25000" dirty="0">
+                <a:solidFill>
+                  <a:srgbClr val="0000CD"/>
+                </a:solidFill>
+                <a:latin typeface="Times New Roman" panose="02020603050405020304" pitchFamily="18" charset="0"/>
+                <a:ea typeface="等线" panose="02010600030101010101" pitchFamily="2" charset="-122"/>
+                <a:cs typeface="Times New Roman" panose="02020603050405020304" pitchFamily="18" charset="0"/>
+              </a:rPr>
+              <a:t>1c</a:t>
+            </a:r>
+            <a:r>
+              <a:rPr lang="en-US" altLang="zh-CN" sz="1600" i="1" baseline="-55000" dirty="0">
+                <a:solidFill>
+                  <a:srgbClr val="0000CD"/>
+                </a:solidFill>
+                <a:latin typeface="Times New Roman" panose="02020603050405020304" pitchFamily="18" charset="0"/>
+                <a:ea typeface="等线" panose="02010600030101010101" pitchFamily="2" charset="-122"/>
+                <a:cs typeface="Times New Roman" panose="02020603050405020304" pitchFamily="18" charset="0"/>
+              </a:rPr>
+              <a:t>LR</a:t>
+            </a:r>
+            <a:endParaRPr lang="zh-CN" altLang="en-US" sz="1600" i="1" baseline="-25000" dirty="0">
+              <a:solidFill>
+                <a:srgbClr val="0000CD"/>
+              </a:solidFill>
+              <a:latin typeface="Times New Roman" panose="02020603050405020304" pitchFamily="18" charset="0"/>
+              <a:cs typeface="Times New Roman" panose="02020603050405020304" pitchFamily="18" charset="0"/>
+            </a:endParaRPr>
+          </a:p>
+        </p:txBody>
+      </p:sp>
+      <p:sp>
+        <p:nvSpPr>
+          <p:cNvPr id="12" name="文本框 11">
+            <a:extLst>
+              <a:ext uri="{FF2B5EF4-FFF2-40B4-BE49-F238E27FC236}">
+                <a16:creationId xmlns:a16="http://schemas.microsoft.com/office/drawing/2014/main" id="{CBF57178-3723-EBDF-C047-205E47A5D9F4}"/>
+              </a:ext>
+            </a:extLst>
+          </p:cNvPr>
+          <p:cNvSpPr txBox="1"/>
+          <p:nvPr/>
+        </p:nvSpPr>
+        <p:spPr>
+          <a:xfrm>
+            <a:off x="10022405" y="2036783"/>
+            <a:ext cx="567784" cy="338554"/>
+          </a:xfrm>
+          <a:prstGeom prst="rect">
+            <a:avLst/>
+          </a:prstGeom>
+          <a:gradFill>
+            <a:gsLst>
+              <a:gs pos="27000">
+                <a:schemeClr val="bg1"/>
+              </a:gs>
+              <a:gs pos="43000">
+                <a:schemeClr val="bg1">
+                  <a:alpha val="0"/>
+                </a:schemeClr>
+              </a:gs>
+            </a:gsLst>
+            <a:path path="circle">
+              <a:fillToRect l="50000" t="50000" r="50000" b="50000"/>
+            </a:path>
+          </a:gradFill>
+        </p:spPr>
+        <p:txBody>
+          <a:bodyPr wrap="none" rtlCol="0">
+            <a:spAutoFit/>
+          </a:bodyPr>
+          <a:lstStyle/>
+          <a:p>
+            <a:r>
+              <a:rPr lang="el-GR" altLang="zh-CN" sz="1600" i="1" dirty="0">
+                <a:solidFill>
+                  <a:srgbClr val="0000CD"/>
+                </a:solidFill>
+                <a:latin typeface="Times New Roman" panose="02020603050405020304" pitchFamily="18" charset="0"/>
+                <a:ea typeface="等线" panose="02010600030101010101" pitchFamily="2" charset="-122"/>
+                <a:cs typeface="Times New Roman" panose="02020603050405020304" pitchFamily="18" charset="0"/>
+              </a:rPr>
+              <a:t>β</a:t>
+            </a:r>
+            <a:r>
+              <a:rPr lang="en-US" altLang="zh-CN" sz="1600" i="1" baseline="-25000" dirty="0">
+                <a:solidFill>
+                  <a:srgbClr val="0000CD"/>
+                </a:solidFill>
+                <a:latin typeface="Times New Roman" panose="02020603050405020304" pitchFamily="18" charset="0"/>
+                <a:ea typeface="等线" panose="02010600030101010101" pitchFamily="2" charset="-122"/>
+                <a:cs typeface="Times New Roman" panose="02020603050405020304" pitchFamily="18" charset="0"/>
+              </a:rPr>
+              <a:t>1s</a:t>
+            </a:r>
+            <a:r>
+              <a:rPr lang="en-US" altLang="zh-CN" sz="1600" i="1" baseline="-55000" dirty="0">
+                <a:solidFill>
+                  <a:srgbClr val="0000CD"/>
+                </a:solidFill>
+                <a:latin typeface="Times New Roman" panose="02020603050405020304" pitchFamily="18" charset="0"/>
+                <a:ea typeface="等线" panose="02010600030101010101" pitchFamily="2" charset="-122"/>
+                <a:cs typeface="Times New Roman" panose="02020603050405020304" pitchFamily="18" charset="0"/>
+              </a:rPr>
+              <a:t>LR</a:t>
+            </a:r>
+            <a:endParaRPr lang="zh-CN" altLang="en-US" sz="1600" i="1" baseline="-25000" dirty="0">
+              <a:solidFill>
+                <a:srgbClr val="0000CD"/>
+              </a:solidFill>
+              <a:latin typeface="Times New Roman" panose="02020603050405020304" pitchFamily="18" charset="0"/>
+              <a:cs typeface="Times New Roman" panose="02020603050405020304" pitchFamily="18" charset="0"/>
+            </a:endParaRPr>
+          </a:p>
+        </p:txBody>
+      </p:sp>
+      <p:sp>
+        <p:nvSpPr>
+          <p:cNvPr id="13" name="文本框 12">
+            <a:extLst>
+              <a:ext uri="{FF2B5EF4-FFF2-40B4-BE49-F238E27FC236}">
+                <a16:creationId xmlns:a16="http://schemas.microsoft.com/office/drawing/2014/main" id="{5B325EA7-5DA3-E802-BF27-A0F44547445F}"/>
+              </a:ext>
+            </a:extLst>
+          </p:cNvPr>
+          <p:cNvSpPr txBox="1"/>
+          <p:nvPr/>
+        </p:nvSpPr>
+        <p:spPr>
+          <a:xfrm>
+            <a:off x="10201202" y="994803"/>
+            <a:ext cx="591829" cy="338554"/>
+          </a:xfrm>
+          <a:prstGeom prst="rect">
+            <a:avLst/>
+          </a:prstGeom>
+          <a:gradFill>
+            <a:gsLst>
+              <a:gs pos="27000">
+                <a:schemeClr val="bg1"/>
+              </a:gs>
+              <a:gs pos="43000">
+                <a:schemeClr val="bg1">
+                  <a:alpha val="0"/>
+                </a:schemeClr>
+              </a:gs>
+            </a:gsLst>
+            <a:path path="circle">
+              <a:fillToRect l="50000" t="50000" r="50000" b="50000"/>
+            </a:path>
+          </a:gradFill>
+        </p:spPr>
+        <p:txBody>
+          <a:bodyPr wrap="none" rtlCol="0">
+            <a:spAutoFit/>
+          </a:bodyPr>
+          <a:lstStyle/>
+          <a:p>
+            <a:r>
+              <a:rPr lang="el-GR" altLang="zh-CN" sz="1600" i="1" dirty="0">
+                <a:solidFill>
+                  <a:srgbClr val="0000CD"/>
+                </a:solidFill>
+                <a:latin typeface="Times New Roman" panose="02020603050405020304" pitchFamily="18" charset="0"/>
+                <a:ea typeface="等线" panose="02010600030101010101" pitchFamily="2" charset="-122"/>
+                <a:cs typeface="Times New Roman" panose="02020603050405020304" pitchFamily="18" charset="0"/>
+              </a:rPr>
+              <a:t>β</a:t>
+            </a:r>
+            <a:r>
+              <a:rPr lang="en-US" altLang="zh-CN" sz="1600" i="1" baseline="-25000" dirty="0">
+                <a:solidFill>
+                  <a:srgbClr val="0000CD"/>
+                </a:solidFill>
+                <a:latin typeface="Times New Roman" panose="02020603050405020304" pitchFamily="18" charset="0"/>
+                <a:ea typeface="等线" panose="02010600030101010101" pitchFamily="2" charset="-122"/>
+                <a:cs typeface="Times New Roman" panose="02020603050405020304" pitchFamily="18" charset="0"/>
+              </a:rPr>
+              <a:t>1s</a:t>
+            </a:r>
+            <a:r>
+              <a:rPr lang="en-US" altLang="zh-CN" sz="1600" i="1" baseline="-55000" dirty="0">
+                <a:solidFill>
+                  <a:srgbClr val="0000CD"/>
+                </a:solidFill>
+                <a:latin typeface="Times New Roman" panose="02020603050405020304" pitchFamily="18" charset="0"/>
+                <a:ea typeface="等线" panose="02010600030101010101" pitchFamily="2" charset="-122"/>
+                <a:cs typeface="Times New Roman" panose="02020603050405020304" pitchFamily="18" charset="0"/>
+              </a:rPr>
+              <a:t>UR</a:t>
+            </a:r>
+            <a:endParaRPr lang="zh-CN" altLang="en-US" sz="1600" i="1" baseline="-25000" dirty="0">
+              <a:solidFill>
+                <a:srgbClr val="0000CD"/>
+              </a:solidFill>
+              <a:latin typeface="Times New Roman" panose="02020603050405020304" pitchFamily="18" charset="0"/>
+              <a:cs typeface="Times New Roman" panose="02020603050405020304" pitchFamily="18" charset="0"/>
+            </a:endParaRPr>
+          </a:p>
+        </p:txBody>
+      </p:sp>
+      <p:sp>
+        <p:nvSpPr>
+          <p:cNvPr id="14" name="文本框 13">
+            <a:extLst>
+              <a:ext uri="{FF2B5EF4-FFF2-40B4-BE49-F238E27FC236}">
+                <a16:creationId xmlns:a16="http://schemas.microsoft.com/office/drawing/2014/main" id="{38B81D18-C49E-DC29-B75A-57ED2C559C17}"/>
+              </a:ext>
+            </a:extLst>
+          </p:cNvPr>
+          <p:cNvSpPr txBox="1"/>
+          <p:nvPr/>
+        </p:nvSpPr>
+        <p:spPr>
+          <a:xfrm>
+            <a:off x="9431504" y="2295425"/>
+            <a:ext cx="599844" cy="338554"/>
+          </a:xfrm>
+          <a:prstGeom prst="rect">
+            <a:avLst/>
+          </a:prstGeom>
+          <a:gradFill>
+            <a:gsLst>
+              <a:gs pos="39000">
+                <a:schemeClr val="bg1"/>
+              </a:gs>
+              <a:gs pos="76000">
+                <a:schemeClr val="bg1">
+                  <a:alpha val="0"/>
+                </a:schemeClr>
+              </a:gs>
+            </a:gsLst>
+            <a:path path="circle">
+              <a:fillToRect l="50000" t="50000" r="50000" b="50000"/>
+            </a:path>
+          </a:gradFill>
+        </p:spPr>
+        <p:txBody>
+          <a:bodyPr wrap="none" rtlCol="0">
+            <a:spAutoFit/>
+          </a:bodyPr>
+          <a:lstStyle/>
+          <a:p>
+            <a:r>
+              <a:rPr lang="en-US" altLang="zh-CN" sz="1600" i="1" dirty="0" err="1">
+                <a:solidFill>
+                  <a:srgbClr val="DC143C"/>
+                </a:solidFill>
+                <a:latin typeface="Times New Roman" panose="02020603050405020304" pitchFamily="18" charset="0"/>
+                <a:cs typeface="Times New Roman" panose="02020603050405020304" pitchFamily="18" charset="0"/>
+              </a:rPr>
+              <a:t>M</a:t>
+            </a:r>
+            <a:r>
+              <a:rPr lang="en-US" altLang="zh-CN" sz="1600" i="1" baseline="-25000" dirty="0" err="1">
+                <a:solidFill>
+                  <a:srgbClr val="DC143C"/>
+                </a:solidFill>
+                <a:latin typeface="Times New Roman" panose="02020603050405020304" pitchFamily="18" charset="0"/>
+                <a:cs typeface="Times New Roman" panose="02020603050405020304" pitchFamily="18" charset="0"/>
+              </a:rPr>
+              <a:t>x</a:t>
+            </a:r>
+            <a:r>
+              <a:rPr lang="en-US" altLang="zh-CN" sz="1600" i="1" baseline="-55000" dirty="0" err="1">
+                <a:solidFill>
+                  <a:srgbClr val="DC143C"/>
+                </a:solidFill>
+                <a:latin typeface="Times New Roman" panose="02020603050405020304" pitchFamily="18" charset="0"/>
+                <a:cs typeface="Times New Roman" panose="02020603050405020304" pitchFamily="18" charset="0"/>
+              </a:rPr>
+              <a:t>UR</a:t>
+            </a:r>
+            <a:endParaRPr lang="zh-CN" altLang="en-US" sz="1600" i="1" baseline="-25000" dirty="0">
+              <a:solidFill>
+                <a:srgbClr val="DC143C"/>
+              </a:solidFill>
+              <a:latin typeface="Times New Roman" panose="02020603050405020304" pitchFamily="18" charset="0"/>
+              <a:cs typeface="Times New Roman" panose="02020603050405020304" pitchFamily="18" charset="0"/>
+            </a:endParaRPr>
+          </a:p>
+        </p:txBody>
+      </p:sp>
+      <p:sp>
+        <p:nvSpPr>
+          <p:cNvPr id="15" name="文本框 14">
+            <a:extLst>
+              <a:ext uri="{FF2B5EF4-FFF2-40B4-BE49-F238E27FC236}">
+                <a16:creationId xmlns:a16="http://schemas.microsoft.com/office/drawing/2014/main" id="{DAA01678-E4F6-05B3-F922-3A08CD642EB5}"/>
+              </a:ext>
+            </a:extLst>
+          </p:cNvPr>
+          <p:cNvSpPr txBox="1"/>
+          <p:nvPr/>
+        </p:nvSpPr>
+        <p:spPr>
+          <a:xfrm>
+            <a:off x="9339087" y="2772838"/>
+            <a:ext cx="575799" cy="338554"/>
+          </a:xfrm>
+          <a:prstGeom prst="rect">
+            <a:avLst/>
+          </a:prstGeom>
+          <a:noFill/>
+        </p:spPr>
+        <p:txBody>
+          <a:bodyPr wrap="none" rtlCol="0">
+            <a:spAutoFit/>
+          </a:bodyPr>
+          <a:lstStyle/>
+          <a:p>
+            <a:r>
+              <a:rPr lang="en-US" altLang="zh-CN" sz="1600" i="1" dirty="0" err="1">
+                <a:solidFill>
+                  <a:srgbClr val="DC143C"/>
+                </a:solidFill>
+                <a:latin typeface="Times New Roman" panose="02020603050405020304" pitchFamily="18" charset="0"/>
+                <a:cs typeface="Times New Roman" panose="02020603050405020304" pitchFamily="18" charset="0"/>
+              </a:rPr>
+              <a:t>M</a:t>
+            </a:r>
+            <a:r>
+              <a:rPr lang="en-US" altLang="zh-CN" sz="1600" i="1" baseline="-25000" dirty="0" err="1">
+                <a:solidFill>
+                  <a:srgbClr val="DC143C"/>
+                </a:solidFill>
+                <a:latin typeface="Times New Roman" panose="02020603050405020304" pitchFamily="18" charset="0"/>
+                <a:cs typeface="Times New Roman" panose="02020603050405020304" pitchFamily="18" charset="0"/>
+              </a:rPr>
+              <a:t>x</a:t>
+            </a:r>
+            <a:r>
+              <a:rPr lang="en-US" altLang="zh-CN" sz="1600" i="1" baseline="-55000" dirty="0" err="1">
+                <a:solidFill>
+                  <a:srgbClr val="DC143C"/>
+                </a:solidFill>
+                <a:latin typeface="Times New Roman" panose="02020603050405020304" pitchFamily="18" charset="0"/>
+                <a:cs typeface="Times New Roman" panose="02020603050405020304" pitchFamily="18" charset="0"/>
+              </a:rPr>
+              <a:t>LR</a:t>
+            </a:r>
+            <a:endParaRPr lang="zh-CN" altLang="en-US" sz="1600" i="1" baseline="-25000" dirty="0">
+              <a:solidFill>
+                <a:srgbClr val="DC143C"/>
+              </a:solidFill>
+              <a:latin typeface="Times New Roman" panose="02020603050405020304" pitchFamily="18" charset="0"/>
+              <a:cs typeface="Times New Roman" panose="02020603050405020304" pitchFamily="18" charset="0"/>
+            </a:endParaRPr>
+          </a:p>
+        </p:txBody>
+      </p:sp>
+      <p:sp>
+        <p:nvSpPr>
+          <p:cNvPr id="16" name="文本框 15">
+            <a:extLst>
+              <a:ext uri="{FF2B5EF4-FFF2-40B4-BE49-F238E27FC236}">
+                <a16:creationId xmlns:a16="http://schemas.microsoft.com/office/drawing/2014/main" id="{145E91E2-0567-B454-6E6B-0DC473E2A4D0}"/>
+              </a:ext>
+            </a:extLst>
+          </p:cNvPr>
+          <p:cNvSpPr txBox="1"/>
+          <p:nvPr/>
+        </p:nvSpPr>
+        <p:spPr>
+          <a:xfrm>
+            <a:off x="10037442" y="3857956"/>
+            <a:ext cx="500458" cy="338554"/>
+          </a:xfrm>
+          <a:prstGeom prst="rect">
+            <a:avLst/>
+          </a:prstGeom>
+          <a:noFill/>
+        </p:spPr>
+        <p:txBody>
+          <a:bodyPr wrap="none" rtlCol="0">
+            <a:spAutoFit/>
+          </a:bodyPr>
+          <a:lstStyle/>
+          <a:p>
+            <a:r>
+              <a:rPr lang="en-US" altLang="zh-CN" sz="1600" i="1" dirty="0" err="1">
+                <a:solidFill>
+                  <a:srgbClr val="DC143C"/>
+                </a:solidFill>
+                <a:latin typeface="Times New Roman" panose="02020603050405020304" pitchFamily="18" charset="0"/>
+                <a:cs typeface="Times New Roman" panose="02020603050405020304" pitchFamily="18" charset="0"/>
+              </a:rPr>
+              <a:t>M</a:t>
+            </a:r>
+            <a:r>
+              <a:rPr lang="en-US" altLang="zh-CN" sz="1600" i="1" baseline="-25000" dirty="0" err="1">
+                <a:solidFill>
+                  <a:srgbClr val="DC143C"/>
+                </a:solidFill>
+                <a:latin typeface="Times New Roman" panose="02020603050405020304" pitchFamily="18" charset="0"/>
+                <a:cs typeface="Times New Roman" panose="02020603050405020304" pitchFamily="18" charset="0"/>
+              </a:rPr>
+              <a:t>x</a:t>
+            </a:r>
+            <a:r>
+              <a:rPr lang="en-US" altLang="zh-CN" sz="1600" i="1" baseline="-55000" dirty="0" err="1">
+                <a:solidFill>
+                  <a:srgbClr val="DC143C"/>
+                </a:solidFill>
+                <a:latin typeface="Times New Roman" panose="02020603050405020304" pitchFamily="18" charset="0"/>
+                <a:cs typeface="Times New Roman" panose="02020603050405020304" pitchFamily="18" charset="0"/>
+              </a:rPr>
+              <a:t>F</a:t>
             </a:r>
             <a:endParaRPr lang="zh-CN" altLang="en-US" sz="1600" i="1" baseline="-25000" dirty="0">
               <a:solidFill>
@@ -24593,7 +23932,11 @@
           <a:bodyPr rtlCol="0" anchor="ctr"/>
           <a:lstStyle/>
           <a:p>
-            <a:pPr algn="ctr"/>
+            <a:pPr algn="ctr">
+              <a:lnSpc>
+                <a:spcPct val="90000"/>
+              </a:lnSpc>
+            </a:pPr>
             <a:r>
               <a:rPr lang="en-US" altLang="zh-CN" sz="1400" dirty="0">
                 <a:solidFill>
@@ -24664,7 +24007,18 @@
                 <a:ea typeface="等线" panose="02010600030101010101" pitchFamily="2" charset="-122"/>
                 <a:cs typeface="Times New Roman" panose="02020603050405020304" pitchFamily="18" charset="0"/>
               </a:rPr>
-              <a:t>0,UR</a:t>
+              <a:t>0</a:t>
+            </a:r>
+            <a:r>
+              <a:rPr lang="en-US" altLang="zh-CN" sz="1600" i="1" baseline="-55000" dirty="0">
+                <a:solidFill>
+                  <a:schemeClr val="tx1"/>
+                </a:solidFill>
+                <a:latin typeface="Times New Roman" panose="02020603050405020304" pitchFamily="18" charset="0"/>
+                <a:ea typeface="等线" panose="02010600030101010101" pitchFamily="2" charset="-122"/>
+                <a:cs typeface="Times New Roman" panose="02020603050405020304" pitchFamily="18" charset="0"/>
+              </a:rPr>
+              <a:t>UR</a:t>
             </a:r>
             <a:r>
               <a:rPr lang="en-US" altLang="zh-CN" sz="1600" dirty="0">
@@ -24697,7 +24051,18 @@
                 <a:ea typeface="等线" panose="02010600030101010101" pitchFamily="2" charset="-122"/>
                 <a:cs typeface="Times New Roman" panose="02020603050405020304" pitchFamily="18" charset="0"/>
               </a:rPr>
-              <a:t>0,LR</a:t>
+              <a:t>0</a:t>
+            </a:r>
+            <a:r>
+              <a:rPr lang="en-US" altLang="zh-CN" sz="1600" i="1" baseline="-55000" dirty="0">
+                <a:solidFill>
+                  <a:schemeClr val="tx1"/>
+                </a:solidFill>
+                <a:latin typeface="Times New Roman" panose="02020603050405020304" pitchFamily="18" charset="0"/>
+                <a:ea typeface="等线" panose="02010600030101010101" pitchFamily="2" charset="-122"/>
+                <a:cs typeface="Times New Roman" panose="02020603050405020304" pitchFamily="18" charset="0"/>
+              </a:rPr>
+              <a:t>LR</a:t>
             </a:r>
             <a:r>
               <a:rPr lang="en-US" altLang="zh-CN" sz="1600" dirty="0">
@@ -25123,7 +24488,7 @@
             <a:p>
               <a:pPr algn="ctr">
                 <a:lnSpc>
-                  <a:spcPct val="85000"/>
+                  <a:spcPct val="80000"/>
                 </a:lnSpc>
               </a:pPr>
               <a:r>
@@ -25177,7 +24542,7 @@
             <a:p>
               <a:pPr algn="ctr">
                 <a:lnSpc>
-                  <a:spcPct val="85000"/>
+                  <a:spcPct val="80000"/>
                 </a:lnSpc>
               </a:pPr>
               <a:r>
@@ -25210,7 +24575,18 @@
                   <a:ea typeface="等线" panose="02010600030101010101" pitchFamily="2" charset="-122"/>
                   <a:cs typeface="Times New Roman" panose="02020603050405020304" pitchFamily="18" charset="0"/>
                 </a:rPr>
-                <a:t>0,UR</a:t>
+                <a:t>0</a:t>
+              </a:r>
+              <a:r>
+                <a:rPr lang="en-US" altLang="zh-CN" sz="1600" i="1" baseline="-55000" dirty="0">
+                  <a:solidFill>
+                    <a:schemeClr val="tx1"/>
+                  </a:solidFill>
+                  <a:latin typeface="Times New Roman" panose="02020603050405020304" pitchFamily="18" charset="0"/>
+                  <a:ea typeface="等线" panose="02010600030101010101" pitchFamily="2" charset="-122"/>
+                  <a:cs typeface="Times New Roman" panose="02020603050405020304" pitchFamily="18" charset="0"/>
+                </a:rPr>
+                <a:t>UR</a:t>
               </a:r>
               <a:r>
                 <a:rPr lang="en-US" altLang="zh-CN" sz="1600" dirty="0">
@@ -25243,7 +24619,18 @@
                   <a:ea typeface="等线" panose="02010600030101010101" pitchFamily="2" charset="-122"/>
                   <a:cs typeface="Times New Roman" panose="02020603050405020304" pitchFamily="18" charset="0"/>
                 </a:rPr>
-                <a:t>0,LR</a:t>
+                <a:t>0</a:t>
+              </a:r>
+              <a:r>
+                <a:rPr lang="en-US" altLang="zh-CN" sz="1600" i="1" baseline="-55000" dirty="0">
+                  <a:solidFill>
+                    <a:schemeClr val="tx1"/>
+                  </a:solidFill>
+                  <a:latin typeface="Times New Roman" panose="02020603050405020304" pitchFamily="18" charset="0"/>
+                  <a:ea typeface="等线" panose="02010600030101010101" pitchFamily="2" charset="-122"/>
+                  <a:cs typeface="Times New Roman" panose="02020603050405020304" pitchFamily="18" charset="0"/>
+                </a:rPr>
+                <a:t>LR</a:t>
               </a:r>
               <a:r>
                 <a:rPr lang="en-US" altLang="zh-CN" sz="1600" dirty="0">
@@ -25276,7 +24663,18 @@
                   <a:ea typeface="等线" panose="02010600030101010101" pitchFamily="2" charset="-122"/>
                   <a:cs typeface="Times New Roman" panose="02020603050405020304" pitchFamily="18" charset="0"/>
                 </a:rPr>
-                <a:t>1c,UR</a:t>
+                <a:t>1c</a:t>
+              </a:r>
+              <a:r>
+                <a:rPr lang="en-US" altLang="zh-CN" sz="1600" i="1" baseline="-55000" dirty="0">
+                  <a:solidFill>
+                    <a:schemeClr val="tx1"/>
+                  </a:solidFill>
+                  <a:latin typeface="Times New Roman" panose="02020603050405020304" pitchFamily="18" charset="0"/>
+                  <a:ea typeface="等线" panose="02010600030101010101" pitchFamily="2" charset="-122"/>
+                  <a:cs typeface="Times New Roman" panose="02020603050405020304" pitchFamily="18" charset="0"/>
+                </a:rPr>
+                <a:t>UR</a:t>
               </a:r>
               <a:r>
                 <a:rPr lang="en-US" altLang="zh-CN" sz="1600" dirty="0">
@@ -25309,7 +24707,18 @@
                   <a:ea typeface="等线" panose="02010600030101010101" pitchFamily="2" charset="-122"/>
                   <a:cs typeface="Times New Roman" panose="02020603050405020304" pitchFamily="18" charset="0"/>
                 </a:rPr>
-                <a:t>1s,UR</a:t>
+                <a:t>1s</a:t>
+              </a:r>
+              <a:r>
+                <a:rPr lang="en-US" altLang="zh-CN" sz="1600" i="1" baseline="-55000" dirty="0">
+                  <a:solidFill>
+                    <a:schemeClr val="tx1"/>
+                  </a:solidFill>
+                  <a:latin typeface="Times New Roman" panose="02020603050405020304" pitchFamily="18" charset="0"/>
+                  <a:ea typeface="等线" panose="02010600030101010101" pitchFamily="2" charset="-122"/>
+                  <a:cs typeface="Times New Roman" panose="02020603050405020304" pitchFamily="18" charset="0"/>
+                </a:rPr>
+                <a:t>UR</a:t>
               </a:r>
               <a:r>
                 <a:rPr lang="en-US" altLang="zh-CN" sz="1600" dirty="0">
@@ -25342,7 +24751,18 @@
                   <a:ea typeface="等线" panose="02010600030101010101" pitchFamily="2" charset="-122"/>
                   <a:cs typeface="Times New Roman" panose="02020603050405020304" pitchFamily="18" charset="0"/>
                 </a:rPr>
-                <a:t>1c,LR</a:t>
+                <a:t>1c</a:t>
+              </a:r>
+              <a:r>
+                <a:rPr lang="en-US" altLang="zh-CN" sz="1600" i="1" baseline="-55000" dirty="0">
+                  <a:solidFill>
+                    <a:schemeClr val="tx1"/>
+                  </a:solidFill>
+                  <a:latin typeface="Times New Roman" panose="02020603050405020304" pitchFamily="18" charset="0"/>
+                  <a:ea typeface="等线" panose="02010600030101010101" pitchFamily="2" charset="-122"/>
+                  <a:cs typeface="Times New Roman" panose="02020603050405020304" pitchFamily="18" charset="0"/>
+                </a:rPr>
+                <a:t>LR</a:t>
               </a:r>
               <a:r>
                 <a:rPr lang="en-US" altLang="zh-CN" sz="1600" dirty="0">
@@ -25375,7 +24795,18 @@
                   <a:ea typeface="等线" panose="02010600030101010101" pitchFamily="2" charset="-122"/>
                   <a:cs typeface="Times New Roman" panose="02020603050405020304" pitchFamily="18" charset="0"/>
                 </a:rPr>
-                <a:t>1s,LR</a:t>
+                <a:t>1s</a:t>
+              </a:r>
+              <a:r>
+                <a:rPr lang="en-US" altLang="zh-CN" sz="1600" i="1" baseline="-55000" dirty="0">
+                  <a:solidFill>
+                    <a:schemeClr val="tx1"/>
+                  </a:solidFill>
+                  <a:latin typeface="Times New Roman" panose="02020603050405020304" pitchFamily="18" charset="0"/>
+                  <a:ea typeface="等线" panose="02010600030101010101" pitchFamily="2" charset="-122"/>
+                  <a:cs typeface="Times New Roman" panose="02020603050405020304" pitchFamily="18" charset="0"/>
+                </a:rPr>
+                <a:t>LR</a:t>
               </a:r>
               <a:r>
                 <a:rPr lang="en-US" altLang="zh-CN" sz="1600" dirty="0">
@@ -25459,7 +24890,7 @@
             <a:p>
               <a:pPr algn="ctr">
                 <a:lnSpc>
-                  <a:spcPct val="85000"/>
+                  <a:spcPct val="80000"/>
                 </a:lnSpc>
               </a:pPr>
               <a:r>
@@ -25513,7 +24944,7 @@
             <a:p>
               <a:pPr algn="ctr">
                 <a:lnSpc>
-                  <a:spcPct val="85000"/>
+                  <a:spcPct val="80000"/>
                 </a:lnSpc>
               </a:pPr>
               <a:r>
@@ -25546,7 +24977,18 @@
                   <a:ea typeface="等线" panose="02010600030101010101" pitchFamily="2" charset="-122"/>
                   <a:cs typeface="Times New Roman" panose="02020603050405020304" pitchFamily="18" charset="0"/>
                 </a:rPr>
-                <a:t>0,UR</a:t>
+                <a:t>0</a:t>
+              </a:r>
+              <a:r>
+                <a:rPr lang="en-US" altLang="zh-CN" sz="1600" i="1" baseline="-55000" dirty="0">
+                  <a:solidFill>
+                    <a:schemeClr val="tx1"/>
+                  </a:solidFill>
+                  <a:latin typeface="Times New Roman" panose="02020603050405020304" pitchFamily="18" charset="0"/>
+                  <a:ea typeface="等线" panose="02010600030101010101" pitchFamily="2" charset="-122"/>
+                  <a:cs typeface="Times New Roman" panose="02020603050405020304" pitchFamily="18" charset="0"/>
+                </a:rPr>
+                <a:t>UR</a:t>
               </a:r>
               <a:r>
                 <a:rPr lang="en-US" altLang="zh-CN" sz="1600" dirty="0">
@@ -25579,7 +25021,18 @@
                   <a:ea typeface="等线" panose="02010600030101010101" pitchFamily="2" charset="-122"/>
                   <a:cs typeface="Times New Roman" panose="02020603050405020304" pitchFamily="18" charset="0"/>
                 </a:rPr>
-                <a:t>0,LR</a:t>
+                <a:t>0</a:t>
+              </a:r>
+              <a:r>
+                <a:rPr lang="en-US" altLang="zh-CN" sz="1600" i="1" baseline="-55000" dirty="0">
+                  <a:solidFill>
+                    <a:schemeClr val="tx1"/>
+                  </a:solidFill>
+                  <a:latin typeface="Times New Roman" panose="02020603050405020304" pitchFamily="18" charset="0"/>
+                  <a:ea typeface="等线" panose="02010600030101010101" pitchFamily="2" charset="-122"/>
+                  <a:cs typeface="Times New Roman" panose="02020603050405020304" pitchFamily="18" charset="0"/>
+                </a:rPr>
+                <a:t>LR</a:t>
               </a:r>
               <a:r>
                 <a:rPr lang="en-US" altLang="zh-CN" sz="1600" dirty="0">
@@ -25612,7 +25065,18 @@
                   <a:ea typeface="等线" panose="02010600030101010101" pitchFamily="2" charset="-122"/>
                   <a:cs typeface="Times New Roman" panose="02020603050405020304" pitchFamily="18" charset="0"/>
                 </a:rPr>
-                <a:t>1c,UR</a:t>
+                <a:t>1c</a:t>
+              </a:r>
+              <a:r>
+                <a:rPr lang="en-US" altLang="zh-CN" sz="1600" i="1" baseline="-55000" dirty="0">
+                  <a:solidFill>
+                    <a:schemeClr val="tx1"/>
+                  </a:solidFill>
+                  <a:latin typeface="Times New Roman" panose="02020603050405020304" pitchFamily="18" charset="0"/>
+                  <a:ea typeface="等线" panose="02010600030101010101" pitchFamily="2" charset="-122"/>
+                  <a:cs typeface="Times New Roman" panose="02020603050405020304" pitchFamily="18" charset="0"/>
+                </a:rPr>
+                <a:t>UR</a:t>
               </a:r>
               <a:r>
                 <a:rPr lang="en-US" altLang="zh-CN" sz="1600" dirty="0">
@@ -25645,7 +25109,18 @@
                   <a:ea typeface="等线" panose="02010600030101010101" pitchFamily="2" charset="-122"/>
                   <a:cs typeface="Times New Roman" panose="02020603050405020304" pitchFamily="18" charset="0"/>
                 </a:rPr>
-                <a:t>1s,UR</a:t>
+                <a:t>1s</a:t>
+              </a:r>
+              <a:r>
+                <a:rPr lang="en-US" altLang="zh-CN" sz="1600" i="1" baseline="-55000" dirty="0">
+                  <a:solidFill>
+                    <a:schemeClr val="tx1"/>
+                  </a:solidFill>
+                  <a:latin typeface="Times New Roman" panose="02020603050405020304" pitchFamily="18" charset="0"/>
+                  <a:ea typeface="等线" panose="02010600030101010101" pitchFamily="2" charset="-122"/>
+                  <a:cs typeface="Times New Roman" panose="02020603050405020304" pitchFamily="18" charset="0"/>
+                </a:rPr>
+                <a:t>UR</a:t>
               </a:r>
               <a:r>
                 <a:rPr lang="en-US" altLang="zh-CN" sz="1600" dirty="0">
@@ -25678,7 +25153,18 @@
                   <a:ea typeface="等线" panose="02010600030101010101" pitchFamily="2" charset="-122"/>
                   <a:cs typeface="Times New Roman" panose="02020603050405020304" pitchFamily="18" charset="0"/>
                 </a:rPr>
-                <a:t>1c,LR</a:t>
+                <a:t>1c</a:t>
+              </a:r>
+              <a:r>
+                <a:rPr lang="en-US" altLang="zh-CN" sz="1600" i="1" baseline="-55000" dirty="0">
+                  <a:solidFill>
+                    <a:schemeClr val="tx1"/>
+                  </a:solidFill>
+                  <a:latin typeface="Times New Roman" panose="02020603050405020304" pitchFamily="18" charset="0"/>
+                  <a:ea typeface="等线" panose="02010600030101010101" pitchFamily="2" charset="-122"/>
+                  <a:cs typeface="Times New Roman" panose="02020603050405020304" pitchFamily="18" charset="0"/>
+                </a:rPr>
+                <a:t>LR</a:t>
               </a:r>
               <a:r>
                 <a:rPr lang="en-US" altLang="zh-CN" sz="1600" dirty="0">
@@ -25711,7 +25197,18 @@
                   <a:ea typeface="等线" panose="02010600030101010101" pitchFamily="2" charset="-122"/>
                   <a:cs typeface="Times New Roman" panose="02020603050405020304" pitchFamily="18" charset="0"/>
                 </a:rPr>
-                <a:t>1s,LR</a:t>
+                <a:t>1s</a:t>
+              </a:r>
+              <a:r>
+                <a:rPr lang="en-US" altLang="zh-CN" sz="1600" i="1" baseline="-55000" dirty="0">
+                  <a:solidFill>
+                    <a:schemeClr val="tx1"/>
+                  </a:solidFill>
+                  <a:latin typeface="Times New Roman" panose="02020603050405020304" pitchFamily="18" charset="0"/>
+                  <a:ea typeface="等线" panose="02010600030101010101" pitchFamily="2" charset="-122"/>
+                  <a:cs typeface="Times New Roman" panose="02020603050405020304" pitchFamily="18" charset="0"/>
+                </a:rPr>
+                <a:t>LR</a:t>
               </a:r>
               <a:r>
                 <a:rPr lang="en-US" sz="1600" dirty="0">

--- a/HER05/01 - Mathematical Modeling/Sketch/Forces and Moments Sketch.pptx
+++ b/HER05/01 - Mathematical Modeling/Sketch/Forces and Moments Sketch.pptx
@@ -122,7 +122,7 @@
 <file path=ppt/revisionInfo.xml><?xml version="1.0" encoding="utf-8"?>
 <p1510:revInfo xmlns:a="http://schemas.openxmlformats.org/drawingml/2006/main" xmlns:r="http://schemas.openxmlformats.org/officeDocument/2006/relationships" xmlns:p1510="http://schemas.microsoft.com/office/powerpoint/2015/10/main">
   <p1510:revLst>
-    <p1510:client id="{CDC5B0EF-6BEB-4658-A9FF-CB66F6FA6C1E}" v="422" dt="2025-05-26T23:53:54.292"/>
+    <p1510:client id="{CDC5B0EF-6BEB-4658-A9FF-CB66F6FA6C1E}" v="427" dt="2025-05-30T23:12:18.535"/>
   </p1510:revLst>
 </p1510:revInfo>
 </file>
@@ -132,12 +132,12 @@
   <pc:docChgLst>
     <pc:chgData name="Li, Hanchen F" userId="3aee791e-6a2d-4da7-a77b-fbdf7bf15886" providerId="ADAL" clId="{CDC5B0EF-6BEB-4658-A9FF-CB66F6FA6C1E}"/>
     <pc:docChg chg="undo redo custSel addSld delSld modSld modMainMaster modNotesMaster">
-      <pc:chgData name="Li, Hanchen F" userId="3aee791e-6a2d-4da7-a77b-fbdf7bf15886" providerId="ADAL" clId="{CDC5B0EF-6BEB-4658-A9FF-CB66F6FA6C1E}" dt="2025-05-26T23:57:00.737" v="8871" actId="20577"/>
+      <pc:chgData name="Li, Hanchen F" userId="3aee791e-6a2d-4da7-a77b-fbdf7bf15886" providerId="ADAL" clId="{CDC5B0EF-6BEB-4658-A9FF-CB66F6FA6C1E}" dt="2025-05-30T23:13:44.554" v="9565" actId="207"/>
       <pc:docMkLst>
         <pc:docMk/>
       </pc:docMkLst>
       <pc:sldChg chg="addSp delSp modSp new mod">
-        <pc:chgData name="Li, Hanchen F" userId="3aee791e-6a2d-4da7-a77b-fbdf7bf15886" providerId="ADAL" clId="{CDC5B0EF-6BEB-4658-A9FF-CB66F6FA6C1E}" dt="2025-05-26T23:54:02.443" v="8826" actId="1076"/>
+        <pc:chgData name="Li, Hanchen F" userId="3aee791e-6a2d-4da7-a77b-fbdf7bf15886" providerId="ADAL" clId="{CDC5B0EF-6BEB-4658-A9FF-CB66F6FA6C1E}" dt="2025-05-30T23:13:44.554" v="9565" actId="207"/>
         <pc:sldMkLst>
           <pc:docMk/>
           <pc:sldMk cId="2152317508" sldId="256"/>
@@ -167,7 +167,7 @@
           </ac:spMkLst>
         </pc:spChg>
         <pc:spChg chg="add mod">
-          <ac:chgData name="Li, Hanchen F" userId="3aee791e-6a2d-4da7-a77b-fbdf7bf15886" providerId="ADAL" clId="{CDC5B0EF-6BEB-4658-A9FF-CB66F6FA6C1E}" dt="2025-05-23T14:36:17.401" v="6689" actId="1076"/>
+          <ac:chgData name="Li, Hanchen F" userId="3aee791e-6a2d-4da7-a77b-fbdf7bf15886" providerId="ADAL" clId="{CDC5B0EF-6BEB-4658-A9FF-CB66F6FA6C1E}" dt="2025-05-30T23:12:28.017" v="9277" actId="1076"/>
           <ac:spMkLst>
             <pc:docMk/>
             <pc:sldMk cId="2152317508" sldId="256"/>
@@ -215,7 +215,7 @@
           </ac:spMkLst>
         </pc:spChg>
         <pc:spChg chg="add mod">
-          <ac:chgData name="Li, Hanchen F" userId="3aee791e-6a2d-4da7-a77b-fbdf7bf15886" providerId="ADAL" clId="{CDC5B0EF-6BEB-4658-A9FF-CB66F6FA6C1E}" dt="2025-05-26T23:53:05.165" v="8803" actId="1076"/>
+          <ac:chgData name="Li, Hanchen F" userId="3aee791e-6a2d-4da7-a77b-fbdf7bf15886" providerId="ADAL" clId="{CDC5B0EF-6BEB-4658-A9FF-CB66F6FA6C1E}" dt="2025-05-30T23:13:44.554" v="9565" actId="207"/>
           <ac:spMkLst>
             <pc:docMk/>
             <pc:sldMk cId="2152317508" sldId="256"/>
@@ -246,8 +246,16 @@
             <ac:spMk id="16" creationId="{145E91E2-0567-B454-6E6B-0DC473E2A4D0}"/>
           </ac:spMkLst>
         </pc:spChg>
+        <pc:spChg chg="add mod">
+          <ac:chgData name="Li, Hanchen F" userId="3aee791e-6a2d-4da7-a77b-fbdf7bf15886" providerId="ADAL" clId="{CDC5B0EF-6BEB-4658-A9FF-CB66F6FA6C1E}" dt="2025-05-30T22:38:19.093" v="9043" actId="1076"/>
+          <ac:spMkLst>
+            <pc:docMk/>
+            <pc:sldMk cId="2152317508" sldId="256"/>
+            <ac:spMk id="17" creationId="{61D3D5D1-4304-8A52-B7F5-CDFD12DD61BD}"/>
+          </ac:spMkLst>
+        </pc:spChg>
         <pc:spChg chg="add mod topLvl">
-          <ac:chgData name="Li, Hanchen F" userId="3aee791e-6a2d-4da7-a77b-fbdf7bf15886" providerId="ADAL" clId="{CDC5B0EF-6BEB-4658-A9FF-CB66F6FA6C1E}" dt="2025-05-22T23:17:33.494" v="3248" actId="14826"/>
+          <ac:chgData name="Li, Hanchen F" userId="3aee791e-6a2d-4da7-a77b-fbdf7bf15886" providerId="ADAL" clId="{CDC5B0EF-6BEB-4658-A9FF-CB66F6FA6C1E}" dt="2025-05-30T22:35:23.784" v="8872" actId="14826"/>
           <ac:spMkLst>
             <pc:docMk/>
             <pc:sldMk cId="2152317508" sldId="256"/>
@@ -255,7 +263,7 @@
           </ac:spMkLst>
         </pc:spChg>
         <pc:spChg chg="add mod ord topLvl">
-          <ac:chgData name="Li, Hanchen F" userId="3aee791e-6a2d-4da7-a77b-fbdf7bf15886" providerId="ADAL" clId="{CDC5B0EF-6BEB-4658-A9FF-CB66F6FA6C1E}" dt="2025-05-22T23:17:33.494" v="3248" actId="14826"/>
+          <ac:chgData name="Li, Hanchen F" userId="3aee791e-6a2d-4da7-a77b-fbdf7bf15886" providerId="ADAL" clId="{CDC5B0EF-6BEB-4658-A9FF-CB66F6FA6C1E}" dt="2025-05-30T22:35:23.784" v="8872" actId="14826"/>
           <ac:spMkLst>
             <pc:docMk/>
             <pc:sldMk cId="2152317508" sldId="256"/>
@@ -263,7 +271,7 @@
           </ac:spMkLst>
         </pc:spChg>
         <pc:spChg chg="add mod ord topLvl">
-          <ac:chgData name="Li, Hanchen F" userId="3aee791e-6a2d-4da7-a77b-fbdf7bf15886" providerId="ADAL" clId="{CDC5B0EF-6BEB-4658-A9FF-CB66F6FA6C1E}" dt="2025-05-22T23:17:33.494" v="3248" actId="14826"/>
+          <ac:chgData name="Li, Hanchen F" userId="3aee791e-6a2d-4da7-a77b-fbdf7bf15886" providerId="ADAL" clId="{CDC5B0EF-6BEB-4658-A9FF-CB66F6FA6C1E}" dt="2025-05-30T22:35:23.784" v="8872" actId="14826"/>
           <ac:spMkLst>
             <pc:docMk/>
             <pc:sldMk cId="2152317508" sldId="256"/>
@@ -271,7 +279,7 @@
           </ac:spMkLst>
         </pc:spChg>
         <pc:spChg chg="add mod ord topLvl">
-          <ac:chgData name="Li, Hanchen F" userId="3aee791e-6a2d-4da7-a77b-fbdf7bf15886" providerId="ADAL" clId="{CDC5B0EF-6BEB-4658-A9FF-CB66F6FA6C1E}" dt="2025-05-22T23:17:33.494" v="3248" actId="14826"/>
+          <ac:chgData name="Li, Hanchen F" userId="3aee791e-6a2d-4da7-a77b-fbdf7bf15886" providerId="ADAL" clId="{CDC5B0EF-6BEB-4658-A9FF-CB66F6FA6C1E}" dt="2025-05-30T22:35:23.784" v="8872" actId="14826"/>
           <ac:spMkLst>
             <pc:docMk/>
             <pc:sldMk cId="2152317508" sldId="256"/>
@@ -279,7 +287,7 @@
           </ac:spMkLst>
         </pc:spChg>
         <pc:spChg chg="add mod ord topLvl">
-          <ac:chgData name="Li, Hanchen F" userId="3aee791e-6a2d-4da7-a77b-fbdf7bf15886" providerId="ADAL" clId="{CDC5B0EF-6BEB-4658-A9FF-CB66F6FA6C1E}" dt="2025-05-22T23:17:33.494" v="3248" actId="14826"/>
+          <ac:chgData name="Li, Hanchen F" userId="3aee791e-6a2d-4da7-a77b-fbdf7bf15886" providerId="ADAL" clId="{CDC5B0EF-6BEB-4658-A9FF-CB66F6FA6C1E}" dt="2025-05-30T22:35:23.784" v="8872" actId="14826"/>
           <ac:spMkLst>
             <pc:docMk/>
             <pc:sldMk cId="2152317508" sldId="256"/>
@@ -287,7 +295,7 @@
           </ac:spMkLst>
         </pc:spChg>
         <pc:spChg chg="add mod ord topLvl">
-          <ac:chgData name="Li, Hanchen F" userId="3aee791e-6a2d-4da7-a77b-fbdf7bf15886" providerId="ADAL" clId="{CDC5B0EF-6BEB-4658-A9FF-CB66F6FA6C1E}" dt="2025-05-22T23:17:33.494" v="3248" actId="14826"/>
+          <ac:chgData name="Li, Hanchen F" userId="3aee791e-6a2d-4da7-a77b-fbdf7bf15886" providerId="ADAL" clId="{CDC5B0EF-6BEB-4658-A9FF-CB66F6FA6C1E}" dt="2025-05-30T22:35:23.784" v="8872" actId="14826"/>
           <ac:spMkLst>
             <pc:docMk/>
             <pc:sldMk cId="2152317508" sldId="256"/>
@@ -295,7 +303,7 @@
           </ac:spMkLst>
         </pc:spChg>
         <pc:spChg chg="add mod ord topLvl">
-          <ac:chgData name="Li, Hanchen F" userId="3aee791e-6a2d-4da7-a77b-fbdf7bf15886" providerId="ADAL" clId="{CDC5B0EF-6BEB-4658-A9FF-CB66F6FA6C1E}" dt="2025-05-22T23:17:33.494" v="3248" actId="14826"/>
+          <ac:chgData name="Li, Hanchen F" userId="3aee791e-6a2d-4da7-a77b-fbdf7bf15886" providerId="ADAL" clId="{CDC5B0EF-6BEB-4658-A9FF-CB66F6FA6C1E}" dt="2025-05-30T22:35:23.784" v="8872" actId="14826"/>
           <ac:spMkLst>
             <pc:docMk/>
             <pc:sldMk cId="2152317508" sldId="256"/>
@@ -303,7 +311,7 @@
           </ac:spMkLst>
         </pc:spChg>
         <pc:spChg chg="add mod ord topLvl">
-          <ac:chgData name="Li, Hanchen F" userId="3aee791e-6a2d-4da7-a77b-fbdf7bf15886" providerId="ADAL" clId="{CDC5B0EF-6BEB-4658-A9FF-CB66F6FA6C1E}" dt="2025-05-22T23:18:22.360" v="3254" actId="14826"/>
+          <ac:chgData name="Li, Hanchen F" userId="3aee791e-6a2d-4da7-a77b-fbdf7bf15886" providerId="ADAL" clId="{CDC5B0EF-6BEB-4658-A9FF-CB66F6FA6C1E}" dt="2025-05-30T22:47:14.691" v="9166" actId="14826"/>
           <ac:spMkLst>
             <pc:docMk/>
             <pc:sldMk cId="2152317508" sldId="256"/>
@@ -311,7 +319,7 @@
           </ac:spMkLst>
         </pc:spChg>
         <pc:spChg chg="add mod ord topLvl">
-          <ac:chgData name="Li, Hanchen F" userId="3aee791e-6a2d-4da7-a77b-fbdf7bf15886" providerId="ADAL" clId="{CDC5B0EF-6BEB-4658-A9FF-CB66F6FA6C1E}" dt="2025-05-22T23:18:22.360" v="3254" actId="14826"/>
+          <ac:chgData name="Li, Hanchen F" userId="3aee791e-6a2d-4da7-a77b-fbdf7bf15886" providerId="ADAL" clId="{CDC5B0EF-6BEB-4658-A9FF-CB66F6FA6C1E}" dt="2025-05-30T22:47:14.691" v="9166" actId="14826"/>
           <ac:spMkLst>
             <pc:docMk/>
             <pc:sldMk cId="2152317508" sldId="256"/>
@@ -319,7 +327,7 @@
           </ac:spMkLst>
         </pc:spChg>
         <pc:spChg chg="add mod topLvl">
-          <ac:chgData name="Li, Hanchen F" userId="3aee791e-6a2d-4da7-a77b-fbdf7bf15886" providerId="ADAL" clId="{CDC5B0EF-6BEB-4658-A9FF-CB66F6FA6C1E}" dt="2025-05-22T23:18:22.360" v="3254" actId="14826"/>
+          <ac:chgData name="Li, Hanchen F" userId="3aee791e-6a2d-4da7-a77b-fbdf7bf15886" providerId="ADAL" clId="{CDC5B0EF-6BEB-4658-A9FF-CB66F6FA6C1E}" dt="2025-05-30T22:47:14.691" v="9166" actId="14826"/>
           <ac:spMkLst>
             <pc:docMk/>
             <pc:sldMk cId="2152317508" sldId="256"/>
@@ -327,7 +335,7 @@
           </ac:spMkLst>
         </pc:spChg>
         <pc:spChg chg="add mod ord topLvl">
-          <ac:chgData name="Li, Hanchen F" userId="3aee791e-6a2d-4da7-a77b-fbdf7bf15886" providerId="ADAL" clId="{CDC5B0EF-6BEB-4658-A9FF-CB66F6FA6C1E}" dt="2025-05-22T23:18:22.360" v="3254" actId="14826"/>
+          <ac:chgData name="Li, Hanchen F" userId="3aee791e-6a2d-4da7-a77b-fbdf7bf15886" providerId="ADAL" clId="{CDC5B0EF-6BEB-4658-A9FF-CB66F6FA6C1E}" dt="2025-05-30T22:47:14.691" v="9166" actId="14826"/>
           <ac:spMkLst>
             <pc:docMk/>
             <pc:sldMk cId="2152317508" sldId="256"/>
@@ -335,7 +343,7 @@
           </ac:spMkLst>
         </pc:spChg>
         <pc:spChg chg="add mod ord topLvl">
-          <ac:chgData name="Li, Hanchen F" userId="3aee791e-6a2d-4da7-a77b-fbdf7bf15886" providerId="ADAL" clId="{CDC5B0EF-6BEB-4658-A9FF-CB66F6FA6C1E}" dt="2025-05-22T23:18:22.360" v="3254" actId="14826"/>
+          <ac:chgData name="Li, Hanchen F" userId="3aee791e-6a2d-4da7-a77b-fbdf7bf15886" providerId="ADAL" clId="{CDC5B0EF-6BEB-4658-A9FF-CB66F6FA6C1E}" dt="2025-05-30T22:47:14.691" v="9166" actId="14826"/>
           <ac:spMkLst>
             <pc:docMk/>
             <pc:sldMk cId="2152317508" sldId="256"/>
@@ -343,7 +351,7 @@
           </ac:spMkLst>
         </pc:spChg>
         <pc:spChg chg="add mod ord topLvl">
-          <ac:chgData name="Li, Hanchen F" userId="3aee791e-6a2d-4da7-a77b-fbdf7bf15886" providerId="ADAL" clId="{CDC5B0EF-6BEB-4658-A9FF-CB66F6FA6C1E}" dt="2025-05-22T23:18:22.360" v="3254" actId="14826"/>
+          <ac:chgData name="Li, Hanchen F" userId="3aee791e-6a2d-4da7-a77b-fbdf7bf15886" providerId="ADAL" clId="{CDC5B0EF-6BEB-4658-A9FF-CB66F6FA6C1E}" dt="2025-05-30T22:47:14.691" v="9166" actId="14826"/>
           <ac:spMkLst>
             <pc:docMk/>
             <pc:sldMk cId="2152317508" sldId="256"/>
@@ -351,7 +359,7 @@
           </ac:spMkLst>
         </pc:spChg>
         <pc:spChg chg="add mod ord topLvl">
-          <ac:chgData name="Li, Hanchen F" userId="3aee791e-6a2d-4da7-a77b-fbdf7bf15886" providerId="ADAL" clId="{CDC5B0EF-6BEB-4658-A9FF-CB66F6FA6C1E}" dt="2025-05-22T23:18:22.360" v="3254" actId="14826"/>
+          <ac:chgData name="Li, Hanchen F" userId="3aee791e-6a2d-4da7-a77b-fbdf7bf15886" providerId="ADAL" clId="{CDC5B0EF-6BEB-4658-A9FF-CB66F6FA6C1E}" dt="2025-05-30T22:47:14.691" v="9166" actId="14826"/>
           <ac:spMkLst>
             <pc:docMk/>
             <pc:sldMk cId="2152317508" sldId="256"/>
@@ -878,28 +886,12 @@
             <ac:spMk id="669" creationId="{A123FB79-41B3-6095-12D2-8997AD6F70A2}"/>
           </ac:spMkLst>
         </pc:spChg>
-        <pc:spChg chg="add del mod">
-          <ac:chgData name="Li, Hanchen F" userId="3aee791e-6a2d-4da7-a77b-fbdf7bf15886" providerId="ADAL" clId="{CDC5B0EF-6BEB-4658-A9FF-CB66F6FA6C1E}" dt="2025-05-26T23:51:13.039" v="8761" actId="478"/>
-          <ac:spMkLst>
-            <pc:docMk/>
-            <pc:sldMk cId="2152317508" sldId="256"/>
-            <ac:spMk id="671" creationId="{48721D70-ADC2-65F2-CF96-A9148310688B}"/>
-          </ac:spMkLst>
-        </pc:spChg>
         <pc:spChg chg="add mod">
           <ac:chgData name="Li, Hanchen F" userId="3aee791e-6a2d-4da7-a77b-fbdf7bf15886" providerId="ADAL" clId="{CDC5B0EF-6BEB-4658-A9FF-CB66F6FA6C1E}" dt="2025-05-22T23:30:03.370" v="3495" actId="1076"/>
           <ac:spMkLst>
             <pc:docMk/>
             <pc:sldMk cId="2152317508" sldId="256"/>
             <ac:spMk id="672" creationId="{C94978E5-38D3-C72E-4BC7-EA21E8DEA92A}"/>
-          </ac:spMkLst>
-        </pc:spChg>
-        <pc:spChg chg="add del mod">
-          <ac:chgData name="Li, Hanchen F" userId="3aee791e-6a2d-4da7-a77b-fbdf7bf15886" providerId="ADAL" clId="{CDC5B0EF-6BEB-4658-A9FF-CB66F6FA6C1E}" dt="2025-05-26T23:50:53.609" v="8755" actId="478"/>
-          <ac:spMkLst>
-            <pc:docMk/>
-            <pc:sldMk cId="2152317508" sldId="256"/>
-            <ac:spMk id="673" creationId="{5A7B8730-BD7F-1D04-4A62-5FA63DD009A6}"/>
           </ac:spMkLst>
         </pc:spChg>
         <pc:spChg chg="add mod">
@@ -935,7 +927,7 @@
           </ac:spMkLst>
         </pc:spChg>
         <pc:spChg chg="add mod">
-          <ac:chgData name="Li, Hanchen F" userId="3aee791e-6a2d-4da7-a77b-fbdf7bf15886" providerId="ADAL" clId="{CDC5B0EF-6BEB-4658-A9FF-CB66F6FA6C1E}" dt="2025-05-22T23:34:04.617" v="3598" actId="1036"/>
+          <ac:chgData name="Li, Hanchen F" userId="3aee791e-6a2d-4da7-a77b-fbdf7bf15886" providerId="ADAL" clId="{CDC5B0EF-6BEB-4658-A9FF-CB66F6FA6C1E}" dt="2025-05-30T22:40:08.226" v="9065" actId="1076"/>
           <ac:spMkLst>
             <pc:docMk/>
             <pc:sldMk cId="2152317508" sldId="256"/>
@@ -943,7 +935,7 @@
           </ac:spMkLst>
         </pc:spChg>
         <pc:spChg chg="add mod">
-          <ac:chgData name="Li, Hanchen F" userId="3aee791e-6a2d-4da7-a77b-fbdf7bf15886" providerId="ADAL" clId="{CDC5B0EF-6BEB-4658-A9FF-CB66F6FA6C1E}" dt="2025-05-22T23:34:07.702" v="3601" actId="1035"/>
+          <ac:chgData name="Li, Hanchen F" userId="3aee791e-6a2d-4da7-a77b-fbdf7bf15886" providerId="ADAL" clId="{CDC5B0EF-6BEB-4658-A9FF-CB66F6FA6C1E}" dt="2025-05-30T22:40:11.499" v="9066" actId="1076"/>
           <ac:spMkLst>
             <pc:docMk/>
             <pc:sldMk cId="2152317508" sldId="256"/>
@@ -1006,8 +998,8 @@
             <ac:spMk id="691" creationId="{38987C34-3EF9-7FF9-A322-6AC7EAF3701F}"/>
           </ac:spMkLst>
         </pc:spChg>
-        <pc:spChg chg="add mod">
-          <ac:chgData name="Li, Hanchen F" userId="3aee791e-6a2d-4da7-a77b-fbdf7bf15886" providerId="ADAL" clId="{CDC5B0EF-6BEB-4658-A9FF-CB66F6FA6C1E}" dt="2025-05-22T23:39:38.538" v="3765" actId="1076"/>
+        <pc:spChg chg="add del mod">
+          <ac:chgData name="Li, Hanchen F" userId="3aee791e-6a2d-4da7-a77b-fbdf7bf15886" providerId="ADAL" clId="{CDC5B0EF-6BEB-4658-A9FF-CB66F6FA6C1E}" dt="2025-05-30T22:37:43.005" v="9028" actId="478"/>
           <ac:spMkLst>
             <pc:docMk/>
             <pc:sldMk cId="2152317508" sldId="256"/>
@@ -1015,15 +1007,15 @@
           </ac:spMkLst>
         </pc:spChg>
         <pc:spChg chg="add mod">
-          <ac:chgData name="Li, Hanchen F" userId="3aee791e-6a2d-4da7-a77b-fbdf7bf15886" providerId="ADAL" clId="{CDC5B0EF-6BEB-4658-A9FF-CB66F6FA6C1E}" dt="2025-05-22T23:39:52.981" v="3772" actId="1076"/>
+          <ac:chgData name="Li, Hanchen F" userId="3aee791e-6a2d-4da7-a77b-fbdf7bf15886" providerId="ADAL" clId="{CDC5B0EF-6BEB-4658-A9FF-CB66F6FA6C1E}" dt="2025-05-30T22:37:53.628" v="9033" actId="1076"/>
           <ac:spMkLst>
             <pc:docMk/>
             <pc:sldMk cId="2152317508" sldId="256"/>
             <ac:spMk id="694" creationId="{0B589E19-DFFC-1E39-CEEC-5F6428DEC4B7}"/>
           </ac:spMkLst>
         </pc:spChg>
-        <pc:spChg chg="add mod">
-          <ac:chgData name="Li, Hanchen F" userId="3aee791e-6a2d-4da7-a77b-fbdf7bf15886" providerId="ADAL" clId="{CDC5B0EF-6BEB-4658-A9FF-CB66F6FA6C1E}" dt="2025-05-22T23:46:06.214" v="4585" actId="207"/>
+        <pc:spChg chg="add mod ord">
+          <ac:chgData name="Li, Hanchen F" userId="3aee791e-6a2d-4da7-a77b-fbdf7bf15886" providerId="ADAL" clId="{CDC5B0EF-6BEB-4658-A9FF-CB66F6FA6C1E}" dt="2025-05-30T22:41:01.439" v="9077" actId="167"/>
           <ac:spMkLst>
             <pc:docMk/>
             <pc:sldMk cId="2152317508" sldId="256"/>
@@ -1031,7 +1023,7 @@
           </ac:spMkLst>
         </pc:spChg>
         <pc:spChg chg="add mod">
-          <ac:chgData name="Li, Hanchen F" userId="3aee791e-6a2d-4da7-a77b-fbdf7bf15886" providerId="ADAL" clId="{CDC5B0EF-6BEB-4658-A9FF-CB66F6FA6C1E}" dt="2025-05-22T23:46:08.041" v="4608" actId="207"/>
+          <ac:chgData name="Li, Hanchen F" userId="3aee791e-6a2d-4da7-a77b-fbdf7bf15886" providerId="ADAL" clId="{CDC5B0EF-6BEB-4658-A9FF-CB66F6FA6C1E}" dt="2025-05-30T22:45:51.745" v="9154" actId="1076"/>
           <ac:spMkLst>
             <pc:docMk/>
             <pc:sldMk cId="2152317508" sldId="256"/>
@@ -1071,7 +1063,7 @@
           </ac:spMkLst>
         </pc:spChg>
         <pc:spChg chg="add mod">
-          <ac:chgData name="Li, Hanchen F" userId="3aee791e-6a2d-4da7-a77b-fbdf7bf15886" providerId="ADAL" clId="{CDC5B0EF-6BEB-4658-A9FF-CB66F6FA6C1E}" dt="2025-05-22T23:42:42.066" v="3822" actId="1076"/>
+          <ac:chgData name="Li, Hanchen F" userId="3aee791e-6a2d-4da7-a77b-fbdf7bf15886" providerId="ADAL" clId="{CDC5B0EF-6BEB-4658-A9FF-CB66F6FA6C1E}" dt="2025-05-30T22:48:21.102" v="9171" actId="1076"/>
           <ac:spMkLst>
             <pc:docMk/>
             <pc:sldMk cId="2152317508" sldId="256"/>
@@ -1079,7 +1071,7 @@
           </ac:spMkLst>
         </pc:spChg>
         <pc:spChg chg="add mod">
-          <ac:chgData name="Li, Hanchen F" userId="3aee791e-6a2d-4da7-a77b-fbdf7bf15886" providerId="ADAL" clId="{CDC5B0EF-6BEB-4658-A9FF-CB66F6FA6C1E}" dt="2025-05-22T23:43:09.012" v="3836" actId="1076"/>
+          <ac:chgData name="Li, Hanchen F" userId="3aee791e-6a2d-4da7-a77b-fbdf7bf15886" providerId="ADAL" clId="{CDC5B0EF-6BEB-4658-A9FF-CB66F6FA6C1E}" dt="2025-05-30T22:48:14.408" v="9169" actId="1076"/>
           <ac:spMkLst>
             <pc:docMk/>
             <pc:sldMk cId="2152317508" sldId="256"/>
@@ -1087,7 +1079,7 @@
           </ac:spMkLst>
         </pc:spChg>
         <pc:spChg chg="add mod">
-          <ac:chgData name="Li, Hanchen F" userId="3aee791e-6a2d-4da7-a77b-fbdf7bf15886" providerId="ADAL" clId="{CDC5B0EF-6BEB-4658-A9FF-CB66F6FA6C1E}" dt="2025-05-24T00:53:08.040" v="8728" actId="1076"/>
+          <ac:chgData name="Li, Hanchen F" userId="3aee791e-6a2d-4da7-a77b-fbdf7bf15886" providerId="ADAL" clId="{CDC5B0EF-6BEB-4658-A9FF-CB66F6FA6C1E}" dt="2025-05-30T22:48:19.545" v="9170" actId="1076"/>
           <ac:spMkLst>
             <pc:docMk/>
             <pc:sldMk cId="2152317508" sldId="256"/>
@@ -1102,14 +1094,6 @@
             <ac:spMk id="736" creationId="{EE4076E9-DC44-CB9F-E117-46DA295CF84E}"/>
           </ac:spMkLst>
         </pc:spChg>
-        <pc:spChg chg="add del mod">
-          <ac:chgData name="Li, Hanchen F" userId="3aee791e-6a2d-4da7-a77b-fbdf7bf15886" providerId="ADAL" clId="{CDC5B0EF-6BEB-4658-A9FF-CB66F6FA6C1E}" dt="2025-05-26T23:52:14.060" v="8785" actId="478"/>
-          <ac:spMkLst>
-            <pc:docMk/>
-            <pc:sldMk cId="2152317508" sldId="256"/>
-            <ac:spMk id="737" creationId="{94D702E4-E09F-8517-606F-3C66E6865576}"/>
-          </ac:spMkLst>
-        </pc:spChg>
         <pc:spChg chg="add mod">
           <ac:chgData name="Li, Hanchen F" userId="3aee791e-6a2d-4da7-a77b-fbdf7bf15886" providerId="ADAL" clId="{CDC5B0EF-6BEB-4658-A9FF-CB66F6FA6C1E}" dt="2025-05-22T23:46:54.319" v="4873" actId="207"/>
           <ac:spMkLst>
@@ -1126,38 +1110,6 @@
             <ac:spMk id="739" creationId="{6D3DA571-6C18-4EFE-ED2A-063D2F002717}"/>
           </ac:spMkLst>
         </pc:spChg>
-        <pc:spChg chg="add del mod">
-          <ac:chgData name="Li, Hanchen F" userId="3aee791e-6a2d-4da7-a77b-fbdf7bf15886" providerId="ADAL" clId="{CDC5B0EF-6BEB-4658-A9FF-CB66F6FA6C1E}" dt="2025-05-26T23:53:32.499" v="8813" actId="478"/>
-          <ac:spMkLst>
-            <pc:docMk/>
-            <pc:sldMk cId="2152317508" sldId="256"/>
-            <ac:spMk id="740" creationId="{5C05FDFA-069A-1211-391D-6535C7B3AB3F}"/>
-          </ac:spMkLst>
-        </pc:spChg>
-        <pc:spChg chg="add del mod">
-          <ac:chgData name="Li, Hanchen F" userId="3aee791e-6a2d-4da7-a77b-fbdf7bf15886" providerId="ADAL" clId="{CDC5B0EF-6BEB-4658-A9FF-CB66F6FA6C1E}" dt="2025-05-26T23:53:18.669" v="8808" actId="478"/>
-          <ac:spMkLst>
-            <pc:docMk/>
-            <pc:sldMk cId="2152317508" sldId="256"/>
-            <ac:spMk id="741" creationId="{C3BB3AE5-380E-3C8F-7915-31796B6B7783}"/>
-          </ac:spMkLst>
-        </pc:spChg>
-        <pc:spChg chg="add del mod">
-          <ac:chgData name="Li, Hanchen F" userId="3aee791e-6a2d-4da7-a77b-fbdf7bf15886" providerId="ADAL" clId="{CDC5B0EF-6BEB-4658-A9FF-CB66F6FA6C1E}" dt="2025-05-26T23:52:49.447" v="8798" actId="478"/>
-          <ac:spMkLst>
-            <pc:docMk/>
-            <pc:sldMk cId="2152317508" sldId="256"/>
-            <ac:spMk id="742" creationId="{52B53972-AFE9-F924-2D9E-BB933025E733}"/>
-          </ac:spMkLst>
-        </pc:spChg>
-        <pc:spChg chg="add del mod">
-          <ac:chgData name="Li, Hanchen F" userId="3aee791e-6a2d-4da7-a77b-fbdf7bf15886" providerId="ADAL" clId="{CDC5B0EF-6BEB-4658-A9FF-CB66F6FA6C1E}" dt="2025-05-26T23:52:37.750" v="8793" actId="478"/>
-          <ac:spMkLst>
-            <pc:docMk/>
-            <pc:sldMk cId="2152317508" sldId="256"/>
-            <ac:spMk id="743" creationId="{4A4AA55F-5428-4951-AFB7-460E89C61A98}"/>
-          </ac:spMkLst>
-        </pc:spChg>
         <pc:spChg chg="add mod">
           <ac:chgData name="Li, Hanchen F" userId="3aee791e-6a2d-4da7-a77b-fbdf7bf15886" providerId="ADAL" clId="{CDC5B0EF-6BEB-4658-A9FF-CB66F6FA6C1E}" dt="2025-05-22T23:48:52.825" v="5002" actId="1076"/>
           <ac:spMkLst>
@@ -1214,14 +1166,6 @@
             <ac:spMk id="750" creationId="{2864E7F6-D1E7-8631-D443-4B6B887CD189}"/>
           </ac:spMkLst>
         </pc:spChg>
-        <pc:spChg chg="add del mod">
-          <ac:chgData name="Li, Hanchen F" userId="3aee791e-6a2d-4da7-a77b-fbdf7bf15886" providerId="ADAL" clId="{CDC5B0EF-6BEB-4658-A9FF-CB66F6FA6C1E}" dt="2025-05-26T23:53:54.086" v="8820" actId="478"/>
-          <ac:spMkLst>
-            <pc:docMk/>
-            <pc:sldMk cId="2152317508" sldId="256"/>
-            <ac:spMk id="751" creationId="{8681218D-9205-44F7-6506-CC2120DF707D}"/>
-          </ac:spMkLst>
-        </pc:spChg>
         <pc:spChg chg="add mod">
           <ac:chgData name="Li, Hanchen F" userId="3aee791e-6a2d-4da7-a77b-fbdf7bf15886" providerId="ADAL" clId="{CDC5B0EF-6BEB-4658-A9FF-CB66F6FA6C1E}" dt="2025-05-22T23:53:20.828" v="5588" actId="1076"/>
           <ac:spMkLst>
@@ -1239,7 +1183,7 @@
           </ac:spMkLst>
         </pc:spChg>
         <pc:spChg chg="add mod">
-          <ac:chgData name="Li, Hanchen F" userId="3aee791e-6a2d-4da7-a77b-fbdf7bf15886" providerId="ADAL" clId="{CDC5B0EF-6BEB-4658-A9FF-CB66F6FA6C1E}" dt="2025-05-22T23:54:41.828" v="5815" actId="1076"/>
+          <ac:chgData name="Li, Hanchen F" userId="3aee791e-6a2d-4da7-a77b-fbdf7bf15886" providerId="ADAL" clId="{CDC5B0EF-6BEB-4658-A9FF-CB66F6FA6C1E}" dt="2025-05-30T22:47:29.897" v="9168" actId="1076"/>
           <ac:spMkLst>
             <pc:docMk/>
             <pc:sldMk cId="2152317508" sldId="256"/>
@@ -1247,7 +1191,7 @@
           </ac:spMkLst>
         </pc:spChg>
         <pc:grpChg chg="add mod">
-          <ac:chgData name="Li, Hanchen F" userId="3aee791e-6a2d-4da7-a77b-fbdf7bf15886" providerId="ADAL" clId="{CDC5B0EF-6BEB-4658-A9FF-CB66F6FA6C1E}" dt="2025-05-26T23:53:07.061" v="8805" actId="1076"/>
+          <ac:chgData name="Li, Hanchen F" userId="3aee791e-6a2d-4da7-a77b-fbdf7bf15886" providerId="ADAL" clId="{CDC5B0EF-6BEB-4658-A9FF-CB66F6FA6C1E}" dt="2025-05-30T22:47:14.691" v="9166" actId="14826"/>
           <ac:grpSpMkLst>
             <pc:docMk/>
             <pc:sldMk cId="2152317508" sldId="256"/>
@@ -1263,7 +1207,7 @@
           </ac:grpSpMkLst>
         </pc:grpChg>
         <pc:grpChg chg="add mod">
-          <ac:chgData name="Li, Hanchen F" userId="3aee791e-6a2d-4da7-a77b-fbdf7bf15886" providerId="ADAL" clId="{CDC5B0EF-6BEB-4658-A9FF-CB66F6FA6C1E}" dt="2025-05-22T23:17:33.494" v="3248" actId="14826"/>
+          <ac:chgData name="Li, Hanchen F" userId="3aee791e-6a2d-4da7-a77b-fbdf7bf15886" providerId="ADAL" clId="{CDC5B0EF-6BEB-4658-A9FF-CB66F6FA6C1E}" dt="2025-05-30T22:35:23.784" v="8872" actId="14826"/>
           <ac:grpSpMkLst>
             <pc:docMk/>
             <pc:sldMk cId="2152317508" sldId="256"/>
@@ -1271,7 +1215,7 @@
           </ac:grpSpMkLst>
         </pc:grpChg>
         <pc:grpChg chg="add del mod ord">
-          <ac:chgData name="Li, Hanchen F" userId="3aee791e-6a2d-4da7-a77b-fbdf7bf15886" providerId="ADAL" clId="{CDC5B0EF-6BEB-4658-A9FF-CB66F6FA6C1E}" dt="2025-05-26T23:51:45.095" v="8774" actId="1076"/>
+          <ac:chgData name="Li, Hanchen F" userId="3aee791e-6a2d-4da7-a77b-fbdf7bf15886" providerId="ADAL" clId="{CDC5B0EF-6BEB-4658-A9FF-CB66F6FA6C1E}" dt="2025-05-30T22:45:11.512" v="9146" actId="167"/>
           <ac:grpSpMkLst>
             <pc:docMk/>
             <pc:sldMk cId="2152317508" sldId="256"/>
@@ -1295,7 +1239,7 @@
           </ac:grpSpMkLst>
         </pc:grpChg>
         <pc:picChg chg="add mod ord topLvl">
-          <ac:chgData name="Li, Hanchen F" userId="3aee791e-6a2d-4da7-a77b-fbdf7bf15886" providerId="ADAL" clId="{CDC5B0EF-6BEB-4658-A9FF-CB66F6FA6C1E}" dt="2025-05-22T23:17:33.494" v="3248" actId="14826"/>
+          <ac:chgData name="Li, Hanchen F" userId="3aee791e-6a2d-4da7-a77b-fbdf7bf15886" providerId="ADAL" clId="{CDC5B0EF-6BEB-4658-A9FF-CB66F6FA6C1E}" dt="2025-05-30T22:44:35.728" v="9127" actId="167"/>
           <ac:picMkLst>
             <pc:docMk/>
             <pc:sldMk cId="2152317508" sldId="256"/>
@@ -1303,7 +1247,7 @@
           </ac:picMkLst>
         </pc:picChg>
         <pc:picChg chg="add del mod ord topLvl">
-          <ac:chgData name="Li, Hanchen F" userId="3aee791e-6a2d-4da7-a77b-fbdf7bf15886" providerId="ADAL" clId="{CDC5B0EF-6BEB-4658-A9FF-CB66F6FA6C1E}" dt="2025-05-22T23:23:16.886" v="3356" actId="478"/>
+          <ac:chgData name="Li, Hanchen F" userId="3aee791e-6a2d-4da7-a77b-fbdf7bf15886" providerId="ADAL" clId="{CDC5B0EF-6BEB-4658-A9FF-CB66F6FA6C1E}" dt="2025-05-30T23:12:04.591" v="9269" actId="1076"/>
           <ac:picMkLst>
             <pc:docMk/>
             <pc:sldMk cId="2152317508" sldId="256"/>
@@ -1327,7 +1271,7 @@
           </ac:cxnSpMkLst>
         </pc:cxnChg>
         <pc:cxnChg chg="add mod">
-          <ac:chgData name="Li, Hanchen F" userId="3aee791e-6a2d-4da7-a77b-fbdf7bf15886" providerId="ADAL" clId="{CDC5B0EF-6BEB-4658-A9FF-CB66F6FA6C1E}" dt="2025-05-22T22:35:21.362" v="2531" actId="164"/>
+          <ac:chgData name="Li, Hanchen F" userId="3aee791e-6a2d-4da7-a77b-fbdf7bf15886" providerId="ADAL" clId="{CDC5B0EF-6BEB-4658-A9FF-CB66F6FA6C1E}" dt="2025-05-30T22:39:44.064" v="9060" actId="14100"/>
           <ac:cxnSpMkLst>
             <pc:docMk/>
             <pc:sldMk cId="2152317508" sldId="256"/>
@@ -1335,7 +1279,15 @@
           </ac:cxnSpMkLst>
         </pc:cxnChg>
         <pc:cxnChg chg="add mod">
-          <ac:chgData name="Li, Hanchen F" userId="3aee791e-6a2d-4da7-a77b-fbdf7bf15886" providerId="ADAL" clId="{CDC5B0EF-6BEB-4658-A9FF-CB66F6FA6C1E}" dt="2025-05-22T22:15:31.910" v="1304" actId="1035"/>
+          <ac:chgData name="Li, Hanchen F" userId="3aee791e-6a2d-4da7-a77b-fbdf7bf15886" providerId="ADAL" clId="{CDC5B0EF-6BEB-4658-A9FF-CB66F6FA6C1E}" dt="2025-05-30T23:12:23.380" v="9276" actId="1076"/>
+          <ac:cxnSpMkLst>
+            <pc:docMk/>
+            <pc:sldMk cId="2152317508" sldId="256"/>
+            <ac:cxnSpMk id="20" creationId="{A63BF9C7-983F-5C2B-2264-47912110C621}"/>
+          </ac:cxnSpMkLst>
+        </pc:cxnChg>
+        <pc:cxnChg chg="add mod">
+          <ac:chgData name="Li, Hanchen F" userId="3aee791e-6a2d-4da7-a77b-fbdf7bf15886" providerId="ADAL" clId="{CDC5B0EF-6BEB-4658-A9FF-CB66F6FA6C1E}" dt="2025-05-30T22:44:41.093" v="9136" actId="14100"/>
           <ac:cxnSpMkLst>
             <pc:docMk/>
             <pc:sldMk cId="2152317508" sldId="256"/>
@@ -1351,7 +1303,7 @@
           </ac:cxnSpMkLst>
         </pc:cxnChg>
         <pc:cxnChg chg="add mod">
-          <ac:chgData name="Li, Hanchen F" userId="3aee791e-6a2d-4da7-a77b-fbdf7bf15886" providerId="ADAL" clId="{CDC5B0EF-6BEB-4658-A9FF-CB66F6FA6C1E}" dt="2025-05-22T22:27:21.828" v="2184" actId="1038"/>
+          <ac:chgData name="Li, Hanchen F" userId="3aee791e-6a2d-4da7-a77b-fbdf7bf15886" providerId="ADAL" clId="{CDC5B0EF-6BEB-4658-A9FF-CB66F6FA6C1E}" dt="2025-05-30T22:38:48.245" v="9046" actId="1076"/>
           <ac:cxnSpMkLst>
             <pc:docMk/>
             <pc:sldMk cId="2152317508" sldId="256"/>
@@ -1359,7 +1311,7 @@
           </ac:cxnSpMkLst>
         </pc:cxnChg>
         <pc:cxnChg chg="add mod">
-          <ac:chgData name="Li, Hanchen F" userId="3aee791e-6a2d-4da7-a77b-fbdf7bf15886" providerId="ADAL" clId="{CDC5B0EF-6BEB-4658-A9FF-CB66F6FA6C1E}" dt="2025-05-22T23:38:35.462" v="3733" actId="1076"/>
+          <ac:chgData name="Li, Hanchen F" userId="3aee791e-6a2d-4da7-a77b-fbdf7bf15886" providerId="ADAL" clId="{CDC5B0EF-6BEB-4658-A9FF-CB66F6FA6C1E}" dt="2025-05-30T22:38:09.622" v="9038" actId="1076"/>
           <ac:cxnSpMkLst>
             <pc:docMk/>
             <pc:sldMk cId="2152317508" sldId="256"/>
@@ -1367,23 +1319,23 @@
           </ac:cxnSpMkLst>
         </pc:cxnChg>
         <pc:cxnChg chg="add mod">
-          <ac:chgData name="Li, Hanchen F" userId="3aee791e-6a2d-4da7-a77b-fbdf7bf15886" providerId="ADAL" clId="{CDC5B0EF-6BEB-4658-A9FF-CB66F6FA6C1E}" dt="2025-05-22T23:39:10.400" v="3753" actId="1076"/>
+          <ac:chgData name="Li, Hanchen F" userId="3aee791e-6a2d-4da7-a77b-fbdf7bf15886" providerId="ADAL" clId="{CDC5B0EF-6BEB-4658-A9FF-CB66F6FA6C1E}" dt="2025-05-30T22:37:53.372" v="9032" actId="1076"/>
           <ac:cxnSpMkLst>
             <pc:docMk/>
             <pc:sldMk cId="2152317508" sldId="256"/>
             <ac:cxnSpMk id="80" creationId="{0DF3227B-686C-F0EC-2E2F-EB029E531004}"/>
           </ac:cxnSpMkLst>
         </pc:cxnChg>
-        <pc:cxnChg chg="add mod">
-          <ac:chgData name="Li, Hanchen F" userId="3aee791e-6a2d-4da7-a77b-fbdf7bf15886" providerId="ADAL" clId="{CDC5B0EF-6BEB-4658-A9FF-CB66F6FA6C1E}" dt="2025-05-22T22:08:46.129" v="1101" actId="1076"/>
+        <pc:cxnChg chg="add del mod">
+          <ac:chgData name="Li, Hanchen F" userId="3aee791e-6a2d-4da7-a77b-fbdf7bf15886" providerId="ADAL" clId="{CDC5B0EF-6BEB-4658-A9FF-CB66F6FA6C1E}" dt="2025-05-30T22:46:06.154" v="9158" actId="478"/>
           <ac:cxnSpMkLst>
             <pc:docMk/>
             <pc:sldMk cId="2152317508" sldId="256"/>
             <ac:cxnSpMk id="84" creationId="{79D2A366-B413-8528-AC73-86E9F16DB2B7}"/>
           </ac:cxnSpMkLst>
         </pc:cxnChg>
-        <pc:cxnChg chg="add mod">
-          <ac:chgData name="Li, Hanchen F" userId="3aee791e-6a2d-4da7-a77b-fbdf7bf15886" providerId="ADAL" clId="{CDC5B0EF-6BEB-4658-A9FF-CB66F6FA6C1E}" dt="2025-05-22T23:40:57.291" v="3792" actId="1076"/>
+        <pc:cxnChg chg="add del mod">
+          <ac:chgData name="Li, Hanchen F" userId="3aee791e-6a2d-4da7-a77b-fbdf7bf15886" providerId="ADAL" clId="{CDC5B0EF-6BEB-4658-A9FF-CB66F6FA6C1E}" dt="2025-05-30T22:46:04.747" v="9157" actId="478"/>
           <ac:cxnSpMkLst>
             <pc:docMk/>
             <pc:sldMk cId="2152317508" sldId="256"/>
@@ -1391,15 +1343,15 @@
           </ac:cxnSpMkLst>
         </pc:cxnChg>
         <pc:cxnChg chg="add mod">
-          <ac:chgData name="Li, Hanchen F" userId="3aee791e-6a2d-4da7-a77b-fbdf7bf15886" providerId="ADAL" clId="{CDC5B0EF-6BEB-4658-A9FF-CB66F6FA6C1E}" dt="2025-05-22T22:34:52.852" v="2520" actId="164"/>
+          <ac:chgData name="Li, Hanchen F" userId="3aee791e-6a2d-4da7-a77b-fbdf7bf15886" providerId="ADAL" clId="{CDC5B0EF-6BEB-4658-A9FF-CB66F6FA6C1E}" dt="2025-05-30T22:41:09.377" v="9078" actId="1076"/>
           <ac:cxnSpMkLst>
             <pc:docMk/>
             <pc:sldMk cId="2152317508" sldId="256"/>
             <ac:cxnSpMk id="94" creationId="{DA2ED6A2-FE0D-9D42-8814-4B6D1D221CDC}"/>
           </ac:cxnSpMkLst>
         </pc:cxnChg>
-        <pc:cxnChg chg="add mod">
-          <ac:chgData name="Li, Hanchen F" userId="3aee791e-6a2d-4da7-a77b-fbdf7bf15886" providerId="ADAL" clId="{CDC5B0EF-6BEB-4658-A9FF-CB66F6FA6C1E}" dt="2025-05-22T23:40:47.629" v="3791" actId="1076"/>
+        <pc:cxnChg chg="add mod ord">
+          <ac:chgData name="Li, Hanchen F" userId="3aee791e-6a2d-4da7-a77b-fbdf7bf15886" providerId="ADAL" clId="{CDC5B0EF-6BEB-4658-A9FF-CB66F6FA6C1E}" dt="2025-05-30T22:45:27.302" v="9151" actId="14100"/>
           <ac:cxnSpMkLst>
             <pc:docMk/>
             <pc:sldMk cId="2152317508" sldId="256"/>
@@ -1439,7 +1391,7 @@
           </ac:cxnSpMkLst>
         </pc:cxnChg>
         <pc:cxnChg chg="add mod">
-          <ac:chgData name="Li, Hanchen F" userId="3aee791e-6a2d-4da7-a77b-fbdf7bf15886" providerId="ADAL" clId="{CDC5B0EF-6BEB-4658-A9FF-CB66F6FA6C1E}" dt="2025-05-22T22:15:28.854" v="1300" actId="14100"/>
+          <ac:chgData name="Li, Hanchen F" userId="3aee791e-6a2d-4da7-a77b-fbdf7bf15886" providerId="ADAL" clId="{CDC5B0EF-6BEB-4658-A9FF-CB66F6FA6C1E}" dt="2025-05-30T22:44:41.487" v="9137" actId="1076"/>
           <ac:cxnSpMkLst>
             <pc:docMk/>
             <pc:sldMk cId="2152317508" sldId="256"/>
@@ -1479,7 +1431,7 @@
           </ac:cxnSpMkLst>
         </pc:cxnChg>
         <pc:cxnChg chg="add mod">
-          <ac:chgData name="Li, Hanchen F" userId="3aee791e-6a2d-4da7-a77b-fbdf7bf15886" providerId="ADAL" clId="{CDC5B0EF-6BEB-4658-A9FF-CB66F6FA6C1E}" dt="2025-05-22T22:16:13.104" v="1363" actId="14100"/>
+          <ac:chgData name="Li, Hanchen F" userId="3aee791e-6a2d-4da7-a77b-fbdf7bf15886" providerId="ADAL" clId="{CDC5B0EF-6BEB-4658-A9FF-CB66F6FA6C1E}" dt="2025-05-30T22:46:35.919" v="9161" actId="1076"/>
           <ac:cxnSpMkLst>
             <pc:docMk/>
             <pc:sldMk cId="2152317508" sldId="256"/>
@@ -1487,15 +1439,15 @@
           </ac:cxnSpMkLst>
         </pc:cxnChg>
         <pc:cxnChg chg="add mod">
-          <ac:chgData name="Li, Hanchen F" userId="3aee791e-6a2d-4da7-a77b-fbdf7bf15886" providerId="ADAL" clId="{CDC5B0EF-6BEB-4658-A9FF-CB66F6FA6C1E}" dt="2025-05-22T22:17:03.109" v="1379" actId="14100"/>
+          <ac:chgData name="Li, Hanchen F" userId="3aee791e-6a2d-4da7-a77b-fbdf7bf15886" providerId="ADAL" clId="{CDC5B0EF-6BEB-4658-A9FF-CB66F6FA6C1E}" dt="2025-05-30T22:46:11.159" v="9159" actId="1076"/>
           <ac:cxnSpMkLst>
             <pc:docMk/>
             <pc:sldMk cId="2152317508" sldId="256"/>
             <ac:cxnSpMk id="207" creationId="{4C46DF6A-5C94-74EB-A688-418C8D97B29B}"/>
           </ac:cxnSpMkLst>
         </pc:cxnChg>
-        <pc:cxnChg chg="add mod">
-          <ac:chgData name="Li, Hanchen F" userId="3aee791e-6a2d-4da7-a77b-fbdf7bf15886" providerId="ADAL" clId="{CDC5B0EF-6BEB-4658-A9FF-CB66F6FA6C1E}" dt="2025-05-22T22:17:05.963" v="1380" actId="14100"/>
+        <pc:cxnChg chg="add mod ord">
+          <ac:chgData name="Li, Hanchen F" userId="3aee791e-6a2d-4da7-a77b-fbdf7bf15886" providerId="ADAL" clId="{CDC5B0EF-6BEB-4658-A9FF-CB66F6FA6C1E}" dt="2025-05-30T22:46:18.171" v="9160" actId="1076"/>
           <ac:cxnSpMkLst>
             <pc:docMk/>
             <pc:sldMk cId="2152317508" sldId="256"/>
@@ -1527,7 +1479,7 @@
           </ac:cxnSpMkLst>
         </pc:cxnChg>
         <pc:cxnChg chg="add del mod">
-          <ac:chgData name="Li, Hanchen F" userId="3aee791e-6a2d-4da7-a77b-fbdf7bf15886" providerId="ADAL" clId="{CDC5B0EF-6BEB-4658-A9FF-CB66F6FA6C1E}" dt="2025-05-22T23:36:39.847" v="3682" actId="478"/>
+          <ac:chgData name="Li, Hanchen F" userId="3aee791e-6a2d-4da7-a77b-fbdf7bf15886" providerId="ADAL" clId="{CDC5B0EF-6BEB-4658-A9FF-CB66F6FA6C1E}" dt="2025-05-30T23:12:08.002" v="9270" actId="1076"/>
           <ac:cxnSpMkLst>
             <pc:docMk/>
             <pc:sldMk cId="2152317508" sldId="256"/>
@@ -1543,7 +1495,7 @@
           </ac:cxnSpMkLst>
         </pc:cxnChg>
         <pc:cxnChg chg="add del mod">
-          <ac:chgData name="Li, Hanchen F" userId="3aee791e-6a2d-4da7-a77b-fbdf7bf15886" providerId="ADAL" clId="{CDC5B0EF-6BEB-4658-A9FF-CB66F6FA6C1E}" dt="2025-05-22T23:36:40.186" v="3683" actId="478"/>
+          <ac:chgData name="Li, Hanchen F" userId="3aee791e-6a2d-4da7-a77b-fbdf7bf15886" providerId="ADAL" clId="{CDC5B0EF-6BEB-4658-A9FF-CB66F6FA6C1E}" dt="2025-05-30T23:12:12.430" v="9273" actId="478"/>
           <ac:cxnSpMkLst>
             <pc:docMk/>
             <pc:sldMk cId="2152317508" sldId="256"/>
@@ -1575,7 +1527,7 @@
           </ac:cxnSpMkLst>
         </pc:cxnChg>
         <pc:cxnChg chg="add mod">
-          <ac:chgData name="Li, Hanchen F" userId="3aee791e-6a2d-4da7-a77b-fbdf7bf15886" providerId="ADAL" clId="{CDC5B0EF-6BEB-4658-A9FF-CB66F6FA6C1E}" dt="2025-05-22T22:24:28.680" v="2036" actId="1037"/>
+          <ac:chgData name="Li, Hanchen F" userId="3aee791e-6a2d-4da7-a77b-fbdf7bf15886" providerId="ADAL" clId="{CDC5B0EF-6BEB-4658-A9FF-CB66F6FA6C1E}" dt="2025-05-30T23:13:08.181" v="9279" actId="1076"/>
           <ac:cxnSpMkLst>
             <pc:docMk/>
             <pc:sldMk cId="2152317508" sldId="256"/>
@@ -1583,7 +1535,7 @@
           </ac:cxnSpMkLst>
         </pc:cxnChg>
         <pc:cxnChg chg="add mod">
-          <ac:chgData name="Li, Hanchen F" userId="3aee791e-6a2d-4da7-a77b-fbdf7bf15886" providerId="ADAL" clId="{CDC5B0EF-6BEB-4658-A9FF-CB66F6FA6C1E}" dt="2025-05-22T22:21:35.270" v="2019" actId="1076"/>
+          <ac:chgData name="Li, Hanchen F" userId="3aee791e-6a2d-4da7-a77b-fbdf7bf15886" providerId="ADAL" clId="{CDC5B0EF-6BEB-4658-A9FF-CB66F6FA6C1E}" dt="2025-05-30T23:13:17.345" v="9281" actId="1076"/>
           <ac:cxnSpMkLst>
             <pc:docMk/>
             <pc:sldMk cId="2152317508" sldId="256"/>
@@ -1623,7 +1575,7 @@
           </ac:cxnSpMkLst>
         </pc:cxnChg>
         <pc:cxnChg chg="add mod">
-          <ac:chgData name="Li, Hanchen F" userId="3aee791e-6a2d-4da7-a77b-fbdf7bf15886" providerId="ADAL" clId="{CDC5B0EF-6BEB-4658-A9FF-CB66F6FA6C1E}" dt="2025-05-22T22:28:24.769" v="2437" actId="1037"/>
+          <ac:chgData name="Li, Hanchen F" userId="3aee791e-6a2d-4da7-a77b-fbdf7bf15886" providerId="ADAL" clId="{CDC5B0EF-6BEB-4658-A9FF-CB66F6FA6C1E}" dt="2025-05-30T22:47:14.691" v="9166" actId="14826"/>
           <ac:cxnSpMkLst>
             <pc:docMk/>
             <pc:sldMk cId="2152317508" sldId="256"/>
@@ -1776,13 +1728,13 @@
         </pc:cxnChg>
       </pc:sldChg>
       <pc:sldChg chg="addSp delSp modSp add mod">
-        <pc:chgData name="Li, Hanchen F" userId="3aee791e-6a2d-4da7-a77b-fbdf7bf15886" providerId="ADAL" clId="{CDC5B0EF-6BEB-4658-A9FF-CB66F6FA6C1E}" dt="2025-05-24T18:02:17.886" v="8740" actId="20577"/>
+        <pc:chgData name="Li, Hanchen F" userId="3aee791e-6a2d-4da7-a77b-fbdf7bf15886" providerId="ADAL" clId="{CDC5B0EF-6BEB-4658-A9FF-CB66F6FA6C1E}" dt="2025-05-30T22:50:51.390" v="9267" actId="1076"/>
         <pc:sldMkLst>
           <pc:docMk/>
           <pc:sldMk cId="3137520481" sldId="257"/>
         </pc:sldMkLst>
         <pc:spChg chg="add mod">
-          <ac:chgData name="Li, Hanchen F" userId="3aee791e-6a2d-4da7-a77b-fbdf7bf15886" providerId="ADAL" clId="{CDC5B0EF-6BEB-4658-A9FF-CB66F6FA6C1E}" dt="2025-05-24T00:33:27.897" v="8254" actId="1076"/>
+          <ac:chgData name="Li, Hanchen F" userId="3aee791e-6a2d-4da7-a77b-fbdf7bf15886" providerId="ADAL" clId="{CDC5B0EF-6BEB-4658-A9FF-CB66F6FA6C1E}" dt="2025-05-30T22:49:36.242" v="9249" actId="1076"/>
           <ac:spMkLst>
             <pc:docMk/>
             <pc:sldMk cId="3137520481" sldId="257"/>
@@ -1790,7 +1742,7 @@
           </ac:spMkLst>
         </pc:spChg>
         <pc:spChg chg="add mod">
-          <ac:chgData name="Li, Hanchen F" userId="3aee791e-6a2d-4da7-a77b-fbdf7bf15886" providerId="ADAL" clId="{CDC5B0EF-6BEB-4658-A9FF-CB66F6FA6C1E}" dt="2025-05-24T00:35:36" v="8285" actId="1076"/>
+          <ac:chgData name="Li, Hanchen F" userId="3aee791e-6a2d-4da7-a77b-fbdf7bf15886" providerId="ADAL" clId="{CDC5B0EF-6BEB-4658-A9FF-CB66F6FA6C1E}" dt="2025-05-30T22:50:06.412" v="9263" actId="1035"/>
           <ac:spMkLst>
             <pc:docMk/>
             <pc:sldMk cId="3137520481" sldId="257"/>
@@ -1822,7 +1774,7 @@
           </ac:spMkLst>
         </pc:spChg>
         <pc:spChg chg="add mod">
-          <ac:chgData name="Li, Hanchen F" userId="3aee791e-6a2d-4da7-a77b-fbdf7bf15886" providerId="ADAL" clId="{CDC5B0EF-6BEB-4658-A9FF-CB66F6FA6C1E}" dt="2025-05-24T00:41:58.135" v="8407" actId="1076"/>
+          <ac:chgData name="Li, Hanchen F" userId="3aee791e-6a2d-4da7-a77b-fbdf7bf15886" providerId="ADAL" clId="{CDC5B0EF-6BEB-4658-A9FF-CB66F6FA6C1E}" dt="2025-05-30T22:49:23.942" v="9245" actId="1037"/>
           <ac:spMkLst>
             <pc:docMk/>
             <pc:sldMk cId="3137520481" sldId="257"/>
@@ -1886,7 +1838,7 @@
           </ac:spMkLst>
         </pc:spChg>
         <pc:spChg chg="add mod">
-          <ac:chgData name="Li, Hanchen F" userId="3aee791e-6a2d-4da7-a77b-fbdf7bf15886" providerId="ADAL" clId="{CDC5B0EF-6BEB-4658-A9FF-CB66F6FA6C1E}" dt="2025-05-24T00:41:13.792" v="8391" actId="1076"/>
+          <ac:chgData name="Li, Hanchen F" userId="3aee791e-6a2d-4da7-a77b-fbdf7bf15886" providerId="ADAL" clId="{CDC5B0EF-6BEB-4658-A9FF-CB66F6FA6C1E}" dt="2025-05-30T22:49:28.059" v="9246" actId="1076"/>
           <ac:spMkLst>
             <pc:docMk/>
             <pc:sldMk cId="3137520481" sldId="257"/>
@@ -1894,7 +1846,7 @@
           </ac:spMkLst>
         </pc:spChg>
         <pc:spChg chg="add mod">
-          <ac:chgData name="Li, Hanchen F" userId="3aee791e-6a2d-4da7-a77b-fbdf7bf15886" providerId="ADAL" clId="{CDC5B0EF-6BEB-4658-A9FF-CB66F6FA6C1E}" dt="2025-05-24T00:48:05.629" v="8668" actId="1076"/>
+          <ac:chgData name="Li, Hanchen F" userId="3aee791e-6a2d-4da7-a77b-fbdf7bf15886" providerId="ADAL" clId="{CDC5B0EF-6BEB-4658-A9FF-CB66F6FA6C1E}" dt="2025-05-30T22:50:51.390" v="9267" actId="1076"/>
           <ac:spMkLst>
             <pc:docMk/>
             <pc:sldMk cId="3137520481" sldId="257"/>
@@ -1942,7 +1894,7 @@
           </ac:spMkLst>
         </pc:spChg>
         <pc:spChg chg="add mod">
-          <ac:chgData name="Li, Hanchen F" userId="3aee791e-6a2d-4da7-a77b-fbdf7bf15886" providerId="ADAL" clId="{CDC5B0EF-6BEB-4658-A9FF-CB66F6FA6C1E}" dt="2025-05-24T00:46:35.473" v="8552" actId="1076"/>
+          <ac:chgData name="Li, Hanchen F" userId="3aee791e-6a2d-4da7-a77b-fbdf7bf15886" providerId="ADAL" clId="{CDC5B0EF-6BEB-4658-A9FF-CB66F6FA6C1E}" dt="2025-05-30T22:50:06.412" v="9263" actId="1035"/>
           <ac:spMkLst>
             <pc:docMk/>
             <pc:sldMk cId="3137520481" sldId="257"/>
@@ -1950,7 +1902,7 @@
           </ac:spMkLst>
         </pc:spChg>
         <pc:spChg chg="add mod">
-          <ac:chgData name="Li, Hanchen F" userId="3aee791e-6a2d-4da7-a77b-fbdf7bf15886" providerId="ADAL" clId="{CDC5B0EF-6BEB-4658-A9FF-CB66F6FA6C1E}" dt="2025-05-24T00:45:55.994" v="8537" actId="1076"/>
+          <ac:chgData name="Li, Hanchen F" userId="3aee791e-6a2d-4da7-a77b-fbdf7bf15886" providerId="ADAL" clId="{CDC5B0EF-6BEB-4658-A9FF-CB66F6FA6C1E}" dt="2025-05-30T22:50:06.412" v="9263" actId="1035"/>
           <ac:spMkLst>
             <pc:docMk/>
             <pc:sldMk cId="3137520481" sldId="257"/>
@@ -1958,7 +1910,7 @@
           </ac:spMkLst>
         </pc:spChg>
         <pc:spChg chg="add mod">
-          <ac:chgData name="Li, Hanchen F" userId="3aee791e-6a2d-4da7-a77b-fbdf7bf15886" providerId="ADAL" clId="{CDC5B0EF-6BEB-4658-A9FF-CB66F6FA6C1E}" dt="2025-05-24T00:46:01.551" v="8539" actId="1076"/>
+          <ac:chgData name="Li, Hanchen F" userId="3aee791e-6a2d-4da7-a77b-fbdf7bf15886" providerId="ADAL" clId="{CDC5B0EF-6BEB-4658-A9FF-CB66F6FA6C1E}" dt="2025-05-30T22:50:06.412" v="9263" actId="1035"/>
           <ac:spMkLst>
             <pc:docMk/>
             <pc:sldMk cId="3137520481" sldId="257"/>
@@ -1974,7 +1926,7 @@
           </ac:spMkLst>
         </pc:spChg>
         <pc:spChg chg="add mod">
-          <ac:chgData name="Li, Hanchen F" userId="3aee791e-6a2d-4da7-a77b-fbdf7bf15886" providerId="ADAL" clId="{CDC5B0EF-6BEB-4658-A9FF-CB66F6FA6C1E}" dt="2025-05-24T00:50:53.176" v="8718" actId="1035"/>
+          <ac:chgData name="Li, Hanchen F" userId="3aee791e-6a2d-4da7-a77b-fbdf7bf15886" providerId="ADAL" clId="{CDC5B0EF-6BEB-4658-A9FF-CB66F6FA6C1E}" dt="2025-05-30T22:49:07.993" v="9225" actId="1038"/>
           <ac:spMkLst>
             <pc:docMk/>
             <pc:sldMk cId="3137520481" sldId="257"/>
@@ -1982,7 +1934,7 @@
           </ac:spMkLst>
         </pc:spChg>
         <pc:picChg chg="add del mod">
-          <ac:chgData name="Li, Hanchen F" userId="3aee791e-6a2d-4da7-a77b-fbdf7bf15886" providerId="ADAL" clId="{CDC5B0EF-6BEB-4658-A9FF-CB66F6FA6C1E}" dt="2025-05-24T00:49:14.429" v="8678" actId="1076"/>
+          <ac:chgData name="Li, Hanchen F" userId="3aee791e-6a2d-4da7-a77b-fbdf7bf15886" providerId="ADAL" clId="{CDC5B0EF-6BEB-4658-A9FF-CB66F6FA6C1E}" dt="2025-05-30T22:48:32.803" v="9172" actId="14826"/>
           <ac:picMkLst>
             <pc:docMk/>
             <pc:sldMk cId="3137520481" sldId="257"/>
@@ -1998,7 +1950,7 @@
           </ac:cxnSpMkLst>
         </pc:cxnChg>
         <pc:cxnChg chg="add mod">
-          <ac:chgData name="Li, Hanchen F" userId="3aee791e-6a2d-4da7-a77b-fbdf7bf15886" providerId="ADAL" clId="{CDC5B0EF-6BEB-4658-A9FF-CB66F6FA6C1E}" dt="2025-05-22T23:56:07.134" v="5833" actId="1076"/>
+          <ac:chgData name="Li, Hanchen F" userId="3aee791e-6a2d-4da7-a77b-fbdf7bf15886" providerId="ADAL" clId="{CDC5B0EF-6BEB-4658-A9FF-CB66F6FA6C1E}" dt="2025-05-30T22:50:06.412" v="9263" actId="1035"/>
           <ac:cxnSpMkLst>
             <pc:docMk/>
             <pc:sldMk cId="3137520481" sldId="257"/>
@@ -2062,7 +2014,7 @@
           </ac:cxnSpMkLst>
         </pc:cxnChg>
         <pc:cxnChg chg="add mod">
-          <ac:chgData name="Li, Hanchen F" userId="3aee791e-6a2d-4da7-a77b-fbdf7bf15886" providerId="ADAL" clId="{CDC5B0EF-6BEB-4658-A9FF-CB66F6FA6C1E}" dt="2025-05-24T01:02:26.893" v="8731" actId="1076"/>
+          <ac:chgData name="Li, Hanchen F" userId="3aee791e-6a2d-4da7-a77b-fbdf7bf15886" providerId="ADAL" clId="{CDC5B0EF-6BEB-4658-A9FF-CB66F6FA6C1E}" dt="2025-05-30T22:49:46.733" v="9251" actId="14100"/>
           <ac:cxnSpMkLst>
             <pc:docMk/>
             <pc:sldMk cId="3137520481" sldId="257"/>
@@ -2110,7 +2062,7 @@
           </ac:cxnSpMkLst>
         </pc:cxnChg>
         <pc:cxnChg chg="add mod">
-          <ac:chgData name="Li, Hanchen F" userId="3aee791e-6a2d-4da7-a77b-fbdf7bf15886" providerId="ADAL" clId="{CDC5B0EF-6BEB-4658-A9FF-CB66F6FA6C1E}" dt="2025-05-24T00:45:30.413" v="8528" actId="14100"/>
+          <ac:chgData name="Li, Hanchen F" userId="3aee791e-6a2d-4da7-a77b-fbdf7bf15886" providerId="ADAL" clId="{CDC5B0EF-6BEB-4658-A9FF-CB66F6FA6C1E}" dt="2025-05-30T22:50:14.677" v="9264" actId="1035"/>
           <ac:cxnSpMkLst>
             <pc:docMk/>
             <pc:sldMk cId="3137520481" sldId="257"/>
@@ -2118,7 +2070,7 @@
           </ac:cxnSpMkLst>
         </pc:cxnChg>
         <pc:cxnChg chg="add mod">
-          <ac:chgData name="Li, Hanchen F" userId="3aee791e-6a2d-4da7-a77b-fbdf7bf15886" providerId="ADAL" clId="{CDC5B0EF-6BEB-4658-A9FF-CB66F6FA6C1E}" dt="2025-05-24T00:45:38.349" v="8531" actId="1076"/>
+          <ac:chgData name="Li, Hanchen F" userId="3aee791e-6a2d-4da7-a77b-fbdf7bf15886" providerId="ADAL" clId="{CDC5B0EF-6BEB-4658-A9FF-CB66F6FA6C1E}" dt="2025-05-30T22:50:16.239" v="9265" actId="1036"/>
           <ac:cxnSpMkLst>
             <pc:docMk/>
             <pc:sldMk cId="3137520481" sldId="257"/>
@@ -2126,7 +2078,7 @@
           </ac:cxnSpMkLst>
         </pc:cxnChg>
         <pc:cxnChg chg="add mod">
-          <ac:chgData name="Li, Hanchen F" userId="3aee791e-6a2d-4da7-a77b-fbdf7bf15886" providerId="ADAL" clId="{CDC5B0EF-6BEB-4658-A9FF-CB66F6FA6C1E}" dt="2025-05-24T00:46:23.374" v="8550" actId="14100"/>
+          <ac:chgData name="Li, Hanchen F" userId="3aee791e-6a2d-4da7-a77b-fbdf7bf15886" providerId="ADAL" clId="{CDC5B0EF-6BEB-4658-A9FF-CB66F6FA6C1E}" dt="2025-05-30T22:50:06.412" v="9263" actId="1035"/>
           <ac:cxnSpMkLst>
             <pc:docMk/>
             <pc:sldMk cId="3137520481" sldId="257"/>
@@ -2150,7 +2102,7 @@
           </ac:cxnSpMkLst>
         </pc:cxnChg>
         <pc:cxnChg chg="add mod">
-          <ac:chgData name="Li, Hanchen F" userId="3aee791e-6a2d-4da7-a77b-fbdf7bf15886" providerId="ADAL" clId="{CDC5B0EF-6BEB-4658-A9FF-CB66F6FA6C1E}" dt="2025-05-24T00:50:49.367" v="8717" actId="1035"/>
+          <ac:chgData name="Li, Hanchen F" userId="3aee791e-6a2d-4da7-a77b-fbdf7bf15886" providerId="ADAL" clId="{CDC5B0EF-6BEB-4658-A9FF-CB66F6FA6C1E}" dt="2025-05-30T22:49:07.993" v="9225" actId="1038"/>
           <ac:cxnSpMkLst>
             <pc:docMk/>
             <pc:sldMk cId="3137520481" sldId="257"/>
@@ -3263,7 +3215,7 @@
           <a:p>
             <a:fld id="{DF1088C5-931A-42D2-8AA4-FA289862AAD0}" type="datetimeFigureOut">
               <a:rPr lang="zh-CN" altLang="en-US" smtClean="0"/>
-              <a:t>2025/5/27</a:t>
+              <a:t>2025/5/31</a:t>
             </a:fld>
             <a:endParaRPr lang="zh-CN" altLang="en-US"/>
           </a:p>
@@ -4153,7 +4105,7 @@
           <a:p>
             <a:fld id="{3CAF1464-0EA4-453D-A90B-03B04D244405}" type="datetimeFigureOut">
               <a:rPr lang="zh-CN" altLang="en-US" smtClean="0"/>
-              <a:t>2025/5/27</a:t>
+              <a:t>2025/5/31</a:t>
             </a:fld>
             <a:endParaRPr lang="zh-CN" altLang="en-US"/>
           </a:p>
@@ -4323,7 +4275,7 @@
           <a:p>
             <a:fld id="{3CAF1464-0EA4-453D-A90B-03B04D244405}" type="datetimeFigureOut">
               <a:rPr lang="zh-CN" altLang="en-US" smtClean="0"/>
-              <a:t>2025/5/27</a:t>
+              <a:t>2025/5/31</a:t>
             </a:fld>
             <a:endParaRPr lang="zh-CN" altLang="en-US"/>
           </a:p>
@@ -4503,7 +4455,7 @@
           <a:p>
             <a:fld id="{3CAF1464-0EA4-453D-A90B-03B04D244405}" type="datetimeFigureOut">
               <a:rPr lang="zh-CN" altLang="en-US" smtClean="0"/>
-              <a:t>2025/5/27</a:t>
+              <a:t>2025/5/31</a:t>
             </a:fld>
             <a:endParaRPr lang="zh-CN" altLang="en-US"/>
           </a:p>
@@ -4673,7 +4625,7 @@
           <a:p>
             <a:fld id="{3CAF1464-0EA4-453D-A90B-03B04D244405}" type="datetimeFigureOut">
               <a:rPr lang="zh-CN" altLang="en-US" smtClean="0"/>
-              <a:t>2025/5/27</a:t>
+              <a:t>2025/5/31</a:t>
             </a:fld>
             <a:endParaRPr lang="zh-CN" altLang="en-US"/>
           </a:p>
@@ -4919,7 +4871,7 @@
           <a:p>
             <a:fld id="{3CAF1464-0EA4-453D-A90B-03B04D244405}" type="datetimeFigureOut">
               <a:rPr lang="zh-CN" altLang="en-US" smtClean="0"/>
-              <a:t>2025/5/27</a:t>
+              <a:t>2025/5/31</a:t>
             </a:fld>
             <a:endParaRPr lang="zh-CN" altLang="en-US"/>
           </a:p>
@@ -5151,7 +5103,7 @@
           <a:p>
             <a:fld id="{3CAF1464-0EA4-453D-A90B-03B04D244405}" type="datetimeFigureOut">
               <a:rPr lang="zh-CN" altLang="en-US" smtClean="0"/>
-              <a:t>2025/5/27</a:t>
+              <a:t>2025/5/31</a:t>
             </a:fld>
             <a:endParaRPr lang="zh-CN" altLang="en-US"/>
           </a:p>
@@ -5518,7 +5470,7 @@
           <a:p>
             <a:fld id="{3CAF1464-0EA4-453D-A90B-03B04D244405}" type="datetimeFigureOut">
               <a:rPr lang="zh-CN" altLang="en-US" smtClean="0"/>
-              <a:t>2025/5/27</a:t>
+              <a:t>2025/5/31</a:t>
             </a:fld>
             <a:endParaRPr lang="zh-CN" altLang="en-US"/>
           </a:p>
@@ -5636,7 +5588,7 @@
           <a:p>
             <a:fld id="{3CAF1464-0EA4-453D-A90B-03B04D244405}" type="datetimeFigureOut">
               <a:rPr lang="zh-CN" altLang="en-US" smtClean="0"/>
-              <a:t>2025/5/27</a:t>
+              <a:t>2025/5/31</a:t>
             </a:fld>
             <a:endParaRPr lang="zh-CN" altLang="en-US"/>
           </a:p>
@@ -5731,7 +5683,7 @@
           <a:p>
             <a:fld id="{3CAF1464-0EA4-453D-A90B-03B04D244405}" type="datetimeFigureOut">
               <a:rPr lang="zh-CN" altLang="en-US" smtClean="0"/>
-              <a:t>2025/5/27</a:t>
+              <a:t>2025/5/31</a:t>
             </a:fld>
             <a:endParaRPr lang="zh-CN" altLang="en-US"/>
           </a:p>
@@ -6008,7 +5960,7 @@
           <a:p>
             <a:fld id="{3CAF1464-0EA4-453D-A90B-03B04D244405}" type="datetimeFigureOut">
               <a:rPr lang="zh-CN" altLang="en-US" smtClean="0"/>
-              <a:t>2025/5/27</a:t>
+              <a:t>2025/5/31</a:t>
             </a:fld>
             <a:endParaRPr lang="zh-CN" altLang="en-US"/>
           </a:p>
@@ -6265,7 +6217,7 @@
           <a:p>
             <a:fld id="{3CAF1464-0EA4-453D-A90B-03B04D244405}" type="datetimeFigureOut">
               <a:rPr lang="zh-CN" altLang="en-US" smtClean="0"/>
-              <a:t>2025/5/27</a:t>
+              <a:t>2025/5/31</a:t>
             </a:fld>
             <a:endParaRPr lang="zh-CN" altLang="en-US"/>
           </a:p>
@@ -6478,7 +6430,7 @@
           <a:p>
             <a:fld id="{3CAF1464-0EA4-453D-A90B-03B04D244405}" type="datetimeFigureOut">
               <a:rPr lang="zh-CN" altLang="en-US" smtClean="0"/>
-              <a:t>2025/5/27</a:t>
+              <a:t>2025/5/31</a:t>
             </a:fld>
             <a:endParaRPr lang="zh-CN" altLang="en-US"/>
           </a:p>
@@ -11087,6 +11039,64 @@
           <a:chExt cx="0" cy="0"/>
         </a:xfrm>
       </p:grpSpPr>
+      <p:sp>
+        <p:nvSpPr>
+          <p:cNvPr id="695" name="文本框 694">
+            <a:extLst>
+              <a:ext uri="{FF2B5EF4-FFF2-40B4-BE49-F238E27FC236}">
+                <a16:creationId xmlns:a16="http://schemas.microsoft.com/office/drawing/2014/main" id="{A5C50E1A-5024-5A9F-7660-C2084EDC312F}"/>
+              </a:ext>
+            </a:extLst>
+          </p:cNvPr>
+          <p:cNvSpPr txBox="1"/>
+          <p:nvPr/>
+        </p:nvSpPr>
+        <p:spPr>
+          <a:xfrm>
+            <a:off x="5688864" y="3218032"/>
+            <a:ext cx="461986" cy="338554"/>
+          </a:xfrm>
+          <a:prstGeom prst="rect">
+            <a:avLst/>
+          </a:prstGeom>
+          <a:noFill/>
+        </p:spPr>
+        <p:txBody>
+          <a:bodyPr wrap="none" rtlCol="0">
+            <a:spAutoFit/>
+          </a:bodyPr>
+          <a:lstStyle/>
+          <a:p>
+            <a:r>
+              <a:rPr lang="en-US" altLang="zh-CN" sz="1600" i="1" dirty="0" err="1">
+                <a:solidFill>
+                  <a:srgbClr val="0000CD"/>
+                </a:solidFill>
+                <a:latin typeface="Times New Roman" panose="02020603050405020304" pitchFamily="18" charset="0"/>
+                <a:cs typeface="Times New Roman" panose="02020603050405020304" pitchFamily="18" charset="0"/>
+              </a:rPr>
+              <a:t>h</a:t>
+            </a:r>
+            <a:r>
+              <a:rPr lang="en-US" altLang="zh-CN" sz="1600" i="1" baseline="-25000" dirty="0" err="1">
+                <a:solidFill>
+                  <a:srgbClr val="0000CD"/>
+                </a:solidFill>
+                <a:latin typeface="Times New Roman" panose="02020603050405020304" pitchFamily="18" charset="0"/>
+                <a:cs typeface="Times New Roman" panose="02020603050405020304" pitchFamily="18" charset="0"/>
+              </a:rPr>
+              <a:t>HT</a:t>
+            </a:r>
+            <a:endParaRPr lang="zh-CN" altLang="en-US" sz="1600" i="1" baseline="-25000" dirty="0">
+              <a:solidFill>
+                <a:srgbClr val="0000CD"/>
+              </a:solidFill>
+              <a:latin typeface="Times New Roman" panose="02020603050405020304" pitchFamily="18" charset="0"/>
+              <a:cs typeface="Times New Roman" panose="02020603050405020304" pitchFamily="18" charset="0"/>
+            </a:endParaRPr>
+          </a:p>
+        </p:txBody>
+      </p:sp>
       <p:grpSp>
         <p:nvGrpSpPr>
           <p:cNvPr id="599" name="组合 598">
@@ -13566,9 +13576,9 @@
         </p:nvGrpSpPr>
         <p:grpSpPr>
           <a:xfrm rot="153205">
-            <a:off x="-1011769" y="719808"/>
+            <a:off x="-1011770" y="719807"/>
             <a:ext cx="8512425" cy="5043294"/>
-            <a:chOff x="-1265770" y="719808"/>
+            <a:chOff x="-1265771" y="719808"/>
             <a:chExt cx="8512425" cy="5043294"/>
           </a:xfrm>
         </p:grpSpPr>
@@ -13630,10 +13640,10 @@
           </p:nvGrpSpPr>
           <p:grpSpPr>
             <a:xfrm>
-              <a:off x="-1265770" y="719808"/>
-              <a:ext cx="8512425" cy="4864533"/>
-              <a:chOff x="-1265770" y="719808"/>
-              <a:chExt cx="8512425" cy="4864533"/>
+              <a:off x="-1265771" y="719808"/>
+              <a:ext cx="8512425" cy="4864534"/>
+              <a:chOff x="-1265771" y="719808"/>
+              <a:chExt cx="8512425" cy="4864534"/>
             </a:xfrm>
           </p:grpSpPr>
           <p:sp>
@@ -13871,8 +13881,8 @@
             </p:blipFill>
             <p:spPr>
               <a:xfrm rot="20957173">
-                <a:off x="-1265770" y="796341"/>
-                <a:ext cx="8512425" cy="4788000"/>
+                <a:off x="-1265771" y="796343"/>
+                <a:ext cx="8512425" cy="4787999"/>
               </a:xfrm>
               <a:prstGeom prst="rect">
                 <a:avLst/>
@@ -14130,9 +14140,9 @@
               <p:nvPr/>
             </p:nvCxnSpPr>
             <p:spPr>
-              <a:xfrm rot="20957173">
-                <a:off x="2252779" y="4780198"/>
-                <a:ext cx="4091093" cy="0"/>
+              <a:xfrm rot="21446795" flipV="1">
+                <a:off x="2277552" y="4672089"/>
+                <a:ext cx="3062097" cy="420382"/>
               </a:xfrm>
               <a:prstGeom prst="straightConnector1">
                 <a:avLst/>
@@ -14227,9 +14237,9 @@
               <p:nvPr/>
             </p:nvCxnSpPr>
             <p:spPr>
-              <a:xfrm rot="20957173">
-                <a:off x="2335788" y="5218927"/>
-                <a:ext cx="4091093" cy="0"/>
+              <a:xfrm rot="21446795" flipV="1">
+                <a:off x="2360308" y="5099452"/>
+                <a:ext cx="3066978" cy="431645"/>
               </a:xfrm>
               <a:prstGeom prst="straightConnector1">
                 <a:avLst/>
@@ -14273,7 +14283,7 @@
             </p:nvCxnSpPr>
             <p:spPr>
               <a:xfrm rot="20957173">
-                <a:off x="3983847" y="3592800"/>
+                <a:off x="4234552" y="3548907"/>
                 <a:ext cx="2032109" cy="0"/>
               </a:xfrm>
               <a:prstGeom prst="line">
@@ -14317,7 +14327,7 @@
             </p:nvCxnSpPr>
             <p:spPr>
               <a:xfrm rot="20957173" flipV="1">
-                <a:off x="4226308" y="2898608"/>
+                <a:off x="4354822" y="2868803"/>
                 <a:ext cx="0" cy="833166"/>
               </a:xfrm>
               <a:prstGeom prst="straightConnector1">
@@ -14393,94 +14403,6 @@
           </p:cxnSp>
           <p:cxnSp>
             <p:nvCxnSpPr>
-              <p:cNvPr id="84" name="直接连接符 83">
-                <a:extLst>
-                  <a:ext uri="{FF2B5EF4-FFF2-40B4-BE49-F238E27FC236}">
-                    <a16:creationId xmlns:a16="http://schemas.microsoft.com/office/drawing/2014/main" id="{79D2A366-B413-8528-AC73-86E9F16DB2B7}"/>
-                  </a:ext>
-                </a:extLst>
-              </p:cNvPr>
-              <p:cNvCxnSpPr>
-                <a:cxnSpLocks/>
-              </p:cNvCxnSpPr>
-              <p:nvPr/>
-            </p:nvCxnSpPr>
-            <p:spPr>
-              <a:xfrm rot="20957173">
-                <a:off x="5741823" y="3064421"/>
-                <a:ext cx="190500" cy="0"/>
-              </a:xfrm>
-              <a:prstGeom prst="line">
-                <a:avLst/>
-              </a:prstGeom>
-              <a:ln w="12700">
-                <a:solidFill>
-                  <a:srgbClr val="0000CD"/>
-                </a:solidFill>
-                <a:prstDash val="solid"/>
-              </a:ln>
-            </p:spPr>
-            <p:style>
-              <a:lnRef idx="2">
-                <a:schemeClr val="accent1"/>
-              </a:lnRef>
-              <a:fillRef idx="0">
-                <a:schemeClr val="accent1"/>
-              </a:fillRef>
-              <a:effectRef idx="1">
-                <a:schemeClr val="accent1"/>
-              </a:effectRef>
-              <a:fontRef idx="minor">
-                <a:schemeClr val="tx1"/>
-              </a:fontRef>
-            </p:style>
-          </p:cxnSp>
-          <p:cxnSp>
-            <p:nvCxnSpPr>
-              <p:cNvPr id="91" name="直接连接符 90">
-                <a:extLst>
-                  <a:ext uri="{FF2B5EF4-FFF2-40B4-BE49-F238E27FC236}">
-                    <a16:creationId xmlns:a16="http://schemas.microsoft.com/office/drawing/2014/main" id="{E7FFA589-5910-415F-51D1-A5B2F512A967}"/>
-                  </a:ext>
-                </a:extLst>
-              </p:cNvPr>
-              <p:cNvCxnSpPr>
-                <a:cxnSpLocks/>
-              </p:cNvCxnSpPr>
-              <p:nvPr/>
-            </p:nvCxnSpPr>
-            <p:spPr>
-              <a:xfrm rot="20957173">
-                <a:off x="5274367" y="3173032"/>
-                <a:ext cx="190500" cy="0"/>
-              </a:xfrm>
-              <a:prstGeom prst="line">
-                <a:avLst/>
-              </a:prstGeom>
-              <a:ln w="12700">
-                <a:solidFill>
-                  <a:srgbClr val="0000CD"/>
-                </a:solidFill>
-                <a:prstDash val="solid"/>
-              </a:ln>
-            </p:spPr>
-            <p:style>
-              <a:lnRef idx="2">
-                <a:schemeClr val="accent1"/>
-              </a:lnRef>
-              <a:fillRef idx="0">
-                <a:schemeClr val="accent1"/>
-              </a:fillRef>
-              <a:effectRef idx="1">
-                <a:schemeClr val="accent1"/>
-              </a:effectRef>
-              <a:fontRef idx="minor">
-                <a:schemeClr val="tx1"/>
-              </a:fontRef>
-            </p:style>
-          </p:cxnSp>
-          <p:cxnSp>
-            <p:nvCxnSpPr>
               <p:cNvPr id="94" name="直接箭头连接符 93">
                 <a:extLst>
                   <a:ext uri="{FF2B5EF4-FFF2-40B4-BE49-F238E27FC236}">
@@ -14495,7 +14417,7 @@
             </p:nvCxnSpPr>
             <p:spPr>
               <a:xfrm rot="20957173" flipV="1">
-                <a:off x="5870864" y="3061253"/>
+                <a:off x="6018039" y="3029448"/>
                 <a:ext cx="0" cy="363536"/>
               </a:xfrm>
               <a:prstGeom prst="straightConnector1">
@@ -14539,9 +14461,9 @@
               <p:nvPr/>
             </p:nvCxnSpPr>
             <p:spPr>
-              <a:xfrm rot="20957173" flipV="1">
-                <a:off x="5404648" y="3174878"/>
-                <a:ext cx="0" cy="328120"/>
+              <a:xfrm rot="21446795" flipH="1" flipV="1">
+                <a:off x="5438759" y="3142725"/>
+                <a:ext cx="47852" cy="351784"/>
               </a:xfrm>
               <a:prstGeom prst="straightConnector1">
                 <a:avLst/>
@@ -14674,7 +14596,7 @@
             </p:nvCxnSpPr>
             <p:spPr>
               <a:xfrm rot="20957173">
-                <a:off x="6266963" y="3332829"/>
+                <a:off x="5276236" y="3447203"/>
                 <a:ext cx="0" cy="1698132"/>
               </a:xfrm>
               <a:prstGeom prst="line">
@@ -14894,7 +14816,7 @@
             </p:nvCxnSpPr>
             <p:spPr>
               <a:xfrm rot="20957173" flipV="1">
-                <a:off x="6000706" y="2559319"/>
+                <a:off x="5026063" y="2753381"/>
                 <a:ext cx="180" cy="432524"/>
               </a:xfrm>
               <a:prstGeom prst="straightConnector1">
@@ -14938,7 +14860,7 @@
             </p:nvCxnSpPr>
             <p:spPr>
               <a:xfrm rot="20957173">
-                <a:off x="6320138" y="2950948"/>
+                <a:off x="5338656" y="3133465"/>
                 <a:ext cx="233362" cy="0"/>
               </a:xfrm>
               <a:prstGeom prst="straightConnector1">
@@ -14982,7 +14904,7 @@
             </p:nvCxnSpPr>
             <p:spPr>
               <a:xfrm rot="20957173" flipV="1">
-                <a:off x="6322990" y="2949613"/>
+                <a:off x="5558179" y="3059017"/>
                 <a:ext cx="563562" cy="1847"/>
               </a:xfrm>
               <a:prstGeom prst="straightConnector1">
@@ -15468,9 +15390,9 @@
         <p:grpSpPr>
           <a:xfrm>
             <a:off x="7478451" y="742644"/>
-            <a:ext cx="4788638" cy="4993868"/>
+            <a:ext cx="4788637" cy="4993868"/>
             <a:chOff x="6986023" y="751916"/>
-            <a:chExt cx="4788638" cy="4993868"/>
+            <a:chExt cx="4788637" cy="4993868"/>
           </a:xfrm>
         </p:grpSpPr>
         <p:sp>
@@ -15813,7 +15735,7 @@
           <p:spPr>
             <a:xfrm rot="935833">
               <a:off x="6986023" y="957785"/>
-              <a:ext cx="4788638" cy="4787999"/>
+              <a:ext cx="4788637" cy="4787999"/>
             </a:xfrm>
             <a:prstGeom prst="rect">
               <a:avLst/>
@@ -16022,7 +15944,7 @@
           </p:nvCxnSpPr>
           <p:spPr>
             <a:xfrm rot="935833">
-              <a:off x="8061322" y="3462178"/>
+              <a:off x="8080978" y="3432165"/>
               <a:ext cx="190500" cy="0"/>
             </a:xfrm>
             <a:prstGeom prst="line">
@@ -16068,51 +15990,6 @@
             <a:xfrm rot="935833" flipV="1">
               <a:off x="8458239" y="3522302"/>
               <a:ext cx="0" cy="363536"/>
-            </a:xfrm>
-            <a:prstGeom prst="straightConnector1">
-              <a:avLst/>
-            </a:prstGeom>
-            <a:ln w="12700">
-              <a:solidFill>
-                <a:srgbClr val="0000CD"/>
-              </a:solidFill>
-              <a:headEnd type="triangle"/>
-              <a:tailEnd type="triangle"/>
-            </a:ln>
-          </p:spPr>
-          <p:style>
-            <a:lnRef idx="2">
-              <a:schemeClr val="accent1"/>
-            </a:lnRef>
-            <a:fillRef idx="0">
-              <a:schemeClr val="accent1"/>
-            </a:fillRef>
-            <a:effectRef idx="1">
-              <a:schemeClr val="accent1"/>
-            </a:effectRef>
-            <a:fontRef idx="minor">
-              <a:schemeClr val="tx1"/>
-            </a:fontRef>
-          </p:style>
-        </p:cxnSp>
-        <p:cxnSp>
-          <p:nvCxnSpPr>
-            <p:cNvPr id="230" name="直接箭头连接符 229">
-              <a:extLst>
-                <a:ext uri="{FF2B5EF4-FFF2-40B4-BE49-F238E27FC236}">
-                  <a16:creationId xmlns:a16="http://schemas.microsoft.com/office/drawing/2014/main" id="{FF7C58E2-8271-6514-4188-11F6201F333C}"/>
-                </a:ext>
-              </a:extLst>
-            </p:cNvPr>
-            <p:cNvCxnSpPr>
-              <a:cxnSpLocks/>
-            </p:cNvCxnSpPr>
-            <p:nvPr/>
-          </p:nvCxnSpPr>
-          <p:spPr>
-            <a:xfrm rot="935833" flipV="1">
-              <a:off x="8110976" y="3461455"/>
-              <a:ext cx="0" cy="328120"/>
             </a:xfrm>
             <a:prstGeom prst="straightConnector1">
               <a:avLst/>
@@ -16288,7 +16165,7 @@
           </p:nvCxnSpPr>
           <p:spPr>
             <a:xfrm rot="935833">
-              <a:off x="9535861" y="938105"/>
+              <a:off x="9568843" y="823134"/>
               <a:ext cx="0" cy="4049607"/>
             </a:xfrm>
             <a:prstGeom prst="line">
@@ -18114,7 +17991,7 @@
         </p:nvSpPr>
         <p:spPr>
           <a:xfrm>
-            <a:off x="4175643" y="4480268"/>
+            <a:off x="3756659" y="4525601"/>
             <a:ext cx="417102" cy="338554"/>
           </a:xfrm>
           <a:prstGeom prst="rect">
@@ -18172,7 +18049,7 @@
         </p:nvSpPr>
         <p:spPr>
           <a:xfrm>
-            <a:off x="4298745" y="4919599"/>
+            <a:off x="3840301" y="4975269"/>
             <a:ext cx="401072" cy="338554"/>
           </a:xfrm>
           <a:prstGeom prst="rect">
@@ -18623,10 +18500,10 @@
       </p:sp>
       <p:sp>
         <p:nvSpPr>
-          <p:cNvPr id="693" name="文本框 692">
-            <a:extLst>
-              <a:ext uri="{FF2B5EF4-FFF2-40B4-BE49-F238E27FC236}">
-                <a16:creationId xmlns:a16="http://schemas.microsoft.com/office/drawing/2014/main" id="{3F9A48A1-BA63-64E8-1F9E-D38216DB2FFD}"/>
+          <p:cNvPr id="694" name="文本框 693">
+            <a:extLst>
+              <a:ext uri="{FF2B5EF4-FFF2-40B4-BE49-F238E27FC236}">
+                <a16:creationId xmlns:a16="http://schemas.microsoft.com/office/drawing/2014/main" id="{0B589E19-DFFC-1E39-CEEC-5F6428DEC4B7}"/>
               </a:ext>
             </a:extLst>
           </p:cNvPr>
@@ -18635,8 +18512,8 @@
         </p:nvSpPr>
         <p:spPr>
           <a:xfrm>
-            <a:off x="4081426" y="3280481"/>
-            <a:ext cx="445956" cy="338554"/>
+            <a:off x="4656565" y="2888676"/>
+            <a:ext cx="470000" cy="338554"/>
           </a:xfrm>
           <a:prstGeom prst="rect">
             <a:avLst/>
@@ -18667,7 +18544,7 @@
                 <a:latin typeface="Times New Roman" panose="02020603050405020304" pitchFamily="18" charset="0"/>
                 <a:cs typeface="Times New Roman" panose="02020603050405020304" pitchFamily="18" charset="0"/>
               </a:rPr>
-              <a:t>LR</a:t>
+              <a:t>UR</a:t>
             </a:r>
             <a:endParaRPr lang="zh-CN" altLang="en-US" sz="1600" i="1" baseline="-25000" dirty="0">
               <a:solidFill>
@@ -18681,10 +18558,10 @@
       </p:sp>
       <p:sp>
         <p:nvSpPr>
-          <p:cNvPr id="694" name="文本框 693">
-            <a:extLst>
-              <a:ext uri="{FF2B5EF4-FFF2-40B4-BE49-F238E27FC236}">
-                <a16:creationId xmlns:a16="http://schemas.microsoft.com/office/drawing/2014/main" id="{0B589E19-DFFC-1E39-CEEC-5F6428DEC4B7}"/>
+          <p:cNvPr id="697" name="文本框 696">
+            <a:extLst>
+              <a:ext uri="{FF2B5EF4-FFF2-40B4-BE49-F238E27FC236}">
+                <a16:creationId xmlns:a16="http://schemas.microsoft.com/office/drawing/2014/main" id="{A96771D7-2070-8EA0-BBE2-DA085813F41A}"/>
               </a:ext>
             </a:extLst>
           </p:cNvPr>
@@ -18693,8 +18570,8 @@
         </p:nvSpPr>
         <p:spPr>
           <a:xfrm>
-            <a:off x="4656565" y="2888676"/>
-            <a:ext cx="470000" cy="338554"/>
+            <a:off x="6255916" y="3133787"/>
+            <a:ext cx="461986" cy="338554"/>
           </a:xfrm>
           <a:prstGeom prst="rect">
             <a:avLst/>
@@ -18725,7 +18602,7 @@
                 <a:latin typeface="Times New Roman" panose="02020603050405020304" pitchFamily="18" charset="0"/>
                 <a:cs typeface="Times New Roman" panose="02020603050405020304" pitchFamily="18" charset="0"/>
               </a:rPr>
-              <a:t>UR</a:t>
+              <a:t>VT</a:t>
             </a:r>
             <a:endParaRPr lang="zh-CN" altLang="en-US" sz="1600" i="1" baseline="-25000" dirty="0">
               <a:solidFill>
@@ -18739,10 +18616,10 @@
       </p:sp>
       <p:sp>
         <p:nvSpPr>
-          <p:cNvPr id="695" name="文本框 694">
-            <a:extLst>
-              <a:ext uri="{FF2B5EF4-FFF2-40B4-BE49-F238E27FC236}">
-                <a16:creationId xmlns:a16="http://schemas.microsoft.com/office/drawing/2014/main" id="{A5C50E1A-5024-5A9F-7660-C2084EDC312F}"/>
+          <p:cNvPr id="698" name="文本框 697">
+            <a:extLst>
+              <a:ext uri="{FF2B5EF4-FFF2-40B4-BE49-F238E27FC236}">
+                <a16:creationId xmlns:a16="http://schemas.microsoft.com/office/drawing/2014/main" id="{2DF3CB69-63A2-B3DC-0144-99AB9254180D}"/>
               </a:ext>
             </a:extLst>
           </p:cNvPr>
@@ -18751,28 +18628,13 @@
         </p:nvSpPr>
         <p:spPr>
           <a:xfrm>
-            <a:off x="5189508" y="3258701"/>
-            <a:ext cx="461986" cy="338554"/>
+            <a:off x="11415488" y="1960212"/>
+            <a:ext cx="731290" cy="338554"/>
           </a:xfrm>
           <a:prstGeom prst="rect">
             <a:avLst/>
           </a:prstGeom>
-          <a:gradFill flip="none" rotWithShape="1">
-            <a:gsLst>
-              <a:gs pos="22000">
-                <a:schemeClr val="bg1"/>
-              </a:gs>
-              <a:gs pos="100000">
-                <a:schemeClr val="bg1">
-                  <a:alpha val="0"/>
-                </a:schemeClr>
-              </a:gs>
-            </a:gsLst>
-            <a:path path="circle">
-              <a:fillToRect l="50000" t="50000" r="50000" b="50000"/>
-            </a:path>
-            <a:tileRect/>
-          </a:gradFill>
+          <a:noFill/>
         </p:spPr>
         <p:txBody>
           <a:bodyPr wrap="none" rtlCol="0">
@@ -18781,29 +18643,20 @@
           <a:lstStyle/>
           <a:p>
             <a:r>
-              <a:rPr lang="en-US" altLang="zh-CN" sz="1600" i="1" dirty="0" err="1">
-                <a:solidFill>
-                  <a:srgbClr val="0000CD"/>
-                </a:solidFill>
-                <a:latin typeface="Times New Roman" panose="02020603050405020304" pitchFamily="18" charset="0"/>
-                <a:cs typeface="Times New Roman" panose="02020603050405020304" pitchFamily="18" charset="0"/>
-              </a:rPr>
-              <a:t>h</a:t>
-            </a:r>
-            <a:r>
-              <a:rPr lang="en-US" altLang="zh-CN" sz="1600" i="1" baseline="-25000" dirty="0" err="1">
-                <a:solidFill>
-                  <a:srgbClr val="0000CD"/>
-                </a:solidFill>
-                <a:latin typeface="Times New Roman" panose="02020603050405020304" pitchFamily="18" charset="0"/>
-                <a:cs typeface="Times New Roman" panose="02020603050405020304" pitchFamily="18" charset="0"/>
-              </a:rPr>
-              <a:t>HT</a:t>
+              <a:rPr lang="en-US" altLang="zh-CN" sz="1600" i="1" dirty="0">
+                <a:latin typeface="Times New Roman" panose="02020603050405020304" pitchFamily="18" charset="0"/>
+                <a:cs typeface="Times New Roman" panose="02020603050405020304" pitchFamily="18" charset="0"/>
+              </a:rPr>
+              <a:t>TPP</a:t>
+            </a:r>
+            <a:r>
+              <a:rPr lang="en-US" altLang="zh-CN" sz="1600" i="1" baseline="-25000" dirty="0">
+                <a:latin typeface="Times New Roman" panose="02020603050405020304" pitchFamily="18" charset="0"/>
+                <a:cs typeface="Times New Roman" panose="02020603050405020304" pitchFamily="18" charset="0"/>
+              </a:rPr>
+              <a:t>UR</a:t>
             </a:r>
             <a:endParaRPr lang="zh-CN" altLang="en-US" sz="1600" i="1" baseline="-25000" dirty="0">
-              <a:solidFill>
-                <a:srgbClr val="0000CD"/>
-              </a:solidFill>
               <a:latin typeface="Times New Roman" panose="02020603050405020304" pitchFamily="18" charset="0"/>
               <a:cs typeface="Times New Roman" panose="02020603050405020304" pitchFamily="18" charset="0"/>
             </a:endParaRPr>
@@ -18812,10 +18665,10 @@
       </p:sp>
       <p:sp>
         <p:nvSpPr>
-          <p:cNvPr id="697" name="文本框 696">
-            <a:extLst>
-              <a:ext uri="{FF2B5EF4-FFF2-40B4-BE49-F238E27FC236}">
-                <a16:creationId xmlns:a16="http://schemas.microsoft.com/office/drawing/2014/main" id="{A96771D7-2070-8EA0-BBE2-DA085813F41A}"/>
+          <p:cNvPr id="699" name="文本框 698">
+            <a:extLst>
+              <a:ext uri="{FF2B5EF4-FFF2-40B4-BE49-F238E27FC236}">
+                <a16:creationId xmlns:a16="http://schemas.microsoft.com/office/drawing/2014/main" id="{01DB1B03-FD95-A5DD-B402-50BD9002E032}"/>
               </a:ext>
             </a:extLst>
           </p:cNvPr>
@@ -18824,27 +18677,13 @@
         </p:nvSpPr>
         <p:spPr>
           <a:xfrm>
-            <a:off x="5703416" y="3202793"/>
-            <a:ext cx="461986" cy="338554"/>
+            <a:off x="11335585" y="2481635"/>
+            <a:ext cx="707245" cy="338554"/>
           </a:xfrm>
           <a:prstGeom prst="rect">
             <a:avLst/>
           </a:prstGeom>
-          <a:gradFill>
-            <a:gsLst>
-              <a:gs pos="24000">
-                <a:schemeClr val="bg1"/>
-              </a:gs>
-              <a:gs pos="100000">
-                <a:schemeClr val="bg1">
-                  <a:alpha val="0"/>
-                </a:schemeClr>
-              </a:gs>
-            </a:gsLst>
-            <a:path path="circle">
-              <a:fillToRect l="50000" t="50000" r="50000" b="50000"/>
-            </a:path>
-          </a:gradFill>
+          <a:noFill/>
         </p:spPr>
         <p:txBody>
           <a:bodyPr wrap="none" rtlCol="0">
@@ -18853,29 +18692,20 @@
           <a:lstStyle/>
           <a:p>
             <a:r>
-              <a:rPr lang="en-US" altLang="zh-CN" sz="1600" i="1" dirty="0" err="1">
-                <a:solidFill>
-                  <a:srgbClr val="0000CD"/>
-                </a:solidFill>
-                <a:latin typeface="Times New Roman" panose="02020603050405020304" pitchFamily="18" charset="0"/>
-                <a:cs typeface="Times New Roman" panose="02020603050405020304" pitchFamily="18" charset="0"/>
-              </a:rPr>
-              <a:t>h</a:t>
-            </a:r>
-            <a:r>
-              <a:rPr lang="en-US" altLang="zh-CN" sz="1600" i="1" baseline="-25000" dirty="0" err="1">
-                <a:solidFill>
-                  <a:srgbClr val="0000CD"/>
-                </a:solidFill>
-                <a:latin typeface="Times New Roman" panose="02020603050405020304" pitchFamily="18" charset="0"/>
-                <a:cs typeface="Times New Roman" panose="02020603050405020304" pitchFamily="18" charset="0"/>
-              </a:rPr>
-              <a:t>VT</a:t>
+              <a:rPr lang="en-US" altLang="zh-CN" sz="1600" i="1" dirty="0">
+                <a:latin typeface="Times New Roman" panose="02020603050405020304" pitchFamily="18" charset="0"/>
+                <a:cs typeface="Times New Roman" panose="02020603050405020304" pitchFamily="18" charset="0"/>
+              </a:rPr>
+              <a:t>TPP</a:t>
+            </a:r>
+            <a:r>
+              <a:rPr lang="en-US" altLang="zh-CN" sz="1600" i="1" baseline="-25000" dirty="0">
+                <a:latin typeface="Times New Roman" panose="02020603050405020304" pitchFamily="18" charset="0"/>
+                <a:cs typeface="Times New Roman" panose="02020603050405020304" pitchFamily="18" charset="0"/>
+              </a:rPr>
+              <a:t>LR</a:t>
             </a:r>
             <a:endParaRPr lang="zh-CN" altLang="en-US" sz="1600" i="1" baseline="-25000" dirty="0">
-              <a:solidFill>
-                <a:srgbClr val="0000CD"/>
-              </a:solidFill>
               <a:latin typeface="Times New Roman" panose="02020603050405020304" pitchFamily="18" charset="0"/>
               <a:cs typeface="Times New Roman" panose="02020603050405020304" pitchFamily="18" charset="0"/>
             </a:endParaRPr>
@@ -18884,10 +18714,10 @@
       </p:sp>
       <p:sp>
         <p:nvSpPr>
-          <p:cNvPr id="698" name="文本框 697">
-            <a:extLst>
-              <a:ext uri="{FF2B5EF4-FFF2-40B4-BE49-F238E27FC236}">
-                <a16:creationId xmlns:a16="http://schemas.microsoft.com/office/drawing/2014/main" id="{2DF3CB69-63A2-B3DC-0144-99AB9254180D}"/>
+          <p:cNvPr id="700" name="文本框 699">
+            <a:extLst>
+              <a:ext uri="{FF2B5EF4-FFF2-40B4-BE49-F238E27FC236}">
+                <a16:creationId xmlns:a16="http://schemas.microsoft.com/office/drawing/2014/main" id="{52A8ADF1-E2DB-6492-1D11-D53EB8815883}"/>
               </a:ext>
             </a:extLst>
           </p:cNvPr>
@@ -18896,8 +18726,8 @@
         </p:nvSpPr>
         <p:spPr>
           <a:xfrm>
-            <a:off x="11415488" y="1960212"/>
-            <a:ext cx="731290" cy="338554"/>
+            <a:off x="7564913" y="1918194"/>
+            <a:ext cx="639919" cy="338554"/>
           </a:xfrm>
           <a:prstGeom prst="rect">
             <a:avLst/>
@@ -18915,7 +18745,7 @@
                 <a:latin typeface="Times New Roman" panose="02020603050405020304" pitchFamily="18" charset="0"/>
                 <a:cs typeface="Times New Roman" panose="02020603050405020304" pitchFamily="18" charset="0"/>
               </a:rPr>
-              <a:t>TPP</a:t>
+              <a:t>HP</a:t>
             </a:r>
             <a:r>
               <a:rPr lang="en-US" altLang="zh-CN" sz="1600" i="1" baseline="-25000" dirty="0">
@@ -18933,10 +18763,10 @@
       </p:sp>
       <p:sp>
         <p:nvSpPr>
-          <p:cNvPr id="699" name="文本框 698">
-            <a:extLst>
-              <a:ext uri="{FF2B5EF4-FFF2-40B4-BE49-F238E27FC236}">
-                <a16:creationId xmlns:a16="http://schemas.microsoft.com/office/drawing/2014/main" id="{01DB1B03-FD95-A5DD-B402-50BD9002E032}"/>
+          <p:cNvPr id="701" name="文本框 700">
+            <a:extLst>
+              <a:ext uri="{FF2B5EF4-FFF2-40B4-BE49-F238E27FC236}">
+                <a16:creationId xmlns:a16="http://schemas.microsoft.com/office/drawing/2014/main" id="{0E0344B6-55C6-DA8D-C738-0A0E7B1E1CDB}"/>
               </a:ext>
             </a:extLst>
           </p:cNvPr>
@@ -18945,8 +18775,8 @@
         </p:nvSpPr>
         <p:spPr>
           <a:xfrm>
-            <a:off x="11335585" y="2481635"/>
-            <a:ext cx="707245" cy="338554"/>
+            <a:off x="7425612" y="2392333"/>
+            <a:ext cx="615874" cy="338554"/>
           </a:xfrm>
           <a:prstGeom prst="rect">
             <a:avLst/>
@@ -18964,7 +18794,7 @@
                 <a:latin typeface="Times New Roman" panose="02020603050405020304" pitchFamily="18" charset="0"/>
                 <a:cs typeface="Times New Roman" panose="02020603050405020304" pitchFamily="18" charset="0"/>
               </a:rPr>
-              <a:t>TPP</a:t>
+              <a:t>HP</a:t>
             </a:r>
             <a:r>
               <a:rPr lang="en-US" altLang="zh-CN" sz="1600" i="1" baseline="-25000" dirty="0">
@@ -18982,10 +18812,10 @@
       </p:sp>
       <p:sp>
         <p:nvSpPr>
-          <p:cNvPr id="700" name="文本框 699">
-            <a:extLst>
-              <a:ext uri="{FF2B5EF4-FFF2-40B4-BE49-F238E27FC236}">
-                <a16:creationId xmlns:a16="http://schemas.microsoft.com/office/drawing/2014/main" id="{52A8ADF1-E2DB-6492-1D11-D53EB8815883}"/>
+          <p:cNvPr id="733" name="文本框 732">
+            <a:extLst>
+              <a:ext uri="{FF2B5EF4-FFF2-40B4-BE49-F238E27FC236}">
+                <a16:creationId xmlns:a16="http://schemas.microsoft.com/office/drawing/2014/main" id="{2A2896AD-C315-E106-F81F-9121EA723B13}"/>
               </a:ext>
             </a:extLst>
           </p:cNvPr>
@@ -18994,105 +18824,7 @@
         </p:nvSpPr>
         <p:spPr>
           <a:xfrm>
-            <a:off x="7564913" y="1918194"/>
-            <a:ext cx="639919" cy="338554"/>
-          </a:xfrm>
-          <a:prstGeom prst="rect">
-            <a:avLst/>
-          </a:prstGeom>
-          <a:noFill/>
-        </p:spPr>
-        <p:txBody>
-          <a:bodyPr wrap="none" rtlCol="0">
-            <a:spAutoFit/>
-          </a:bodyPr>
-          <a:lstStyle/>
-          <a:p>
-            <a:r>
-              <a:rPr lang="en-US" altLang="zh-CN" sz="1600" i="1" dirty="0">
-                <a:latin typeface="Times New Roman" panose="02020603050405020304" pitchFamily="18" charset="0"/>
-                <a:cs typeface="Times New Roman" panose="02020603050405020304" pitchFamily="18" charset="0"/>
-              </a:rPr>
-              <a:t>HP</a:t>
-            </a:r>
-            <a:r>
-              <a:rPr lang="en-US" altLang="zh-CN" sz="1600" i="1" baseline="-25000" dirty="0">
-                <a:latin typeface="Times New Roman" panose="02020603050405020304" pitchFamily="18" charset="0"/>
-                <a:cs typeface="Times New Roman" panose="02020603050405020304" pitchFamily="18" charset="0"/>
-              </a:rPr>
-              <a:t>UR</a:t>
-            </a:r>
-            <a:endParaRPr lang="zh-CN" altLang="en-US" sz="1600" i="1" baseline="-25000" dirty="0">
-              <a:latin typeface="Times New Roman" panose="02020603050405020304" pitchFamily="18" charset="0"/>
-              <a:cs typeface="Times New Roman" panose="02020603050405020304" pitchFamily="18" charset="0"/>
-            </a:endParaRPr>
-          </a:p>
-        </p:txBody>
-      </p:sp>
-      <p:sp>
-        <p:nvSpPr>
-          <p:cNvPr id="701" name="文本框 700">
-            <a:extLst>
-              <a:ext uri="{FF2B5EF4-FFF2-40B4-BE49-F238E27FC236}">
-                <a16:creationId xmlns:a16="http://schemas.microsoft.com/office/drawing/2014/main" id="{0E0344B6-55C6-DA8D-C738-0A0E7B1E1CDB}"/>
-              </a:ext>
-            </a:extLst>
-          </p:cNvPr>
-          <p:cNvSpPr txBox="1"/>
-          <p:nvPr/>
-        </p:nvSpPr>
-        <p:spPr>
-          <a:xfrm>
-            <a:off x="7425612" y="2392333"/>
-            <a:ext cx="615874" cy="338554"/>
-          </a:xfrm>
-          <a:prstGeom prst="rect">
-            <a:avLst/>
-          </a:prstGeom>
-          <a:noFill/>
-        </p:spPr>
-        <p:txBody>
-          <a:bodyPr wrap="none" rtlCol="0">
-            <a:spAutoFit/>
-          </a:bodyPr>
-          <a:lstStyle/>
-          <a:p>
-            <a:r>
-              <a:rPr lang="en-US" altLang="zh-CN" sz="1600" i="1" dirty="0">
-                <a:latin typeface="Times New Roman" panose="02020603050405020304" pitchFamily="18" charset="0"/>
-                <a:cs typeface="Times New Roman" panose="02020603050405020304" pitchFamily="18" charset="0"/>
-              </a:rPr>
-              <a:t>HP</a:t>
-            </a:r>
-            <a:r>
-              <a:rPr lang="en-US" altLang="zh-CN" sz="1600" i="1" baseline="-25000" dirty="0">
-                <a:latin typeface="Times New Roman" panose="02020603050405020304" pitchFamily="18" charset="0"/>
-                <a:cs typeface="Times New Roman" panose="02020603050405020304" pitchFamily="18" charset="0"/>
-              </a:rPr>
-              <a:t>LR</a:t>
-            </a:r>
-            <a:endParaRPr lang="zh-CN" altLang="en-US" sz="1600" i="1" baseline="-25000" dirty="0">
-              <a:latin typeface="Times New Roman" panose="02020603050405020304" pitchFamily="18" charset="0"/>
-              <a:cs typeface="Times New Roman" panose="02020603050405020304" pitchFamily="18" charset="0"/>
-            </a:endParaRPr>
-          </a:p>
-        </p:txBody>
-      </p:sp>
-      <p:sp>
-        <p:nvSpPr>
-          <p:cNvPr id="733" name="文本框 732">
-            <a:extLst>
-              <a:ext uri="{FF2B5EF4-FFF2-40B4-BE49-F238E27FC236}">
-                <a16:creationId xmlns:a16="http://schemas.microsoft.com/office/drawing/2014/main" id="{2A2896AD-C315-E106-F81F-9121EA723B13}"/>
-              </a:ext>
-            </a:extLst>
-          </p:cNvPr>
-          <p:cNvSpPr txBox="1"/>
-          <p:nvPr/>
-        </p:nvSpPr>
-        <p:spPr>
-          <a:xfrm>
-            <a:off x="5982856" y="2339198"/>
+            <a:off x="5100831" y="2499831"/>
             <a:ext cx="473206" cy="338554"/>
           </a:xfrm>
           <a:prstGeom prst="rect">
@@ -19150,7 +18882,7 @@
         </p:nvSpPr>
         <p:spPr>
           <a:xfrm>
-            <a:off x="6550947" y="2725323"/>
+            <a:off x="5589130" y="2836295"/>
             <a:ext cx="506870" cy="338554"/>
           </a:xfrm>
           <a:prstGeom prst="rect">
@@ -19208,7 +18940,7 @@
         </p:nvSpPr>
         <p:spPr>
           <a:xfrm>
-            <a:off x="6840000" y="3089424"/>
+            <a:off x="6239746" y="2804651"/>
             <a:ext cx="593432" cy="338554"/>
           </a:xfrm>
           <a:prstGeom prst="rect">
@@ -20078,7 +19810,7 @@
         </p:nvSpPr>
         <p:spPr>
           <a:xfrm>
-            <a:off x="9467851" y="3325689"/>
+            <a:off x="9467851" y="3278860"/>
             <a:ext cx="212230" cy="338554"/>
           </a:xfrm>
           <a:prstGeom prst="rect">
@@ -20315,7 +20047,7 @@
         </p:nvSpPr>
         <p:spPr>
           <a:xfrm>
-            <a:off x="8902686" y="3552494"/>
+            <a:off x="8918657" y="3552494"/>
             <a:ext cx="461986" cy="338554"/>
           </a:xfrm>
           <a:prstGeom prst="rect">
@@ -20792,10 +20524,10 @@
           </a:prstGeom>
           <a:gradFill>
             <a:gsLst>
-              <a:gs pos="27000">
+              <a:gs pos="17000">
                 <a:schemeClr val="bg1"/>
               </a:gs>
-              <a:gs pos="43000">
+              <a:gs pos="100000">
                 <a:schemeClr val="bg1">
                   <a:alpha val="0"/>
                 </a:schemeClr>
@@ -21073,6 +20805,109 @@
           </a:p>
         </p:txBody>
       </p:sp>
+      <p:sp>
+        <p:nvSpPr>
+          <p:cNvPr id="17" name="文本框 16">
+            <a:extLst>
+              <a:ext uri="{FF2B5EF4-FFF2-40B4-BE49-F238E27FC236}">
+                <a16:creationId xmlns:a16="http://schemas.microsoft.com/office/drawing/2014/main" id="{61D3D5D1-4304-8A52-B7F5-CDFD12DD61BD}"/>
+              </a:ext>
+            </a:extLst>
+          </p:cNvPr>
+          <p:cNvSpPr txBox="1"/>
+          <p:nvPr/>
+        </p:nvSpPr>
+        <p:spPr>
+          <a:xfrm>
+            <a:off x="4146789" y="2955645"/>
+            <a:ext cx="445956" cy="338554"/>
+          </a:xfrm>
+          <a:prstGeom prst="rect">
+            <a:avLst/>
+          </a:prstGeom>
+          <a:noFill/>
+        </p:spPr>
+        <p:txBody>
+          <a:bodyPr wrap="none" rtlCol="0">
+            <a:spAutoFit/>
+          </a:bodyPr>
+          <a:lstStyle/>
+          <a:p>
+            <a:r>
+              <a:rPr lang="en-US" altLang="zh-CN" sz="1600" i="1" dirty="0" err="1">
+                <a:solidFill>
+                  <a:srgbClr val="0000CD"/>
+                </a:solidFill>
+                <a:latin typeface="Times New Roman" panose="02020603050405020304" pitchFamily="18" charset="0"/>
+                <a:cs typeface="Times New Roman" panose="02020603050405020304" pitchFamily="18" charset="0"/>
+              </a:rPr>
+              <a:t>h</a:t>
+            </a:r>
+            <a:r>
+              <a:rPr lang="en-US" altLang="zh-CN" sz="1600" i="1" baseline="-25000" dirty="0" err="1">
+                <a:solidFill>
+                  <a:srgbClr val="0000CD"/>
+                </a:solidFill>
+                <a:latin typeface="Times New Roman" panose="02020603050405020304" pitchFamily="18" charset="0"/>
+                <a:cs typeface="Times New Roman" panose="02020603050405020304" pitchFamily="18" charset="0"/>
+              </a:rPr>
+              <a:t>LR</a:t>
+            </a:r>
+            <a:endParaRPr lang="zh-CN" altLang="en-US" sz="1600" i="1" baseline="-25000" dirty="0">
+              <a:solidFill>
+                <a:srgbClr val="0000CD"/>
+              </a:solidFill>
+              <a:latin typeface="Times New Roman" panose="02020603050405020304" pitchFamily="18" charset="0"/>
+              <a:cs typeface="Times New Roman" panose="02020603050405020304" pitchFamily="18" charset="0"/>
+            </a:endParaRPr>
+          </a:p>
+        </p:txBody>
+      </p:sp>
+      <p:cxnSp>
+        <p:nvCxnSpPr>
+          <p:cNvPr id="20" name="直接箭头连接符 19">
+            <a:extLst>
+              <a:ext uri="{FF2B5EF4-FFF2-40B4-BE49-F238E27FC236}">
+                <a16:creationId xmlns:a16="http://schemas.microsoft.com/office/drawing/2014/main" id="{A63BF9C7-983F-5C2B-2264-47912110C621}"/>
+              </a:ext>
+            </a:extLst>
+          </p:cNvPr>
+          <p:cNvCxnSpPr>
+            <a:cxnSpLocks/>
+          </p:cNvCxnSpPr>
+          <p:nvPr/>
+        </p:nvCxnSpPr>
+        <p:spPr>
+          <a:xfrm rot="935833" flipV="1">
+            <a:off x="8618199" y="3421285"/>
+            <a:ext cx="0" cy="363536"/>
+          </a:xfrm>
+          <a:prstGeom prst="straightConnector1">
+            <a:avLst/>
+          </a:prstGeom>
+          <a:ln w="12700">
+            <a:solidFill>
+              <a:srgbClr val="0000CD"/>
+            </a:solidFill>
+            <a:headEnd type="triangle"/>
+            <a:tailEnd type="triangle"/>
+          </a:ln>
+        </p:spPr>
+        <p:style>
+          <a:lnRef idx="2">
+            <a:schemeClr val="accent1"/>
+          </a:lnRef>
+          <a:fillRef idx="0">
+            <a:schemeClr val="accent1"/>
+          </a:fillRef>
+          <a:effectRef idx="1">
+            <a:schemeClr val="accent1"/>
+          </a:effectRef>
+          <a:fontRef idx="minor">
+            <a:schemeClr val="tx1"/>
+          </a:fontRef>
+        </p:style>
+      </p:cxnSp>
     </p:spTree>
     <p:extLst>
       <p:ext uri="{BB962C8B-B14F-4D97-AF65-F5344CB8AC3E}">
@@ -21319,7 +21154,7 @@
       </p:sp>
       <p:pic>
         <p:nvPicPr>
-          <p:cNvPr id="3" name="图片 2" descr="图标&#10;&#10;AI 生成的内容可能不正确。">
+          <p:cNvPr id="3" name="图片 2">
             <a:extLst>
               <a:ext uri="{FF2B5EF4-FFF2-40B4-BE49-F238E27FC236}">
                 <a16:creationId xmlns:a16="http://schemas.microsoft.com/office/drawing/2014/main" id="{4CEAE2BB-ED8C-A2AD-B6C5-083DFBB5BF78}"/>
@@ -21339,14 +21174,13 @@
               </a:ext>
             </a:extLst>
           </a:blip>
-          <a:stretch>
-            <a:fillRect/>
-          </a:stretch>
+          <a:srcRect/>
+          <a:stretch/>
         </p:blipFill>
         <p:spPr>
           <a:xfrm>
             <a:off x="712269" y="400803"/>
-            <a:ext cx="10767461" cy="6056394"/>
+            <a:ext cx="10767460" cy="6056394"/>
           </a:xfrm>
           <a:prstGeom prst="rect">
             <a:avLst/>
@@ -21369,7 +21203,7 @@
         </p:nvCxnSpPr>
         <p:spPr>
           <a:xfrm flipV="1">
-            <a:off x="9453377" y="1026160"/>
+            <a:off x="8217991" y="1034628"/>
             <a:ext cx="0" cy="1057248"/>
           </a:xfrm>
           <a:prstGeom prst="straightConnector1">
@@ -21411,7 +21245,7 @@
         </p:nvSpPr>
         <p:spPr>
           <a:xfrm>
-            <a:off x="9479550" y="856883"/>
+            <a:off x="8244164" y="865351"/>
             <a:ext cx="449547" cy="338554"/>
           </a:xfrm>
           <a:prstGeom prst="rect">
@@ -21896,7 +21730,7 @@
         <p:spPr>
           <a:xfrm>
             <a:off x="4343400" y="2105026"/>
-            <a:ext cx="5109977" cy="0"/>
+            <a:ext cx="3874591" cy="2426"/>
           </a:xfrm>
           <a:prstGeom prst="straightConnector1">
             <a:avLst/>
@@ -21981,7 +21815,7 @@
         </p:nvSpPr>
         <p:spPr>
           <a:xfrm>
-            <a:off x="6697852" y="1747311"/>
+            <a:off x="6135880" y="1734723"/>
             <a:ext cx="401072" cy="338554"/>
           </a:xfrm>
           <a:prstGeom prst="rect">
@@ -22223,7 +22057,7 @@
         </p:nvSpPr>
         <p:spPr>
           <a:xfrm>
-            <a:off x="4330004" y="2503682"/>
+            <a:off x="4319470" y="2521654"/>
             <a:ext cx="381836" cy="338554"/>
           </a:xfrm>
           <a:prstGeom prst="rect">
@@ -22281,7 +22115,7 @@
         </p:nvSpPr>
         <p:spPr>
           <a:xfrm>
-            <a:off x="5624877" y="3088881"/>
+            <a:off x="5497878" y="3088881"/>
             <a:ext cx="1043876" cy="338554"/>
           </a:xfrm>
           <a:prstGeom prst="rect">
@@ -22589,7 +22423,7 @@
         </p:nvSpPr>
         <p:spPr>
           <a:xfrm>
-            <a:off x="4181081" y="3556798"/>
+            <a:off x="4226643" y="3557272"/>
             <a:ext cx="481222" cy="338554"/>
           </a:xfrm>
           <a:prstGeom prst="rect">
@@ -23000,7 +22834,7 @@
         </p:nvCxnSpPr>
         <p:spPr>
           <a:xfrm>
-            <a:off x="9798689" y="2113360"/>
+            <a:off x="8563303" y="2117595"/>
             <a:ext cx="421636" cy="0"/>
           </a:xfrm>
           <a:prstGeom prst="straightConnector1">
@@ -23044,7 +22878,7 @@
         </p:nvCxnSpPr>
         <p:spPr>
           <a:xfrm>
-            <a:off x="9798689" y="4793063"/>
+            <a:off x="8563303" y="4805764"/>
             <a:ext cx="421636" cy="0"/>
           </a:xfrm>
           <a:prstGeom prst="straightConnector1">
@@ -23086,7 +22920,7 @@
         </p:nvSpPr>
         <p:spPr>
           <a:xfrm>
-            <a:off x="10329908" y="3274589"/>
+            <a:off x="9094522" y="3283057"/>
             <a:ext cx="506870" cy="338554"/>
           </a:xfrm>
           <a:prstGeom prst="rect">
@@ -23144,7 +22978,7 @@
         </p:nvSpPr>
         <p:spPr>
           <a:xfrm>
-            <a:off x="10204433" y="1944083"/>
+            <a:off x="8969047" y="1952551"/>
             <a:ext cx="506870" cy="338554"/>
           </a:xfrm>
           <a:prstGeom prst="rect">
@@ -23202,7 +23036,7 @@
         </p:nvSpPr>
         <p:spPr>
           <a:xfrm>
-            <a:off x="10204433" y="4609748"/>
+            <a:off x="8969047" y="4618216"/>
             <a:ext cx="506870" cy="338554"/>
           </a:xfrm>
           <a:prstGeom prst="rect">
@@ -23262,7 +23096,7 @@
         </p:nvCxnSpPr>
         <p:spPr>
           <a:xfrm>
-            <a:off x="9798689" y="3443866"/>
+            <a:off x="8563303" y="3452334"/>
             <a:ext cx="551917" cy="0"/>
           </a:xfrm>
           <a:prstGeom prst="straightConnector1">
@@ -23441,7 +23275,7 @@
         </p:nvCxnSpPr>
         <p:spPr>
           <a:xfrm flipV="1">
-            <a:off x="9453377" y="3715915"/>
+            <a:off x="8217991" y="3715915"/>
             <a:ext cx="0" cy="1057248"/>
           </a:xfrm>
           <a:prstGeom prst="straightConnector1">
@@ -23483,7 +23317,7 @@
         </p:nvSpPr>
         <p:spPr>
           <a:xfrm>
-            <a:off x="9479550" y="3550448"/>
+            <a:off x="8244164" y="3550448"/>
             <a:ext cx="449547" cy="338554"/>
           </a:xfrm>
           <a:prstGeom prst="rect">

--- a/HER05/01 - Mathematical Modeling/Sketch/Forces and Moments Sketch.pptx
+++ b/HER05/01 - Mathematical Modeling/Sketch/Forces and Moments Sketch.pptx
@@ -122,7 +122,7 @@
 <file path=ppt/revisionInfo.xml><?xml version="1.0" encoding="utf-8"?>
 <p1510:revInfo xmlns:a="http://schemas.openxmlformats.org/drawingml/2006/main" xmlns:r="http://schemas.openxmlformats.org/officeDocument/2006/relationships" xmlns:p1510="http://schemas.microsoft.com/office/powerpoint/2015/10/main">
   <p1510:revLst>
-    <p1510:client id="{CDC5B0EF-6BEB-4658-A9FF-CB66F6FA6C1E}" v="427" dt="2025-05-30T23:12:18.535"/>
+    <p1510:client id="{CDC5B0EF-6BEB-4658-A9FF-CB66F6FA6C1E}" v="433" dt="2025-06-02T21:21:55.276"/>
   </p1510:revLst>
 </p1510:revInfo>
 </file>
@@ -132,12 +132,12 @@
   <pc:docChgLst>
     <pc:chgData name="Li, Hanchen F" userId="3aee791e-6a2d-4da7-a77b-fbdf7bf15886" providerId="ADAL" clId="{CDC5B0EF-6BEB-4658-A9FF-CB66F6FA6C1E}"/>
     <pc:docChg chg="undo redo custSel addSld delSld modSld modMainMaster modNotesMaster">
-      <pc:chgData name="Li, Hanchen F" userId="3aee791e-6a2d-4da7-a77b-fbdf7bf15886" providerId="ADAL" clId="{CDC5B0EF-6BEB-4658-A9FF-CB66F6FA6C1E}" dt="2025-05-30T23:13:44.554" v="9565" actId="207"/>
+      <pc:chgData name="Li, Hanchen F" userId="3aee791e-6a2d-4da7-a77b-fbdf7bf15886" providerId="ADAL" clId="{CDC5B0EF-6BEB-4658-A9FF-CB66F6FA6C1E}" dt="2025-06-02T22:09:19.571" v="9897" actId="114"/>
       <pc:docMkLst>
         <pc:docMk/>
       </pc:docMkLst>
       <pc:sldChg chg="addSp delSp modSp new mod">
-        <pc:chgData name="Li, Hanchen F" userId="3aee791e-6a2d-4da7-a77b-fbdf7bf15886" providerId="ADAL" clId="{CDC5B0EF-6BEB-4658-A9FF-CB66F6FA6C1E}" dt="2025-05-30T23:13:44.554" v="9565" actId="207"/>
+        <pc:chgData name="Li, Hanchen F" userId="3aee791e-6a2d-4da7-a77b-fbdf7bf15886" providerId="ADAL" clId="{CDC5B0EF-6BEB-4658-A9FF-CB66F6FA6C1E}" dt="2025-06-02T21:23:35.009" v="9866" actId="478"/>
         <pc:sldMkLst>
           <pc:docMk/>
           <pc:sldMk cId="2152317508" sldId="256"/>
@@ -239,7 +239,7 @@
           </ac:spMkLst>
         </pc:spChg>
         <pc:spChg chg="add mod">
-          <ac:chgData name="Li, Hanchen F" userId="3aee791e-6a2d-4da7-a77b-fbdf7bf15886" providerId="ADAL" clId="{CDC5B0EF-6BEB-4658-A9FF-CB66F6FA6C1E}" dt="2025-05-26T23:54:02.443" v="8826" actId="1076"/>
+          <ac:chgData name="Li, Hanchen F" userId="3aee791e-6a2d-4da7-a77b-fbdf7bf15886" providerId="ADAL" clId="{CDC5B0EF-6BEB-4658-A9FF-CB66F6FA6C1E}" dt="2025-06-02T21:22:19.352" v="9853" actId="1076"/>
           <ac:spMkLst>
             <pc:docMk/>
             <pc:sldMk cId="2152317508" sldId="256"/>
@@ -254,12 +254,44 @@
             <ac:spMk id="17" creationId="{61D3D5D1-4304-8A52-B7F5-CDFD12DD61BD}"/>
           </ac:spMkLst>
         </pc:spChg>
+        <pc:spChg chg="add mod">
+          <ac:chgData name="Li, Hanchen F" userId="3aee791e-6a2d-4da7-a77b-fbdf7bf15886" providerId="ADAL" clId="{CDC5B0EF-6BEB-4658-A9FF-CB66F6FA6C1E}" dt="2025-06-02T21:23:05.460" v="9863" actId="1076"/>
+          <ac:spMkLst>
+            <pc:docMk/>
+            <pc:sldMk cId="2152317508" sldId="256"/>
+            <ac:spMk id="25" creationId="{1660E916-C2FE-42A2-C6D7-9DDF07E1CD2C}"/>
+          </ac:spMkLst>
+        </pc:spChg>
+        <pc:spChg chg="add del mod">
+          <ac:chgData name="Li, Hanchen F" userId="3aee791e-6a2d-4da7-a77b-fbdf7bf15886" providerId="ADAL" clId="{CDC5B0EF-6BEB-4658-A9FF-CB66F6FA6C1E}" dt="2025-06-02T21:21:58.886" v="9848" actId="478"/>
+          <ac:spMkLst>
+            <pc:docMk/>
+            <pc:sldMk cId="2152317508" sldId="256"/>
+            <ac:spMk id="28" creationId="{59778F99-9FE1-60A0-1734-8D3358AEDEEB}"/>
+          </ac:spMkLst>
+        </pc:spChg>
+        <pc:spChg chg="add mod">
+          <ac:chgData name="Li, Hanchen F" userId="3aee791e-6a2d-4da7-a77b-fbdf7bf15886" providerId="ADAL" clId="{CDC5B0EF-6BEB-4658-A9FF-CB66F6FA6C1E}" dt="2025-06-02T21:22:22.882" v="9854" actId="1076"/>
+          <ac:spMkLst>
+            <pc:docMk/>
+            <pc:sldMk cId="2152317508" sldId="256"/>
+            <ac:spMk id="29" creationId="{054E6DA5-FF54-1C95-99AC-1044B339546B}"/>
+          </ac:spMkLst>
+        </pc:spChg>
         <pc:spChg chg="add mod topLvl">
           <ac:chgData name="Li, Hanchen F" userId="3aee791e-6a2d-4da7-a77b-fbdf7bf15886" providerId="ADAL" clId="{CDC5B0EF-6BEB-4658-A9FF-CB66F6FA6C1E}" dt="2025-05-30T22:35:23.784" v="8872" actId="14826"/>
           <ac:spMkLst>
             <pc:docMk/>
             <pc:sldMk cId="2152317508" sldId="256"/>
             <ac:spMk id="30" creationId="{03E7375E-B3C1-217F-067E-365A732738CA}"/>
+          </ac:spMkLst>
+        </pc:spChg>
+        <pc:spChg chg="add del mod">
+          <ac:chgData name="Li, Hanchen F" userId="3aee791e-6a2d-4da7-a77b-fbdf7bf15886" providerId="ADAL" clId="{CDC5B0EF-6BEB-4658-A9FF-CB66F6FA6C1E}" dt="2025-06-02T21:23:35.009" v="9866" actId="478"/>
+          <ac:spMkLst>
+            <pc:docMk/>
+            <pc:sldMk cId="2152317508" sldId="256"/>
+            <ac:spMk id="33" creationId="{2CB2C986-2354-CB99-B566-34CF59B975CB}"/>
           </ac:spMkLst>
         </pc:spChg>
         <pc:spChg chg="add mod ord topLvl">
@@ -383,7 +415,7 @@
           </ac:spMkLst>
         </pc:spChg>
         <pc:spChg chg="add mod ord">
-          <ac:chgData name="Li, Hanchen F" userId="3aee791e-6a2d-4da7-a77b-fbdf7bf15886" providerId="ADAL" clId="{CDC5B0EF-6BEB-4658-A9FF-CB66F6FA6C1E}" dt="2025-05-23T16:54:39.979" v="7719" actId="1076"/>
+          <ac:chgData name="Li, Hanchen F" userId="3aee791e-6a2d-4da7-a77b-fbdf7bf15886" providerId="ADAL" clId="{CDC5B0EF-6BEB-4658-A9FF-CB66F6FA6C1E}" dt="2025-05-30T23:27:54.734" v="9633" actId="1036"/>
           <ac:spMkLst>
             <pc:docMk/>
             <pc:sldMk cId="2152317508" sldId="256"/>
@@ -775,7 +807,7 @@
           </ac:spMkLst>
         </pc:spChg>
         <pc:spChg chg="add mod">
-          <ac:chgData name="Li, Hanchen F" userId="3aee791e-6a2d-4da7-a77b-fbdf7bf15886" providerId="ADAL" clId="{CDC5B0EF-6BEB-4658-A9FF-CB66F6FA6C1E}" dt="2025-05-23T23:40:04.556" v="8220" actId="1076"/>
+          <ac:chgData name="Li, Hanchen F" userId="3aee791e-6a2d-4da7-a77b-fbdf7bf15886" providerId="ADAL" clId="{CDC5B0EF-6BEB-4658-A9FF-CB66F6FA6C1E}" dt="2025-05-30T23:27:54.734" v="9633" actId="1036"/>
           <ac:spMkLst>
             <pc:docMk/>
             <pc:sldMk cId="2152317508" sldId="256"/>
@@ -783,7 +815,7 @@
           </ac:spMkLst>
         </pc:spChg>
         <pc:spChg chg="add mod">
-          <ac:chgData name="Li, Hanchen F" userId="3aee791e-6a2d-4da7-a77b-fbdf7bf15886" providerId="ADAL" clId="{CDC5B0EF-6BEB-4658-A9FF-CB66F6FA6C1E}" dt="2025-05-23T23:40:01.476" v="8219" actId="1076"/>
+          <ac:chgData name="Li, Hanchen F" userId="3aee791e-6a2d-4da7-a77b-fbdf7bf15886" providerId="ADAL" clId="{CDC5B0EF-6BEB-4658-A9FF-CB66F6FA6C1E}" dt="2025-05-30T23:28:03.341" v="9651" actId="1037"/>
           <ac:spMkLst>
             <pc:docMk/>
             <pc:sldMk cId="2152317508" sldId="256"/>
@@ -791,7 +823,7 @@
           </ac:spMkLst>
         </pc:spChg>
         <pc:spChg chg="add mod">
-          <ac:chgData name="Li, Hanchen F" userId="3aee791e-6a2d-4da7-a77b-fbdf7bf15886" providerId="ADAL" clId="{CDC5B0EF-6BEB-4658-A9FF-CB66F6FA6C1E}" dt="2025-05-23T16:54:39.979" v="7719" actId="1076"/>
+          <ac:chgData name="Li, Hanchen F" userId="3aee791e-6a2d-4da7-a77b-fbdf7bf15886" providerId="ADAL" clId="{CDC5B0EF-6BEB-4658-A9FF-CB66F6FA6C1E}" dt="2025-05-30T23:27:54.734" v="9633" actId="1036"/>
           <ac:spMkLst>
             <pc:docMk/>
             <pc:sldMk cId="2152317508" sldId="256"/>
@@ -799,7 +831,7 @@
           </ac:spMkLst>
         </pc:spChg>
         <pc:spChg chg="add mod">
-          <ac:chgData name="Li, Hanchen F" userId="3aee791e-6a2d-4da7-a77b-fbdf7bf15886" providerId="ADAL" clId="{CDC5B0EF-6BEB-4658-A9FF-CB66F6FA6C1E}" dt="2025-05-23T23:39:57.228" v="8217" actId="1076"/>
+          <ac:chgData name="Li, Hanchen F" userId="3aee791e-6a2d-4da7-a77b-fbdf7bf15886" providerId="ADAL" clId="{CDC5B0EF-6BEB-4658-A9FF-CB66F6FA6C1E}" dt="2025-05-30T23:28:06.107" v="9655" actId="1035"/>
           <ac:spMkLst>
             <pc:docMk/>
             <pc:sldMk cId="2152317508" sldId="256"/>
@@ -807,7 +839,7 @@
           </ac:spMkLst>
         </pc:spChg>
         <pc:spChg chg="add mod">
-          <ac:chgData name="Li, Hanchen F" userId="3aee791e-6a2d-4da7-a77b-fbdf7bf15886" providerId="ADAL" clId="{CDC5B0EF-6BEB-4658-A9FF-CB66F6FA6C1E}" dt="2025-05-23T23:39:59.387" v="8218" actId="1076"/>
+          <ac:chgData name="Li, Hanchen F" userId="3aee791e-6a2d-4da7-a77b-fbdf7bf15886" providerId="ADAL" clId="{CDC5B0EF-6BEB-4658-A9FF-CB66F6FA6C1E}" dt="2025-05-30T23:28:01.614" v="9649" actId="1036"/>
           <ac:spMkLst>
             <pc:docMk/>
             <pc:sldMk cId="2152317508" sldId="256"/>
@@ -815,7 +847,7 @@
           </ac:spMkLst>
         </pc:spChg>
         <pc:spChg chg="add mod">
-          <ac:chgData name="Li, Hanchen F" userId="3aee791e-6a2d-4da7-a77b-fbdf7bf15886" providerId="ADAL" clId="{CDC5B0EF-6BEB-4658-A9FF-CB66F6FA6C1E}" dt="2025-05-23T23:40:07.182" v="8221" actId="1076"/>
+          <ac:chgData name="Li, Hanchen F" userId="3aee791e-6a2d-4da7-a77b-fbdf7bf15886" providerId="ADAL" clId="{CDC5B0EF-6BEB-4658-A9FF-CB66F6FA6C1E}" dt="2025-05-30T23:27:59.429" v="9641" actId="1035"/>
           <ac:spMkLst>
             <pc:docMk/>
             <pc:sldMk cId="2152317508" sldId="256"/>
@@ -951,7 +983,7 @@
           </ac:spMkLst>
         </pc:spChg>
         <pc:spChg chg="add mod">
-          <ac:chgData name="Li, Hanchen F" userId="3aee791e-6a2d-4da7-a77b-fbdf7bf15886" providerId="ADAL" clId="{CDC5B0EF-6BEB-4658-A9FF-CB66F6FA6C1E}" dt="2025-05-22T23:35:09.078" v="3625" actId="1076"/>
+          <ac:chgData name="Li, Hanchen F" userId="3aee791e-6a2d-4da7-a77b-fbdf7bf15886" providerId="ADAL" clId="{CDC5B0EF-6BEB-4658-A9FF-CB66F6FA6C1E}" dt="2025-05-30T23:34:28.615" v="9798" actId="1038"/>
           <ac:spMkLst>
             <pc:docMk/>
             <pc:sldMk cId="2152317508" sldId="256"/>
@@ -998,14 +1030,6 @@
             <ac:spMk id="691" creationId="{38987C34-3EF9-7FF9-A322-6AC7EAF3701F}"/>
           </ac:spMkLst>
         </pc:spChg>
-        <pc:spChg chg="add del mod">
-          <ac:chgData name="Li, Hanchen F" userId="3aee791e-6a2d-4da7-a77b-fbdf7bf15886" providerId="ADAL" clId="{CDC5B0EF-6BEB-4658-A9FF-CB66F6FA6C1E}" dt="2025-05-30T22:37:43.005" v="9028" actId="478"/>
-          <ac:spMkLst>
-            <pc:docMk/>
-            <pc:sldMk cId="2152317508" sldId="256"/>
-            <ac:spMk id="693" creationId="{3F9A48A1-BA63-64E8-1F9E-D38216DB2FFD}"/>
-          </ac:spMkLst>
-        </pc:spChg>
         <pc:spChg chg="add mod">
           <ac:chgData name="Li, Hanchen F" userId="3aee791e-6a2d-4da7-a77b-fbdf7bf15886" providerId="ADAL" clId="{CDC5B0EF-6BEB-4658-A9FF-CB66F6FA6C1E}" dt="2025-05-30T22:37:53.628" v="9033" actId="1076"/>
           <ac:spMkLst>
@@ -1023,7 +1047,7 @@
           </ac:spMkLst>
         </pc:spChg>
         <pc:spChg chg="add mod">
-          <ac:chgData name="Li, Hanchen F" userId="3aee791e-6a2d-4da7-a77b-fbdf7bf15886" providerId="ADAL" clId="{CDC5B0EF-6BEB-4658-A9FF-CB66F6FA6C1E}" dt="2025-05-30T22:45:51.745" v="9154" actId="1076"/>
+          <ac:chgData name="Li, Hanchen F" userId="3aee791e-6a2d-4da7-a77b-fbdf7bf15886" providerId="ADAL" clId="{CDC5B0EF-6BEB-4658-A9FF-CB66F6FA6C1E}" dt="2025-05-30T23:30:44.935" v="9705" actId="1076"/>
           <ac:spMkLst>
             <pc:docMk/>
             <pc:sldMk cId="2152317508" sldId="256"/>
@@ -1071,7 +1095,7 @@
           </ac:spMkLst>
         </pc:spChg>
         <pc:spChg chg="add mod">
-          <ac:chgData name="Li, Hanchen F" userId="3aee791e-6a2d-4da7-a77b-fbdf7bf15886" providerId="ADAL" clId="{CDC5B0EF-6BEB-4658-A9FF-CB66F6FA6C1E}" dt="2025-05-30T22:48:14.408" v="9169" actId="1076"/>
+          <ac:chgData name="Li, Hanchen F" userId="3aee791e-6a2d-4da7-a77b-fbdf7bf15886" providerId="ADAL" clId="{CDC5B0EF-6BEB-4658-A9FF-CB66F6FA6C1E}" dt="2025-05-30T23:30:55.241" v="9707" actId="1076"/>
           <ac:spMkLst>
             <pc:docMk/>
             <pc:sldMk cId="2152317508" sldId="256"/>
@@ -1079,7 +1103,7 @@
           </ac:spMkLst>
         </pc:spChg>
         <pc:spChg chg="add mod">
-          <ac:chgData name="Li, Hanchen F" userId="3aee791e-6a2d-4da7-a77b-fbdf7bf15886" providerId="ADAL" clId="{CDC5B0EF-6BEB-4658-A9FF-CB66F6FA6C1E}" dt="2025-05-30T22:48:19.545" v="9170" actId="1076"/>
+          <ac:chgData name="Li, Hanchen F" userId="3aee791e-6a2d-4da7-a77b-fbdf7bf15886" providerId="ADAL" clId="{CDC5B0EF-6BEB-4658-A9FF-CB66F6FA6C1E}" dt="2025-05-30T23:31:00.530" v="9708" actId="1076"/>
           <ac:spMkLst>
             <pc:docMk/>
             <pc:sldMk cId="2152317508" sldId="256"/>
@@ -1111,7 +1135,7 @@
           </ac:spMkLst>
         </pc:spChg>
         <pc:spChg chg="add mod">
-          <ac:chgData name="Li, Hanchen F" userId="3aee791e-6a2d-4da7-a77b-fbdf7bf15886" providerId="ADAL" clId="{CDC5B0EF-6BEB-4658-A9FF-CB66F6FA6C1E}" dt="2025-05-22T23:48:52.825" v="5002" actId="1076"/>
+          <ac:chgData name="Li, Hanchen F" userId="3aee791e-6a2d-4da7-a77b-fbdf7bf15886" providerId="ADAL" clId="{CDC5B0EF-6BEB-4658-A9FF-CB66F6FA6C1E}" dt="2025-05-30T23:35:00.123" v="9812" actId="1036"/>
           <ac:spMkLst>
             <pc:docMk/>
             <pc:sldMk cId="2152317508" sldId="256"/>
@@ -1119,7 +1143,7 @@
           </ac:spMkLst>
         </pc:spChg>
         <pc:spChg chg="add mod">
-          <ac:chgData name="Li, Hanchen F" userId="3aee791e-6a2d-4da7-a77b-fbdf7bf15886" providerId="ADAL" clId="{CDC5B0EF-6BEB-4658-A9FF-CB66F6FA6C1E}" dt="2025-05-22T23:49:26.070" v="5007" actId="1076"/>
+          <ac:chgData name="Li, Hanchen F" userId="3aee791e-6a2d-4da7-a77b-fbdf7bf15886" providerId="ADAL" clId="{CDC5B0EF-6BEB-4658-A9FF-CB66F6FA6C1E}" dt="2025-05-30T23:35:21.736" v="9816" actId="1037"/>
           <ac:spMkLst>
             <pc:docMk/>
             <pc:sldMk cId="2152317508" sldId="256"/>
@@ -1127,7 +1151,7 @@
           </ac:spMkLst>
         </pc:spChg>
         <pc:spChg chg="add mod">
-          <ac:chgData name="Li, Hanchen F" userId="3aee791e-6a2d-4da7-a77b-fbdf7bf15886" providerId="ADAL" clId="{CDC5B0EF-6BEB-4658-A9FF-CB66F6FA6C1E}" dt="2025-05-22T23:49:28.342" v="5008" actId="1076"/>
+          <ac:chgData name="Li, Hanchen F" userId="3aee791e-6a2d-4da7-a77b-fbdf7bf15886" providerId="ADAL" clId="{CDC5B0EF-6BEB-4658-A9FF-CB66F6FA6C1E}" dt="2025-05-30T23:35:24.451" v="9818" actId="1037"/>
           <ac:spMkLst>
             <pc:docMk/>
             <pc:sldMk cId="2152317508" sldId="256"/>
@@ -1167,7 +1191,7 @@
           </ac:spMkLst>
         </pc:spChg>
         <pc:spChg chg="add mod">
-          <ac:chgData name="Li, Hanchen F" userId="3aee791e-6a2d-4da7-a77b-fbdf7bf15886" providerId="ADAL" clId="{CDC5B0EF-6BEB-4658-A9FF-CB66F6FA6C1E}" dt="2025-05-22T23:53:20.828" v="5588" actId="1076"/>
+          <ac:chgData name="Li, Hanchen F" userId="3aee791e-6a2d-4da7-a77b-fbdf7bf15886" providerId="ADAL" clId="{CDC5B0EF-6BEB-4658-A9FF-CB66F6FA6C1E}" dt="2025-06-02T21:21:52.226" v="9846" actId="1076"/>
           <ac:spMkLst>
             <pc:docMk/>
             <pc:sldMk cId="2152317508" sldId="256"/>
@@ -1215,7 +1239,7 @@
           </ac:grpSpMkLst>
         </pc:grpChg>
         <pc:grpChg chg="add del mod ord">
-          <ac:chgData name="Li, Hanchen F" userId="3aee791e-6a2d-4da7-a77b-fbdf7bf15886" providerId="ADAL" clId="{CDC5B0EF-6BEB-4658-A9FF-CB66F6FA6C1E}" dt="2025-05-30T22:45:11.512" v="9146" actId="167"/>
+          <ac:chgData name="Li, Hanchen F" userId="3aee791e-6a2d-4da7-a77b-fbdf7bf15886" providerId="ADAL" clId="{CDC5B0EF-6BEB-4658-A9FF-CB66F6FA6C1E}" dt="2025-06-02T21:22:46.578" v="9859" actId="1076"/>
           <ac:grpSpMkLst>
             <pc:docMk/>
             <pc:sldMk cId="2152317508" sldId="256"/>
@@ -1223,7 +1247,7 @@
           </ac:grpSpMkLst>
         </pc:grpChg>
         <pc:grpChg chg="add del mod">
-          <ac:chgData name="Li, Hanchen F" userId="3aee791e-6a2d-4da7-a77b-fbdf7bf15886" providerId="ADAL" clId="{CDC5B0EF-6BEB-4658-A9FF-CB66F6FA6C1E}" dt="2025-05-23T16:54:39.979" v="7719" actId="1076"/>
+          <ac:chgData name="Li, Hanchen F" userId="3aee791e-6a2d-4da7-a77b-fbdf7bf15886" providerId="ADAL" clId="{CDC5B0EF-6BEB-4658-A9FF-CB66F6FA6C1E}" dt="2025-05-30T23:27:54.734" v="9633" actId="1036"/>
           <ac:grpSpMkLst>
             <pc:docMk/>
             <pc:sldMk cId="2152317508" sldId="256"/>
@@ -1239,7 +1263,7 @@
           </ac:grpSpMkLst>
         </pc:grpChg>
         <pc:picChg chg="add mod ord topLvl">
-          <ac:chgData name="Li, Hanchen F" userId="3aee791e-6a2d-4da7-a77b-fbdf7bf15886" providerId="ADAL" clId="{CDC5B0EF-6BEB-4658-A9FF-CB66F6FA6C1E}" dt="2025-05-30T22:44:35.728" v="9127" actId="167"/>
+          <ac:chgData name="Li, Hanchen F" userId="3aee791e-6a2d-4da7-a77b-fbdf7bf15886" providerId="ADAL" clId="{CDC5B0EF-6BEB-4658-A9FF-CB66F6FA6C1E}" dt="2025-05-30T23:28:49.537" v="9662" actId="1076"/>
           <ac:picMkLst>
             <pc:docMk/>
             <pc:sldMk cId="2152317508" sldId="256"/>
@@ -1271,7 +1295,7 @@
           </ac:cxnSpMkLst>
         </pc:cxnChg>
         <pc:cxnChg chg="add mod">
-          <ac:chgData name="Li, Hanchen F" userId="3aee791e-6a2d-4da7-a77b-fbdf7bf15886" providerId="ADAL" clId="{CDC5B0EF-6BEB-4658-A9FF-CB66F6FA6C1E}" dt="2025-05-30T22:39:44.064" v="9060" actId="14100"/>
+          <ac:chgData name="Li, Hanchen F" userId="3aee791e-6a2d-4da7-a77b-fbdf7bf15886" providerId="ADAL" clId="{CDC5B0EF-6BEB-4658-A9FF-CB66F6FA6C1E}" dt="2025-05-30T23:26:30.387" v="9585" actId="14100"/>
           <ac:cxnSpMkLst>
             <pc:docMk/>
             <pc:sldMk cId="2152317508" sldId="256"/>
@@ -1279,11 +1303,35 @@
           </ac:cxnSpMkLst>
         </pc:cxnChg>
         <pc:cxnChg chg="add mod">
+          <ac:chgData name="Li, Hanchen F" userId="3aee791e-6a2d-4da7-a77b-fbdf7bf15886" providerId="ADAL" clId="{CDC5B0EF-6BEB-4658-A9FF-CB66F6FA6C1E}" dt="2025-06-02T21:23:01.346" v="9862" actId="14100"/>
+          <ac:cxnSpMkLst>
+            <pc:docMk/>
+            <pc:sldMk cId="2152317508" sldId="256"/>
+            <ac:cxnSpMk id="19" creationId="{C35E9231-8CE7-8406-3F9A-0909C44D5A02}"/>
+          </ac:cxnSpMkLst>
+        </pc:cxnChg>
+        <pc:cxnChg chg="add mod">
           <ac:chgData name="Li, Hanchen F" userId="3aee791e-6a2d-4da7-a77b-fbdf7bf15886" providerId="ADAL" clId="{CDC5B0EF-6BEB-4658-A9FF-CB66F6FA6C1E}" dt="2025-05-30T23:12:23.380" v="9276" actId="1076"/>
           <ac:cxnSpMkLst>
             <pc:docMk/>
             <pc:sldMk cId="2152317508" sldId="256"/>
             <ac:cxnSpMk id="20" creationId="{A63BF9C7-983F-5C2B-2264-47912110C621}"/>
+          </ac:cxnSpMkLst>
+        </pc:cxnChg>
+        <pc:cxnChg chg="add mod">
+          <ac:chgData name="Li, Hanchen F" userId="3aee791e-6a2d-4da7-a77b-fbdf7bf15886" providerId="ADAL" clId="{CDC5B0EF-6BEB-4658-A9FF-CB66F6FA6C1E}" dt="2025-05-30T23:29:34.460" v="9685" actId="1036"/>
+          <ac:cxnSpMkLst>
+            <pc:docMk/>
+            <pc:sldMk cId="2152317508" sldId="256"/>
+            <ac:cxnSpMk id="24" creationId="{50858431-51A3-4B43-1052-473383F20DC3}"/>
+          </ac:cxnSpMkLst>
+        </pc:cxnChg>
+        <pc:cxnChg chg="add mod">
+          <ac:chgData name="Li, Hanchen F" userId="3aee791e-6a2d-4da7-a77b-fbdf7bf15886" providerId="ADAL" clId="{CDC5B0EF-6BEB-4658-A9FF-CB66F6FA6C1E}" dt="2025-06-02T21:21:33.072" v="9843" actId="1076"/>
+          <ac:cxnSpMkLst>
+            <pc:docMk/>
+            <pc:sldMk cId="2152317508" sldId="256"/>
+            <ac:cxnSpMk id="26" creationId="{A2CBE254-54EC-7669-4148-C0F37BB5CA61}"/>
           </ac:cxnSpMkLst>
         </pc:cxnChg>
         <pc:cxnChg chg="add mod">
@@ -1327,23 +1375,7 @@
           </ac:cxnSpMkLst>
         </pc:cxnChg>
         <pc:cxnChg chg="add del mod">
-          <ac:chgData name="Li, Hanchen F" userId="3aee791e-6a2d-4da7-a77b-fbdf7bf15886" providerId="ADAL" clId="{CDC5B0EF-6BEB-4658-A9FF-CB66F6FA6C1E}" dt="2025-05-30T22:46:06.154" v="9158" actId="478"/>
-          <ac:cxnSpMkLst>
-            <pc:docMk/>
-            <pc:sldMk cId="2152317508" sldId="256"/>
-            <ac:cxnSpMk id="84" creationId="{79D2A366-B413-8528-AC73-86E9F16DB2B7}"/>
-          </ac:cxnSpMkLst>
-        </pc:cxnChg>
-        <pc:cxnChg chg="add del mod">
-          <ac:chgData name="Li, Hanchen F" userId="3aee791e-6a2d-4da7-a77b-fbdf7bf15886" providerId="ADAL" clId="{CDC5B0EF-6BEB-4658-A9FF-CB66F6FA6C1E}" dt="2025-05-30T22:46:04.747" v="9157" actId="478"/>
-          <ac:cxnSpMkLst>
-            <pc:docMk/>
-            <pc:sldMk cId="2152317508" sldId="256"/>
-            <ac:cxnSpMk id="91" creationId="{E7FFA589-5910-415F-51D1-A5B2F512A967}"/>
-          </ac:cxnSpMkLst>
-        </pc:cxnChg>
-        <pc:cxnChg chg="add mod">
-          <ac:chgData name="Li, Hanchen F" userId="3aee791e-6a2d-4da7-a77b-fbdf7bf15886" providerId="ADAL" clId="{CDC5B0EF-6BEB-4658-A9FF-CB66F6FA6C1E}" dt="2025-05-30T22:41:09.377" v="9078" actId="1076"/>
+          <ac:chgData name="Li, Hanchen F" userId="3aee791e-6a2d-4da7-a77b-fbdf7bf15886" providerId="ADAL" clId="{CDC5B0EF-6BEB-4658-A9FF-CB66F6FA6C1E}" dt="2025-05-30T23:30:41.453" v="9704" actId="1076"/>
           <ac:cxnSpMkLst>
             <pc:docMk/>
             <pc:sldMk cId="2152317508" sldId="256"/>
@@ -1391,14 +1423,6 @@
           </ac:cxnSpMkLst>
         </pc:cxnChg>
         <pc:cxnChg chg="add mod">
-          <ac:chgData name="Li, Hanchen F" userId="3aee791e-6a2d-4da7-a77b-fbdf7bf15886" providerId="ADAL" clId="{CDC5B0EF-6BEB-4658-A9FF-CB66F6FA6C1E}" dt="2025-05-30T22:44:41.487" v="9137" actId="1076"/>
-          <ac:cxnSpMkLst>
-            <pc:docMk/>
-            <pc:sldMk cId="2152317508" sldId="256"/>
-            <ac:cxnSpMk id="170" creationId="{DD6DD07B-470A-D2AF-3CC6-4334B7C92FD7}"/>
-          </ac:cxnSpMkLst>
-        </pc:cxnChg>
-        <pc:cxnChg chg="add mod">
           <ac:chgData name="Li, Hanchen F" userId="3aee791e-6a2d-4da7-a77b-fbdf7bf15886" providerId="ADAL" clId="{CDC5B0EF-6BEB-4658-A9FF-CB66F6FA6C1E}" dt="2025-05-22T22:34:51.982" v="2519" actId="164"/>
           <ac:cxnSpMkLst>
             <pc:docMk/>
@@ -1447,7 +1471,7 @@
           </ac:cxnSpMkLst>
         </pc:cxnChg>
         <pc:cxnChg chg="add mod ord">
-          <ac:chgData name="Li, Hanchen F" userId="3aee791e-6a2d-4da7-a77b-fbdf7bf15886" providerId="ADAL" clId="{CDC5B0EF-6BEB-4658-A9FF-CB66F6FA6C1E}" dt="2025-05-30T22:46:18.171" v="9160" actId="1076"/>
+          <ac:chgData name="Li, Hanchen F" userId="3aee791e-6a2d-4da7-a77b-fbdf7bf15886" providerId="ADAL" clId="{CDC5B0EF-6BEB-4658-A9FF-CB66F6FA6C1E}" dt="2025-05-30T23:30:17.983" v="9695" actId="1076"/>
           <ac:cxnSpMkLst>
             <pc:docMk/>
             <pc:sldMk cId="2152317508" sldId="256"/>
@@ -1494,14 +1518,6 @@
             <ac:cxnSpMk id="229" creationId="{C103E752-214C-7665-E5F1-11F50DE47006}"/>
           </ac:cxnSpMkLst>
         </pc:cxnChg>
-        <pc:cxnChg chg="add del mod">
-          <ac:chgData name="Li, Hanchen F" userId="3aee791e-6a2d-4da7-a77b-fbdf7bf15886" providerId="ADAL" clId="{CDC5B0EF-6BEB-4658-A9FF-CB66F6FA6C1E}" dt="2025-05-30T23:12:12.430" v="9273" actId="478"/>
-          <ac:cxnSpMkLst>
-            <pc:docMk/>
-            <pc:sldMk cId="2152317508" sldId="256"/>
-            <ac:cxnSpMk id="230" creationId="{FF7C58E2-8271-6514-4188-11F6201F333C}"/>
-          </ac:cxnSpMkLst>
-        </pc:cxnChg>
         <pc:cxnChg chg="add mod">
           <ac:chgData name="Li, Hanchen F" userId="3aee791e-6a2d-4da7-a77b-fbdf7bf15886" providerId="ADAL" clId="{CDC5B0EF-6BEB-4658-A9FF-CB66F6FA6C1E}" dt="2025-05-22T22:27:01.095" v="2133" actId="1037"/>
           <ac:cxnSpMkLst>
@@ -1631,7 +1647,7 @@
           </ac:cxnSpMkLst>
         </pc:cxnChg>
         <pc:cxnChg chg="add mod ord">
-          <ac:chgData name="Li, Hanchen F" userId="3aee791e-6a2d-4da7-a77b-fbdf7bf15886" providerId="ADAL" clId="{CDC5B0EF-6BEB-4658-A9FF-CB66F6FA6C1E}" dt="2025-05-23T16:54:39.979" v="7719" actId="1076"/>
+          <ac:chgData name="Li, Hanchen F" userId="3aee791e-6a2d-4da7-a77b-fbdf7bf15886" providerId="ADAL" clId="{CDC5B0EF-6BEB-4658-A9FF-CB66F6FA6C1E}" dt="2025-05-30T23:27:54.734" v="9633" actId="1036"/>
           <ac:cxnSpMkLst>
             <pc:docMk/>
             <pc:sldMk cId="2152317508" sldId="256"/>
@@ -1639,7 +1655,7 @@
           </ac:cxnSpMkLst>
         </pc:cxnChg>
         <pc:cxnChg chg="add mod ord">
-          <ac:chgData name="Li, Hanchen F" userId="3aee791e-6a2d-4da7-a77b-fbdf7bf15886" providerId="ADAL" clId="{CDC5B0EF-6BEB-4658-A9FF-CB66F6FA6C1E}" dt="2025-05-23T16:54:39.979" v="7719" actId="1076"/>
+          <ac:chgData name="Li, Hanchen F" userId="3aee791e-6a2d-4da7-a77b-fbdf7bf15886" providerId="ADAL" clId="{CDC5B0EF-6BEB-4658-A9FF-CB66F6FA6C1E}" dt="2025-05-30T23:27:54.734" v="9633" actId="1036"/>
           <ac:cxnSpMkLst>
             <pc:docMk/>
             <pc:sldMk cId="2152317508" sldId="256"/>
@@ -2764,7 +2780,7 @@
         </pc:cxnChg>
       </pc:sldChg>
       <pc:sldChg chg="addSp delSp modSp add mod">
-        <pc:chgData name="Li, Hanchen F" userId="3aee791e-6a2d-4da7-a77b-fbdf7bf15886" providerId="ADAL" clId="{CDC5B0EF-6BEB-4658-A9FF-CB66F6FA6C1E}" dt="2025-05-26T23:57:00.737" v="8871" actId="20577"/>
+        <pc:chgData name="Li, Hanchen F" userId="3aee791e-6a2d-4da7-a77b-fbdf7bf15886" providerId="ADAL" clId="{CDC5B0EF-6BEB-4658-A9FF-CB66F6FA6C1E}" dt="2025-06-02T22:09:19.571" v="9897" actId="114"/>
         <pc:sldMkLst>
           <pc:docMk/>
           <pc:sldMk cId="1584463432" sldId="260"/>
@@ -2777,6 +2793,14 @@
             <ac:spMk id="2" creationId="{AAF2876B-BAD6-F898-5EFF-FA8340A43036}"/>
           </ac:spMkLst>
         </pc:spChg>
+        <pc:spChg chg="add del">
+          <ac:chgData name="Li, Hanchen F" userId="3aee791e-6a2d-4da7-a77b-fbdf7bf15886" providerId="ADAL" clId="{CDC5B0EF-6BEB-4658-A9FF-CB66F6FA6C1E}" dt="2025-06-02T22:08:45.728" v="9893" actId="22"/>
+          <ac:spMkLst>
+            <pc:docMk/>
+            <pc:sldMk cId="1584463432" sldId="260"/>
+            <ac:spMk id="4" creationId="{6476E9A5-09DD-C3D1-4156-04EAE3539BD6}"/>
+          </ac:spMkLst>
+        </pc:spChg>
         <pc:spChg chg="add mod">
           <ac:chgData name="Li, Hanchen F" userId="3aee791e-6a2d-4da7-a77b-fbdf7bf15886" providerId="ADAL" clId="{CDC5B0EF-6BEB-4658-A9FF-CB66F6FA6C1E}" dt="2025-05-26T23:54:59.802" v="8837" actId="948"/>
           <ac:spMkLst>
@@ -2794,7 +2818,7 @@
           </ac:spMkLst>
         </pc:spChg>
         <pc:spChg chg="add mod">
-          <ac:chgData name="Li, Hanchen F" userId="3aee791e-6a2d-4da7-a77b-fbdf7bf15886" providerId="ADAL" clId="{CDC5B0EF-6BEB-4658-A9FF-CB66F6FA6C1E}" dt="2025-05-23T20:12:59.891" v="8141" actId="1038"/>
+          <ac:chgData name="Li, Hanchen F" userId="3aee791e-6a2d-4da7-a77b-fbdf7bf15886" providerId="ADAL" clId="{CDC5B0EF-6BEB-4658-A9FF-CB66F6FA6C1E}" dt="2025-06-02T22:05:05.792" v="9868" actId="20577"/>
           <ac:spMkLst>
             <pc:docMk/>
             <pc:sldMk cId="1584463432" sldId="260"/>
@@ -2802,7 +2826,7 @@
           </ac:spMkLst>
         </pc:spChg>
         <pc:spChg chg="add mod">
-          <ac:chgData name="Li, Hanchen F" userId="3aee791e-6a2d-4da7-a77b-fbdf7bf15886" providerId="ADAL" clId="{CDC5B0EF-6BEB-4658-A9FF-CB66F6FA6C1E}" dt="2025-05-26T23:55:55.225" v="8852" actId="948"/>
+          <ac:chgData name="Li, Hanchen F" userId="3aee791e-6a2d-4da7-a77b-fbdf7bf15886" providerId="ADAL" clId="{CDC5B0EF-6BEB-4658-A9FF-CB66F6FA6C1E}" dt="2025-06-02T22:09:19.571" v="9897" actId="114"/>
           <ac:spMkLst>
             <pc:docMk/>
             <pc:sldMk cId="1584463432" sldId="260"/>
@@ -2810,7 +2834,7 @@
           </ac:spMkLst>
         </pc:spChg>
         <pc:spChg chg="add mod">
-          <ac:chgData name="Li, Hanchen F" userId="3aee791e-6a2d-4da7-a77b-fbdf7bf15886" providerId="ADAL" clId="{CDC5B0EF-6BEB-4658-A9FF-CB66F6FA6C1E}" dt="2025-05-26T23:57:00.737" v="8871" actId="20577"/>
+          <ac:chgData name="Li, Hanchen F" userId="3aee791e-6a2d-4da7-a77b-fbdf7bf15886" providerId="ADAL" clId="{CDC5B0EF-6BEB-4658-A9FF-CB66F6FA6C1E}" dt="2025-06-02T22:09:12.305" v="9895" actId="114"/>
           <ac:spMkLst>
             <pc:docMk/>
             <pc:sldMk cId="1584463432" sldId="260"/>
@@ -2818,7 +2842,7 @@
           </ac:spMkLst>
         </pc:spChg>
         <pc:spChg chg="add mod">
-          <ac:chgData name="Li, Hanchen F" userId="3aee791e-6a2d-4da7-a77b-fbdf7bf15886" providerId="ADAL" clId="{CDC5B0EF-6BEB-4658-A9FF-CB66F6FA6C1E}" dt="2025-05-23T22:14:33.522" v="8186" actId="20577"/>
+          <ac:chgData name="Li, Hanchen F" userId="3aee791e-6a2d-4da7-a77b-fbdf7bf15886" providerId="ADAL" clId="{CDC5B0EF-6BEB-4658-A9FF-CB66F6FA6C1E}" dt="2025-06-02T22:06:13.077" v="9891" actId="1076"/>
           <ac:spMkLst>
             <pc:docMk/>
             <pc:sldMk cId="1584463432" sldId="260"/>
@@ -2834,7 +2858,7 @@
           </ac:spMkLst>
         </pc:spChg>
         <pc:spChg chg="add mod">
-          <ac:chgData name="Li, Hanchen F" userId="3aee791e-6a2d-4da7-a77b-fbdf7bf15886" providerId="ADAL" clId="{CDC5B0EF-6BEB-4658-A9FF-CB66F6FA6C1E}" dt="2025-05-23T20:12:59.891" v="8141" actId="1038"/>
+          <ac:chgData name="Li, Hanchen F" userId="3aee791e-6a2d-4da7-a77b-fbdf7bf15886" providerId="ADAL" clId="{CDC5B0EF-6BEB-4658-A9FF-CB66F6FA6C1E}" dt="2025-06-02T22:05:10.271" v="9870" actId="20577"/>
           <ac:spMkLst>
             <pc:docMk/>
             <pc:sldMk cId="1584463432" sldId="260"/>
@@ -3215,7 +3239,7 @@
           <a:p>
             <a:fld id="{DF1088C5-931A-42D2-8AA4-FA289862AAD0}" type="datetimeFigureOut">
               <a:rPr lang="zh-CN" altLang="en-US" smtClean="0"/>
-              <a:t>2025/5/31</a:t>
+              <a:t>2025/6/2</a:t>
             </a:fld>
             <a:endParaRPr lang="zh-CN" altLang="en-US"/>
           </a:p>
@@ -4105,7 +4129,7 @@
           <a:p>
             <a:fld id="{3CAF1464-0EA4-453D-A90B-03B04D244405}" type="datetimeFigureOut">
               <a:rPr lang="zh-CN" altLang="en-US" smtClean="0"/>
-              <a:t>2025/5/31</a:t>
+              <a:t>2025/6/2</a:t>
             </a:fld>
             <a:endParaRPr lang="zh-CN" altLang="en-US"/>
           </a:p>
@@ -4275,7 +4299,7 @@
           <a:p>
             <a:fld id="{3CAF1464-0EA4-453D-A90B-03B04D244405}" type="datetimeFigureOut">
               <a:rPr lang="zh-CN" altLang="en-US" smtClean="0"/>
-              <a:t>2025/5/31</a:t>
+              <a:t>2025/6/2</a:t>
             </a:fld>
             <a:endParaRPr lang="zh-CN" altLang="en-US"/>
           </a:p>
@@ -4455,7 +4479,7 @@
           <a:p>
             <a:fld id="{3CAF1464-0EA4-453D-A90B-03B04D244405}" type="datetimeFigureOut">
               <a:rPr lang="zh-CN" altLang="en-US" smtClean="0"/>
-              <a:t>2025/5/31</a:t>
+              <a:t>2025/6/2</a:t>
             </a:fld>
             <a:endParaRPr lang="zh-CN" altLang="en-US"/>
           </a:p>
@@ -4625,7 +4649,7 @@
           <a:p>
             <a:fld id="{3CAF1464-0EA4-453D-A90B-03B04D244405}" type="datetimeFigureOut">
               <a:rPr lang="zh-CN" altLang="en-US" smtClean="0"/>
-              <a:t>2025/5/31</a:t>
+              <a:t>2025/6/2</a:t>
             </a:fld>
             <a:endParaRPr lang="zh-CN" altLang="en-US"/>
           </a:p>
@@ -4871,7 +4895,7 @@
           <a:p>
             <a:fld id="{3CAF1464-0EA4-453D-A90B-03B04D244405}" type="datetimeFigureOut">
               <a:rPr lang="zh-CN" altLang="en-US" smtClean="0"/>
-              <a:t>2025/5/31</a:t>
+              <a:t>2025/6/2</a:t>
             </a:fld>
             <a:endParaRPr lang="zh-CN" altLang="en-US"/>
           </a:p>
@@ -5103,7 +5127,7 @@
           <a:p>
             <a:fld id="{3CAF1464-0EA4-453D-A90B-03B04D244405}" type="datetimeFigureOut">
               <a:rPr lang="zh-CN" altLang="en-US" smtClean="0"/>
-              <a:t>2025/5/31</a:t>
+              <a:t>2025/6/2</a:t>
             </a:fld>
             <a:endParaRPr lang="zh-CN" altLang="en-US"/>
           </a:p>
@@ -5470,7 +5494,7 @@
           <a:p>
             <a:fld id="{3CAF1464-0EA4-453D-A90B-03B04D244405}" type="datetimeFigureOut">
               <a:rPr lang="zh-CN" altLang="en-US" smtClean="0"/>
-              <a:t>2025/5/31</a:t>
+              <a:t>2025/6/2</a:t>
             </a:fld>
             <a:endParaRPr lang="zh-CN" altLang="en-US"/>
           </a:p>
@@ -5588,7 +5612,7 @@
           <a:p>
             <a:fld id="{3CAF1464-0EA4-453D-A90B-03B04D244405}" type="datetimeFigureOut">
               <a:rPr lang="zh-CN" altLang="en-US" smtClean="0"/>
-              <a:t>2025/5/31</a:t>
+              <a:t>2025/6/2</a:t>
             </a:fld>
             <a:endParaRPr lang="zh-CN" altLang="en-US"/>
           </a:p>
@@ -5683,7 +5707,7 @@
           <a:p>
             <a:fld id="{3CAF1464-0EA4-453D-A90B-03B04D244405}" type="datetimeFigureOut">
               <a:rPr lang="zh-CN" altLang="en-US" smtClean="0"/>
-              <a:t>2025/5/31</a:t>
+              <a:t>2025/6/2</a:t>
             </a:fld>
             <a:endParaRPr lang="zh-CN" altLang="en-US"/>
           </a:p>
@@ -5960,7 +5984,7 @@
           <a:p>
             <a:fld id="{3CAF1464-0EA4-453D-A90B-03B04D244405}" type="datetimeFigureOut">
               <a:rPr lang="zh-CN" altLang="en-US" smtClean="0"/>
-              <a:t>2025/5/31</a:t>
+              <a:t>2025/6/2</a:t>
             </a:fld>
             <a:endParaRPr lang="zh-CN" altLang="en-US"/>
           </a:p>
@@ -6217,7 +6241,7 @@
           <a:p>
             <a:fld id="{3CAF1464-0EA4-453D-A90B-03B04D244405}" type="datetimeFigureOut">
               <a:rPr lang="zh-CN" altLang="en-US" smtClean="0"/>
-              <a:t>2025/5/31</a:t>
+              <a:t>2025/6/2</a:t>
             </a:fld>
             <a:endParaRPr lang="zh-CN" altLang="en-US"/>
           </a:p>
@@ -6430,7 +6454,7 @@
           <a:p>
             <a:fld id="{3CAF1464-0EA4-453D-A90B-03B04D244405}" type="datetimeFigureOut">
               <a:rPr lang="zh-CN" altLang="en-US" smtClean="0"/>
-              <a:t>2025/5/31</a:t>
+              <a:t>2025/6/2</a:t>
             </a:fld>
             <a:endParaRPr lang="zh-CN" altLang="en-US"/>
           </a:p>
@@ -14141,8 +14165,8 @@
             </p:nvCxnSpPr>
             <p:spPr>
               <a:xfrm rot="21446795" flipV="1">
-                <a:off x="2277552" y="4672089"/>
-                <a:ext cx="3062097" cy="420382"/>
+                <a:off x="2277281" y="4659923"/>
+                <a:ext cx="3068447" cy="432413"/>
               </a:xfrm>
               <a:prstGeom prst="straightConnector1">
                 <a:avLst/>
@@ -14417,7 +14441,7 @@
             </p:nvCxnSpPr>
             <p:spPr>
               <a:xfrm rot="20957173" flipV="1">
-                <a:off x="6018039" y="3029448"/>
+                <a:off x="5953122" y="3042316"/>
                 <a:ext cx="0" cy="363536"/>
               </a:xfrm>
               <a:prstGeom prst="straightConnector1">
@@ -14582,50 +14606,6 @@
           </p:cxnSp>
           <p:cxnSp>
             <p:nvCxnSpPr>
-              <p:cNvPr id="170" name="直接连接符 169">
-                <a:extLst>
-                  <a:ext uri="{FF2B5EF4-FFF2-40B4-BE49-F238E27FC236}">
-                    <a16:creationId xmlns:a16="http://schemas.microsoft.com/office/drawing/2014/main" id="{DD6DD07B-470A-D2AF-3CC6-4334B7C92FD7}"/>
-                  </a:ext>
-                </a:extLst>
-              </p:cNvPr>
-              <p:cNvCxnSpPr>
-                <a:cxnSpLocks/>
-              </p:cNvCxnSpPr>
-              <p:nvPr/>
-            </p:nvCxnSpPr>
-            <p:spPr>
-              <a:xfrm rot="20957173">
-                <a:off x="5276236" y="3447203"/>
-                <a:ext cx="0" cy="1698132"/>
-              </a:xfrm>
-              <a:prstGeom prst="line">
-                <a:avLst/>
-              </a:prstGeom>
-              <a:ln w="12700">
-                <a:solidFill>
-                  <a:srgbClr val="0000CD"/>
-                </a:solidFill>
-                <a:prstDash val="solid"/>
-              </a:ln>
-            </p:spPr>
-            <p:style>
-              <a:lnRef idx="2">
-                <a:schemeClr val="accent1"/>
-              </a:lnRef>
-              <a:fillRef idx="0">
-                <a:schemeClr val="accent1"/>
-              </a:fillRef>
-              <a:effectRef idx="1">
-                <a:schemeClr val="accent1"/>
-              </a:effectRef>
-              <a:fontRef idx="minor">
-                <a:schemeClr val="tx1"/>
-              </a:fontRef>
-            </p:style>
-          </p:cxnSp>
-          <p:cxnSp>
-            <p:nvCxnSpPr>
               <p:cNvPr id="191" name="直接箭头连接符 190">
                 <a:extLst>
                   <a:ext uri="{FF2B5EF4-FFF2-40B4-BE49-F238E27FC236}">
@@ -14904,7 +14884,7 @@
             </p:nvCxnSpPr>
             <p:spPr>
               <a:xfrm rot="20957173" flipV="1">
-                <a:off x="5558179" y="3059017"/>
+                <a:off x="5554963" y="3059161"/>
                 <a:ext cx="563562" cy="1847"/>
               </a:xfrm>
               <a:prstGeom prst="straightConnector1">
@@ -15088,7 +15068,7 @@
         </p:nvSpPr>
         <p:spPr>
           <a:xfrm>
-            <a:off x="928131" y="4911380"/>
+            <a:off x="928131" y="4911382"/>
             <a:ext cx="124085" cy="124085"/>
           </a:xfrm>
           <a:prstGeom prst="flowChartSummingJunction">
@@ -15142,7 +15122,7 @@
         </p:nvCxnSpPr>
         <p:spPr>
           <a:xfrm flipH="1">
-            <a:off x="380225" y="4975269"/>
+            <a:off x="380225" y="4975271"/>
             <a:ext cx="547906" cy="0"/>
           </a:xfrm>
           <a:prstGeom prst="straightConnector1">
@@ -15186,7 +15166,7 @@
         </p:nvCxnSpPr>
         <p:spPr>
           <a:xfrm>
-            <a:off x="990173" y="5035465"/>
+            <a:off x="990173" y="5035467"/>
             <a:ext cx="0" cy="542901"/>
           </a:xfrm>
           <a:prstGeom prst="straightConnector1">
@@ -15228,7 +15208,7 @@
         </p:nvGrpSpPr>
         <p:grpSpPr>
           <a:xfrm rot="153205">
-            <a:off x="372029" y="4902691"/>
+            <a:off x="372029" y="4902693"/>
             <a:ext cx="665791" cy="661173"/>
             <a:chOff x="746098" y="5323114"/>
             <a:chExt cx="665791" cy="661173"/>
@@ -16987,7 +16967,7 @@
         </p:nvSpPr>
         <p:spPr>
           <a:xfrm>
-            <a:off x="157807" y="4968361"/>
+            <a:off x="157807" y="4968363"/>
             <a:ext cx="276038" cy="338554"/>
           </a:xfrm>
           <a:prstGeom prst="rect">
@@ -17035,7 +17015,7 @@
         </p:nvSpPr>
         <p:spPr>
           <a:xfrm>
-            <a:off x="1039324" y="4773304"/>
+            <a:off x="1032974" y="4773306"/>
             <a:ext cx="359394" cy="338554"/>
           </a:xfrm>
           <a:prstGeom prst="rect">
@@ -17084,7 +17064,7 @@
         </p:nvSpPr>
         <p:spPr>
           <a:xfrm>
-            <a:off x="694674" y="5444823"/>
+            <a:off x="694674" y="5444825"/>
             <a:ext cx="348172" cy="338554"/>
           </a:xfrm>
           <a:prstGeom prst="rect">
@@ -17133,7 +17113,7 @@
         </p:nvSpPr>
         <p:spPr>
           <a:xfrm>
-            <a:off x="1024272" y="5455894"/>
+            <a:off x="1027447" y="5446371"/>
             <a:ext cx="264816" cy="338554"/>
           </a:xfrm>
           <a:prstGeom prst="rect">
@@ -17181,7 +17161,7 @@
         </p:nvSpPr>
         <p:spPr>
           <a:xfrm>
-            <a:off x="852154" y="4553860"/>
+            <a:off x="852154" y="4541162"/>
             <a:ext cx="276038" cy="338554"/>
           </a:xfrm>
           <a:prstGeom prst="rect">
@@ -17229,7 +17209,7 @@
         </p:nvSpPr>
         <p:spPr>
           <a:xfrm>
-            <a:off x="51488" y="4696911"/>
+            <a:off x="51488" y="4703263"/>
             <a:ext cx="359394" cy="338554"/>
           </a:xfrm>
           <a:prstGeom prst="rect">
@@ -18156,7 +18136,7 @@
         </p:nvSpPr>
         <p:spPr>
           <a:xfrm>
-            <a:off x="1721182" y="363139"/>
+            <a:off x="1690702" y="525699"/>
             <a:ext cx="481222" cy="338554"/>
           </a:xfrm>
           <a:prstGeom prst="rect">
@@ -18570,7 +18550,7 @@
         </p:nvSpPr>
         <p:spPr>
           <a:xfrm>
-            <a:off x="6255916" y="3133787"/>
+            <a:off x="6187497" y="3146158"/>
             <a:ext cx="461986" cy="338554"/>
           </a:xfrm>
           <a:prstGeom prst="rect">
@@ -18882,7 +18862,7 @@
         </p:nvSpPr>
         <p:spPr>
           <a:xfrm>
-            <a:off x="5589130" y="2836295"/>
+            <a:off x="5606599" y="2836295"/>
             <a:ext cx="506870" cy="338554"/>
           </a:xfrm>
           <a:prstGeom prst="rect">
@@ -18940,7 +18920,7 @@
         </p:nvSpPr>
         <p:spPr>
           <a:xfrm>
-            <a:off x="6239746" y="2804651"/>
+            <a:off x="6158747" y="2786368"/>
             <a:ext cx="593432" cy="338554"/>
           </a:xfrm>
           <a:prstGeom prst="rect">
@@ -19237,7 +19217,7 @@
         </p:nvSpPr>
         <p:spPr>
           <a:xfrm>
-            <a:off x="9782678" y="5455894"/>
+            <a:off x="9782678" y="5434123"/>
             <a:ext cx="356188" cy="338554"/>
           </a:xfrm>
           <a:prstGeom prst="rect">
@@ -19285,7 +19265,7 @@
         </p:nvSpPr>
         <p:spPr>
           <a:xfrm>
-            <a:off x="9773570" y="418770"/>
+            <a:off x="9768179" y="525770"/>
             <a:ext cx="481222" cy="338554"/>
           </a:xfrm>
           <a:prstGeom prst="rect">
@@ -19343,7 +19323,7 @@
         </p:nvSpPr>
         <p:spPr>
           <a:xfrm>
-            <a:off x="9658881" y="1001547"/>
+            <a:off x="9679927" y="1032027"/>
             <a:ext cx="457176" cy="338554"/>
           </a:xfrm>
           <a:prstGeom prst="rect">
@@ -19661,7 +19641,7 @@
         </p:nvSpPr>
         <p:spPr>
           <a:xfrm>
-            <a:off x="9830890" y="3382582"/>
+            <a:off x="9866795" y="3270679"/>
             <a:ext cx="473206" cy="338554"/>
           </a:xfrm>
           <a:prstGeom prst="rect">
@@ -20751,7 +20731,7 @@
         </p:nvSpPr>
         <p:spPr>
           <a:xfrm>
-            <a:off x="10037442" y="3857956"/>
+            <a:off x="10019530" y="3862716"/>
             <a:ext cx="500458" cy="338554"/>
           </a:xfrm>
           <a:prstGeom prst="rect">
@@ -20908,6 +20888,248 @@
           </a:fontRef>
         </p:style>
       </p:cxnSp>
+      <p:cxnSp>
+        <p:nvCxnSpPr>
+          <p:cNvPr id="24" name="直接连接符 23">
+            <a:extLst>
+              <a:ext uri="{FF2B5EF4-FFF2-40B4-BE49-F238E27FC236}">
+                <a16:creationId xmlns:a16="http://schemas.microsoft.com/office/drawing/2014/main" id="{50858431-51A3-4B43-1052-473383F20DC3}"/>
+              </a:ext>
+            </a:extLst>
+          </p:cNvPr>
+          <p:cNvCxnSpPr>
+            <a:cxnSpLocks/>
+          </p:cNvCxnSpPr>
+          <p:nvPr/>
+        </p:nvCxnSpPr>
+        <p:spPr>
+          <a:xfrm>
+            <a:off x="5392092" y="3774113"/>
+            <a:ext cx="222889" cy="1516099"/>
+          </a:xfrm>
+          <a:prstGeom prst="line">
+            <a:avLst/>
+          </a:prstGeom>
+          <a:ln w="12700">
+            <a:solidFill>
+              <a:srgbClr val="0000CD"/>
+            </a:solidFill>
+            <a:prstDash val="solid"/>
+          </a:ln>
+        </p:spPr>
+        <p:style>
+          <a:lnRef idx="2">
+            <a:schemeClr val="accent1"/>
+          </a:lnRef>
+          <a:fillRef idx="0">
+            <a:schemeClr val="accent1"/>
+          </a:fillRef>
+          <a:effectRef idx="1">
+            <a:schemeClr val="accent1"/>
+          </a:effectRef>
+          <a:fontRef idx="minor">
+            <a:schemeClr val="tx1"/>
+          </a:fontRef>
+        </p:style>
+      </p:cxnSp>
+      <p:cxnSp>
+        <p:nvCxnSpPr>
+          <p:cNvPr id="19" name="直接箭头连接符 18">
+            <a:extLst>
+              <a:ext uri="{FF2B5EF4-FFF2-40B4-BE49-F238E27FC236}">
+                <a16:creationId xmlns:a16="http://schemas.microsoft.com/office/drawing/2014/main" id="{C35E9231-8CE7-8406-3F9A-0909C44D5A02}"/>
+              </a:ext>
+            </a:extLst>
+          </p:cNvPr>
+          <p:cNvCxnSpPr>
+            <a:cxnSpLocks/>
+          </p:cNvCxnSpPr>
+          <p:nvPr/>
+        </p:nvCxnSpPr>
+        <p:spPr>
+          <a:xfrm flipV="1">
+            <a:off x="2335026" y="3715989"/>
+            <a:ext cx="120712" cy="327787"/>
+          </a:xfrm>
+          <a:prstGeom prst="straightConnector1">
+            <a:avLst/>
+          </a:prstGeom>
+          <a:ln w="12700">
+            <a:solidFill>
+              <a:srgbClr val="DC143C"/>
+            </a:solidFill>
+            <a:tailEnd type="triangle"/>
+          </a:ln>
+        </p:spPr>
+        <p:style>
+          <a:lnRef idx="2">
+            <a:schemeClr val="accent1"/>
+          </a:lnRef>
+          <a:fillRef idx="0">
+            <a:schemeClr val="accent1"/>
+          </a:fillRef>
+          <a:effectRef idx="1">
+            <a:schemeClr val="accent1"/>
+          </a:effectRef>
+          <a:fontRef idx="minor">
+            <a:schemeClr val="tx1"/>
+          </a:fontRef>
+        </p:style>
+      </p:cxnSp>
+      <p:sp>
+        <p:nvSpPr>
+          <p:cNvPr id="25" name="文本框 24">
+            <a:extLst>
+              <a:ext uri="{FF2B5EF4-FFF2-40B4-BE49-F238E27FC236}">
+                <a16:creationId xmlns:a16="http://schemas.microsoft.com/office/drawing/2014/main" id="{1660E916-C2FE-42A2-C6D7-9DDF07E1CD2C}"/>
+              </a:ext>
+            </a:extLst>
+          </p:cNvPr>
+          <p:cNvSpPr txBox="1"/>
+          <p:nvPr/>
+        </p:nvSpPr>
+        <p:spPr>
+          <a:xfrm>
+            <a:off x="2350272" y="3410644"/>
+            <a:ext cx="298480" cy="338554"/>
+          </a:xfrm>
+          <a:prstGeom prst="rect">
+            <a:avLst/>
+          </a:prstGeom>
+          <a:noFill/>
+        </p:spPr>
+        <p:txBody>
+          <a:bodyPr wrap="none" rtlCol="0">
+            <a:spAutoFit/>
+          </a:bodyPr>
+          <a:lstStyle/>
+          <a:p>
+            <a:r>
+              <a:rPr lang="en-US" altLang="zh-CN" sz="1600" i="1" dirty="0">
+                <a:solidFill>
+                  <a:srgbClr val="DC143C"/>
+                </a:solidFill>
+                <a:latin typeface="Times New Roman" panose="02020603050405020304" pitchFamily="18" charset="0"/>
+                <a:cs typeface="Times New Roman" panose="02020603050405020304" pitchFamily="18" charset="0"/>
+              </a:rPr>
+              <a:t>L</a:t>
+            </a:r>
+            <a:endParaRPr lang="zh-CN" altLang="en-US" sz="1600" i="1" baseline="-25000" dirty="0">
+              <a:solidFill>
+                <a:srgbClr val="DC143C"/>
+              </a:solidFill>
+              <a:latin typeface="Times New Roman" panose="02020603050405020304" pitchFamily="18" charset="0"/>
+              <a:cs typeface="Times New Roman" panose="02020603050405020304" pitchFamily="18" charset="0"/>
+            </a:endParaRPr>
+          </a:p>
+        </p:txBody>
+      </p:sp>
+      <p:cxnSp>
+        <p:nvCxnSpPr>
+          <p:cNvPr id="26" name="直接箭头连接符 25">
+            <a:extLst>
+              <a:ext uri="{FF2B5EF4-FFF2-40B4-BE49-F238E27FC236}">
+                <a16:creationId xmlns:a16="http://schemas.microsoft.com/office/drawing/2014/main" id="{A2CBE254-54EC-7669-4148-C0F37BB5CA61}"/>
+              </a:ext>
+            </a:extLst>
+          </p:cNvPr>
+          <p:cNvCxnSpPr>
+            <a:cxnSpLocks/>
+          </p:cNvCxnSpPr>
+          <p:nvPr/>
+        </p:nvCxnSpPr>
+        <p:spPr>
+          <a:xfrm flipV="1">
+            <a:off x="9989669" y="3791214"/>
+            <a:ext cx="92563" cy="319395"/>
+          </a:xfrm>
+          <a:prstGeom prst="straightConnector1">
+            <a:avLst/>
+          </a:prstGeom>
+          <a:ln w="12700">
+            <a:solidFill>
+              <a:srgbClr val="DC143C"/>
+            </a:solidFill>
+            <a:tailEnd type="triangle"/>
+          </a:ln>
+        </p:spPr>
+        <p:style>
+          <a:lnRef idx="2">
+            <a:schemeClr val="accent1"/>
+          </a:lnRef>
+          <a:fillRef idx="0">
+            <a:schemeClr val="accent1"/>
+          </a:fillRef>
+          <a:effectRef idx="1">
+            <a:schemeClr val="accent1"/>
+          </a:effectRef>
+          <a:fontRef idx="minor">
+            <a:schemeClr val="tx1"/>
+          </a:fontRef>
+        </p:style>
+      </p:cxnSp>
+      <p:sp>
+        <p:nvSpPr>
+          <p:cNvPr id="29" name="文本框 28">
+            <a:extLst>
+              <a:ext uri="{FF2B5EF4-FFF2-40B4-BE49-F238E27FC236}">
+                <a16:creationId xmlns:a16="http://schemas.microsoft.com/office/drawing/2014/main" id="{054E6DA5-FF54-1C95-99AC-1044B339546B}"/>
+              </a:ext>
+            </a:extLst>
+          </p:cNvPr>
+          <p:cNvSpPr txBox="1"/>
+          <p:nvPr/>
+        </p:nvSpPr>
+        <p:spPr>
+          <a:xfrm>
+            <a:off x="10053805" y="3593874"/>
+            <a:ext cx="298480" cy="338554"/>
+          </a:xfrm>
+          <a:prstGeom prst="rect">
+            <a:avLst/>
+          </a:prstGeom>
+          <a:gradFill>
+            <a:gsLst>
+              <a:gs pos="30000">
+                <a:schemeClr val="bg1"/>
+              </a:gs>
+              <a:gs pos="68000">
+                <a:schemeClr val="bg1">
+                  <a:alpha val="0"/>
+                </a:schemeClr>
+              </a:gs>
+            </a:gsLst>
+            <a:path path="circle">
+              <a:fillToRect l="50000" t="50000" r="50000" b="50000"/>
+            </a:path>
+          </a:gradFill>
+        </p:spPr>
+        <p:txBody>
+          <a:bodyPr wrap="none" rtlCol="0">
+            <a:spAutoFit/>
+          </a:bodyPr>
+          <a:lstStyle/>
+          <a:p>
+            <a:r>
+              <a:rPr lang="en-US" altLang="zh-CN" sz="1600" i="1" dirty="0">
+                <a:solidFill>
+                  <a:srgbClr val="DC143C"/>
+                </a:solidFill>
+                <a:latin typeface="Times New Roman" panose="02020603050405020304" pitchFamily="18" charset="0"/>
+                <a:cs typeface="Times New Roman" panose="02020603050405020304" pitchFamily="18" charset="0"/>
+              </a:rPr>
+              <a:t>L</a:t>
+            </a:r>
+            <a:endParaRPr lang="zh-CN" altLang="en-US" sz="1600" i="1" baseline="-25000" dirty="0">
+              <a:solidFill>
+                <a:srgbClr val="DC143C"/>
+              </a:solidFill>
+              <a:latin typeface="Times New Roman" panose="02020603050405020304" pitchFamily="18" charset="0"/>
+              <a:cs typeface="Times New Roman" panose="02020603050405020304" pitchFamily="18" charset="0"/>
+            </a:endParaRPr>
+          </a:p>
+        </p:txBody>
+      </p:sp>
     </p:spTree>
     <p:extLst>
       <p:ext uri="{BB962C8B-B14F-4D97-AF65-F5344CB8AC3E}">
@@ -24119,7 +24341,7 @@
                 <a:latin typeface="Times New Roman" panose="02020603050405020304" pitchFamily="18" charset="0"/>
                 <a:cs typeface="Times New Roman" panose="02020603050405020304" pitchFamily="18" charset="0"/>
               </a:rPr>
-              <a:t>Fuselage aerodynamic model</a:t>
+              <a:t>Fuselage aerodynamics model</a:t>
             </a:r>
             <a:endParaRPr lang="en-GB" sz="1400" noProof="0" dirty="0">
               <a:solidFill>
@@ -24145,10 +24367,10 @@
         </p:nvGrpSpPr>
         <p:grpSpPr>
           <a:xfrm>
-            <a:off x="3270296" y="2893430"/>
-            <a:ext cx="3507204" cy="1632542"/>
-            <a:chOff x="4372071" y="2005742"/>
-            <a:chExt cx="3453491" cy="1632542"/>
+            <a:off x="3270296" y="2905902"/>
+            <a:ext cx="3507204" cy="1620070"/>
+            <a:chOff x="4372071" y="2018214"/>
+            <a:chExt cx="3453491" cy="1620070"/>
           </a:xfrm>
         </p:grpSpPr>
         <p:sp>
@@ -24285,7 +24507,7 @@
           </p:nvSpPr>
           <p:spPr>
             <a:xfrm>
-              <a:off x="4504978" y="2323034"/>
+              <a:off x="4504977" y="2346778"/>
               <a:ext cx="3235524" cy="560250"/>
             </a:xfrm>
             <a:prstGeom prst="rect">
@@ -24346,7 +24568,7 @@
                 <a:t>x</a:t>
               </a:r>
               <a:r>
-                <a:rPr lang="en-US" altLang="zh-CN" sz="1600" b="1" i="1" baseline="-25000" dirty="0" err="1">
+                <a:rPr lang="en-US" altLang="zh-CN" sz="1600" b="1" baseline="-25000" dirty="0" err="1">
                   <a:solidFill>
                     <a:schemeClr val="tx1"/>
                   </a:solidFill>
@@ -24748,7 +24970,7 @@
                 <a:t>x</a:t>
               </a:r>
               <a:r>
-                <a:rPr lang="en-US" altLang="zh-CN" sz="1600" b="1" i="1" baseline="-25000" dirty="0">
+                <a:rPr lang="en-US" altLang="zh-CN" sz="1600" b="1" baseline="-25000" dirty="0">
                   <a:solidFill>
                     <a:schemeClr val="tx1"/>
                   </a:solidFill>
@@ -25089,8 +25311,8 @@
           </p:nvSpPr>
           <p:spPr>
             <a:xfrm>
-              <a:off x="4764589" y="2005742"/>
-              <a:ext cx="2716300" cy="355832"/>
+              <a:off x="4564123" y="2018214"/>
+              <a:ext cx="3060971" cy="355832"/>
             </a:xfrm>
             <a:prstGeom prst="rect">
               <a:avLst/>
@@ -25139,7 +25361,7 @@
                   <a:latin typeface="Times New Roman" panose="02020603050405020304" pitchFamily="18" charset="0"/>
                   <a:cs typeface="Times New Roman" panose="02020603050405020304" pitchFamily="18" charset="0"/>
                 </a:rPr>
-                <a:t>Rotor aerodynamic model</a:t>
+                <a:t>Rotor aerodynamics &amp; dynamics model</a:t>
               </a:r>
               <a:endParaRPr lang="en-US" sz="1400" dirty="0">
                 <a:solidFill>
@@ -25290,7 +25512,7 @@
                 <a:latin typeface="Times New Roman" panose="02020603050405020304" pitchFamily="18" charset="0"/>
                 <a:cs typeface="Times New Roman" panose="02020603050405020304" pitchFamily="18" charset="0"/>
               </a:rPr>
-              <a:t>Empennage aerodynamic model</a:t>
+              <a:t>Empennage aerodynamics model</a:t>
             </a:r>
             <a:endParaRPr lang="en-GB" altLang="zh-CN" sz="1400" noProof="0" dirty="0">
               <a:solidFill>

--- a/HER05/01 - Mathematical Modeling/Sketch/Forces and Moments Sketch.pptx
+++ b/HER05/01 - Mathematical Modeling/Sketch/Forces and Moments Sketch.pptx
@@ -132,12 +132,12 @@
   <pc:docChgLst>
     <pc:chgData name="Li, Hanchen F" userId="3aee791e-6a2d-4da7-a77b-fbdf7bf15886" providerId="ADAL" clId="{CDC5B0EF-6BEB-4658-A9FF-CB66F6FA6C1E}"/>
     <pc:docChg chg="undo redo custSel addSld delSld modSld modMainMaster modNotesMaster">
-      <pc:chgData name="Li, Hanchen F" userId="3aee791e-6a2d-4da7-a77b-fbdf7bf15886" providerId="ADAL" clId="{CDC5B0EF-6BEB-4658-A9FF-CB66F6FA6C1E}" dt="2025-06-02T22:09:19.571" v="9897" actId="114"/>
+      <pc:chgData name="Li, Hanchen F" userId="3aee791e-6a2d-4da7-a77b-fbdf7bf15886" providerId="ADAL" clId="{CDC5B0EF-6BEB-4658-A9FF-CB66F6FA6C1E}" dt="2025-06-06T21:31:38.610" v="10067" actId="1037"/>
       <pc:docMkLst>
         <pc:docMk/>
       </pc:docMkLst>
       <pc:sldChg chg="addSp delSp modSp new mod">
-        <pc:chgData name="Li, Hanchen F" userId="3aee791e-6a2d-4da7-a77b-fbdf7bf15886" providerId="ADAL" clId="{CDC5B0EF-6BEB-4658-A9FF-CB66F6FA6C1E}" dt="2025-06-02T21:23:35.009" v="9866" actId="478"/>
+        <pc:chgData name="Li, Hanchen F" userId="3aee791e-6a2d-4da7-a77b-fbdf7bf15886" providerId="ADAL" clId="{CDC5B0EF-6BEB-4658-A9FF-CB66F6FA6C1E}" dt="2025-06-06T21:31:38.610" v="10067" actId="1037"/>
         <pc:sldMkLst>
           <pc:docMk/>
           <pc:sldMk cId="2152317508" sldId="256"/>
@@ -255,23 +255,15 @@
           </ac:spMkLst>
         </pc:spChg>
         <pc:spChg chg="add mod">
-          <ac:chgData name="Li, Hanchen F" userId="3aee791e-6a2d-4da7-a77b-fbdf7bf15886" providerId="ADAL" clId="{CDC5B0EF-6BEB-4658-A9FF-CB66F6FA6C1E}" dt="2025-06-02T21:23:05.460" v="9863" actId="1076"/>
+          <ac:chgData name="Li, Hanchen F" userId="3aee791e-6a2d-4da7-a77b-fbdf7bf15886" providerId="ADAL" clId="{CDC5B0EF-6BEB-4658-A9FF-CB66F6FA6C1E}" dt="2025-06-06T21:24:22.994" v="9900" actId="947"/>
           <ac:spMkLst>
             <pc:docMk/>
             <pc:sldMk cId="2152317508" sldId="256"/>
             <ac:spMk id="25" creationId="{1660E916-C2FE-42A2-C6D7-9DDF07E1CD2C}"/>
           </ac:spMkLst>
         </pc:spChg>
-        <pc:spChg chg="add del mod">
-          <ac:chgData name="Li, Hanchen F" userId="3aee791e-6a2d-4da7-a77b-fbdf7bf15886" providerId="ADAL" clId="{CDC5B0EF-6BEB-4658-A9FF-CB66F6FA6C1E}" dt="2025-06-02T21:21:58.886" v="9848" actId="478"/>
-          <ac:spMkLst>
-            <pc:docMk/>
-            <pc:sldMk cId="2152317508" sldId="256"/>
-            <ac:spMk id="28" creationId="{59778F99-9FE1-60A0-1734-8D3358AEDEEB}"/>
-          </ac:spMkLst>
-        </pc:spChg>
         <pc:spChg chg="add mod">
-          <ac:chgData name="Li, Hanchen F" userId="3aee791e-6a2d-4da7-a77b-fbdf7bf15886" providerId="ADAL" clId="{CDC5B0EF-6BEB-4658-A9FF-CB66F6FA6C1E}" dt="2025-06-02T21:22:22.882" v="9854" actId="1076"/>
+          <ac:chgData name="Li, Hanchen F" userId="3aee791e-6a2d-4da7-a77b-fbdf7bf15886" providerId="ADAL" clId="{CDC5B0EF-6BEB-4658-A9FF-CB66F6FA6C1E}" dt="2025-06-06T21:24:52.181" v="9905" actId="1076"/>
           <ac:spMkLst>
             <pc:docMk/>
             <pc:sldMk cId="2152317508" sldId="256"/>
@@ -286,14 +278,6 @@
             <ac:spMk id="30" creationId="{03E7375E-B3C1-217F-067E-365A732738CA}"/>
           </ac:spMkLst>
         </pc:spChg>
-        <pc:spChg chg="add del mod">
-          <ac:chgData name="Li, Hanchen F" userId="3aee791e-6a2d-4da7-a77b-fbdf7bf15886" providerId="ADAL" clId="{CDC5B0EF-6BEB-4658-A9FF-CB66F6FA6C1E}" dt="2025-06-02T21:23:35.009" v="9866" actId="478"/>
-          <ac:spMkLst>
-            <pc:docMk/>
-            <pc:sldMk cId="2152317508" sldId="256"/>
-            <ac:spMk id="33" creationId="{2CB2C986-2354-CB99-B566-34CF59B975CB}"/>
-          </ac:spMkLst>
-        </pc:spChg>
         <pc:spChg chg="add mod ord topLvl">
           <ac:chgData name="Li, Hanchen F" userId="3aee791e-6a2d-4da7-a77b-fbdf7bf15886" providerId="ADAL" clId="{CDC5B0EF-6BEB-4658-A9FF-CB66F6FA6C1E}" dt="2025-05-30T22:35:23.784" v="8872" actId="14826"/>
           <ac:spMkLst>
@@ -911,7 +895,7 @@
           </ac:spMkLst>
         </pc:spChg>
         <pc:spChg chg="add mod">
-          <ac:chgData name="Li, Hanchen F" userId="3aee791e-6a2d-4da7-a77b-fbdf7bf15886" providerId="ADAL" clId="{CDC5B0EF-6BEB-4658-A9FF-CB66F6FA6C1E}" dt="2025-05-22T23:34:17.088" v="3611" actId="1037"/>
+          <ac:chgData name="Li, Hanchen F" userId="3aee791e-6a2d-4da7-a77b-fbdf7bf15886" providerId="ADAL" clId="{CDC5B0EF-6BEB-4658-A9FF-CB66F6FA6C1E}" dt="2025-06-06T21:31:38.610" v="10067" actId="1037"/>
           <ac:spMkLst>
             <pc:docMk/>
             <pc:sldMk cId="2152317508" sldId="256"/>
@@ -1239,7 +1223,7 @@
           </ac:grpSpMkLst>
         </pc:grpChg>
         <pc:grpChg chg="add del mod ord">
-          <ac:chgData name="Li, Hanchen F" userId="3aee791e-6a2d-4da7-a77b-fbdf7bf15886" providerId="ADAL" clId="{CDC5B0EF-6BEB-4658-A9FF-CB66F6FA6C1E}" dt="2025-06-02T21:22:46.578" v="9859" actId="1076"/>
+          <ac:chgData name="Li, Hanchen F" userId="3aee791e-6a2d-4da7-a77b-fbdf7bf15886" providerId="ADAL" clId="{CDC5B0EF-6BEB-4658-A9FF-CB66F6FA6C1E}" dt="2025-06-06T21:31:20.624" v="10053" actId="1076"/>
           <ac:grpSpMkLst>
             <pc:docMk/>
             <pc:sldMk cId="2152317508" sldId="256"/>
@@ -1678,8 +1662,8 @@
             <ac:cxnSpMk id="304" creationId="{A6EE3A5B-5AE9-D053-02A8-3899EAD21351}"/>
           </ac:cxnSpMkLst>
         </pc:cxnChg>
-        <pc:cxnChg chg="add mod topLvl">
-          <ac:chgData name="Li, Hanchen F" userId="3aee791e-6a2d-4da7-a77b-fbdf7bf15886" providerId="ADAL" clId="{CDC5B0EF-6BEB-4658-A9FF-CB66F6FA6C1E}" dt="2025-05-22T22:43:53.687" v="2661" actId="1076"/>
+        <pc:cxnChg chg="add mod ord topLvl">
+          <ac:chgData name="Li, Hanchen F" userId="3aee791e-6a2d-4da7-a77b-fbdf7bf15886" providerId="ADAL" clId="{CDC5B0EF-6BEB-4658-A9FF-CB66F6FA6C1E}" dt="2025-06-06T21:31:28.548" v="10056" actId="166"/>
           <ac:cxnSpMkLst>
             <pc:docMk/>
             <pc:sldMk cId="2152317508" sldId="256"/>
@@ -1744,7 +1728,7 @@
         </pc:cxnChg>
       </pc:sldChg>
       <pc:sldChg chg="addSp delSp modSp add mod">
-        <pc:chgData name="Li, Hanchen F" userId="3aee791e-6a2d-4da7-a77b-fbdf7bf15886" providerId="ADAL" clId="{CDC5B0EF-6BEB-4658-A9FF-CB66F6FA6C1E}" dt="2025-05-30T22:50:51.390" v="9267" actId="1076"/>
+        <pc:chgData name="Li, Hanchen F" userId="3aee791e-6a2d-4da7-a77b-fbdf7bf15886" providerId="ADAL" clId="{CDC5B0EF-6BEB-4658-A9FF-CB66F6FA6C1E}" dt="2025-06-06T21:30:07.280" v="9907" actId="947"/>
         <pc:sldMkLst>
           <pc:docMk/>
           <pc:sldMk cId="3137520481" sldId="257"/>
@@ -1934,7 +1918,7 @@
           </ac:spMkLst>
         </pc:spChg>
         <pc:spChg chg="add mod">
-          <ac:chgData name="Li, Hanchen F" userId="3aee791e-6a2d-4da7-a77b-fbdf7bf15886" providerId="ADAL" clId="{CDC5B0EF-6BEB-4658-A9FF-CB66F6FA6C1E}" dt="2025-05-24T00:49:23.872" v="8680" actId="1076"/>
+          <ac:chgData name="Li, Hanchen F" userId="3aee791e-6a2d-4da7-a77b-fbdf7bf15886" providerId="ADAL" clId="{CDC5B0EF-6BEB-4658-A9FF-CB66F6FA6C1E}" dt="2025-06-06T21:30:07.280" v="9907" actId="947"/>
           <ac:spMkLst>
             <pc:docMk/>
             <pc:sldMk cId="3137520481" sldId="257"/>
@@ -2791,14 +2775,6 @@
             <pc:docMk/>
             <pc:sldMk cId="1584463432" sldId="260"/>
             <ac:spMk id="2" creationId="{AAF2876B-BAD6-F898-5EFF-FA8340A43036}"/>
-          </ac:spMkLst>
-        </pc:spChg>
-        <pc:spChg chg="add del">
-          <ac:chgData name="Li, Hanchen F" userId="3aee791e-6a2d-4da7-a77b-fbdf7bf15886" providerId="ADAL" clId="{CDC5B0EF-6BEB-4658-A9FF-CB66F6FA6C1E}" dt="2025-06-02T22:08:45.728" v="9893" actId="22"/>
-          <ac:spMkLst>
-            <pc:docMk/>
-            <pc:sldMk cId="1584463432" sldId="260"/>
-            <ac:spMk id="4" creationId="{6476E9A5-09DD-C3D1-4156-04EAE3539BD6}"/>
           </ac:spMkLst>
         </pc:spChg>
         <pc:spChg chg="add mod">
@@ -3239,7 +3215,7 @@
           <a:p>
             <a:fld id="{DF1088C5-931A-42D2-8AA4-FA289862AAD0}" type="datetimeFigureOut">
               <a:rPr lang="zh-CN" altLang="en-US" smtClean="0"/>
-              <a:t>2025/6/2</a:t>
+              <a:t>2025/6/6</a:t>
             </a:fld>
             <a:endParaRPr lang="zh-CN" altLang="en-US"/>
           </a:p>
@@ -4129,7 +4105,7 @@
           <a:p>
             <a:fld id="{3CAF1464-0EA4-453D-A90B-03B04D244405}" type="datetimeFigureOut">
               <a:rPr lang="zh-CN" altLang="en-US" smtClean="0"/>
-              <a:t>2025/6/2</a:t>
+              <a:t>2025/6/6</a:t>
             </a:fld>
             <a:endParaRPr lang="zh-CN" altLang="en-US"/>
           </a:p>
@@ -4299,7 +4275,7 @@
           <a:p>
             <a:fld id="{3CAF1464-0EA4-453D-A90B-03B04D244405}" type="datetimeFigureOut">
               <a:rPr lang="zh-CN" altLang="en-US" smtClean="0"/>
-              <a:t>2025/6/2</a:t>
+              <a:t>2025/6/6</a:t>
             </a:fld>
             <a:endParaRPr lang="zh-CN" altLang="en-US"/>
           </a:p>
@@ -4479,7 +4455,7 @@
           <a:p>
             <a:fld id="{3CAF1464-0EA4-453D-A90B-03B04D244405}" type="datetimeFigureOut">
               <a:rPr lang="zh-CN" altLang="en-US" smtClean="0"/>
-              <a:t>2025/6/2</a:t>
+              <a:t>2025/6/6</a:t>
             </a:fld>
             <a:endParaRPr lang="zh-CN" altLang="en-US"/>
           </a:p>
@@ -4649,7 +4625,7 @@
           <a:p>
             <a:fld id="{3CAF1464-0EA4-453D-A90B-03B04D244405}" type="datetimeFigureOut">
               <a:rPr lang="zh-CN" altLang="en-US" smtClean="0"/>
-              <a:t>2025/6/2</a:t>
+              <a:t>2025/6/6</a:t>
             </a:fld>
             <a:endParaRPr lang="zh-CN" altLang="en-US"/>
           </a:p>
@@ -4895,7 +4871,7 @@
           <a:p>
             <a:fld id="{3CAF1464-0EA4-453D-A90B-03B04D244405}" type="datetimeFigureOut">
               <a:rPr lang="zh-CN" altLang="en-US" smtClean="0"/>
-              <a:t>2025/6/2</a:t>
+              <a:t>2025/6/6</a:t>
             </a:fld>
             <a:endParaRPr lang="zh-CN" altLang="en-US"/>
           </a:p>
@@ -5127,7 +5103,7 @@
           <a:p>
             <a:fld id="{3CAF1464-0EA4-453D-A90B-03B04D244405}" type="datetimeFigureOut">
               <a:rPr lang="zh-CN" altLang="en-US" smtClean="0"/>
-              <a:t>2025/6/2</a:t>
+              <a:t>2025/6/6</a:t>
             </a:fld>
             <a:endParaRPr lang="zh-CN" altLang="en-US"/>
           </a:p>
@@ -5494,7 +5470,7 @@
           <a:p>
             <a:fld id="{3CAF1464-0EA4-453D-A90B-03B04D244405}" type="datetimeFigureOut">
               <a:rPr lang="zh-CN" altLang="en-US" smtClean="0"/>
-              <a:t>2025/6/2</a:t>
+              <a:t>2025/6/6</a:t>
             </a:fld>
             <a:endParaRPr lang="zh-CN" altLang="en-US"/>
           </a:p>
@@ -5612,7 +5588,7 @@
           <a:p>
             <a:fld id="{3CAF1464-0EA4-453D-A90B-03B04D244405}" type="datetimeFigureOut">
               <a:rPr lang="zh-CN" altLang="en-US" smtClean="0"/>
-              <a:t>2025/6/2</a:t>
+              <a:t>2025/6/6</a:t>
             </a:fld>
             <a:endParaRPr lang="zh-CN" altLang="en-US"/>
           </a:p>
@@ -5707,7 +5683,7 @@
           <a:p>
             <a:fld id="{3CAF1464-0EA4-453D-A90B-03B04D244405}" type="datetimeFigureOut">
               <a:rPr lang="zh-CN" altLang="en-US" smtClean="0"/>
-              <a:t>2025/6/2</a:t>
+              <a:t>2025/6/6</a:t>
             </a:fld>
             <a:endParaRPr lang="zh-CN" altLang="en-US"/>
           </a:p>
@@ -5984,7 +5960,7 @@
           <a:p>
             <a:fld id="{3CAF1464-0EA4-453D-A90B-03B04D244405}" type="datetimeFigureOut">
               <a:rPr lang="zh-CN" altLang="en-US" smtClean="0"/>
-              <a:t>2025/6/2</a:t>
+              <a:t>2025/6/6</a:t>
             </a:fld>
             <a:endParaRPr lang="zh-CN" altLang="en-US"/>
           </a:p>
@@ -6241,7 +6217,7 @@
           <a:p>
             <a:fld id="{3CAF1464-0EA4-453D-A90B-03B04D244405}" type="datetimeFigureOut">
               <a:rPr lang="zh-CN" altLang="en-US" smtClean="0"/>
-              <a:t>2025/6/2</a:t>
+              <a:t>2025/6/6</a:t>
             </a:fld>
             <a:endParaRPr lang="zh-CN" altLang="en-US"/>
           </a:p>
@@ -6454,7 +6430,7 @@
           <a:p>
             <a:fld id="{3CAF1464-0EA4-453D-A90B-03B04D244405}" type="datetimeFigureOut">
               <a:rPr lang="zh-CN" altLang="en-US" smtClean="0"/>
-              <a:t>2025/6/2</a:t>
+              <a:t>2025/6/6</a:t>
             </a:fld>
             <a:endParaRPr lang="zh-CN" altLang="en-US"/>
           </a:p>
@@ -16691,50 +16667,6 @@
       </p:grpSp>
       <p:cxnSp>
         <p:nvCxnSpPr>
-          <p:cNvPr id="463" name="直接箭头连接符 462">
-            <a:extLst>
-              <a:ext uri="{FF2B5EF4-FFF2-40B4-BE49-F238E27FC236}">
-                <a16:creationId xmlns:a16="http://schemas.microsoft.com/office/drawing/2014/main" id="{10451E52-E204-D840-CB8B-B13B2966A110}"/>
-              </a:ext>
-            </a:extLst>
-          </p:cNvPr>
-          <p:cNvCxnSpPr>
-            <a:cxnSpLocks/>
-          </p:cNvCxnSpPr>
-          <p:nvPr/>
-        </p:nvCxnSpPr>
-        <p:spPr>
-          <a:xfrm rot="1149310">
-            <a:off x="2346997" y="4217298"/>
-            <a:ext cx="459198" cy="0"/>
-          </a:xfrm>
-          <a:prstGeom prst="straightConnector1">
-            <a:avLst/>
-          </a:prstGeom>
-          <a:ln w="12700">
-            <a:solidFill>
-              <a:srgbClr val="DC143C"/>
-            </a:solidFill>
-            <a:tailEnd type="triangle"/>
-          </a:ln>
-        </p:spPr>
-        <p:style>
-          <a:lnRef idx="2">
-            <a:schemeClr val="accent1"/>
-          </a:lnRef>
-          <a:fillRef idx="0">
-            <a:schemeClr val="accent1"/>
-          </a:fillRef>
-          <a:effectRef idx="1">
-            <a:schemeClr val="accent1"/>
-          </a:effectRef>
-          <a:fontRef idx="minor">
-            <a:schemeClr val="tx1"/>
-          </a:fontRef>
-        </p:style>
-      </p:cxnSp>
-      <p:cxnSp>
-        <p:nvCxnSpPr>
           <p:cNvPr id="483" name="直接连接符 482">
             <a:extLst>
               <a:ext uri="{FF2B5EF4-FFF2-40B4-BE49-F238E27FC236}">
@@ -17597,16 +17529,31 @@
         </p:nvSpPr>
         <p:spPr>
           <a:xfrm>
-            <a:off x="2739311" y="4138053"/>
-            <a:ext cx="332142" cy="338554"/>
+            <a:off x="2739332" y="4112608"/>
+            <a:ext cx="415498" cy="338554"/>
           </a:xfrm>
           <a:prstGeom prst="rect">
             <a:avLst/>
           </a:prstGeom>
-          <a:noFill/>
-        </p:spPr>
-        <p:txBody>
-          <a:bodyPr wrap="none" rtlCol="0">
+          <a:gradFill flip="none" rotWithShape="1">
+            <a:gsLst>
+              <a:gs pos="40000">
+                <a:schemeClr val="bg1"/>
+              </a:gs>
+              <a:gs pos="100000">
+                <a:schemeClr val="bg1">
+                  <a:alpha val="0"/>
+                </a:schemeClr>
+              </a:gs>
+            </a:gsLst>
+            <a:path path="circle">
+              <a:fillToRect l="50000" t="50000" r="50000" b="50000"/>
+            </a:path>
+            <a:tileRect/>
+          </a:gradFill>
+        </p:spPr>
+        <p:txBody>
+          <a:bodyPr wrap="square" rtlCol="0">
             <a:spAutoFit/>
           </a:bodyPr>
           <a:lstStyle/>
@@ -17620,6 +17567,16 @@
                 <a:cs typeface="Times New Roman" panose="02020603050405020304" pitchFamily="18" charset="0"/>
               </a:rPr>
               <a:t>D</a:t>
+            </a:r>
+            <a:r>
+              <a:rPr lang="en-US" altLang="zh-CN" sz="1600" i="1" baseline="-25000" dirty="0">
+                <a:solidFill>
+                  <a:srgbClr val="DC143C"/>
+                </a:solidFill>
+                <a:latin typeface="Times New Roman" panose="02020603050405020304" pitchFamily="18" charset="0"/>
+                <a:cs typeface="Times New Roman" panose="02020603050405020304" pitchFamily="18" charset="0"/>
+              </a:rPr>
+              <a:t>F</a:t>
             </a:r>
             <a:endParaRPr lang="zh-CN" altLang="en-US" sz="1600" i="1" baseline="-25000" dirty="0">
               <a:solidFill>
@@ -20991,7 +20948,7 @@
         <p:spPr>
           <a:xfrm>
             <a:off x="2350272" y="3410644"/>
-            <a:ext cx="298480" cy="338554"/>
+            <a:ext cx="381836" cy="338554"/>
           </a:xfrm>
           <a:prstGeom prst="rect">
             <a:avLst/>
@@ -21013,6 +20970,16 @@
                 <a:cs typeface="Times New Roman" panose="02020603050405020304" pitchFamily="18" charset="0"/>
               </a:rPr>
               <a:t>L</a:t>
+            </a:r>
+            <a:r>
+              <a:rPr lang="en-US" altLang="zh-CN" sz="1600" i="1" baseline="-25000" dirty="0">
+                <a:solidFill>
+                  <a:srgbClr val="DC143C"/>
+                </a:solidFill>
+                <a:latin typeface="Times New Roman" panose="02020603050405020304" pitchFamily="18" charset="0"/>
+                <a:cs typeface="Times New Roman" panose="02020603050405020304" pitchFamily="18" charset="0"/>
+              </a:rPr>
+              <a:t>F</a:t>
             </a:r>
             <a:endParaRPr lang="zh-CN" altLang="en-US" sz="1600" i="1" baseline="-25000" dirty="0">
               <a:solidFill>
@@ -21082,8 +21049,8 @@
         </p:nvSpPr>
         <p:spPr>
           <a:xfrm>
-            <a:off x="10053805" y="3593874"/>
-            <a:ext cx="298480" cy="338554"/>
+            <a:off x="10061686" y="3562163"/>
+            <a:ext cx="381836" cy="338554"/>
           </a:xfrm>
           <a:prstGeom prst="rect">
             <a:avLst/>
@@ -21120,6 +21087,16 @@
               </a:rPr>
               <a:t>L</a:t>
             </a:r>
+            <a:r>
+              <a:rPr lang="en-US" altLang="zh-CN" sz="1600" i="1" baseline="-25000" dirty="0">
+                <a:solidFill>
+                  <a:srgbClr val="DC143C"/>
+                </a:solidFill>
+                <a:latin typeface="Times New Roman" panose="02020603050405020304" pitchFamily="18" charset="0"/>
+                <a:cs typeface="Times New Roman" panose="02020603050405020304" pitchFamily="18" charset="0"/>
+              </a:rPr>
+              <a:t>F</a:t>
+            </a:r>
             <a:endParaRPr lang="zh-CN" altLang="en-US" sz="1600" i="1" baseline="-25000" dirty="0">
               <a:solidFill>
                 <a:srgbClr val="DC143C"/>
@@ -21130,6 +21107,50 @@
           </a:p>
         </p:txBody>
       </p:sp>
+      <p:cxnSp>
+        <p:nvCxnSpPr>
+          <p:cNvPr id="463" name="直接箭头连接符 462">
+            <a:extLst>
+              <a:ext uri="{FF2B5EF4-FFF2-40B4-BE49-F238E27FC236}">
+                <a16:creationId xmlns:a16="http://schemas.microsoft.com/office/drawing/2014/main" id="{10451E52-E204-D840-CB8B-B13B2966A110}"/>
+              </a:ext>
+            </a:extLst>
+          </p:cNvPr>
+          <p:cNvCxnSpPr>
+            <a:cxnSpLocks/>
+          </p:cNvCxnSpPr>
+          <p:nvPr/>
+        </p:nvCxnSpPr>
+        <p:spPr>
+          <a:xfrm rot="1149310">
+            <a:off x="2346997" y="4217298"/>
+            <a:ext cx="459198" cy="0"/>
+          </a:xfrm>
+          <a:prstGeom prst="straightConnector1">
+            <a:avLst/>
+          </a:prstGeom>
+          <a:ln w="12700">
+            <a:solidFill>
+              <a:srgbClr val="DC143C"/>
+            </a:solidFill>
+            <a:tailEnd type="triangle"/>
+          </a:ln>
+        </p:spPr>
+        <p:style>
+          <a:lnRef idx="2">
+            <a:schemeClr val="accent1"/>
+          </a:lnRef>
+          <a:fillRef idx="0">
+            <a:schemeClr val="accent1"/>
+          </a:fillRef>
+          <a:effectRef idx="1">
+            <a:schemeClr val="accent1"/>
+          </a:effectRef>
+          <a:fontRef idx="minor">
+            <a:schemeClr val="tx1"/>
+          </a:fontRef>
+        </p:style>
+      </p:cxnSp>
     </p:spTree>
     <p:extLst>
       <p:ext uri="{BB962C8B-B14F-4D97-AF65-F5344CB8AC3E}">
@@ -23448,7 +23469,7 @@
         <p:spPr>
           <a:xfrm>
             <a:off x="4768784" y="3002497"/>
-            <a:ext cx="332142" cy="338554"/>
+            <a:ext cx="415498" cy="338554"/>
           </a:xfrm>
           <a:prstGeom prst="rect">
             <a:avLst/>
@@ -23470,6 +23491,16 @@
                 <a:cs typeface="Times New Roman" panose="02020603050405020304" pitchFamily="18" charset="0"/>
               </a:rPr>
               <a:t>D</a:t>
+            </a:r>
+            <a:r>
+              <a:rPr lang="en-US" altLang="zh-CN" sz="1600" i="1" baseline="-25000" dirty="0">
+                <a:solidFill>
+                  <a:srgbClr val="DC143C"/>
+                </a:solidFill>
+                <a:latin typeface="Times New Roman" panose="02020603050405020304" pitchFamily="18" charset="0"/>
+                <a:cs typeface="Times New Roman" panose="02020603050405020304" pitchFamily="18" charset="0"/>
+              </a:rPr>
+              <a:t>F</a:t>
             </a:r>
             <a:endParaRPr lang="zh-CN" altLang="en-US" sz="1600" i="1" baseline="-25000" dirty="0">
               <a:solidFill>

--- a/HER05/01 - Mathematical Modeling/Sketch/Forces and Moments Sketch.pptx
+++ b/HER05/01 - Mathematical Modeling/Sketch/Forces and Moments Sketch.pptx
@@ -122,7 +122,7 @@
 <file path=ppt/revisionInfo.xml><?xml version="1.0" encoding="utf-8"?>
 <p1510:revInfo xmlns:a="http://schemas.openxmlformats.org/drawingml/2006/main" xmlns:r="http://schemas.openxmlformats.org/officeDocument/2006/relationships" xmlns:p1510="http://schemas.microsoft.com/office/powerpoint/2015/10/main">
   <p1510:revLst>
-    <p1510:client id="{CDC5B0EF-6BEB-4658-A9FF-CB66F6FA6C1E}" v="433" dt="2025-06-02T21:21:55.276"/>
+    <p1510:client id="{CDC5B0EF-6BEB-4658-A9FF-CB66F6FA6C1E}" v="447" dt="2025-06-08T22:03:37.248"/>
   </p1510:revLst>
 </p1510:revInfo>
 </file>
@@ -132,7 +132,7 @@
   <pc:docChgLst>
     <pc:chgData name="Li, Hanchen F" userId="3aee791e-6a2d-4da7-a77b-fbdf7bf15886" providerId="ADAL" clId="{CDC5B0EF-6BEB-4658-A9FF-CB66F6FA6C1E}"/>
     <pc:docChg chg="undo redo custSel addSld delSld modSld modMainMaster modNotesMaster">
-      <pc:chgData name="Li, Hanchen F" userId="3aee791e-6a2d-4da7-a77b-fbdf7bf15886" providerId="ADAL" clId="{CDC5B0EF-6BEB-4658-A9FF-CB66F6FA6C1E}" dt="2025-06-06T21:31:38.610" v="10067" actId="1037"/>
+      <pc:chgData name="Li, Hanchen F" userId="3aee791e-6a2d-4da7-a77b-fbdf7bf15886" providerId="ADAL" clId="{CDC5B0EF-6BEB-4658-A9FF-CB66F6FA6C1E}" dt="2025-06-08T22:03:58.072" v="10257" actId="1076"/>
       <pc:docMkLst>
         <pc:docMk/>
       </pc:docMkLst>
@@ -2764,21 +2764,29 @@
         </pc:cxnChg>
       </pc:sldChg>
       <pc:sldChg chg="addSp delSp modSp add mod">
-        <pc:chgData name="Li, Hanchen F" userId="3aee791e-6a2d-4da7-a77b-fbdf7bf15886" providerId="ADAL" clId="{CDC5B0EF-6BEB-4658-A9FF-CB66F6FA6C1E}" dt="2025-06-02T22:09:19.571" v="9897" actId="114"/>
+        <pc:chgData name="Li, Hanchen F" userId="3aee791e-6a2d-4da7-a77b-fbdf7bf15886" providerId="ADAL" clId="{CDC5B0EF-6BEB-4658-A9FF-CB66F6FA6C1E}" dt="2025-06-08T22:03:58.072" v="10257" actId="1076"/>
         <pc:sldMkLst>
           <pc:docMk/>
           <pc:sldMk cId="1584463432" sldId="260"/>
         </pc:sldMkLst>
         <pc:spChg chg="add mod">
-          <ac:chgData name="Li, Hanchen F" userId="3aee791e-6a2d-4da7-a77b-fbdf7bf15886" providerId="ADAL" clId="{CDC5B0EF-6BEB-4658-A9FF-CB66F6FA6C1E}" dt="2025-05-23T22:14:27.977" v="8181" actId="403"/>
+          <ac:chgData name="Li, Hanchen F" userId="3aee791e-6a2d-4da7-a77b-fbdf7bf15886" providerId="ADAL" clId="{CDC5B0EF-6BEB-4658-A9FF-CB66F6FA6C1E}" dt="2025-06-08T22:03:51.338" v="10256" actId="1076"/>
           <ac:spMkLst>
             <pc:docMk/>
             <pc:sldMk cId="1584463432" sldId="260"/>
             <ac:spMk id="2" creationId="{AAF2876B-BAD6-F898-5EFF-FA8340A43036}"/>
           </ac:spMkLst>
         </pc:spChg>
+        <pc:spChg chg="add del mod">
+          <ac:chgData name="Li, Hanchen F" userId="3aee791e-6a2d-4da7-a77b-fbdf7bf15886" providerId="ADAL" clId="{CDC5B0EF-6BEB-4658-A9FF-CB66F6FA6C1E}" dt="2025-06-08T21:57:36.244" v="10146" actId="478"/>
+          <ac:spMkLst>
+            <pc:docMk/>
+            <pc:sldMk cId="1584463432" sldId="260"/>
+            <ac:spMk id="3" creationId="{1B937753-0BDE-F60D-339F-D81BBBE7EBAB}"/>
+          </ac:spMkLst>
+        </pc:spChg>
         <pc:spChg chg="add mod">
-          <ac:chgData name="Li, Hanchen F" userId="3aee791e-6a2d-4da7-a77b-fbdf7bf15886" providerId="ADAL" clId="{CDC5B0EF-6BEB-4658-A9FF-CB66F6FA6C1E}" dt="2025-05-26T23:54:59.802" v="8837" actId="948"/>
+          <ac:chgData name="Li, Hanchen F" userId="3aee791e-6a2d-4da7-a77b-fbdf7bf15886" providerId="ADAL" clId="{CDC5B0EF-6BEB-4658-A9FF-CB66F6FA6C1E}" dt="2025-06-08T22:03:58.072" v="10257" actId="1076"/>
           <ac:spMkLst>
             <pc:docMk/>
             <pc:sldMk cId="1584463432" sldId="260"/>
@@ -2802,6 +2810,30 @@
           </ac:spMkLst>
         </pc:spChg>
         <pc:spChg chg="add mod">
+          <ac:chgData name="Li, Hanchen F" userId="3aee791e-6a2d-4da7-a77b-fbdf7bf15886" providerId="ADAL" clId="{CDC5B0EF-6BEB-4658-A9FF-CB66F6FA6C1E}" dt="2025-06-08T21:57:13.214" v="10080" actId="571"/>
+          <ac:spMkLst>
+            <pc:docMk/>
+            <pc:sldMk cId="1584463432" sldId="260"/>
+            <ac:spMk id="16" creationId="{B141FC4A-9E16-2DA4-0B50-3B1EE6A7CECD}"/>
+          </ac:spMkLst>
+        </pc:spChg>
+        <pc:spChg chg="add mod">
+          <ac:chgData name="Li, Hanchen F" userId="3aee791e-6a2d-4da7-a77b-fbdf7bf15886" providerId="ADAL" clId="{CDC5B0EF-6BEB-4658-A9FF-CB66F6FA6C1E}" dt="2025-06-08T21:57:22.284" v="10086" actId="571"/>
+          <ac:spMkLst>
+            <pc:docMk/>
+            <pc:sldMk cId="1584463432" sldId="260"/>
+            <ac:spMk id="21" creationId="{9AF54E53-9E8F-D545-98F3-EE0AB3A980B5}"/>
+          </ac:spMkLst>
+        </pc:spChg>
+        <pc:spChg chg="add mod">
+          <ac:chgData name="Li, Hanchen F" userId="3aee791e-6a2d-4da7-a77b-fbdf7bf15886" providerId="ADAL" clId="{CDC5B0EF-6BEB-4658-A9FF-CB66F6FA6C1E}" dt="2025-06-08T22:03:41.721" v="10255" actId="20577"/>
+          <ac:spMkLst>
+            <pc:docMk/>
+            <pc:sldMk cId="1584463432" sldId="260"/>
+            <ac:spMk id="25" creationId="{2692B16A-D6BB-9683-C102-1C280F04577D}"/>
+          </ac:spMkLst>
+        </pc:spChg>
+        <pc:spChg chg="add mod">
           <ac:chgData name="Li, Hanchen F" userId="3aee791e-6a2d-4da7-a77b-fbdf7bf15886" providerId="ADAL" clId="{CDC5B0EF-6BEB-4658-A9FF-CB66F6FA6C1E}" dt="2025-06-02T22:09:19.571" v="9897" actId="114"/>
           <ac:spMkLst>
             <pc:docMk/>
@@ -2914,6 +2946,14 @@
           </ac:grpSpMkLst>
         </pc:grpChg>
         <pc:cxnChg chg="add mod">
+          <ac:chgData name="Li, Hanchen F" userId="3aee791e-6a2d-4da7-a77b-fbdf7bf15886" providerId="ADAL" clId="{CDC5B0EF-6BEB-4658-A9FF-CB66F6FA6C1E}" dt="2025-06-08T21:59:53.482" v="10245" actId="14100"/>
+          <ac:cxnSpMkLst>
+            <pc:docMk/>
+            <pc:sldMk cId="1584463432" sldId="260"/>
+            <ac:cxnSpMk id="26" creationId="{9851B9C7-BFB3-04FB-8FA2-EAB5DE072A63}"/>
+          </ac:cxnSpMkLst>
+        </pc:cxnChg>
+        <pc:cxnChg chg="add mod">
           <ac:chgData name="Li, Hanchen F" userId="3aee791e-6a2d-4da7-a77b-fbdf7bf15886" providerId="ADAL" clId="{CDC5B0EF-6BEB-4658-A9FF-CB66F6FA6C1E}" dt="2025-05-23T20:12:59.891" v="8141" actId="1038"/>
           <ac:cxnSpMkLst>
             <pc:docMk/>
@@ -2922,7 +2962,7 @@
           </ac:cxnSpMkLst>
         </pc:cxnChg>
         <pc:cxnChg chg="add mod">
-          <ac:chgData name="Li, Hanchen F" userId="3aee791e-6a2d-4da7-a77b-fbdf7bf15886" providerId="ADAL" clId="{CDC5B0EF-6BEB-4658-A9FF-CB66F6FA6C1E}" dt="2025-05-23T20:12:59.891" v="8141" actId="1038"/>
+          <ac:chgData name="Li, Hanchen F" userId="3aee791e-6a2d-4da7-a77b-fbdf7bf15886" providerId="ADAL" clId="{CDC5B0EF-6BEB-4658-A9FF-CB66F6FA6C1E}" dt="2025-06-08T22:03:58.072" v="10257" actId="1076"/>
           <ac:cxnSpMkLst>
             <pc:docMk/>
             <pc:sldMk cId="1584463432" sldId="260"/>
@@ -2930,7 +2970,7 @@
           </ac:cxnSpMkLst>
         </pc:cxnChg>
         <pc:cxnChg chg="add mod">
-          <ac:chgData name="Li, Hanchen F" userId="3aee791e-6a2d-4da7-a77b-fbdf7bf15886" providerId="ADAL" clId="{CDC5B0EF-6BEB-4658-A9FF-CB66F6FA6C1E}" dt="2025-05-23T20:12:59.891" v="8141" actId="1038"/>
+          <ac:chgData name="Li, Hanchen F" userId="3aee791e-6a2d-4da7-a77b-fbdf7bf15886" providerId="ADAL" clId="{CDC5B0EF-6BEB-4658-A9FF-CB66F6FA6C1E}" dt="2025-06-08T22:03:51.338" v="10256" actId="1076"/>
           <ac:cxnSpMkLst>
             <pc:docMk/>
             <pc:sldMk cId="1584463432" sldId="260"/>
@@ -2938,7 +2978,7 @@
           </ac:cxnSpMkLst>
         </pc:cxnChg>
         <pc:cxnChg chg="add mod">
-          <ac:chgData name="Li, Hanchen F" userId="3aee791e-6a2d-4da7-a77b-fbdf7bf15886" providerId="ADAL" clId="{CDC5B0EF-6BEB-4658-A9FF-CB66F6FA6C1E}" dt="2025-05-23T20:12:59.891" v="8141" actId="1038"/>
+          <ac:chgData name="Li, Hanchen F" userId="3aee791e-6a2d-4da7-a77b-fbdf7bf15886" providerId="ADAL" clId="{CDC5B0EF-6BEB-4658-A9FF-CB66F6FA6C1E}" dt="2025-06-08T22:03:58.072" v="10257" actId="1076"/>
           <ac:cxnSpMkLst>
             <pc:docMk/>
             <pc:sldMk cId="1584463432" sldId="260"/>
@@ -2946,7 +2986,7 @@
           </ac:cxnSpMkLst>
         </pc:cxnChg>
         <pc:cxnChg chg="add mod">
-          <ac:chgData name="Li, Hanchen F" userId="3aee791e-6a2d-4da7-a77b-fbdf7bf15886" providerId="ADAL" clId="{CDC5B0EF-6BEB-4658-A9FF-CB66F6FA6C1E}" dt="2025-05-23T20:12:59.891" v="8141" actId="1038"/>
+          <ac:chgData name="Li, Hanchen F" userId="3aee791e-6a2d-4da7-a77b-fbdf7bf15886" providerId="ADAL" clId="{CDC5B0EF-6BEB-4658-A9FF-CB66F6FA6C1E}" dt="2025-06-08T22:03:58.072" v="10257" actId="1076"/>
           <ac:cxnSpMkLst>
             <pc:docMk/>
             <pc:sldMk cId="1584463432" sldId="260"/>
@@ -3215,7 +3255,7 @@
           <a:p>
             <a:fld id="{DF1088C5-931A-42D2-8AA4-FA289862AAD0}" type="datetimeFigureOut">
               <a:rPr lang="zh-CN" altLang="en-US" smtClean="0"/>
-              <a:t>2025/6/6</a:t>
+              <a:t>2025/6/8</a:t>
             </a:fld>
             <a:endParaRPr lang="zh-CN" altLang="en-US"/>
           </a:p>
@@ -4105,7 +4145,7 @@
           <a:p>
             <a:fld id="{3CAF1464-0EA4-453D-A90B-03B04D244405}" type="datetimeFigureOut">
               <a:rPr lang="zh-CN" altLang="en-US" smtClean="0"/>
-              <a:t>2025/6/6</a:t>
+              <a:t>2025/6/8</a:t>
             </a:fld>
             <a:endParaRPr lang="zh-CN" altLang="en-US"/>
           </a:p>
@@ -4275,7 +4315,7 @@
           <a:p>
             <a:fld id="{3CAF1464-0EA4-453D-A90B-03B04D244405}" type="datetimeFigureOut">
               <a:rPr lang="zh-CN" altLang="en-US" smtClean="0"/>
-              <a:t>2025/6/6</a:t>
+              <a:t>2025/6/8</a:t>
             </a:fld>
             <a:endParaRPr lang="zh-CN" altLang="en-US"/>
           </a:p>
@@ -4455,7 +4495,7 @@
           <a:p>
             <a:fld id="{3CAF1464-0EA4-453D-A90B-03B04D244405}" type="datetimeFigureOut">
               <a:rPr lang="zh-CN" altLang="en-US" smtClean="0"/>
-              <a:t>2025/6/6</a:t>
+              <a:t>2025/6/8</a:t>
             </a:fld>
             <a:endParaRPr lang="zh-CN" altLang="en-US"/>
           </a:p>
@@ -4625,7 +4665,7 @@
           <a:p>
             <a:fld id="{3CAF1464-0EA4-453D-A90B-03B04D244405}" type="datetimeFigureOut">
               <a:rPr lang="zh-CN" altLang="en-US" smtClean="0"/>
-              <a:t>2025/6/6</a:t>
+              <a:t>2025/6/8</a:t>
             </a:fld>
             <a:endParaRPr lang="zh-CN" altLang="en-US"/>
           </a:p>
@@ -4871,7 +4911,7 @@
           <a:p>
             <a:fld id="{3CAF1464-0EA4-453D-A90B-03B04D244405}" type="datetimeFigureOut">
               <a:rPr lang="zh-CN" altLang="en-US" smtClean="0"/>
-              <a:t>2025/6/6</a:t>
+              <a:t>2025/6/8</a:t>
             </a:fld>
             <a:endParaRPr lang="zh-CN" altLang="en-US"/>
           </a:p>
@@ -5103,7 +5143,7 @@
           <a:p>
             <a:fld id="{3CAF1464-0EA4-453D-A90B-03B04D244405}" type="datetimeFigureOut">
               <a:rPr lang="zh-CN" altLang="en-US" smtClean="0"/>
-              <a:t>2025/6/6</a:t>
+              <a:t>2025/6/8</a:t>
             </a:fld>
             <a:endParaRPr lang="zh-CN" altLang="en-US"/>
           </a:p>
@@ -5470,7 +5510,7 @@
           <a:p>
             <a:fld id="{3CAF1464-0EA4-453D-A90B-03B04D244405}" type="datetimeFigureOut">
               <a:rPr lang="zh-CN" altLang="en-US" smtClean="0"/>
-              <a:t>2025/6/6</a:t>
+              <a:t>2025/6/8</a:t>
             </a:fld>
             <a:endParaRPr lang="zh-CN" altLang="en-US"/>
           </a:p>
@@ -5588,7 +5628,7 @@
           <a:p>
             <a:fld id="{3CAF1464-0EA4-453D-A90B-03B04D244405}" type="datetimeFigureOut">
               <a:rPr lang="zh-CN" altLang="en-US" smtClean="0"/>
-              <a:t>2025/6/6</a:t>
+              <a:t>2025/6/8</a:t>
             </a:fld>
             <a:endParaRPr lang="zh-CN" altLang="en-US"/>
           </a:p>
@@ -5683,7 +5723,7 @@
           <a:p>
             <a:fld id="{3CAF1464-0EA4-453D-A90B-03B04D244405}" type="datetimeFigureOut">
               <a:rPr lang="zh-CN" altLang="en-US" smtClean="0"/>
-              <a:t>2025/6/6</a:t>
+              <a:t>2025/6/8</a:t>
             </a:fld>
             <a:endParaRPr lang="zh-CN" altLang="en-US"/>
           </a:p>
@@ -5960,7 +6000,7 @@
           <a:p>
             <a:fld id="{3CAF1464-0EA4-453D-A90B-03B04D244405}" type="datetimeFigureOut">
               <a:rPr lang="zh-CN" altLang="en-US" smtClean="0"/>
-              <a:t>2025/6/6</a:t>
+              <a:t>2025/6/8</a:t>
             </a:fld>
             <a:endParaRPr lang="zh-CN" altLang="en-US"/>
           </a:p>
@@ -6217,7 +6257,7 @@
           <a:p>
             <a:fld id="{3CAF1464-0EA4-453D-A90B-03B04D244405}" type="datetimeFigureOut">
               <a:rPr lang="zh-CN" altLang="en-US" smtClean="0"/>
-              <a:t>2025/6/6</a:t>
+              <a:t>2025/6/8</a:t>
             </a:fld>
             <a:endParaRPr lang="zh-CN" altLang="en-US"/>
           </a:p>
@@ -6430,7 +6470,7 @@
           <a:p>
             <a:fld id="{3CAF1464-0EA4-453D-A90B-03B04D244405}" type="datetimeFigureOut">
               <a:rPr lang="zh-CN" altLang="en-US" smtClean="0"/>
-              <a:t>2025/6/6</a:t>
+              <a:t>2025/6/8</a:t>
             </a:fld>
             <a:endParaRPr lang="zh-CN" altLang="en-US"/>
           </a:p>
@@ -23678,7 +23718,7 @@
         </p:nvSpPr>
         <p:spPr>
           <a:xfrm>
-            <a:off x="123576" y="3105414"/>
+            <a:off x="123576" y="3409018"/>
             <a:ext cx="2450486" cy="647171"/>
           </a:xfrm>
           <a:prstGeom prst="rect">
@@ -23984,7 +24024,7 @@
         </p:nvSpPr>
         <p:spPr>
           <a:xfrm>
-            <a:off x="123576" y="4013084"/>
+            <a:off x="123576" y="4282113"/>
             <a:ext cx="2450486" cy="647171"/>
           </a:xfrm>
           <a:prstGeom prst="rect">
@@ -25928,7 +25968,7 @@
         <p:spPr>
           <a:xfrm flipV="1">
             <a:off x="2574062" y="3732603"/>
-            <a:ext cx="696234" cy="604067"/>
+            <a:ext cx="696234" cy="873096"/>
           </a:xfrm>
           <a:prstGeom prst="bentConnector3">
             <a:avLst>
@@ -25976,7 +26016,7 @@
         <p:spPr>
           <a:xfrm flipV="1">
             <a:off x="2574062" y="2612949"/>
-            <a:ext cx="691961" cy="816051"/>
+            <a:ext cx="691961" cy="1119655"/>
           </a:xfrm>
           <a:prstGeom prst="bentConnector3">
             <a:avLst>
@@ -26023,8 +26063,8 @@
         </p:nvCxnSpPr>
         <p:spPr>
           <a:xfrm>
-            <a:off x="2574062" y="4336670"/>
-            <a:ext cx="691961" cy="537291"/>
+            <a:off x="2574062" y="4605699"/>
+            <a:ext cx="691961" cy="268262"/>
           </a:xfrm>
           <a:prstGeom prst="bentConnector3">
             <a:avLst>
@@ -26072,7 +26112,7 @@
         <p:spPr>
           <a:xfrm flipV="1">
             <a:off x="2574062" y="2612949"/>
-            <a:ext cx="691961" cy="1723721"/>
+            <a:ext cx="691961" cy="1992750"/>
           </a:xfrm>
           <a:prstGeom prst="bentConnector3">
             <a:avLst>
@@ -27016,6 +27056,216 @@
           </a:p>
         </p:txBody>
       </p:sp>
+      <p:sp>
+        <p:nvSpPr>
+          <p:cNvPr id="25" name="矩形 24">
+            <a:extLst>
+              <a:ext uri="{FF2B5EF4-FFF2-40B4-BE49-F238E27FC236}">
+                <a16:creationId xmlns:a16="http://schemas.microsoft.com/office/drawing/2014/main" id="{2692B16A-D6BB-9683-C102-1C280F04577D}"/>
+              </a:ext>
+            </a:extLst>
+          </p:cNvPr>
+          <p:cNvSpPr/>
+          <p:nvPr/>
+        </p:nvSpPr>
+        <p:spPr>
+          <a:xfrm>
+            <a:off x="123576" y="2535923"/>
+            <a:ext cx="2450486" cy="647171"/>
+          </a:xfrm>
+          <a:prstGeom prst="rect">
+            <a:avLst/>
+          </a:prstGeom>
+          <a:solidFill>
+            <a:schemeClr val="bg1"/>
+          </a:solidFill>
+          <a:ln w="19050">
+            <a:solidFill>
+              <a:schemeClr val="tx1"/>
+            </a:solidFill>
+          </a:ln>
+        </p:spPr>
+        <p:style>
+          <a:lnRef idx="2">
+            <a:schemeClr val="accent1">
+              <a:shade val="50000"/>
+            </a:schemeClr>
+          </a:lnRef>
+          <a:fillRef idx="1">
+            <a:schemeClr val="accent1"/>
+          </a:fillRef>
+          <a:effectRef idx="0">
+            <a:schemeClr val="accent1"/>
+          </a:effectRef>
+          <a:fontRef idx="minor">
+            <a:schemeClr val="lt1"/>
+          </a:fontRef>
+        </p:style>
+        <p:txBody>
+          <a:bodyPr rtlCol="0" anchor="ctr"/>
+          <a:lstStyle/>
+          <a:p>
+            <a:pPr algn="ctr"/>
+            <a:r>
+              <a:rPr lang="en-US" altLang="zh-CN" sz="1400" dirty="0">
+                <a:solidFill>
+                  <a:schemeClr val="tx1"/>
+                </a:solidFill>
+                <a:latin typeface="Times New Roman" panose="02020603050405020304" pitchFamily="18" charset="0"/>
+                <a:cs typeface="Times New Roman" panose="02020603050405020304" pitchFamily="18" charset="0"/>
+              </a:rPr>
+              <a:t>Atmosphere</a:t>
+            </a:r>
+            <a:endParaRPr lang="en-GB" sz="1400" i="1" noProof="0" dirty="0">
+              <a:solidFill>
+                <a:schemeClr val="tx1"/>
+              </a:solidFill>
+              <a:latin typeface="Times New Roman" panose="02020603050405020304" pitchFamily="18" charset="0"/>
+              <a:cs typeface="Times New Roman" panose="02020603050405020304" pitchFamily="18" charset="0"/>
+            </a:endParaRPr>
+          </a:p>
+          <a:p>
+            <a:pPr algn="ctr"/>
+            <a:r>
+              <a:rPr lang="en-GB" sz="1600" dirty="0">
+                <a:solidFill>
+                  <a:schemeClr val="tx1"/>
+                </a:solidFill>
+                <a:latin typeface="Times New Roman" panose="02020603050405020304" pitchFamily="18" charset="0"/>
+                <a:cs typeface="Times New Roman" panose="02020603050405020304" pitchFamily="18" charset="0"/>
+              </a:rPr>
+              <a:t>[</a:t>
+            </a:r>
+            <a:r>
+              <a:rPr lang="el-GR" sz="1600" i="1" dirty="0">
+                <a:solidFill>
+                  <a:schemeClr val="tx1"/>
+                </a:solidFill>
+                <a:latin typeface="Times New Roman" panose="02020603050405020304" pitchFamily="18" charset="0"/>
+                <a:ea typeface="等线" panose="02010600030101010101" pitchFamily="2" charset="-122"/>
+                <a:cs typeface="Times New Roman" panose="02020603050405020304" pitchFamily="18" charset="0"/>
+              </a:rPr>
+              <a:t>ρ</a:t>
+            </a:r>
+            <a:r>
+              <a:rPr lang="en-GB" sz="1600" dirty="0">
+                <a:solidFill>
+                  <a:schemeClr val="tx1"/>
+                </a:solidFill>
+                <a:latin typeface="Times New Roman" panose="02020603050405020304" pitchFamily="18" charset="0"/>
+                <a:cs typeface="Times New Roman" panose="02020603050405020304" pitchFamily="18" charset="0"/>
+              </a:rPr>
+              <a:t>, </a:t>
+            </a:r>
+            <a:r>
+              <a:rPr lang="en-GB" sz="1600" i="1" dirty="0">
+                <a:solidFill>
+                  <a:schemeClr val="tx1"/>
+                </a:solidFill>
+                <a:latin typeface="Times New Roman" panose="02020603050405020304" pitchFamily="18" charset="0"/>
+                <a:cs typeface="Times New Roman" panose="02020603050405020304" pitchFamily="18" charset="0"/>
+              </a:rPr>
+              <a:t>a</a:t>
+            </a:r>
+            <a:r>
+              <a:rPr lang="en-GB" sz="1600" dirty="0">
+                <a:solidFill>
+                  <a:schemeClr val="tx1"/>
+                </a:solidFill>
+                <a:latin typeface="Times New Roman" panose="02020603050405020304" pitchFamily="18" charset="0"/>
+                <a:cs typeface="Times New Roman" panose="02020603050405020304" pitchFamily="18" charset="0"/>
+              </a:rPr>
+              <a:t>, </a:t>
+            </a:r>
+            <a:r>
+              <a:rPr lang="el-GR" sz="1600" i="1" dirty="0">
+                <a:solidFill>
+                  <a:schemeClr val="tx1"/>
+                </a:solidFill>
+                <a:latin typeface="Times New Roman" panose="02020603050405020304" pitchFamily="18" charset="0"/>
+                <a:cs typeface="Times New Roman" panose="02020603050405020304" pitchFamily="18" charset="0"/>
+              </a:rPr>
+              <a:t>μ</a:t>
+            </a:r>
+            <a:r>
+              <a:rPr lang="en-US" sz="1600" dirty="0">
+                <a:solidFill>
+                  <a:schemeClr val="tx1"/>
+                </a:solidFill>
+                <a:latin typeface="Times New Roman" panose="02020603050405020304" pitchFamily="18" charset="0"/>
+                <a:ea typeface="等线" panose="02010600030101010101" pitchFamily="2" charset="-122"/>
+                <a:cs typeface="Times New Roman" panose="02020603050405020304" pitchFamily="18" charset="0"/>
+              </a:rPr>
+              <a:t>]</a:t>
+            </a:r>
+            <a:r>
+              <a:rPr lang="en-GB" sz="1600" dirty="0">
+                <a:solidFill>
+                  <a:schemeClr val="tx1"/>
+                </a:solidFill>
+                <a:latin typeface="Times New Roman" panose="02020603050405020304" pitchFamily="18" charset="0"/>
+                <a:cs typeface="Times New Roman" panose="02020603050405020304" pitchFamily="18" charset="0"/>
+              </a:rPr>
+              <a:t> </a:t>
+            </a:r>
+            <a:endParaRPr lang="en-GB" sz="1600" noProof="0" dirty="0">
+              <a:solidFill>
+                <a:schemeClr val="tx1"/>
+              </a:solidFill>
+              <a:latin typeface="Times New Roman" panose="02020603050405020304" pitchFamily="18" charset="0"/>
+              <a:cs typeface="Times New Roman" panose="02020603050405020304" pitchFamily="18" charset="0"/>
+            </a:endParaRPr>
+          </a:p>
+        </p:txBody>
+      </p:sp>
+      <p:cxnSp>
+        <p:nvCxnSpPr>
+          <p:cNvPr id="26" name="连接符: 肘形 25">
+            <a:extLst>
+              <a:ext uri="{FF2B5EF4-FFF2-40B4-BE49-F238E27FC236}">
+                <a16:creationId xmlns:a16="http://schemas.microsoft.com/office/drawing/2014/main" id="{9851B9C7-BFB3-04FB-8FA2-EAB5DE072A63}"/>
+              </a:ext>
+            </a:extLst>
+          </p:cNvPr>
+          <p:cNvCxnSpPr>
+            <a:cxnSpLocks/>
+            <a:stCxn id="25" idx="3"/>
+            <a:endCxn id="15" idx="1"/>
+          </p:cNvCxnSpPr>
+          <p:nvPr/>
+        </p:nvCxnSpPr>
+        <p:spPr>
+          <a:xfrm flipV="1">
+            <a:off x="2574062" y="2612949"/>
+            <a:ext cx="691961" cy="246560"/>
+          </a:xfrm>
+          <a:prstGeom prst="bentConnector3">
+            <a:avLst>
+              <a:gd name="adj1" fmla="val 50000"/>
+            </a:avLst>
+          </a:prstGeom>
+          <a:ln w="12700">
+            <a:solidFill>
+              <a:schemeClr val="tx1"/>
+            </a:solidFill>
+            <a:tailEnd type="triangle"/>
+          </a:ln>
+        </p:spPr>
+        <p:style>
+          <a:lnRef idx="2">
+            <a:schemeClr val="accent1"/>
+          </a:lnRef>
+          <a:fillRef idx="0">
+            <a:schemeClr val="accent1"/>
+          </a:fillRef>
+          <a:effectRef idx="1">
+            <a:schemeClr val="accent1"/>
+          </a:effectRef>
+          <a:fontRef idx="minor">
+            <a:schemeClr val="tx1"/>
+          </a:fontRef>
+        </p:style>
+      </p:cxnSp>
     </p:spTree>
     <p:extLst>
       <p:ext uri="{BB962C8B-B14F-4D97-AF65-F5344CB8AC3E}">

--- a/HER05/01 - Mathematical Modeling/Sketch/Forces and Moments Sketch.pptx
+++ b/HER05/01 - Mathematical Modeling/Sketch/Forces and Moments Sketch.pptx
@@ -132,7 +132,7 @@
   <pc:docChgLst>
     <pc:chgData name="Li, Hanchen F" userId="3aee791e-6a2d-4da7-a77b-fbdf7bf15886" providerId="ADAL" clId="{CDC5B0EF-6BEB-4658-A9FF-CB66F6FA6C1E}"/>
     <pc:docChg chg="undo redo custSel addSld delSld modSld modMainMaster modNotesMaster">
-      <pc:chgData name="Li, Hanchen F" userId="3aee791e-6a2d-4da7-a77b-fbdf7bf15886" providerId="ADAL" clId="{CDC5B0EF-6BEB-4658-A9FF-CB66F6FA6C1E}" dt="2025-06-08T22:03:58.072" v="10257" actId="1076"/>
+      <pc:chgData name="Li, Hanchen F" userId="3aee791e-6a2d-4da7-a77b-fbdf7bf15886" providerId="ADAL" clId="{CDC5B0EF-6BEB-4658-A9FF-CB66F6FA6C1E}" dt="2025-06-13T18:22:41.691" v="10259" actId="1076"/>
       <pc:docMkLst>
         <pc:docMk/>
       </pc:docMkLst>
@@ -2764,7 +2764,7 @@
         </pc:cxnChg>
       </pc:sldChg>
       <pc:sldChg chg="addSp delSp modSp add mod">
-        <pc:chgData name="Li, Hanchen F" userId="3aee791e-6a2d-4da7-a77b-fbdf7bf15886" providerId="ADAL" clId="{CDC5B0EF-6BEB-4658-A9FF-CB66F6FA6C1E}" dt="2025-06-08T22:03:58.072" v="10257" actId="1076"/>
+        <pc:chgData name="Li, Hanchen F" userId="3aee791e-6a2d-4da7-a77b-fbdf7bf15886" providerId="ADAL" clId="{CDC5B0EF-6BEB-4658-A9FF-CB66F6FA6C1E}" dt="2025-06-13T18:22:41.691" v="10259" actId="1076"/>
         <pc:sldMkLst>
           <pc:docMk/>
           <pc:sldMk cId="1584463432" sldId="260"/>
@@ -2777,14 +2777,6 @@
             <ac:spMk id="2" creationId="{AAF2876B-BAD6-F898-5EFF-FA8340A43036}"/>
           </ac:spMkLst>
         </pc:spChg>
-        <pc:spChg chg="add del mod">
-          <ac:chgData name="Li, Hanchen F" userId="3aee791e-6a2d-4da7-a77b-fbdf7bf15886" providerId="ADAL" clId="{CDC5B0EF-6BEB-4658-A9FF-CB66F6FA6C1E}" dt="2025-06-08T21:57:36.244" v="10146" actId="478"/>
-          <ac:spMkLst>
-            <pc:docMk/>
-            <pc:sldMk cId="1584463432" sldId="260"/>
-            <ac:spMk id="3" creationId="{1B937753-0BDE-F60D-339F-D81BBBE7EBAB}"/>
-          </ac:spMkLst>
-        </pc:spChg>
         <pc:spChg chg="add mod">
           <ac:chgData name="Li, Hanchen F" userId="3aee791e-6a2d-4da7-a77b-fbdf7bf15886" providerId="ADAL" clId="{CDC5B0EF-6BEB-4658-A9FF-CB66F6FA6C1E}" dt="2025-06-08T22:03:58.072" v="10257" actId="1076"/>
           <ac:spMkLst>
@@ -2810,22 +2802,6 @@
           </ac:spMkLst>
         </pc:spChg>
         <pc:spChg chg="add mod">
-          <ac:chgData name="Li, Hanchen F" userId="3aee791e-6a2d-4da7-a77b-fbdf7bf15886" providerId="ADAL" clId="{CDC5B0EF-6BEB-4658-A9FF-CB66F6FA6C1E}" dt="2025-06-08T21:57:13.214" v="10080" actId="571"/>
-          <ac:spMkLst>
-            <pc:docMk/>
-            <pc:sldMk cId="1584463432" sldId="260"/>
-            <ac:spMk id="16" creationId="{B141FC4A-9E16-2DA4-0B50-3B1EE6A7CECD}"/>
-          </ac:spMkLst>
-        </pc:spChg>
-        <pc:spChg chg="add mod">
-          <ac:chgData name="Li, Hanchen F" userId="3aee791e-6a2d-4da7-a77b-fbdf7bf15886" providerId="ADAL" clId="{CDC5B0EF-6BEB-4658-A9FF-CB66F6FA6C1E}" dt="2025-06-08T21:57:22.284" v="10086" actId="571"/>
-          <ac:spMkLst>
-            <pc:docMk/>
-            <pc:sldMk cId="1584463432" sldId="260"/>
-            <ac:spMk id="21" creationId="{9AF54E53-9E8F-D545-98F3-EE0AB3A980B5}"/>
-          </ac:spMkLst>
-        </pc:spChg>
-        <pc:spChg chg="add mod">
           <ac:chgData name="Li, Hanchen F" userId="3aee791e-6a2d-4da7-a77b-fbdf7bf15886" providerId="ADAL" clId="{CDC5B0EF-6BEB-4658-A9FF-CB66F6FA6C1E}" dt="2025-06-08T22:03:41.721" v="10255" actId="20577"/>
           <ac:spMkLst>
             <pc:docMk/>
@@ -2874,7 +2850,7 @@
           </ac:spMkLst>
         </pc:spChg>
         <pc:spChg chg="add mod">
-          <ac:chgData name="Li, Hanchen F" userId="3aee791e-6a2d-4da7-a77b-fbdf7bf15886" providerId="ADAL" clId="{CDC5B0EF-6BEB-4658-A9FF-CB66F6FA6C1E}" dt="2025-05-23T16:42:25.130" v="7707" actId="1038"/>
+          <ac:chgData name="Li, Hanchen F" userId="3aee791e-6a2d-4da7-a77b-fbdf7bf15886" providerId="ADAL" clId="{CDC5B0EF-6BEB-4658-A9FF-CB66F6FA6C1E}" dt="2025-06-13T18:22:25.472" v="10258" actId="1076"/>
           <ac:spMkLst>
             <pc:docMk/>
             <pc:sldMk cId="1584463432" sldId="260"/>
@@ -2882,7 +2858,7 @@
           </ac:spMkLst>
         </pc:spChg>
         <pc:spChg chg="add mod">
-          <ac:chgData name="Li, Hanchen F" userId="3aee791e-6a2d-4da7-a77b-fbdf7bf15886" providerId="ADAL" clId="{CDC5B0EF-6BEB-4658-A9FF-CB66F6FA6C1E}" dt="2025-05-23T20:03:23.581" v="7961" actId="20577"/>
+          <ac:chgData name="Li, Hanchen F" userId="3aee791e-6a2d-4da7-a77b-fbdf7bf15886" providerId="ADAL" clId="{CDC5B0EF-6BEB-4658-A9FF-CB66F6FA6C1E}" dt="2025-06-13T18:22:41.691" v="10259" actId="1076"/>
           <ac:spMkLst>
             <pc:docMk/>
             <pc:sldMk cId="1584463432" sldId="260"/>
@@ -3002,7 +2978,7 @@
           </ac:cxnSpMkLst>
         </pc:cxnChg>
         <pc:cxnChg chg="add mod">
-          <ac:chgData name="Li, Hanchen F" userId="3aee791e-6a2d-4da7-a77b-fbdf7bf15886" providerId="ADAL" clId="{CDC5B0EF-6BEB-4658-A9FF-CB66F6FA6C1E}" dt="2025-05-23T16:42:25.130" v="7707" actId="1038"/>
+          <ac:chgData name="Li, Hanchen F" userId="3aee791e-6a2d-4da7-a77b-fbdf7bf15886" providerId="ADAL" clId="{CDC5B0EF-6BEB-4658-A9FF-CB66F6FA6C1E}" dt="2025-06-13T18:22:41.691" v="10259" actId="1076"/>
           <ac:cxnSpMkLst>
             <pc:docMk/>
             <pc:sldMk cId="1584463432" sldId="260"/>
@@ -3010,7 +2986,7 @@
           </ac:cxnSpMkLst>
         </pc:cxnChg>
         <pc:cxnChg chg="add mod">
-          <ac:chgData name="Li, Hanchen F" userId="3aee791e-6a2d-4da7-a77b-fbdf7bf15886" providerId="ADAL" clId="{CDC5B0EF-6BEB-4658-A9FF-CB66F6FA6C1E}" dt="2025-05-23T20:12:59.891" v="8141" actId="1038"/>
+          <ac:chgData name="Li, Hanchen F" userId="3aee791e-6a2d-4da7-a77b-fbdf7bf15886" providerId="ADAL" clId="{CDC5B0EF-6BEB-4658-A9FF-CB66F6FA6C1E}" dt="2025-06-13T18:22:41.691" v="10259" actId="1076"/>
           <ac:cxnSpMkLst>
             <pc:docMk/>
             <pc:sldMk cId="1584463432" sldId="260"/>
@@ -3018,7 +2994,7 @@
           </ac:cxnSpMkLst>
         </pc:cxnChg>
         <pc:cxnChg chg="add mod">
-          <ac:chgData name="Li, Hanchen F" userId="3aee791e-6a2d-4da7-a77b-fbdf7bf15886" providerId="ADAL" clId="{CDC5B0EF-6BEB-4658-A9FF-CB66F6FA6C1E}" dt="2025-05-23T20:09:51.216" v="7970" actId="14100"/>
+          <ac:chgData name="Li, Hanchen F" userId="3aee791e-6a2d-4da7-a77b-fbdf7bf15886" providerId="ADAL" clId="{CDC5B0EF-6BEB-4658-A9FF-CB66F6FA6C1E}" dt="2025-06-13T18:22:41.691" v="10259" actId="1076"/>
           <ac:cxnSpMkLst>
             <pc:docMk/>
             <pc:sldMk cId="1584463432" sldId="260"/>
@@ -3026,7 +3002,7 @@
           </ac:cxnSpMkLst>
         </pc:cxnChg>
         <pc:cxnChg chg="add mod">
-          <ac:chgData name="Li, Hanchen F" userId="3aee791e-6a2d-4da7-a77b-fbdf7bf15886" providerId="ADAL" clId="{CDC5B0EF-6BEB-4658-A9FF-CB66F6FA6C1E}" dt="2025-05-23T20:09:31.343" v="7963" actId="1076"/>
+          <ac:chgData name="Li, Hanchen F" userId="3aee791e-6a2d-4da7-a77b-fbdf7bf15886" providerId="ADAL" clId="{CDC5B0EF-6BEB-4658-A9FF-CB66F6FA6C1E}" dt="2025-06-13T18:22:25.472" v="10258" actId="1076"/>
           <ac:cxnSpMkLst>
             <pc:docMk/>
             <pc:sldMk cId="1584463432" sldId="260"/>
@@ -3034,7 +3010,7 @@
           </ac:cxnSpMkLst>
         </pc:cxnChg>
         <pc:cxnChg chg="add mod">
-          <ac:chgData name="Li, Hanchen F" userId="3aee791e-6a2d-4da7-a77b-fbdf7bf15886" providerId="ADAL" clId="{CDC5B0EF-6BEB-4658-A9FF-CB66F6FA6C1E}" dt="2025-05-23T20:09:47.641" v="7969" actId="14100"/>
+          <ac:chgData name="Li, Hanchen F" userId="3aee791e-6a2d-4da7-a77b-fbdf7bf15886" providerId="ADAL" clId="{CDC5B0EF-6BEB-4658-A9FF-CB66F6FA6C1E}" dt="2025-06-13T18:22:25.472" v="10258" actId="1076"/>
           <ac:cxnSpMkLst>
             <pc:docMk/>
             <pc:sldMk cId="1584463432" sldId="260"/>
@@ -3255,7 +3231,7 @@
           <a:p>
             <a:fld id="{DF1088C5-931A-42D2-8AA4-FA289862AAD0}" type="datetimeFigureOut">
               <a:rPr lang="zh-CN" altLang="en-US" smtClean="0"/>
-              <a:t>2025/6/8</a:t>
+              <a:t>2025/6/13</a:t>
             </a:fld>
             <a:endParaRPr lang="zh-CN" altLang="en-US"/>
           </a:p>
@@ -4145,7 +4121,7 @@
           <a:p>
             <a:fld id="{3CAF1464-0EA4-453D-A90B-03B04D244405}" type="datetimeFigureOut">
               <a:rPr lang="zh-CN" altLang="en-US" smtClean="0"/>
-              <a:t>2025/6/8</a:t>
+              <a:t>2025/6/13</a:t>
             </a:fld>
             <a:endParaRPr lang="zh-CN" altLang="en-US"/>
           </a:p>
@@ -4315,7 +4291,7 @@
           <a:p>
             <a:fld id="{3CAF1464-0EA4-453D-A90B-03B04D244405}" type="datetimeFigureOut">
               <a:rPr lang="zh-CN" altLang="en-US" smtClean="0"/>
-              <a:t>2025/6/8</a:t>
+              <a:t>2025/6/13</a:t>
             </a:fld>
             <a:endParaRPr lang="zh-CN" altLang="en-US"/>
           </a:p>
@@ -4495,7 +4471,7 @@
           <a:p>
             <a:fld id="{3CAF1464-0EA4-453D-A90B-03B04D244405}" type="datetimeFigureOut">
               <a:rPr lang="zh-CN" altLang="en-US" smtClean="0"/>
-              <a:t>2025/6/8</a:t>
+              <a:t>2025/6/13</a:t>
             </a:fld>
             <a:endParaRPr lang="zh-CN" altLang="en-US"/>
           </a:p>
@@ -4665,7 +4641,7 @@
           <a:p>
             <a:fld id="{3CAF1464-0EA4-453D-A90B-03B04D244405}" type="datetimeFigureOut">
               <a:rPr lang="zh-CN" altLang="en-US" smtClean="0"/>
-              <a:t>2025/6/8</a:t>
+              <a:t>2025/6/13</a:t>
             </a:fld>
             <a:endParaRPr lang="zh-CN" altLang="en-US"/>
           </a:p>
@@ -4911,7 +4887,7 @@
           <a:p>
             <a:fld id="{3CAF1464-0EA4-453D-A90B-03B04D244405}" type="datetimeFigureOut">
               <a:rPr lang="zh-CN" altLang="en-US" smtClean="0"/>
-              <a:t>2025/6/8</a:t>
+              <a:t>2025/6/13</a:t>
             </a:fld>
             <a:endParaRPr lang="zh-CN" altLang="en-US"/>
           </a:p>
@@ -5143,7 +5119,7 @@
           <a:p>
             <a:fld id="{3CAF1464-0EA4-453D-A90B-03B04D244405}" type="datetimeFigureOut">
               <a:rPr lang="zh-CN" altLang="en-US" smtClean="0"/>
-              <a:t>2025/6/8</a:t>
+              <a:t>2025/6/13</a:t>
             </a:fld>
             <a:endParaRPr lang="zh-CN" altLang="en-US"/>
           </a:p>
@@ -5510,7 +5486,7 @@
           <a:p>
             <a:fld id="{3CAF1464-0EA4-453D-A90B-03B04D244405}" type="datetimeFigureOut">
               <a:rPr lang="zh-CN" altLang="en-US" smtClean="0"/>
-              <a:t>2025/6/8</a:t>
+              <a:t>2025/6/13</a:t>
             </a:fld>
             <a:endParaRPr lang="zh-CN" altLang="en-US"/>
           </a:p>
@@ -5628,7 +5604,7 @@
           <a:p>
             <a:fld id="{3CAF1464-0EA4-453D-A90B-03B04D244405}" type="datetimeFigureOut">
               <a:rPr lang="zh-CN" altLang="en-US" smtClean="0"/>
-              <a:t>2025/6/8</a:t>
+              <a:t>2025/6/13</a:t>
             </a:fld>
             <a:endParaRPr lang="zh-CN" altLang="en-US"/>
           </a:p>
@@ -5723,7 +5699,7 @@
           <a:p>
             <a:fld id="{3CAF1464-0EA4-453D-A90B-03B04D244405}" type="datetimeFigureOut">
               <a:rPr lang="zh-CN" altLang="en-US" smtClean="0"/>
-              <a:t>2025/6/8</a:t>
+              <a:t>2025/6/13</a:t>
             </a:fld>
             <a:endParaRPr lang="zh-CN" altLang="en-US"/>
           </a:p>
@@ -6000,7 +5976,7 @@
           <a:p>
             <a:fld id="{3CAF1464-0EA4-453D-A90B-03B04D244405}" type="datetimeFigureOut">
               <a:rPr lang="zh-CN" altLang="en-US" smtClean="0"/>
-              <a:t>2025/6/8</a:t>
+              <a:t>2025/6/13</a:t>
             </a:fld>
             <a:endParaRPr lang="zh-CN" altLang="en-US"/>
           </a:p>
@@ -6257,7 +6233,7 @@
           <a:p>
             <a:fld id="{3CAF1464-0EA4-453D-A90B-03B04D244405}" type="datetimeFigureOut">
               <a:rPr lang="zh-CN" altLang="en-US" smtClean="0"/>
-              <a:t>2025/6/8</a:t>
+              <a:t>2025/6/13</a:t>
             </a:fld>
             <a:endParaRPr lang="zh-CN" altLang="en-US"/>
           </a:p>
@@ -6470,7 +6446,7 @@
           <a:p>
             <a:fld id="{3CAF1464-0EA4-453D-A90B-03B04D244405}" type="datetimeFigureOut">
               <a:rPr lang="zh-CN" altLang="en-US" smtClean="0"/>
-              <a:t>2025/6/8</a:t>
+              <a:t>2025/6/13</a:t>
             </a:fld>
             <a:endParaRPr lang="zh-CN" altLang="en-US"/>
           </a:p>
@@ -25655,7 +25631,7 @@
         </p:nvSpPr>
         <p:spPr>
           <a:xfrm>
-            <a:off x="10024490" y="2697388"/>
+            <a:off x="10024490" y="2439866"/>
             <a:ext cx="2078327" cy="647171"/>
           </a:xfrm>
           <a:prstGeom prst="rect">
@@ -25809,7 +25785,7 @@
         </p:nvSpPr>
         <p:spPr>
           <a:xfrm>
-            <a:off x="10028763" y="3732603"/>
+            <a:off x="10028763" y="3656475"/>
             <a:ext cx="2074054" cy="647171"/>
           </a:xfrm>
           <a:prstGeom prst="rect">
@@ -26500,8 +26476,8 @@
         </p:nvCxnSpPr>
         <p:spPr>
           <a:xfrm flipV="1">
-            <a:off x="6777500" y="4056189"/>
-            <a:ext cx="3251263" cy="1316456"/>
+            <a:off x="6777500" y="3980061"/>
+            <a:ext cx="3251263" cy="1392584"/>
           </a:xfrm>
           <a:prstGeom prst="bentConnector3">
             <a:avLst/>
@@ -26546,8 +26522,8 @@
         </p:nvCxnSpPr>
         <p:spPr>
           <a:xfrm flipV="1">
-            <a:off x="6777500" y="4056189"/>
-            <a:ext cx="3251263" cy="817772"/>
+            <a:off x="6777500" y="3980061"/>
+            <a:ext cx="3251263" cy="893900"/>
           </a:xfrm>
           <a:prstGeom prst="bentConnector3">
             <a:avLst/>
@@ -26593,7 +26569,7 @@
         <p:spPr>
           <a:xfrm>
             <a:off x="6777500" y="3732603"/>
-            <a:ext cx="3251263" cy="323586"/>
+            <a:ext cx="3251263" cy="247458"/>
           </a:xfrm>
           <a:prstGeom prst="bentConnector3">
             <a:avLst/>
@@ -26639,7 +26615,7 @@
         <p:spPr>
           <a:xfrm>
             <a:off x="6773227" y="2612949"/>
-            <a:ext cx="3251263" cy="408025"/>
+            <a:ext cx="3251263" cy="150503"/>
           </a:xfrm>
           <a:prstGeom prst="bentConnector3">
             <a:avLst/>
@@ -26684,8 +26660,8 @@
         </p:nvCxnSpPr>
         <p:spPr>
           <a:xfrm flipV="1">
-            <a:off x="6777500" y="3020974"/>
-            <a:ext cx="3246990" cy="711629"/>
+            <a:off x="6777500" y="2763452"/>
+            <a:ext cx="3246990" cy="969151"/>
           </a:xfrm>
           <a:prstGeom prst="bentConnector3">
             <a:avLst/>
